--- a/44_心理学/28_浥尘伙伴社团原创：音乐治疗/PPT/浥尘伙伴社团原创：情绪释放疗法（EFT）心理训练.pptx
+++ b/44_心理学/28_浥尘伙伴社团原创：音乐治疗/PPT/浥尘伙伴社团原创：情绪释放疗法（EFT）心理训练.pptx
@@ -521,7 +521,7 @@
                 <a16:creationId xmlns:a16="http://schemas.microsoft.com/office/drawing/2014/main" id="{EA67E988-5919-57BB-C7DE-D3EAD38A3045}"/>
               </a:ext>
               <a:ext uri="{C183D7F6-B498-43B3-948B-1728B52AA6E4}">
-                <adec:decorative xmlns:adec="http://schemas.microsoft.com/office/drawing/2017/decorative" xmlns="" val="1"/>
+                <adec:decorative xmlns="" xmlns:adec="http://schemas.microsoft.com/office/drawing/2017/decorative" val="1"/>
               </a:ext>
             </a:extLst>
           </p:cNvPr>
@@ -3675,7 +3675,7 @@
                 <a16:creationId xmlns:a16="http://schemas.microsoft.com/office/drawing/2014/main" id="{774A975B-A886-5202-0489-6965514A0D14}"/>
               </a:ext>
               <a:ext uri="{C183D7F6-B498-43B3-948B-1728B52AA6E4}">
-                <adec:decorative xmlns:adec="http://schemas.microsoft.com/office/drawing/2017/decorative" xmlns="" val="1"/>
+                <adec:decorative xmlns="" xmlns:adec="http://schemas.microsoft.com/office/drawing/2017/decorative" val="1"/>
               </a:ext>
             </a:extLst>
           </p:cNvPr>
@@ -4104,7 +4104,7 @@
                 <a16:creationId xmlns:a16="http://schemas.microsoft.com/office/drawing/2014/main" id="{0EECA69B-4C2A-7F31-8019-E90DB3BD49CB}"/>
               </a:ext>
               <a:ext uri="{C183D7F6-B498-43B3-948B-1728B52AA6E4}">
-                <adec:decorative xmlns:adec="http://schemas.microsoft.com/office/drawing/2017/decorative" xmlns="" val="1"/>
+                <adec:decorative xmlns="" xmlns:adec="http://schemas.microsoft.com/office/drawing/2017/decorative" val="1"/>
               </a:ext>
             </a:extLst>
           </p:cNvPr>
@@ -4249,7 +4249,7 @@
                 <a16:creationId xmlns:a16="http://schemas.microsoft.com/office/drawing/2014/main" id="{857DEAC1-B3AA-6569-0A44-A191DF2F3C67}"/>
               </a:ext>
               <a:ext uri="{C183D7F6-B498-43B3-948B-1728B52AA6E4}">
-                <adec:decorative xmlns:adec="http://schemas.microsoft.com/office/drawing/2017/decorative" xmlns="" val="1"/>
+                <adec:decorative xmlns="" xmlns:adec="http://schemas.microsoft.com/office/drawing/2017/decorative" val="1"/>
               </a:ext>
             </a:extLst>
           </p:cNvPr>
@@ -4592,43 +4592,40 @@
               <a:buNone/>
             </a:pPr>
             <a:r>
-              <a:rPr lang="en-US" altLang="zh-CN" sz="1800" dirty="0">
+              <a:rPr lang="en-US" altLang="zh-CN" sz="1800" b="1" dirty="0">
                 <a:latin typeface="+mn-ea"/>
               </a:rPr>
               <a:t>2.</a:t>
             </a:r>
             <a:r>
+              <a:rPr lang="zh-CN" altLang="en-US" sz="1800" b="1" dirty="0">
+                <a:latin typeface="+mn-ea"/>
+              </a:rPr>
+              <a:t>敲击穴位</a:t>
+            </a:r>
+          </a:p>
+          <a:p>
+            <a:pPr marL="0" indent="0">
+              <a:buNone/>
+            </a:pPr>
+            <a:r>
               <a:rPr lang="zh-CN" altLang="en-US" sz="1800" dirty="0">
                 <a:latin typeface="+mn-ea"/>
               </a:rPr>
-              <a:t>敲击穴位</a:t>
-            </a:r>
-          </a:p>
-          <a:p>
-            <a:pPr marL="0" indent="0">
-              <a:buNone/>
-            </a:pPr>
+              <a:t>用两根手指依次敲击或按摩攒竹、瞳子髎、承泣、人中、承浆、俞府、檀中、百会等穴位，同时保持持续聚焦情绪的状态，敲击穴位时重复心理提示语“虽然我现在有一些（当下的情绪状态）问题，但我完完全全接受和爱自己</a:t>
+            </a:r>
+            <a:r>
+              <a:rPr lang="zh-CN" altLang="en-US" sz="1800" dirty="0" smtClean="0">
+                <a:latin typeface="+mn-ea"/>
+              </a:rPr>
+              <a:t>”</a:t>
+            </a:r>
             <a:r>
               <a:rPr lang="zh-CN" altLang="en-US" sz="1800" dirty="0">
                 <a:latin typeface="+mn-ea"/>
               </a:rPr>
-              <a:t>用两根手指依次敲击或按摩攒竹、瞳子髎、承泣、人中、承浆、俞府、檀中、百会等穴位，同时保持持续聚焦情绪的状态，敲击穴位时重复心理提示语“虽然我现在有一些（当下的情绪状态）问题，但我完完全全接受和爱自己</a:t>
-            </a:r>
-            <a:r>
-              <a:rPr lang="zh-CN" altLang="en-US" sz="1800" dirty="0" smtClean="0">
-                <a:latin typeface="+mn-ea"/>
-              </a:rPr>
-              <a:t>”</a:t>
-            </a:r>
-            <a:r>
-              <a:rPr lang="zh-CN" altLang="en-US" sz="1800" dirty="0">
-                <a:latin typeface="+mn-ea"/>
-              </a:rPr>
               <a:t>。</a:t>
             </a:r>
-            <a:endParaRPr lang="zh-CN" altLang="en-US" sz="1800" dirty="0">
-              <a:latin typeface="+mn-ea"/>
-            </a:endParaRPr>
           </a:p>
         </p:txBody>
       </p:sp>
@@ -4827,31 +4824,31 @@
               <a:buNone/>
             </a:pPr>
             <a:r>
-              <a:rPr lang="en-US" altLang="zh-CN" sz="1800" dirty="0">
+              <a:rPr lang="en-US" altLang="zh-CN" sz="1800" b="1" dirty="0">
                 <a:latin typeface="+mn-ea"/>
               </a:rPr>
               <a:t>3.NLP</a:t>
             </a:r>
             <a:r>
+              <a:rPr lang="zh-CN" altLang="en-US" sz="1800" b="1" dirty="0">
+                <a:latin typeface="+mn-ea"/>
+              </a:rPr>
+              <a:t>情绪脱敏</a:t>
+            </a:r>
+          </a:p>
+          <a:p>
+            <a:pPr marL="0" indent="0">
+              <a:buFont typeface="Arial" panose="020B0604020202020204" pitchFamily="34" charset="0"/>
+              <a:buNone/>
+            </a:pPr>
+            <a:r>
               <a:rPr lang="zh-CN" altLang="en-US" sz="1800" dirty="0">
                 <a:latin typeface="+mn-ea"/>
               </a:rPr>
-              <a:t>情绪脱敏</a:t>
-            </a:r>
-          </a:p>
-          <a:p>
-            <a:pPr marL="0" indent="0">
-              <a:buFont typeface="Arial" panose="020B0604020202020204" pitchFamily="34" charset="0"/>
-              <a:buNone/>
-            </a:pPr>
-            <a:r>
-              <a:rPr lang="zh-CN" altLang="en-US" sz="1800">
-                <a:latin typeface="+mn-ea"/>
-              </a:rPr>
               <a:t>敲击</a:t>
             </a:r>
             <a:r>
-              <a:rPr lang="zh-CN" altLang="en-US" sz="1800" smtClean="0">
+              <a:rPr lang="zh-CN" altLang="en-US" sz="1800" dirty="0" smtClean="0">
                 <a:latin typeface="+mn-ea"/>
               </a:rPr>
               <a:t>中各穴</a:t>
@@ -5084,13 +5081,13 @@
               <a:buNone/>
             </a:pPr>
             <a:r>
-              <a:rPr lang="en-US" altLang="zh-CN" sz="1800" dirty="0">
+              <a:rPr lang="en-US" altLang="zh-CN" sz="1800" b="1" dirty="0">
                 <a:latin typeface="+mn-ea"/>
               </a:rPr>
               <a:t>4.</a:t>
             </a:r>
             <a:r>
-              <a:rPr lang="zh-CN" altLang="en-US" sz="1800" dirty="0">
+              <a:rPr lang="zh-CN" altLang="en-US" sz="1800" b="1" dirty="0">
                 <a:latin typeface="+mn-ea"/>
               </a:rPr>
               <a:t>再次敲打穴位</a:t>
@@ -5165,6 +5162,33 @@
           <a:chExt cx="0" cy="0"/>
         </a:xfrm>
       </p:grpSpPr>
+      <p:pic>
+        <p:nvPicPr>
+          <p:cNvPr id="6" name="图片 5"/>
+          <p:cNvPicPr>
+            <a:picLocks noChangeAspect="1"/>
+          </p:cNvPicPr>
+          <p:nvPr/>
+        </p:nvPicPr>
+        <p:blipFill>
+          <a:blip r:embed="rId2"/>
+          <a:stretch>
+            <a:fillRect/>
+          </a:stretch>
+        </p:blipFill>
+        <p:spPr>
+          <a:xfrm>
+            <a:off x="7002218" y="4373877"/>
+            <a:ext cx="3392954" cy="2261970"/>
+          </a:xfrm>
+          <a:prstGeom prst="rect">
+            <a:avLst/>
+          </a:prstGeom>
+          <a:effectLst>
+            <a:softEdge rad="127000"/>
+          </a:effectLst>
+        </p:spPr>
+      </p:pic>
       <p:sp>
         <p:nvSpPr>
           <p:cNvPr id="2" name="标题 1">
@@ -5228,7 +5252,7 @@
         </p:nvSpPr>
         <p:spPr>
           <a:xfrm>
-            <a:off x="515113" y="1576785"/>
+            <a:off x="524257" y="1576785"/>
             <a:ext cx="5574791" cy="3989337"/>
           </a:xfrm>
         </p:spPr>
@@ -5240,10 +5264,16 @@
               <a:buNone/>
             </a:pPr>
             <a:r>
-              <a:rPr lang="zh-CN" altLang="en-US" sz="1800" dirty="0">
-                <a:latin typeface="+mn-ea"/>
-              </a:rPr>
-              <a:t>热身环节</a:t>
+              <a:rPr lang="zh-CN" altLang="en-US" sz="1800" b="1" dirty="0" smtClean="0">
+                <a:latin typeface="+mn-ea"/>
+              </a:rPr>
+              <a:t>热身</a:t>
+            </a:r>
+            <a:r>
+              <a:rPr lang="zh-CN" altLang="en-US" sz="1800" b="1" dirty="0">
+                <a:latin typeface="+mn-ea"/>
+              </a:rPr>
+              <a:t>环节</a:t>
             </a:r>
           </a:p>
           <a:p>
@@ -5363,215 +5393,6 @@
             <a:endParaRPr lang="en-US" altLang="zh-CN" sz="1800" dirty="0">
               <a:latin typeface="+mn-ea"/>
             </a:endParaRPr>
-          </a:p>
-        </p:txBody>
-      </p:sp>
-      <p:sp>
-        <p:nvSpPr>
-          <p:cNvPr id="14" name="内容占位符 2">
-            <a:extLst>
-              <a:ext uri="{FF2B5EF4-FFF2-40B4-BE49-F238E27FC236}">
-                <a16:creationId xmlns:a16="http://schemas.microsoft.com/office/drawing/2014/main" id="{5D4BAE04-8616-9958-3637-F6DE8BD5E074}"/>
-              </a:ext>
-            </a:extLst>
-          </p:cNvPr>
-          <p:cNvSpPr txBox="1">
-            <a:spLocks/>
-          </p:cNvSpPr>
-          <p:nvPr/>
-        </p:nvSpPr>
-        <p:spPr>
-          <a:xfrm>
-            <a:off x="264035" y="5566122"/>
-            <a:ext cx="4779454" cy="757207"/>
-          </a:xfrm>
-          <a:prstGeom prst="rect">
-            <a:avLst/>
-          </a:prstGeom>
-        </p:spPr>
-        <p:txBody>
-          <a:bodyPr lIns="109728" tIns="109728" rIns="109728" bIns="91440"/>
-          <a:lstStyle>
-            <a:lvl1pPr marL="228600" indent="-228600" algn="l" defTabSz="914400" rtl="0" eaLnBrk="1" latinLnBrk="0" hangingPunct="1">
-              <a:lnSpc>
-                <a:spcPct val="125000"/>
-              </a:lnSpc>
-              <a:spcBef>
-                <a:spcPts val="1000"/>
-              </a:spcBef>
-              <a:buFont typeface="Arial" panose="020B0604020202020204" pitchFamily="34" charset="0"/>
-              <a:buChar char="•"/>
-              <a:defRPr sz="1600" kern="1200" spc="160">
-                <a:solidFill>
-                  <a:schemeClr val="tx1"/>
-                </a:solidFill>
-                <a:latin typeface="+mn-lt"/>
-                <a:ea typeface="+mn-ea"/>
-                <a:cs typeface="+mn-cs"/>
-              </a:defRPr>
-            </a:lvl1pPr>
-            <a:lvl2pPr marL="685800" indent="-228600" algn="l" defTabSz="914400" rtl="0" eaLnBrk="1" latinLnBrk="0" hangingPunct="1">
-              <a:lnSpc>
-                <a:spcPct val="125000"/>
-              </a:lnSpc>
-              <a:spcBef>
-                <a:spcPts val="500"/>
-              </a:spcBef>
-              <a:buFont typeface="Arial" panose="020B0604020202020204" pitchFamily="34" charset="0"/>
-              <a:buChar char="•"/>
-              <a:defRPr sz="1600" kern="1200" spc="160">
-                <a:solidFill>
-                  <a:schemeClr val="tx1"/>
-                </a:solidFill>
-                <a:latin typeface="+mn-lt"/>
-                <a:ea typeface="+mn-ea"/>
-                <a:cs typeface="+mn-cs"/>
-              </a:defRPr>
-            </a:lvl2pPr>
-            <a:lvl3pPr marL="1143000" indent="-228600" algn="l" defTabSz="914400" rtl="0" eaLnBrk="1" latinLnBrk="0" hangingPunct="1">
-              <a:lnSpc>
-                <a:spcPct val="125000"/>
-              </a:lnSpc>
-              <a:spcBef>
-                <a:spcPts val="500"/>
-              </a:spcBef>
-              <a:buFont typeface="Arial" panose="020B0604020202020204" pitchFamily="34" charset="0"/>
-              <a:buChar char="•"/>
-              <a:defRPr sz="1600" kern="1200" spc="160">
-                <a:solidFill>
-                  <a:schemeClr val="tx1"/>
-                </a:solidFill>
-                <a:latin typeface="+mn-lt"/>
-                <a:ea typeface="+mn-ea"/>
-                <a:cs typeface="+mn-cs"/>
-              </a:defRPr>
-            </a:lvl3pPr>
-            <a:lvl4pPr marL="1600200" indent="-228600" algn="l" defTabSz="914400" rtl="0" eaLnBrk="1" latinLnBrk="0" hangingPunct="1">
-              <a:lnSpc>
-                <a:spcPct val="125000"/>
-              </a:lnSpc>
-              <a:spcBef>
-                <a:spcPts val="500"/>
-              </a:spcBef>
-              <a:buFont typeface="Arial" panose="020B0604020202020204" pitchFamily="34" charset="0"/>
-              <a:buChar char="•"/>
-              <a:defRPr sz="1600" kern="1200" spc="160">
-                <a:solidFill>
-                  <a:schemeClr val="tx1"/>
-                </a:solidFill>
-                <a:latin typeface="+mn-lt"/>
-                <a:ea typeface="+mn-ea"/>
-                <a:cs typeface="+mn-cs"/>
-              </a:defRPr>
-            </a:lvl4pPr>
-            <a:lvl5pPr marL="2057400" indent="-228600" algn="l" defTabSz="914400" rtl="0" eaLnBrk="1" latinLnBrk="0" hangingPunct="1">
-              <a:lnSpc>
-                <a:spcPct val="125000"/>
-              </a:lnSpc>
-              <a:spcBef>
-                <a:spcPts val="500"/>
-              </a:spcBef>
-              <a:buFont typeface="Arial" panose="020B0604020202020204" pitchFamily="34" charset="0"/>
-              <a:buChar char="•"/>
-              <a:defRPr sz="1600" kern="1200" spc="160">
-                <a:solidFill>
-                  <a:schemeClr val="tx1"/>
-                </a:solidFill>
-                <a:latin typeface="+mn-lt"/>
-                <a:ea typeface="+mn-ea"/>
-                <a:cs typeface="+mn-cs"/>
-              </a:defRPr>
-            </a:lvl5pPr>
-            <a:lvl6pPr marL="2514600" indent="-228600" algn="l" defTabSz="914400" rtl="0" eaLnBrk="1" latinLnBrk="0" hangingPunct="1">
-              <a:lnSpc>
-                <a:spcPct val="90000"/>
-              </a:lnSpc>
-              <a:spcBef>
-                <a:spcPts val="500"/>
-              </a:spcBef>
-              <a:buFont typeface="Arial" panose="020B0604020202020204" pitchFamily="34" charset="0"/>
-              <a:buChar char="•"/>
-              <a:defRPr sz="1800" kern="1200">
-                <a:solidFill>
-                  <a:schemeClr val="tx1"/>
-                </a:solidFill>
-                <a:latin typeface="+mn-lt"/>
-                <a:ea typeface="+mn-ea"/>
-                <a:cs typeface="+mn-cs"/>
-              </a:defRPr>
-            </a:lvl6pPr>
-            <a:lvl7pPr marL="2971800" indent="-228600" algn="l" defTabSz="914400" rtl="0" eaLnBrk="1" latinLnBrk="0" hangingPunct="1">
-              <a:lnSpc>
-                <a:spcPct val="90000"/>
-              </a:lnSpc>
-              <a:spcBef>
-                <a:spcPts val="500"/>
-              </a:spcBef>
-              <a:buFont typeface="Arial" panose="020B0604020202020204" pitchFamily="34" charset="0"/>
-              <a:buChar char="•"/>
-              <a:defRPr sz="1800" kern="1200">
-                <a:solidFill>
-                  <a:schemeClr val="tx1"/>
-                </a:solidFill>
-                <a:latin typeface="+mn-lt"/>
-                <a:ea typeface="+mn-ea"/>
-                <a:cs typeface="+mn-cs"/>
-              </a:defRPr>
-            </a:lvl7pPr>
-            <a:lvl8pPr marL="3429000" indent="-228600" algn="l" defTabSz="914400" rtl="0" eaLnBrk="1" latinLnBrk="0" hangingPunct="1">
-              <a:lnSpc>
-                <a:spcPct val="90000"/>
-              </a:lnSpc>
-              <a:spcBef>
-                <a:spcPts val="500"/>
-              </a:spcBef>
-              <a:buFont typeface="Arial" panose="020B0604020202020204" pitchFamily="34" charset="0"/>
-              <a:buChar char="•"/>
-              <a:defRPr sz="1800" kern="1200">
-                <a:solidFill>
-                  <a:schemeClr val="tx1"/>
-                </a:solidFill>
-                <a:latin typeface="+mn-lt"/>
-                <a:ea typeface="+mn-ea"/>
-                <a:cs typeface="+mn-cs"/>
-              </a:defRPr>
-            </a:lvl8pPr>
-            <a:lvl9pPr marL="3886200" indent="-228600" algn="l" defTabSz="914400" rtl="0" eaLnBrk="1" latinLnBrk="0" hangingPunct="1">
-              <a:lnSpc>
-                <a:spcPct val="90000"/>
-              </a:lnSpc>
-              <a:spcBef>
-                <a:spcPts val="500"/>
-              </a:spcBef>
-              <a:buFont typeface="Arial" panose="020B0604020202020204" pitchFamily="34" charset="0"/>
-              <a:buChar char="•"/>
-              <a:defRPr sz="1800" kern="1200">
-                <a:solidFill>
-                  <a:schemeClr val="tx1"/>
-                </a:solidFill>
-                <a:latin typeface="+mn-lt"/>
-                <a:ea typeface="+mn-ea"/>
-                <a:cs typeface="+mn-cs"/>
-              </a:defRPr>
-            </a:lvl9pPr>
-          </a:lstStyle>
-          <a:p>
-            <a:pPr marL="0" indent="0">
-              <a:buNone/>
-            </a:pPr>
-            <a:r>
-              <a:rPr lang="zh-CN" altLang="en-US" sz="3200" dirty="0">
-                <a:effectLst>
-                  <a:outerShdw blurRad="38100" dist="38100" dir="2700000" algn="tl">
-                    <a:srgbClr val="000000">
-                      <a:alpha val="43137"/>
-                    </a:srgbClr>
-                  </a:outerShdw>
-                </a:effectLst>
-                <a:latin typeface="+mn-ea"/>
-              </a:rPr>
-              <a:t>热身环节</a:t>
-            </a:r>
           </a:p>
         </p:txBody>
       </p:sp>
@@ -5591,7 +5412,7 @@
         </p:nvSpPr>
         <p:spPr>
           <a:xfrm>
-            <a:off x="6102096" y="1599392"/>
+            <a:off x="6092953" y="1599392"/>
             <a:ext cx="5586984" cy="3989337"/>
           </a:xfrm>
           <a:prstGeom prst="rect">
@@ -5797,7 +5618,19 @@
               <a:rPr lang="zh-CN" altLang="en-US" sz="1800" dirty="0">
                 <a:latin typeface="+mn-ea"/>
               </a:rPr>
-              <a:t>做法：用一只手持续轻敲**手腕内侧（备用穴位 </a:t>
+              <a:t>做法：用一只手持续轻</a:t>
+            </a:r>
+            <a:r>
+              <a:rPr lang="zh-CN" altLang="en-US" sz="1800" dirty="0" smtClean="0">
+                <a:latin typeface="+mn-ea"/>
+              </a:rPr>
+              <a:t>敲手腕</a:t>
+            </a:r>
+            <a:r>
+              <a:rPr lang="zh-CN" altLang="en-US" sz="1800" dirty="0">
+                <a:latin typeface="+mn-ea"/>
+              </a:rPr>
+              <a:t>内侧（备用穴位 </a:t>
             </a:r>
             <a:r>
               <a:rPr lang="en-US" altLang="zh-CN" sz="1800" dirty="0">
@@ -5806,10 +5639,16 @@
               <a:t>KC</a:t>
             </a:r>
             <a:r>
+              <a:rPr lang="zh-CN" altLang="en-US" sz="1800" dirty="0" smtClean="0">
+                <a:latin typeface="+mn-ea"/>
+              </a:rPr>
+              <a:t>），</a:t>
+            </a:r>
+            <a:r>
               <a:rPr lang="zh-CN" altLang="en-US" sz="1800" dirty="0">
                 <a:latin typeface="+mn-ea"/>
               </a:rPr>
-              <a:t>）**，同时大声或默念设定语句，格式为：“尽管我 </a:t>
+              <a:t>同时大声或默念设定语句，格式为：“尽管我 </a:t>
             </a:r>
             <a:r>
               <a:rPr lang="en-US" altLang="zh-CN" sz="1800" dirty="0">
@@ -5863,7 +5702,19 @@
               <a:rPr lang="zh-CN" altLang="en-US" sz="1800" dirty="0">
                 <a:latin typeface="+mn-ea"/>
               </a:rPr>
-              <a:t>示例：“尽管我害怕接触水，想到靠近水就心慌，，但我完全接纳自己现在的感受和状态”。</a:t>
+              <a:t>示例：“尽管我害怕接触水，想到靠近水就心慌</a:t>
+            </a:r>
+            <a:r>
+              <a:rPr lang="zh-CN" altLang="en-US" sz="1800" dirty="0" smtClean="0">
+                <a:latin typeface="+mn-ea"/>
+              </a:rPr>
+              <a:t>，但</a:t>
+            </a:r>
+            <a:r>
+              <a:rPr lang="zh-CN" altLang="en-US" sz="1800" dirty="0">
+                <a:latin typeface="+mn-ea"/>
+              </a:rPr>
+              <a:t>我完全接纳自己现在的感受和状态”。</a:t>
             </a:r>
           </a:p>
           <a:p>
@@ -5976,8 +5827,8 @@
         </p:nvSpPr>
         <p:spPr>
           <a:xfrm>
-            <a:off x="515112" y="1576785"/>
-            <a:ext cx="4528377" cy="2995215"/>
+            <a:off x="515113" y="1576785"/>
+            <a:ext cx="3584346" cy="2995215"/>
           </a:xfrm>
         </p:spPr>
         <p:txBody>
@@ -5988,16 +5839,39 @@
               <a:buNone/>
             </a:pPr>
             <a:r>
+              <a:rPr lang="zh-CN" altLang="en-US" b="1" dirty="0" smtClean="0">
+                <a:latin typeface="+mn-ea"/>
+              </a:rPr>
+              <a:t>情绪</a:t>
+            </a:r>
+            <a:r>
+              <a:rPr lang="zh-CN" altLang="en-US" b="1" dirty="0">
+                <a:latin typeface="+mn-ea"/>
+              </a:rPr>
+              <a:t>调节敲击操环节</a:t>
+            </a:r>
+          </a:p>
+          <a:p>
+            <a:pPr marL="0" indent="0">
+              <a:buNone/>
+            </a:pPr>
+            <a:r>
+              <a:rPr lang="zh-CN" altLang="en-US" dirty="0">
+                <a:latin typeface="+mn-ea"/>
+              </a:rPr>
+              <a:t>（</a:t>
+            </a:r>
+            <a:r>
               <a:rPr lang="en-US" altLang="zh-CN" dirty="0">
                 <a:latin typeface="+mn-ea"/>
               </a:rPr>
-              <a:t>2.</a:t>
+              <a:t>1</a:t>
             </a:r>
             <a:r>
               <a:rPr lang="zh-CN" altLang="en-US" dirty="0">
                 <a:latin typeface="+mn-ea"/>
               </a:rPr>
-              <a:t>情绪调节敲击操环节</a:t>
+              <a:t>）身体站直，双脚打开与肩同宽，深呼吸三次，在呼吸中聚焦此刻内心存在的负性情绪，并为此刻的情绪进行评分。</a:t>
             </a:r>
           </a:p>
           <a:p>
@@ -6014,245 +5888,13 @@
               <a:rPr lang="en-US" altLang="zh-CN" dirty="0">
                 <a:latin typeface="+mn-ea"/>
               </a:rPr>
-              <a:t>1</a:t>
+              <a:t>2</a:t>
             </a:r>
             <a:r>
               <a:rPr lang="zh-CN" altLang="en-US" dirty="0">
                 <a:latin typeface="+mn-ea"/>
               </a:rPr>
-              <a:t>）身体站直，双脚打开与肩同宽，深呼吸三次，在呼吸中聚焦此刻内心存在的负性情绪，并为此刻的情绪进行评分。</a:t>
-            </a:r>
-          </a:p>
-          <a:p>
-            <a:pPr marL="0" indent="0">
-              <a:buNone/>
-            </a:pPr>
-            <a:r>
-              <a:rPr lang="zh-CN" altLang="en-US" dirty="0">
-                <a:latin typeface="+mn-ea"/>
-              </a:rPr>
-              <a:t>（</a:t>
-            </a:r>
-            <a:r>
-              <a:rPr lang="en-US" altLang="zh-CN" dirty="0">
-                <a:latin typeface="+mn-ea"/>
-              </a:rPr>
-              <a:t>2</a:t>
-            </a:r>
-            <a:r>
-              <a:rPr lang="zh-CN" altLang="en-US" dirty="0">
-                <a:latin typeface="+mn-ea"/>
-              </a:rPr>
               <a:t>）敲打手刀点，敲打时说：“我对我自身存在的情绪负责；尽管我现在有焦虑（抑郁、紧张或其他的）情绪，但我完完全全接受和爱自己；虽然我内心现在有很多负能量，生活中也遭遇了许多不好的事情，但我完完全全接受和爱自己，我敞开心扉去面对这些感受，并放松自己；当我释放之后，我内心也会回归平静，焦虑也会不复存在。</a:t>
-            </a:r>
-          </a:p>
-        </p:txBody>
-      </p:sp>
-      <p:sp>
-        <p:nvSpPr>
-          <p:cNvPr id="14" name="内容占位符 2">
-            <a:extLst>
-              <a:ext uri="{FF2B5EF4-FFF2-40B4-BE49-F238E27FC236}">
-                <a16:creationId xmlns:a16="http://schemas.microsoft.com/office/drawing/2014/main" id="{D4F17EAE-CD6F-3527-91B7-6253A30D3D3A}"/>
-              </a:ext>
-            </a:extLst>
-          </p:cNvPr>
-          <p:cNvSpPr txBox="1">
-            <a:spLocks/>
-          </p:cNvSpPr>
-          <p:nvPr/>
-        </p:nvSpPr>
-        <p:spPr>
-          <a:xfrm>
-            <a:off x="264035" y="5566122"/>
-            <a:ext cx="4779454" cy="757207"/>
-          </a:xfrm>
-          <a:prstGeom prst="rect">
-            <a:avLst/>
-          </a:prstGeom>
-        </p:spPr>
-        <p:txBody>
-          <a:bodyPr lIns="109728" tIns="109728" rIns="109728" bIns="91440"/>
-          <a:lstStyle>
-            <a:lvl1pPr marL="228600" indent="-228600" algn="l" defTabSz="914400" rtl="0" eaLnBrk="1" latinLnBrk="0" hangingPunct="1">
-              <a:lnSpc>
-                <a:spcPct val="125000"/>
-              </a:lnSpc>
-              <a:spcBef>
-                <a:spcPts val="1000"/>
-              </a:spcBef>
-              <a:buFont typeface="Arial" panose="020B0604020202020204" pitchFamily="34" charset="0"/>
-              <a:buChar char="•"/>
-              <a:defRPr sz="1600" kern="1200" spc="160">
-                <a:solidFill>
-                  <a:schemeClr val="tx1"/>
-                </a:solidFill>
-                <a:latin typeface="+mn-lt"/>
-                <a:ea typeface="+mn-ea"/>
-                <a:cs typeface="+mn-cs"/>
-              </a:defRPr>
-            </a:lvl1pPr>
-            <a:lvl2pPr marL="685800" indent="-228600" algn="l" defTabSz="914400" rtl="0" eaLnBrk="1" latinLnBrk="0" hangingPunct="1">
-              <a:lnSpc>
-                <a:spcPct val="125000"/>
-              </a:lnSpc>
-              <a:spcBef>
-                <a:spcPts val="500"/>
-              </a:spcBef>
-              <a:buFont typeface="Arial" panose="020B0604020202020204" pitchFamily="34" charset="0"/>
-              <a:buChar char="•"/>
-              <a:defRPr sz="1600" kern="1200" spc="160">
-                <a:solidFill>
-                  <a:schemeClr val="tx1"/>
-                </a:solidFill>
-                <a:latin typeface="+mn-lt"/>
-                <a:ea typeface="+mn-ea"/>
-                <a:cs typeface="+mn-cs"/>
-              </a:defRPr>
-            </a:lvl2pPr>
-            <a:lvl3pPr marL="1143000" indent="-228600" algn="l" defTabSz="914400" rtl="0" eaLnBrk="1" latinLnBrk="0" hangingPunct="1">
-              <a:lnSpc>
-                <a:spcPct val="125000"/>
-              </a:lnSpc>
-              <a:spcBef>
-                <a:spcPts val="500"/>
-              </a:spcBef>
-              <a:buFont typeface="Arial" panose="020B0604020202020204" pitchFamily="34" charset="0"/>
-              <a:buChar char="•"/>
-              <a:defRPr sz="1600" kern="1200" spc="160">
-                <a:solidFill>
-                  <a:schemeClr val="tx1"/>
-                </a:solidFill>
-                <a:latin typeface="+mn-lt"/>
-                <a:ea typeface="+mn-ea"/>
-                <a:cs typeface="+mn-cs"/>
-              </a:defRPr>
-            </a:lvl3pPr>
-            <a:lvl4pPr marL="1600200" indent="-228600" algn="l" defTabSz="914400" rtl="0" eaLnBrk="1" latinLnBrk="0" hangingPunct="1">
-              <a:lnSpc>
-                <a:spcPct val="125000"/>
-              </a:lnSpc>
-              <a:spcBef>
-                <a:spcPts val="500"/>
-              </a:spcBef>
-              <a:buFont typeface="Arial" panose="020B0604020202020204" pitchFamily="34" charset="0"/>
-              <a:buChar char="•"/>
-              <a:defRPr sz="1600" kern="1200" spc="160">
-                <a:solidFill>
-                  <a:schemeClr val="tx1"/>
-                </a:solidFill>
-                <a:latin typeface="+mn-lt"/>
-                <a:ea typeface="+mn-ea"/>
-                <a:cs typeface="+mn-cs"/>
-              </a:defRPr>
-            </a:lvl4pPr>
-            <a:lvl5pPr marL="2057400" indent="-228600" algn="l" defTabSz="914400" rtl="0" eaLnBrk="1" latinLnBrk="0" hangingPunct="1">
-              <a:lnSpc>
-                <a:spcPct val="125000"/>
-              </a:lnSpc>
-              <a:spcBef>
-                <a:spcPts val="500"/>
-              </a:spcBef>
-              <a:buFont typeface="Arial" panose="020B0604020202020204" pitchFamily="34" charset="0"/>
-              <a:buChar char="•"/>
-              <a:defRPr sz="1600" kern="1200" spc="160">
-                <a:solidFill>
-                  <a:schemeClr val="tx1"/>
-                </a:solidFill>
-                <a:latin typeface="+mn-lt"/>
-                <a:ea typeface="+mn-ea"/>
-                <a:cs typeface="+mn-cs"/>
-              </a:defRPr>
-            </a:lvl5pPr>
-            <a:lvl6pPr marL="2514600" indent="-228600" algn="l" defTabSz="914400" rtl="0" eaLnBrk="1" latinLnBrk="0" hangingPunct="1">
-              <a:lnSpc>
-                <a:spcPct val="90000"/>
-              </a:lnSpc>
-              <a:spcBef>
-                <a:spcPts val="500"/>
-              </a:spcBef>
-              <a:buFont typeface="Arial" panose="020B0604020202020204" pitchFamily="34" charset="0"/>
-              <a:buChar char="•"/>
-              <a:defRPr sz="1800" kern="1200">
-                <a:solidFill>
-                  <a:schemeClr val="tx1"/>
-                </a:solidFill>
-                <a:latin typeface="+mn-lt"/>
-                <a:ea typeface="+mn-ea"/>
-                <a:cs typeface="+mn-cs"/>
-              </a:defRPr>
-            </a:lvl6pPr>
-            <a:lvl7pPr marL="2971800" indent="-228600" algn="l" defTabSz="914400" rtl="0" eaLnBrk="1" latinLnBrk="0" hangingPunct="1">
-              <a:lnSpc>
-                <a:spcPct val="90000"/>
-              </a:lnSpc>
-              <a:spcBef>
-                <a:spcPts val="500"/>
-              </a:spcBef>
-              <a:buFont typeface="Arial" panose="020B0604020202020204" pitchFamily="34" charset="0"/>
-              <a:buChar char="•"/>
-              <a:defRPr sz="1800" kern="1200">
-                <a:solidFill>
-                  <a:schemeClr val="tx1"/>
-                </a:solidFill>
-                <a:latin typeface="+mn-lt"/>
-                <a:ea typeface="+mn-ea"/>
-                <a:cs typeface="+mn-cs"/>
-              </a:defRPr>
-            </a:lvl7pPr>
-            <a:lvl8pPr marL="3429000" indent="-228600" algn="l" defTabSz="914400" rtl="0" eaLnBrk="1" latinLnBrk="0" hangingPunct="1">
-              <a:lnSpc>
-                <a:spcPct val="90000"/>
-              </a:lnSpc>
-              <a:spcBef>
-                <a:spcPts val="500"/>
-              </a:spcBef>
-              <a:buFont typeface="Arial" panose="020B0604020202020204" pitchFamily="34" charset="0"/>
-              <a:buChar char="•"/>
-              <a:defRPr sz="1800" kern="1200">
-                <a:solidFill>
-                  <a:schemeClr val="tx1"/>
-                </a:solidFill>
-                <a:latin typeface="+mn-lt"/>
-                <a:ea typeface="+mn-ea"/>
-                <a:cs typeface="+mn-cs"/>
-              </a:defRPr>
-            </a:lvl8pPr>
-            <a:lvl9pPr marL="3886200" indent="-228600" algn="l" defTabSz="914400" rtl="0" eaLnBrk="1" latinLnBrk="0" hangingPunct="1">
-              <a:lnSpc>
-                <a:spcPct val="90000"/>
-              </a:lnSpc>
-              <a:spcBef>
-                <a:spcPts val="500"/>
-              </a:spcBef>
-              <a:buFont typeface="Arial" panose="020B0604020202020204" pitchFamily="34" charset="0"/>
-              <a:buChar char="•"/>
-              <a:defRPr sz="1800" kern="1200">
-                <a:solidFill>
-                  <a:schemeClr val="tx1"/>
-                </a:solidFill>
-                <a:latin typeface="+mn-lt"/>
-                <a:ea typeface="+mn-ea"/>
-                <a:cs typeface="+mn-cs"/>
-              </a:defRPr>
-            </a:lvl9pPr>
-          </a:lstStyle>
-          <a:p>
-            <a:pPr marL="0" indent="0">
-              <a:buNone/>
-            </a:pPr>
-            <a:r>
-              <a:rPr lang="zh-CN" altLang="en-US" sz="3200" dirty="0">
-                <a:effectLst>
-                  <a:outerShdw blurRad="38100" dist="38100" dir="2700000" algn="tl">
-                    <a:srgbClr val="000000">
-                      <a:alpha val="43137"/>
-                    </a:srgbClr>
-                  </a:outerShdw>
-                </a:effectLst>
-                <a:latin typeface="+mn-ea"/>
-              </a:rPr>
-              <a:t>敲击操环节</a:t>
             </a:r>
           </a:p>
         </p:txBody>
@@ -6273,8 +5915,8 @@
         </p:nvSpPr>
         <p:spPr>
           <a:xfrm>
-            <a:off x="5043489" y="1576785"/>
-            <a:ext cx="6800849" cy="2485182"/>
+            <a:off x="4099459" y="1576785"/>
+            <a:ext cx="7744879" cy="2485182"/>
           </a:xfrm>
           <a:prstGeom prst="rect">
             <a:avLst/>
@@ -6452,19 +6094,19 @@
               <a:buNone/>
             </a:pPr>
             <a:r>
-              <a:rPr lang="zh-CN" altLang="en-US" sz="1400" dirty="0">
+              <a:rPr lang="zh-CN" altLang="en-US" dirty="0">
                 <a:latin typeface="+mn-ea"/>
               </a:rPr>
               <a:t>（</a:t>
             </a:r>
             <a:r>
-              <a:rPr lang="en-US" altLang="zh-CN" sz="1400" dirty="0">
+              <a:rPr lang="en-US" altLang="zh-CN" dirty="0">
                 <a:latin typeface="+mn-ea"/>
               </a:rPr>
               <a:t>3</a:t>
             </a:r>
             <a:r>
-              <a:rPr lang="zh-CN" altLang="en-US" sz="1400" dirty="0">
+              <a:rPr lang="zh-CN" altLang="en-US" dirty="0">
                 <a:latin typeface="+mn-ea"/>
               </a:rPr>
               <a:t>）依次敲击或按摩攒竹、瞳子髎、承泣、人中、承浆、俞府、檀中、百会等穴位，同时保持持续聚焦情绪的状态，敲击穴位时重复心理提示语“虽然我现在有一些（当下的情绪状态）问题，但我完完全全接受和爱自己。”</a:t>
@@ -6476,79 +6118,79 @@
               <a:buNone/>
             </a:pPr>
             <a:r>
-              <a:rPr lang="zh-CN" altLang="en-US" sz="1400" dirty="0">
+              <a:rPr lang="zh-CN" altLang="en-US" dirty="0">
                 <a:latin typeface="+mn-ea"/>
               </a:rPr>
               <a:t>（</a:t>
             </a:r>
             <a:r>
-              <a:rPr lang="en-US" altLang="zh-CN" sz="1400" dirty="0">
+              <a:rPr lang="en-US" altLang="zh-CN" dirty="0">
                 <a:latin typeface="+mn-ea"/>
               </a:rPr>
               <a:t>4</a:t>
             </a:r>
             <a:r>
-              <a:rPr lang="zh-CN" altLang="en-US" sz="1400" dirty="0">
+              <a:rPr lang="zh-CN" altLang="en-US" dirty="0">
                 <a:latin typeface="+mn-ea"/>
               </a:rPr>
               <a:t>）持续敲击中渚穴时进行以下</a:t>
             </a:r>
             <a:r>
-              <a:rPr lang="en-US" altLang="zh-CN" sz="1400" dirty="0">
+              <a:rPr lang="en-US" altLang="zh-CN" dirty="0">
                 <a:latin typeface="+mn-ea"/>
               </a:rPr>
               <a:t>9</a:t>
             </a:r>
             <a:r>
-              <a:rPr lang="zh-CN" altLang="en-US" sz="1400" dirty="0">
+              <a:rPr lang="zh-CN" altLang="en-US" dirty="0">
                 <a:latin typeface="+mn-ea"/>
               </a:rPr>
               <a:t>个步骤：眼睛闭上；眼睛张开；眼睛往右下看并保持头部不动；眼睛向左下看并保持头部不动；眼睛顺时钟旋转；眼睛逆时钟旋转；哼快乐的歌</a:t>
             </a:r>
             <a:r>
-              <a:rPr lang="en-US" altLang="zh-CN" sz="1400" dirty="0">
+              <a:rPr lang="en-US" altLang="zh-CN" dirty="0">
                 <a:latin typeface="+mn-ea"/>
               </a:rPr>
               <a:t>2</a:t>
             </a:r>
             <a:r>
-              <a:rPr lang="zh-CN" altLang="en-US" sz="1400" dirty="0">
+              <a:rPr lang="zh-CN" altLang="en-US" dirty="0">
                 <a:latin typeface="+mn-ea"/>
               </a:rPr>
               <a:t>秒钟；快速地数</a:t>
             </a:r>
             <a:r>
-              <a:rPr lang="en-US" altLang="zh-CN" sz="1400" dirty="0">
+              <a:rPr lang="en-US" altLang="zh-CN" dirty="0">
                 <a:latin typeface="+mn-ea"/>
               </a:rPr>
               <a:t>1</a:t>
             </a:r>
             <a:r>
-              <a:rPr lang="zh-CN" altLang="en-US" sz="1400" dirty="0">
+              <a:rPr lang="zh-CN" altLang="en-US" dirty="0">
                 <a:latin typeface="+mn-ea"/>
               </a:rPr>
               <a:t>～</a:t>
             </a:r>
             <a:r>
-              <a:rPr lang="en-US" altLang="zh-CN" sz="1400" dirty="0">
+              <a:rPr lang="en-US" altLang="zh-CN" dirty="0">
                 <a:latin typeface="+mn-ea"/>
               </a:rPr>
               <a:t>5</a:t>
             </a:r>
             <a:r>
-              <a:rPr lang="zh-CN" altLang="en-US" sz="1400" dirty="0">
+              <a:rPr lang="zh-CN" altLang="en-US" dirty="0">
                 <a:latin typeface="+mn-ea"/>
               </a:rPr>
               <a:t>；再哼快乐的歌</a:t>
             </a:r>
             <a:r>
-              <a:rPr lang="en-US" altLang="zh-CN" sz="1400" dirty="0">
+              <a:rPr lang="en-US" altLang="zh-CN" dirty="0">
                 <a:latin typeface="+mn-ea"/>
               </a:rPr>
               <a:t>2</a:t>
             </a:r>
             <a:r>
-              <a:rPr lang="zh-CN" altLang="en-US" sz="1400" dirty="0">
+              <a:rPr lang="zh-CN" altLang="en-US" dirty="0">
                 <a:latin typeface="+mn-ea"/>
               </a:rPr>
               <a:t>秒钟。</a:t>
@@ -6572,8 +6214,8 @@
         </p:nvSpPr>
         <p:spPr>
           <a:xfrm>
-            <a:off x="5043489" y="3529013"/>
-            <a:ext cx="3757611" cy="1752201"/>
+            <a:off x="4099459" y="3695899"/>
+            <a:ext cx="4701641" cy="2833776"/>
           </a:xfrm>
           <a:prstGeom prst="rect">
             <a:avLst/>
@@ -6751,31 +6393,31 @@
               <a:buNone/>
             </a:pPr>
             <a:r>
-              <a:rPr lang="zh-CN" altLang="en-US" sz="1400" dirty="0">
+              <a:rPr lang="zh-CN" altLang="en-US" dirty="0">
                 <a:latin typeface="+mn-ea"/>
               </a:rPr>
               <a:t>（</a:t>
             </a:r>
             <a:r>
-              <a:rPr lang="en-US" altLang="zh-CN" sz="1400" dirty="0">
+              <a:rPr lang="en-US" altLang="zh-CN" dirty="0">
                 <a:latin typeface="+mn-ea"/>
               </a:rPr>
               <a:t>5</a:t>
             </a:r>
             <a:r>
-              <a:rPr lang="zh-CN" altLang="en-US" sz="1400" dirty="0">
+              <a:rPr lang="zh-CN" altLang="en-US" dirty="0">
                 <a:latin typeface="+mn-ea"/>
               </a:rPr>
               <a:t>）再次敲击或按摩攒竹、瞳子髎、承泣、人中、承浆、俞府、檀中、百会等穴位，每个穴位</a:t>
             </a:r>
             <a:r>
-              <a:rPr lang="en-US" altLang="zh-CN" sz="1400" dirty="0">
+              <a:rPr lang="en-US" altLang="zh-CN" dirty="0">
                 <a:latin typeface="+mn-ea"/>
               </a:rPr>
               <a:t>5-10</a:t>
             </a:r>
             <a:r>
-              <a:rPr lang="zh-CN" altLang="en-US" sz="1400" dirty="0">
+              <a:rPr lang="zh-CN" altLang="en-US" dirty="0">
                 <a:latin typeface="+mn-ea"/>
               </a:rPr>
               <a:t>次，同时保持持续聚焦情绪的状态，敲击穴位时重复心理提示语“虽然我仍然还有一些（当下的情绪状态）问题，但我完完全全接受和爱自己。”</a:t>
@@ -6787,19 +6429,19 @@
               <a:buNone/>
             </a:pPr>
             <a:r>
-              <a:rPr lang="zh-CN" altLang="en-US" sz="1400" dirty="0">
+              <a:rPr lang="zh-CN" altLang="en-US" dirty="0">
                 <a:latin typeface="+mn-ea"/>
               </a:rPr>
               <a:t>（</a:t>
             </a:r>
             <a:r>
-              <a:rPr lang="en-US" altLang="zh-CN" sz="1400" dirty="0">
+              <a:rPr lang="en-US" altLang="zh-CN" dirty="0">
                 <a:latin typeface="+mn-ea"/>
               </a:rPr>
               <a:t>6</a:t>
             </a:r>
             <a:r>
-              <a:rPr lang="zh-CN" altLang="en-US" sz="1400" dirty="0">
+              <a:rPr lang="zh-CN" altLang="en-US" dirty="0">
                 <a:latin typeface="+mn-ea"/>
               </a:rPr>
               <a:t>）再次对情绪状态进行评分，根据评分结果决定是否需要重复习练。</a:t>
@@ -6835,8 +6477,8 @@
         </p:blipFill>
         <p:spPr>
           <a:xfrm>
-            <a:off x="8801100" y="4300641"/>
-            <a:ext cx="2875788" cy="1917191"/>
+            <a:off x="8711049" y="4228333"/>
+            <a:ext cx="2965839" cy="1977225"/>
           </a:xfrm>
           <a:prstGeom prst="rect">
             <a:avLst/>
@@ -6909,19 +6551,19 @@
           <a:lstStyle/>
           <a:p>
             <a:r>
-              <a:rPr lang="en-US" altLang="zh-CN" sz="900" dirty="0"/>
+              <a:rPr lang="en-US" altLang="zh-CN" sz="4400" dirty="0"/>
               <a:t>EFT</a:t>
             </a:r>
             <a:r>
-              <a:rPr lang="zh-CN" altLang="en-US" sz="900" dirty="0"/>
+              <a:rPr lang="zh-CN" altLang="en-US" sz="4400" dirty="0"/>
               <a:t>心理自助操的流程设计（</a:t>
             </a:r>
             <a:r>
-              <a:rPr lang="en-US" altLang="zh-CN" sz="900" dirty="0"/>
+              <a:rPr lang="en-US" altLang="zh-CN" sz="4400" dirty="0"/>
               <a:t>3</a:t>
             </a:r>
             <a:r>
-              <a:rPr lang="zh-CN" altLang="en-US" sz="900" dirty="0"/>
+              <a:rPr lang="zh-CN" altLang="en-US" sz="4400" dirty="0"/>
               <a:t>）</a:t>
             </a:r>
           </a:p>
@@ -6948,6 +6590,7 @@
             <a:off x="515113" y="1576786"/>
             <a:ext cx="11155680" cy="2923778"/>
           </a:xfrm>
+          <a:effectLst/>
         </p:spPr>
         <p:txBody>
           <a:bodyPr/>
@@ -6957,7 +6600,18 @@
               <a:buNone/>
             </a:pPr>
             <a:r>
-              <a:rPr lang="en-US" altLang="zh-CN" sz="1800" dirty="0">
+              <a:rPr lang="zh-CN" altLang="en-US" sz="1800" b="1" dirty="0">
+                <a:latin typeface="+mn-ea"/>
+              </a:rPr>
+              <a:t>敲击核心穴位</a:t>
+            </a:r>
+          </a:p>
+          <a:p>
+            <a:pPr marL="0" indent="0">
+              <a:buNone/>
+            </a:pPr>
+            <a:r>
+              <a:rPr lang="en-US" altLang="zh-CN" sz="1800" dirty="0" smtClean="0">
                 <a:latin typeface="+mn-ea"/>
               </a:rPr>
               <a:t>- </a:t>
@@ -7074,215 +6728,6 @@
             <a:endParaRPr lang="zh-CN" altLang="en-US" sz="1800" dirty="0">
               <a:latin typeface="+mn-ea"/>
             </a:endParaRPr>
-          </a:p>
-        </p:txBody>
-      </p:sp>
-      <p:sp>
-        <p:nvSpPr>
-          <p:cNvPr id="14" name="内容占位符 2">
-            <a:extLst>
-              <a:ext uri="{FF2B5EF4-FFF2-40B4-BE49-F238E27FC236}">
-                <a16:creationId xmlns:a16="http://schemas.microsoft.com/office/drawing/2014/main" id="{59CCCEB8-3295-D86B-06BC-F3F388E86B24}"/>
-              </a:ext>
-            </a:extLst>
-          </p:cNvPr>
-          <p:cNvSpPr txBox="1">
-            <a:spLocks/>
-          </p:cNvSpPr>
-          <p:nvPr/>
-        </p:nvSpPr>
-        <p:spPr>
-          <a:xfrm>
-            <a:off x="264035" y="5566122"/>
-            <a:ext cx="4779454" cy="757207"/>
-          </a:xfrm>
-          <a:prstGeom prst="rect">
-            <a:avLst/>
-          </a:prstGeom>
-        </p:spPr>
-        <p:txBody>
-          <a:bodyPr lIns="109728" tIns="109728" rIns="109728" bIns="91440"/>
-          <a:lstStyle>
-            <a:lvl1pPr marL="228600" indent="-228600" algn="l" defTabSz="914400" rtl="0" eaLnBrk="1" latinLnBrk="0" hangingPunct="1">
-              <a:lnSpc>
-                <a:spcPct val="125000"/>
-              </a:lnSpc>
-              <a:spcBef>
-                <a:spcPts val="1000"/>
-              </a:spcBef>
-              <a:buFont typeface="Arial" panose="020B0604020202020204" pitchFamily="34" charset="0"/>
-              <a:buChar char="•"/>
-              <a:defRPr sz="1600" kern="1200" spc="160">
-                <a:solidFill>
-                  <a:schemeClr val="tx1"/>
-                </a:solidFill>
-                <a:latin typeface="+mn-lt"/>
-                <a:ea typeface="+mn-ea"/>
-                <a:cs typeface="+mn-cs"/>
-              </a:defRPr>
-            </a:lvl1pPr>
-            <a:lvl2pPr marL="685800" indent="-228600" algn="l" defTabSz="914400" rtl="0" eaLnBrk="1" latinLnBrk="0" hangingPunct="1">
-              <a:lnSpc>
-                <a:spcPct val="125000"/>
-              </a:lnSpc>
-              <a:spcBef>
-                <a:spcPts val="500"/>
-              </a:spcBef>
-              <a:buFont typeface="Arial" panose="020B0604020202020204" pitchFamily="34" charset="0"/>
-              <a:buChar char="•"/>
-              <a:defRPr sz="1600" kern="1200" spc="160">
-                <a:solidFill>
-                  <a:schemeClr val="tx1"/>
-                </a:solidFill>
-                <a:latin typeface="+mn-lt"/>
-                <a:ea typeface="+mn-ea"/>
-                <a:cs typeface="+mn-cs"/>
-              </a:defRPr>
-            </a:lvl2pPr>
-            <a:lvl3pPr marL="1143000" indent="-228600" algn="l" defTabSz="914400" rtl="0" eaLnBrk="1" latinLnBrk="0" hangingPunct="1">
-              <a:lnSpc>
-                <a:spcPct val="125000"/>
-              </a:lnSpc>
-              <a:spcBef>
-                <a:spcPts val="500"/>
-              </a:spcBef>
-              <a:buFont typeface="Arial" panose="020B0604020202020204" pitchFamily="34" charset="0"/>
-              <a:buChar char="•"/>
-              <a:defRPr sz="1600" kern="1200" spc="160">
-                <a:solidFill>
-                  <a:schemeClr val="tx1"/>
-                </a:solidFill>
-                <a:latin typeface="+mn-lt"/>
-                <a:ea typeface="+mn-ea"/>
-                <a:cs typeface="+mn-cs"/>
-              </a:defRPr>
-            </a:lvl3pPr>
-            <a:lvl4pPr marL="1600200" indent="-228600" algn="l" defTabSz="914400" rtl="0" eaLnBrk="1" latinLnBrk="0" hangingPunct="1">
-              <a:lnSpc>
-                <a:spcPct val="125000"/>
-              </a:lnSpc>
-              <a:spcBef>
-                <a:spcPts val="500"/>
-              </a:spcBef>
-              <a:buFont typeface="Arial" panose="020B0604020202020204" pitchFamily="34" charset="0"/>
-              <a:buChar char="•"/>
-              <a:defRPr sz="1600" kern="1200" spc="160">
-                <a:solidFill>
-                  <a:schemeClr val="tx1"/>
-                </a:solidFill>
-                <a:latin typeface="+mn-lt"/>
-                <a:ea typeface="+mn-ea"/>
-                <a:cs typeface="+mn-cs"/>
-              </a:defRPr>
-            </a:lvl4pPr>
-            <a:lvl5pPr marL="2057400" indent="-228600" algn="l" defTabSz="914400" rtl="0" eaLnBrk="1" latinLnBrk="0" hangingPunct="1">
-              <a:lnSpc>
-                <a:spcPct val="125000"/>
-              </a:lnSpc>
-              <a:spcBef>
-                <a:spcPts val="500"/>
-              </a:spcBef>
-              <a:buFont typeface="Arial" panose="020B0604020202020204" pitchFamily="34" charset="0"/>
-              <a:buChar char="•"/>
-              <a:defRPr sz="1600" kern="1200" spc="160">
-                <a:solidFill>
-                  <a:schemeClr val="tx1"/>
-                </a:solidFill>
-                <a:latin typeface="+mn-lt"/>
-                <a:ea typeface="+mn-ea"/>
-                <a:cs typeface="+mn-cs"/>
-              </a:defRPr>
-            </a:lvl5pPr>
-            <a:lvl6pPr marL="2514600" indent="-228600" algn="l" defTabSz="914400" rtl="0" eaLnBrk="1" latinLnBrk="0" hangingPunct="1">
-              <a:lnSpc>
-                <a:spcPct val="90000"/>
-              </a:lnSpc>
-              <a:spcBef>
-                <a:spcPts val="500"/>
-              </a:spcBef>
-              <a:buFont typeface="Arial" panose="020B0604020202020204" pitchFamily="34" charset="0"/>
-              <a:buChar char="•"/>
-              <a:defRPr sz="1800" kern="1200">
-                <a:solidFill>
-                  <a:schemeClr val="tx1"/>
-                </a:solidFill>
-                <a:latin typeface="+mn-lt"/>
-                <a:ea typeface="+mn-ea"/>
-                <a:cs typeface="+mn-cs"/>
-              </a:defRPr>
-            </a:lvl6pPr>
-            <a:lvl7pPr marL="2971800" indent="-228600" algn="l" defTabSz="914400" rtl="0" eaLnBrk="1" latinLnBrk="0" hangingPunct="1">
-              <a:lnSpc>
-                <a:spcPct val="90000"/>
-              </a:lnSpc>
-              <a:spcBef>
-                <a:spcPts val="500"/>
-              </a:spcBef>
-              <a:buFont typeface="Arial" panose="020B0604020202020204" pitchFamily="34" charset="0"/>
-              <a:buChar char="•"/>
-              <a:defRPr sz="1800" kern="1200">
-                <a:solidFill>
-                  <a:schemeClr val="tx1"/>
-                </a:solidFill>
-                <a:latin typeface="+mn-lt"/>
-                <a:ea typeface="+mn-ea"/>
-                <a:cs typeface="+mn-cs"/>
-              </a:defRPr>
-            </a:lvl7pPr>
-            <a:lvl8pPr marL="3429000" indent="-228600" algn="l" defTabSz="914400" rtl="0" eaLnBrk="1" latinLnBrk="0" hangingPunct="1">
-              <a:lnSpc>
-                <a:spcPct val="90000"/>
-              </a:lnSpc>
-              <a:spcBef>
-                <a:spcPts val="500"/>
-              </a:spcBef>
-              <a:buFont typeface="Arial" panose="020B0604020202020204" pitchFamily="34" charset="0"/>
-              <a:buChar char="•"/>
-              <a:defRPr sz="1800" kern="1200">
-                <a:solidFill>
-                  <a:schemeClr val="tx1"/>
-                </a:solidFill>
-                <a:latin typeface="+mn-lt"/>
-                <a:ea typeface="+mn-ea"/>
-                <a:cs typeface="+mn-cs"/>
-              </a:defRPr>
-            </a:lvl8pPr>
-            <a:lvl9pPr marL="3886200" indent="-228600" algn="l" defTabSz="914400" rtl="0" eaLnBrk="1" latinLnBrk="0" hangingPunct="1">
-              <a:lnSpc>
-                <a:spcPct val="90000"/>
-              </a:lnSpc>
-              <a:spcBef>
-                <a:spcPts val="500"/>
-              </a:spcBef>
-              <a:buFont typeface="Arial" panose="020B0604020202020204" pitchFamily="34" charset="0"/>
-              <a:buChar char="•"/>
-              <a:defRPr sz="1800" kern="1200">
-                <a:solidFill>
-                  <a:schemeClr val="tx1"/>
-                </a:solidFill>
-                <a:latin typeface="+mn-lt"/>
-                <a:ea typeface="+mn-ea"/>
-                <a:cs typeface="+mn-cs"/>
-              </a:defRPr>
-            </a:lvl9pPr>
-          </a:lstStyle>
-          <a:p>
-            <a:pPr marL="0" indent="0">
-              <a:buNone/>
-            </a:pPr>
-            <a:r>
-              <a:rPr lang="zh-CN" altLang="en-US" sz="3200" dirty="0">
-                <a:effectLst>
-                  <a:outerShdw blurRad="38100" dist="38100" dir="2700000" algn="tl">
-                    <a:srgbClr val="000000">
-                      <a:alpha val="43137"/>
-                    </a:srgbClr>
-                  </a:outerShdw>
-                </a:effectLst>
-                <a:latin typeface="+mn-ea"/>
-              </a:rPr>
-              <a:t>敲击核心穴位</a:t>
-            </a:r>
           </a:p>
         </p:txBody>
       </p:sp>
@@ -7314,7 +6759,7 @@
         </p:blipFill>
         <p:spPr>
           <a:xfrm>
-            <a:off x="7701915" y="4500564"/>
+            <a:off x="7388932" y="4381247"/>
             <a:ext cx="3971925" cy="2066725"/>
           </a:xfrm>
           <a:prstGeom prst="rect">
@@ -7361,374 +6806,6 @@
           <a:chExt cx="0" cy="0"/>
         </a:xfrm>
       </p:grpSpPr>
-      <p:sp>
-        <p:nvSpPr>
-          <p:cNvPr id="2" name="标题 1">
-            <a:extLst>
-              <a:ext uri="{FF2B5EF4-FFF2-40B4-BE49-F238E27FC236}">
-                <a16:creationId xmlns:a16="http://schemas.microsoft.com/office/drawing/2014/main" id="{D04EE6AE-918A-AFBE-5E49-9683EC1CA899}"/>
-              </a:ext>
-            </a:extLst>
-          </p:cNvPr>
-          <p:cNvSpPr>
-            <a:spLocks noGrp="1"/>
-          </p:cNvSpPr>
-          <p:nvPr>
-            <p:ph type="title"/>
-          </p:nvPr>
-        </p:nvSpPr>
-        <p:spPr>
-          <a:xfrm>
-            <a:off x="521208" y="662740"/>
-            <a:ext cx="11155680" cy="936652"/>
-          </a:xfrm>
-        </p:spPr>
-        <p:txBody>
-          <a:bodyPr/>
-          <a:lstStyle/>
-          <a:p>
-            <a:r>
-              <a:rPr lang="en-US" altLang="zh-CN" sz="900" dirty="0"/>
-              <a:t>EFT</a:t>
-            </a:r>
-            <a:r>
-              <a:rPr lang="zh-CN" altLang="en-US" sz="900" dirty="0"/>
-              <a:t>心理自助操的流程设计（</a:t>
-            </a:r>
-            <a:r>
-              <a:rPr lang="en-US" altLang="zh-CN" sz="900" dirty="0"/>
-              <a:t>4</a:t>
-            </a:r>
-            <a:r>
-              <a:rPr lang="zh-CN" altLang="en-US" sz="900" dirty="0"/>
-              <a:t>）</a:t>
-            </a:r>
-          </a:p>
-        </p:txBody>
-      </p:sp>
-      <p:sp>
-        <p:nvSpPr>
-          <p:cNvPr id="3" name="内容占位符 2">
-            <a:extLst>
-              <a:ext uri="{FF2B5EF4-FFF2-40B4-BE49-F238E27FC236}">
-                <a16:creationId xmlns:a16="http://schemas.microsoft.com/office/drawing/2014/main" id="{BE2D9C0E-2FE7-DF79-CA80-C32EE5E79965}"/>
-              </a:ext>
-            </a:extLst>
-          </p:cNvPr>
-          <p:cNvSpPr>
-            <a:spLocks noGrp="1"/>
-          </p:cNvSpPr>
-          <p:nvPr>
-            <p:ph idx="1"/>
-          </p:nvPr>
-        </p:nvSpPr>
-        <p:spPr>
-          <a:xfrm>
-            <a:off x="515112" y="1576785"/>
-            <a:ext cx="11500677" cy="3989337"/>
-          </a:xfrm>
-        </p:spPr>
-        <p:txBody>
-          <a:bodyPr/>
-          <a:lstStyle/>
-          <a:p>
-            <a:pPr marL="0" indent="0">
-              <a:buNone/>
-            </a:pPr>
-            <a:r>
-              <a:rPr lang="en-US" altLang="zh-CN" sz="1800" dirty="0">
-                <a:latin typeface="+mn-ea"/>
-              </a:rPr>
-              <a:t>- </a:t>
-            </a:r>
-            <a:r>
-              <a:rPr lang="zh-CN" altLang="en-US" sz="1800" dirty="0">
-                <a:latin typeface="+mn-ea"/>
-              </a:rPr>
-              <a:t>敲击力度：以 “轻柔且有触感” 为宜，无需用力按压，每次每个穴位敲击 </a:t>
-            </a:r>
-            <a:r>
-              <a:rPr lang="en-US" altLang="zh-CN" sz="1800" dirty="0">
-                <a:latin typeface="+mn-ea"/>
-              </a:rPr>
-              <a:t>5-7 </a:t>
-            </a:r>
-            <a:r>
-              <a:rPr lang="zh-CN" altLang="en-US" sz="1800" dirty="0">
-                <a:latin typeface="+mn-ea"/>
-              </a:rPr>
-              <a:t>次。</a:t>
-            </a:r>
-          </a:p>
-          <a:p>
-            <a:pPr marL="0" indent="0">
-              <a:buNone/>
-            </a:pPr>
-            <a:r>
-              <a:rPr lang="en-US" altLang="zh-CN" sz="1800" dirty="0">
-                <a:latin typeface="+mn-ea"/>
-              </a:rPr>
-              <a:t>- </a:t>
-            </a:r>
-            <a:r>
-              <a:rPr lang="zh-CN" altLang="en-US" sz="1800" dirty="0">
-                <a:latin typeface="+mn-ea"/>
-              </a:rPr>
-              <a:t>操作逻辑：先聚焦具体情绪（如 “我害怕水”），按顺序敲击上述穴位，循环 </a:t>
-            </a:r>
-            <a:r>
-              <a:rPr lang="en-US" altLang="zh-CN" sz="1800" dirty="0">
-                <a:latin typeface="+mn-ea"/>
-              </a:rPr>
-              <a:t>1-3 </a:t>
-            </a:r>
-            <a:r>
-              <a:rPr lang="zh-CN" altLang="en-US" sz="1800" dirty="0">
-                <a:latin typeface="+mn-ea"/>
-              </a:rPr>
-              <a:t>轮后，观察情绪强度是否降低。</a:t>
-            </a:r>
-          </a:p>
-          <a:p>
-            <a:pPr marL="0" indent="0">
-              <a:buNone/>
-            </a:pPr>
-            <a:r>
-              <a:rPr lang="en-US" altLang="zh-CN" sz="1800" dirty="0">
-                <a:latin typeface="+mn-ea"/>
-              </a:rPr>
-              <a:t>- </a:t>
-            </a:r>
-            <a:r>
-              <a:rPr lang="zh-CN" altLang="en-US" sz="1800" dirty="0">
-                <a:latin typeface="+mn-ea"/>
-              </a:rPr>
-              <a:t>注意：</a:t>
-            </a:r>
-            <a:r>
-              <a:rPr lang="en-US" altLang="zh-CN" sz="1800" dirty="0">
-                <a:latin typeface="+mn-ea"/>
-              </a:rPr>
-              <a:t>EFT </a:t>
-            </a:r>
-            <a:r>
-              <a:rPr lang="zh-CN" altLang="en-US" sz="1800" dirty="0">
-                <a:latin typeface="+mn-ea"/>
-              </a:rPr>
-              <a:t>仅作为情绪缓解的辅助方式，若有严重心理问题，仍需结合专业心理治疗。</a:t>
-            </a:r>
-          </a:p>
-        </p:txBody>
-      </p:sp>
-      <p:sp>
-        <p:nvSpPr>
-          <p:cNvPr id="14" name="内容占位符 2">
-            <a:extLst>
-              <a:ext uri="{FF2B5EF4-FFF2-40B4-BE49-F238E27FC236}">
-                <a16:creationId xmlns:a16="http://schemas.microsoft.com/office/drawing/2014/main" id="{96155DA5-FBF2-4804-5626-274C474DBDA8}"/>
-              </a:ext>
-            </a:extLst>
-          </p:cNvPr>
-          <p:cNvSpPr txBox="1">
-            <a:spLocks/>
-          </p:cNvSpPr>
-          <p:nvPr/>
-        </p:nvSpPr>
-        <p:spPr>
-          <a:xfrm>
-            <a:off x="264035" y="5566122"/>
-            <a:ext cx="4779454" cy="757207"/>
-          </a:xfrm>
-          <a:prstGeom prst="rect">
-            <a:avLst/>
-          </a:prstGeom>
-        </p:spPr>
-        <p:txBody>
-          <a:bodyPr lIns="109728" tIns="109728" rIns="109728" bIns="91440"/>
-          <a:lstStyle>
-            <a:lvl1pPr marL="228600" indent="-228600" algn="l" defTabSz="914400" rtl="0" eaLnBrk="1" latinLnBrk="0" hangingPunct="1">
-              <a:lnSpc>
-                <a:spcPct val="125000"/>
-              </a:lnSpc>
-              <a:spcBef>
-                <a:spcPts val="1000"/>
-              </a:spcBef>
-              <a:buFont typeface="Arial" panose="020B0604020202020204" pitchFamily="34" charset="0"/>
-              <a:buChar char="•"/>
-              <a:defRPr sz="1600" kern="1200" spc="160">
-                <a:solidFill>
-                  <a:schemeClr val="tx1"/>
-                </a:solidFill>
-                <a:latin typeface="+mn-lt"/>
-                <a:ea typeface="+mn-ea"/>
-                <a:cs typeface="+mn-cs"/>
-              </a:defRPr>
-            </a:lvl1pPr>
-            <a:lvl2pPr marL="685800" indent="-228600" algn="l" defTabSz="914400" rtl="0" eaLnBrk="1" latinLnBrk="0" hangingPunct="1">
-              <a:lnSpc>
-                <a:spcPct val="125000"/>
-              </a:lnSpc>
-              <a:spcBef>
-                <a:spcPts val="500"/>
-              </a:spcBef>
-              <a:buFont typeface="Arial" panose="020B0604020202020204" pitchFamily="34" charset="0"/>
-              <a:buChar char="•"/>
-              <a:defRPr sz="1600" kern="1200" spc="160">
-                <a:solidFill>
-                  <a:schemeClr val="tx1"/>
-                </a:solidFill>
-                <a:latin typeface="+mn-lt"/>
-                <a:ea typeface="+mn-ea"/>
-                <a:cs typeface="+mn-cs"/>
-              </a:defRPr>
-            </a:lvl2pPr>
-            <a:lvl3pPr marL="1143000" indent="-228600" algn="l" defTabSz="914400" rtl="0" eaLnBrk="1" latinLnBrk="0" hangingPunct="1">
-              <a:lnSpc>
-                <a:spcPct val="125000"/>
-              </a:lnSpc>
-              <a:spcBef>
-                <a:spcPts val="500"/>
-              </a:spcBef>
-              <a:buFont typeface="Arial" panose="020B0604020202020204" pitchFamily="34" charset="0"/>
-              <a:buChar char="•"/>
-              <a:defRPr sz="1600" kern="1200" spc="160">
-                <a:solidFill>
-                  <a:schemeClr val="tx1"/>
-                </a:solidFill>
-                <a:latin typeface="+mn-lt"/>
-                <a:ea typeface="+mn-ea"/>
-                <a:cs typeface="+mn-cs"/>
-              </a:defRPr>
-            </a:lvl3pPr>
-            <a:lvl4pPr marL="1600200" indent="-228600" algn="l" defTabSz="914400" rtl="0" eaLnBrk="1" latinLnBrk="0" hangingPunct="1">
-              <a:lnSpc>
-                <a:spcPct val="125000"/>
-              </a:lnSpc>
-              <a:spcBef>
-                <a:spcPts val="500"/>
-              </a:spcBef>
-              <a:buFont typeface="Arial" panose="020B0604020202020204" pitchFamily="34" charset="0"/>
-              <a:buChar char="•"/>
-              <a:defRPr sz="1600" kern="1200" spc="160">
-                <a:solidFill>
-                  <a:schemeClr val="tx1"/>
-                </a:solidFill>
-                <a:latin typeface="+mn-lt"/>
-                <a:ea typeface="+mn-ea"/>
-                <a:cs typeface="+mn-cs"/>
-              </a:defRPr>
-            </a:lvl4pPr>
-            <a:lvl5pPr marL="2057400" indent="-228600" algn="l" defTabSz="914400" rtl="0" eaLnBrk="1" latinLnBrk="0" hangingPunct="1">
-              <a:lnSpc>
-                <a:spcPct val="125000"/>
-              </a:lnSpc>
-              <a:spcBef>
-                <a:spcPts val="500"/>
-              </a:spcBef>
-              <a:buFont typeface="Arial" panose="020B0604020202020204" pitchFamily="34" charset="0"/>
-              <a:buChar char="•"/>
-              <a:defRPr sz="1600" kern="1200" spc="160">
-                <a:solidFill>
-                  <a:schemeClr val="tx1"/>
-                </a:solidFill>
-                <a:latin typeface="+mn-lt"/>
-                <a:ea typeface="+mn-ea"/>
-                <a:cs typeface="+mn-cs"/>
-              </a:defRPr>
-            </a:lvl5pPr>
-            <a:lvl6pPr marL="2514600" indent="-228600" algn="l" defTabSz="914400" rtl="0" eaLnBrk="1" latinLnBrk="0" hangingPunct="1">
-              <a:lnSpc>
-                <a:spcPct val="90000"/>
-              </a:lnSpc>
-              <a:spcBef>
-                <a:spcPts val="500"/>
-              </a:spcBef>
-              <a:buFont typeface="Arial" panose="020B0604020202020204" pitchFamily="34" charset="0"/>
-              <a:buChar char="•"/>
-              <a:defRPr sz="1800" kern="1200">
-                <a:solidFill>
-                  <a:schemeClr val="tx1"/>
-                </a:solidFill>
-                <a:latin typeface="+mn-lt"/>
-                <a:ea typeface="+mn-ea"/>
-                <a:cs typeface="+mn-cs"/>
-              </a:defRPr>
-            </a:lvl6pPr>
-            <a:lvl7pPr marL="2971800" indent="-228600" algn="l" defTabSz="914400" rtl="0" eaLnBrk="1" latinLnBrk="0" hangingPunct="1">
-              <a:lnSpc>
-                <a:spcPct val="90000"/>
-              </a:lnSpc>
-              <a:spcBef>
-                <a:spcPts val="500"/>
-              </a:spcBef>
-              <a:buFont typeface="Arial" panose="020B0604020202020204" pitchFamily="34" charset="0"/>
-              <a:buChar char="•"/>
-              <a:defRPr sz="1800" kern="1200">
-                <a:solidFill>
-                  <a:schemeClr val="tx1"/>
-                </a:solidFill>
-                <a:latin typeface="+mn-lt"/>
-                <a:ea typeface="+mn-ea"/>
-                <a:cs typeface="+mn-cs"/>
-              </a:defRPr>
-            </a:lvl7pPr>
-            <a:lvl8pPr marL="3429000" indent="-228600" algn="l" defTabSz="914400" rtl="0" eaLnBrk="1" latinLnBrk="0" hangingPunct="1">
-              <a:lnSpc>
-                <a:spcPct val="90000"/>
-              </a:lnSpc>
-              <a:spcBef>
-                <a:spcPts val="500"/>
-              </a:spcBef>
-              <a:buFont typeface="Arial" panose="020B0604020202020204" pitchFamily="34" charset="0"/>
-              <a:buChar char="•"/>
-              <a:defRPr sz="1800" kern="1200">
-                <a:solidFill>
-                  <a:schemeClr val="tx1"/>
-                </a:solidFill>
-                <a:latin typeface="+mn-lt"/>
-                <a:ea typeface="+mn-ea"/>
-                <a:cs typeface="+mn-cs"/>
-              </a:defRPr>
-            </a:lvl8pPr>
-            <a:lvl9pPr marL="3886200" indent="-228600" algn="l" defTabSz="914400" rtl="0" eaLnBrk="1" latinLnBrk="0" hangingPunct="1">
-              <a:lnSpc>
-                <a:spcPct val="90000"/>
-              </a:lnSpc>
-              <a:spcBef>
-                <a:spcPts val="500"/>
-              </a:spcBef>
-              <a:buFont typeface="Arial" panose="020B0604020202020204" pitchFamily="34" charset="0"/>
-              <a:buChar char="•"/>
-              <a:defRPr sz="1800" kern="1200">
-                <a:solidFill>
-                  <a:schemeClr val="tx1"/>
-                </a:solidFill>
-                <a:latin typeface="+mn-lt"/>
-                <a:ea typeface="+mn-ea"/>
-                <a:cs typeface="+mn-cs"/>
-              </a:defRPr>
-            </a:lvl9pPr>
-          </a:lstStyle>
-          <a:p>
-            <a:pPr marL="0" indent="0">
-              <a:buNone/>
-            </a:pPr>
-            <a:r>
-              <a:rPr lang="zh-CN" altLang="en-US" sz="3200" dirty="0">
-                <a:effectLst>
-                  <a:outerShdw blurRad="38100" dist="38100" dir="2700000" algn="tl">
-                    <a:srgbClr val="000000">
-                      <a:alpha val="43137"/>
-                    </a:srgbClr>
-                  </a:outerShdw>
-                </a:effectLst>
-                <a:latin typeface="+mn-ea"/>
-              </a:rPr>
-              <a:t>基础操作原则</a:t>
-            </a:r>
-          </a:p>
-        </p:txBody>
-      </p:sp>
       <p:pic>
         <p:nvPicPr>
           <p:cNvPr id="4" name="图片 3" descr="图片包含 背景图案&#10;&#10;AI 生成的内容可能不正确。">
@@ -7757,7 +6834,7 @@
         </p:blipFill>
         <p:spPr>
           <a:xfrm>
-            <a:off x="7701915" y="4500564"/>
+            <a:off x="7395069" y="4383963"/>
             <a:ext cx="3971925" cy="2066725"/>
           </a:xfrm>
           <a:prstGeom prst="rect">
@@ -7765,6 +6842,224 @@
           </a:prstGeom>
         </p:spPr>
       </p:pic>
+      <p:sp>
+        <p:nvSpPr>
+          <p:cNvPr id="2" name="标题 1">
+            <a:extLst>
+              <a:ext uri="{FF2B5EF4-FFF2-40B4-BE49-F238E27FC236}">
+                <a16:creationId xmlns:a16="http://schemas.microsoft.com/office/drawing/2014/main" id="{D04EE6AE-918A-AFBE-5E49-9683EC1CA899}"/>
+              </a:ext>
+            </a:extLst>
+          </p:cNvPr>
+          <p:cNvSpPr>
+            <a:spLocks noGrp="1"/>
+          </p:cNvSpPr>
+          <p:nvPr>
+            <p:ph type="title"/>
+          </p:nvPr>
+        </p:nvSpPr>
+        <p:spPr>
+          <a:xfrm>
+            <a:off x="521208" y="662740"/>
+            <a:ext cx="11155680" cy="936652"/>
+          </a:xfrm>
+        </p:spPr>
+        <p:txBody>
+          <a:bodyPr/>
+          <a:lstStyle/>
+          <a:p>
+            <a:r>
+              <a:rPr lang="en-US" altLang="zh-CN" sz="4400" dirty="0"/>
+              <a:t>EFT</a:t>
+            </a:r>
+            <a:r>
+              <a:rPr lang="zh-CN" altLang="en-US" sz="4400" dirty="0"/>
+              <a:t>心理自助操的流程设计（</a:t>
+            </a:r>
+            <a:r>
+              <a:rPr lang="en-US" altLang="zh-CN" sz="4400" dirty="0"/>
+              <a:t>4</a:t>
+            </a:r>
+            <a:r>
+              <a:rPr lang="zh-CN" altLang="en-US" sz="4400" dirty="0"/>
+              <a:t>）</a:t>
+            </a:r>
+          </a:p>
+        </p:txBody>
+      </p:sp>
+      <p:sp>
+        <p:nvSpPr>
+          <p:cNvPr id="3" name="内容占位符 2">
+            <a:extLst>
+              <a:ext uri="{FF2B5EF4-FFF2-40B4-BE49-F238E27FC236}">
+                <a16:creationId xmlns:a16="http://schemas.microsoft.com/office/drawing/2014/main" id="{BE2D9C0E-2FE7-DF79-CA80-C32EE5E79965}"/>
+              </a:ext>
+            </a:extLst>
+          </p:cNvPr>
+          <p:cNvSpPr>
+            <a:spLocks noGrp="1"/>
+          </p:cNvSpPr>
+          <p:nvPr>
+            <p:ph idx="1"/>
+          </p:nvPr>
+        </p:nvSpPr>
+        <p:spPr>
+          <a:xfrm>
+            <a:off x="521208" y="1599392"/>
+            <a:ext cx="11500677" cy="3989337"/>
+          </a:xfrm>
+        </p:spPr>
+        <p:txBody>
+          <a:bodyPr/>
+          <a:lstStyle/>
+          <a:p>
+            <a:pPr marL="0" indent="0">
+              <a:buNone/>
+            </a:pPr>
+            <a:r>
+              <a:rPr lang="zh-CN" altLang="en-US" sz="1800" b="1" dirty="0">
+                <a:latin typeface="+mn-ea"/>
+              </a:rPr>
+              <a:t>基础操作原则</a:t>
+            </a:r>
+          </a:p>
+          <a:p>
+            <a:pPr marL="0" indent="0">
+              <a:buNone/>
+            </a:pPr>
+            <a:r>
+              <a:rPr lang="en-US" altLang="zh-CN" sz="1800" dirty="0" smtClean="0">
+                <a:latin typeface="+mn-ea"/>
+              </a:rPr>
+              <a:t>- </a:t>
+            </a:r>
+            <a:r>
+              <a:rPr lang="zh-CN" altLang="en-US" sz="1800" dirty="0" smtClean="0">
+                <a:latin typeface="+mn-ea"/>
+              </a:rPr>
+              <a:t>敲击</a:t>
+            </a:r>
+            <a:r>
+              <a:rPr lang="zh-CN" altLang="en-US" sz="1800" dirty="0" smtClean="0">
+                <a:latin typeface="+mn-ea"/>
+              </a:rPr>
+              <a:t>方法</a:t>
+            </a:r>
+            <a:r>
+              <a:rPr lang="zh-CN" altLang="en-US" sz="1800" dirty="0">
+                <a:latin typeface="+mn-ea"/>
+              </a:rPr>
+              <a:t>：用两根手指（随便哪只手都行）敲击或按摩。</a:t>
+            </a:r>
+            <a:endParaRPr lang="en-US" altLang="zh-CN" sz="1800" dirty="0" smtClean="0">
+              <a:latin typeface="+mn-ea"/>
+            </a:endParaRPr>
+          </a:p>
+          <a:p>
+            <a:pPr marL="0" indent="0">
+              <a:buNone/>
+            </a:pPr>
+            <a:r>
+              <a:rPr lang="en-US" altLang="zh-CN" sz="1800" dirty="0" smtClean="0">
+                <a:latin typeface="+mn-ea"/>
+              </a:rPr>
+              <a:t>- </a:t>
+            </a:r>
+            <a:r>
+              <a:rPr lang="zh-CN" altLang="en-US" sz="1800" dirty="0">
+                <a:latin typeface="+mn-ea"/>
+              </a:rPr>
+              <a:t>敲击力度：以 “轻柔且有触感” 为宜，无需用力按压，每次每个穴位敲击 </a:t>
+            </a:r>
+            <a:r>
+              <a:rPr lang="en-US" altLang="zh-CN" sz="1800" dirty="0">
+                <a:latin typeface="+mn-ea"/>
+              </a:rPr>
+              <a:t>5-7 </a:t>
+            </a:r>
+            <a:r>
+              <a:rPr lang="zh-CN" altLang="en-US" sz="1800" dirty="0">
+                <a:latin typeface="+mn-ea"/>
+              </a:rPr>
+              <a:t>次。</a:t>
+            </a:r>
+          </a:p>
+          <a:p>
+            <a:pPr marL="0" indent="0">
+              <a:buNone/>
+            </a:pPr>
+            <a:r>
+              <a:rPr lang="en-US" altLang="zh-CN" sz="1800" dirty="0">
+                <a:latin typeface="+mn-ea"/>
+              </a:rPr>
+              <a:t>- </a:t>
+            </a:r>
+            <a:r>
+              <a:rPr lang="zh-CN" altLang="en-US" sz="1800" dirty="0">
+                <a:latin typeface="+mn-ea"/>
+              </a:rPr>
+              <a:t>操作逻辑：先聚焦具体情绪（如 “我害怕水”），按顺序敲击上述穴位，循环 </a:t>
+            </a:r>
+            <a:r>
+              <a:rPr lang="en-US" altLang="zh-CN" sz="1800" dirty="0">
+                <a:latin typeface="+mn-ea"/>
+              </a:rPr>
+              <a:t>1-3 </a:t>
+            </a:r>
+            <a:r>
+              <a:rPr lang="zh-CN" altLang="en-US" sz="1800" dirty="0">
+                <a:latin typeface="+mn-ea"/>
+              </a:rPr>
+              <a:t>轮后，观察情绪强度是否降低。</a:t>
+            </a:r>
+          </a:p>
+          <a:p>
+            <a:pPr>
+              <a:buFontTx/>
+              <a:buChar char="-"/>
+            </a:pPr>
+            <a:r>
+              <a:rPr lang="zh-CN" altLang="en-US" sz="1800" dirty="0" smtClean="0">
+                <a:latin typeface="+mn-ea"/>
+              </a:rPr>
+              <a:t>注意</a:t>
+            </a:r>
+            <a:r>
+              <a:rPr lang="zh-CN" altLang="en-US" sz="1800" dirty="0">
+                <a:latin typeface="+mn-ea"/>
+              </a:rPr>
+              <a:t>：</a:t>
+            </a:r>
+            <a:r>
+              <a:rPr lang="en-US" altLang="zh-CN" sz="1800" dirty="0" smtClean="0">
+                <a:latin typeface="+mn-ea"/>
+              </a:rPr>
+              <a:t>EFT</a:t>
+            </a:r>
+            <a:r>
+              <a:rPr lang="zh-CN" altLang="en-US" sz="1800" dirty="0" smtClean="0">
+                <a:latin typeface="+mn-ea"/>
+              </a:rPr>
+              <a:t>仅</a:t>
+            </a:r>
+            <a:r>
+              <a:rPr lang="zh-CN" altLang="en-US" sz="1800" dirty="0">
+                <a:latin typeface="+mn-ea"/>
+              </a:rPr>
+              <a:t>作为情绪缓解的辅助方式，若有严重心理问题，仍需结合专业心理治疗</a:t>
+            </a:r>
+            <a:r>
+              <a:rPr lang="zh-CN" altLang="en-US" sz="1800" dirty="0" smtClean="0">
+                <a:latin typeface="+mn-ea"/>
+              </a:rPr>
+              <a:t>。</a:t>
+            </a:r>
+            <a:endParaRPr lang="en-US" altLang="zh-CN" sz="1800" dirty="0" smtClean="0">
+              <a:latin typeface="+mn-ea"/>
+            </a:endParaRPr>
+          </a:p>
+        </p:txBody>
+      </p:sp>
     </p:spTree>
     <p:extLst>
       <p:ext uri="{BB962C8B-B14F-4D97-AF65-F5344CB8AC3E}">
@@ -7828,21 +7123,26 @@
           <a:lstStyle/>
           <a:p>
             <a:r>
-              <a:rPr lang="en-US" altLang="zh-CN" sz="900" dirty="0"/>
+              <a:rPr lang="en-US" altLang="zh-CN" sz="4400" dirty="0"/>
               <a:t>EFT </a:t>
             </a:r>
             <a:r>
-              <a:rPr lang="zh-CN" altLang="en-US" sz="900" dirty="0"/>
-              <a:t>核心敲击穴位（</a:t>
-            </a:r>
-            <a:r>
-              <a:rPr lang="en-US" altLang="zh-CN" sz="900" dirty="0"/>
-              <a:t>9</a:t>
-            </a:r>
-            <a:r>
-              <a:rPr lang="zh-CN" altLang="en-US" sz="900" dirty="0"/>
+              <a:rPr lang="zh-CN" altLang="en-US" sz="4400" dirty="0"/>
+              <a:t>核心敲击穴位</a:t>
+            </a:r>
+            <a:r>
+              <a:rPr lang="zh-CN" altLang="en-US" sz="4400" dirty="0" smtClean="0"/>
+              <a:t>（</a:t>
+            </a:r>
+            <a:r>
+              <a:rPr lang="en-US" altLang="zh-CN" sz="4400" dirty="0" smtClean="0"/>
+              <a:t>1</a:t>
+            </a:r>
+            <a:r>
+              <a:rPr lang="zh-CN" altLang="en-US" sz="4400" dirty="0" smtClean="0"/>
               <a:t>）</a:t>
             </a:r>
+            <a:endParaRPr lang="zh-CN" altLang="en-US" sz="4400" dirty="0"/>
           </a:p>
         </p:txBody>
       </p:sp>
@@ -7942,7 +7242,7 @@
               <a:rPr lang="zh-CN" altLang="en-US" sz="1800" dirty="0" smtClean="0">
                 <a:latin typeface="+mn-ea"/>
               </a:rPr>
-              <a:t>反应</a:t>
+              <a:t>反应。</a:t>
             </a:r>
             <a:endParaRPr lang="zh-CN" altLang="en-US" sz="1800" dirty="0">
               <a:latin typeface="+mn-ea"/>
@@ -7962,7 +7262,7 @@
               <a:rPr lang="zh-CN" altLang="en-US" sz="1800" dirty="0" smtClean="0">
                 <a:latin typeface="+mn-ea"/>
               </a:rPr>
-              <a:t>回报</a:t>
+              <a:t>回报。</a:t>
             </a:r>
             <a:endParaRPr lang="zh-CN" altLang="en-US" sz="1800" dirty="0">
               <a:latin typeface="+mn-ea"/>
@@ -8345,21 +7645,26 @@
           <a:lstStyle/>
           <a:p>
             <a:r>
-              <a:rPr lang="en-US" altLang="zh-CN" sz="900" dirty="0"/>
+              <a:rPr lang="en-US" altLang="zh-CN" sz="4400" dirty="0"/>
               <a:t>EFT </a:t>
             </a:r>
             <a:r>
-              <a:rPr lang="zh-CN" altLang="en-US" sz="900" dirty="0"/>
-              <a:t>核心敲击穴位（</a:t>
-            </a:r>
-            <a:r>
-              <a:rPr lang="en-US" altLang="zh-CN" sz="900" dirty="0"/>
-              <a:t>9</a:t>
-            </a:r>
-            <a:r>
-              <a:rPr lang="zh-CN" altLang="en-US" sz="900" dirty="0"/>
+              <a:rPr lang="zh-CN" altLang="en-US" sz="4400" dirty="0"/>
+              <a:t>核心敲击穴位</a:t>
+            </a:r>
+            <a:r>
+              <a:rPr lang="zh-CN" altLang="en-US" sz="4400" dirty="0" smtClean="0"/>
+              <a:t>（</a:t>
+            </a:r>
+            <a:r>
+              <a:rPr lang="en-US" altLang="zh-CN" sz="4400" dirty="0" smtClean="0"/>
+              <a:t>2</a:t>
+            </a:r>
+            <a:r>
+              <a:rPr lang="zh-CN" altLang="en-US" sz="4400" dirty="0" smtClean="0"/>
               <a:t>）</a:t>
             </a:r>
+            <a:endParaRPr lang="zh-CN" altLang="en-US" sz="4400" dirty="0"/>
           </a:p>
         </p:txBody>
       </p:sp>
@@ -8728,8 +8033,8 @@
         </p:blipFill>
         <p:spPr>
           <a:xfrm>
-            <a:off x="7641126" y="4546600"/>
-            <a:ext cx="3438852" cy="1933567"/>
+            <a:off x="7435266" y="4430852"/>
+            <a:ext cx="3644712" cy="2049316"/>
           </a:xfrm>
           <a:prstGeom prst="rect">
             <a:avLst/>
@@ -8802,21 +8107,26 @@
           <a:lstStyle/>
           <a:p>
             <a:r>
-              <a:rPr lang="en-US" altLang="zh-CN" sz="900" dirty="0"/>
+              <a:rPr lang="en-US" altLang="zh-CN" sz="4400" dirty="0"/>
               <a:t>EFT </a:t>
             </a:r>
             <a:r>
-              <a:rPr lang="zh-CN" altLang="en-US" sz="900" dirty="0"/>
-              <a:t>核心敲击穴位（</a:t>
-            </a:r>
-            <a:r>
-              <a:rPr lang="en-US" altLang="zh-CN" sz="900" dirty="0"/>
-              <a:t>1</a:t>
-            </a:r>
-            <a:r>
-              <a:rPr lang="zh-CN" altLang="en-US" sz="900" dirty="0"/>
+              <a:rPr lang="zh-CN" altLang="en-US" sz="4400" dirty="0"/>
+              <a:t>核心敲击穴位</a:t>
+            </a:r>
+            <a:r>
+              <a:rPr lang="zh-CN" altLang="en-US" sz="4400" dirty="0" smtClean="0"/>
+              <a:t>（</a:t>
+            </a:r>
+            <a:r>
+              <a:rPr lang="en-US" altLang="zh-CN" sz="4400" dirty="0" smtClean="0"/>
+              <a:t>3</a:t>
+            </a:r>
+            <a:r>
+              <a:rPr lang="zh-CN" altLang="en-US" sz="4400" dirty="0" smtClean="0"/>
               <a:t>）</a:t>
             </a:r>
+            <a:endParaRPr lang="zh-CN" altLang="en-US" sz="4400" dirty="0"/>
           </a:p>
         </p:txBody>
       </p:sp>
@@ -8838,8 +8148,8 @@
         </p:nvSpPr>
         <p:spPr>
           <a:xfrm>
-            <a:off x="8096470" y="1604609"/>
-            <a:ext cx="3704190" cy="3989337"/>
+            <a:off x="521208" y="1562169"/>
+            <a:ext cx="11155680" cy="1528939"/>
           </a:xfrm>
         </p:spPr>
         <p:txBody>
@@ -9191,8 +8501,8 @@
         </p:nvSpPr>
         <p:spPr>
           <a:xfrm>
-            <a:off x="515112" y="1562100"/>
-            <a:ext cx="7445394" cy="3989337"/>
+            <a:off x="521208" y="2949944"/>
+            <a:ext cx="11155680" cy="2248923"/>
           </a:xfrm>
           <a:prstGeom prst="rect">
             <a:avLst/>
@@ -9370,22 +8680,16 @@
               <a:buNone/>
             </a:pPr>
             <a:r>
+              <a:rPr lang="zh-CN" altLang="en-US" sz="1800" dirty="0" smtClean="0">
+                <a:latin typeface="+mn-ea"/>
+              </a:rPr>
+              <a:t>膀胱</a:t>
+            </a:r>
+            <a:r>
               <a:rPr lang="zh-CN" altLang="en-US" sz="1800" dirty="0">
                 <a:latin typeface="+mn-ea"/>
               </a:rPr>
-              <a:t>方法：用两根手指（随便哪只手都行）敲击或按摩。敲击时要坚定而柔和，动作不要过重，以免损伤身体。但是要连续敲击，这样才能刺激体内能量的流动。同时一边敲击，一边说肯定句。</a:t>
-            </a:r>
-          </a:p>
-          <a:p>
-            <a:pPr marL="0" indent="0">
-              <a:buFont typeface="Arial" panose="020B0604020202020204" pitchFamily="34" charset="0"/>
-              <a:buNone/>
-            </a:pPr>
-            <a:r>
-              <a:rPr lang="zh-CN" altLang="en-US" sz="1800" dirty="0">
-                <a:latin typeface="+mn-ea"/>
-              </a:rPr>
-              <a:t>膀胱经这条经络的情绪包括，优柔寡断，无能为力，没有意志力，无法或很难下决定，缺乏安全感，绝望，没耐性，害怕冒犯他人。</a:t>
+              <a:t>经这条经络的情绪包括，优柔寡断，无能为力，没有意志力，无法或很难下决定，缺乏安全感，绝望，没耐性，害怕冒犯他人。</a:t>
             </a:r>
           </a:p>
           <a:p>
@@ -9477,21 +8781,26 @@
           <a:lstStyle/>
           <a:p>
             <a:r>
-              <a:rPr lang="en-US" altLang="zh-CN" sz="900" dirty="0"/>
+              <a:rPr lang="en-US" altLang="zh-CN" sz="4400" dirty="0"/>
               <a:t>EFT </a:t>
             </a:r>
             <a:r>
-              <a:rPr lang="zh-CN" altLang="en-US" sz="900" dirty="0"/>
-              <a:t>核心敲击穴位（</a:t>
-            </a:r>
-            <a:r>
-              <a:rPr lang="en-US" altLang="zh-CN" sz="900" dirty="0"/>
-              <a:t>2</a:t>
-            </a:r>
-            <a:r>
-              <a:rPr lang="zh-CN" altLang="en-US" sz="900" dirty="0"/>
+              <a:rPr lang="zh-CN" altLang="en-US" sz="4400" dirty="0"/>
+              <a:t>核心敲击穴位</a:t>
+            </a:r>
+            <a:r>
+              <a:rPr lang="zh-CN" altLang="en-US" sz="4400" dirty="0" smtClean="0"/>
+              <a:t>（</a:t>
+            </a:r>
+            <a:r>
+              <a:rPr lang="en-US" altLang="zh-CN" sz="4400" dirty="0" smtClean="0"/>
+              <a:t>4</a:t>
+            </a:r>
+            <a:r>
+              <a:rPr lang="zh-CN" altLang="en-US" sz="4400" dirty="0" smtClean="0"/>
               <a:t>）</a:t>
             </a:r>
+            <a:endParaRPr lang="zh-CN" altLang="en-US" sz="4400" dirty="0"/>
           </a:p>
         </p:txBody>
       </p:sp>
@@ -9598,7 +8907,19 @@
               <a:rPr lang="zh-CN" altLang="en-US" sz="1800" dirty="0">
                 <a:latin typeface="+mn-ea"/>
               </a:rPr>
-              <a:t>子髎」，位于两眼尾外角约两指宽的</a:t>
+              <a:t>子</a:t>
+            </a:r>
+            <a:r>
+              <a:rPr lang="zh-CN" altLang="en-US" sz="1800" dirty="0" smtClean="0">
+                <a:latin typeface="+mn-ea"/>
+              </a:rPr>
+              <a:t>髎，</a:t>
+            </a:r>
+            <a:r>
+              <a:rPr lang="zh-CN" altLang="en-US" sz="1800" dirty="0">
+                <a:latin typeface="+mn-ea"/>
+              </a:rPr>
+              <a:t>位于两眼尾外角约两指宽的</a:t>
             </a:r>
             <a:r>
               <a:rPr lang="zh-CN" altLang="en-US" sz="1800" dirty="0" smtClean="0">
@@ -9934,12 +9255,15 @@
         </p:blipFill>
         <p:spPr>
           <a:xfrm>
-            <a:off x="8338601" y="4168562"/>
-            <a:ext cx="1880281" cy="1880281"/>
+            <a:off x="8248011" y="4084108"/>
+            <a:ext cx="1995419" cy="1995419"/>
           </a:xfrm>
           <a:prstGeom prst="rect">
             <a:avLst/>
           </a:prstGeom>
+          <a:effectLst>
+            <a:softEdge rad="127000"/>
+          </a:effectLst>
         </p:spPr>
       </p:pic>
       <p:sp>
@@ -10152,7 +9476,7 @@
               <a:rPr lang="zh-CN" altLang="en-US" sz="1800" dirty="0" smtClean="0">
                 <a:latin typeface="+mn-ea"/>
               </a:rPr>
-              <a:t>虐待</a:t>
+              <a:t>虐待。</a:t>
             </a:r>
             <a:endParaRPr lang="zh-CN" altLang="en-US" sz="1800" dirty="0">
               <a:latin typeface="+mn-ea"/>
@@ -10310,21 +9634,26 @@
           <a:lstStyle/>
           <a:p>
             <a:r>
-              <a:rPr lang="en-US" altLang="zh-CN" sz="900" dirty="0"/>
+              <a:rPr lang="en-US" altLang="zh-CN" sz="4400" dirty="0"/>
               <a:t>EFT </a:t>
             </a:r>
             <a:r>
-              <a:rPr lang="zh-CN" altLang="en-US" sz="900" dirty="0"/>
-              <a:t>核心敲击穴位（</a:t>
-            </a:r>
-            <a:r>
-              <a:rPr lang="en-US" altLang="zh-CN" sz="900" dirty="0"/>
-              <a:t>3</a:t>
-            </a:r>
-            <a:r>
-              <a:rPr lang="zh-CN" altLang="en-US" sz="900" dirty="0"/>
+              <a:rPr lang="zh-CN" altLang="en-US" sz="4400" dirty="0"/>
+              <a:t>核心敲击穴位</a:t>
+            </a:r>
+            <a:r>
+              <a:rPr lang="zh-CN" altLang="en-US" sz="4400" dirty="0" smtClean="0"/>
+              <a:t>（</a:t>
+            </a:r>
+            <a:r>
+              <a:rPr lang="en-US" altLang="zh-CN" sz="4400" dirty="0" smtClean="0"/>
+              <a:t>5</a:t>
+            </a:r>
+            <a:r>
+              <a:rPr lang="zh-CN" altLang="en-US" sz="4400" dirty="0" smtClean="0"/>
               <a:t>）</a:t>
             </a:r>
+            <a:endParaRPr lang="zh-CN" altLang="en-US" sz="4400" dirty="0"/>
           </a:p>
         </p:txBody>
       </p:sp>
@@ -10678,7 +10007,46 @@
                 </a:effectLst>
                 <a:latin typeface="+mn-ea"/>
               </a:rPr>
-              <a:t>承泣穴和四白穴</a:t>
+              <a:t>承泣穴和四白</a:t>
+            </a:r>
+            <a:r>
+              <a:rPr lang="zh-CN" altLang="en-US" sz="3200" dirty="0" smtClean="0">
+                <a:effectLst>
+                  <a:outerShdw blurRad="38100" dist="38100" dir="2700000" algn="tl">
+                    <a:srgbClr val="000000">
+                      <a:alpha val="43137"/>
+                    </a:srgbClr>
+                  </a:outerShdw>
+                </a:effectLst>
+                <a:latin typeface="+mn-ea"/>
+              </a:rPr>
+              <a:t>穴</a:t>
+            </a:r>
+            <a:r>
+              <a:rPr lang="zh-CN" altLang="en-US" sz="3200" dirty="0">
+                <a:effectLst>
+                  <a:outerShdw blurRad="38100" dist="38100" dir="2700000" algn="tl">
+                    <a:srgbClr val="000000">
+                      <a:alpha val="43137"/>
+                    </a:srgbClr>
+                  </a:outerShdw>
+                </a:effectLst>
+                <a:latin typeface="+mn-ea"/>
+              </a:rPr>
+              <a:t>（</a:t>
+            </a:r>
+            <a:r>
+              <a:rPr lang="zh-CN" altLang="en-US" sz="3200" dirty="0">
+                <a:effectLst>
+                  <a:outerShdw blurRad="38100" dist="38100" dir="2700000" algn="tl">
+                    <a:srgbClr val="000000">
+                      <a:alpha val="43137"/>
+                    </a:srgbClr>
+                  </a:outerShdw>
+                </a:effectLst>
+                <a:latin typeface="+mn-ea"/>
+              </a:rPr>
+              <a:t>足阳明胃经）</a:t>
             </a:r>
           </a:p>
         </p:txBody>
@@ -10711,8 +10079,8 @@
         </p:blipFill>
         <p:spPr>
           <a:xfrm>
-            <a:off x="8150859" y="4691837"/>
-            <a:ext cx="1897039" cy="1897039"/>
+            <a:off x="7972171" y="4513149"/>
+            <a:ext cx="2075728" cy="2075728"/>
           </a:xfrm>
           <a:prstGeom prst="rect">
             <a:avLst/>
@@ -10739,7 +10107,7 @@
         <p:spPr>
           <a:xfrm>
             <a:off x="515112" y="2973246"/>
-            <a:ext cx="6012855" cy="2881841"/>
+            <a:ext cx="6032974" cy="2881841"/>
           </a:xfrm>
           <a:prstGeom prst="rect">
             <a:avLst/>
@@ -10992,8 +10360,8 @@
         </p:nvSpPr>
         <p:spPr>
           <a:xfrm>
-            <a:off x="6437134" y="2973633"/>
-            <a:ext cx="5233656" cy="1539515"/>
+            <a:off x="6548086" y="2973633"/>
+            <a:ext cx="5122704" cy="1539515"/>
           </a:xfrm>
           <a:prstGeom prst="rect">
             <a:avLst/>
@@ -11192,13 +10560,13 @@
               <a:rPr lang="zh-CN" altLang="en-US" sz="1800" dirty="0">
                 <a:latin typeface="+mn-ea"/>
               </a:rPr>
-              <a:t>，轻敲或按摩胃经的穴道「承泣」</a:t>
+              <a:t>，轻敲或按摩胃经的穴道「承泣</a:t>
             </a:r>
             <a:r>
               <a:rPr lang="zh-CN" altLang="en-US" sz="1800" dirty="0" smtClean="0">
                 <a:latin typeface="+mn-ea"/>
               </a:rPr>
-              <a:t>，</a:t>
+              <a:t>」。</a:t>
             </a:r>
             <a:endParaRPr lang="zh-CN" altLang="en-US" sz="1800" dirty="0">
               <a:latin typeface="+mn-ea"/>
@@ -11356,19 +10724,7 @@
               <a:rPr lang="zh-CN" altLang="en-US" sz="1800" dirty="0" smtClean="0">
                 <a:latin typeface="+mn-ea"/>
               </a:rPr>
-              <a:t>头顶</a:t>
-            </a:r>
-            <a:r>
-              <a:rPr lang="zh-CN" altLang="en-US" sz="1800" dirty="0" smtClean="0">
-                <a:latin typeface="+mn-ea"/>
-              </a:rPr>
-              <a:t>等十几</a:t>
-            </a:r>
-            <a:r>
-              <a:rPr lang="zh-CN" altLang="en-US" sz="1800" dirty="0" smtClean="0">
-                <a:latin typeface="+mn-ea"/>
-              </a:rPr>
-              <a:t>个</a:t>
+              <a:t>头顶等十几个</a:t>
             </a:r>
             <a:r>
               <a:rPr lang="zh-CN" altLang="en-US" sz="1800" dirty="0">
@@ -11613,19 +10969,7 @@
               <a:rPr lang="zh-CN" altLang="en-US" sz="1800" dirty="0" smtClean="0">
                 <a:latin typeface="+mn-ea"/>
               </a:rPr>
-              <a:t>云南省</a:t>
-            </a:r>
-            <a:r>
-              <a:rPr lang="zh-CN" altLang="en-US" sz="1800" dirty="0" smtClean="0">
-                <a:latin typeface="+mn-ea"/>
-              </a:rPr>
-              <a:t>戒毒</a:t>
-            </a:r>
-            <a:r>
-              <a:rPr lang="zh-CN" altLang="en-US" sz="1800" dirty="0" smtClean="0">
-                <a:latin typeface="+mn-ea"/>
-              </a:rPr>
-              <a:t>管理</a:t>
+              <a:t>云南省戒毒管理</a:t>
             </a:r>
             <a:r>
               <a:rPr lang="zh-CN" altLang="en-US" sz="1800" dirty="0">
@@ -12050,21 +11394,26 @@
           <a:lstStyle/>
           <a:p>
             <a:r>
-              <a:rPr lang="en-US" altLang="zh-CN" sz="900" dirty="0"/>
+              <a:rPr lang="en-US" altLang="zh-CN" sz="4400" dirty="0"/>
               <a:t>EFT </a:t>
             </a:r>
             <a:r>
-              <a:rPr lang="zh-CN" altLang="en-US" sz="900" dirty="0"/>
-              <a:t>核心敲击穴位（</a:t>
-            </a:r>
-            <a:r>
-              <a:rPr lang="en-US" altLang="zh-CN" sz="900" dirty="0"/>
-              <a:t>4</a:t>
-            </a:r>
-            <a:r>
-              <a:rPr lang="zh-CN" altLang="en-US" sz="900" dirty="0"/>
+              <a:rPr lang="zh-CN" altLang="en-US" sz="4400" dirty="0"/>
+              <a:t>核心敲击穴位</a:t>
+            </a:r>
+            <a:r>
+              <a:rPr lang="zh-CN" altLang="en-US" sz="4400" dirty="0" smtClean="0"/>
+              <a:t>（</a:t>
+            </a:r>
+            <a:r>
+              <a:rPr lang="en-US" altLang="zh-CN" sz="4400" dirty="0" smtClean="0"/>
+              <a:t>6</a:t>
+            </a:r>
+            <a:r>
+              <a:rPr lang="zh-CN" altLang="en-US" sz="4400" dirty="0" smtClean="0"/>
               <a:t>）</a:t>
             </a:r>
+            <a:endParaRPr lang="zh-CN" altLang="en-US" sz="4400" dirty="0"/>
           </a:p>
         </p:txBody>
       </p:sp>
@@ -12204,7 +11553,7 @@
         </p:nvSpPr>
         <p:spPr>
           <a:xfrm>
-            <a:off x="264034" y="5566122"/>
+            <a:off x="319267" y="5627491"/>
             <a:ext cx="9337166" cy="757207"/>
           </a:xfrm>
           <a:prstGeom prst="rect">
@@ -12418,8 +11767,44 @@
                 </a:effectLst>
                 <a:latin typeface="+mn-ea"/>
               </a:rPr>
-              <a:t>人中穴（水沟穴）</a:t>
-            </a:r>
+              <a:t>人中穴（水沟穴</a:t>
+            </a:r>
+            <a:r>
+              <a:rPr lang="zh-CN" altLang="en-US" sz="3200" dirty="0">
+                <a:effectLst>
+                  <a:outerShdw blurRad="38100" dist="38100" dir="2700000" algn="tl">
+                    <a:srgbClr val="000000">
+                      <a:alpha val="43137"/>
+                    </a:srgbClr>
+                  </a:outerShdw>
+                </a:effectLst>
+                <a:latin typeface="+mn-ea"/>
+              </a:rPr>
+              <a:t>）（督</a:t>
+            </a:r>
+            <a:r>
+              <a:rPr lang="zh-CN" altLang="en-US" sz="3200" dirty="0" smtClean="0">
+                <a:effectLst>
+                  <a:outerShdw blurRad="38100" dist="38100" dir="2700000" algn="tl">
+                    <a:srgbClr val="000000">
+                      <a:alpha val="43137"/>
+                    </a:srgbClr>
+                  </a:outerShdw>
+                </a:effectLst>
+                <a:latin typeface="+mn-ea"/>
+              </a:rPr>
+              <a:t>脉）</a:t>
+            </a:r>
+            <a:endParaRPr lang="zh-CN" altLang="en-US" sz="3200" dirty="0">
+              <a:effectLst>
+                <a:outerShdw blurRad="38100" dist="38100" dir="2700000" algn="tl">
+                  <a:srgbClr val="000000">
+                    <a:alpha val="43137"/>
+                  </a:srgbClr>
+                </a:outerShdw>
+              </a:effectLst>
+              <a:latin typeface="+mn-ea"/>
+            </a:endParaRPr>
           </a:p>
         </p:txBody>
       </p:sp>
@@ -12451,7 +11836,7 @@
         </p:blipFill>
         <p:spPr>
           <a:xfrm>
-            <a:off x="9161708" y="4309147"/>
+            <a:off x="8038653" y="4431885"/>
             <a:ext cx="2014182" cy="2014182"/>
           </a:xfrm>
           <a:prstGeom prst="rect">
@@ -12479,7 +11864,7 @@
         <p:spPr>
           <a:xfrm>
             <a:off x="515112" y="3070204"/>
-            <a:ext cx="8450072" cy="2495918"/>
+            <a:ext cx="11161776" cy="2495918"/>
           </a:xfrm>
           <a:prstGeom prst="rect">
             <a:avLst/>
@@ -12714,7 +12099,7 @@
               <a:rPr lang="zh-CN" altLang="en-US" sz="1800" dirty="0" smtClean="0">
                 <a:latin typeface="+mn-ea"/>
               </a:rPr>
-              <a:t>」</a:t>
+              <a:t>」。</a:t>
             </a:r>
             <a:endParaRPr lang="zh-CN" altLang="en-US" sz="1800" dirty="0">
               <a:latin typeface="+mn-ea"/>
@@ -12792,21 +12177,26 @@
           <a:lstStyle/>
           <a:p>
             <a:r>
-              <a:rPr lang="en-US" altLang="zh-CN" sz="900" dirty="0"/>
+              <a:rPr lang="en-US" altLang="zh-CN" sz="4400" dirty="0"/>
               <a:t>EFT </a:t>
             </a:r>
             <a:r>
-              <a:rPr lang="zh-CN" altLang="en-US" sz="900" dirty="0"/>
-              <a:t>核心敲击穴位（</a:t>
-            </a:r>
-            <a:r>
-              <a:rPr lang="en-US" altLang="zh-CN" sz="900" dirty="0"/>
-              <a:t>5</a:t>
-            </a:r>
-            <a:r>
-              <a:rPr lang="zh-CN" altLang="en-US" sz="900" dirty="0"/>
+              <a:rPr lang="zh-CN" altLang="en-US" sz="4400" dirty="0"/>
+              <a:t>核心敲击穴位</a:t>
+            </a:r>
+            <a:r>
+              <a:rPr lang="zh-CN" altLang="en-US" sz="4400" dirty="0" smtClean="0"/>
+              <a:t>（</a:t>
+            </a:r>
+            <a:r>
+              <a:rPr lang="en-US" altLang="zh-CN" sz="4400" dirty="0" smtClean="0"/>
+              <a:t>7</a:t>
+            </a:r>
+            <a:r>
+              <a:rPr lang="zh-CN" altLang="en-US" sz="4400" dirty="0" smtClean="0"/>
               <a:t>）</a:t>
             </a:r>
+            <a:endParaRPr lang="zh-CN" altLang="en-US" sz="4400" dirty="0"/>
           </a:p>
         </p:txBody>
       </p:sp>
@@ -12828,8 +12218,8 @@
         </p:nvSpPr>
         <p:spPr>
           <a:xfrm>
-            <a:off x="521207" y="1595372"/>
-            <a:ext cx="4819857" cy="1068153"/>
+            <a:off x="521208" y="1595372"/>
+            <a:ext cx="5431475" cy="1068153"/>
           </a:xfrm>
         </p:spPr>
         <p:txBody>
@@ -12841,30 +12231,30 @@
               <a:buChar char="n"/>
             </a:pPr>
             <a:r>
-              <a:rPr lang="zh-CN" altLang="en-US" sz="1200" dirty="0">
+              <a:rPr lang="zh-CN" altLang="en-US" sz="1400" dirty="0">
                 <a:latin typeface="+mn-ea"/>
               </a:rPr>
               <a:t>对应情绪</a:t>
             </a:r>
             <a:r>
-              <a:rPr lang="zh-CN" altLang="en-US" sz="1200" dirty="0" smtClean="0">
+              <a:rPr lang="zh-CN" altLang="en-US" sz="1400" dirty="0" smtClean="0">
                 <a:latin typeface="+mn-ea"/>
               </a:rPr>
               <a:t>：</a:t>
             </a:r>
             <a:r>
-              <a:rPr lang="zh-CN" altLang="en-US" sz="1200" dirty="0">
+              <a:rPr lang="zh-CN" altLang="en-US" sz="1400" dirty="0">
                 <a:latin typeface="+mn-ea"/>
               </a:rPr>
               <a:t>被压抑的</a:t>
             </a:r>
             <a:r>
-              <a:rPr lang="zh-CN" altLang="en-US" sz="1200" dirty="0" smtClean="0">
+              <a:rPr lang="zh-CN" altLang="en-US" sz="1400" dirty="0" smtClean="0">
                 <a:latin typeface="+mn-ea"/>
               </a:rPr>
               <a:t>情绪</a:t>
             </a:r>
-            <a:endParaRPr lang="en-US" altLang="zh-CN" sz="1200" dirty="0" smtClean="0">
+            <a:endParaRPr lang="en-US" altLang="zh-CN" sz="1400" dirty="0" smtClean="0">
               <a:latin typeface="+mn-ea"/>
             </a:endParaRPr>
           </a:p>
@@ -12874,36 +12264,36 @@
               <a:buChar char="n"/>
             </a:pPr>
             <a:r>
-              <a:rPr lang="zh-CN" altLang="en-US" sz="1200" dirty="0" smtClean="0">
+              <a:rPr lang="zh-CN" altLang="en-US" sz="1400" dirty="0" smtClean="0">
                 <a:latin typeface="+mn-ea"/>
               </a:rPr>
               <a:t>穴位</a:t>
             </a:r>
             <a:r>
-              <a:rPr lang="zh-CN" altLang="en-US" sz="1200" dirty="0">
+              <a:rPr lang="zh-CN" altLang="en-US" sz="1400" dirty="0">
                 <a:latin typeface="+mn-ea"/>
               </a:rPr>
               <a:t>位置</a:t>
             </a:r>
             <a:r>
-              <a:rPr lang="zh-CN" altLang="en-US" sz="1200" dirty="0" smtClean="0">
+              <a:rPr lang="zh-CN" altLang="en-US" sz="1400" dirty="0" smtClean="0">
                 <a:latin typeface="+mn-ea"/>
               </a:rPr>
               <a:t>：</a:t>
             </a:r>
             <a:r>
-              <a:rPr lang="zh-CN" altLang="en-US" sz="1200" dirty="0">
+              <a:rPr lang="zh-CN" altLang="en-US" sz="1400" dirty="0">
                 <a:latin typeface="+mn-ea"/>
               </a:rPr>
               <a:t>下嘴唇下方、下巴骨上方的凹陷</a:t>
             </a:r>
             <a:r>
-              <a:rPr lang="zh-CN" altLang="en-US" sz="1200" dirty="0" smtClean="0">
+              <a:rPr lang="zh-CN" altLang="en-US" sz="1400" dirty="0" smtClean="0">
                 <a:latin typeface="+mn-ea"/>
               </a:rPr>
               <a:t>处</a:t>
             </a:r>
-            <a:endParaRPr lang="en-US" altLang="zh-CN" sz="1200" dirty="0" smtClean="0">
+            <a:endParaRPr lang="en-US" altLang="zh-CN" sz="1400" dirty="0" smtClean="0">
               <a:latin typeface="+mn-ea"/>
             </a:endParaRPr>
           </a:p>
@@ -12913,36 +12303,36 @@
               <a:buChar char="n"/>
             </a:pPr>
             <a:r>
-              <a:rPr lang="zh-CN" altLang="en-US" sz="1200" dirty="0" smtClean="0">
+              <a:rPr lang="zh-CN" altLang="en-US" sz="1400" dirty="0" smtClean="0">
                 <a:latin typeface="+mn-ea"/>
               </a:rPr>
               <a:t>功效</a:t>
             </a:r>
             <a:r>
-              <a:rPr lang="zh-CN" altLang="en-US" sz="1200" dirty="0">
+              <a:rPr lang="zh-CN" altLang="en-US" sz="1400" dirty="0">
                 <a:latin typeface="+mn-ea"/>
               </a:rPr>
               <a:t>作用</a:t>
             </a:r>
             <a:r>
-              <a:rPr lang="zh-CN" altLang="en-US" sz="1200" dirty="0" smtClean="0">
+              <a:rPr lang="zh-CN" altLang="en-US" sz="1400" dirty="0" smtClean="0">
                 <a:latin typeface="+mn-ea"/>
               </a:rPr>
               <a:t>：稳定</a:t>
             </a:r>
             <a:r>
-              <a:rPr lang="zh-CN" altLang="en-US" sz="1200" dirty="0">
+              <a:rPr lang="zh-CN" altLang="en-US" sz="1400" dirty="0">
                 <a:latin typeface="+mn-ea"/>
               </a:rPr>
               <a:t>情绪状态，尤其适合缓解失控感、无助</a:t>
             </a:r>
             <a:r>
-              <a:rPr lang="zh-CN" altLang="en-US" sz="1200" dirty="0" smtClean="0">
+              <a:rPr lang="zh-CN" altLang="en-US" sz="1400" dirty="0" smtClean="0">
                 <a:latin typeface="+mn-ea"/>
               </a:rPr>
               <a:t>感</a:t>
             </a:r>
-            <a:endParaRPr lang="zh-CN" altLang="en-US" sz="1200" dirty="0">
+            <a:endParaRPr lang="zh-CN" altLang="en-US" sz="1400" dirty="0">
               <a:latin typeface="+mn-ea"/>
             </a:endParaRPr>
           </a:p>
@@ -13211,8 +12601,8 @@
         </p:blipFill>
         <p:spPr>
           <a:xfrm>
-            <a:off x="9140717" y="3911946"/>
-            <a:ext cx="1959591" cy="1959591"/>
+            <a:off x="9389477" y="4267445"/>
+            <a:ext cx="2287411" cy="2287411"/>
           </a:xfrm>
           <a:prstGeom prst="rect">
             <a:avLst/>
@@ -13238,8 +12628,8 @@
         </p:nvSpPr>
         <p:spPr>
           <a:xfrm>
-            <a:off x="521208" y="2791644"/>
-            <a:ext cx="8042929" cy="3079893"/>
+            <a:off x="521208" y="2841800"/>
+            <a:ext cx="8622792" cy="3079893"/>
           </a:xfrm>
           <a:prstGeom prst="rect">
             <a:avLst/>
@@ -13413,17 +12803,20 @@
           </a:lstStyle>
           <a:p>
             <a:pPr marL="0" indent="0">
-              <a:buFont typeface="Arial" panose="020B0604020202020204" pitchFamily="34" charset="0"/>
-              <a:buNone/>
-            </a:pPr>
-            <a:r>
-              <a:rPr lang="zh-CN" altLang="en-US" sz="1200" dirty="0" smtClean="0">
+              <a:lnSpc>
+                <a:spcPts val="1600"/>
+              </a:lnSpc>
+              <a:buFont typeface="Arial" panose="020B0604020202020204" pitchFamily="34" charset="0"/>
+              <a:buNone/>
+            </a:pPr>
+            <a:r>
+              <a:rPr lang="zh-CN" altLang="en-US" sz="1400" dirty="0" smtClean="0">
                 <a:latin typeface="+mn-ea"/>
               </a:rPr>
               <a:t>任</a:t>
             </a:r>
             <a:r>
-              <a:rPr lang="zh-CN" altLang="en-US" sz="1200" dirty="0">
+              <a:rPr lang="zh-CN" altLang="en-US" sz="1400" dirty="0">
                 <a:latin typeface="+mn-ea"/>
               </a:rPr>
               <a:t>脉和督脉一样，与内在器官连结。</a:t>
@@ -13431,38 +12824,44 @@
           </a:p>
           <a:p>
             <a:pPr marL="0" indent="0">
-              <a:buFont typeface="Arial" panose="020B0604020202020204" pitchFamily="34" charset="0"/>
-              <a:buNone/>
-            </a:pPr>
-            <a:r>
-              <a:rPr lang="zh-CN" altLang="en-US" sz="1200" dirty="0">
+              <a:lnSpc>
+                <a:spcPts val="1600"/>
+              </a:lnSpc>
+              <a:buFont typeface="Arial" panose="020B0604020202020204" pitchFamily="34" charset="0"/>
+              <a:buNone/>
+            </a:pPr>
+            <a:r>
+              <a:rPr lang="zh-CN" altLang="en-US" sz="1400" dirty="0">
                 <a:latin typeface="+mn-ea"/>
               </a:rPr>
               <a:t>与生殖荷尔蒙及生殖器官，也就是摄护腺和子宫，有着紧密的连结</a:t>
             </a:r>
             <a:r>
-              <a:rPr lang="zh-CN" altLang="en-US" sz="1200" dirty="0" smtClean="0">
+              <a:rPr lang="zh-CN" altLang="en-US" sz="1400" dirty="0" smtClean="0">
                 <a:latin typeface="+mn-ea"/>
               </a:rPr>
               <a:t>。</a:t>
             </a:r>
-            <a:endParaRPr lang="en-US" altLang="zh-CN" sz="1200" dirty="0" smtClean="0">
+            <a:endParaRPr lang="en-US" altLang="zh-CN" sz="1400" dirty="0" smtClean="0">
               <a:latin typeface="+mn-ea"/>
             </a:endParaRPr>
           </a:p>
           <a:p>
             <a:pPr marL="0" indent="0">
-              <a:buFont typeface="Arial" panose="020B0604020202020204" pitchFamily="34" charset="0"/>
-              <a:buNone/>
-            </a:pPr>
-            <a:r>
-              <a:rPr lang="zh-CN" altLang="en-US" sz="1200" dirty="0" smtClean="0">
+              <a:lnSpc>
+                <a:spcPts val="1600"/>
+              </a:lnSpc>
+              <a:buFont typeface="Arial" panose="020B0604020202020204" pitchFamily="34" charset="0"/>
+              <a:buNone/>
+            </a:pPr>
+            <a:r>
+              <a:rPr lang="zh-CN" altLang="en-US" sz="1400" dirty="0" smtClean="0">
                 <a:latin typeface="+mn-ea"/>
               </a:rPr>
               <a:t>这</a:t>
             </a:r>
             <a:r>
-              <a:rPr lang="zh-CN" altLang="en-US" sz="1200" dirty="0">
+              <a:rPr lang="zh-CN" altLang="en-US" sz="1400" dirty="0">
                 <a:latin typeface="+mn-ea"/>
               </a:rPr>
               <a:t>是一条强而有力的经络，对急性的压力和环境的反应有重大影响。</a:t>
@@ -13470,23 +12869,59 @@
           </a:p>
           <a:p>
             <a:pPr marL="0" indent="0">
-              <a:buFont typeface="Arial" panose="020B0604020202020204" pitchFamily="34" charset="0"/>
-              <a:buNone/>
-            </a:pPr>
-            <a:r>
-              <a:rPr lang="zh-CN" altLang="en-US" sz="1200" dirty="0">
-                <a:latin typeface="+mn-ea"/>
-              </a:rPr>
-              <a:t>我们常常为了好面子，而假装自己没有受到压力，我们学会了压抑自己的情绪和感觉，而且非常擅于此道。</a:t>
-            </a:r>
+              <a:lnSpc>
+                <a:spcPts val="1600"/>
+              </a:lnSpc>
+              <a:buFont typeface="Arial" panose="020B0604020202020204" pitchFamily="34" charset="0"/>
+              <a:buNone/>
+            </a:pPr>
+            <a:r>
+              <a:rPr lang="zh-CN" altLang="en-US" sz="1400" dirty="0">
+                <a:latin typeface="+mn-ea"/>
+              </a:rPr>
+              <a:t>我们常常为了好面子，而假装自己没有受到压力</a:t>
+            </a:r>
+            <a:r>
+              <a:rPr lang="zh-CN" altLang="en-US" sz="1400" dirty="0" smtClean="0">
+                <a:latin typeface="+mn-ea"/>
+              </a:rPr>
+              <a:t>，</a:t>
+            </a:r>
+            <a:endParaRPr lang="en-US" altLang="zh-CN" sz="1400" dirty="0" smtClean="0">
+              <a:latin typeface="+mn-ea"/>
+            </a:endParaRPr>
           </a:p>
           <a:p>
             <a:pPr marL="0" indent="0">
-              <a:buFont typeface="Arial" panose="020B0604020202020204" pitchFamily="34" charset="0"/>
-              <a:buNone/>
-            </a:pPr>
-            <a:r>
-              <a:rPr lang="zh-CN" altLang="en-US" sz="1200" dirty="0">
+              <a:lnSpc>
+                <a:spcPts val="1600"/>
+              </a:lnSpc>
+              <a:buFont typeface="Arial" panose="020B0604020202020204" pitchFamily="34" charset="0"/>
+              <a:buNone/>
+            </a:pPr>
+            <a:r>
+              <a:rPr lang="zh-CN" altLang="en-US" sz="1400" dirty="0" smtClean="0">
+                <a:latin typeface="+mn-ea"/>
+              </a:rPr>
+              <a:t>我们</a:t>
+            </a:r>
+            <a:r>
+              <a:rPr lang="zh-CN" altLang="en-US" sz="1400" dirty="0">
+                <a:latin typeface="+mn-ea"/>
+              </a:rPr>
+              <a:t>学会了压抑自己的情绪和感觉，而且非常擅于此道。</a:t>
+            </a:r>
+          </a:p>
+          <a:p>
+            <a:pPr marL="0" indent="0">
+              <a:lnSpc>
+                <a:spcPts val="1600"/>
+              </a:lnSpc>
+              <a:buFont typeface="Arial" panose="020B0604020202020204" pitchFamily="34" charset="0"/>
+              <a:buNone/>
+            </a:pPr>
+            <a:r>
+              <a:rPr lang="zh-CN" altLang="en-US" sz="1400" dirty="0">
                 <a:latin typeface="+mn-ea"/>
               </a:rPr>
               <a:t>擅长到甚至相信自己没有任何压力。这会导致情绪爆发，变得不可理喻，大题小作，爆发的反应甚至大到会吓坏自己。</a:t>
@@ -13494,11 +12929,14 @@
           </a:p>
           <a:p>
             <a:pPr marL="0" indent="0">
-              <a:buFont typeface="Arial" panose="020B0604020202020204" pitchFamily="34" charset="0"/>
-              <a:buNone/>
-            </a:pPr>
-            <a:r>
-              <a:rPr lang="zh-CN" altLang="en-US" sz="1200" dirty="0">
+              <a:lnSpc>
+                <a:spcPts val="1600"/>
+              </a:lnSpc>
+              <a:buFont typeface="Arial" panose="020B0604020202020204" pitchFamily="34" charset="0"/>
+              <a:buNone/>
+            </a:pPr>
+            <a:r>
+              <a:rPr lang="zh-CN" altLang="en-US" sz="1400" dirty="0">
                 <a:latin typeface="+mn-ea"/>
               </a:rPr>
               <a:t>压抑情绪发生的比例，比我们想象的要高。</a:t>
@@ -13506,11 +12944,14 @@
           </a:p>
           <a:p>
             <a:pPr marL="0" indent="0">
-              <a:buFont typeface="Arial" panose="020B0604020202020204" pitchFamily="34" charset="0"/>
-              <a:buNone/>
-            </a:pPr>
-            <a:r>
-              <a:rPr lang="zh-CN" altLang="en-US" sz="1200" dirty="0">
+              <a:lnSpc>
+                <a:spcPts val="1600"/>
+              </a:lnSpc>
+              <a:buFont typeface="Arial" panose="020B0604020202020204" pitchFamily="34" charset="0"/>
+              <a:buNone/>
+            </a:pPr>
+            <a:r>
+              <a:rPr lang="zh-CN" altLang="en-US" sz="1400" dirty="0">
                 <a:latin typeface="+mn-ea"/>
               </a:rPr>
               <a:t>长时间压抑情绪造成的生理反应，可能影响子宫，摄护腺等器官，造成子宫肌瘤，摄护腺肥大等。</a:t>
@@ -13518,11 +12959,14 @@
           </a:p>
           <a:p>
             <a:pPr marL="0" indent="0">
-              <a:buFont typeface="Arial" panose="020B0604020202020204" pitchFamily="34" charset="0"/>
-              <a:buNone/>
-            </a:pPr>
-            <a:r>
-              <a:rPr lang="zh-CN" altLang="en-US" sz="1200" dirty="0">
+              <a:lnSpc>
+                <a:spcPts val="1600"/>
+              </a:lnSpc>
+              <a:buFont typeface="Arial" panose="020B0604020202020204" pitchFamily="34" charset="0"/>
+              <a:buNone/>
+            </a:pPr>
+            <a:r>
+              <a:rPr lang="zh-CN" altLang="en-US" sz="1400" dirty="0">
                 <a:latin typeface="+mn-ea"/>
               </a:rPr>
               <a:t>所以，学会接纳自己的情绪，给它一个位置，然后处理它。</a:t>
@@ -13555,8 +12999,8 @@
         </p:nvSpPr>
         <p:spPr>
           <a:xfrm>
-            <a:off x="5952683" y="1595372"/>
-            <a:ext cx="5724205" cy="2213619"/>
+            <a:off x="6462169" y="1595372"/>
+            <a:ext cx="5214719" cy="2213619"/>
           </a:xfrm>
           <a:prstGeom prst="rect">
             <a:avLst/>
@@ -13734,7 +13178,7 @@
               <a:buNone/>
             </a:pPr>
             <a:r>
-              <a:rPr lang="zh-CN" altLang="en-US" sz="1200" dirty="0">
+              <a:rPr lang="zh-CN" altLang="en-US" sz="1400" dirty="0">
                 <a:latin typeface="+mn-ea"/>
               </a:rPr>
               <a:t>首先，闭上眼睛，回想过去让你觉得难以应付的情境。观想那时的感觉，当时的事件，参与的人，当时的场景。</a:t>
@@ -13746,19 +13190,19 @@
               <a:buNone/>
             </a:pPr>
             <a:r>
-              <a:rPr lang="zh-CN" altLang="en-US" sz="1200" dirty="0">
+              <a:rPr lang="zh-CN" altLang="en-US" sz="1400" dirty="0">
                 <a:latin typeface="+mn-ea"/>
               </a:rPr>
               <a:t>将那些情境带回到现在</a:t>
             </a:r>
             <a:r>
-              <a:rPr lang="zh-CN" altLang="en-US" sz="1200" dirty="0" smtClean="0">
+              <a:rPr lang="zh-CN" altLang="en-US" sz="1400" dirty="0" smtClean="0">
                 <a:latin typeface="+mn-ea"/>
               </a:rPr>
               <a:t>。那时</a:t>
             </a:r>
             <a:r>
-              <a:rPr lang="zh-CN" altLang="en-US" sz="1200" dirty="0">
+              <a:rPr lang="zh-CN" altLang="en-US" sz="1400" dirty="0">
                 <a:latin typeface="+mn-ea"/>
               </a:rPr>
               <a:t>你觉得脆弱，不想表露自己，让其他人知道。现在就让自己去感受那些情绪，体验自己的情绪，不要和它对抗，去感受它的存在，就像你有时候会忍住泪水。</a:t>
@@ -13770,7 +13214,7 @@
               <a:buNone/>
             </a:pPr>
             <a:r>
-              <a:rPr lang="zh-CN" altLang="en-US" sz="1200" dirty="0">
+              <a:rPr lang="zh-CN" altLang="en-US" sz="1400" dirty="0">
                 <a:latin typeface="+mn-ea"/>
               </a:rPr>
               <a:t>是的，只要是人，就会有情绪，请允许自己接受这点。</a:t>
@@ -13782,18 +13226,18 @@
               <a:buNone/>
             </a:pPr>
             <a:r>
-              <a:rPr lang="zh-CN" altLang="en-US" sz="1200" dirty="0">
+              <a:rPr lang="zh-CN" altLang="en-US" sz="1400" dirty="0">
                 <a:latin typeface="+mn-ea"/>
               </a:rPr>
               <a:t>接着，轻敲或按摩任脉的穴道「承浆</a:t>
             </a:r>
             <a:r>
-              <a:rPr lang="zh-CN" altLang="en-US" sz="1200" dirty="0" smtClean="0">
-                <a:latin typeface="+mn-ea"/>
-              </a:rPr>
-              <a:t>」</a:t>
-            </a:r>
-            <a:endParaRPr lang="zh-CN" altLang="en-US" sz="1200" dirty="0">
+              <a:rPr lang="zh-CN" altLang="en-US" sz="1400" dirty="0" smtClean="0">
+                <a:latin typeface="+mn-ea"/>
+              </a:rPr>
+              <a:t>」。</a:t>
+            </a:r>
+            <a:endParaRPr lang="zh-CN" altLang="en-US" sz="1400" dirty="0">
               <a:latin typeface="+mn-ea"/>
             </a:endParaRPr>
           </a:p>
@@ -13869,26 +13313,26 @@
           <a:lstStyle/>
           <a:p>
             <a:r>
-              <a:rPr lang="en-US" altLang="zh-CN" sz="900"/>
+              <a:rPr lang="en-US" altLang="zh-CN" sz="4400" dirty="0"/>
               <a:t>EFT </a:t>
             </a:r>
             <a:r>
-              <a:rPr lang="zh-CN" altLang="en-US" sz="900"/>
-              <a:t>核心</a:t>
-            </a:r>
-            <a:r>
-              <a:rPr lang="zh-CN" altLang="en-US" sz="900" dirty="0"/>
-              <a:t>敲击穴位（</a:t>
-            </a:r>
-            <a:r>
-              <a:rPr lang="en-US" altLang="zh-CN" sz="900"/>
-              <a:t>6</a:t>
-            </a:r>
-            <a:r>
-              <a:rPr lang="zh-CN" altLang="en-US" sz="900"/>
+              <a:rPr lang="zh-CN" altLang="en-US" sz="4400" dirty="0"/>
+              <a:t>核心敲击穴位</a:t>
+            </a:r>
+            <a:r>
+              <a:rPr lang="zh-CN" altLang="en-US" sz="4400" dirty="0" smtClean="0"/>
+              <a:t>（</a:t>
+            </a:r>
+            <a:r>
+              <a:rPr lang="en-US" altLang="zh-CN" sz="4400" dirty="0" smtClean="0"/>
+              <a:t>8</a:t>
+            </a:r>
+            <a:r>
+              <a:rPr lang="zh-CN" altLang="en-US" sz="4400" dirty="0" smtClean="0"/>
               <a:t>）</a:t>
             </a:r>
-            <a:endParaRPr lang="zh-CN" altLang="en-US" sz="900" dirty="0"/>
+            <a:endParaRPr lang="zh-CN" altLang="en-US" sz="4400" dirty="0"/>
           </a:p>
         </p:txBody>
       </p:sp>
@@ -13911,83 +13355,161 @@
         <p:spPr>
           <a:xfrm>
             <a:off x="515112" y="1576785"/>
-            <a:ext cx="7529431" cy="3989337"/>
+            <a:ext cx="11161776" cy="3989337"/>
           </a:xfrm>
         </p:spPr>
         <p:txBody>
           <a:bodyPr/>
           <a:lstStyle/>
           <a:p>
+            <a:pPr>
+              <a:buFont typeface="Wingdings" panose="05000000000000000000" pitchFamily="2" charset="2"/>
+              <a:buChar char="n"/>
+            </a:pPr>
+            <a:r>
+              <a:rPr lang="zh-CN" altLang="en-US" sz="1800" dirty="0">
+                <a:latin typeface="+mn-ea"/>
+              </a:rPr>
+              <a:t>对应情绪</a:t>
+            </a:r>
+            <a:r>
+              <a:rPr lang="zh-CN" altLang="en-US" sz="1800" dirty="0" smtClean="0">
+                <a:latin typeface="+mn-ea"/>
+              </a:rPr>
+              <a:t>：</a:t>
+            </a:r>
+            <a:r>
+              <a:rPr lang="zh-CN" altLang="en-US" sz="1800" dirty="0">
+                <a:latin typeface="+mn-ea"/>
+              </a:rPr>
+              <a:t>平复烦躁</a:t>
+            </a:r>
+            <a:r>
+              <a:rPr lang="zh-CN" altLang="en-US" sz="1800" dirty="0" smtClean="0">
+                <a:latin typeface="+mn-ea"/>
+              </a:rPr>
+              <a:t>焦虑，</a:t>
+            </a:r>
+            <a:r>
+              <a:rPr lang="zh-CN" altLang="en-US" sz="1800" dirty="0">
+                <a:latin typeface="+mn-ea"/>
+              </a:rPr>
+              <a:t>改善失眠多梦引发的情绪</a:t>
+            </a:r>
+            <a:r>
+              <a:rPr lang="zh-CN" altLang="en-US" sz="1800" dirty="0" smtClean="0">
+                <a:latin typeface="+mn-ea"/>
+              </a:rPr>
+              <a:t>低落，</a:t>
+            </a:r>
+            <a:r>
+              <a:rPr lang="zh-CN" altLang="en-US" sz="1800" dirty="0">
+                <a:latin typeface="+mn-ea"/>
+              </a:rPr>
+              <a:t>缓解情志郁结导致的胸闷</a:t>
+            </a:r>
+            <a:endParaRPr lang="en-US" altLang="zh-CN" sz="1800" dirty="0" smtClean="0">
+              <a:latin typeface="+mn-ea"/>
+            </a:endParaRPr>
+          </a:p>
+          <a:p>
+            <a:pPr>
+              <a:buFont typeface="Wingdings" panose="05000000000000000000" pitchFamily="2" charset="2"/>
+              <a:buChar char="n"/>
+            </a:pPr>
+            <a:r>
+              <a:rPr lang="zh-CN" altLang="en-US" sz="1800" dirty="0">
+                <a:latin typeface="+mn-ea"/>
+              </a:rPr>
+              <a:t>穴位</a:t>
+            </a:r>
+            <a:r>
+              <a:rPr lang="zh-CN" altLang="en-US" sz="1800" dirty="0" smtClean="0">
+                <a:latin typeface="+mn-ea"/>
+              </a:rPr>
+              <a:t>位置：</a:t>
+            </a:r>
+            <a:r>
+              <a:rPr lang="zh-CN" altLang="en-US" sz="1800" dirty="0" smtClean="0">
+                <a:latin typeface="+mn-ea"/>
+              </a:rPr>
+              <a:t>胸部第二肋间隙，前正中线旁开两寸</a:t>
+            </a:r>
+            <a:r>
+              <a:rPr lang="zh-CN" altLang="en-US" sz="1800" dirty="0">
+                <a:latin typeface="+mn-ea"/>
+              </a:rPr>
+              <a:t>。低头时摸到锁骨，向中间靠近胸骨的位置，能感受到明显凹陷。</a:t>
+            </a:r>
+          </a:p>
+          <a:p>
+            <a:pPr>
+              <a:buFont typeface="Wingdings" panose="05000000000000000000" pitchFamily="2" charset="2"/>
+              <a:buChar char="n"/>
+            </a:pPr>
+            <a:r>
+              <a:rPr lang="zh-CN" altLang="en-US" sz="1800" dirty="0" smtClean="0">
+                <a:latin typeface="+mn-ea"/>
+              </a:rPr>
+              <a:t>功效作用</a:t>
+            </a:r>
+            <a:r>
+              <a:rPr lang="zh-CN" altLang="en-US" sz="1800" dirty="0" smtClean="0">
+                <a:latin typeface="+mn-ea"/>
+              </a:rPr>
+              <a:t>：疏通肾经，改善心脏供血以安神（不痛快，胸口堵得慌，挺胸就是在拍神藏穴）</a:t>
+            </a:r>
+            <a:r>
+              <a:rPr lang="zh-CN" altLang="en-US" sz="1800" dirty="0" smtClean="0">
+                <a:latin typeface="+mn-ea"/>
+              </a:rPr>
+              <a:t>。</a:t>
+            </a:r>
+            <a:endParaRPr lang="en-US" altLang="zh-CN" sz="1800" dirty="0" smtClean="0">
+              <a:latin typeface="+mn-ea"/>
+            </a:endParaRPr>
+          </a:p>
+          <a:p>
             <a:pPr marL="0" indent="0">
               <a:buNone/>
             </a:pPr>
             <a:r>
-              <a:rPr lang="en-US" altLang="zh-CN" sz="1800" dirty="0">
-                <a:latin typeface="+mn-ea"/>
-              </a:rPr>
-              <a:t>- </a:t>
+              <a:rPr lang="zh-CN" altLang="en-US" sz="1800" dirty="0" smtClean="0">
+                <a:latin typeface="+mn-ea"/>
+              </a:rPr>
+              <a:t>神</a:t>
             </a:r>
             <a:r>
               <a:rPr lang="zh-CN" altLang="en-US" sz="1800" dirty="0">
                 <a:latin typeface="+mn-ea"/>
               </a:rPr>
-              <a:t>位置</a:t>
-            </a:r>
+              <a:t>藏穴名中的 “神” 指心神、神志，“藏” 有收纳、安定之意，穴性与 “心神安定” 直接相关。</a:t>
+            </a:r>
+          </a:p>
+          <a:p>
+            <a:pPr marL="0" indent="0">
+              <a:buNone/>
+            </a:pPr>
             <a:r>
               <a:rPr lang="zh-CN" altLang="en-US" sz="1800" dirty="0" smtClean="0">
                 <a:latin typeface="+mn-ea"/>
               </a:rPr>
-              <a:t>：胸部第二肋间隙，前正中线旁开两寸。</a:t>
-            </a:r>
+              <a:t>足</a:t>
+            </a:r>
+            <a:r>
+              <a:rPr lang="zh-CN" altLang="en-US" sz="1800" dirty="0">
+                <a:latin typeface="+mn-ea"/>
+              </a:rPr>
+              <a:t>少阴肾经与心、肝等脏腑关联密切：肾主藏精，精能生血，血能养神；同时肾水可滋养肝木，避免肝失疏泄导致的情绪郁结。神藏穴作为肾经胸部穴位，能疏通本经气血，间接调和心、肝的情志功能。</a:t>
+            </a:r>
+          </a:p>
+          <a:p>
+            <a:pPr marL="0" indent="0">
+              <a:buNone/>
+            </a:pPr>
             <a:endParaRPr lang="zh-CN" altLang="en-US" sz="1800" dirty="0">
               <a:latin typeface="+mn-ea"/>
             </a:endParaRPr>
-          </a:p>
-          <a:p>
-            <a:pPr marL="0" indent="0">
-              <a:buNone/>
-            </a:pPr>
-            <a:r>
-              <a:rPr lang="en-US" altLang="zh-CN" sz="1800" dirty="0">
-                <a:latin typeface="+mn-ea"/>
-              </a:rPr>
-              <a:t>- </a:t>
-            </a:r>
-            <a:r>
-              <a:rPr lang="zh-CN" altLang="en-US" sz="1800" dirty="0">
-                <a:latin typeface="+mn-ea"/>
-              </a:rPr>
-              <a:t>定位：低头时摸到锁骨，向中间靠近胸骨的位置，能感受到明显凹陷。</a:t>
-            </a:r>
-          </a:p>
-          <a:p>
-            <a:pPr marL="0" indent="0">
-              <a:buNone/>
-            </a:pPr>
-            <a:r>
-              <a:rPr lang="en-US" altLang="zh-CN" sz="1800" dirty="0">
-                <a:latin typeface="+mn-ea"/>
-              </a:rPr>
-              <a:t>- </a:t>
-            </a:r>
-            <a:r>
-              <a:rPr lang="zh-CN" altLang="en-US" sz="1800" dirty="0">
-                <a:latin typeface="+mn-ea"/>
-              </a:rPr>
-              <a:t>作用</a:t>
-            </a:r>
-            <a:r>
-              <a:rPr lang="zh-CN" altLang="en-US" sz="1800" dirty="0" smtClean="0">
-                <a:latin typeface="+mn-ea"/>
-              </a:rPr>
-              <a:t>：疏通肾经，改善心脏供血以安神（不痛快，胸口堵得慌，挺胸就是在拍神藏穴）</a:t>
-            </a:r>
-            <a:r>
-              <a:rPr lang="zh-CN" altLang="en-US" sz="1800" dirty="0">
-                <a:latin typeface="+mn-ea"/>
-              </a:rPr>
-              <a:t>。</a:t>
-            </a:r>
           </a:p>
         </p:txBody>
       </p:sp>
@@ -14008,7 +13530,7 @@
         <p:spPr>
           <a:xfrm>
             <a:off x="264034" y="5566122"/>
-            <a:ext cx="9337166" cy="757207"/>
+            <a:ext cx="6511118" cy="757207"/>
           </a:xfrm>
           <a:prstGeom prst="rect">
             <a:avLst/>
@@ -14284,8 +13806,8 @@
         </p:blipFill>
         <p:spPr>
           <a:xfrm>
-            <a:off x="9538847" y="4307547"/>
-            <a:ext cx="2138041" cy="2015782"/>
+            <a:off x="8002535" y="4565616"/>
+            <a:ext cx="2287412" cy="2156612"/>
           </a:xfrm>
           <a:prstGeom prst="rect">
             <a:avLst/>
@@ -14365,26 +13887,26 @@
           <a:lstStyle/>
           <a:p>
             <a:r>
-              <a:rPr lang="en-US" altLang="zh-CN" sz="900"/>
+              <a:rPr lang="en-US" altLang="zh-CN" sz="4400" dirty="0"/>
               <a:t>EFT </a:t>
             </a:r>
             <a:r>
-              <a:rPr lang="zh-CN" altLang="en-US" sz="900"/>
-              <a:t>核心</a:t>
-            </a:r>
-            <a:r>
-              <a:rPr lang="zh-CN" altLang="en-US" sz="900" dirty="0"/>
-              <a:t>敲击穴位（</a:t>
-            </a:r>
-            <a:r>
-              <a:rPr lang="en-US" altLang="zh-CN" sz="900"/>
-              <a:t>6</a:t>
-            </a:r>
-            <a:r>
-              <a:rPr lang="zh-CN" altLang="en-US" sz="900"/>
+              <a:rPr lang="zh-CN" altLang="en-US" sz="4400" dirty="0"/>
+              <a:t>核心敲击穴位</a:t>
+            </a:r>
+            <a:r>
+              <a:rPr lang="zh-CN" altLang="en-US" sz="4400" dirty="0" smtClean="0"/>
+              <a:t>（</a:t>
+            </a:r>
+            <a:r>
+              <a:rPr lang="en-US" altLang="zh-CN" sz="4400" dirty="0" smtClean="0"/>
+              <a:t>9</a:t>
+            </a:r>
+            <a:r>
+              <a:rPr lang="zh-CN" altLang="en-US" sz="4400" dirty="0" smtClean="0"/>
               <a:t>）</a:t>
             </a:r>
-            <a:endParaRPr lang="zh-CN" altLang="en-US" sz="900" dirty="0"/>
+            <a:endParaRPr lang="zh-CN" altLang="en-US" sz="4400" dirty="0"/>
           </a:p>
         </p:txBody>
       </p:sp>
@@ -14407,62 +13929,138 @@
         <p:spPr>
           <a:xfrm>
             <a:off x="515112" y="1576785"/>
-            <a:ext cx="2699505" cy="3989337"/>
+            <a:ext cx="11161776" cy="3989337"/>
           </a:xfrm>
         </p:spPr>
         <p:txBody>
           <a:bodyPr/>
           <a:lstStyle/>
           <a:p>
+            <a:pPr>
+              <a:buFont typeface="Wingdings" panose="05000000000000000000" pitchFamily="2" charset="2"/>
+              <a:buChar char="n"/>
+            </a:pPr>
+            <a:r>
+              <a:rPr lang="zh-CN" altLang="en-US" sz="1800" dirty="0">
+                <a:latin typeface="+mn-ea"/>
+              </a:rPr>
+              <a:t>对应情绪：疏解胸闷烦躁，改善焦虑引发的呼吸不畅，平复情绪激动引发的气</a:t>
+            </a:r>
+            <a:r>
+              <a:rPr lang="zh-CN" altLang="en-US" sz="1800" dirty="0" smtClean="0">
+                <a:latin typeface="+mn-ea"/>
+              </a:rPr>
+              <a:t>逆。</a:t>
+            </a:r>
+            <a:endParaRPr lang="en-US" altLang="zh-CN" sz="1800" dirty="0">
+              <a:latin typeface="+mn-ea"/>
+            </a:endParaRPr>
+          </a:p>
+          <a:p>
+            <a:pPr>
+              <a:buFont typeface="Wingdings" panose="05000000000000000000" pitchFamily="2" charset="2"/>
+              <a:buChar char="n"/>
+            </a:pPr>
+            <a:r>
+              <a:rPr lang="zh-CN" altLang="en-US" sz="1800" dirty="0" smtClean="0">
+                <a:latin typeface="+mn-ea"/>
+              </a:rPr>
+              <a:t>穴位位置：</a:t>
+            </a:r>
+            <a:r>
+              <a:rPr lang="zh-CN" altLang="en-US" sz="1800" dirty="0">
+                <a:latin typeface="+mn-ea"/>
+              </a:rPr>
+              <a:t>两侧锁骨与胸骨连接处的凹陷处（锁骨内侧端点下方）</a:t>
+            </a:r>
+            <a:r>
+              <a:rPr lang="zh-CN" altLang="en-US" sz="1800" dirty="0" smtClean="0">
+                <a:latin typeface="+mn-ea"/>
+              </a:rPr>
+              <a:t>。</a:t>
+            </a:r>
+          </a:p>
+          <a:p>
+            <a:pPr>
+              <a:buFont typeface="Wingdings" panose="05000000000000000000" pitchFamily="2" charset="2"/>
+              <a:buChar char="n"/>
+            </a:pPr>
+            <a:r>
+              <a:rPr lang="zh-CN" altLang="en-US" sz="1800" dirty="0" smtClean="0">
+                <a:latin typeface="+mn-ea"/>
+              </a:rPr>
+              <a:t>功效</a:t>
+            </a:r>
+            <a:r>
+              <a:rPr lang="zh-CN" altLang="en-US" sz="1800" dirty="0">
+                <a:latin typeface="+mn-ea"/>
+              </a:rPr>
+              <a:t>作用</a:t>
+            </a:r>
+            <a:r>
+              <a:rPr lang="zh-CN" altLang="en-US" sz="1800" dirty="0" smtClean="0">
+                <a:latin typeface="+mn-ea"/>
+              </a:rPr>
+              <a:t>：</a:t>
+            </a:r>
+            <a:r>
+              <a:rPr lang="zh-CN" altLang="en-US" sz="1800" dirty="0">
+                <a:latin typeface="+mn-ea"/>
+              </a:rPr>
+              <a:t>释放深层压力，调节呼吸相关的情绪反应（如紧张导致的呼吸急促）</a:t>
+            </a:r>
+            <a:r>
+              <a:rPr lang="zh-CN" altLang="en-US" sz="1800" dirty="0" smtClean="0">
+                <a:latin typeface="+mn-ea"/>
+              </a:rPr>
+              <a:t>。</a:t>
+            </a:r>
+            <a:endParaRPr lang="en-US" altLang="zh-CN" sz="1800" dirty="0" smtClean="0">
+              <a:latin typeface="+mn-ea"/>
+            </a:endParaRPr>
+          </a:p>
+          <a:p>
+            <a:pPr>
+              <a:buFont typeface="Wingdings" panose="05000000000000000000" pitchFamily="2" charset="2"/>
+              <a:buChar char="n"/>
+            </a:pPr>
+            <a:endParaRPr lang="en-US" altLang="zh-CN" sz="1800" dirty="0" smtClean="0">
+              <a:latin typeface="+mn-ea"/>
+            </a:endParaRPr>
+          </a:p>
+          <a:p>
             <a:pPr marL="0" indent="0">
               <a:buNone/>
             </a:pPr>
             <a:r>
-              <a:rPr lang="en-US" altLang="zh-CN" sz="1200" dirty="0">
-                <a:latin typeface="+mn-ea"/>
-              </a:rPr>
-              <a:t>- </a:t>
-            </a:r>
-            <a:r>
-              <a:rPr lang="zh-CN" altLang="en-US" sz="1200" dirty="0">
-                <a:latin typeface="+mn-ea"/>
-              </a:rPr>
-              <a:t>位置：两侧锁骨与胸骨连接处的凹陷处（锁骨内侧端点下方）。</a:t>
-            </a:r>
+              <a:rPr lang="zh-CN" altLang="en-US" sz="1800" dirty="0">
+                <a:latin typeface="+mn-ea"/>
+              </a:rPr>
+              <a:t>云门穴是肺经的起始穴，中府穴是肺经的募穴，二者协同作用，能疏通肺经气血、调节胸中气机，从根源上改善因肺气不畅引发的情绪失调。</a:t>
+            </a:r>
+            <a:endParaRPr lang="en-US" altLang="zh-CN" sz="1800" dirty="0">
+              <a:latin typeface="+mn-ea"/>
+            </a:endParaRPr>
           </a:p>
           <a:p>
             <a:pPr marL="0" indent="0">
               <a:buNone/>
             </a:pPr>
             <a:r>
-              <a:rPr lang="en-US" altLang="zh-CN" sz="1200" dirty="0">
-                <a:latin typeface="+mn-ea"/>
-              </a:rPr>
-              <a:t>- </a:t>
-            </a:r>
-            <a:r>
-              <a:rPr lang="zh-CN" altLang="en-US" sz="1200" dirty="0">
-                <a:latin typeface="+mn-ea"/>
-              </a:rPr>
-              <a:t>定位：低头时摸到锁骨，向中间靠近胸骨的位置，能感受到明显凹陷。</a:t>
-            </a:r>
-          </a:p>
-          <a:p>
-            <a:pPr marL="0" indent="0">
-              <a:buNone/>
-            </a:pPr>
-            <a:r>
-              <a:rPr lang="en-US" altLang="zh-CN" sz="1200" dirty="0">
-                <a:latin typeface="+mn-ea"/>
-              </a:rPr>
-              <a:t>- </a:t>
-            </a:r>
-            <a:r>
-              <a:rPr lang="zh-CN" altLang="en-US" sz="1200" dirty="0">
-                <a:latin typeface="+mn-ea"/>
-              </a:rPr>
-              <a:t>作用：释放深层压力，调节呼吸相关的情绪反应（如紧张导致的呼吸急促）。</a:t>
-            </a:r>
+              <a:rPr lang="zh-CN" altLang="en-US" sz="1800" dirty="0">
+                <a:latin typeface="+mn-ea"/>
+              </a:rPr>
+              <a:t>两穴位于胸部，邻近胸腔脏器，禁止用力按压、捶打，尤其体质虚弱者、孕妇需轻柔</a:t>
+            </a:r>
+            <a:r>
+              <a:rPr lang="zh-CN" altLang="en-US" sz="1800" dirty="0" smtClean="0">
+                <a:latin typeface="+mn-ea"/>
+              </a:rPr>
+              <a:t>操作。</a:t>
+            </a:r>
+            <a:endParaRPr lang="en-US" altLang="zh-CN" sz="1800" dirty="0" smtClean="0">
+              <a:latin typeface="+mn-ea"/>
+            </a:endParaRPr>
           </a:p>
         </p:txBody>
       </p:sp>
@@ -14696,8 +14294,31 @@
                 </a:effectLst>
                 <a:latin typeface="+mn-ea"/>
               </a:rPr>
-              <a:t>云门穴和中府穴</a:t>
-            </a:r>
+              <a:t>云门穴和中府</a:t>
+            </a:r>
+            <a:r>
+              <a:rPr lang="zh-CN" altLang="en-US" sz="3200" dirty="0">
+                <a:effectLst>
+                  <a:outerShdw blurRad="38100" dist="38100" dir="2700000" algn="tl">
+                    <a:srgbClr val="000000">
+                      <a:alpha val="43137"/>
+                    </a:srgbClr>
+                  </a:outerShdw>
+                </a:effectLst>
+                <a:latin typeface="+mn-ea"/>
+              </a:rPr>
+              <a:t>穴（手太阴肺经）</a:t>
+            </a:r>
+            <a:endParaRPr lang="zh-CN" altLang="en-US" sz="3200" dirty="0">
+              <a:effectLst>
+                <a:outerShdw blurRad="38100" dist="38100" dir="2700000" algn="tl">
+                  <a:srgbClr val="000000">
+                    <a:alpha val="43137"/>
+                  </a:srgbClr>
+                </a:outerShdw>
+              </a:effectLst>
+              <a:latin typeface="+mn-ea"/>
+            </a:endParaRPr>
           </a:p>
         </p:txBody>
       </p:sp>
@@ -14729,7 +14350,7 @@
         </p:blipFill>
         <p:spPr>
           <a:xfrm>
-            <a:off x="8977384" y="4863731"/>
+            <a:off x="7878876" y="5066249"/>
             <a:ext cx="2210937" cy="1473958"/>
           </a:xfrm>
           <a:prstGeom prst="rect">
@@ -14810,26 +14431,26 @@
           <a:lstStyle/>
           <a:p>
             <a:r>
-              <a:rPr lang="en-US" altLang="zh-CN" sz="900"/>
+              <a:rPr lang="en-US" altLang="zh-CN" sz="4400" dirty="0"/>
               <a:t>EFT </a:t>
             </a:r>
             <a:r>
-              <a:rPr lang="zh-CN" altLang="en-US" sz="900"/>
-              <a:t>核心</a:t>
-            </a:r>
-            <a:r>
-              <a:rPr lang="zh-CN" altLang="en-US" sz="900" dirty="0"/>
-              <a:t>敲击穴位（</a:t>
-            </a:r>
-            <a:r>
-              <a:rPr lang="en-US" altLang="zh-CN" sz="900"/>
-              <a:t>6</a:t>
-            </a:r>
-            <a:r>
-              <a:rPr lang="zh-CN" altLang="en-US" sz="900"/>
+              <a:rPr lang="zh-CN" altLang="en-US" sz="4400" dirty="0"/>
+              <a:t>核心敲击穴位</a:t>
+            </a:r>
+            <a:r>
+              <a:rPr lang="zh-CN" altLang="en-US" sz="4400" dirty="0" smtClean="0"/>
+              <a:t>（</a:t>
+            </a:r>
+            <a:r>
+              <a:rPr lang="en-US" altLang="zh-CN" sz="4400" dirty="0" smtClean="0"/>
+              <a:t>10</a:t>
+            </a:r>
+            <a:r>
+              <a:rPr lang="zh-CN" altLang="en-US" sz="4400" dirty="0" smtClean="0"/>
               <a:t>）</a:t>
             </a:r>
-            <a:endParaRPr lang="zh-CN" altLang="en-US" sz="900" dirty="0"/>
+            <a:endParaRPr lang="zh-CN" altLang="en-US" sz="4400" dirty="0"/>
           </a:p>
         </p:txBody>
       </p:sp>
@@ -14849,7 +14470,7 @@
         </p:nvSpPr>
         <p:spPr>
           <a:xfrm>
-            <a:off x="264034" y="5566122"/>
+            <a:off x="282445" y="5816655"/>
             <a:ext cx="9337166" cy="757207"/>
           </a:xfrm>
           <a:prstGeom prst="rect">
@@ -15054,6 +14675,13 @@
             </a:r>
             <a:r>
               <a:rPr lang="zh-CN" altLang="en-US" sz="3200" dirty="0">
+                <a:effectLst>
+                  <a:outerShdw blurRad="38100" dist="38100" dir="2700000" algn="tl">
+                    <a:srgbClr val="000000">
+                      <a:alpha val="43137"/>
+                    </a:srgbClr>
+                  </a:outerShdw>
+                </a:effectLst>
                 <a:latin typeface="+mn-ea"/>
               </a:rPr>
               <a:t>俞府</a:t>
@@ -15069,8 +14697,18 @@
                 </a:effectLst>
                 <a:latin typeface="+mn-ea"/>
               </a:rPr>
-              <a:t>穴</a:t>
-            </a:r>
+              <a:t>穴（足少阴肾经）</a:t>
+            </a:r>
+            <a:endParaRPr lang="zh-CN" altLang="en-US" sz="3200" dirty="0">
+              <a:effectLst>
+                <a:outerShdw blurRad="38100" dist="38100" dir="2700000" algn="tl">
+                  <a:srgbClr val="000000">
+                    <a:alpha val="43137"/>
+                  </a:srgbClr>
+                </a:outerShdw>
+              </a:effectLst>
+              <a:latin typeface="+mn-ea"/>
+            </a:endParaRPr>
           </a:p>
         </p:txBody>
       </p:sp>
@@ -15091,7 +14729,7 @@
         <p:spPr>
           <a:xfrm>
             <a:off x="515112" y="1434331"/>
-            <a:ext cx="5469567" cy="3989337"/>
+            <a:ext cx="7033291" cy="3989337"/>
           </a:xfrm>
           <a:prstGeom prst="rect">
             <a:avLst/>
@@ -15264,144 +14902,239 @@
             </a:lvl9pPr>
           </a:lstStyle>
           <a:p>
-            <a:pPr marL="0" indent="0">
-              <a:buFont typeface="Arial" panose="020B0604020202020204" pitchFamily="34" charset="0"/>
-              <a:buNone/>
-            </a:pPr>
-            <a:r>
-              <a:rPr lang="zh-CN" altLang="en-US" sz="1200" dirty="0">
-                <a:latin typeface="+mn-ea"/>
-              </a:rPr>
-              <a:t>情绪要穴</a:t>
-            </a:r>
-            <a:r>
-              <a:rPr lang="en-US" altLang="zh-CN" sz="1200" dirty="0">
-                <a:latin typeface="+mn-ea"/>
-              </a:rPr>
-              <a:t>6</a:t>
-            </a:r>
-            <a:r>
-              <a:rPr lang="zh-CN" altLang="en-US" sz="1200" dirty="0">
-                <a:latin typeface="+mn-ea"/>
-              </a:rPr>
-              <a:t>：肾经之「俞府」－恐惧</a:t>
-            </a:r>
-          </a:p>
-          <a:p>
-            <a:pPr marL="0" indent="0">
-              <a:buFont typeface="Arial" panose="020B0604020202020204" pitchFamily="34" charset="0"/>
-              <a:buNone/>
-            </a:pPr>
-            <a:r>
-              <a:rPr lang="zh-CN" altLang="en-US" sz="1200" dirty="0">
-                <a:latin typeface="+mn-ea"/>
-              </a:rPr>
-              <a:t>与肾经相关的能量与情绪有，不信任，怀疑，觉得自己被利用，心神不宁，害怕，觉得不安全。</a:t>
-            </a:r>
-          </a:p>
-          <a:p>
-            <a:pPr marL="0" indent="0">
-              <a:buFont typeface="Arial" panose="020B0604020202020204" pitchFamily="34" charset="0"/>
-              <a:buNone/>
-            </a:pPr>
-            <a:endParaRPr lang="zh-CN" altLang="en-US" sz="1200" dirty="0">
+            <a:pPr>
+              <a:lnSpc>
+                <a:spcPts val="1800"/>
+              </a:lnSpc>
+              <a:buFont typeface="Wingdings" panose="05000000000000000000" pitchFamily="2" charset="2"/>
+              <a:buChar char="n"/>
+            </a:pPr>
+            <a:r>
+              <a:rPr lang="zh-CN" altLang="en-US" sz="1400" dirty="0">
+                <a:latin typeface="+mn-ea"/>
+              </a:rPr>
+              <a:t>对应情绪：缓解心肾不交引发的烦躁失眠，疏解胸中气机郁滞导致的压抑胸闷，辅助改善脾胃失调引发的</a:t>
+            </a:r>
+            <a:r>
+              <a:rPr lang="zh-CN" altLang="en-US" sz="1400" dirty="0" smtClean="0">
+                <a:latin typeface="+mn-ea"/>
+              </a:rPr>
+              <a:t>情绪不稳。</a:t>
+            </a:r>
+            <a:endParaRPr lang="en-US" altLang="zh-CN" sz="1400" dirty="0" smtClean="0">
               <a:latin typeface="+mn-ea"/>
             </a:endParaRPr>
           </a:p>
           <a:p>
-            <a:pPr marL="0" indent="0">
-              <a:buFont typeface="Arial" panose="020B0604020202020204" pitchFamily="34" charset="0"/>
-              <a:buNone/>
-            </a:pPr>
-            <a:r>
-              <a:rPr lang="zh-CN" altLang="en-US" sz="1200" dirty="0">
-                <a:latin typeface="+mn-ea"/>
-              </a:rPr>
-              <a:t>灵魂会招来情绪，让我们知道，自己还有哪些未处理的创伤，还要面对什么样的事情。恐惧，是其中最强烈的情绪。</a:t>
-            </a:r>
-          </a:p>
-          <a:p>
-            <a:pPr marL="0" indent="0">
-              <a:buFont typeface="Arial" panose="020B0604020202020204" pitchFamily="34" charset="0"/>
-              <a:buNone/>
-            </a:pPr>
-            <a:endParaRPr lang="zh-CN" altLang="en-US" sz="1200" dirty="0">
+            <a:pPr>
+              <a:lnSpc>
+                <a:spcPts val="1800"/>
+              </a:lnSpc>
+              <a:buFont typeface="Wingdings" panose="05000000000000000000" pitchFamily="2" charset="2"/>
+              <a:buChar char="n"/>
+            </a:pPr>
+            <a:r>
+              <a:rPr lang="zh-CN" altLang="en-US" sz="1400" dirty="0" smtClean="0">
+                <a:latin typeface="+mn-ea"/>
+              </a:rPr>
+              <a:t>穴位</a:t>
+            </a:r>
+            <a:r>
+              <a:rPr lang="zh-CN" altLang="en-US" sz="1400" dirty="0">
+                <a:latin typeface="+mn-ea"/>
+              </a:rPr>
+              <a:t>位置：在胸部，锁骨下缘，前正中线旁开 </a:t>
+            </a:r>
+            <a:r>
+              <a:rPr lang="en-US" altLang="zh-CN" sz="1400" dirty="0">
+                <a:latin typeface="+mn-ea"/>
+              </a:rPr>
+              <a:t>2 </a:t>
+            </a:r>
+            <a:r>
+              <a:rPr lang="zh-CN" altLang="en-US" sz="1400" dirty="0">
+                <a:latin typeface="+mn-ea"/>
+              </a:rPr>
+              <a:t>寸。可先找到前正中线与乳头之间距离的中点（即旁开 </a:t>
+            </a:r>
+            <a:r>
+              <a:rPr lang="en-US" altLang="zh-CN" sz="1400" dirty="0">
+                <a:latin typeface="+mn-ea"/>
+              </a:rPr>
+              <a:t>2 </a:t>
+            </a:r>
+            <a:r>
+              <a:rPr lang="zh-CN" altLang="en-US" sz="1400" dirty="0">
+                <a:latin typeface="+mn-ea"/>
+              </a:rPr>
+              <a:t>寸处），再在锁骨下缘处取穴</a:t>
+            </a:r>
+            <a:r>
+              <a:rPr lang="zh-CN" altLang="en-US" sz="1400" dirty="0" smtClean="0">
+                <a:latin typeface="+mn-ea"/>
+              </a:rPr>
+              <a:t>。</a:t>
+            </a:r>
+            <a:endParaRPr lang="zh-CN" altLang="en-US" sz="1400" dirty="0">
               <a:latin typeface="+mn-ea"/>
             </a:endParaRPr>
           </a:p>
           <a:p>
-            <a:pPr marL="0" indent="0">
-              <a:buFont typeface="Arial" panose="020B0604020202020204" pitchFamily="34" charset="0"/>
-              <a:buNone/>
-            </a:pPr>
-            <a:r>
-              <a:rPr lang="zh-CN" altLang="en-US" sz="1200" dirty="0">
-                <a:latin typeface="+mn-ea"/>
-              </a:rPr>
-              <a:t>恐惧是通往生命进化的一扇门，勇敢的面对恐惧，往前大步迈进。如果不敢面对恐惧，我们就无法真正的活着，而且某些门永远不会为我们而开。</a:t>
-            </a:r>
-          </a:p>
-          <a:p>
-            <a:pPr marL="0" indent="0">
-              <a:buFont typeface="Arial" panose="020B0604020202020204" pitchFamily="34" charset="0"/>
-              <a:buNone/>
-            </a:pPr>
-            <a:endParaRPr lang="zh-CN" altLang="en-US" sz="1200" dirty="0">
+            <a:pPr>
+              <a:lnSpc>
+                <a:spcPts val="1800"/>
+              </a:lnSpc>
+              <a:buFont typeface="Wingdings" panose="05000000000000000000" pitchFamily="2" charset="2"/>
+              <a:buChar char="n"/>
+            </a:pPr>
+            <a:r>
+              <a:rPr lang="zh-CN" altLang="en-US" sz="1400" dirty="0">
+                <a:latin typeface="+mn-ea"/>
+              </a:rPr>
+              <a:t>功效作用：通过疏通胸部气机、滋养肾精心神，实现情绪的平稳</a:t>
+            </a:r>
+            <a:r>
+              <a:rPr lang="zh-CN" altLang="en-US" sz="1400" dirty="0" smtClean="0">
+                <a:latin typeface="+mn-ea"/>
+              </a:rPr>
+              <a:t>疏导。</a:t>
+            </a:r>
+            <a:endParaRPr lang="en-US" altLang="zh-CN" sz="1400" dirty="0" smtClean="0">
               <a:latin typeface="+mn-ea"/>
             </a:endParaRPr>
           </a:p>
           <a:p>
             <a:pPr marL="0" indent="0">
-              <a:buFont typeface="Arial" panose="020B0604020202020204" pitchFamily="34" charset="0"/>
-              <a:buNone/>
-            </a:pPr>
-            <a:r>
-              <a:rPr lang="zh-CN" altLang="en-US" sz="1200" dirty="0">
-                <a:latin typeface="+mn-ea"/>
-              </a:rPr>
-              <a:t>怀着这样的心情，我们要勇敢的面对，被拒绝，对立，被指责，被批判，等等等等的恐惧。我们要接受，每个人都可能这样子对待我，这是人生的一部分。</a:t>
+              <a:lnSpc>
+                <a:spcPts val="1800"/>
+              </a:lnSpc>
+              <a:buNone/>
+            </a:pPr>
+            <a:r>
+              <a:rPr lang="zh-CN" altLang="en-US" sz="1400" dirty="0" smtClean="0">
+                <a:latin typeface="+mn-ea"/>
+              </a:rPr>
+              <a:t>与</a:t>
+            </a:r>
+            <a:r>
+              <a:rPr lang="zh-CN" altLang="en-US" sz="1400" dirty="0">
+                <a:latin typeface="+mn-ea"/>
+              </a:rPr>
+              <a:t>肾经相关的能量与情绪有，不信任，怀疑，觉得自己被利用，心神不宁，害怕，觉得不安全。</a:t>
             </a:r>
           </a:p>
           <a:p>
             <a:pPr marL="0" indent="0">
-              <a:buFont typeface="Arial" panose="020B0604020202020204" pitchFamily="34" charset="0"/>
-              <a:buNone/>
-            </a:pPr>
-            <a:endParaRPr lang="zh-CN" altLang="en-US" sz="1200" dirty="0">
+              <a:lnSpc>
+                <a:spcPts val="1800"/>
+              </a:lnSpc>
+              <a:buFont typeface="Arial" panose="020B0604020202020204" pitchFamily="34" charset="0"/>
+              <a:buNone/>
+            </a:pPr>
+            <a:r>
+              <a:rPr lang="zh-CN" altLang="en-US" sz="1400" dirty="0" smtClean="0">
+                <a:latin typeface="+mn-ea"/>
+              </a:rPr>
+              <a:t>恐惧</a:t>
+            </a:r>
+            <a:r>
+              <a:rPr lang="zh-CN" altLang="en-US" sz="1400" dirty="0">
+                <a:latin typeface="+mn-ea"/>
+              </a:rPr>
+              <a:t>是通往生命进化的一扇门，勇敢的面对恐惧，往前大步迈进。如果不敢面对恐惧，我们就无法真正的活着，而且某些门永远不会为我们而开。</a:t>
+            </a:r>
+          </a:p>
+          <a:p>
+            <a:pPr marL="0" indent="0">
+              <a:lnSpc>
+                <a:spcPts val="1800"/>
+              </a:lnSpc>
+              <a:buFont typeface="Arial" panose="020B0604020202020204" pitchFamily="34" charset="0"/>
+              <a:buNone/>
+            </a:pPr>
+            <a:r>
+              <a:rPr lang="zh-CN" altLang="en-US" sz="1400" dirty="0" smtClean="0">
+                <a:latin typeface="+mn-ea"/>
+              </a:rPr>
+              <a:t>怀着</a:t>
+            </a:r>
+            <a:r>
+              <a:rPr lang="zh-CN" altLang="en-US" sz="1400" dirty="0">
+                <a:latin typeface="+mn-ea"/>
+              </a:rPr>
+              <a:t>这样的心情，我们要勇敢的面对，被拒绝，对立，被指责，被批判，等等等等的恐惧。我们要接受，每个人都可能这样子对待我，这是人生的一部分。</a:t>
+            </a:r>
+          </a:p>
+          <a:p>
+            <a:pPr marL="0" indent="0">
+              <a:lnSpc>
+                <a:spcPts val="1800"/>
+              </a:lnSpc>
+              <a:buFont typeface="Arial" panose="020B0604020202020204" pitchFamily="34" charset="0"/>
+              <a:buNone/>
+            </a:pPr>
+            <a:r>
+              <a:rPr lang="zh-CN" altLang="en-US" sz="1400" dirty="0" smtClean="0">
+                <a:latin typeface="+mn-ea"/>
+              </a:rPr>
+              <a:t>我们</a:t>
+            </a:r>
+            <a:r>
+              <a:rPr lang="zh-CN" altLang="en-US" sz="1400" dirty="0">
+                <a:latin typeface="+mn-ea"/>
+              </a:rPr>
+              <a:t>每个人都有权力对别人说不，不让别人越雷池一步。</a:t>
+            </a:r>
+          </a:p>
+          <a:p>
+            <a:pPr marL="0" indent="0">
+              <a:lnSpc>
+                <a:spcPts val="1800"/>
+              </a:lnSpc>
+              <a:buFont typeface="Arial" panose="020B0604020202020204" pitchFamily="34" charset="0"/>
+              <a:buNone/>
+            </a:pPr>
+            <a:r>
+              <a:rPr lang="zh-CN" altLang="en-US" sz="1400" dirty="0" smtClean="0">
+                <a:latin typeface="+mn-ea"/>
+              </a:rPr>
+              <a:t>对</a:t>
+            </a:r>
+            <a:r>
+              <a:rPr lang="zh-CN" altLang="en-US" sz="1400" dirty="0">
+                <a:latin typeface="+mn-ea"/>
+              </a:rPr>
+              <a:t>死亡的恐惧，是恐惧放下我们所知的一切，恐惧未知</a:t>
+            </a:r>
+            <a:r>
+              <a:rPr lang="zh-CN" altLang="en-US" sz="1400" dirty="0" smtClean="0">
+                <a:latin typeface="+mn-ea"/>
+              </a:rPr>
+              <a:t>，</a:t>
+            </a:r>
+            <a:endParaRPr lang="en-US" altLang="zh-CN" sz="1400" dirty="0" smtClean="0">
               <a:latin typeface="+mn-ea"/>
             </a:endParaRPr>
           </a:p>
           <a:p>
             <a:pPr marL="0" indent="0">
-              <a:buFont typeface="Arial" panose="020B0604020202020204" pitchFamily="34" charset="0"/>
-              <a:buNone/>
-            </a:pPr>
-            <a:r>
-              <a:rPr lang="zh-CN" altLang="en-US" sz="1200" dirty="0">
-                <a:latin typeface="+mn-ea"/>
-              </a:rPr>
-              <a:t>我们每个人都有权力对别人说不，不让别人越雷池一步。</a:t>
-            </a:r>
-          </a:p>
-          <a:p>
-            <a:pPr marL="0" indent="0">
-              <a:buFont typeface="Arial" panose="020B0604020202020204" pitchFamily="34" charset="0"/>
-              <a:buNone/>
-            </a:pPr>
-            <a:endParaRPr lang="zh-CN" altLang="en-US" sz="1200" dirty="0">
-              <a:latin typeface="+mn-ea"/>
-            </a:endParaRPr>
-          </a:p>
-          <a:p>
-            <a:pPr marL="0" indent="0">
-              <a:buFont typeface="Arial" panose="020B0604020202020204" pitchFamily="34" charset="0"/>
-              <a:buNone/>
-            </a:pPr>
-            <a:r>
-              <a:rPr lang="zh-CN" altLang="en-US" sz="1200" dirty="0">
-                <a:latin typeface="+mn-ea"/>
-              </a:rPr>
-              <a:t>对死亡的恐惧，是恐惧放下我们所知的一切，恐惧未知，克服死亡的恐惧，是接受人生，只是一趟短暂的旅程。</a:t>
+              <a:lnSpc>
+                <a:spcPts val="1800"/>
+              </a:lnSpc>
+              <a:buFont typeface="Arial" panose="020B0604020202020204" pitchFamily="34" charset="0"/>
+              <a:buNone/>
+            </a:pPr>
+            <a:r>
+              <a:rPr lang="zh-CN" altLang="en-US" sz="1400" dirty="0" smtClean="0">
+                <a:latin typeface="+mn-ea"/>
+              </a:rPr>
+              <a:t>克服</a:t>
+            </a:r>
+            <a:r>
+              <a:rPr lang="zh-CN" altLang="en-US" sz="1400" dirty="0">
+                <a:latin typeface="+mn-ea"/>
+              </a:rPr>
+              <a:t>死亡的恐惧，是接受人生，只是一趟短暂的旅程。</a:t>
             </a:r>
           </a:p>
         </p:txBody>
@@ -15422,8 +15155,8 @@
         </p:nvSpPr>
         <p:spPr>
           <a:xfrm>
-            <a:off x="6032157" y="1320251"/>
-            <a:ext cx="5638635" cy="3989337"/>
+            <a:off x="7548403" y="1320251"/>
+            <a:ext cx="4122390" cy="3989337"/>
           </a:xfrm>
           <a:prstGeom prst="rect">
             <a:avLst/>
@@ -15535,35 +15268,38 @@
           </a:lstStyle>
           <a:p>
             <a:r>
-              <a:rPr lang="zh-CN" altLang="en-US" dirty="0"/>
+              <a:rPr lang="zh-CN" altLang="en-US" sz="1400" dirty="0"/>
               <a:t>首先，闭上眼睛，回想过去让你觉得恐惧的情境。尢其是那些对立，拒绝，死亡，等等。</a:t>
             </a:r>
           </a:p>
           <a:p>
-            <a:endParaRPr lang="zh-CN" altLang="en-US" dirty="0"/>
-          </a:p>
-          <a:p>
-            <a:r>
-              <a:rPr lang="zh-CN" altLang="en-US" dirty="0"/>
-              <a:t>观想那时的感觉，当时的事件，参与的人，当时的场景。将那些情境带回到现在。</a:t>
-            </a:r>
-          </a:p>
-          <a:p>
-            <a:endParaRPr lang="zh-CN" altLang="en-US" dirty="0"/>
-          </a:p>
-          <a:p>
-            <a:r>
-              <a:rPr lang="zh-CN" altLang="en-US" dirty="0"/>
-              <a:t>允许自己去感受那些情绪，体验自己的情绪，不要和它对抗，去感受它的存在。</a:t>
-            </a:r>
-          </a:p>
-          <a:p>
-            <a:endParaRPr lang="zh-CN" altLang="en-US" dirty="0"/>
-          </a:p>
-          <a:p>
-            <a:r>
-              <a:rPr lang="zh-CN" altLang="en-US" dirty="0"/>
-              <a:t>接着，轻敲或按摩肾经的穴道「俞府」，位于锁骨下方与肋骨中间的位置。</a:t>
+            <a:r>
+              <a:rPr lang="zh-CN" altLang="en-US" sz="1400" dirty="0" smtClean="0"/>
+              <a:t>观</a:t>
+            </a:r>
+            <a:r>
+              <a:rPr lang="zh-CN" altLang="en-US" sz="1400" dirty="0"/>
+              <a:t>想那时的感觉，当时的事件，参与的人，当时的场景。将那些情境带回到现在。</a:t>
+            </a:r>
+          </a:p>
+          <a:p>
+            <a:r>
+              <a:rPr lang="zh-CN" altLang="en-US" sz="1400" dirty="0" smtClean="0"/>
+              <a:t>允许</a:t>
+            </a:r>
+            <a:r>
+              <a:rPr lang="zh-CN" altLang="en-US" sz="1400" dirty="0"/>
+              <a:t>自己去感受那些情绪，体验自己的情绪，不要和它对抗，去感受它的存在。</a:t>
+            </a:r>
+          </a:p>
+          <a:p>
+            <a:r>
+              <a:rPr lang="zh-CN" altLang="en-US" sz="1400" dirty="0" smtClean="0"/>
+              <a:t>接着</a:t>
+            </a:r>
+            <a:r>
+              <a:rPr lang="zh-CN" altLang="en-US" sz="1400" dirty="0"/>
+              <a:t>，轻敲或按摩肾经的穴道「俞府」，位于锁骨下方与肋骨中间的位置。</a:t>
             </a:r>
           </a:p>
         </p:txBody>
@@ -15596,8 +15332,8 @@
         </p:blipFill>
         <p:spPr>
           <a:xfrm>
-            <a:off x="7127240" y="4395690"/>
-            <a:ext cx="4160520" cy="2340864"/>
+            <a:off x="7560966" y="4430851"/>
+            <a:ext cx="4119840" cy="2317976"/>
           </a:xfrm>
           <a:prstGeom prst="rect">
             <a:avLst/>
@@ -15643,407 +15379,6 @@
           <a:chExt cx="0" cy="0"/>
         </a:xfrm>
       </p:grpSpPr>
-      <p:sp>
-        <p:nvSpPr>
-          <p:cNvPr id="2" name="标题 1">
-            <a:extLst>
-              <a:ext uri="{FF2B5EF4-FFF2-40B4-BE49-F238E27FC236}">
-                <a16:creationId xmlns:a16="http://schemas.microsoft.com/office/drawing/2014/main" id="{1270B972-20A8-96B4-90CD-75038D5E754C}"/>
-              </a:ext>
-            </a:extLst>
-          </p:cNvPr>
-          <p:cNvSpPr>
-            <a:spLocks noGrp="1"/>
-          </p:cNvSpPr>
-          <p:nvPr>
-            <p:ph type="title"/>
-          </p:nvPr>
-        </p:nvSpPr>
-        <p:spPr>
-          <a:xfrm>
-            <a:off x="521208" y="662740"/>
-            <a:ext cx="11155680" cy="936652"/>
-          </a:xfrm>
-        </p:spPr>
-        <p:txBody>
-          <a:bodyPr/>
-          <a:lstStyle/>
-          <a:p>
-            <a:r>
-              <a:rPr lang="en-US" altLang="zh-CN" sz="900" dirty="0"/>
-              <a:t>EFT </a:t>
-            </a:r>
-            <a:r>
-              <a:rPr lang="zh-CN" altLang="en-US" sz="900" dirty="0"/>
-              <a:t>核心敲击穴位（</a:t>
-            </a:r>
-            <a:r>
-              <a:rPr lang="en-US" altLang="zh-CN" sz="900" dirty="0"/>
-              <a:t>7</a:t>
-            </a:r>
-            <a:r>
-              <a:rPr lang="zh-CN" altLang="en-US" sz="900" dirty="0"/>
-              <a:t>）</a:t>
-            </a:r>
-          </a:p>
-        </p:txBody>
-      </p:sp>
-      <p:sp>
-        <p:nvSpPr>
-          <p:cNvPr id="3" name="内容占位符 2">
-            <a:extLst>
-              <a:ext uri="{FF2B5EF4-FFF2-40B4-BE49-F238E27FC236}">
-                <a16:creationId xmlns:a16="http://schemas.microsoft.com/office/drawing/2014/main" id="{B3FCA041-9D38-85D0-A6AD-7B76ABD2D495}"/>
-              </a:ext>
-            </a:extLst>
-          </p:cNvPr>
-          <p:cNvSpPr>
-            <a:spLocks noGrp="1"/>
-          </p:cNvSpPr>
-          <p:nvPr>
-            <p:ph idx="1"/>
-          </p:nvPr>
-        </p:nvSpPr>
-        <p:spPr>
-          <a:xfrm>
-            <a:off x="515112" y="1576785"/>
-            <a:ext cx="11500677" cy="3989337"/>
-          </a:xfrm>
-        </p:spPr>
-        <p:txBody>
-          <a:bodyPr/>
-          <a:lstStyle/>
-          <a:p>
-            <a:pPr marL="0" indent="0">
-              <a:buNone/>
-            </a:pPr>
-            <a:r>
-              <a:rPr lang="zh-CN" altLang="en-US" sz="1400" dirty="0">
-                <a:latin typeface="+mn-ea"/>
-              </a:rPr>
-              <a:t>情绪要穴</a:t>
-            </a:r>
-            <a:r>
-              <a:rPr lang="en-US" altLang="zh-CN" sz="1400" dirty="0">
-                <a:latin typeface="+mn-ea"/>
-              </a:rPr>
-              <a:t>7</a:t>
-            </a:r>
-            <a:r>
-              <a:rPr lang="zh-CN" altLang="en-US" sz="1400" dirty="0">
-                <a:latin typeface="+mn-ea"/>
-              </a:rPr>
-              <a:t>：脾经之「大包」－低自尊</a:t>
-            </a:r>
-          </a:p>
-          <a:p>
-            <a:pPr marL="0" indent="0">
-              <a:buNone/>
-            </a:pPr>
-            <a:r>
-              <a:rPr lang="zh-CN" altLang="en-US" sz="1400" dirty="0">
-                <a:latin typeface="+mn-ea"/>
-              </a:rPr>
-              <a:t>脾经，对免疫系统非常重要，与内分泌系统息息相关。</a:t>
-            </a:r>
-          </a:p>
-          <a:p>
-            <a:pPr marL="0" indent="0">
-              <a:buNone/>
-            </a:pPr>
-            <a:endParaRPr lang="zh-CN" altLang="en-US" sz="1400" dirty="0">
-              <a:latin typeface="+mn-ea"/>
-            </a:endParaRPr>
-          </a:p>
-          <a:p>
-            <a:pPr marL="0" indent="0">
-              <a:buNone/>
-            </a:pPr>
-            <a:r>
-              <a:rPr lang="zh-CN" altLang="en-US" sz="1400" dirty="0">
-                <a:latin typeface="+mn-ea"/>
-              </a:rPr>
-              <a:t>和脾经相连结的情绪有：缺乏自尊，不敢悍卫自己，胆怯，软弱，缺乏魄力，依赖他人，缺乏安全感，觉得没有希望，无法控制自己的人生，忧虑，怀疑并恐惧未来，觉得自己不好，不美，不聪明，充满负面的信念：「我不苗条」，「不坚强」，「不够勇敢」，「我不值得，不该得到这样的报偿」，「我做不到」。</a:t>
-            </a:r>
-          </a:p>
-          <a:p>
-            <a:pPr marL="0" indent="0">
-              <a:buNone/>
-            </a:pPr>
-            <a:endParaRPr lang="zh-CN" altLang="en-US" sz="1400" dirty="0">
-              <a:latin typeface="+mn-ea"/>
-            </a:endParaRPr>
-          </a:p>
-          <a:p>
-            <a:pPr marL="0" indent="0">
-              <a:buNone/>
-            </a:pPr>
-            <a:r>
-              <a:rPr lang="zh-CN" altLang="en-US" sz="1400" dirty="0">
-                <a:latin typeface="+mn-ea"/>
-              </a:rPr>
-              <a:t>去观想，你是否有这些情绪。</a:t>
-            </a:r>
-          </a:p>
-          <a:p>
-            <a:pPr marL="0" indent="0">
-              <a:buNone/>
-            </a:pPr>
-            <a:r>
-              <a:rPr lang="zh-CN" altLang="en-US" sz="1400" dirty="0">
-                <a:latin typeface="+mn-ea"/>
-              </a:rPr>
-              <a:t>静静的，闭上眼睛，放松全身，将注意力集中在这些让你感觉到没有了自尊的情境里。你没有起身悍卫自己的时候，以及，你觉得受到威胁的时候，你觉得无法掌握自己力量的时候，你不敢设定界线的时候。</a:t>
-            </a:r>
-          </a:p>
-          <a:p>
-            <a:pPr marL="0" indent="0">
-              <a:buNone/>
-            </a:pPr>
-            <a:r>
-              <a:rPr lang="zh-CN" altLang="en-US" sz="1400" dirty="0">
-                <a:latin typeface="+mn-ea"/>
-              </a:rPr>
-              <a:t>接着，轻敲或按摩脾经的穴道「大包」的位置。</a:t>
-            </a:r>
-          </a:p>
-        </p:txBody>
-      </p:sp>
-      <p:sp>
-        <p:nvSpPr>
-          <p:cNvPr id="14" name="内容占位符 2">
-            <a:extLst>
-              <a:ext uri="{FF2B5EF4-FFF2-40B4-BE49-F238E27FC236}">
-                <a16:creationId xmlns:a16="http://schemas.microsoft.com/office/drawing/2014/main" id="{4802056F-4F77-CF46-19EA-95B00943EE5C}"/>
-              </a:ext>
-            </a:extLst>
-          </p:cNvPr>
-          <p:cNvSpPr txBox="1">
-            <a:spLocks/>
-          </p:cNvSpPr>
-          <p:nvPr/>
-        </p:nvSpPr>
-        <p:spPr>
-          <a:xfrm>
-            <a:off x="264034" y="5566122"/>
-            <a:ext cx="9337166" cy="757207"/>
-          </a:xfrm>
-          <a:prstGeom prst="rect">
-            <a:avLst/>
-          </a:prstGeom>
-        </p:spPr>
-        <p:txBody>
-          <a:bodyPr lIns="109728" tIns="109728" rIns="109728" bIns="91440"/>
-          <a:lstStyle>
-            <a:lvl1pPr marL="228600" indent="-228600" algn="l" defTabSz="914400" rtl="0" eaLnBrk="1" latinLnBrk="0" hangingPunct="1">
-              <a:lnSpc>
-                <a:spcPct val="125000"/>
-              </a:lnSpc>
-              <a:spcBef>
-                <a:spcPts val="1000"/>
-              </a:spcBef>
-              <a:buFont typeface="Arial" panose="020B0604020202020204" pitchFamily="34" charset="0"/>
-              <a:buChar char="•"/>
-              <a:defRPr sz="1600" kern="1200" spc="160">
-                <a:solidFill>
-                  <a:schemeClr val="tx1"/>
-                </a:solidFill>
-                <a:latin typeface="+mn-lt"/>
-                <a:ea typeface="+mn-ea"/>
-                <a:cs typeface="+mn-cs"/>
-              </a:defRPr>
-            </a:lvl1pPr>
-            <a:lvl2pPr marL="685800" indent="-228600" algn="l" defTabSz="914400" rtl="0" eaLnBrk="1" latinLnBrk="0" hangingPunct="1">
-              <a:lnSpc>
-                <a:spcPct val="125000"/>
-              </a:lnSpc>
-              <a:spcBef>
-                <a:spcPts val="500"/>
-              </a:spcBef>
-              <a:buFont typeface="Arial" panose="020B0604020202020204" pitchFamily="34" charset="0"/>
-              <a:buChar char="•"/>
-              <a:defRPr sz="1600" kern="1200" spc="160">
-                <a:solidFill>
-                  <a:schemeClr val="tx1"/>
-                </a:solidFill>
-                <a:latin typeface="+mn-lt"/>
-                <a:ea typeface="+mn-ea"/>
-                <a:cs typeface="+mn-cs"/>
-              </a:defRPr>
-            </a:lvl2pPr>
-            <a:lvl3pPr marL="1143000" indent="-228600" algn="l" defTabSz="914400" rtl="0" eaLnBrk="1" latinLnBrk="0" hangingPunct="1">
-              <a:lnSpc>
-                <a:spcPct val="125000"/>
-              </a:lnSpc>
-              <a:spcBef>
-                <a:spcPts val="500"/>
-              </a:spcBef>
-              <a:buFont typeface="Arial" panose="020B0604020202020204" pitchFamily="34" charset="0"/>
-              <a:buChar char="•"/>
-              <a:defRPr sz="1600" kern="1200" spc="160">
-                <a:solidFill>
-                  <a:schemeClr val="tx1"/>
-                </a:solidFill>
-                <a:latin typeface="+mn-lt"/>
-                <a:ea typeface="+mn-ea"/>
-                <a:cs typeface="+mn-cs"/>
-              </a:defRPr>
-            </a:lvl3pPr>
-            <a:lvl4pPr marL="1600200" indent="-228600" algn="l" defTabSz="914400" rtl="0" eaLnBrk="1" latinLnBrk="0" hangingPunct="1">
-              <a:lnSpc>
-                <a:spcPct val="125000"/>
-              </a:lnSpc>
-              <a:spcBef>
-                <a:spcPts val="500"/>
-              </a:spcBef>
-              <a:buFont typeface="Arial" panose="020B0604020202020204" pitchFamily="34" charset="0"/>
-              <a:buChar char="•"/>
-              <a:defRPr sz="1600" kern="1200" spc="160">
-                <a:solidFill>
-                  <a:schemeClr val="tx1"/>
-                </a:solidFill>
-                <a:latin typeface="+mn-lt"/>
-                <a:ea typeface="+mn-ea"/>
-                <a:cs typeface="+mn-cs"/>
-              </a:defRPr>
-            </a:lvl4pPr>
-            <a:lvl5pPr marL="2057400" indent="-228600" algn="l" defTabSz="914400" rtl="0" eaLnBrk="1" latinLnBrk="0" hangingPunct="1">
-              <a:lnSpc>
-                <a:spcPct val="125000"/>
-              </a:lnSpc>
-              <a:spcBef>
-                <a:spcPts val="500"/>
-              </a:spcBef>
-              <a:buFont typeface="Arial" panose="020B0604020202020204" pitchFamily="34" charset="0"/>
-              <a:buChar char="•"/>
-              <a:defRPr sz="1600" kern="1200" spc="160">
-                <a:solidFill>
-                  <a:schemeClr val="tx1"/>
-                </a:solidFill>
-                <a:latin typeface="+mn-lt"/>
-                <a:ea typeface="+mn-ea"/>
-                <a:cs typeface="+mn-cs"/>
-              </a:defRPr>
-            </a:lvl5pPr>
-            <a:lvl6pPr marL="2514600" indent="-228600" algn="l" defTabSz="914400" rtl="0" eaLnBrk="1" latinLnBrk="0" hangingPunct="1">
-              <a:lnSpc>
-                <a:spcPct val="90000"/>
-              </a:lnSpc>
-              <a:spcBef>
-                <a:spcPts val="500"/>
-              </a:spcBef>
-              <a:buFont typeface="Arial" panose="020B0604020202020204" pitchFamily="34" charset="0"/>
-              <a:buChar char="•"/>
-              <a:defRPr sz="1800" kern="1200">
-                <a:solidFill>
-                  <a:schemeClr val="tx1"/>
-                </a:solidFill>
-                <a:latin typeface="+mn-lt"/>
-                <a:ea typeface="+mn-ea"/>
-                <a:cs typeface="+mn-cs"/>
-              </a:defRPr>
-            </a:lvl6pPr>
-            <a:lvl7pPr marL="2971800" indent="-228600" algn="l" defTabSz="914400" rtl="0" eaLnBrk="1" latinLnBrk="0" hangingPunct="1">
-              <a:lnSpc>
-                <a:spcPct val="90000"/>
-              </a:lnSpc>
-              <a:spcBef>
-                <a:spcPts val="500"/>
-              </a:spcBef>
-              <a:buFont typeface="Arial" panose="020B0604020202020204" pitchFamily="34" charset="0"/>
-              <a:buChar char="•"/>
-              <a:defRPr sz="1800" kern="1200">
-                <a:solidFill>
-                  <a:schemeClr val="tx1"/>
-                </a:solidFill>
-                <a:latin typeface="+mn-lt"/>
-                <a:ea typeface="+mn-ea"/>
-                <a:cs typeface="+mn-cs"/>
-              </a:defRPr>
-            </a:lvl7pPr>
-            <a:lvl8pPr marL="3429000" indent="-228600" algn="l" defTabSz="914400" rtl="0" eaLnBrk="1" latinLnBrk="0" hangingPunct="1">
-              <a:lnSpc>
-                <a:spcPct val="90000"/>
-              </a:lnSpc>
-              <a:spcBef>
-                <a:spcPts val="500"/>
-              </a:spcBef>
-              <a:buFont typeface="Arial" panose="020B0604020202020204" pitchFamily="34" charset="0"/>
-              <a:buChar char="•"/>
-              <a:defRPr sz="1800" kern="1200">
-                <a:solidFill>
-                  <a:schemeClr val="tx1"/>
-                </a:solidFill>
-                <a:latin typeface="+mn-lt"/>
-                <a:ea typeface="+mn-ea"/>
-                <a:cs typeface="+mn-cs"/>
-              </a:defRPr>
-            </a:lvl8pPr>
-            <a:lvl9pPr marL="3886200" indent="-228600" algn="l" defTabSz="914400" rtl="0" eaLnBrk="1" latinLnBrk="0" hangingPunct="1">
-              <a:lnSpc>
-                <a:spcPct val="90000"/>
-              </a:lnSpc>
-              <a:spcBef>
-                <a:spcPts val="500"/>
-              </a:spcBef>
-              <a:buFont typeface="Arial" panose="020B0604020202020204" pitchFamily="34" charset="0"/>
-              <a:buChar char="•"/>
-              <a:defRPr sz="1800" kern="1200">
-                <a:solidFill>
-                  <a:schemeClr val="tx1"/>
-                </a:solidFill>
-                <a:latin typeface="+mn-lt"/>
-                <a:ea typeface="+mn-ea"/>
-                <a:cs typeface="+mn-cs"/>
-              </a:defRPr>
-            </a:lvl9pPr>
-          </a:lstStyle>
-          <a:p>
-            <a:pPr marL="0" indent="0">
-              <a:buNone/>
-            </a:pPr>
-            <a:r>
-              <a:rPr lang="zh-CN" altLang="en-US" sz="3200" dirty="0">
-                <a:effectLst>
-                  <a:outerShdw blurRad="38100" dist="38100" dir="2700000" algn="tl">
-                    <a:srgbClr val="000000">
-                      <a:alpha val="43137"/>
-                    </a:srgbClr>
-                  </a:outerShdw>
-                </a:effectLst>
-                <a:latin typeface="+mn-ea"/>
-              </a:rPr>
-              <a:t>腋下 </a:t>
-            </a:r>
-            <a:r>
-              <a:rPr lang="en-US" altLang="zh-CN" sz="3200" dirty="0">
-                <a:effectLst>
-                  <a:outerShdw blurRad="38100" dist="38100" dir="2700000" algn="tl">
-                    <a:srgbClr val="000000">
-                      <a:alpha val="43137"/>
-                    </a:srgbClr>
-                  </a:outerShdw>
-                </a:effectLst>
-                <a:latin typeface="+mn-ea"/>
-              </a:rPr>
-              <a:t>- </a:t>
-            </a:r>
-            <a:r>
-              <a:rPr lang="zh-CN" altLang="en-US" sz="3200" dirty="0">
-                <a:effectLst>
-                  <a:outerShdw blurRad="38100" dist="38100" dir="2700000" algn="tl">
-                    <a:srgbClr val="000000">
-                      <a:alpha val="43137"/>
-                    </a:srgbClr>
-                  </a:outerShdw>
-                </a:effectLst>
-                <a:latin typeface="+mn-ea"/>
-              </a:rPr>
-              <a:t>大包穴（足太阴脾经）</a:t>
-            </a:r>
-          </a:p>
-        </p:txBody>
-      </p:sp>
       <p:pic>
         <p:nvPicPr>
           <p:cNvPr id="5" name="图片 4" descr="图示&#10;&#10;AI 生成的内容可能不正确。">
@@ -16072,8 +15407,8 @@
         </p:blipFill>
         <p:spPr>
           <a:xfrm>
-            <a:off x="9131300" y="4892648"/>
-            <a:ext cx="1890776" cy="1890776"/>
+            <a:off x="8835090" y="662740"/>
+            <a:ext cx="2677830" cy="2677830"/>
           </a:xfrm>
           <a:prstGeom prst="rect">
             <a:avLst/>
@@ -16083,6 +15418,472 @@
           </a:effectLst>
         </p:spPr>
       </p:pic>
+      <p:sp>
+        <p:nvSpPr>
+          <p:cNvPr id="2" name="标题 1">
+            <a:extLst>
+              <a:ext uri="{FF2B5EF4-FFF2-40B4-BE49-F238E27FC236}">
+                <a16:creationId xmlns:a16="http://schemas.microsoft.com/office/drawing/2014/main" id="{1270B972-20A8-96B4-90CD-75038D5E754C}"/>
+              </a:ext>
+            </a:extLst>
+          </p:cNvPr>
+          <p:cNvSpPr>
+            <a:spLocks noGrp="1"/>
+          </p:cNvSpPr>
+          <p:nvPr>
+            <p:ph type="title"/>
+          </p:nvPr>
+        </p:nvSpPr>
+        <p:spPr>
+          <a:xfrm>
+            <a:off x="521208" y="662740"/>
+            <a:ext cx="11155680" cy="936652"/>
+          </a:xfrm>
+        </p:spPr>
+        <p:txBody>
+          <a:bodyPr/>
+          <a:lstStyle/>
+          <a:p>
+            <a:r>
+              <a:rPr lang="en-US" altLang="zh-CN" sz="4400" dirty="0"/>
+              <a:t>EFT </a:t>
+            </a:r>
+            <a:r>
+              <a:rPr lang="zh-CN" altLang="en-US" sz="4400" dirty="0"/>
+              <a:t>核心敲击穴位</a:t>
+            </a:r>
+            <a:r>
+              <a:rPr lang="zh-CN" altLang="en-US" sz="4400" dirty="0" smtClean="0"/>
+              <a:t>（</a:t>
+            </a:r>
+            <a:r>
+              <a:rPr lang="en-US" altLang="zh-CN" sz="4400" dirty="0" smtClean="0"/>
+              <a:t>11</a:t>
+            </a:r>
+            <a:r>
+              <a:rPr lang="zh-CN" altLang="en-US" sz="4400" dirty="0" smtClean="0"/>
+              <a:t>）</a:t>
+            </a:r>
+            <a:endParaRPr lang="zh-CN" altLang="en-US" sz="4400" dirty="0"/>
+          </a:p>
+        </p:txBody>
+      </p:sp>
+      <p:sp>
+        <p:nvSpPr>
+          <p:cNvPr id="3" name="内容占位符 2">
+            <a:extLst>
+              <a:ext uri="{FF2B5EF4-FFF2-40B4-BE49-F238E27FC236}">
+                <a16:creationId xmlns:a16="http://schemas.microsoft.com/office/drawing/2014/main" id="{B3FCA041-9D38-85D0-A6AD-7B76ABD2D495}"/>
+              </a:ext>
+            </a:extLst>
+          </p:cNvPr>
+          <p:cNvSpPr>
+            <a:spLocks noGrp="1"/>
+          </p:cNvSpPr>
+          <p:nvPr>
+            <p:ph idx="1"/>
+          </p:nvPr>
+        </p:nvSpPr>
+        <p:spPr>
+          <a:xfrm>
+            <a:off x="515112" y="1576785"/>
+            <a:ext cx="11161776" cy="3989337"/>
+          </a:xfrm>
+        </p:spPr>
+        <p:txBody>
+          <a:bodyPr/>
+          <a:lstStyle/>
+          <a:p>
+            <a:pPr marL="0" indent="0">
+              <a:buNone/>
+            </a:pPr>
+            <a:r>
+              <a:rPr lang="zh-CN" altLang="en-US" dirty="0">
+                <a:latin typeface="+mn-ea"/>
+              </a:rPr>
+              <a:t>对应情绪</a:t>
+            </a:r>
+            <a:r>
+              <a:rPr lang="zh-CN" altLang="en-US" dirty="0" smtClean="0">
+                <a:latin typeface="+mn-ea"/>
+              </a:rPr>
+              <a:t>：</a:t>
+            </a:r>
+            <a:r>
+              <a:rPr lang="zh-CN" altLang="en-US" dirty="0">
+                <a:latin typeface="+mn-ea"/>
+              </a:rPr>
+              <a:t>低自尊，情绪低落、思虑过重。</a:t>
+            </a:r>
+          </a:p>
+          <a:p>
+            <a:pPr marL="0" indent="0">
+              <a:buNone/>
+            </a:pPr>
+            <a:r>
+              <a:rPr lang="zh-CN" altLang="en-US" dirty="0">
+                <a:latin typeface="+mn-ea"/>
+              </a:rPr>
+              <a:t>穴位位置：侧胸部</a:t>
+            </a:r>
+            <a:r>
+              <a:rPr lang="zh-CN" altLang="en-US" dirty="0" smtClean="0">
+                <a:latin typeface="+mn-ea"/>
+              </a:rPr>
+              <a:t>，</a:t>
+            </a:r>
+            <a:r>
+              <a:rPr lang="zh-CN" altLang="en-US" dirty="0">
+                <a:latin typeface="+mn-ea"/>
+              </a:rPr>
+              <a:t>腋窝下的腋中线与第 </a:t>
+            </a:r>
+            <a:r>
+              <a:rPr lang="en-US" altLang="zh-CN" dirty="0">
+                <a:latin typeface="+mn-ea"/>
+              </a:rPr>
+              <a:t>6 </a:t>
+            </a:r>
+            <a:r>
+              <a:rPr lang="zh-CN" altLang="en-US" dirty="0">
+                <a:latin typeface="+mn-ea"/>
+              </a:rPr>
+              <a:t>肋间隙的交点</a:t>
+            </a:r>
+            <a:r>
+              <a:rPr lang="zh-CN" altLang="en-US" dirty="0" smtClean="0">
+                <a:latin typeface="+mn-ea"/>
+              </a:rPr>
+              <a:t>。</a:t>
+            </a:r>
+            <a:endParaRPr lang="zh-CN" altLang="en-US" dirty="0">
+              <a:latin typeface="+mn-ea"/>
+            </a:endParaRPr>
+          </a:p>
+          <a:p>
+            <a:pPr marL="0" indent="0">
+              <a:buNone/>
+            </a:pPr>
+            <a:r>
+              <a:rPr lang="zh-CN" altLang="en-US" dirty="0">
+                <a:latin typeface="+mn-ea"/>
+              </a:rPr>
+              <a:t>功效作用：疏通全身经络气机，尤其擅长缓解因气血瘀滞或不足引发的情志失调。</a:t>
+            </a:r>
+            <a:endParaRPr lang="en-US" altLang="zh-CN" dirty="0" smtClean="0">
+              <a:latin typeface="+mn-ea"/>
+            </a:endParaRPr>
+          </a:p>
+          <a:p>
+            <a:pPr marL="0" indent="0">
+              <a:buNone/>
+            </a:pPr>
+            <a:r>
+              <a:rPr lang="zh-CN" altLang="en-US" dirty="0" smtClean="0">
+                <a:latin typeface="+mn-ea"/>
+              </a:rPr>
+              <a:t>脾</a:t>
+            </a:r>
+            <a:r>
+              <a:rPr lang="zh-CN" altLang="en-US" dirty="0">
+                <a:latin typeface="+mn-ea"/>
+              </a:rPr>
+              <a:t>经，对免疫系统非常重要，与内分泌系统息息相关。</a:t>
+            </a:r>
+          </a:p>
+          <a:p>
+            <a:pPr marL="0" indent="0">
+              <a:buNone/>
+            </a:pPr>
+            <a:r>
+              <a:rPr lang="zh-CN" altLang="en-US" dirty="0" smtClean="0">
+                <a:latin typeface="+mn-ea"/>
+              </a:rPr>
+              <a:t>和</a:t>
+            </a:r>
+            <a:r>
+              <a:rPr lang="zh-CN" altLang="en-US" dirty="0">
+                <a:latin typeface="+mn-ea"/>
+              </a:rPr>
+              <a:t>脾经相连结的情绪有：缺乏自尊，不敢悍卫自己，胆怯，软弱，缺乏魄力，依赖他人，缺乏安全感，觉得没有希望，无法控制自己的人生，忧虑，怀疑并恐惧未来，觉得自己不好，不美，不聪明，充满负面的信念：「我不苗条」，「不坚强」，「不够勇敢」，「我不值得，不该得到这样的报偿」，「我做不到」。</a:t>
+            </a:r>
+          </a:p>
+          <a:p>
+            <a:pPr marL="0" indent="0">
+              <a:buNone/>
+            </a:pPr>
+            <a:r>
+              <a:rPr lang="zh-CN" altLang="en-US" dirty="0" smtClean="0">
+                <a:latin typeface="+mn-ea"/>
+              </a:rPr>
+              <a:t>去</a:t>
+            </a:r>
+            <a:r>
+              <a:rPr lang="zh-CN" altLang="en-US" dirty="0">
+                <a:latin typeface="+mn-ea"/>
+              </a:rPr>
+              <a:t>观想，你是否有这些情绪。</a:t>
+            </a:r>
+          </a:p>
+          <a:p>
+            <a:pPr marL="0" indent="0">
+              <a:buNone/>
+            </a:pPr>
+            <a:r>
+              <a:rPr lang="zh-CN" altLang="en-US" dirty="0">
+                <a:latin typeface="+mn-ea"/>
+              </a:rPr>
+              <a:t>静静的，闭上眼睛，放松全身，将注意力集中在这些让你感觉到没有了自尊的情境里。你没有起身悍卫自己的时候，以及，你觉得受到威胁的时候，你觉得无法掌握自己力量的时候，你不敢设定界线的时候。</a:t>
+            </a:r>
+          </a:p>
+          <a:p>
+            <a:pPr marL="0" indent="0">
+              <a:buNone/>
+            </a:pPr>
+            <a:r>
+              <a:rPr lang="zh-CN" altLang="en-US" dirty="0">
+                <a:latin typeface="+mn-ea"/>
+              </a:rPr>
+              <a:t>接着，轻敲或按摩脾经的穴道「大包」的位置。</a:t>
+            </a:r>
+          </a:p>
+        </p:txBody>
+      </p:sp>
+      <p:sp>
+        <p:nvSpPr>
+          <p:cNvPr id="14" name="内容占位符 2">
+            <a:extLst>
+              <a:ext uri="{FF2B5EF4-FFF2-40B4-BE49-F238E27FC236}">
+                <a16:creationId xmlns:a16="http://schemas.microsoft.com/office/drawing/2014/main" id="{4802056F-4F77-CF46-19EA-95B00943EE5C}"/>
+              </a:ext>
+            </a:extLst>
+          </p:cNvPr>
+          <p:cNvSpPr txBox="1">
+            <a:spLocks/>
+          </p:cNvSpPr>
+          <p:nvPr/>
+        </p:nvSpPr>
+        <p:spPr>
+          <a:xfrm>
+            <a:off x="264034" y="5722960"/>
+            <a:ext cx="9337166" cy="757207"/>
+          </a:xfrm>
+          <a:prstGeom prst="rect">
+            <a:avLst/>
+          </a:prstGeom>
+        </p:spPr>
+        <p:txBody>
+          <a:bodyPr lIns="109728" tIns="109728" rIns="109728" bIns="91440"/>
+          <a:lstStyle>
+            <a:lvl1pPr marL="228600" indent="-228600" algn="l" defTabSz="914400" rtl="0" eaLnBrk="1" latinLnBrk="0" hangingPunct="1">
+              <a:lnSpc>
+                <a:spcPct val="125000"/>
+              </a:lnSpc>
+              <a:spcBef>
+                <a:spcPts val="1000"/>
+              </a:spcBef>
+              <a:buFont typeface="Arial" panose="020B0604020202020204" pitchFamily="34" charset="0"/>
+              <a:buChar char="•"/>
+              <a:defRPr sz="1600" kern="1200" spc="160">
+                <a:solidFill>
+                  <a:schemeClr val="tx1"/>
+                </a:solidFill>
+                <a:latin typeface="+mn-lt"/>
+                <a:ea typeface="+mn-ea"/>
+                <a:cs typeface="+mn-cs"/>
+              </a:defRPr>
+            </a:lvl1pPr>
+            <a:lvl2pPr marL="685800" indent="-228600" algn="l" defTabSz="914400" rtl="0" eaLnBrk="1" latinLnBrk="0" hangingPunct="1">
+              <a:lnSpc>
+                <a:spcPct val="125000"/>
+              </a:lnSpc>
+              <a:spcBef>
+                <a:spcPts val="500"/>
+              </a:spcBef>
+              <a:buFont typeface="Arial" panose="020B0604020202020204" pitchFamily="34" charset="0"/>
+              <a:buChar char="•"/>
+              <a:defRPr sz="1600" kern="1200" spc="160">
+                <a:solidFill>
+                  <a:schemeClr val="tx1"/>
+                </a:solidFill>
+                <a:latin typeface="+mn-lt"/>
+                <a:ea typeface="+mn-ea"/>
+                <a:cs typeface="+mn-cs"/>
+              </a:defRPr>
+            </a:lvl2pPr>
+            <a:lvl3pPr marL="1143000" indent="-228600" algn="l" defTabSz="914400" rtl="0" eaLnBrk="1" latinLnBrk="0" hangingPunct="1">
+              <a:lnSpc>
+                <a:spcPct val="125000"/>
+              </a:lnSpc>
+              <a:spcBef>
+                <a:spcPts val="500"/>
+              </a:spcBef>
+              <a:buFont typeface="Arial" panose="020B0604020202020204" pitchFamily="34" charset="0"/>
+              <a:buChar char="•"/>
+              <a:defRPr sz="1600" kern="1200" spc="160">
+                <a:solidFill>
+                  <a:schemeClr val="tx1"/>
+                </a:solidFill>
+                <a:latin typeface="+mn-lt"/>
+                <a:ea typeface="+mn-ea"/>
+                <a:cs typeface="+mn-cs"/>
+              </a:defRPr>
+            </a:lvl3pPr>
+            <a:lvl4pPr marL="1600200" indent="-228600" algn="l" defTabSz="914400" rtl="0" eaLnBrk="1" latinLnBrk="0" hangingPunct="1">
+              <a:lnSpc>
+                <a:spcPct val="125000"/>
+              </a:lnSpc>
+              <a:spcBef>
+                <a:spcPts val="500"/>
+              </a:spcBef>
+              <a:buFont typeface="Arial" panose="020B0604020202020204" pitchFamily="34" charset="0"/>
+              <a:buChar char="•"/>
+              <a:defRPr sz="1600" kern="1200" spc="160">
+                <a:solidFill>
+                  <a:schemeClr val="tx1"/>
+                </a:solidFill>
+                <a:latin typeface="+mn-lt"/>
+                <a:ea typeface="+mn-ea"/>
+                <a:cs typeface="+mn-cs"/>
+              </a:defRPr>
+            </a:lvl4pPr>
+            <a:lvl5pPr marL="2057400" indent="-228600" algn="l" defTabSz="914400" rtl="0" eaLnBrk="1" latinLnBrk="0" hangingPunct="1">
+              <a:lnSpc>
+                <a:spcPct val="125000"/>
+              </a:lnSpc>
+              <a:spcBef>
+                <a:spcPts val="500"/>
+              </a:spcBef>
+              <a:buFont typeface="Arial" panose="020B0604020202020204" pitchFamily="34" charset="0"/>
+              <a:buChar char="•"/>
+              <a:defRPr sz="1600" kern="1200" spc="160">
+                <a:solidFill>
+                  <a:schemeClr val="tx1"/>
+                </a:solidFill>
+                <a:latin typeface="+mn-lt"/>
+                <a:ea typeface="+mn-ea"/>
+                <a:cs typeface="+mn-cs"/>
+              </a:defRPr>
+            </a:lvl5pPr>
+            <a:lvl6pPr marL="2514600" indent="-228600" algn="l" defTabSz="914400" rtl="0" eaLnBrk="1" latinLnBrk="0" hangingPunct="1">
+              <a:lnSpc>
+                <a:spcPct val="90000"/>
+              </a:lnSpc>
+              <a:spcBef>
+                <a:spcPts val="500"/>
+              </a:spcBef>
+              <a:buFont typeface="Arial" panose="020B0604020202020204" pitchFamily="34" charset="0"/>
+              <a:buChar char="•"/>
+              <a:defRPr sz="1800" kern="1200">
+                <a:solidFill>
+                  <a:schemeClr val="tx1"/>
+                </a:solidFill>
+                <a:latin typeface="+mn-lt"/>
+                <a:ea typeface="+mn-ea"/>
+                <a:cs typeface="+mn-cs"/>
+              </a:defRPr>
+            </a:lvl6pPr>
+            <a:lvl7pPr marL="2971800" indent="-228600" algn="l" defTabSz="914400" rtl="0" eaLnBrk="1" latinLnBrk="0" hangingPunct="1">
+              <a:lnSpc>
+                <a:spcPct val="90000"/>
+              </a:lnSpc>
+              <a:spcBef>
+                <a:spcPts val="500"/>
+              </a:spcBef>
+              <a:buFont typeface="Arial" panose="020B0604020202020204" pitchFamily="34" charset="0"/>
+              <a:buChar char="•"/>
+              <a:defRPr sz="1800" kern="1200">
+                <a:solidFill>
+                  <a:schemeClr val="tx1"/>
+                </a:solidFill>
+                <a:latin typeface="+mn-lt"/>
+                <a:ea typeface="+mn-ea"/>
+                <a:cs typeface="+mn-cs"/>
+              </a:defRPr>
+            </a:lvl7pPr>
+            <a:lvl8pPr marL="3429000" indent="-228600" algn="l" defTabSz="914400" rtl="0" eaLnBrk="1" latinLnBrk="0" hangingPunct="1">
+              <a:lnSpc>
+                <a:spcPct val="90000"/>
+              </a:lnSpc>
+              <a:spcBef>
+                <a:spcPts val="500"/>
+              </a:spcBef>
+              <a:buFont typeface="Arial" panose="020B0604020202020204" pitchFamily="34" charset="0"/>
+              <a:buChar char="•"/>
+              <a:defRPr sz="1800" kern="1200">
+                <a:solidFill>
+                  <a:schemeClr val="tx1"/>
+                </a:solidFill>
+                <a:latin typeface="+mn-lt"/>
+                <a:ea typeface="+mn-ea"/>
+                <a:cs typeface="+mn-cs"/>
+              </a:defRPr>
+            </a:lvl8pPr>
+            <a:lvl9pPr marL="3886200" indent="-228600" algn="l" defTabSz="914400" rtl="0" eaLnBrk="1" latinLnBrk="0" hangingPunct="1">
+              <a:lnSpc>
+                <a:spcPct val="90000"/>
+              </a:lnSpc>
+              <a:spcBef>
+                <a:spcPts val="500"/>
+              </a:spcBef>
+              <a:buFont typeface="Arial" panose="020B0604020202020204" pitchFamily="34" charset="0"/>
+              <a:buChar char="•"/>
+              <a:defRPr sz="1800" kern="1200">
+                <a:solidFill>
+                  <a:schemeClr val="tx1"/>
+                </a:solidFill>
+                <a:latin typeface="+mn-lt"/>
+                <a:ea typeface="+mn-ea"/>
+                <a:cs typeface="+mn-cs"/>
+              </a:defRPr>
+            </a:lvl9pPr>
+          </a:lstStyle>
+          <a:p>
+            <a:pPr marL="0" indent="0">
+              <a:buNone/>
+            </a:pPr>
+            <a:r>
+              <a:rPr lang="zh-CN" altLang="en-US" sz="3200" dirty="0">
+                <a:effectLst>
+                  <a:outerShdw blurRad="38100" dist="38100" dir="2700000" algn="tl">
+                    <a:srgbClr val="000000">
+                      <a:alpha val="43137"/>
+                    </a:srgbClr>
+                  </a:outerShdw>
+                </a:effectLst>
+                <a:latin typeface="+mn-ea"/>
+              </a:rPr>
+              <a:t>腋下 </a:t>
+            </a:r>
+            <a:r>
+              <a:rPr lang="en-US" altLang="zh-CN" sz="3200" dirty="0">
+                <a:effectLst>
+                  <a:outerShdw blurRad="38100" dist="38100" dir="2700000" algn="tl">
+                    <a:srgbClr val="000000">
+                      <a:alpha val="43137"/>
+                    </a:srgbClr>
+                  </a:outerShdw>
+                </a:effectLst>
+                <a:latin typeface="+mn-ea"/>
+              </a:rPr>
+              <a:t>- </a:t>
+            </a:r>
+            <a:r>
+              <a:rPr lang="zh-CN" altLang="en-US" sz="3200" dirty="0">
+                <a:effectLst>
+                  <a:outerShdw blurRad="38100" dist="38100" dir="2700000" algn="tl">
+                    <a:srgbClr val="000000">
+                      <a:alpha val="43137"/>
+                    </a:srgbClr>
+                  </a:outerShdw>
+                </a:effectLst>
+                <a:latin typeface="+mn-ea"/>
+              </a:rPr>
+              <a:t>大包穴（足太阴脾经）</a:t>
+            </a:r>
+          </a:p>
+        </p:txBody>
+      </p:sp>
     </p:spTree>
     <p:extLst>
       <p:ext uri="{BB962C8B-B14F-4D97-AF65-F5344CB8AC3E}">
@@ -16146,19 +15947,19 @@
           <a:lstStyle/>
           <a:p>
             <a:r>
-              <a:rPr lang="en-US" altLang="zh-CN" sz="900" dirty="0"/>
+              <a:rPr lang="en-US" altLang="zh-CN" sz="4400" dirty="0"/>
               <a:t>EFT </a:t>
             </a:r>
             <a:r>
-              <a:rPr lang="zh-CN" altLang="en-US" sz="900" dirty="0"/>
+              <a:rPr lang="zh-CN" altLang="en-US" sz="4400" dirty="0"/>
               <a:t>核心敲击穴位（</a:t>
             </a:r>
             <a:r>
-              <a:rPr lang="en-US" altLang="zh-CN" sz="900" dirty="0"/>
+              <a:rPr lang="en-US" altLang="zh-CN" sz="4400" dirty="0"/>
               <a:t>7</a:t>
             </a:r>
             <a:r>
-              <a:rPr lang="zh-CN" altLang="en-US" sz="900" dirty="0"/>
+              <a:rPr lang="zh-CN" altLang="en-US" sz="4400" dirty="0"/>
               <a:t>）</a:t>
             </a:r>
           </a:p>
@@ -16614,19 +16415,19 @@
           <a:lstStyle/>
           <a:p>
             <a:r>
-              <a:rPr lang="en-US" altLang="zh-CN" sz="900" dirty="0"/>
+              <a:rPr lang="en-US" altLang="zh-CN" sz="4400" dirty="0"/>
               <a:t>EFT </a:t>
             </a:r>
             <a:r>
-              <a:rPr lang="zh-CN" altLang="en-US" sz="900" dirty="0"/>
+              <a:rPr lang="zh-CN" altLang="en-US" sz="4400" dirty="0"/>
               <a:t>核心敲击穴位（</a:t>
             </a:r>
             <a:r>
-              <a:rPr lang="en-US" altLang="zh-CN" sz="900" dirty="0"/>
+              <a:rPr lang="en-US" altLang="zh-CN" sz="4400" dirty="0"/>
               <a:t>8</a:t>
             </a:r>
             <a:r>
-              <a:rPr lang="zh-CN" altLang="en-US" sz="900" dirty="0"/>
+              <a:rPr lang="zh-CN" altLang="en-US" sz="4400" dirty="0"/>
               <a:t>）</a:t>
             </a:r>
           </a:p>
@@ -17155,19 +16956,19 @@
           <a:lstStyle/>
           <a:p>
             <a:r>
-              <a:rPr lang="en-US" altLang="zh-CN" sz="900" dirty="0"/>
+              <a:rPr lang="en-US" altLang="zh-CN" sz="4400" dirty="0"/>
               <a:t>EFT</a:t>
             </a:r>
             <a:r>
-              <a:rPr lang="zh-CN" altLang="en-US" sz="900" dirty="0"/>
+              <a:rPr lang="zh-CN" altLang="en-US" sz="4400" dirty="0"/>
               <a:t>心理自助操的流程设计（</a:t>
             </a:r>
             <a:r>
-              <a:rPr lang="en-US" altLang="zh-CN" sz="900" dirty="0"/>
+              <a:rPr lang="en-US" altLang="zh-CN" sz="4400" dirty="0"/>
               <a:t>4</a:t>
             </a:r>
             <a:r>
-              <a:rPr lang="zh-CN" altLang="en-US" sz="900" dirty="0"/>
+              <a:rPr lang="zh-CN" altLang="en-US" sz="4400" dirty="0"/>
               <a:t>）</a:t>
             </a:r>
           </a:p>
@@ -23709,9 +23510,6 @@
               </a:rPr>
               <a:t>杏仁核</a:t>
             </a:r>
-            <a:endParaRPr lang="zh-CN" altLang="en-US" sz="1800" b="1" dirty="0">
-              <a:latin typeface="+mn-ea"/>
-            </a:endParaRPr>
           </a:p>
           <a:p>
             <a:pPr marL="0" indent="0">
@@ -23721,25 +23519,7 @@
               <a:rPr lang="zh-CN" altLang="en-US" sz="1800" dirty="0" smtClean="0">
                 <a:latin typeface="+mn-ea"/>
               </a:rPr>
-              <a:t>大脑</a:t>
-            </a:r>
-            <a:r>
-              <a:rPr lang="zh-CN" altLang="en-US" sz="1800" dirty="0" smtClean="0">
-                <a:latin typeface="+mn-ea"/>
-              </a:rPr>
-              <a:t>杏仁</a:t>
-            </a:r>
-            <a:r>
-              <a:rPr lang="zh-CN" altLang="en-US" sz="1800" dirty="0" smtClean="0">
-                <a:latin typeface="+mn-ea"/>
-              </a:rPr>
-              <a:t>核</a:t>
-            </a:r>
-            <a:r>
-              <a:rPr lang="zh-CN" altLang="en-US" sz="1800" dirty="0" smtClean="0">
-                <a:latin typeface="+mn-ea"/>
-              </a:rPr>
-              <a:t>是</a:t>
+              <a:t>大脑杏仁核是</a:t>
             </a:r>
             <a:r>
               <a:rPr lang="zh-CN" altLang="en-US" sz="1800" dirty="0">
@@ -25377,9 +25157,6 @@
               </a:rPr>
               <a:t>作为一种能量心理学疗法，在创伤类心理问题的快速干预上具有潜力，有望成为创伤后心理创伤的加速愈合手段。</a:t>
             </a:r>
-            <a:endParaRPr lang="zh-CN" altLang="en-US" sz="1800" dirty="0">
-              <a:latin typeface="+mn-ea"/>
-            </a:endParaRPr>
           </a:p>
         </p:txBody>
       </p:sp>
@@ -25780,9 +25557,6 @@
               </a:rPr>
               <a:t>类简单易操作的方式，对有情绪和感官障碍的特殊学生十分适用。</a:t>
             </a:r>
-            <a:endParaRPr lang="zh-CN" altLang="en-US" sz="1800" dirty="0">
-              <a:latin typeface="+mn-ea"/>
-            </a:endParaRPr>
           </a:p>
         </p:txBody>
       </p:sp>
@@ -26004,13 +25778,7 @@
               <a:rPr lang="zh-CN" altLang="en-US" sz="1800" dirty="0" smtClean="0">
                 <a:latin typeface="+mn-ea"/>
               </a:rPr>
-              <a:t>无</a:t>
-            </a:r>
-            <a:r>
-              <a:rPr lang="zh-CN" altLang="en-US" sz="1800" dirty="0" smtClean="0">
-                <a:latin typeface="+mn-ea"/>
-              </a:rPr>
-              <a:t>成本，无痛，无药物，无副作用的绿色疗法。</a:t>
+              <a:t>无成本，无痛，无药物，无副作用的绿色疗法。</a:t>
             </a:r>
             <a:endParaRPr lang="en-US" altLang="zh-CN" sz="1800" dirty="0" smtClean="0">
               <a:latin typeface="+mn-ea"/>
@@ -26032,13 +25800,7 @@
               <a:rPr lang="zh-CN" altLang="en-US" sz="1800" dirty="0" smtClean="0">
                 <a:latin typeface="+mn-ea"/>
               </a:rPr>
-              <a:t>“</a:t>
-            </a:r>
-            <a:r>
-              <a:rPr lang="zh-CN" altLang="en-US" sz="1800" dirty="0" smtClean="0">
-                <a:latin typeface="+mn-ea"/>
-              </a:rPr>
-              <a:t>接受和爱自己”的自我暗示。</a:t>
+              <a:t>“接受和爱自己”的自我暗示。</a:t>
             </a:r>
             <a:endParaRPr lang="en-US" altLang="zh-CN" sz="1800" dirty="0" smtClean="0">
               <a:latin typeface="+mn-ea"/>
@@ -26066,19 +25828,7 @@
               <a:rPr lang="zh-CN" altLang="en-US" sz="1800" dirty="0" smtClean="0">
                 <a:latin typeface="+mn-ea"/>
               </a:rPr>
-              <a:t>注意：“</a:t>
-            </a:r>
-            <a:r>
-              <a:rPr lang="zh-CN" altLang="en-US" sz="1800" dirty="0" smtClean="0">
-                <a:latin typeface="+mn-ea"/>
-              </a:rPr>
-              <a:t>接受和爱自己”不等于“认命”</a:t>
-            </a:r>
-            <a:r>
-              <a:rPr lang="zh-CN" altLang="en-US" sz="1800" dirty="0" smtClean="0">
-                <a:latin typeface="+mn-ea"/>
-              </a:rPr>
-              <a:t>。</a:t>
+              <a:t>注意：“接受和爱自己”不等于“认命”。</a:t>
             </a:r>
             <a:endParaRPr lang="en-US" altLang="zh-CN" sz="1800" dirty="0" smtClean="0">
               <a:latin typeface="+mn-ea"/>
@@ -26558,13 +26308,13 @@
               <a:buNone/>
             </a:pPr>
             <a:r>
-              <a:rPr lang="en-US" altLang="zh-CN" sz="1800" dirty="0">
+              <a:rPr lang="en-US" altLang="zh-CN" sz="1800" b="1" dirty="0">
                 <a:latin typeface="+mn-ea"/>
               </a:rPr>
               <a:t>1.</a:t>
             </a:r>
             <a:r>
-              <a:rPr lang="zh-CN" altLang="en-US" sz="1800" dirty="0">
+              <a:rPr lang="zh-CN" altLang="en-US" sz="1800" b="1" dirty="0">
                 <a:latin typeface="+mn-ea"/>
               </a:rPr>
               <a:t>设置自助目标</a:t>

--- a/44_心理学/28_浥尘伙伴社团原创：音乐治疗/PPT/浥尘伙伴社团原创：情绪释放疗法（EFT）心理训练.pptx
+++ b/44_心理学/28_浥尘伙伴社团原创：音乐治疗/PPT/浥尘伙伴社团原创：情绪释放疗法（EFT）心理训练.pptx
@@ -5,7 +5,7 @@
     <p:sldMasterId id="2147483696" r:id="rId1"/>
   </p:sldMasterIdLst>
   <p:notesMasterIdLst>
-    <p:notesMasterId r:id="rId35"/>
+    <p:notesMasterId r:id="rId36"/>
   </p:notesMasterIdLst>
   <p:sldIdLst>
     <p:sldId id="256" r:id="rId2"/>
@@ -36,11 +36,12 @@
     <p:sldId id="280" r:id="rId27"/>
     <p:sldId id="275" r:id="rId28"/>
     <p:sldId id="266" r:id="rId29"/>
-    <p:sldId id="287" r:id="rId30"/>
-    <p:sldId id="286" r:id="rId31"/>
-    <p:sldId id="267" r:id="rId32"/>
-    <p:sldId id="282" r:id="rId33"/>
-    <p:sldId id="264" r:id="rId34"/>
+    <p:sldId id="289" r:id="rId30"/>
+    <p:sldId id="290" r:id="rId31"/>
+    <p:sldId id="286" r:id="rId32"/>
+    <p:sldId id="267" r:id="rId33"/>
+    <p:sldId id="282" r:id="rId34"/>
+    <p:sldId id="264" r:id="rId35"/>
   </p:sldIdLst>
   <p:sldSz cx="12192000" cy="6858000"/>
   <p:notesSz cx="6858000" cy="9144000"/>
@@ -229,7 +230,7 @@
           <a:p>
             <a:fld id="{613034E8-7B60-43FC-987C-A54D5D393751}" type="datetimeFigureOut">
               <a:rPr lang="zh-CN" altLang="en-US" smtClean="0"/>
-              <a:t>2025/12/27</a:t>
+              <a:t>2025/12/30</a:t>
             </a:fld>
             <a:endParaRPr lang="zh-CN" altLang="en-US"/>
           </a:p>
@@ -521,7 +522,7 @@
                 <a16:creationId xmlns:a16="http://schemas.microsoft.com/office/drawing/2014/main" id="{EA67E988-5919-57BB-C7DE-D3EAD38A3045}"/>
               </a:ext>
               <a:ext uri="{C183D7F6-B498-43B3-948B-1728B52AA6E4}">
-                <adec:decorative xmlns="" xmlns:adec="http://schemas.microsoft.com/office/drawing/2017/decorative" val="1"/>
+                <adec:decorative xmlns:adec="http://schemas.microsoft.com/office/drawing/2017/decorative" xmlns="" val="1"/>
               </a:ext>
             </a:extLst>
           </p:cNvPr>
@@ -777,7 +778,7 @@
           <a:p>
             <a:fld id="{E80C50CD-E178-4744-9B35-B2F624D6C5E9}" type="datetimeFigureOut">
               <a:rPr lang="en-US" smtClean="0"/>
-              <a:t>12/27/2025</a:t>
+              <a:t>12/30/2025</a:t>
             </a:fld>
             <a:endParaRPr lang="en-US"/>
           </a:p>
@@ -975,7 +976,7 @@
           <a:p>
             <a:fld id="{E80C50CD-E178-4744-9B35-B2F624D6C5E9}" type="datetimeFigureOut">
               <a:rPr lang="en-US" smtClean="0"/>
-              <a:t>12/27/2025</a:t>
+              <a:t>12/30/2025</a:t>
             </a:fld>
             <a:endParaRPr lang="en-US"/>
           </a:p>
@@ -1183,7 +1184,7 @@
           <a:p>
             <a:fld id="{E80C50CD-E178-4744-9B35-B2F624D6C5E9}" type="datetimeFigureOut">
               <a:rPr lang="en-US" smtClean="0"/>
-              <a:t>12/27/2025</a:t>
+              <a:t>12/30/2025</a:t>
             </a:fld>
             <a:endParaRPr lang="en-US"/>
           </a:p>
@@ -1463,7 +1464,7 @@
           <a:p>
             <a:fld id="{E80C50CD-E178-4744-9B35-B2F624D6C5E9}" type="datetimeFigureOut">
               <a:rPr lang="en-US" smtClean="0"/>
-              <a:t>12/27/2025</a:t>
+              <a:t>12/30/2025</a:t>
             </a:fld>
             <a:endParaRPr lang="en-US"/>
           </a:p>
@@ -1742,7 +1743,7 @@
           <a:p>
             <a:fld id="{E80C50CD-E178-4744-9B35-B2F624D6C5E9}" type="datetimeFigureOut">
               <a:rPr lang="en-US" smtClean="0"/>
-              <a:t>12/27/2025</a:t>
+              <a:t>12/30/2025</a:t>
             </a:fld>
             <a:endParaRPr lang="en-US"/>
           </a:p>
@@ -2059,7 +2060,7 @@
           <a:p>
             <a:fld id="{E80C50CD-E178-4744-9B35-B2F624D6C5E9}" type="datetimeFigureOut">
               <a:rPr lang="en-US" smtClean="0"/>
-              <a:t>12/27/2025</a:t>
+              <a:t>12/30/2025</a:t>
             </a:fld>
             <a:endParaRPr lang="en-US"/>
           </a:p>
@@ -2475,7 +2476,7 @@
           <a:p>
             <a:fld id="{E80C50CD-E178-4744-9B35-B2F624D6C5E9}" type="datetimeFigureOut">
               <a:rPr lang="en-US" smtClean="0"/>
-              <a:t>12/27/2025</a:t>
+              <a:t>12/30/2025</a:t>
             </a:fld>
             <a:endParaRPr lang="en-US"/>
           </a:p>
@@ -2616,7 +2617,7 @@
           <a:p>
             <a:fld id="{E80C50CD-E178-4744-9B35-B2F624D6C5E9}" type="datetimeFigureOut">
               <a:rPr lang="en-US" smtClean="0"/>
-              <a:t>12/27/2025</a:t>
+              <a:t>12/30/2025</a:t>
             </a:fld>
             <a:endParaRPr lang="en-US"/>
           </a:p>
@@ -2729,7 +2730,7 @@
           <a:p>
             <a:fld id="{E80C50CD-E178-4744-9B35-B2F624D6C5E9}" type="datetimeFigureOut">
               <a:rPr lang="en-US" smtClean="0"/>
-              <a:t>12/27/2025</a:t>
+              <a:t>12/30/2025</a:t>
             </a:fld>
             <a:endParaRPr lang="en-US"/>
           </a:p>
@@ -3046,7 +3047,7 @@
           <a:p>
             <a:fld id="{E80C50CD-E178-4744-9B35-B2F624D6C5E9}" type="datetimeFigureOut">
               <a:rPr lang="en-US" smtClean="0"/>
-              <a:t>12/27/2025</a:t>
+              <a:t>12/30/2025</a:t>
             </a:fld>
             <a:endParaRPr lang="en-US"/>
           </a:p>
@@ -3338,7 +3339,7 @@
           <a:p>
             <a:fld id="{E80C50CD-E178-4744-9B35-B2F624D6C5E9}" type="datetimeFigureOut">
               <a:rPr lang="en-US" smtClean="0"/>
-              <a:t>12/27/2025</a:t>
+              <a:t>12/30/2025</a:t>
             </a:fld>
             <a:endParaRPr lang="en-US"/>
           </a:p>
@@ -3574,7 +3575,7 @@
             <a:fld id="{E80C50CD-E178-4744-9B35-B2F624D6C5E9}" type="datetimeFigureOut">
               <a:rPr lang="en-US" smtClean="0"/>
               <a:pPr/>
-              <a:t>12/27/2025</a:t>
+              <a:t>12/30/2025</a:t>
             </a:fld>
             <a:endParaRPr lang="en-US"/>
           </a:p>
@@ -3675,7 +3676,7 @@
                 <a16:creationId xmlns:a16="http://schemas.microsoft.com/office/drawing/2014/main" id="{774A975B-A886-5202-0489-6965514A0D14}"/>
               </a:ext>
               <a:ext uri="{C183D7F6-B498-43B3-948B-1728B52AA6E4}">
-                <adec:decorative xmlns="" xmlns:adec="http://schemas.microsoft.com/office/drawing/2017/decorative" val="1"/>
+                <adec:decorative xmlns:adec="http://schemas.microsoft.com/office/drawing/2017/decorative" xmlns="" val="1"/>
               </a:ext>
             </a:extLst>
           </p:cNvPr>
@@ -4104,7 +4105,7 @@
                 <a16:creationId xmlns:a16="http://schemas.microsoft.com/office/drawing/2014/main" id="{0EECA69B-4C2A-7F31-8019-E90DB3BD49CB}"/>
               </a:ext>
               <a:ext uri="{C183D7F6-B498-43B3-948B-1728B52AA6E4}">
-                <adec:decorative xmlns="" xmlns:adec="http://schemas.microsoft.com/office/drawing/2017/decorative" val="1"/>
+                <adec:decorative xmlns:adec="http://schemas.microsoft.com/office/drawing/2017/decorative" xmlns="" val="1"/>
               </a:ext>
             </a:extLst>
           </p:cNvPr>
@@ -4249,7 +4250,7 @@
                 <a16:creationId xmlns:a16="http://schemas.microsoft.com/office/drawing/2014/main" id="{857DEAC1-B3AA-6569-0A44-A191DF2F3C67}"/>
               </a:ext>
               <a:ext uri="{C183D7F6-B498-43B3-948B-1728B52AA6E4}">
-                <adec:decorative xmlns="" xmlns:adec="http://schemas.microsoft.com/office/drawing/2017/decorative" val="1"/>
+                <adec:decorative xmlns:adec="http://schemas.microsoft.com/office/drawing/2017/decorative" xmlns="" val="1"/>
               </a:ext>
             </a:extLst>
           </p:cNvPr>
@@ -6937,13 +6938,7 @@
               <a:rPr lang="zh-CN" altLang="en-US" sz="1800" dirty="0" smtClean="0">
                 <a:latin typeface="+mn-ea"/>
               </a:rPr>
-              <a:t>敲击</a:t>
-            </a:r>
-            <a:r>
-              <a:rPr lang="zh-CN" altLang="en-US" sz="1800" dirty="0" smtClean="0">
-                <a:latin typeface="+mn-ea"/>
-              </a:rPr>
-              <a:t>方法</a:t>
+              <a:t>敲击方法</a:t>
             </a:r>
             <a:r>
               <a:rPr lang="zh-CN" altLang="en-US" sz="1800" dirty="0">
@@ -10033,20 +10028,7 @@
                 </a:effectLst>
                 <a:latin typeface="+mn-ea"/>
               </a:rPr>
-              <a:t>（</a:t>
-            </a:r>
-            <a:r>
-              <a:rPr lang="zh-CN" altLang="en-US" sz="3200" dirty="0">
-                <a:effectLst>
-                  <a:outerShdw blurRad="38100" dist="38100" dir="2700000" algn="tl">
-                    <a:srgbClr val="000000">
-                      <a:alpha val="43137"/>
-                    </a:srgbClr>
-                  </a:outerShdw>
-                </a:effectLst>
-                <a:latin typeface="+mn-ea"/>
-              </a:rPr>
-              <a:t>足阳明胃经）</a:t>
+              <a:t>（足阳明胃经）</a:t>
             </a:r>
           </a:p>
         </p:txBody>
@@ -11767,20 +11749,7 @@
                 </a:effectLst>
                 <a:latin typeface="+mn-ea"/>
               </a:rPr>
-              <a:t>人中穴（水沟穴</a:t>
-            </a:r>
-            <a:r>
-              <a:rPr lang="zh-CN" altLang="en-US" sz="3200" dirty="0">
-                <a:effectLst>
-                  <a:outerShdw blurRad="38100" dist="38100" dir="2700000" algn="tl">
-                    <a:srgbClr val="000000">
-                      <a:alpha val="43137"/>
-                    </a:srgbClr>
-                  </a:outerShdw>
-                </a:effectLst>
-                <a:latin typeface="+mn-ea"/>
-              </a:rPr>
-              <a:t>）（督</a:t>
+              <a:t>人中穴（水沟穴）（督</a:t>
             </a:r>
             <a:r>
               <a:rPr lang="zh-CN" altLang="en-US" sz="3200" dirty="0" smtClean="0">
@@ -13427,13 +13396,7 @@
               <a:rPr lang="zh-CN" altLang="en-US" sz="1800" dirty="0" smtClean="0">
                 <a:latin typeface="+mn-ea"/>
               </a:rPr>
-              <a:t>位置：</a:t>
-            </a:r>
-            <a:r>
-              <a:rPr lang="zh-CN" altLang="en-US" sz="1800" dirty="0" smtClean="0">
-                <a:latin typeface="+mn-ea"/>
-              </a:rPr>
-              <a:t>胸部第二肋间隙，前正中线旁开两寸</a:t>
+              <a:t>位置：胸部第二肋间隙，前正中线旁开两寸</a:t>
             </a:r>
             <a:r>
               <a:rPr lang="zh-CN" altLang="en-US" sz="1800" dirty="0">
@@ -13451,19 +13414,7 @@
               <a:rPr lang="zh-CN" altLang="en-US" sz="1800" dirty="0" smtClean="0">
                 <a:latin typeface="+mn-ea"/>
               </a:rPr>
-              <a:t>功效作用</a:t>
-            </a:r>
-            <a:r>
-              <a:rPr lang="zh-CN" altLang="en-US" sz="1800" dirty="0" smtClean="0">
-                <a:latin typeface="+mn-ea"/>
-              </a:rPr>
-              <a:t>：疏通肾经，改善心脏供血以安神（不痛快，胸口堵得慌，挺胸就是在拍神藏穴）</a:t>
-            </a:r>
-            <a:r>
-              <a:rPr lang="zh-CN" altLang="en-US" sz="1800" dirty="0" smtClean="0">
-                <a:latin typeface="+mn-ea"/>
-              </a:rPr>
-              <a:t>。</a:t>
+              <a:t>功效作用：疏通肾经，改善心脏供血以安神（不痛快，胸口堵得慌，挺胸就是在拍神藏穴）。</a:t>
             </a:r>
             <a:endParaRPr lang="en-US" altLang="zh-CN" sz="1800" dirty="0" smtClean="0">
               <a:latin typeface="+mn-ea"/>
@@ -14294,31 +14245,8 @@
                 </a:effectLst>
                 <a:latin typeface="+mn-ea"/>
               </a:rPr>
-              <a:t>云门穴和中府</a:t>
-            </a:r>
-            <a:r>
-              <a:rPr lang="zh-CN" altLang="en-US" sz="3200" dirty="0">
-                <a:effectLst>
-                  <a:outerShdw blurRad="38100" dist="38100" dir="2700000" algn="tl">
-                    <a:srgbClr val="000000">
-                      <a:alpha val="43137"/>
-                    </a:srgbClr>
-                  </a:outerShdw>
-                </a:effectLst>
-                <a:latin typeface="+mn-ea"/>
-              </a:rPr>
-              <a:t>穴（手太阴肺经）</a:t>
-            </a:r>
-            <a:endParaRPr lang="zh-CN" altLang="en-US" sz="3200" dirty="0">
-              <a:effectLst>
-                <a:outerShdw blurRad="38100" dist="38100" dir="2700000" algn="tl">
-                  <a:srgbClr val="000000">
-                    <a:alpha val="43137"/>
-                  </a:srgbClr>
-                </a:outerShdw>
-              </a:effectLst>
-              <a:latin typeface="+mn-ea"/>
-            </a:endParaRPr>
+              <a:t>云门穴和中府穴（手太阴肺经）</a:t>
+            </a:r>
           </a:p>
         </p:txBody>
       </p:sp>
@@ -14684,31 +14612,8 @@
                 </a:effectLst>
                 <a:latin typeface="+mn-ea"/>
               </a:rPr>
-              <a:t>俞府</a:t>
-            </a:r>
-            <a:r>
-              <a:rPr lang="zh-CN" altLang="en-US" sz="3200" dirty="0">
-                <a:effectLst>
-                  <a:outerShdw blurRad="38100" dist="38100" dir="2700000" algn="tl">
-                    <a:srgbClr val="000000">
-                      <a:alpha val="43137"/>
-                    </a:srgbClr>
-                  </a:outerShdw>
-                </a:effectLst>
-                <a:latin typeface="+mn-ea"/>
-              </a:rPr>
-              <a:t>穴（足少阴肾经）</a:t>
-            </a:r>
-            <a:endParaRPr lang="zh-CN" altLang="en-US" sz="3200" dirty="0">
-              <a:effectLst>
-                <a:outerShdw blurRad="38100" dist="38100" dir="2700000" algn="tl">
-                  <a:srgbClr val="000000">
-                    <a:alpha val="43137"/>
-                  </a:srgbClr>
-                </a:outerShdw>
-              </a:effectLst>
-              <a:latin typeface="+mn-ea"/>
-            </a:endParaRPr>
+              <a:t>俞府穴（足少阴肾经）</a:t>
+            </a:r>
           </a:p>
         </p:txBody>
       </p:sp>
@@ -15665,7 +15570,7 @@
         </p:nvSpPr>
         <p:spPr>
           <a:xfrm>
-            <a:off x="264034" y="5722960"/>
+            <a:off x="264034" y="5845698"/>
             <a:ext cx="9337166" cy="757207"/>
           </a:xfrm>
           <a:prstGeom prst="rect">
@@ -15952,16 +15857,21 @@
             </a:r>
             <a:r>
               <a:rPr lang="zh-CN" altLang="en-US" sz="4400" dirty="0"/>
-              <a:t>核心敲击穴位（</a:t>
-            </a:r>
-            <a:r>
-              <a:rPr lang="en-US" altLang="zh-CN" sz="4400" dirty="0"/>
-              <a:t>7</a:t>
-            </a:r>
-            <a:r>
-              <a:rPr lang="zh-CN" altLang="en-US" sz="4400" dirty="0"/>
+              <a:t>核心敲击穴位</a:t>
+            </a:r>
+            <a:r>
+              <a:rPr lang="zh-CN" altLang="en-US" sz="4400" dirty="0" smtClean="0"/>
+              <a:t>（</a:t>
+            </a:r>
+            <a:r>
+              <a:rPr lang="en-US" altLang="zh-CN" sz="4400" dirty="0" smtClean="0"/>
+              <a:t>12</a:t>
+            </a:r>
+            <a:r>
+              <a:rPr lang="zh-CN" altLang="en-US" sz="4400" dirty="0" smtClean="0"/>
               <a:t>）</a:t>
             </a:r>
+            <a:endParaRPr lang="zh-CN" altLang="en-US" sz="4400" dirty="0"/>
           </a:p>
         </p:txBody>
       </p:sp>
@@ -15995,28 +15905,34 @@
               <a:buNone/>
             </a:pPr>
             <a:r>
-              <a:rPr lang="en-US" altLang="zh-CN" sz="1800" dirty="0">
-                <a:latin typeface="+mn-ea"/>
-              </a:rPr>
-              <a:t>- </a:t>
-            </a:r>
-            <a:r>
-              <a:rPr lang="zh-CN" altLang="en-US" sz="1800" dirty="0">
-                <a:latin typeface="+mn-ea"/>
-              </a:rPr>
-              <a:t>位置：两侧腋下约 </a:t>
-            </a:r>
-            <a:r>
-              <a:rPr lang="en-US" altLang="zh-CN" sz="1800" dirty="0">
-                <a:latin typeface="+mn-ea"/>
-              </a:rPr>
-              <a:t>10 </a:t>
-            </a:r>
-            <a:r>
-              <a:rPr lang="zh-CN" altLang="en-US" sz="1800" dirty="0">
-                <a:latin typeface="+mn-ea"/>
-              </a:rPr>
-              <a:t>厘米处（乳房外侧上方，手臂自然下垂时的腋窝下方）。</a:t>
+              <a:rPr lang="zh-CN" altLang="en-US" dirty="0">
+                <a:latin typeface="+mn-ea"/>
+              </a:rPr>
+              <a:t>对应情绪</a:t>
+            </a:r>
+            <a:r>
+              <a:rPr lang="zh-CN" altLang="en-US" dirty="0" smtClean="0">
+                <a:latin typeface="+mn-ea"/>
+              </a:rPr>
+              <a:t>：焦虑</a:t>
+            </a:r>
+            <a:r>
+              <a:rPr lang="zh-CN" altLang="en-US" dirty="0">
+                <a:latin typeface="+mn-ea"/>
+              </a:rPr>
+              <a:t>、烦躁</a:t>
+            </a:r>
+            <a:r>
+              <a:rPr lang="zh-CN" altLang="en-US" dirty="0" smtClean="0">
+                <a:latin typeface="+mn-ea"/>
+              </a:rPr>
+              <a:t>，抑郁</a:t>
+            </a:r>
+            <a:r>
+              <a:rPr lang="zh-CN" altLang="en-US" dirty="0">
+                <a:latin typeface="+mn-ea"/>
+              </a:rPr>
+              <a:t>、情绪低落，躯体紧张。</a:t>
             </a:r>
           </a:p>
           <a:p>
@@ -16024,16 +15940,34 @@
               <a:buNone/>
             </a:pPr>
             <a:r>
-              <a:rPr lang="en-US" altLang="zh-CN" sz="1800" dirty="0">
-                <a:latin typeface="+mn-ea"/>
-              </a:rPr>
-              <a:t>- </a:t>
-            </a:r>
-            <a:r>
-              <a:rPr lang="zh-CN" altLang="en-US" sz="1800" dirty="0">
-                <a:latin typeface="+mn-ea"/>
-              </a:rPr>
-              <a:t>定位：手臂自然下垂，腋窝往下约一掌宽的位置，贴近肋骨外侧。</a:t>
+              <a:rPr lang="zh-CN" altLang="en-US" dirty="0">
+                <a:latin typeface="+mn-ea"/>
+              </a:rPr>
+              <a:t>穴位位置：两侧腋下</a:t>
+            </a:r>
+            <a:r>
+              <a:rPr lang="zh-CN" altLang="en-US" dirty="0" smtClean="0">
+                <a:latin typeface="+mn-ea"/>
+              </a:rPr>
+              <a:t>约</a:t>
+            </a:r>
+            <a:r>
+              <a:rPr lang="en-US" altLang="zh-CN" dirty="0" smtClean="0">
+                <a:latin typeface="+mn-ea"/>
+              </a:rPr>
+              <a:t>10</a:t>
+            </a:r>
+            <a:r>
+              <a:rPr lang="zh-CN" altLang="en-US" dirty="0" smtClean="0">
+                <a:latin typeface="+mn-ea"/>
+              </a:rPr>
+              <a:t>厘米</a:t>
+            </a:r>
+            <a:r>
+              <a:rPr lang="zh-CN" altLang="en-US" dirty="0">
+                <a:latin typeface="+mn-ea"/>
+              </a:rPr>
+              <a:t>处。</a:t>
             </a:r>
           </a:p>
           <a:p>
@@ -16041,17 +15975,127 @@
               <a:buNone/>
             </a:pPr>
             <a:r>
-              <a:rPr lang="en-US" altLang="zh-CN" sz="1800" dirty="0">
-                <a:latin typeface="+mn-ea"/>
-              </a:rPr>
-              <a:t>- </a:t>
-            </a:r>
-            <a:r>
-              <a:rPr lang="zh-CN" altLang="en-US" sz="1800" dirty="0">
-                <a:latin typeface="+mn-ea"/>
-              </a:rPr>
-              <a:t>作用：疏导积压的负面情绪，尤其适合缓解长期压抑的恐惧、焦虑。</a:t>
-            </a:r>
+              <a:rPr lang="zh-CN" altLang="en-US" dirty="0">
+                <a:latin typeface="+mn-ea"/>
+              </a:rPr>
+              <a:t>功效作用</a:t>
+            </a:r>
+            <a:r>
+              <a:rPr lang="zh-CN" altLang="en-US" dirty="0" smtClean="0">
+                <a:latin typeface="+mn-ea"/>
+              </a:rPr>
+              <a:t>：</a:t>
+            </a:r>
+            <a:r>
+              <a:rPr lang="zh-CN" altLang="en-US" dirty="0">
+                <a:latin typeface="+mn-ea"/>
+              </a:rPr>
+              <a:t>疏通心经气血、平复心神、缓解情志郁结</a:t>
+            </a:r>
+            <a:endParaRPr lang="en-US" altLang="zh-CN" dirty="0" smtClean="0">
+              <a:latin typeface="+mn-ea"/>
+            </a:endParaRPr>
+          </a:p>
+          <a:p>
+            <a:pPr marL="0" indent="0">
+              <a:buNone/>
+            </a:pPr>
+            <a:r>
+              <a:rPr lang="zh-CN" altLang="en-US" dirty="0" smtClean="0">
+                <a:latin typeface="+mn-ea"/>
+              </a:rPr>
+              <a:t>极</a:t>
+            </a:r>
+            <a:r>
+              <a:rPr lang="zh-CN" altLang="en-US" dirty="0">
+                <a:latin typeface="+mn-ea"/>
+              </a:rPr>
+              <a:t>泉穴归属于手少阴心经，心主神明，是人体情志活动的中枢。当心经气血瘀滞时，容易出现心烦、焦虑、易怒、抑郁等情绪问题；刺激极泉穴可直接疏通心经气血，改善心脏的气血供应，进而安定心神，调节情绪波动。</a:t>
+            </a:r>
+          </a:p>
+          <a:p>
+            <a:pPr marL="0" indent="0">
+              <a:buNone/>
+            </a:pPr>
+            <a:r>
+              <a:rPr lang="zh-CN" altLang="en-US" dirty="0" smtClean="0">
+                <a:latin typeface="+mn-ea"/>
+              </a:rPr>
+              <a:t>情绪</a:t>
+            </a:r>
+            <a:r>
+              <a:rPr lang="zh-CN" altLang="en-US" dirty="0">
+                <a:latin typeface="+mn-ea"/>
+              </a:rPr>
+              <a:t>郁结时，人体容易出现胸闷、心悸、腋下胀痛</a:t>
+            </a:r>
+            <a:r>
+              <a:rPr lang="zh-CN" altLang="en-US" dirty="0" smtClean="0">
+                <a:latin typeface="+mn-ea"/>
+              </a:rPr>
+              <a:t>、上肢</a:t>
+            </a:r>
+            <a:r>
+              <a:rPr lang="zh-CN" altLang="en-US" dirty="0">
+                <a:latin typeface="+mn-ea"/>
+              </a:rPr>
+              <a:t>麻木等躯体表现（这是心经循行路线上的典型反应）</a:t>
+            </a:r>
+            <a:r>
+              <a:rPr lang="zh-CN" altLang="en-US" dirty="0" smtClean="0">
+                <a:latin typeface="+mn-ea"/>
+              </a:rPr>
+              <a:t>。</a:t>
+            </a:r>
+            <a:endParaRPr lang="en-US" altLang="zh-CN" dirty="0" smtClean="0">
+              <a:latin typeface="+mn-ea"/>
+            </a:endParaRPr>
+          </a:p>
+          <a:p>
+            <a:pPr marL="0" indent="0">
+              <a:buNone/>
+            </a:pPr>
+            <a:r>
+              <a:rPr lang="zh-CN" altLang="en-US" dirty="0" smtClean="0">
+                <a:latin typeface="+mn-ea"/>
+              </a:rPr>
+              <a:t>按</a:t>
+            </a:r>
+            <a:r>
+              <a:rPr lang="zh-CN" altLang="en-US" dirty="0">
+                <a:latin typeface="+mn-ea"/>
+              </a:rPr>
+              <a:t>揉极泉穴能快速缓解这些躯体不适，而躯体症状的减轻</a:t>
+            </a:r>
+            <a:r>
+              <a:rPr lang="zh-CN" altLang="en-US" dirty="0" smtClean="0">
+                <a:latin typeface="+mn-ea"/>
+              </a:rPr>
+              <a:t>会</a:t>
+            </a:r>
+            <a:endParaRPr lang="en-US" altLang="zh-CN" dirty="0" smtClean="0">
+              <a:latin typeface="+mn-ea"/>
+            </a:endParaRPr>
+          </a:p>
+          <a:p>
+            <a:pPr marL="0" indent="0">
+              <a:buNone/>
+            </a:pPr>
+            <a:r>
+              <a:rPr lang="zh-CN" altLang="en-US" dirty="0" smtClean="0">
+                <a:latin typeface="+mn-ea"/>
+              </a:rPr>
+              <a:t>反过来</a:t>
+            </a:r>
+            <a:r>
+              <a:rPr lang="zh-CN" altLang="en-US" dirty="0">
+                <a:latin typeface="+mn-ea"/>
+              </a:rPr>
+              <a:t>降低情绪的紧张度，形成 “身心放松” 的正向循环。</a:t>
+            </a:r>
+            <a:endParaRPr lang="zh-CN" altLang="en-US" dirty="0">
+              <a:latin typeface="+mn-ea"/>
+            </a:endParaRPr>
           </a:p>
         </p:txBody>
       </p:sp>
@@ -16341,8 +16385,8 @@
         </p:blipFill>
         <p:spPr>
           <a:xfrm>
-            <a:off x="7571664" y="4422009"/>
-            <a:ext cx="3087237" cy="2058158"/>
+            <a:off x="7227997" y="4265171"/>
+            <a:ext cx="3322494" cy="2214996"/>
           </a:xfrm>
           <a:prstGeom prst="rect">
             <a:avLst/>
@@ -16420,16 +16464,21 @@
             </a:r>
             <a:r>
               <a:rPr lang="zh-CN" altLang="en-US" sz="4400" dirty="0"/>
-              <a:t>核心敲击穴位（</a:t>
-            </a:r>
-            <a:r>
-              <a:rPr lang="en-US" altLang="zh-CN" sz="4400" dirty="0"/>
-              <a:t>8</a:t>
-            </a:r>
-            <a:r>
-              <a:rPr lang="zh-CN" altLang="en-US" sz="4400" dirty="0"/>
+              <a:t>核心敲击穴位</a:t>
+            </a:r>
+            <a:r>
+              <a:rPr lang="zh-CN" altLang="en-US" sz="4400" dirty="0" smtClean="0"/>
+              <a:t>（</a:t>
+            </a:r>
+            <a:r>
+              <a:rPr lang="en-US" altLang="zh-CN" sz="4400" dirty="0" smtClean="0"/>
+              <a:t>13</a:t>
+            </a:r>
+            <a:r>
+              <a:rPr lang="zh-CN" altLang="en-US" sz="4400" dirty="0" smtClean="0"/>
               <a:t>）</a:t>
             </a:r>
+            <a:endParaRPr lang="zh-CN" altLang="en-US" sz="4400" dirty="0"/>
           </a:p>
         </p:txBody>
       </p:sp>
@@ -16463,16 +16512,34 @@
               <a:buNone/>
             </a:pPr>
             <a:r>
-              <a:rPr lang="en-US" altLang="zh-CN" sz="1800" dirty="0">
-                <a:latin typeface="+mn-ea"/>
-              </a:rPr>
-              <a:t>- </a:t>
-            </a:r>
-            <a:r>
               <a:rPr lang="zh-CN" altLang="en-US" sz="1800" dirty="0">
                 <a:latin typeface="+mn-ea"/>
               </a:rPr>
-              <a:t>位置：头顶正中央（百会穴区域，两耳尖连线与头顶中线的交点）。</a:t>
+              <a:t>对应情绪</a:t>
+            </a:r>
+            <a:r>
+              <a:rPr lang="zh-CN" altLang="en-US" sz="1800" dirty="0" smtClean="0">
+                <a:latin typeface="+mn-ea"/>
+              </a:rPr>
+              <a:t>：抑郁</a:t>
+            </a:r>
+            <a:r>
+              <a:rPr lang="zh-CN" altLang="en-US" sz="1800" dirty="0">
+                <a:latin typeface="+mn-ea"/>
+              </a:rPr>
+              <a:t>、情绪低落</a:t>
+            </a:r>
+            <a:r>
+              <a:rPr lang="zh-CN" altLang="en-US" sz="1800" dirty="0" smtClean="0">
+                <a:latin typeface="+mn-ea"/>
+              </a:rPr>
+              <a:t>，焦虑、烦躁、失眠</a:t>
+            </a:r>
+            <a:r>
+              <a:rPr lang="zh-CN" altLang="en-US" sz="1800" dirty="0">
+                <a:latin typeface="+mn-ea"/>
+              </a:rPr>
+              <a:t>，头部紧张。</a:t>
             </a:r>
           </a:p>
           <a:p>
@@ -16480,33 +16547,166 @@
               <a:buNone/>
             </a:pPr>
             <a:r>
-              <a:rPr lang="en-US" altLang="zh-CN" sz="1800" dirty="0">
-                <a:latin typeface="+mn-ea"/>
-              </a:rPr>
-              <a:t>- </a:t>
-            </a:r>
-            <a:r>
               <a:rPr lang="zh-CN" altLang="en-US" sz="1800" dirty="0">
                 <a:latin typeface="+mn-ea"/>
               </a:rPr>
-              <a:t>定位：头顶最顶端，用手指按压有轻微酸胀感处。</a:t>
-            </a:r>
+              <a:t>穴位位置</a:t>
+            </a:r>
+            <a:r>
+              <a:rPr lang="zh-CN" altLang="en-US" sz="1800" dirty="0" smtClean="0">
+                <a:latin typeface="+mn-ea"/>
+              </a:rPr>
+              <a:t>：</a:t>
+            </a:r>
+            <a:r>
+              <a:rPr lang="zh-CN" altLang="en-US" sz="1800" dirty="0">
+                <a:latin typeface="+mn-ea"/>
+              </a:rPr>
+              <a:t>头顶正</a:t>
+            </a:r>
+            <a:r>
+              <a:rPr lang="zh-CN" altLang="en-US" sz="1800" dirty="0" smtClean="0">
+                <a:latin typeface="+mn-ea"/>
+              </a:rPr>
+              <a:t>中央，</a:t>
+            </a:r>
+            <a:r>
+              <a:rPr lang="zh-CN" altLang="en-US" sz="1800" dirty="0">
+                <a:latin typeface="+mn-ea"/>
+              </a:rPr>
+              <a:t>两耳尖连线与头顶中线的交点</a:t>
+            </a:r>
+            <a:r>
+              <a:rPr lang="zh-CN" altLang="en-US" sz="1800" dirty="0" smtClean="0">
+                <a:latin typeface="+mn-ea"/>
+              </a:rPr>
+              <a:t>。</a:t>
+            </a:r>
+            <a:endParaRPr lang="zh-CN" altLang="en-US" sz="1800" dirty="0">
+              <a:latin typeface="+mn-ea"/>
+            </a:endParaRPr>
           </a:p>
           <a:p>
             <a:pPr marL="0" indent="0">
               <a:buNone/>
             </a:pPr>
             <a:r>
-              <a:rPr lang="en-US" altLang="zh-CN" sz="1800" dirty="0">
-                <a:latin typeface="+mn-ea"/>
-              </a:rPr>
-              <a:t>- </a:t>
-            </a:r>
-            <a:r>
               <a:rPr lang="zh-CN" altLang="en-US" sz="1800" dirty="0">
                 <a:latin typeface="+mn-ea"/>
               </a:rPr>
-              <a:t>作用：平衡全身情绪能量，收尾并稳定敲击后的情绪状态。</a:t>
+              <a:t>功效作用：升阳益气、安神定志、醒脑解郁</a:t>
+            </a:r>
+            <a:endParaRPr lang="en-US" altLang="zh-CN" sz="1800" dirty="0" smtClean="0">
+              <a:latin typeface="+mn-ea"/>
+            </a:endParaRPr>
+          </a:p>
+          <a:p>
+            <a:pPr marL="0" indent="0">
+              <a:buNone/>
+            </a:pPr>
+            <a:endParaRPr lang="en-US" altLang="zh-CN" sz="1800" dirty="0" smtClean="0">
+              <a:latin typeface="+mn-ea"/>
+            </a:endParaRPr>
+          </a:p>
+          <a:p>
+            <a:pPr marL="0" indent="0">
+              <a:buNone/>
+            </a:pPr>
+            <a:r>
+              <a:rPr lang="zh-CN" altLang="en-US" sz="1800" dirty="0" smtClean="0">
+                <a:latin typeface="+mn-ea"/>
+              </a:rPr>
+              <a:t>百</a:t>
+            </a:r>
+            <a:r>
+              <a:rPr lang="zh-CN" altLang="en-US" sz="1800" dirty="0">
+                <a:latin typeface="+mn-ea"/>
+              </a:rPr>
+              <a:t>会穴能升举阳气，改善 “清阳不升” 导致的心神失养，帮助提振精神、缓解低落情绪</a:t>
+            </a:r>
+            <a:r>
+              <a:rPr lang="zh-CN" altLang="en-US" sz="1800" dirty="0" smtClean="0">
+                <a:latin typeface="+mn-ea"/>
+              </a:rPr>
+              <a:t>。</a:t>
+            </a:r>
+            <a:endParaRPr lang="en-US" altLang="zh-CN" sz="1800" dirty="0" smtClean="0">
+              <a:latin typeface="+mn-ea"/>
+            </a:endParaRPr>
+          </a:p>
+          <a:p>
+            <a:pPr marL="0" indent="0">
+              <a:buNone/>
+            </a:pPr>
+            <a:r>
+              <a:rPr lang="zh-CN" altLang="en-US" sz="1800" dirty="0" smtClean="0">
+                <a:latin typeface="+mn-ea"/>
+              </a:rPr>
+              <a:t>百</a:t>
+            </a:r>
+            <a:r>
+              <a:rPr lang="zh-CN" altLang="en-US" sz="1800" dirty="0">
+                <a:latin typeface="+mn-ea"/>
+              </a:rPr>
+              <a:t>会穴可平复亢盛的阳气，安定心神，缓解</a:t>
+            </a:r>
+            <a:r>
+              <a:rPr lang="zh-CN" altLang="en-US" sz="1800" dirty="0" smtClean="0">
+                <a:latin typeface="+mn-ea"/>
+              </a:rPr>
+              <a:t>脑部</a:t>
+            </a:r>
+            <a:r>
+              <a:rPr lang="zh-CN" altLang="en-US" sz="1800" dirty="0">
+                <a:latin typeface="+mn-ea"/>
+              </a:rPr>
+              <a:t>过度兴奋的状态</a:t>
+            </a:r>
+            <a:r>
+              <a:rPr lang="zh-CN" altLang="en-US" sz="1800" dirty="0" smtClean="0">
+                <a:latin typeface="+mn-ea"/>
+              </a:rPr>
+              <a:t>。</a:t>
+            </a:r>
+            <a:endParaRPr lang="en-US" altLang="zh-CN" sz="1800" dirty="0" smtClean="0">
+              <a:latin typeface="+mn-ea"/>
+            </a:endParaRPr>
+          </a:p>
+          <a:p>
+            <a:pPr marL="0" indent="0">
+              <a:buNone/>
+            </a:pPr>
+            <a:r>
+              <a:rPr lang="zh-CN" altLang="en-US" sz="1800" dirty="0">
+                <a:latin typeface="+mn-ea"/>
+              </a:rPr>
+              <a:t>敲击时可配合深呼吸，利用其 “升阳安神” 的特性</a:t>
+            </a:r>
+            <a:r>
+              <a:rPr lang="zh-CN" altLang="en-US" sz="1800" dirty="0" smtClean="0">
+                <a:latin typeface="+mn-ea"/>
+              </a:rPr>
+              <a:t>，</a:t>
+            </a:r>
+            <a:endParaRPr lang="en-US" altLang="zh-CN" sz="1800" dirty="0" smtClean="0">
+              <a:latin typeface="+mn-ea"/>
+            </a:endParaRPr>
+          </a:p>
+          <a:p>
+            <a:pPr marL="0" indent="0">
+              <a:buNone/>
+            </a:pPr>
+            <a:r>
+              <a:rPr lang="zh-CN" altLang="en-US" sz="1800" dirty="0" smtClean="0">
+                <a:latin typeface="+mn-ea"/>
+              </a:rPr>
+              <a:t>强化</a:t>
+            </a:r>
+            <a:r>
+              <a:rPr lang="zh-CN" altLang="en-US" sz="1800" dirty="0">
+                <a:latin typeface="+mn-ea"/>
+              </a:rPr>
+              <a:t>情绪释放的深度。</a:t>
             </a:r>
           </a:p>
         </p:txBody>
@@ -16527,8 +16727,8 @@
         </p:nvSpPr>
         <p:spPr>
           <a:xfrm>
-            <a:off x="264034" y="4241934"/>
-            <a:ext cx="9337166" cy="2081395"/>
+            <a:off x="264034" y="5361050"/>
+            <a:ext cx="9337166" cy="1100816"/>
           </a:xfrm>
           <a:prstGeom prst="rect">
             <a:avLst/>
@@ -16754,35 +16954,7 @@
                 </a:effectLst>
                 <a:latin typeface="+mn-ea"/>
               </a:rPr>
-              <a:t>穴</a:t>
-            </a:r>
-            <a:endParaRPr lang="en-US" altLang="zh-CN" sz="3200" dirty="0" smtClean="0">
-              <a:effectLst>
-                <a:outerShdw blurRad="38100" dist="38100" dir="2700000" algn="tl">
-                  <a:srgbClr val="000000">
-                    <a:alpha val="43137"/>
-                  </a:srgbClr>
-                </a:outerShdw>
-              </a:effectLst>
-              <a:latin typeface="+mn-ea"/>
-            </a:endParaRPr>
-          </a:p>
-          <a:p>
-            <a:pPr marL="0" indent="0">
-              <a:buNone/>
-            </a:pPr>
-            <a:r>
-              <a:rPr lang="zh-CN" altLang="en-US" sz="3200" dirty="0" smtClean="0">
-                <a:effectLst>
-                  <a:outerShdw blurRad="38100" dist="38100" dir="2700000" algn="tl">
-                    <a:srgbClr val="000000">
-                      <a:alpha val="43137"/>
-                    </a:srgbClr>
-                  </a:outerShdw>
-                </a:effectLst>
-                <a:latin typeface="+mn-ea"/>
-              </a:rPr>
-              <a:t>（</a:t>
+              <a:t>穴（</a:t>
             </a:r>
             <a:r>
               <a:rPr lang="zh-CN" altLang="en-US" sz="3200" dirty="0">
@@ -16882,8 +17054,8 @@
         </p:blipFill>
         <p:spPr>
           <a:xfrm>
-            <a:off x="7598960" y="4241934"/>
-            <a:ext cx="3357350" cy="2238233"/>
+            <a:off x="7663779" y="3982857"/>
+            <a:ext cx="3874841" cy="2583227"/>
           </a:xfrm>
           <a:prstGeom prst="rect">
             <a:avLst/>
@@ -16903,6 +17075,13 @@
   <p:clrMapOvr>
     <a:masterClrMapping/>
   </p:clrMapOvr>
+  <p:timing>
+    <p:tnLst>
+      <p:par>
+        <p:cTn id="1" dur="indefinite" restart="never" nodeType="tmRoot"/>
+      </p:par>
+    </p:tnLst>
+  </p:timing>
 </p:sld>
 </file>
 
@@ -16929,6 +17108,50 @@
           <a:chExt cx="0" cy="0"/>
         </a:xfrm>
       </p:grpSpPr>
+      <p:pic>
+        <p:nvPicPr>
+          <p:cNvPr id="1026" name="Picture 2" descr="http://i0.hdslb.com/bfs/new_dyn/23b1ea047614f93c0a387a327c3118be423820981.jpg"/>
+          <p:cNvPicPr>
+            <a:picLocks noChangeAspect="1" noChangeArrowheads="1"/>
+          </p:cNvPicPr>
+          <p:nvPr/>
+        </p:nvPicPr>
+        <p:blipFill>
+          <a:blip r:embed="rId2" cstate="screen">
+            <a:extLst>
+              <a:ext uri="{28A0092B-C50C-407E-A947-70E740481C1C}">
+                <a14:useLocalDpi xmlns:a14="http://schemas.microsoft.com/office/drawing/2010/main"/>
+              </a:ext>
+            </a:extLst>
+          </a:blip>
+          <a:srcRect/>
+          <a:stretch>
+            <a:fillRect/>
+          </a:stretch>
+        </p:blipFill>
+        <p:spPr bwMode="auto">
+          <a:xfrm>
+            <a:off x="6894273" y="3307796"/>
+            <a:ext cx="4133980" cy="3356792"/>
+          </a:xfrm>
+          <a:prstGeom prst="rect">
+            <a:avLst/>
+          </a:prstGeom>
+          <a:noFill/>
+          <a:effectLst>
+            <a:softEdge rad="127000"/>
+          </a:effectLst>
+          <a:extLst>
+            <a:ext uri="{909E8E84-426E-40DD-AFC4-6F175D3DCCD1}">
+              <a14:hiddenFill xmlns:a14="http://schemas.microsoft.com/office/drawing/2010/main">
+                <a:solidFill>
+                  <a:srgbClr val="FFFFFF"/>
+                </a:solidFill>
+              </a14:hiddenFill>
+            </a:ext>
+          </a:extLst>
+        </p:spPr>
+      </p:pic>
       <p:sp>
         <p:nvSpPr>
           <p:cNvPr id="2" name="标题 1">
@@ -16961,16 +17184,21 @@
             </a:r>
             <a:r>
               <a:rPr lang="zh-CN" altLang="en-US" sz="4400" dirty="0"/>
-              <a:t>心理自助操的流程设计（</a:t>
-            </a:r>
-            <a:r>
-              <a:rPr lang="en-US" altLang="zh-CN" sz="4400" dirty="0"/>
-              <a:t>4</a:t>
-            </a:r>
-            <a:r>
-              <a:rPr lang="zh-CN" altLang="en-US" sz="4400" dirty="0"/>
+              <a:t>心理自助操的流程设计</a:t>
+            </a:r>
+            <a:r>
+              <a:rPr lang="zh-CN" altLang="en-US" sz="4400" dirty="0" smtClean="0"/>
+              <a:t>（</a:t>
+            </a:r>
+            <a:r>
+              <a:rPr lang="en-US" altLang="zh-CN" sz="4400" dirty="0" smtClean="0"/>
+              <a:t>5</a:t>
+            </a:r>
+            <a:r>
+              <a:rPr lang="zh-CN" altLang="en-US" sz="4400" dirty="0" smtClean="0"/>
               <a:t>）</a:t>
             </a:r>
+            <a:endParaRPr lang="zh-CN" altLang="en-US" sz="4400" dirty="0"/>
           </a:p>
         </p:txBody>
       </p:sp>
@@ -16992,8 +17220,8 @@
         </p:nvSpPr>
         <p:spPr>
           <a:xfrm>
-            <a:off x="515113" y="1576785"/>
-            <a:ext cx="3458174" cy="3989337"/>
+            <a:off x="521207" y="1599391"/>
+            <a:ext cx="2811137" cy="3989337"/>
           </a:xfrm>
         </p:spPr>
         <p:txBody>
@@ -17004,28 +17232,34 @@
               <a:buNone/>
             </a:pPr>
             <a:r>
-              <a:rPr lang="en-US" altLang="zh-CN" sz="1800" dirty="0">
-                <a:latin typeface="+mn-ea"/>
-              </a:rPr>
-              <a:t>### </a:t>
-            </a:r>
-            <a:r>
-              <a:rPr lang="zh-CN" altLang="en-US" sz="1800" dirty="0">
-                <a:latin typeface="+mn-ea"/>
-              </a:rPr>
-              <a:t>收尾稳定（</a:t>
-            </a:r>
-            <a:r>
-              <a:rPr lang="en-US" altLang="zh-CN" sz="1800" dirty="0">
-                <a:latin typeface="+mn-ea"/>
-              </a:rPr>
-              <a:t>1 </a:t>
-            </a:r>
-            <a:r>
-              <a:rPr lang="zh-CN" altLang="en-US" sz="1800" dirty="0">
-                <a:latin typeface="+mn-ea"/>
-              </a:rPr>
-              <a:t>分钟）</a:t>
+              <a:rPr lang="zh-CN" altLang="en-US" sz="1800" b="1" dirty="0" smtClean="0">
+                <a:latin typeface="+mn-ea"/>
+              </a:rPr>
+              <a:t>收尾</a:t>
+            </a:r>
+            <a:r>
+              <a:rPr lang="zh-CN" altLang="en-US" sz="1800" b="1" dirty="0">
+                <a:latin typeface="+mn-ea"/>
+              </a:rPr>
+              <a:t>稳定（</a:t>
+            </a:r>
+            <a:r>
+              <a:rPr lang="en-US" altLang="zh-CN" sz="1800" b="1" dirty="0" smtClean="0">
+                <a:latin typeface="+mn-ea"/>
+              </a:rPr>
+              <a:t>1</a:t>
+            </a:r>
+            <a:r>
+              <a:rPr lang="zh-CN" altLang="en-US" sz="1800" b="1" dirty="0" smtClean="0">
+                <a:latin typeface="+mn-ea"/>
+              </a:rPr>
+              <a:t>分钟</a:t>
+            </a:r>
+            <a:r>
+              <a:rPr lang="zh-CN" altLang="en-US" sz="1800" b="1" dirty="0">
+                <a:latin typeface="+mn-ea"/>
+              </a:rPr>
+              <a:t>）</a:t>
             </a:r>
           </a:p>
           <a:p>
@@ -17037,38 +17271,33 @@
             </a:endParaRPr>
           </a:p>
           <a:p>
-            <a:pPr marL="0" indent="0">
-              <a:buNone/>
+            <a:pPr>
+              <a:buFont typeface="Wingdings" panose="05000000000000000000" pitchFamily="2" charset="2"/>
+              <a:buChar char="l"/>
             </a:pPr>
             <a:r>
-              <a:rPr lang="en-US" altLang="zh-CN" sz="1800" dirty="0">
-                <a:latin typeface="+mn-ea"/>
-              </a:rPr>
-              <a:t>- </a:t>
+              <a:rPr lang="zh-CN" altLang="en-US" sz="1800" dirty="0" smtClean="0">
+                <a:latin typeface="+mn-ea"/>
+              </a:rPr>
+              <a:t>持续敲击头顶穴位</a:t>
+            </a:r>
+            <a:r>
+              <a:rPr lang="en-US" altLang="zh-CN" sz="1800" dirty="0" smtClean="0">
+                <a:latin typeface="+mn-ea"/>
+              </a:rPr>
+              <a:t>10 </a:t>
             </a:r>
             <a:r>
               <a:rPr lang="zh-CN" altLang="en-US" sz="1800" dirty="0">
                 <a:latin typeface="+mn-ea"/>
               </a:rPr>
-              <a:t>持续敲击**头顶穴位**</a:t>
-            </a:r>
-            <a:r>
-              <a:rPr lang="en-US" altLang="zh-CN" sz="1800" dirty="0">
-                <a:latin typeface="+mn-ea"/>
-              </a:rPr>
-              <a:t>10 </a:t>
-            </a:r>
-            <a:r>
-              <a:rPr lang="zh-CN" altLang="en-US" sz="1800" dirty="0">
-                <a:latin typeface="+mn-ea"/>
-              </a:rPr>
               <a:t>次，同时默念：“我现在感到平静、安全，我的身心都在放松”。</a:t>
             </a:r>
           </a:p>
           <a:p>
             <a:pPr>
-              <a:buFontTx/>
-              <a:buChar char="-"/>
+              <a:buFont typeface="Wingdings" panose="05000000000000000000" pitchFamily="2" charset="2"/>
+              <a:buChar char="l"/>
             </a:pPr>
             <a:r>
               <a:rPr lang="zh-CN" altLang="en-US" sz="1800" dirty="0" smtClean="0">
@@ -17111,215 +17340,6 @@
             <a:endParaRPr lang="zh-CN" altLang="en-US" sz="1800" dirty="0">
               <a:latin typeface="+mn-ea"/>
             </a:endParaRPr>
-          </a:p>
-        </p:txBody>
-      </p:sp>
-      <p:sp>
-        <p:nvSpPr>
-          <p:cNvPr id="14" name="内容占位符 2">
-            <a:extLst>
-              <a:ext uri="{FF2B5EF4-FFF2-40B4-BE49-F238E27FC236}">
-                <a16:creationId xmlns:a16="http://schemas.microsoft.com/office/drawing/2014/main" id="{F16DB7D6-54F0-0849-5B5E-EFE315F70565}"/>
-              </a:ext>
-            </a:extLst>
-          </p:cNvPr>
-          <p:cNvSpPr txBox="1">
-            <a:spLocks/>
-          </p:cNvSpPr>
-          <p:nvPr/>
-        </p:nvSpPr>
-        <p:spPr>
-          <a:xfrm>
-            <a:off x="264035" y="5566122"/>
-            <a:ext cx="4779454" cy="757207"/>
-          </a:xfrm>
-          <a:prstGeom prst="rect">
-            <a:avLst/>
-          </a:prstGeom>
-        </p:spPr>
-        <p:txBody>
-          <a:bodyPr lIns="109728" tIns="109728" rIns="109728" bIns="91440"/>
-          <a:lstStyle>
-            <a:lvl1pPr marL="228600" indent="-228600" algn="l" defTabSz="914400" rtl="0" eaLnBrk="1" latinLnBrk="0" hangingPunct="1">
-              <a:lnSpc>
-                <a:spcPct val="125000"/>
-              </a:lnSpc>
-              <a:spcBef>
-                <a:spcPts val="1000"/>
-              </a:spcBef>
-              <a:buFont typeface="Arial" panose="020B0604020202020204" pitchFamily="34" charset="0"/>
-              <a:buChar char="•"/>
-              <a:defRPr sz="1600" kern="1200" spc="160">
-                <a:solidFill>
-                  <a:schemeClr val="tx1"/>
-                </a:solidFill>
-                <a:latin typeface="+mn-lt"/>
-                <a:ea typeface="+mn-ea"/>
-                <a:cs typeface="+mn-cs"/>
-              </a:defRPr>
-            </a:lvl1pPr>
-            <a:lvl2pPr marL="685800" indent="-228600" algn="l" defTabSz="914400" rtl="0" eaLnBrk="1" latinLnBrk="0" hangingPunct="1">
-              <a:lnSpc>
-                <a:spcPct val="125000"/>
-              </a:lnSpc>
-              <a:spcBef>
-                <a:spcPts val="500"/>
-              </a:spcBef>
-              <a:buFont typeface="Arial" panose="020B0604020202020204" pitchFamily="34" charset="0"/>
-              <a:buChar char="•"/>
-              <a:defRPr sz="1600" kern="1200" spc="160">
-                <a:solidFill>
-                  <a:schemeClr val="tx1"/>
-                </a:solidFill>
-                <a:latin typeface="+mn-lt"/>
-                <a:ea typeface="+mn-ea"/>
-                <a:cs typeface="+mn-cs"/>
-              </a:defRPr>
-            </a:lvl2pPr>
-            <a:lvl3pPr marL="1143000" indent="-228600" algn="l" defTabSz="914400" rtl="0" eaLnBrk="1" latinLnBrk="0" hangingPunct="1">
-              <a:lnSpc>
-                <a:spcPct val="125000"/>
-              </a:lnSpc>
-              <a:spcBef>
-                <a:spcPts val="500"/>
-              </a:spcBef>
-              <a:buFont typeface="Arial" panose="020B0604020202020204" pitchFamily="34" charset="0"/>
-              <a:buChar char="•"/>
-              <a:defRPr sz="1600" kern="1200" spc="160">
-                <a:solidFill>
-                  <a:schemeClr val="tx1"/>
-                </a:solidFill>
-                <a:latin typeface="+mn-lt"/>
-                <a:ea typeface="+mn-ea"/>
-                <a:cs typeface="+mn-cs"/>
-              </a:defRPr>
-            </a:lvl3pPr>
-            <a:lvl4pPr marL="1600200" indent="-228600" algn="l" defTabSz="914400" rtl="0" eaLnBrk="1" latinLnBrk="0" hangingPunct="1">
-              <a:lnSpc>
-                <a:spcPct val="125000"/>
-              </a:lnSpc>
-              <a:spcBef>
-                <a:spcPts val="500"/>
-              </a:spcBef>
-              <a:buFont typeface="Arial" panose="020B0604020202020204" pitchFamily="34" charset="0"/>
-              <a:buChar char="•"/>
-              <a:defRPr sz="1600" kern="1200" spc="160">
-                <a:solidFill>
-                  <a:schemeClr val="tx1"/>
-                </a:solidFill>
-                <a:latin typeface="+mn-lt"/>
-                <a:ea typeface="+mn-ea"/>
-                <a:cs typeface="+mn-cs"/>
-              </a:defRPr>
-            </a:lvl4pPr>
-            <a:lvl5pPr marL="2057400" indent="-228600" algn="l" defTabSz="914400" rtl="0" eaLnBrk="1" latinLnBrk="0" hangingPunct="1">
-              <a:lnSpc>
-                <a:spcPct val="125000"/>
-              </a:lnSpc>
-              <a:spcBef>
-                <a:spcPts val="500"/>
-              </a:spcBef>
-              <a:buFont typeface="Arial" panose="020B0604020202020204" pitchFamily="34" charset="0"/>
-              <a:buChar char="•"/>
-              <a:defRPr sz="1600" kern="1200" spc="160">
-                <a:solidFill>
-                  <a:schemeClr val="tx1"/>
-                </a:solidFill>
-                <a:latin typeface="+mn-lt"/>
-                <a:ea typeface="+mn-ea"/>
-                <a:cs typeface="+mn-cs"/>
-              </a:defRPr>
-            </a:lvl5pPr>
-            <a:lvl6pPr marL="2514600" indent="-228600" algn="l" defTabSz="914400" rtl="0" eaLnBrk="1" latinLnBrk="0" hangingPunct="1">
-              <a:lnSpc>
-                <a:spcPct val="90000"/>
-              </a:lnSpc>
-              <a:spcBef>
-                <a:spcPts val="500"/>
-              </a:spcBef>
-              <a:buFont typeface="Arial" panose="020B0604020202020204" pitchFamily="34" charset="0"/>
-              <a:buChar char="•"/>
-              <a:defRPr sz="1800" kern="1200">
-                <a:solidFill>
-                  <a:schemeClr val="tx1"/>
-                </a:solidFill>
-                <a:latin typeface="+mn-lt"/>
-                <a:ea typeface="+mn-ea"/>
-                <a:cs typeface="+mn-cs"/>
-              </a:defRPr>
-            </a:lvl6pPr>
-            <a:lvl7pPr marL="2971800" indent="-228600" algn="l" defTabSz="914400" rtl="0" eaLnBrk="1" latinLnBrk="0" hangingPunct="1">
-              <a:lnSpc>
-                <a:spcPct val="90000"/>
-              </a:lnSpc>
-              <a:spcBef>
-                <a:spcPts val="500"/>
-              </a:spcBef>
-              <a:buFont typeface="Arial" panose="020B0604020202020204" pitchFamily="34" charset="0"/>
-              <a:buChar char="•"/>
-              <a:defRPr sz="1800" kern="1200">
-                <a:solidFill>
-                  <a:schemeClr val="tx1"/>
-                </a:solidFill>
-                <a:latin typeface="+mn-lt"/>
-                <a:ea typeface="+mn-ea"/>
-                <a:cs typeface="+mn-cs"/>
-              </a:defRPr>
-            </a:lvl7pPr>
-            <a:lvl8pPr marL="3429000" indent="-228600" algn="l" defTabSz="914400" rtl="0" eaLnBrk="1" latinLnBrk="0" hangingPunct="1">
-              <a:lnSpc>
-                <a:spcPct val="90000"/>
-              </a:lnSpc>
-              <a:spcBef>
-                <a:spcPts val="500"/>
-              </a:spcBef>
-              <a:buFont typeface="Arial" panose="020B0604020202020204" pitchFamily="34" charset="0"/>
-              <a:buChar char="•"/>
-              <a:defRPr sz="1800" kern="1200">
-                <a:solidFill>
-                  <a:schemeClr val="tx1"/>
-                </a:solidFill>
-                <a:latin typeface="+mn-lt"/>
-                <a:ea typeface="+mn-ea"/>
-                <a:cs typeface="+mn-cs"/>
-              </a:defRPr>
-            </a:lvl8pPr>
-            <a:lvl9pPr marL="3886200" indent="-228600" algn="l" defTabSz="914400" rtl="0" eaLnBrk="1" latinLnBrk="0" hangingPunct="1">
-              <a:lnSpc>
-                <a:spcPct val="90000"/>
-              </a:lnSpc>
-              <a:spcBef>
-                <a:spcPts val="500"/>
-              </a:spcBef>
-              <a:buFont typeface="Arial" panose="020B0604020202020204" pitchFamily="34" charset="0"/>
-              <a:buChar char="•"/>
-              <a:defRPr sz="1800" kern="1200">
-                <a:solidFill>
-                  <a:schemeClr val="tx1"/>
-                </a:solidFill>
-                <a:latin typeface="+mn-lt"/>
-                <a:ea typeface="+mn-ea"/>
-                <a:cs typeface="+mn-cs"/>
-              </a:defRPr>
-            </a:lvl9pPr>
-          </a:lstStyle>
-          <a:p>
-            <a:pPr marL="0" indent="0">
-              <a:buNone/>
-            </a:pPr>
-            <a:r>
-              <a:rPr lang="zh-CN" altLang="en-US" sz="3200" dirty="0">
-                <a:effectLst>
-                  <a:outerShdw blurRad="38100" dist="38100" dir="2700000" algn="tl">
-                    <a:srgbClr val="000000">
-                      <a:alpha val="43137"/>
-                    </a:srgbClr>
-                  </a:outerShdw>
-                </a:effectLst>
-                <a:latin typeface="+mn-ea"/>
-              </a:rPr>
-              <a:t>如何正确认识</a:t>
-            </a:r>
           </a:p>
         </p:txBody>
       </p:sp>
@@ -17339,8 +17359,8 @@
         </p:nvSpPr>
         <p:spPr>
           <a:xfrm>
-            <a:off x="4065814" y="1304642"/>
-            <a:ext cx="7611074" cy="3989337"/>
+            <a:off x="3516451" y="1599388"/>
+            <a:ext cx="3817562" cy="3989337"/>
           </a:xfrm>
           <a:prstGeom prst="rect">
             <a:avLst/>
@@ -17533,10 +17553,22 @@
               <a:buNone/>
             </a:pPr>
             <a:r>
+              <a:rPr lang="en-US" altLang="zh-CN" sz="1800" dirty="0" smtClean="0">
+                <a:latin typeface="+mn-ea"/>
+              </a:rPr>
+              <a:t>1</a:t>
+            </a:r>
+            <a:r>
               <a:rPr lang="zh-CN" altLang="en-US" sz="1800" dirty="0" smtClean="0">
                 <a:latin typeface="+mn-ea"/>
               </a:rPr>
-              <a:t>手掌外侧 </a:t>
+              <a:t>、手掌</a:t>
+            </a:r>
+            <a:r>
+              <a:rPr lang="zh-CN" altLang="en-US" sz="1800" dirty="0" smtClean="0">
+                <a:latin typeface="+mn-ea"/>
+              </a:rPr>
+              <a:t>外侧 </a:t>
             </a:r>
             <a:r>
               <a:rPr lang="en-US" altLang="zh-CN" sz="1800" dirty="0" smtClean="0">
@@ -17557,10 +17589,22 @@
               <a:buNone/>
             </a:pPr>
             <a:r>
+              <a:rPr lang="en-US" altLang="zh-CN" sz="1800" dirty="0" smtClean="0">
+                <a:latin typeface="+mn-ea"/>
+              </a:rPr>
+              <a:t>2</a:t>
+            </a:r>
+            <a:r>
               <a:rPr lang="zh-CN" altLang="en-US" sz="1800" dirty="0" smtClean="0">
                 <a:latin typeface="+mn-ea"/>
               </a:rPr>
-              <a:t>手腕内侧 </a:t>
+              <a:t>、手腕</a:t>
+            </a:r>
+            <a:r>
+              <a:rPr lang="zh-CN" altLang="en-US" sz="1800" dirty="0" smtClean="0">
+                <a:latin typeface="+mn-ea"/>
+              </a:rPr>
+              <a:t>内侧 </a:t>
             </a:r>
             <a:r>
               <a:rPr lang="en-US" altLang="zh-CN" sz="1800" dirty="0" smtClean="0">
@@ -17581,10 +17625,16 @@
               <a:buNone/>
             </a:pPr>
             <a:r>
+              <a:rPr lang="en-US" altLang="zh-CN" sz="1800" dirty="0" smtClean="0">
+                <a:latin typeface="+mn-ea"/>
+              </a:rPr>
+              <a:t>3</a:t>
+            </a:r>
+            <a:r>
               <a:rPr lang="zh-CN" altLang="en-US" sz="1800" dirty="0" smtClean="0">
                 <a:latin typeface="+mn-ea"/>
               </a:rPr>
-              <a:t>眉头 </a:t>
+              <a:t>、眉头 </a:t>
             </a:r>
             <a:r>
               <a:rPr lang="en-US" altLang="zh-CN" sz="1800" dirty="0" smtClean="0">
@@ -17605,10 +17655,22 @@
               <a:buNone/>
             </a:pPr>
             <a:r>
+              <a:rPr lang="en-US" altLang="zh-CN" sz="1800" dirty="0" smtClean="0">
+                <a:latin typeface="+mn-ea"/>
+              </a:rPr>
+              <a:t>4</a:t>
+            </a:r>
+            <a:r>
               <a:rPr lang="zh-CN" altLang="en-US" sz="1800" dirty="0" smtClean="0">
                 <a:latin typeface="+mn-ea"/>
               </a:rPr>
-              <a:t>眼外侧 </a:t>
+              <a:t>、眼</a:t>
+            </a:r>
+            <a:r>
+              <a:rPr lang="zh-CN" altLang="en-US" sz="1800" dirty="0" smtClean="0">
+                <a:latin typeface="+mn-ea"/>
+              </a:rPr>
+              <a:t>外侧 </a:t>
             </a:r>
             <a:r>
               <a:rPr lang="en-US" altLang="zh-CN" sz="1800" dirty="0" smtClean="0">
@@ -17620,7 +17682,31 @@
               <a:rPr lang="zh-CN" altLang="en-US" sz="1800" dirty="0" smtClean="0">
                 <a:latin typeface="+mn-ea"/>
               </a:rPr>
-              <a:t>丝竹空穴	瞳子髎</a:t>
+              <a:t>丝竹</a:t>
+            </a:r>
+            <a:r>
+              <a:rPr lang="zh-CN" altLang="en-US" sz="1800" dirty="0" smtClean="0">
+                <a:latin typeface="+mn-ea"/>
+              </a:rPr>
+              <a:t>空穴</a:t>
+            </a:r>
+            <a:r>
+              <a:rPr lang="en-US" altLang="zh-CN" sz="1800" dirty="0" smtClean="0">
+                <a:latin typeface="+mn-ea"/>
+              </a:rPr>
+              <a:t>  </a:t>
+            </a:r>
+            <a:r>
+              <a:rPr lang="zh-CN" altLang="en-US" sz="1800" dirty="0" smtClean="0">
+                <a:latin typeface="+mn-ea"/>
+              </a:rPr>
+              <a:t>瞳</a:t>
+            </a:r>
+            <a:r>
+              <a:rPr lang="zh-CN" altLang="en-US" sz="1800" dirty="0" smtClean="0">
+                <a:latin typeface="+mn-ea"/>
+              </a:rPr>
+              <a:t>子髎</a:t>
             </a:r>
           </a:p>
           <a:p>
@@ -17629,10 +17715,16 @@
               <a:buNone/>
             </a:pPr>
             <a:r>
+              <a:rPr lang="en-US" altLang="zh-CN" sz="1800" dirty="0" smtClean="0">
+                <a:latin typeface="+mn-ea"/>
+              </a:rPr>
+              <a:t>5</a:t>
+            </a:r>
+            <a:r>
               <a:rPr lang="zh-CN" altLang="en-US" sz="1800" dirty="0" smtClean="0">
                 <a:latin typeface="+mn-ea"/>
               </a:rPr>
-              <a:t>眼下 </a:t>
+              <a:t>、眼下 </a:t>
             </a:r>
             <a:r>
               <a:rPr lang="en-US" altLang="zh-CN" sz="1800" dirty="0" smtClean="0">
@@ -17653,10 +17745,22 @@
               <a:buNone/>
             </a:pPr>
             <a:r>
+              <a:rPr lang="en-US" altLang="zh-CN" sz="1800" dirty="0" smtClean="0">
+                <a:latin typeface="+mn-ea"/>
+              </a:rPr>
+              <a:t>6</a:t>
+            </a:r>
+            <a:r>
               <a:rPr lang="zh-CN" altLang="en-US" sz="1800" dirty="0" smtClean="0">
                 <a:latin typeface="+mn-ea"/>
               </a:rPr>
-              <a:t>鼻下 </a:t>
+              <a:t>、鼻</a:t>
+            </a:r>
+            <a:r>
+              <a:rPr lang="zh-CN" altLang="en-US" sz="1800" dirty="0" smtClean="0">
+                <a:latin typeface="+mn-ea"/>
+              </a:rPr>
+              <a:t>下 </a:t>
             </a:r>
             <a:r>
               <a:rPr lang="en-US" altLang="zh-CN" sz="1800" dirty="0" smtClean="0">
@@ -17677,10 +17781,16 @@
               <a:buNone/>
             </a:pPr>
             <a:r>
+              <a:rPr lang="en-US" altLang="zh-CN" sz="1800" dirty="0" smtClean="0">
+                <a:latin typeface="+mn-ea"/>
+              </a:rPr>
+              <a:t>7</a:t>
+            </a:r>
+            <a:r>
               <a:rPr lang="zh-CN" altLang="en-US" sz="1800" dirty="0" smtClean="0">
                 <a:latin typeface="+mn-ea"/>
               </a:rPr>
-              <a:t>下巴 </a:t>
+              <a:t>、下巴 </a:t>
             </a:r>
             <a:r>
               <a:rPr lang="en-US" altLang="zh-CN" sz="1800" dirty="0" smtClean="0">
@@ -17701,10 +17811,16 @@
               <a:buNone/>
             </a:pPr>
             <a:r>
+              <a:rPr lang="en-US" altLang="zh-CN" sz="1800" dirty="0" smtClean="0">
+                <a:latin typeface="+mn-ea"/>
+              </a:rPr>
+              <a:t>8</a:t>
+            </a:r>
+            <a:r>
               <a:rPr lang="zh-CN" altLang="en-US" sz="1800" dirty="0" smtClean="0">
                 <a:latin typeface="+mn-ea"/>
               </a:rPr>
-              <a:t>前胸 </a:t>
+              <a:t>、前胸 </a:t>
             </a:r>
             <a:r>
               <a:rPr lang="en-US" altLang="zh-CN" sz="1800" dirty="0" smtClean="0">
@@ -17725,10 +17841,16 @@
               <a:buNone/>
             </a:pPr>
             <a:r>
+              <a:rPr lang="en-US" altLang="zh-CN" sz="1800" dirty="0" smtClean="0">
+                <a:latin typeface="+mn-ea"/>
+              </a:rPr>
+              <a:t>9</a:t>
+            </a:r>
+            <a:r>
               <a:rPr lang="zh-CN" altLang="en-US" sz="1800" dirty="0" smtClean="0">
                 <a:latin typeface="+mn-ea"/>
               </a:rPr>
-              <a:t>锁骨 </a:t>
+              <a:t>、锁骨 </a:t>
             </a:r>
             <a:r>
               <a:rPr lang="en-US" altLang="zh-CN" sz="1800" dirty="0" smtClean="0">
@@ -17740,139 +17862,340 @@
               <a:rPr lang="zh-CN" altLang="en-US" sz="1800" dirty="0" smtClean="0">
                 <a:latin typeface="+mn-ea"/>
               </a:rPr>
-              <a:t>云门穴和中府穴</a:t>
-            </a:r>
-          </a:p>
-          <a:p>
-            <a:pPr marL="0" indent="0">
-              <a:buFont typeface="Arial" panose="020B0604020202020204" pitchFamily="34" charset="0"/>
-              <a:buNone/>
-            </a:pPr>
+              <a:t>云门穴和中府</a:t>
+            </a:r>
             <a:r>
               <a:rPr lang="zh-CN" altLang="en-US" sz="1800" dirty="0" smtClean="0">
                 <a:latin typeface="+mn-ea"/>
               </a:rPr>
-              <a:t>锁骨 </a:t>
-            </a:r>
-            <a:r>
-              <a:rPr lang="en-US" altLang="zh-CN" sz="1800" dirty="0" smtClean="0">
-                <a:latin typeface="+mn-ea"/>
-              </a:rPr>
-              <a:t>- </a:t>
-            </a:r>
-            <a:r>
-              <a:rPr lang="zh-CN" altLang="en-US" sz="1800" dirty="0" smtClean="0">
-                <a:latin typeface="+mn-ea"/>
-              </a:rPr>
-              <a:t>俞府穴</a:t>
-            </a:r>
-          </a:p>
-          <a:p>
-            <a:pPr marL="0" indent="0">
-              <a:buFont typeface="Arial" panose="020B0604020202020204" pitchFamily="34" charset="0"/>
-              <a:buNone/>
-            </a:pPr>
-            <a:r>
-              <a:rPr lang="zh-CN" altLang="en-US" sz="1800" dirty="0" smtClean="0">
-                <a:latin typeface="+mn-ea"/>
-              </a:rPr>
-              <a:t>腋下 </a:t>
-            </a:r>
-            <a:r>
-              <a:rPr lang="en-US" altLang="zh-CN" sz="1800" dirty="0" smtClean="0">
-                <a:latin typeface="+mn-ea"/>
-              </a:rPr>
-              <a:t>- </a:t>
-            </a:r>
-            <a:r>
-              <a:rPr lang="zh-CN" altLang="en-US" sz="1800" dirty="0" smtClean="0">
-                <a:latin typeface="+mn-ea"/>
-              </a:rPr>
-              <a:t>大包穴</a:t>
-            </a:r>
-          </a:p>
-          <a:p>
-            <a:pPr marL="0" indent="0">
-              <a:buFont typeface="Arial" panose="020B0604020202020204" pitchFamily="34" charset="0"/>
-              <a:buNone/>
-            </a:pPr>
-            <a:r>
-              <a:rPr lang="zh-CN" altLang="en-US" sz="1800" dirty="0" smtClean="0">
-                <a:latin typeface="+mn-ea"/>
-              </a:rPr>
-              <a:t>腋下 </a:t>
-            </a:r>
-            <a:r>
-              <a:rPr lang="en-US" altLang="zh-CN" sz="1800" dirty="0" smtClean="0">
-                <a:latin typeface="+mn-ea"/>
-              </a:rPr>
-              <a:t>- </a:t>
-            </a:r>
-            <a:r>
-              <a:rPr lang="zh-CN" altLang="en-US" sz="1800" dirty="0" smtClean="0">
-                <a:latin typeface="+mn-ea"/>
-              </a:rPr>
-              <a:t>极泉穴</a:t>
-            </a:r>
-          </a:p>
-          <a:p>
-            <a:pPr marL="0" indent="0">
-              <a:buFont typeface="Arial" panose="020B0604020202020204" pitchFamily="34" charset="0"/>
-              <a:buNone/>
-            </a:pPr>
-            <a:r>
-              <a:rPr lang="zh-CN" altLang="en-US" sz="1800" dirty="0" smtClean="0">
-                <a:latin typeface="+mn-ea"/>
-              </a:rPr>
-              <a:t>头顶	百会穴</a:t>
-            </a:r>
-            <a:endParaRPr lang="zh-CN" altLang="en-US" sz="1800" dirty="0">
+              <a:t>穴</a:t>
+            </a:r>
+            <a:endParaRPr lang="zh-CN" altLang="en-US" sz="1800" dirty="0" smtClean="0">
               <a:latin typeface="+mn-ea"/>
             </a:endParaRPr>
           </a:p>
         </p:txBody>
       </p:sp>
-      <p:pic>
-        <p:nvPicPr>
-          <p:cNvPr id="1026" name="Picture 2" descr="http://i0.hdslb.com/bfs/new_dyn/23b1ea047614f93c0a387a327c3118be423820981.jpg"/>
-          <p:cNvPicPr>
-            <a:picLocks noChangeAspect="1" noChangeArrowheads="1"/>
-          </p:cNvPicPr>
-          <p:nvPr/>
-        </p:nvPicPr>
-        <p:blipFill>
-          <a:blip r:embed="rId2" cstate="screen">
+      <p:sp>
+        <p:nvSpPr>
+          <p:cNvPr id="7" name="内容占位符 2">
             <a:extLst>
-              <a:ext uri="{28A0092B-C50C-407E-A947-70E740481C1C}">
-                <a14:useLocalDpi xmlns:a14="http://schemas.microsoft.com/office/drawing/2010/main"/>
+              <a:ext uri="{FF2B5EF4-FFF2-40B4-BE49-F238E27FC236}">
+                <a16:creationId xmlns:a16="http://schemas.microsoft.com/office/drawing/2014/main" id="{9BB5BFA0-421E-7149-5025-230269CDD21A}"/>
               </a:ext>
             </a:extLst>
-          </a:blip>
-          <a:srcRect/>
-          <a:stretch>
-            <a:fillRect/>
-          </a:stretch>
-        </p:blipFill>
-        <p:spPr bwMode="auto">
+          </p:cNvPr>
+          <p:cNvSpPr txBox="1">
+            <a:spLocks/>
+          </p:cNvSpPr>
+          <p:nvPr/>
+        </p:nvSpPr>
+        <p:spPr>
           <a:xfrm>
-            <a:off x="6846661" y="1855597"/>
-            <a:ext cx="5345339" cy="4340416"/>
+            <a:off x="7287475" y="1599388"/>
+            <a:ext cx="3347577" cy="3989337"/>
           </a:xfrm>
           <a:prstGeom prst="rect">
             <a:avLst/>
           </a:prstGeom>
-          <a:noFill/>
-          <a:extLst>
-            <a:ext uri="{909E8E84-426E-40DD-AFC4-6F175D3DCCD1}">
-              <a14:hiddenFill xmlns:a14="http://schemas.microsoft.com/office/drawing/2010/main">
-                <a:solidFill>
-                  <a:srgbClr val="FFFFFF"/>
-                </a:solidFill>
-              </a14:hiddenFill>
-            </a:ext>
-          </a:extLst>
         </p:spPr>
-      </p:pic>
+        <p:txBody>
+          <a:bodyPr lIns="109728" tIns="109728" rIns="109728" bIns="91440"/>
+          <a:lstStyle>
+            <a:lvl1pPr marL="228600" indent="-228600" algn="l" defTabSz="914400" rtl="0" eaLnBrk="1" latinLnBrk="0" hangingPunct="1">
+              <a:lnSpc>
+                <a:spcPct val="125000"/>
+              </a:lnSpc>
+              <a:spcBef>
+                <a:spcPts val="1000"/>
+              </a:spcBef>
+              <a:buFont typeface="Arial" panose="020B0604020202020204" pitchFamily="34" charset="0"/>
+              <a:buChar char="•"/>
+              <a:defRPr sz="1600" kern="1200" spc="160">
+                <a:solidFill>
+                  <a:schemeClr val="tx1"/>
+                </a:solidFill>
+                <a:latin typeface="+mn-lt"/>
+                <a:ea typeface="+mn-ea"/>
+                <a:cs typeface="+mn-cs"/>
+              </a:defRPr>
+            </a:lvl1pPr>
+            <a:lvl2pPr marL="685800" indent="-228600" algn="l" defTabSz="914400" rtl="0" eaLnBrk="1" latinLnBrk="0" hangingPunct="1">
+              <a:lnSpc>
+                <a:spcPct val="125000"/>
+              </a:lnSpc>
+              <a:spcBef>
+                <a:spcPts val="500"/>
+              </a:spcBef>
+              <a:buFont typeface="Arial" panose="020B0604020202020204" pitchFamily="34" charset="0"/>
+              <a:buChar char="•"/>
+              <a:defRPr sz="1600" kern="1200" spc="160">
+                <a:solidFill>
+                  <a:schemeClr val="tx1"/>
+                </a:solidFill>
+                <a:latin typeface="+mn-lt"/>
+                <a:ea typeface="+mn-ea"/>
+                <a:cs typeface="+mn-cs"/>
+              </a:defRPr>
+            </a:lvl2pPr>
+            <a:lvl3pPr marL="1143000" indent="-228600" algn="l" defTabSz="914400" rtl="0" eaLnBrk="1" latinLnBrk="0" hangingPunct="1">
+              <a:lnSpc>
+                <a:spcPct val="125000"/>
+              </a:lnSpc>
+              <a:spcBef>
+                <a:spcPts val="500"/>
+              </a:spcBef>
+              <a:buFont typeface="Arial" panose="020B0604020202020204" pitchFamily="34" charset="0"/>
+              <a:buChar char="•"/>
+              <a:defRPr sz="1600" kern="1200" spc="160">
+                <a:solidFill>
+                  <a:schemeClr val="tx1"/>
+                </a:solidFill>
+                <a:latin typeface="+mn-lt"/>
+                <a:ea typeface="+mn-ea"/>
+                <a:cs typeface="+mn-cs"/>
+              </a:defRPr>
+            </a:lvl3pPr>
+            <a:lvl4pPr marL="1600200" indent="-228600" algn="l" defTabSz="914400" rtl="0" eaLnBrk="1" latinLnBrk="0" hangingPunct="1">
+              <a:lnSpc>
+                <a:spcPct val="125000"/>
+              </a:lnSpc>
+              <a:spcBef>
+                <a:spcPts val="500"/>
+              </a:spcBef>
+              <a:buFont typeface="Arial" panose="020B0604020202020204" pitchFamily="34" charset="0"/>
+              <a:buChar char="•"/>
+              <a:defRPr sz="1600" kern="1200" spc="160">
+                <a:solidFill>
+                  <a:schemeClr val="tx1"/>
+                </a:solidFill>
+                <a:latin typeface="+mn-lt"/>
+                <a:ea typeface="+mn-ea"/>
+                <a:cs typeface="+mn-cs"/>
+              </a:defRPr>
+            </a:lvl4pPr>
+            <a:lvl5pPr marL="2057400" indent="-228600" algn="l" defTabSz="914400" rtl="0" eaLnBrk="1" latinLnBrk="0" hangingPunct="1">
+              <a:lnSpc>
+                <a:spcPct val="125000"/>
+              </a:lnSpc>
+              <a:spcBef>
+                <a:spcPts val="500"/>
+              </a:spcBef>
+              <a:buFont typeface="Arial" panose="020B0604020202020204" pitchFamily="34" charset="0"/>
+              <a:buChar char="•"/>
+              <a:defRPr sz="1600" kern="1200" spc="160">
+                <a:solidFill>
+                  <a:schemeClr val="tx1"/>
+                </a:solidFill>
+                <a:latin typeface="+mn-lt"/>
+                <a:ea typeface="+mn-ea"/>
+                <a:cs typeface="+mn-cs"/>
+              </a:defRPr>
+            </a:lvl5pPr>
+            <a:lvl6pPr marL="2514600" indent="-228600" algn="l" defTabSz="914400" rtl="0" eaLnBrk="1" latinLnBrk="0" hangingPunct="1">
+              <a:lnSpc>
+                <a:spcPct val="90000"/>
+              </a:lnSpc>
+              <a:spcBef>
+                <a:spcPts val="500"/>
+              </a:spcBef>
+              <a:buFont typeface="Arial" panose="020B0604020202020204" pitchFamily="34" charset="0"/>
+              <a:buChar char="•"/>
+              <a:defRPr sz="1800" kern="1200">
+                <a:solidFill>
+                  <a:schemeClr val="tx1"/>
+                </a:solidFill>
+                <a:latin typeface="+mn-lt"/>
+                <a:ea typeface="+mn-ea"/>
+                <a:cs typeface="+mn-cs"/>
+              </a:defRPr>
+            </a:lvl6pPr>
+            <a:lvl7pPr marL="2971800" indent="-228600" algn="l" defTabSz="914400" rtl="0" eaLnBrk="1" latinLnBrk="0" hangingPunct="1">
+              <a:lnSpc>
+                <a:spcPct val="90000"/>
+              </a:lnSpc>
+              <a:spcBef>
+                <a:spcPts val="500"/>
+              </a:spcBef>
+              <a:buFont typeface="Arial" panose="020B0604020202020204" pitchFamily="34" charset="0"/>
+              <a:buChar char="•"/>
+              <a:defRPr sz="1800" kern="1200">
+                <a:solidFill>
+                  <a:schemeClr val="tx1"/>
+                </a:solidFill>
+                <a:latin typeface="+mn-lt"/>
+                <a:ea typeface="+mn-ea"/>
+                <a:cs typeface="+mn-cs"/>
+              </a:defRPr>
+            </a:lvl7pPr>
+            <a:lvl8pPr marL="3429000" indent="-228600" algn="l" defTabSz="914400" rtl="0" eaLnBrk="1" latinLnBrk="0" hangingPunct="1">
+              <a:lnSpc>
+                <a:spcPct val="90000"/>
+              </a:lnSpc>
+              <a:spcBef>
+                <a:spcPts val="500"/>
+              </a:spcBef>
+              <a:buFont typeface="Arial" panose="020B0604020202020204" pitchFamily="34" charset="0"/>
+              <a:buChar char="•"/>
+              <a:defRPr sz="1800" kern="1200">
+                <a:solidFill>
+                  <a:schemeClr val="tx1"/>
+                </a:solidFill>
+                <a:latin typeface="+mn-lt"/>
+                <a:ea typeface="+mn-ea"/>
+                <a:cs typeface="+mn-cs"/>
+              </a:defRPr>
+            </a:lvl8pPr>
+            <a:lvl9pPr marL="3886200" indent="-228600" algn="l" defTabSz="914400" rtl="0" eaLnBrk="1" latinLnBrk="0" hangingPunct="1">
+              <a:lnSpc>
+                <a:spcPct val="90000"/>
+              </a:lnSpc>
+              <a:spcBef>
+                <a:spcPts val="500"/>
+              </a:spcBef>
+              <a:buFont typeface="Arial" panose="020B0604020202020204" pitchFamily="34" charset="0"/>
+              <a:buChar char="•"/>
+              <a:defRPr sz="1800" kern="1200">
+                <a:solidFill>
+                  <a:schemeClr val="tx1"/>
+                </a:solidFill>
+                <a:latin typeface="+mn-lt"/>
+                <a:ea typeface="+mn-ea"/>
+                <a:cs typeface="+mn-cs"/>
+              </a:defRPr>
+            </a:lvl9pPr>
+          </a:lstStyle>
+          <a:p>
+            <a:pPr marL="0" indent="0">
+              <a:buFont typeface="Arial" panose="020B0604020202020204" pitchFamily="34" charset="0"/>
+              <a:buNone/>
+            </a:pPr>
+            <a:r>
+              <a:rPr lang="en-US" altLang="zh-CN" sz="1800" dirty="0" smtClean="0">
+                <a:latin typeface="+mn-ea"/>
+              </a:rPr>
+              <a:t>10</a:t>
+            </a:r>
+            <a:r>
+              <a:rPr lang="zh-CN" altLang="en-US" sz="1800" dirty="0" smtClean="0">
+                <a:latin typeface="+mn-ea"/>
+              </a:rPr>
+              <a:t>、锁骨 </a:t>
+            </a:r>
+            <a:r>
+              <a:rPr lang="en-US" altLang="zh-CN" sz="1800" dirty="0" smtClean="0">
+                <a:latin typeface="+mn-ea"/>
+              </a:rPr>
+              <a:t>- </a:t>
+            </a:r>
+            <a:r>
+              <a:rPr lang="zh-CN" altLang="en-US" sz="1800" dirty="0" smtClean="0">
+                <a:latin typeface="+mn-ea"/>
+              </a:rPr>
+              <a:t>俞府穴</a:t>
+            </a:r>
+          </a:p>
+          <a:p>
+            <a:pPr marL="0" indent="0">
+              <a:buFont typeface="Arial" panose="020B0604020202020204" pitchFamily="34" charset="0"/>
+              <a:buNone/>
+            </a:pPr>
+            <a:r>
+              <a:rPr lang="en-US" altLang="zh-CN" sz="1800" dirty="0" smtClean="0">
+                <a:latin typeface="+mn-ea"/>
+              </a:rPr>
+              <a:t>11</a:t>
+            </a:r>
+            <a:r>
+              <a:rPr lang="zh-CN" altLang="en-US" sz="1800" dirty="0" smtClean="0">
+                <a:latin typeface="+mn-ea"/>
+              </a:rPr>
+              <a:t>、腋下 </a:t>
+            </a:r>
+            <a:r>
+              <a:rPr lang="en-US" altLang="zh-CN" sz="1800" dirty="0" smtClean="0">
+                <a:latin typeface="+mn-ea"/>
+              </a:rPr>
+              <a:t>- </a:t>
+            </a:r>
+            <a:r>
+              <a:rPr lang="zh-CN" altLang="en-US" sz="1800" dirty="0" smtClean="0">
+                <a:latin typeface="+mn-ea"/>
+              </a:rPr>
+              <a:t>大包穴</a:t>
+            </a:r>
+          </a:p>
+          <a:p>
+            <a:pPr marL="0" indent="0">
+              <a:buFont typeface="Arial" panose="020B0604020202020204" pitchFamily="34" charset="0"/>
+              <a:buNone/>
+            </a:pPr>
+            <a:r>
+              <a:rPr lang="en-US" altLang="zh-CN" sz="1800" dirty="0" smtClean="0">
+                <a:latin typeface="+mn-ea"/>
+              </a:rPr>
+              <a:t>12</a:t>
+            </a:r>
+            <a:r>
+              <a:rPr lang="zh-CN" altLang="en-US" sz="1800" dirty="0" smtClean="0">
+                <a:latin typeface="+mn-ea"/>
+              </a:rPr>
+              <a:t>、腋下 </a:t>
+            </a:r>
+            <a:r>
+              <a:rPr lang="en-US" altLang="zh-CN" sz="1800" dirty="0" smtClean="0">
+                <a:latin typeface="+mn-ea"/>
+              </a:rPr>
+              <a:t>- </a:t>
+            </a:r>
+            <a:r>
+              <a:rPr lang="zh-CN" altLang="en-US" sz="1800" dirty="0" smtClean="0">
+                <a:latin typeface="+mn-ea"/>
+              </a:rPr>
+              <a:t>极泉穴</a:t>
+            </a:r>
+          </a:p>
+          <a:p>
+            <a:pPr marL="0" indent="0">
+              <a:buFont typeface="Arial" panose="020B0604020202020204" pitchFamily="34" charset="0"/>
+              <a:buNone/>
+            </a:pPr>
+            <a:r>
+              <a:rPr lang="en-US" altLang="zh-CN" sz="1800" dirty="0" smtClean="0">
+                <a:latin typeface="+mn-ea"/>
+              </a:rPr>
+              <a:t>13</a:t>
+            </a:r>
+            <a:r>
+              <a:rPr lang="zh-CN" altLang="en-US" sz="1800" dirty="0" smtClean="0">
+                <a:latin typeface="+mn-ea"/>
+              </a:rPr>
+              <a:t>、头顶 </a:t>
+            </a:r>
+            <a:r>
+              <a:rPr lang="en-US" altLang="zh-CN" sz="1800" dirty="0" smtClean="0">
+                <a:latin typeface="+mn-ea"/>
+              </a:rPr>
+              <a:t>- </a:t>
+            </a:r>
+            <a:r>
+              <a:rPr lang="zh-CN" altLang="en-US" sz="1800" dirty="0" smtClean="0">
+                <a:latin typeface="+mn-ea"/>
+              </a:rPr>
+              <a:t>百</a:t>
+            </a:r>
+            <a:r>
+              <a:rPr lang="zh-CN" altLang="en-US" sz="1800" dirty="0" smtClean="0">
+                <a:latin typeface="+mn-ea"/>
+              </a:rPr>
+              <a:t>会穴</a:t>
+            </a:r>
+            <a:endParaRPr lang="zh-CN" altLang="en-US" sz="1800" dirty="0">
+              <a:latin typeface="+mn-ea"/>
+            </a:endParaRPr>
+          </a:p>
+        </p:txBody>
+      </p:sp>
     </p:spTree>
     <p:extLst>
       <p:ext uri="{BB962C8B-B14F-4D97-AF65-F5344CB8AC3E}">
@@ -17883,6 +18206,13 @@
   <p:clrMapOvr>
     <a:masterClrMapping/>
   </p:clrMapOvr>
+  <p:timing>
+    <p:tnLst>
+      <p:par>
+        <p:cTn id="1" dur="indefinite" restart="never" nodeType="tmRoot"/>
+      </p:par>
+    </p:tnLst>
+  </p:timing>
 </p:sld>
 </file>
 
@@ -17936,531 +18266,1070 @@
           <a:lstStyle/>
           <a:p>
             <a:r>
-              <a:rPr lang="en-US" altLang="zh-CN" sz="900" dirty="0"/>
+              <a:rPr lang="en-US" altLang="zh-CN" sz="4400" dirty="0"/>
               <a:t>EFT</a:t>
             </a:r>
             <a:r>
-              <a:rPr lang="zh-CN" altLang="en-US" sz="900" dirty="0"/>
-              <a:t>心理自助操的流程设计（</a:t>
-            </a:r>
-            <a:r>
-              <a:rPr lang="en-US" altLang="zh-CN" sz="900" dirty="0"/>
-              <a:t>4</a:t>
-            </a:r>
-            <a:r>
-              <a:rPr lang="zh-CN" altLang="en-US" sz="900" dirty="0"/>
+              <a:rPr lang="zh-CN" altLang="en-US" sz="4400" dirty="0"/>
+              <a:t>心理自助</a:t>
+            </a:r>
+            <a:r>
+              <a:rPr lang="zh-CN" altLang="en-US" sz="4400" dirty="0" smtClean="0"/>
+              <a:t>操音乐选择（</a:t>
+            </a:r>
+            <a:r>
+              <a:rPr lang="en-US" altLang="zh-CN" sz="4400" dirty="0" smtClean="0"/>
+              <a:t>6</a:t>
+            </a:r>
+            <a:r>
+              <a:rPr lang="zh-CN" altLang="en-US" sz="4400" dirty="0" smtClean="0"/>
               <a:t>）</a:t>
             </a:r>
+            <a:endParaRPr lang="zh-CN" altLang="en-US" sz="4400" dirty="0"/>
           </a:p>
         </p:txBody>
       </p:sp>
-      <p:sp>
-        <p:nvSpPr>
-          <p:cNvPr id="3" name="内容占位符 2">
-            <a:extLst>
-              <a:ext uri="{FF2B5EF4-FFF2-40B4-BE49-F238E27FC236}">
-                <a16:creationId xmlns:a16="http://schemas.microsoft.com/office/drawing/2014/main" id="{9BB5BFA0-421E-7149-5025-230269CDD21A}"/>
-              </a:ext>
-            </a:extLst>
-          </p:cNvPr>
-          <p:cNvSpPr>
-            <a:spLocks noGrp="1"/>
-          </p:cNvSpPr>
+      <p:graphicFrame>
+        <p:nvGraphicFramePr>
+          <p:cNvPr id="6" name="表格 5"/>
+          <p:cNvGraphicFramePr>
+            <a:graphicFrameLocks noGrp="1"/>
+          </p:cNvGraphicFramePr>
           <p:nvPr>
-            <p:ph idx="1"/>
+            <p:extLst>
+              <p:ext uri="{D42A27DB-BD31-4B8C-83A1-F6EECF244321}">
+                <p14:modId xmlns:p14="http://schemas.microsoft.com/office/powerpoint/2010/main" val="2913299919"/>
+              </p:ext>
+            </p:extLst>
           </p:nvPr>
-        </p:nvSpPr>
-        <p:spPr>
-          <a:xfrm>
-            <a:off x="515113" y="1576785"/>
-            <a:ext cx="3458174" cy="3989337"/>
-          </a:xfrm>
-        </p:spPr>
-        <p:txBody>
-          <a:bodyPr/>
-          <a:lstStyle/>
-          <a:p>
-            <a:pPr marL="0" indent="0">
-              <a:buNone/>
-            </a:pPr>
-            <a:r>
-              <a:rPr lang="zh-CN" altLang="en-US" sz="1800" dirty="0" smtClean="0">
-                <a:latin typeface="+mn-ea"/>
-              </a:rPr>
-              <a:t>一般的穴位，将常用手的食指、中指和无名指并拢，依次弹打穴位。</a:t>
-            </a:r>
-            <a:endParaRPr lang="en-US" altLang="zh-CN" sz="1800" dirty="0" smtClean="0">
-              <a:latin typeface="+mn-ea"/>
-            </a:endParaRPr>
-          </a:p>
-          <a:p>
-            <a:pPr marL="0" indent="0">
-              <a:buNone/>
-            </a:pPr>
-            <a:r>
-              <a:rPr lang="zh-CN" altLang="en-US" sz="1800" dirty="0" smtClean="0">
-                <a:latin typeface="+mn-ea"/>
-              </a:rPr>
-              <a:t>弹的力度为略感穴位酸痛而不难受即可。</a:t>
-            </a:r>
-            <a:endParaRPr lang="en-US" altLang="zh-CN" sz="1800" dirty="0" smtClean="0">
-              <a:latin typeface="+mn-ea"/>
-            </a:endParaRPr>
-          </a:p>
-          <a:p>
-            <a:pPr marL="0" indent="0">
-              <a:buNone/>
-            </a:pPr>
-            <a:endParaRPr lang="zh-CN" altLang="en-US" sz="1800" dirty="0">
-              <a:latin typeface="+mn-ea"/>
-            </a:endParaRPr>
-          </a:p>
-        </p:txBody>
-      </p:sp>
-      <p:sp>
-        <p:nvSpPr>
-          <p:cNvPr id="14" name="内容占位符 2">
-            <a:extLst>
-              <a:ext uri="{FF2B5EF4-FFF2-40B4-BE49-F238E27FC236}">
-                <a16:creationId xmlns:a16="http://schemas.microsoft.com/office/drawing/2014/main" id="{F16DB7D6-54F0-0849-5B5E-EFE315F70565}"/>
-              </a:ext>
-            </a:extLst>
-          </p:cNvPr>
-          <p:cNvSpPr txBox="1">
-            <a:spLocks/>
-          </p:cNvSpPr>
-          <p:nvPr/>
-        </p:nvSpPr>
-        <p:spPr>
-          <a:xfrm>
-            <a:off x="264035" y="5566122"/>
-            <a:ext cx="4779454" cy="757207"/>
-          </a:xfrm>
-          <a:prstGeom prst="rect">
-            <a:avLst/>
-          </a:prstGeom>
-        </p:spPr>
-        <p:txBody>
-          <a:bodyPr lIns="109728" tIns="109728" rIns="109728" bIns="91440"/>
-          <a:lstStyle>
-            <a:lvl1pPr marL="228600" indent="-228600" algn="l" defTabSz="914400" rtl="0" eaLnBrk="1" latinLnBrk="0" hangingPunct="1">
-              <a:lnSpc>
-                <a:spcPct val="125000"/>
-              </a:lnSpc>
-              <a:spcBef>
-                <a:spcPts val="1000"/>
-              </a:spcBef>
-              <a:buFont typeface="Arial" panose="020B0604020202020204" pitchFamily="34" charset="0"/>
-              <a:buChar char="•"/>
-              <a:defRPr sz="1600" kern="1200" spc="160">
-                <a:solidFill>
-                  <a:schemeClr val="tx1"/>
-                </a:solidFill>
-                <a:latin typeface="+mn-lt"/>
-                <a:ea typeface="+mn-ea"/>
-                <a:cs typeface="+mn-cs"/>
-              </a:defRPr>
-            </a:lvl1pPr>
-            <a:lvl2pPr marL="685800" indent="-228600" algn="l" defTabSz="914400" rtl="0" eaLnBrk="1" latinLnBrk="0" hangingPunct="1">
-              <a:lnSpc>
-                <a:spcPct val="125000"/>
-              </a:lnSpc>
-              <a:spcBef>
-                <a:spcPts val="500"/>
-              </a:spcBef>
-              <a:buFont typeface="Arial" panose="020B0604020202020204" pitchFamily="34" charset="0"/>
-              <a:buChar char="•"/>
-              <a:defRPr sz="1600" kern="1200" spc="160">
-                <a:solidFill>
-                  <a:schemeClr val="tx1"/>
-                </a:solidFill>
-                <a:latin typeface="+mn-lt"/>
-                <a:ea typeface="+mn-ea"/>
-                <a:cs typeface="+mn-cs"/>
-              </a:defRPr>
-            </a:lvl2pPr>
-            <a:lvl3pPr marL="1143000" indent="-228600" algn="l" defTabSz="914400" rtl="0" eaLnBrk="1" latinLnBrk="0" hangingPunct="1">
-              <a:lnSpc>
-                <a:spcPct val="125000"/>
-              </a:lnSpc>
-              <a:spcBef>
-                <a:spcPts val="500"/>
-              </a:spcBef>
-              <a:buFont typeface="Arial" panose="020B0604020202020204" pitchFamily="34" charset="0"/>
-              <a:buChar char="•"/>
-              <a:defRPr sz="1600" kern="1200" spc="160">
-                <a:solidFill>
-                  <a:schemeClr val="tx1"/>
-                </a:solidFill>
-                <a:latin typeface="+mn-lt"/>
-                <a:ea typeface="+mn-ea"/>
-                <a:cs typeface="+mn-cs"/>
-              </a:defRPr>
-            </a:lvl3pPr>
-            <a:lvl4pPr marL="1600200" indent="-228600" algn="l" defTabSz="914400" rtl="0" eaLnBrk="1" latinLnBrk="0" hangingPunct="1">
-              <a:lnSpc>
-                <a:spcPct val="125000"/>
-              </a:lnSpc>
-              <a:spcBef>
-                <a:spcPts val="500"/>
-              </a:spcBef>
-              <a:buFont typeface="Arial" panose="020B0604020202020204" pitchFamily="34" charset="0"/>
-              <a:buChar char="•"/>
-              <a:defRPr sz="1600" kern="1200" spc="160">
-                <a:solidFill>
-                  <a:schemeClr val="tx1"/>
-                </a:solidFill>
-                <a:latin typeface="+mn-lt"/>
-                <a:ea typeface="+mn-ea"/>
-                <a:cs typeface="+mn-cs"/>
-              </a:defRPr>
-            </a:lvl4pPr>
-            <a:lvl5pPr marL="2057400" indent="-228600" algn="l" defTabSz="914400" rtl="0" eaLnBrk="1" latinLnBrk="0" hangingPunct="1">
-              <a:lnSpc>
-                <a:spcPct val="125000"/>
-              </a:lnSpc>
-              <a:spcBef>
-                <a:spcPts val="500"/>
-              </a:spcBef>
-              <a:buFont typeface="Arial" panose="020B0604020202020204" pitchFamily="34" charset="0"/>
-              <a:buChar char="•"/>
-              <a:defRPr sz="1600" kern="1200" spc="160">
-                <a:solidFill>
-                  <a:schemeClr val="tx1"/>
-                </a:solidFill>
-                <a:latin typeface="+mn-lt"/>
-                <a:ea typeface="+mn-ea"/>
-                <a:cs typeface="+mn-cs"/>
-              </a:defRPr>
-            </a:lvl5pPr>
-            <a:lvl6pPr marL="2514600" indent="-228600" algn="l" defTabSz="914400" rtl="0" eaLnBrk="1" latinLnBrk="0" hangingPunct="1">
-              <a:lnSpc>
-                <a:spcPct val="90000"/>
-              </a:lnSpc>
-              <a:spcBef>
-                <a:spcPts val="500"/>
-              </a:spcBef>
-              <a:buFont typeface="Arial" panose="020B0604020202020204" pitchFamily="34" charset="0"/>
-              <a:buChar char="•"/>
-              <a:defRPr sz="1800" kern="1200">
-                <a:solidFill>
-                  <a:schemeClr val="tx1"/>
-                </a:solidFill>
-                <a:latin typeface="+mn-lt"/>
-                <a:ea typeface="+mn-ea"/>
-                <a:cs typeface="+mn-cs"/>
-              </a:defRPr>
-            </a:lvl6pPr>
-            <a:lvl7pPr marL="2971800" indent="-228600" algn="l" defTabSz="914400" rtl="0" eaLnBrk="1" latinLnBrk="0" hangingPunct="1">
-              <a:lnSpc>
-                <a:spcPct val="90000"/>
-              </a:lnSpc>
-              <a:spcBef>
-                <a:spcPts val="500"/>
-              </a:spcBef>
-              <a:buFont typeface="Arial" panose="020B0604020202020204" pitchFamily="34" charset="0"/>
-              <a:buChar char="•"/>
-              <a:defRPr sz="1800" kern="1200">
-                <a:solidFill>
-                  <a:schemeClr val="tx1"/>
-                </a:solidFill>
-                <a:latin typeface="+mn-lt"/>
-                <a:ea typeface="+mn-ea"/>
-                <a:cs typeface="+mn-cs"/>
-              </a:defRPr>
-            </a:lvl7pPr>
-            <a:lvl8pPr marL="3429000" indent="-228600" algn="l" defTabSz="914400" rtl="0" eaLnBrk="1" latinLnBrk="0" hangingPunct="1">
-              <a:lnSpc>
-                <a:spcPct val="90000"/>
-              </a:lnSpc>
-              <a:spcBef>
-                <a:spcPts val="500"/>
-              </a:spcBef>
-              <a:buFont typeface="Arial" panose="020B0604020202020204" pitchFamily="34" charset="0"/>
-              <a:buChar char="•"/>
-              <a:defRPr sz="1800" kern="1200">
-                <a:solidFill>
-                  <a:schemeClr val="tx1"/>
-                </a:solidFill>
-                <a:latin typeface="+mn-lt"/>
-                <a:ea typeface="+mn-ea"/>
-                <a:cs typeface="+mn-cs"/>
-              </a:defRPr>
-            </a:lvl8pPr>
-            <a:lvl9pPr marL="3886200" indent="-228600" algn="l" defTabSz="914400" rtl="0" eaLnBrk="1" latinLnBrk="0" hangingPunct="1">
-              <a:lnSpc>
-                <a:spcPct val="90000"/>
-              </a:lnSpc>
-              <a:spcBef>
-                <a:spcPts val="500"/>
-              </a:spcBef>
-              <a:buFont typeface="Arial" panose="020B0604020202020204" pitchFamily="34" charset="0"/>
-              <a:buChar char="•"/>
-              <a:defRPr sz="1800" kern="1200">
-                <a:solidFill>
-                  <a:schemeClr val="tx1"/>
-                </a:solidFill>
-                <a:latin typeface="+mn-lt"/>
-                <a:ea typeface="+mn-ea"/>
-                <a:cs typeface="+mn-cs"/>
-              </a:defRPr>
-            </a:lvl9pPr>
-          </a:lstStyle>
-          <a:p>
-            <a:pPr marL="0" indent="0">
-              <a:buNone/>
-            </a:pPr>
-            <a:r>
-              <a:rPr lang="zh-CN" altLang="en-US" sz="3200" dirty="0" smtClean="0">
-                <a:effectLst>
-                  <a:outerShdw blurRad="38100" dist="38100" dir="2700000" algn="tl">
-                    <a:srgbClr val="000000">
-                      <a:alpha val="43137"/>
-                    </a:srgbClr>
-                  </a:outerShdw>
-                </a:effectLst>
-                <a:latin typeface="+mn-ea"/>
-              </a:rPr>
-              <a:t>指法的运用</a:t>
-            </a:r>
-            <a:endParaRPr lang="zh-CN" altLang="en-US" sz="3200" dirty="0">
-              <a:effectLst>
-                <a:outerShdw blurRad="38100" dist="38100" dir="2700000" algn="tl">
-                  <a:srgbClr val="000000">
-                    <a:alpha val="43137"/>
-                  </a:srgbClr>
-                </a:outerShdw>
-              </a:effectLst>
-              <a:latin typeface="+mn-ea"/>
-            </a:endParaRPr>
-          </a:p>
-        </p:txBody>
-      </p:sp>
-      <p:sp>
-        <p:nvSpPr>
-          <p:cNvPr id="5" name="内容占位符 2">
-            <a:extLst>
-              <a:ext uri="{FF2B5EF4-FFF2-40B4-BE49-F238E27FC236}">
-                <a16:creationId xmlns:a16="http://schemas.microsoft.com/office/drawing/2014/main" id="{9BB5BFA0-421E-7149-5025-230269CDD21A}"/>
-              </a:ext>
-            </a:extLst>
-          </p:cNvPr>
-          <p:cNvSpPr txBox="1">
-            <a:spLocks/>
-          </p:cNvSpPr>
-          <p:nvPr/>
-        </p:nvSpPr>
-        <p:spPr>
-          <a:xfrm>
-            <a:off x="4065814" y="1304642"/>
-            <a:ext cx="7611074" cy="3989337"/>
-          </a:xfrm>
-          <a:prstGeom prst="rect">
-            <a:avLst/>
-          </a:prstGeom>
-        </p:spPr>
-        <p:txBody>
-          <a:bodyPr lIns="109728" tIns="109728" rIns="109728" bIns="91440"/>
-          <a:lstStyle>
-            <a:lvl1pPr marL="228600" indent="-228600" algn="l" defTabSz="914400" rtl="0" eaLnBrk="1" latinLnBrk="0" hangingPunct="1">
-              <a:lnSpc>
-                <a:spcPct val="125000"/>
-              </a:lnSpc>
-              <a:spcBef>
-                <a:spcPts val="1000"/>
-              </a:spcBef>
-              <a:buFont typeface="Arial" panose="020B0604020202020204" pitchFamily="34" charset="0"/>
-              <a:buChar char="•"/>
-              <a:defRPr sz="1600" kern="1200" spc="160">
-                <a:solidFill>
-                  <a:schemeClr val="tx1"/>
-                </a:solidFill>
-                <a:latin typeface="+mn-lt"/>
-                <a:ea typeface="+mn-ea"/>
-                <a:cs typeface="+mn-cs"/>
-              </a:defRPr>
-            </a:lvl1pPr>
-            <a:lvl2pPr marL="685800" indent="-228600" algn="l" defTabSz="914400" rtl="0" eaLnBrk="1" latinLnBrk="0" hangingPunct="1">
-              <a:lnSpc>
-                <a:spcPct val="125000"/>
-              </a:lnSpc>
-              <a:spcBef>
-                <a:spcPts val="500"/>
-              </a:spcBef>
-              <a:buFont typeface="Arial" panose="020B0604020202020204" pitchFamily="34" charset="0"/>
-              <a:buChar char="•"/>
-              <a:defRPr sz="1600" kern="1200" spc="160">
-                <a:solidFill>
-                  <a:schemeClr val="tx1"/>
-                </a:solidFill>
-                <a:latin typeface="+mn-lt"/>
-                <a:ea typeface="+mn-ea"/>
-                <a:cs typeface="+mn-cs"/>
-              </a:defRPr>
-            </a:lvl2pPr>
-            <a:lvl3pPr marL="1143000" indent="-228600" algn="l" defTabSz="914400" rtl="0" eaLnBrk="1" latinLnBrk="0" hangingPunct="1">
-              <a:lnSpc>
-                <a:spcPct val="125000"/>
-              </a:lnSpc>
-              <a:spcBef>
-                <a:spcPts val="500"/>
-              </a:spcBef>
-              <a:buFont typeface="Arial" panose="020B0604020202020204" pitchFamily="34" charset="0"/>
-              <a:buChar char="•"/>
-              <a:defRPr sz="1600" kern="1200" spc="160">
-                <a:solidFill>
-                  <a:schemeClr val="tx1"/>
-                </a:solidFill>
-                <a:latin typeface="+mn-lt"/>
-                <a:ea typeface="+mn-ea"/>
-                <a:cs typeface="+mn-cs"/>
-              </a:defRPr>
-            </a:lvl3pPr>
-            <a:lvl4pPr marL="1600200" indent="-228600" algn="l" defTabSz="914400" rtl="0" eaLnBrk="1" latinLnBrk="0" hangingPunct="1">
-              <a:lnSpc>
-                <a:spcPct val="125000"/>
-              </a:lnSpc>
-              <a:spcBef>
-                <a:spcPts val="500"/>
-              </a:spcBef>
-              <a:buFont typeface="Arial" panose="020B0604020202020204" pitchFamily="34" charset="0"/>
-              <a:buChar char="•"/>
-              <a:defRPr sz="1600" kern="1200" spc="160">
-                <a:solidFill>
-                  <a:schemeClr val="tx1"/>
-                </a:solidFill>
-                <a:latin typeface="+mn-lt"/>
-                <a:ea typeface="+mn-ea"/>
-                <a:cs typeface="+mn-cs"/>
-              </a:defRPr>
-            </a:lvl4pPr>
-            <a:lvl5pPr marL="2057400" indent="-228600" algn="l" defTabSz="914400" rtl="0" eaLnBrk="1" latinLnBrk="0" hangingPunct="1">
-              <a:lnSpc>
-                <a:spcPct val="125000"/>
-              </a:lnSpc>
-              <a:spcBef>
-                <a:spcPts val="500"/>
-              </a:spcBef>
-              <a:buFont typeface="Arial" panose="020B0604020202020204" pitchFamily="34" charset="0"/>
-              <a:buChar char="•"/>
-              <a:defRPr sz="1600" kern="1200" spc="160">
-                <a:solidFill>
-                  <a:schemeClr val="tx1"/>
-                </a:solidFill>
-                <a:latin typeface="+mn-lt"/>
-                <a:ea typeface="+mn-ea"/>
-                <a:cs typeface="+mn-cs"/>
-              </a:defRPr>
-            </a:lvl5pPr>
-            <a:lvl6pPr marL="2514600" indent="-228600" algn="l" defTabSz="914400" rtl="0" eaLnBrk="1" latinLnBrk="0" hangingPunct="1">
-              <a:lnSpc>
-                <a:spcPct val="90000"/>
-              </a:lnSpc>
-              <a:spcBef>
-                <a:spcPts val="500"/>
-              </a:spcBef>
-              <a:buFont typeface="Arial" panose="020B0604020202020204" pitchFamily="34" charset="0"/>
-              <a:buChar char="•"/>
-              <a:defRPr sz="1800" kern="1200">
-                <a:solidFill>
-                  <a:schemeClr val="tx1"/>
-                </a:solidFill>
-                <a:latin typeface="+mn-lt"/>
-                <a:ea typeface="+mn-ea"/>
-                <a:cs typeface="+mn-cs"/>
-              </a:defRPr>
-            </a:lvl6pPr>
-            <a:lvl7pPr marL="2971800" indent="-228600" algn="l" defTabSz="914400" rtl="0" eaLnBrk="1" latinLnBrk="0" hangingPunct="1">
-              <a:lnSpc>
-                <a:spcPct val="90000"/>
-              </a:lnSpc>
-              <a:spcBef>
-                <a:spcPts val="500"/>
-              </a:spcBef>
-              <a:buFont typeface="Arial" panose="020B0604020202020204" pitchFamily="34" charset="0"/>
-              <a:buChar char="•"/>
-              <a:defRPr sz="1800" kern="1200">
-                <a:solidFill>
-                  <a:schemeClr val="tx1"/>
-                </a:solidFill>
-                <a:latin typeface="+mn-lt"/>
-                <a:ea typeface="+mn-ea"/>
-                <a:cs typeface="+mn-cs"/>
-              </a:defRPr>
-            </a:lvl7pPr>
-            <a:lvl8pPr marL="3429000" indent="-228600" algn="l" defTabSz="914400" rtl="0" eaLnBrk="1" latinLnBrk="0" hangingPunct="1">
-              <a:lnSpc>
-                <a:spcPct val="90000"/>
-              </a:lnSpc>
-              <a:spcBef>
-                <a:spcPts val="500"/>
-              </a:spcBef>
-              <a:buFont typeface="Arial" panose="020B0604020202020204" pitchFamily="34" charset="0"/>
-              <a:buChar char="•"/>
-              <a:defRPr sz="1800" kern="1200">
-                <a:solidFill>
-                  <a:schemeClr val="tx1"/>
-                </a:solidFill>
-                <a:latin typeface="+mn-lt"/>
-                <a:ea typeface="+mn-ea"/>
-                <a:cs typeface="+mn-cs"/>
-              </a:defRPr>
-            </a:lvl8pPr>
-            <a:lvl9pPr marL="3886200" indent="-228600" algn="l" defTabSz="914400" rtl="0" eaLnBrk="1" latinLnBrk="0" hangingPunct="1">
-              <a:lnSpc>
-                <a:spcPct val="90000"/>
-              </a:lnSpc>
-              <a:spcBef>
-                <a:spcPts val="500"/>
-              </a:spcBef>
-              <a:buFont typeface="Arial" panose="020B0604020202020204" pitchFamily="34" charset="0"/>
-              <a:buChar char="•"/>
-              <a:defRPr sz="1800" kern="1200">
-                <a:solidFill>
-                  <a:schemeClr val="tx1"/>
-                </a:solidFill>
-                <a:latin typeface="+mn-lt"/>
-                <a:ea typeface="+mn-ea"/>
-                <a:cs typeface="+mn-cs"/>
-              </a:defRPr>
-            </a:lvl9pPr>
-          </a:lstStyle>
-          <a:p>
-            <a:pPr marL="0" indent="0">
-              <a:buFont typeface="Arial" panose="020B0604020202020204" pitchFamily="34" charset="0"/>
-              <a:buNone/>
-            </a:pPr>
-            <a:r>
-              <a:rPr lang="zh-CN" altLang="en-US" sz="1800" dirty="0" smtClean="0">
-                <a:latin typeface="+mn-ea"/>
-              </a:rPr>
-              <a:t>大部分的穴位在人体上分布都是对称的，左右和一个，一般来说弹哪边都可以。</a:t>
-            </a:r>
-            <a:endParaRPr lang="en-US" altLang="zh-CN" sz="1800" dirty="0" smtClean="0">
-              <a:latin typeface="+mn-ea"/>
-            </a:endParaRPr>
-          </a:p>
-          <a:p>
-            <a:pPr marL="0" indent="0">
-              <a:buFont typeface="Arial" panose="020B0604020202020204" pitchFamily="34" charset="0"/>
-              <a:buNone/>
-            </a:pPr>
-            <a:endParaRPr lang="zh-CN" altLang="en-US" sz="1800" dirty="0">
-              <a:latin typeface="+mn-ea"/>
-            </a:endParaRPr>
-          </a:p>
-        </p:txBody>
-      </p:sp>
+        </p:nvGraphicFramePr>
+        <p:xfrm>
+          <a:off x="521208" y="1599390"/>
+          <a:ext cx="11155680" cy="5059388"/>
+        </p:xfrm>
+        <a:graphic>
+          <a:graphicData uri="http://schemas.openxmlformats.org/drawingml/2006/table">
+            <a:tbl>
+              <a:tblPr>
+                <a:tableStyleId>{5C22544A-7EE6-4342-B048-85BDC9FD1C3A}</a:tableStyleId>
+              </a:tblPr>
+              <a:tblGrid>
+                <a:gridCol w="1479042">
+                  <a:extLst>
+                    <a:ext uri="{9D8B030D-6E8A-4147-A177-3AD203B41FA5}">
+                      <a16:colId xmlns:a16="http://schemas.microsoft.com/office/drawing/2014/main" val="2373839766"/>
+                    </a:ext>
+                  </a:extLst>
+                </a:gridCol>
+                <a:gridCol w="2530929">
+                  <a:extLst>
+                    <a:ext uri="{9D8B030D-6E8A-4147-A177-3AD203B41FA5}">
+                      <a16:colId xmlns:a16="http://schemas.microsoft.com/office/drawing/2014/main" val="1913909198"/>
+                    </a:ext>
+                  </a:extLst>
+                </a:gridCol>
+                <a:gridCol w="2090057">
+                  <a:extLst>
+                    <a:ext uri="{9D8B030D-6E8A-4147-A177-3AD203B41FA5}">
+                      <a16:colId xmlns:a16="http://schemas.microsoft.com/office/drawing/2014/main" val="3756399988"/>
+                    </a:ext>
+                  </a:extLst>
+                </a:gridCol>
+                <a:gridCol w="5055652">
+                  <a:extLst>
+                    <a:ext uri="{9D8B030D-6E8A-4147-A177-3AD203B41FA5}">
+                      <a16:colId xmlns:a16="http://schemas.microsoft.com/office/drawing/2014/main" val="2942602759"/>
+                    </a:ext>
+                  </a:extLst>
+                </a:gridCol>
+              </a:tblGrid>
+              <a:tr h="392696">
+                <a:tc>
+                  <a:txBody>
+                    <a:bodyPr/>
+                    <a:lstStyle/>
+                    <a:p>
+                      <a:pPr algn="ctr" fontAlgn="ctr"/>
+                      <a:r>
+                        <a:rPr lang="zh-CN" altLang="en-US" sz="1200" u="none" strike="noStrike" dirty="0">
+                          <a:effectLst/>
+                          <a:latin typeface="+mn-lt"/>
+                        </a:rPr>
+                        <a:t>对应情绪 </a:t>
+                      </a:r>
+                      <a:r>
+                        <a:rPr lang="en-US" altLang="zh-CN" sz="1200" u="none" strike="noStrike" dirty="0">
+                          <a:effectLst/>
+                          <a:latin typeface="+mn-lt"/>
+                        </a:rPr>
+                        <a:t>/ </a:t>
+                      </a:r>
+                      <a:r>
+                        <a:rPr lang="zh-CN" altLang="en-US" sz="1200" u="none" strike="noStrike" dirty="0">
+                          <a:effectLst/>
+                          <a:latin typeface="+mn-lt"/>
+                        </a:rPr>
+                        <a:t>情况</a:t>
+                      </a:r>
+                      <a:endParaRPr lang="zh-CN" altLang="en-US" sz="1200" b="1" i="0" u="none" strike="noStrike" dirty="0">
+                        <a:solidFill>
+                          <a:srgbClr val="000000"/>
+                        </a:solidFill>
+                        <a:effectLst/>
+                        <a:latin typeface="+mn-lt"/>
+                        <a:ea typeface="等线" panose="02010600030101010101" pitchFamily="2" charset="-122"/>
+                      </a:endParaRPr>
+                    </a:p>
+                  </a:txBody>
+                  <a:tcPr marL="911" marR="911" marT="911" marB="0" anchor="ctr"/>
+                </a:tc>
+                <a:tc>
+                  <a:txBody>
+                    <a:bodyPr/>
+                    <a:lstStyle/>
+                    <a:p>
+                      <a:pPr algn="ctr" fontAlgn="ctr"/>
+                      <a:r>
+                        <a:rPr lang="zh-CN" altLang="en-US" sz="1200" u="none" strike="noStrike">
+                          <a:effectLst/>
+                          <a:latin typeface="+mn-lt"/>
+                        </a:rPr>
+                        <a:t>音乐</a:t>
+                      </a:r>
+                      <a:endParaRPr lang="zh-CN" altLang="en-US" sz="1200" b="1" i="0" u="none" strike="noStrike">
+                        <a:solidFill>
+                          <a:srgbClr val="000000"/>
+                        </a:solidFill>
+                        <a:effectLst/>
+                        <a:latin typeface="+mn-lt"/>
+                        <a:ea typeface="等线" panose="02010600030101010101" pitchFamily="2" charset="-122"/>
+                      </a:endParaRPr>
+                    </a:p>
+                  </a:txBody>
+                  <a:tcPr marL="911" marR="911" marT="911" marB="0" anchor="ctr"/>
+                </a:tc>
+                <a:tc>
+                  <a:txBody>
+                    <a:bodyPr/>
+                    <a:lstStyle/>
+                    <a:p>
+                      <a:pPr algn="ctr" fontAlgn="ctr"/>
+                      <a:r>
+                        <a:rPr lang="zh-CN" altLang="en-US" sz="1200" u="none" strike="noStrike">
+                          <a:effectLst/>
+                          <a:latin typeface="+mn-lt"/>
+                        </a:rPr>
+                        <a:t>具体作用</a:t>
+                      </a:r>
+                      <a:endParaRPr lang="zh-CN" altLang="en-US" sz="1200" b="1" i="0" u="none" strike="noStrike">
+                        <a:solidFill>
+                          <a:srgbClr val="000000"/>
+                        </a:solidFill>
+                        <a:effectLst/>
+                        <a:latin typeface="+mn-lt"/>
+                        <a:ea typeface="等线" panose="02010600030101010101" pitchFamily="2" charset="-122"/>
+                      </a:endParaRPr>
+                    </a:p>
+                  </a:txBody>
+                  <a:tcPr marL="911" marR="911" marT="911" marB="0" anchor="ctr"/>
+                </a:tc>
+                <a:tc>
+                  <a:txBody>
+                    <a:bodyPr/>
+                    <a:lstStyle/>
+                    <a:p>
+                      <a:pPr algn="ctr" fontAlgn="ctr"/>
+                      <a:r>
+                        <a:rPr lang="zh-CN" altLang="en-US" sz="1200" u="none" strike="noStrike">
+                          <a:effectLst/>
+                          <a:latin typeface="+mn-lt"/>
+                        </a:rPr>
+                        <a:t>配套引导语</a:t>
+                      </a:r>
+                      <a:endParaRPr lang="zh-CN" altLang="en-US" sz="1200" b="1" i="0" u="none" strike="noStrike">
+                        <a:solidFill>
+                          <a:srgbClr val="000000"/>
+                        </a:solidFill>
+                        <a:effectLst/>
+                        <a:latin typeface="+mn-lt"/>
+                        <a:ea typeface="等线" panose="02010600030101010101" pitchFamily="2" charset="-122"/>
+                      </a:endParaRPr>
+                    </a:p>
+                  </a:txBody>
+                  <a:tcPr marL="911" marR="911" marT="911" marB="0" anchor="ctr"/>
+                </a:tc>
+                <a:extLst>
+                  <a:ext uri="{0D108BD9-81ED-4DB2-BD59-A6C34878D82A}">
+                    <a16:rowId xmlns:a16="http://schemas.microsoft.com/office/drawing/2014/main" val="274471837"/>
+                  </a:ext>
+                </a:extLst>
+              </a:tr>
+              <a:tr h="690355">
+                <a:tc>
+                  <a:txBody>
+                    <a:bodyPr/>
+                    <a:lstStyle/>
+                    <a:p>
+                      <a:pPr algn="l" fontAlgn="ctr"/>
+                      <a:r>
+                        <a:rPr lang="zh-CN" altLang="en-US" sz="1200" u="none" strike="noStrike" dirty="0">
+                          <a:effectLst/>
+                          <a:latin typeface="+mn-lt"/>
+                        </a:rPr>
+                        <a:t>恐惧、焦虑、惊恐发作</a:t>
+                      </a:r>
+                      <a:endParaRPr lang="zh-CN" altLang="en-US" sz="1200" b="0" i="0" u="none" strike="noStrike" dirty="0">
+                        <a:solidFill>
+                          <a:srgbClr val="000000"/>
+                        </a:solidFill>
+                        <a:effectLst/>
+                        <a:latin typeface="+mn-lt"/>
+                        <a:ea typeface="等线" panose="02010600030101010101" pitchFamily="2" charset="-122"/>
+                      </a:endParaRPr>
+                    </a:p>
+                  </a:txBody>
+                  <a:tcPr marL="911" marR="911" marT="911" marB="0" anchor="ctr"/>
+                </a:tc>
+                <a:tc>
+                  <a:txBody>
+                    <a:bodyPr/>
+                    <a:lstStyle/>
+                    <a:p>
+                      <a:pPr algn="l" fontAlgn="ctr"/>
+                      <a:r>
+                        <a:rPr lang="en-US" sz="1200" u="none" strike="noStrike">
+                          <a:effectLst/>
+                          <a:latin typeface="+mn-lt"/>
+                        </a:rPr>
+                        <a:t>going home（</a:t>
+                      </a:r>
+                      <a:r>
+                        <a:rPr lang="zh-CN" altLang="en-US" sz="1200" u="none" strike="noStrike">
+                          <a:effectLst/>
+                          <a:latin typeface="+mn-lt"/>
+                        </a:rPr>
+                        <a:t>编号 </a:t>
+                      </a:r>
+                      <a:r>
+                        <a:rPr lang="en-US" altLang="zh-CN" sz="1200" u="none" strike="noStrike">
+                          <a:effectLst/>
+                          <a:latin typeface="+mn-lt"/>
+                        </a:rPr>
+                        <a:t>61</a:t>
+                      </a:r>
+                      <a:r>
+                        <a:rPr lang="zh-CN" altLang="en-US" sz="1200" u="none" strike="noStrike">
+                          <a:effectLst/>
+                          <a:latin typeface="+mn-lt"/>
+                        </a:rPr>
+                        <a:t>）</a:t>
+                      </a:r>
+                      <a:endParaRPr lang="zh-CN" altLang="en-US" sz="1200" b="0" i="0" u="none" strike="noStrike">
+                        <a:solidFill>
+                          <a:srgbClr val="000000"/>
+                        </a:solidFill>
+                        <a:effectLst/>
+                        <a:latin typeface="+mn-lt"/>
+                        <a:ea typeface="等线" panose="02010600030101010101" pitchFamily="2" charset="-122"/>
+                      </a:endParaRPr>
+                    </a:p>
+                  </a:txBody>
+                  <a:tcPr marL="911" marR="911" marT="911" marB="0" anchor="ctr"/>
+                </a:tc>
+                <a:tc>
+                  <a:txBody>
+                    <a:bodyPr/>
+                    <a:lstStyle/>
+                    <a:p>
+                      <a:pPr algn="l" fontAlgn="ctr"/>
+                      <a:r>
+                        <a:rPr lang="zh-CN" altLang="en-US" sz="1200" u="none" strike="noStrike">
+                          <a:effectLst/>
+                          <a:latin typeface="+mn-lt"/>
+                        </a:rPr>
+                        <a:t>提供安全感与稳定感，平复激烈情绪波动</a:t>
+                      </a:r>
+                      <a:endParaRPr lang="zh-CN" altLang="en-US" sz="1200" b="0" i="0" u="none" strike="noStrike">
+                        <a:solidFill>
+                          <a:srgbClr val="000000"/>
+                        </a:solidFill>
+                        <a:effectLst/>
+                        <a:latin typeface="+mn-lt"/>
+                        <a:ea typeface="等线" panose="02010600030101010101" pitchFamily="2" charset="-122"/>
+                      </a:endParaRPr>
+                    </a:p>
+                  </a:txBody>
+                  <a:tcPr marL="911" marR="911" marT="911" marB="0" anchor="ctr"/>
+                </a:tc>
+                <a:tc>
+                  <a:txBody>
+                    <a:bodyPr/>
+                    <a:lstStyle/>
+                    <a:p>
+                      <a:pPr algn="l" fontAlgn="ctr"/>
+                      <a:r>
+                        <a:rPr lang="zh-CN" altLang="en-US" sz="1200" u="none" strike="noStrike">
+                          <a:effectLst/>
+                          <a:latin typeface="+mn-lt"/>
+                        </a:rPr>
+                        <a:t>“现在，让音乐包裹你的身体，感受每一个音符都在为你搭建安全的屏障。随着旋律流动，恐惧和焦虑正在慢慢消散，你很安全，很平静。”</a:t>
+                      </a:r>
+                      <a:endParaRPr lang="zh-CN" altLang="en-US" sz="1200" b="0" i="0" u="none" strike="noStrike">
+                        <a:solidFill>
+                          <a:srgbClr val="000000"/>
+                        </a:solidFill>
+                        <a:effectLst/>
+                        <a:latin typeface="+mn-lt"/>
+                        <a:ea typeface="等线" panose="02010600030101010101" pitchFamily="2" charset="-122"/>
+                      </a:endParaRPr>
+                    </a:p>
+                  </a:txBody>
+                  <a:tcPr marL="911" marR="911" marT="911" marB="0" anchor="ctr"/>
+                </a:tc>
+                <a:extLst>
+                  <a:ext uri="{0D108BD9-81ED-4DB2-BD59-A6C34878D82A}">
+                    <a16:rowId xmlns:a16="http://schemas.microsoft.com/office/drawing/2014/main" val="2712070006"/>
+                  </a:ext>
+                </a:extLst>
+              </a:tr>
+              <a:tr h="817756">
+                <a:tc>
+                  <a:txBody>
+                    <a:bodyPr/>
+                    <a:lstStyle/>
+                    <a:p>
+                      <a:pPr algn="l" fontAlgn="ctr"/>
+                      <a:r>
+                        <a:rPr lang="zh-CN" altLang="en-US" sz="1200" u="none" strike="noStrike">
+                          <a:effectLst/>
+                          <a:latin typeface="+mn-lt"/>
+                        </a:rPr>
+                        <a:t>自闭症儿童情绪失控、新入学儿童情绪失控</a:t>
+                      </a:r>
+                      <a:endParaRPr lang="zh-CN" altLang="en-US" sz="1200" b="0" i="0" u="none" strike="noStrike">
+                        <a:solidFill>
+                          <a:srgbClr val="000000"/>
+                        </a:solidFill>
+                        <a:effectLst/>
+                        <a:latin typeface="+mn-lt"/>
+                        <a:ea typeface="等线" panose="02010600030101010101" pitchFamily="2" charset="-122"/>
+                      </a:endParaRPr>
+                    </a:p>
+                  </a:txBody>
+                  <a:tcPr marL="911" marR="911" marT="911" marB="0" anchor="ctr"/>
+                </a:tc>
+                <a:tc>
+                  <a:txBody>
+                    <a:bodyPr/>
+                    <a:lstStyle/>
+                    <a:p>
+                      <a:pPr algn="l" fontAlgn="ctr"/>
+                      <a:r>
+                        <a:rPr lang="zh-CN" altLang="en-US" sz="1200" u="none" strike="noStrike" dirty="0" smtClean="0">
+                          <a:effectLst/>
+                          <a:latin typeface="+mn-lt"/>
+                        </a:rPr>
+                        <a:t>小</a:t>
+                      </a:r>
+                      <a:r>
+                        <a:rPr lang="zh-CN" altLang="en-US" sz="1200" u="none" strike="noStrike" dirty="0">
+                          <a:effectLst/>
+                          <a:latin typeface="+mn-lt"/>
+                        </a:rPr>
+                        <a:t>星星（编号 </a:t>
+                      </a:r>
+                      <a:r>
+                        <a:rPr lang="en-US" altLang="zh-CN" sz="1200" u="none" strike="noStrike" dirty="0">
+                          <a:effectLst/>
+                          <a:latin typeface="+mn-lt"/>
+                        </a:rPr>
+                        <a:t>24</a:t>
+                      </a:r>
+                      <a:r>
+                        <a:rPr lang="zh-CN" altLang="en-US" sz="1200" u="none" strike="noStrike" dirty="0">
+                          <a:effectLst/>
+                          <a:latin typeface="+mn-lt"/>
+                        </a:rPr>
+                        <a:t>）</a:t>
+                      </a:r>
+                      <a:r>
+                        <a:rPr lang="zh-CN" altLang="en-US" sz="1200" u="none" strike="noStrike" dirty="0" smtClean="0">
+                          <a:effectLst/>
+                          <a:latin typeface="+mn-lt"/>
+                        </a:rPr>
+                        <a:t>、竖琴梦幻节奏版（编号 </a:t>
+                      </a:r>
+                      <a:r>
+                        <a:rPr lang="en-US" altLang="zh-CN" sz="1200" u="none" strike="noStrike" dirty="0" smtClean="0">
+                          <a:effectLst/>
+                          <a:latin typeface="+mn-lt"/>
+                        </a:rPr>
+                        <a:t>03</a:t>
+                      </a:r>
+                      <a:r>
+                        <a:rPr lang="zh-CN" altLang="en-US" sz="1200" u="none" strike="noStrike" dirty="0" smtClean="0">
+                          <a:effectLst/>
+                          <a:latin typeface="+mn-lt"/>
+                        </a:rPr>
+                        <a:t>）</a:t>
+                      </a:r>
+                      <a:endParaRPr lang="zh-CN" altLang="en-US" sz="1200" b="0" i="0" u="none" strike="noStrike" dirty="0">
+                        <a:solidFill>
+                          <a:srgbClr val="000000"/>
+                        </a:solidFill>
+                        <a:effectLst/>
+                        <a:latin typeface="+mn-lt"/>
+                        <a:ea typeface="等线" panose="02010600030101010101" pitchFamily="2" charset="-122"/>
+                      </a:endParaRPr>
+                    </a:p>
+                  </a:txBody>
+                  <a:tcPr marL="911" marR="911" marT="911" marB="0" anchor="ctr"/>
+                </a:tc>
+                <a:tc>
+                  <a:txBody>
+                    <a:bodyPr/>
+                    <a:lstStyle/>
+                    <a:p>
+                      <a:pPr algn="l" fontAlgn="ctr"/>
+                      <a:r>
+                        <a:rPr lang="zh-CN" altLang="en-US" sz="1200" u="none" strike="noStrike">
+                          <a:effectLst/>
+                          <a:latin typeface="+mn-lt"/>
+                        </a:rPr>
+                        <a:t>搭配紧抱疗法，带来安全感，缓解情绪失控</a:t>
+                      </a:r>
+                      <a:endParaRPr lang="zh-CN" altLang="en-US" sz="1200" b="0" i="0" u="none" strike="noStrike">
+                        <a:solidFill>
+                          <a:srgbClr val="000000"/>
+                        </a:solidFill>
+                        <a:effectLst/>
+                        <a:latin typeface="+mn-lt"/>
+                        <a:ea typeface="等线" panose="02010600030101010101" pitchFamily="2" charset="-122"/>
+                      </a:endParaRPr>
+                    </a:p>
+                  </a:txBody>
+                  <a:tcPr marL="911" marR="911" marT="911" marB="0" anchor="ctr"/>
+                </a:tc>
+                <a:tc>
+                  <a:txBody>
+                    <a:bodyPr/>
+                    <a:lstStyle/>
+                    <a:p>
+                      <a:pPr algn="l" fontAlgn="ctr"/>
+                      <a:r>
+                        <a:rPr lang="zh-CN" altLang="en-US" sz="1200" u="none" strike="noStrike">
+                          <a:effectLst/>
+                          <a:latin typeface="+mn-lt"/>
+                        </a:rPr>
+                        <a:t>“宝贝，听这熟悉的旋律，像妈妈的怀抱一样温暖。跟着音乐轻轻呼吸，不好的情绪会跟着音符飞走哦，你是安全的，我们陪着你。”</a:t>
+                      </a:r>
+                      <a:endParaRPr lang="zh-CN" altLang="en-US" sz="1200" b="0" i="0" u="none" strike="noStrike">
+                        <a:solidFill>
+                          <a:srgbClr val="000000"/>
+                        </a:solidFill>
+                        <a:effectLst/>
+                        <a:latin typeface="+mn-lt"/>
+                        <a:ea typeface="等线" panose="02010600030101010101" pitchFamily="2" charset="-122"/>
+                      </a:endParaRPr>
+                    </a:p>
+                  </a:txBody>
+                  <a:tcPr marL="911" marR="911" marT="911" marB="0" anchor="ctr"/>
+                </a:tc>
+                <a:extLst>
+                  <a:ext uri="{0D108BD9-81ED-4DB2-BD59-A6C34878D82A}">
+                    <a16:rowId xmlns:a16="http://schemas.microsoft.com/office/drawing/2014/main" val="3471228088"/>
+                  </a:ext>
+                </a:extLst>
+              </a:tr>
+              <a:tr h="776868">
+                <a:tc>
+                  <a:txBody>
+                    <a:bodyPr/>
+                    <a:lstStyle/>
+                    <a:p>
+                      <a:pPr algn="l" fontAlgn="ctr"/>
+                      <a:r>
+                        <a:rPr lang="zh-CN" altLang="en-US" sz="1200" u="none" strike="noStrike" dirty="0">
+                          <a:effectLst/>
+                          <a:latin typeface="+mn-lt"/>
+                        </a:rPr>
+                        <a:t>躯体疼痛、疼痛症状缓解</a:t>
+                      </a:r>
+                      <a:endParaRPr lang="zh-CN" altLang="en-US" sz="1200" b="0" i="0" u="none" strike="noStrike" dirty="0">
+                        <a:solidFill>
+                          <a:srgbClr val="000000"/>
+                        </a:solidFill>
+                        <a:effectLst/>
+                        <a:latin typeface="+mn-lt"/>
+                        <a:ea typeface="等线" panose="02010600030101010101" pitchFamily="2" charset="-122"/>
+                      </a:endParaRPr>
+                    </a:p>
+                  </a:txBody>
+                  <a:tcPr marL="911" marR="911" marT="911" marB="0" anchor="ctr"/>
+                </a:tc>
+                <a:tc>
+                  <a:txBody>
+                    <a:bodyPr/>
+                    <a:lstStyle/>
+                    <a:p>
+                      <a:pPr algn="l" fontAlgn="ctr"/>
+                      <a:r>
+                        <a:rPr lang="en-US" altLang="zh-CN" sz="1200" u="none" strike="noStrike">
+                          <a:effectLst/>
+                          <a:latin typeface="+mn-lt"/>
+                        </a:rPr>
+                        <a:t>Om </a:t>
+                      </a:r>
+                      <a:r>
+                        <a:rPr lang="zh-CN" altLang="en-US" sz="1200" u="none" strike="noStrike">
+                          <a:effectLst/>
+                          <a:latin typeface="+mn-lt"/>
+                        </a:rPr>
+                        <a:t>的冥想（编号 </a:t>
+                      </a:r>
+                      <a:r>
+                        <a:rPr lang="en-US" altLang="zh-CN" sz="1200" u="none" strike="noStrike">
+                          <a:effectLst/>
+                          <a:latin typeface="+mn-lt"/>
+                        </a:rPr>
+                        <a:t>6</a:t>
+                      </a:r>
+                      <a:r>
+                        <a:rPr lang="zh-CN" altLang="en-US" sz="1200" u="none" strike="noStrike">
+                          <a:effectLst/>
+                          <a:latin typeface="+mn-lt"/>
+                        </a:rPr>
+                        <a:t>）、云和山的彼端（光球未来）、墨西哥（编号 </a:t>
+                      </a:r>
+                      <a:r>
+                        <a:rPr lang="en-US" altLang="zh-CN" sz="1200" u="none" strike="noStrike">
+                          <a:effectLst/>
+                          <a:latin typeface="+mn-lt"/>
+                        </a:rPr>
+                        <a:t>76</a:t>
+                      </a:r>
+                      <a:r>
+                        <a:rPr lang="zh-CN" altLang="en-US" sz="1200" u="none" strike="noStrike">
+                          <a:effectLst/>
+                          <a:latin typeface="+mn-lt"/>
+                        </a:rPr>
+                        <a:t>）</a:t>
+                      </a:r>
+                      <a:endParaRPr lang="zh-CN" altLang="en-US" sz="1200" b="0" i="0" u="none" strike="noStrike">
+                        <a:solidFill>
+                          <a:srgbClr val="000000"/>
+                        </a:solidFill>
+                        <a:effectLst/>
+                        <a:latin typeface="+mn-lt"/>
+                        <a:ea typeface="等线" panose="02010600030101010101" pitchFamily="2" charset="-122"/>
+                      </a:endParaRPr>
+                    </a:p>
+                  </a:txBody>
+                  <a:tcPr marL="911" marR="911" marT="911" marB="0" anchor="ctr"/>
+                </a:tc>
+                <a:tc>
+                  <a:txBody>
+                    <a:bodyPr/>
+                    <a:lstStyle/>
+                    <a:p>
+                      <a:pPr algn="l" fontAlgn="ctr"/>
+                      <a:r>
+                        <a:rPr lang="zh-CN" altLang="en-US" sz="1200" u="none" strike="noStrike">
+                          <a:effectLst/>
+                          <a:latin typeface="+mn-lt"/>
+                        </a:rPr>
+                        <a:t>借助想象作用于疼痛部位，减轻躯体疼痛</a:t>
+                      </a:r>
+                      <a:endParaRPr lang="zh-CN" altLang="en-US" sz="1200" b="0" i="0" u="none" strike="noStrike">
+                        <a:solidFill>
+                          <a:srgbClr val="000000"/>
+                        </a:solidFill>
+                        <a:effectLst/>
+                        <a:latin typeface="+mn-lt"/>
+                        <a:ea typeface="等线" panose="02010600030101010101" pitchFamily="2" charset="-122"/>
+                      </a:endParaRPr>
+                    </a:p>
+                  </a:txBody>
+                  <a:tcPr marL="911" marR="911" marT="911" marB="0" anchor="ctr"/>
+                </a:tc>
+                <a:tc>
+                  <a:txBody>
+                    <a:bodyPr/>
+                    <a:lstStyle/>
+                    <a:p>
+                      <a:pPr algn="l" fontAlgn="ctr"/>
+                      <a:r>
+                        <a:rPr lang="zh-CN" altLang="en-US" sz="1200" u="none" strike="noStrike">
+                          <a:effectLst/>
+                          <a:latin typeface="+mn-lt"/>
+                        </a:rPr>
+                        <a:t>“将注意力放在疼痛的地方，想象音乐的声波正缓缓流向这里，包裹着疼痛，一点点将它融化、带走。每一次呼吸，都让疼痛减轻一分。”</a:t>
+                      </a:r>
+                      <a:endParaRPr lang="zh-CN" altLang="en-US" sz="1200" b="0" i="0" u="none" strike="noStrike">
+                        <a:solidFill>
+                          <a:srgbClr val="000000"/>
+                        </a:solidFill>
+                        <a:effectLst/>
+                        <a:latin typeface="+mn-lt"/>
+                        <a:ea typeface="等线" panose="02010600030101010101" pitchFamily="2" charset="-122"/>
+                      </a:endParaRPr>
+                    </a:p>
+                  </a:txBody>
+                  <a:tcPr marL="911" marR="911" marT="911" marB="0" anchor="ctr"/>
+                </a:tc>
+                <a:extLst>
+                  <a:ext uri="{0D108BD9-81ED-4DB2-BD59-A6C34878D82A}">
+                    <a16:rowId xmlns:a16="http://schemas.microsoft.com/office/drawing/2014/main" val="535888584"/>
+                  </a:ext>
+                </a:extLst>
+              </a:tr>
+              <a:tr h="787090">
+                <a:tc>
+                  <a:txBody>
+                    <a:bodyPr/>
+                    <a:lstStyle/>
+                    <a:p>
+                      <a:pPr algn="l" fontAlgn="ctr"/>
+                      <a:r>
+                        <a:rPr lang="zh-CN" altLang="en-US" sz="1200" u="none" strike="noStrike">
+                          <a:effectLst/>
+                          <a:latin typeface="+mn-lt"/>
+                        </a:rPr>
+                        <a:t>情绪积聚、焦虑缓解</a:t>
+                      </a:r>
+                      <a:endParaRPr lang="zh-CN" altLang="en-US" sz="1200" b="0" i="0" u="none" strike="noStrike">
+                        <a:solidFill>
+                          <a:srgbClr val="000000"/>
+                        </a:solidFill>
+                        <a:effectLst/>
+                        <a:latin typeface="+mn-lt"/>
+                        <a:ea typeface="等线" panose="02010600030101010101" pitchFamily="2" charset="-122"/>
+                      </a:endParaRPr>
+                    </a:p>
+                  </a:txBody>
+                  <a:tcPr marL="911" marR="911" marT="911" marB="0" anchor="ctr"/>
+                </a:tc>
+                <a:tc>
+                  <a:txBody>
+                    <a:bodyPr/>
+                    <a:lstStyle/>
+                    <a:p>
+                      <a:pPr algn="l" fontAlgn="ctr"/>
+                      <a:r>
+                        <a:rPr lang="zh-CN" altLang="en-US" sz="1200" u="none" strike="noStrike" dirty="0">
+                          <a:effectLst/>
+                          <a:latin typeface="+mn-lt"/>
+                        </a:rPr>
+                        <a:t>情感积聚 太多（编号 </a:t>
+                      </a:r>
+                      <a:r>
+                        <a:rPr lang="en-US" altLang="zh-CN" sz="1200" u="none" strike="noStrike" dirty="0">
+                          <a:effectLst/>
+                          <a:latin typeface="+mn-lt"/>
+                        </a:rPr>
+                        <a:t>501</a:t>
+                      </a:r>
+                      <a:r>
+                        <a:rPr lang="zh-CN" altLang="en-US" sz="1200" u="none" strike="noStrike" dirty="0">
+                          <a:effectLst/>
+                          <a:latin typeface="+mn-lt"/>
+                        </a:rPr>
+                        <a:t>）</a:t>
+                      </a:r>
+                      <a:endParaRPr lang="zh-CN" altLang="en-US" sz="1200" b="0" i="0" u="none" strike="noStrike" dirty="0">
+                        <a:solidFill>
+                          <a:srgbClr val="000000"/>
+                        </a:solidFill>
+                        <a:effectLst/>
+                        <a:latin typeface="+mn-lt"/>
+                        <a:ea typeface="等线" panose="02010600030101010101" pitchFamily="2" charset="-122"/>
+                      </a:endParaRPr>
+                    </a:p>
+                  </a:txBody>
+                  <a:tcPr marL="911" marR="911" marT="911" marB="0" anchor="ctr"/>
+                </a:tc>
+                <a:tc>
+                  <a:txBody>
+                    <a:bodyPr/>
+                    <a:lstStyle/>
+                    <a:p>
+                      <a:pPr algn="l" fontAlgn="ctr"/>
+                      <a:r>
+                        <a:rPr lang="zh-CN" altLang="en-US" sz="1200" u="none" strike="noStrike">
+                          <a:effectLst/>
+                          <a:latin typeface="+mn-lt"/>
+                        </a:rPr>
+                        <a:t>症状音乐化，释放积聚情绪，缓解焦虑</a:t>
+                      </a:r>
+                      <a:endParaRPr lang="zh-CN" altLang="en-US" sz="1200" b="0" i="0" u="none" strike="noStrike">
+                        <a:solidFill>
+                          <a:srgbClr val="000000"/>
+                        </a:solidFill>
+                        <a:effectLst/>
+                        <a:latin typeface="+mn-lt"/>
+                        <a:ea typeface="等线" panose="02010600030101010101" pitchFamily="2" charset="-122"/>
+                      </a:endParaRPr>
+                    </a:p>
+                  </a:txBody>
+                  <a:tcPr marL="911" marR="911" marT="911" marB="0" anchor="ctr"/>
+                </a:tc>
+                <a:tc>
+                  <a:txBody>
+                    <a:bodyPr/>
+                    <a:lstStyle/>
+                    <a:p>
+                      <a:pPr algn="l" fontAlgn="ctr"/>
+                      <a:r>
+                        <a:rPr lang="zh-CN" altLang="en-US" sz="1200" u="none" strike="noStrike">
+                          <a:effectLst/>
+                          <a:latin typeface="+mn-lt"/>
+                        </a:rPr>
+                        <a:t>“跟着音乐的节奏敲击穴位，感受身体里积压的情绪，正随着敲击和旋律一点点释放出来。允许情绪流动，你不需要压抑自己。”</a:t>
+                      </a:r>
+                      <a:endParaRPr lang="zh-CN" altLang="en-US" sz="1200" b="0" i="0" u="none" strike="noStrike">
+                        <a:solidFill>
+                          <a:srgbClr val="000000"/>
+                        </a:solidFill>
+                        <a:effectLst/>
+                        <a:latin typeface="+mn-lt"/>
+                        <a:ea typeface="等线" panose="02010600030101010101" pitchFamily="2" charset="-122"/>
+                      </a:endParaRPr>
+                    </a:p>
+                  </a:txBody>
+                  <a:tcPr marL="911" marR="911" marT="911" marB="0" anchor="ctr"/>
+                </a:tc>
+                <a:extLst>
+                  <a:ext uri="{0D108BD9-81ED-4DB2-BD59-A6C34878D82A}">
+                    <a16:rowId xmlns:a16="http://schemas.microsoft.com/office/drawing/2014/main" val="3750850613"/>
+                  </a:ext>
+                </a:extLst>
+              </a:tr>
+              <a:tr h="787090">
+                <a:tc>
+                  <a:txBody>
+                    <a:bodyPr/>
+                    <a:lstStyle/>
+                    <a:p>
+                      <a:pPr algn="l" fontAlgn="ctr"/>
+                      <a:r>
+                        <a:rPr lang="zh-CN" altLang="en-US" sz="1200" u="none" strike="noStrike">
+                          <a:effectLst/>
+                          <a:latin typeface="+mn-lt"/>
+                        </a:rPr>
+                        <a:t>提升自尊水平、补充能量</a:t>
+                      </a:r>
+                      <a:endParaRPr lang="zh-CN" altLang="en-US" sz="1200" b="0" i="0" u="none" strike="noStrike">
+                        <a:solidFill>
+                          <a:srgbClr val="000000"/>
+                        </a:solidFill>
+                        <a:effectLst/>
+                        <a:latin typeface="+mn-lt"/>
+                        <a:ea typeface="等线" panose="02010600030101010101" pitchFamily="2" charset="-122"/>
+                      </a:endParaRPr>
+                    </a:p>
+                  </a:txBody>
+                  <a:tcPr marL="911" marR="911" marT="911" marB="0" anchor="ctr"/>
+                </a:tc>
+                <a:tc>
+                  <a:txBody>
+                    <a:bodyPr/>
+                    <a:lstStyle/>
+                    <a:p>
+                      <a:pPr algn="l" fontAlgn="ctr"/>
+                      <a:r>
+                        <a:rPr lang="zh-CN" altLang="en-US" sz="1200" u="none" strike="noStrike" dirty="0">
+                          <a:effectLst/>
+                          <a:latin typeface="+mn-lt"/>
+                        </a:rPr>
+                        <a:t>自信 希望口哨（编号 </a:t>
+                      </a:r>
+                      <a:r>
+                        <a:rPr lang="en-US" altLang="zh-CN" sz="1200" u="none" strike="noStrike" dirty="0">
+                          <a:effectLst/>
+                          <a:latin typeface="+mn-lt"/>
+                        </a:rPr>
+                        <a:t>256</a:t>
+                      </a:r>
+                      <a:r>
+                        <a:rPr lang="zh-CN" altLang="en-US" sz="1200" u="none" strike="noStrike" dirty="0">
+                          <a:effectLst/>
+                          <a:latin typeface="+mn-lt"/>
+                        </a:rPr>
+                        <a:t>）、</a:t>
+                      </a:r>
+                      <a:r>
+                        <a:rPr lang="en-US" altLang="zh-CN" sz="1200" u="none" strike="noStrike" dirty="0">
+                          <a:effectLst/>
+                          <a:latin typeface="+mn-lt"/>
+                        </a:rPr>
+                        <a:t>Only </a:t>
+                      </a:r>
+                      <a:r>
+                        <a:rPr lang="en-US" altLang="zh-CN" sz="1200" u="none" strike="noStrike" dirty="0" err="1">
+                          <a:effectLst/>
+                          <a:latin typeface="+mn-lt"/>
+                        </a:rPr>
+                        <a:t>tyme</a:t>
+                      </a:r>
+                      <a:r>
+                        <a:rPr lang="zh-CN" altLang="en-US" sz="1200" u="none" strike="noStrike" dirty="0">
+                          <a:effectLst/>
+                          <a:latin typeface="+mn-lt"/>
+                        </a:rPr>
+                        <a:t>（编号 </a:t>
+                      </a:r>
+                      <a:r>
+                        <a:rPr lang="en-US" altLang="zh-CN" sz="1200" u="none" strike="noStrike" dirty="0">
+                          <a:effectLst/>
+                          <a:latin typeface="+mn-lt"/>
+                        </a:rPr>
+                        <a:t>19</a:t>
+                      </a:r>
+                      <a:r>
+                        <a:rPr lang="zh-CN" altLang="en-US" sz="1200" u="none" strike="noStrike" dirty="0">
+                          <a:effectLst/>
+                          <a:latin typeface="+mn-lt"/>
+                        </a:rPr>
+                        <a:t>）、</a:t>
+                      </a:r>
+                      <a:r>
+                        <a:rPr lang="en-US" altLang="zh-CN" sz="1200" u="none" strike="noStrike" dirty="0">
+                          <a:effectLst/>
+                          <a:latin typeface="+mn-lt"/>
+                        </a:rPr>
+                        <a:t>Stop</a:t>
+                      </a:r>
+                      <a:r>
+                        <a:rPr lang="zh-CN" altLang="en-US" sz="1200" u="none" strike="noStrike" dirty="0">
+                          <a:effectLst/>
+                          <a:latin typeface="+mn-lt"/>
+                        </a:rPr>
+                        <a:t>（编号 </a:t>
+                      </a:r>
+                      <a:r>
+                        <a:rPr lang="en-US" altLang="zh-CN" sz="1200" u="none" strike="noStrike" dirty="0">
+                          <a:effectLst/>
+                          <a:latin typeface="+mn-lt"/>
+                        </a:rPr>
+                        <a:t>180</a:t>
+                      </a:r>
+                      <a:r>
+                        <a:rPr lang="zh-CN" altLang="en-US" sz="1200" u="none" strike="noStrike" dirty="0">
+                          <a:effectLst/>
+                          <a:latin typeface="+mn-lt"/>
+                        </a:rPr>
+                        <a:t>）</a:t>
+                      </a:r>
+                      <a:endParaRPr lang="zh-CN" altLang="en-US" sz="1200" b="0" i="0" u="none" strike="noStrike" dirty="0">
+                        <a:solidFill>
+                          <a:srgbClr val="000000"/>
+                        </a:solidFill>
+                        <a:effectLst/>
+                        <a:latin typeface="+mn-lt"/>
+                        <a:ea typeface="等线" panose="02010600030101010101" pitchFamily="2" charset="-122"/>
+                      </a:endParaRPr>
+                    </a:p>
+                  </a:txBody>
+                  <a:tcPr marL="911" marR="911" marT="911" marB="0" anchor="ctr"/>
+                </a:tc>
+                <a:tc>
+                  <a:txBody>
+                    <a:bodyPr/>
+                    <a:lstStyle/>
+                    <a:p>
+                      <a:pPr algn="l" fontAlgn="ctr"/>
+                      <a:r>
+                        <a:rPr lang="zh-CN" altLang="en-US" sz="1200" u="none" strike="noStrike">
+                          <a:effectLst/>
+                          <a:latin typeface="+mn-lt"/>
+                        </a:rPr>
+                        <a:t>借助积极旋律，提升自尊，补充心理能量</a:t>
+                      </a:r>
+                      <a:endParaRPr lang="zh-CN" altLang="en-US" sz="1200" b="0" i="0" u="none" strike="noStrike">
+                        <a:solidFill>
+                          <a:srgbClr val="000000"/>
+                        </a:solidFill>
+                        <a:effectLst/>
+                        <a:latin typeface="+mn-lt"/>
+                        <a:ea typeface="等线" panose="02010600030101010101" pitchFamily="2" charset="-122"/>
+                      </a:endParaRPr>
+                    </a:p>
+                  </a:txBody>
+                  <a:tcPr marL="911" marR="911" marT="911" marB="0" anchor="ctr"/>
+                </a:tc>
+                <a:tc>
+                  <a:txBody>
+                    <a:bodyPr/>
+                    <a:lstStyle/>
+                    <a:p>
+                      <a:pPr algn="l" fontAlgn="ctr"/>
+                      <a:r>
+                        <a:rPr lang="zh-CN" altLang="en-US" sz="1200" u="none" strike="noStrike">
+                          <a:effectLst/>
+                          <a:latin typeface="+mn-lt"/>
+                        </a:rPr>
+                        <a:t>“听着这轻快的旋律，想象自己正变得越来越有力量。你值得被肯定，你有能力面对一切，你的内心充满阳光和希望。”</a:t>
+                      </a:r>
+                      <a:endParaRPr lang="zh-CN" altLang="en-US" sz="1200" b="0" i="0" u="none" strike="noStrike">
+                        <a:solidFill>
+                          <a:srgbClr val="000000"/>
+                        </a:solidFill>
+                        <a:effectLst/>
+                        <a:latin typeface="+mn-lt"/>
+                        <a:ea typeface="等线" panose="02010600030101010101" pitchFamily="2" charset="-122"/>
+                      </a:endParaRPr>
+                    </a:p>
+                  </a:txBody>
+                  <a:tcPr marL="911" marR="911" marT="911" marB="0" anchor="ctr"/>
+                </a:tc>
+                <a:extLst>
+                  <a:ext uri="{0D108BD9-81ED-4DB2-BD59-A6C34878D82A}">
+                    <a16:rowId xmlns:a16="http://schemas.microsoft.com/office/drawing/2014/main" val="3452576222"/>
+                  </a:ext>
+                </a:extLst>
+              </a:tr>
+              <a:tr h="807533">
+                <a:tc>
+                  <a:txBody>
+                    <a:bodyPr/>
+                    <a:lstStyle/>
+                    <a:p>
+                      <a:pPr algn="l" fontAlgn="ctr"/>
+                      <a:r>
+                        <a:rPr lang="zh-CN" altLang="en-US" sz="1200" u="none" strike="noStrike">
+                          <a:effectLst/>
+                          <a:latin typeface="+mn-lt"/>
+                        </a:rPr>
+                        <a:t>团队性格投射、自我内部关系探索</a:t>
+                      </a:r>
+                      <a:endParaRPr lang="zh-CN" altLang="en-US" sz="1200" b="0" i="0" u="none" strike="noStrike">
+                        <a:solidFill>
+                          <a:srgbClr val="000000"/>
+                        </a:solidFill>
+                        <a:effectLst/>
+                        <a:latin typeface="+mn-lt"/>
+                        <a:ea typeface="等线" panose="02010600030101010101" pitchFamily="2" charset="-122"/>
+                      </a:endParaRPr>
+                    </a:p>
+                  </a:txBody>
+                  <a:tcPr marL="911" marR="911" marT="911" marB="0" anchor="ctr"/>
+                </a:tc>
+                <a:tc>
+                  <a:txBody>
+                    <a:bodyPr/>
+                    <a:lstStyle/>
+                    <a:p>
+                      <a:pPr algn="l" fontAlgn="ctr"/>
+                      <a:r>
+                        <a:rPr lang="zh-CN" altLang="en-US" sz="1200" u="none" strike="noStrike">
+                          <a:effectLst/>
+                          <a:latin typeface="+mn-lt"/>
+                        </a:rPr>
+                        <a:t>彝族舞曲（编号 </a:t>
+                      </a:r>
+                      <a:r>
+                        <a:rPr lang="en-US" altLang="zh-CN" sz="1200" u="none" strike="noStrike">
+                          <a:effectLst/>
+                          <a:latin typeface="+mn-lt"/>
+                        </a:rPr>
+                        <a:t>31</a:t>
+                      </a:r>
+                      <a:r>
+                        <a:rPr lang="zh-CN" altLang="en-US" sz="1200" u="none" strike="noStrike">
+                          <a:effectLst/>
+                          <a:latin typeface="+mn-lt"/>
+                        </a:rPr>
+                        <a:t>）</a:t>
+                      </a:r>
+                      <a:endParaRPr lang="zh-CN" altLang="en-US" sz="1200" b="0" i="0" u="none" strike="noStrike">
+                        <a:solidFill>
+                          <a:srgbClr val="000000"/>
+                        </a:solidFill>
+                        <a:effectLst/>
+                        <a:latin typeface="+mn-lt"/>
+                        <a:ea typeface="等线" panose="02010600030101010101" pitchFamily="2" charset="-122"/>
+                      </a:endParaRPr>
+                    </a:p>
+                  </a:txBody>
+                  <a:tcPr marL="911" marR="911" marT="911" marB="0" anchor="ctr"/>
+                </a:tc>
+                <a:tc>
+                  <a:txBody>
+                    <a:bodyPr/>
+                    <a:lstStyle/>
+                    <a:p>
+                      <a:pPr algn="l" fontAlgn="ctr"/>
+                      <a:r>
+                        <a:rPr lang="zh-CN" altLang="en-US" sz="1200" u="none" strike="noStrike">
+                          <a:effectLst/>
+                          <a:latin typeface="+mn-lt"/>
+                        </a:rPr>
+                        <a:t>投射性格类型、行为倾向及核心情结，用于团队测试</a:t>
+                      </a:r>
+                      <a:endParaRPr lang="zh-CN" altLang="en-US" sz="1200" b="0" i="0" u="none" strike="noStrike">
+                        <a:solidFill>
+                          <a:srgbClr val="000000"/>
+                        </a:solidFill>
+                        <a:effectLst/>
+                        <a:latin typeface="+mn-lt"/>
+                        <a:ea typeface="等线" panose="02010600030101010101" pitchFamily="2" charset="-122"/>
+                      </a:endParaRPr>
+                    </a:p>
+                  </a:txBody>
+                  <a:tcPr marL="911" marR="911" marT="911" marB="0" anchor="ctr"/>
+                </a:tc>
+                <a:tc>
+                  <a:txBody>
+                    <a:bodyPr/>
+                    <a:lstStyle/>
+                    <a:p>
+                      <a:pPr algn="l" fontAlgn="ctr"/>
+                      <a:r>
+                        <a:rPr lang="zh-CN" altLang="en-US" sz="1200" u="none" strike="noStrike" dirty="0">
+                          <a:effectLst/>
+                          <a:latin typeface="+mn-lt"/>
+                        </a:rPr>
+                        <a:t>“认真聆听音乐里的每一种乐器声，感受哪一段旋律最能触动你。这就是你内心的声音，它在告诉你关于自己的特质和潜藏的力量。”</a:t>
+                      </a:r>
+                      <a:endParaRPr lang="zh-CN" altLang="en-US" sz="1200" b="0" i="0" u="none" strike="noStrike" dirty="0">
+                        <a:solidFill>
+                          <a:srgbClr val="000000"/>
+                        </a:solidFill>
+                        <a:effectLst/>
+                        <a:latin typeface="+mn-lt"/>
+                        <a:ea typeface="等线" panose="02010600030101010101" pitchFamily="2" charset="-122"/>
+                      </a:endParaRPr>
+                    </a:p>
+                  </a:txBody>
+                  <a:tcPr marL="911" marR="911" marT="911" marB="0" anchor="ctr"/>
+                </a:tc>
+                <a:extLst>
+                  <a:ext uri="{0D108BD9-81ED-4DB2-BD59-A6C34878D82A}">
+                    <a16:rowId xmlns:a16="http://schemas.microsoft.com/office/drawing/2014/main" val="1255115310"/>
+                  </a:ext>
+                </a:extLst>
+              </a:tr>
+            </a:tbl>
+          </a:graphicData>
+        </a:graphic>
+      </p:graphicFrame>
     </p:spTree>
     <p:extLst>
       <p:ext uri="{BB962C8B-B14F-4D97-AF65-F5344CB8AC3E}">
-        <p14:creationId xmlns:p14="http://schemas.microsoft.com/office/powerpoint/2010/main" val="2465694581"/>
+        <p14:creationId xmlns:p14="http://schemas.microsoft.com/office/powerpoint/2010/main" val="387099857"/>
       </p:ext>
     </p:extLst>
   </p:cSld>
   <p:clrMapOvr>
     <a:masterClrMapping/>
   </p:clrMapOvr>
+  <p:timing>
+    <p:tnLst>
+      <p:par>
+        <p:cTn id="1" dur="indefinite" restart="never" nodeType="tmRoot"/>
+      </p:par>
+    </p:tnLst>
+  </p:timing>
 </p:sld>
 </file>
 
@@ -19191,21 +20060,1182 @@
           <a:lstStyle/>
           <a:p>
             <a:r>
-              <a:rPr lang="en-US" altLang="zh-CN" sz="900" dirty="0"/>
+              <a:rPr lang="en-US" altLang="zh-CN" sz="4400" dirty="0"/>
               <a:t>EFT</a:t>
             </a:r>
             <a:r>
-              <a:rPr lang="zh-CN" altLang="en-US" sz="900" dirty="0"/>
-              <a:t>心理自助操的流程设计（</a:t>
-            </a:r>
-            <a:r>
-              <a:rPr lang="en-US" altLang="zh-CN" sz="900" dirty="0"/>
-              <a:t>4</a:t>
-            </a:r>
-            <a:r>
-              <a:rPr lang="zh-CN" altLang="en-US" sz="900" dirty="0"/>
+              <a:rPr lang="zh-CN" altLang="en-US" sz="4400" dirty="0"/>
+              <a:t>心理自助</a:t>
+            </a:r>
+            <a:r>
+              <a:rPr lang="zh-CN" altLang="en-US" sz="4400" dirty="0" smtClean="0"/>
+              <a:t>操音乐选择（</a:t>
+            </a:r>
+            <a:r>
+              <a:rPr lang="en-US" altLang="zh-CN" sz="4400" dirty="0" smtClean="0"/>
+              <a:t>7</a:t>
+            </a:r>
+            <a:r>
+              <a:rPr lang="zh-CN" altLang="en-US" sz="4400" dirty="0" smtClean="0"/>
               <a:t>）</a:t>
             </a:r>
+            <a:endParaRPr lang="zh-CN" altLang="en-US" sz="4400" dirty="0"/>
+          </a:p>
+        </p:txBody>
+      </p:sp>
+      <p:graphicFrame>
+        <p:nvGraphicFramePr>
+          <p:cNvPr id="3" name="表格 2"/>
+          <p:cNvGraphicFramePr>
+            <a:graphicFrameLocks noGrp="1"/>
+          </p:cNvGraphicFramePr>
+          <p:nvPr>
+            <p:extLst>
+              <p:ext uri="{D42A27DB-BD31-4B8C-83A1-F6EECF244321}">
+                <p14:modId xmlns:p14="http://schemas.microsoft.com/office/powerpoint/2010/main" val="2625207432"/>
+              </p:ext>
+            </p:extLst>
+          </p:nvPr>
+        </p:nvGraphicFramePr>
+        <p:xfrm>
+          <a:off x="521207" y="1599391"/>
+          <a:ext cx="11155680" cy="5132038"/>
+        </p:xfrm>
+        <a:graphic>
+          <a:graphicData uri="http://schemas.openxmlformats.org/drawingml/2006/table">
+            <a:tbl>
+              <a:tblPr>
+                <a:tableStyleId>{5C22544A-7EE6-4342-B048-85BDC9FD1C3A}</a:tableStyleId>
+              </a:tblPr>
+              <a:tblGrid>
+                <a:gridCol w="1462714">
+                  <a:extLst>
+                    <a:ext uri="{9D8B030D-6E8A-4147-A177-3AD203B41FA5}">
+                      <a16:colId xmlns:a16="http://schemas.microsoft.com/office/drawing/2014/main" val="2583086695"/>
+                    </a:ext>
+                  </a:extLst>
+                </a:gridCol>
+                <a:gridCol w="2530929">
+                  <a:extLst>
+                    <a:ext uri="{9D8B030D-6E8A-4147-A177-3AD203B41FA5}">
+                      <a16:colId xmlns:a16="http://schemas.microsoft.com/office/drawing/2014/main" val="2327420003"/>
+                    </a:ext>
+                  </a:extLst>
+                </a:gridCol>
+                <a:gridCol w="2147207">
+                  <a:extLst>
+                    <a:ext uri="{9D8B030D-6E8A-4147-A177-3AD203B41FA5}">
+                      <a16:colId xmlns:a16="http://schemas.microsoft.com/office/drawing/2014/main" val="1014711164"/>
+                    </a:ext>
+                  </a:extLst>
+                </a:gridCol>
+                <a:gridCol w="5014830">
+                  <a:extLst>
+                    <a:ext uri="{9D8B030D-6E8A-4147-A177-3AD203B41FA5}">
+                      <a16:colId xmlns:a16="http://schemas.microsoft.com/office/drawing/2014/main" val="1751456263"/>
+                    </a:ext>
+                  </a:extLst>
+                </a:gridCol>
+              </a:tblGrid>
+              <a:tr h="523323">
+                <a:tc>
+                  <a:txBody>
+                    <a:bodyPr/>
+                    <a:lstStyle/>
+                    <a:p>
+                      <a:pPr algn="ctr" fontAlgn="ctr"/>
+                      <a:r>
+                        <a:rPr lang="zh-CN" altLang="en-US" sz="1200" u="none" strike="noStrike">
+                          <a:effectLst/>
+                          <a:latin typeface="+mn-lt"/>
+                        </a:rPr>
+                        <a:t>对应情绪 </a:t>
+                      </a:r>
+                      <a:r>
+                        <a:rPr lang="en-US" altLang="zh-CN" sz="1200" u="none" strike="noStrike">
+                          <a:effectLst/>
+                          <a:latin typeface="+mn-lt"/>
+                        </a:rPr>
+                        <a:t>/ </a:t>
+                      </a:r>
+                      <a:r>
+                        <a:rPr lang="zh-CN" altLang="en-US" sz="1200" u="none" strike="noStrike">
+                          <a:effectLst/>
+                          <a:latin typeface="+mn-lt"/>
+                        </a:rPr>
+                        <a:t>情况</a:t>
+                      </a:r>
+                      <a:endParaRPr lang="zh-CN" altLang="en-US" sz="1200" b="1" i="0" u="none" strike="noStrike">
+                        <a:solidFill>
+                          <a:srgbClr val="000000"/>
+                        </a:solidFill>
+                        <a:effectLst/>
+                        <a:latin typeface="+mn-lt"/>
+                        <a:ea typeface="等线" panose="02010600030101010101" pitchFamily="2" charset="-122"/>
+                      </a:endParaRPr>
+                    </a:p>
+                  </a:txBody>
+                  <a:tcPr marL="5756" marR="5756" marT="5756" marB="0" anchor="ctr"/>
+                </a:tc>
+                <a:tc>
+                  <a:txBody>
+                    <a:bodyPr/>
+                    <a:lstStyle/>
+                    <a:p>
+                      <a:pPr algn="ctr" fontAlgn="ctr"/>
+                      <a:r>
+                        <a:rPr lang="zh-CN" altLang="en-US" sz="1200" u="none" strike="noStrike">
+                          <a:effectLst/>
+                          <a:latin typeface="+mn-lt"/>
+                        </a:rPr>
+                        <a:t>音乐</a:t>
+                      </a:r>
+                      <a:endParaRPr lang="zh-CN" altLang="en-US" sz="1200" b="1" i="0" u="none" strike="noStrike">
+                        <a:solidFill>
+                          <a:srgbClr val="000000"/>
+                        </a:solidFill>
+                        <a:effectLst/>
+                        <a:latin typeface="+mn-lt"/>
+                        <a:ea typeface="等线" panose="02010600030101010101" pitchFamily="2" charset="-122"/>
+                      </a:endParaRPr>
+                    </a:p>
+                  </a:txBody>
+                  <a:tcPr marL="5756" marR="5756" marT="5756" marB="0" anchor="ctr"/>
+                </a:tc>
+                <a:tc>
+                  <a:txBody>
+                    <a:bodyPr/>
+                    <a:lstStyle/>
+                    <a:p>
+                      <a:pPr algn="ctr" fontAlgn="ctr"/>
+                      <a:r>
+                        <a:rPr lang="zh-CN" altLang="en-US" sz="1200" u="none" strike="noStrike">
+                          <a:effectLst/>
+                          <a:latin typeface="+mn-lt"/>
+                        </a:rPr>
+                        <a:t>具体作用</a:t>
+                      </a:r>
+                      <a:endParaRPr lang="zh-CN" altLang="en-US" sz="1200" b="1" i="0" u="none" strike="noStrike">
+                        <a:solidFill>
+                          <a:srgbClr val="000000"/>
+                        </a:solidFill>
+                        <a:effectLst/>
+                        <a:latin typeface="+mn-lt"/>
+                        <a:ea typeface="等线" panose="02010600030101010101" pitchFamily="2" charset="-122"/>
+                      </a:endParaRPr>
+                    </a:p>
+                  </a:txBody>
+                  <a:tcPr marL="5756" marR="5756" marT="5756" marB="0" anchor="ctr"/>
+                </a:tc>
+                <a:tc>
+                  <a:txBody>
+                    <a:bodyPr/>
+                    <a:lstStyle/>
+                    <a:p>
+                      <a:pPr algn="ctr" fontAlgn="ctr"/>
+                      <a:r>
+                        <a:rPr lang="zh-CN" altLang="en-US" sz="1200" u="none" strike="noStrike">
+                          <a:effectLst/>
+                          <a:latin typeface="+mn-lt"/>
+                        </a:rPr>
+                        <a:t>配套引导语</a:t>
+                      </a:r>
+                      <a:endParaRPr lang="zh-CN" altLang="en-US" sz="1200" b="1" i="0" u="none" strike="noStrike">
+                        <a:solidFill>
+                          <a:srgbClr val="000000"/>
+                        </a:solidFill>
+                        <a:effectLst/>
+                        <a:latin typeface="+mn-lt"/>
+                        <a:ea typeface="等线" panose="02010600030101010101" pitchFamily="2" charset="-122"/>
+                      </a:endParaRPr>
+                    </a:p>
+                  </a:txBody>
+                  <a:tcPr marL="5756" marR="5756" marT="5756" marB="0" anchor="ctr"/>
+                </a:tc>
+                <a:extLst>
+                  <a:ext uri="{0D108BD9-81ED-4DB2-BD59-A6C34878D82A}">
+                    <a16:rowId xmlns:a16="http://schemas.microsoft.com/office/drawing/2014/main" val="3046197468"/>
+                  </a:ext>
+                </a:extLst>
+              </a:tr>
+              <a:tr h="677978">
+                <a:tc>
+                  <a:txBody>
+                    <a:bodyPr/>
+                    <a:lstStyle/>
+                    <a:p>
+                      <a:pPr algn="l" fontAlgn="ctr"/>
+                      <a:r>
+                        <a:rPr lang="zh-CN" altLang="en-US" sz="1200" u="none" strike="noStrike">
+                          <a:effectLst/>
+                          <a:latin typeface="+mn-lt"/>
+                        </a:rPr>
+                        <a:t>释梦、潜意识探索、婚恋相关心理探索</a:t>
+                      </a:r>
+                      <a:endParaRPr lang="zh-CN" altLang="en-US" sz="1200" b="0" i="0" u="none" strike="noStrike">
+                        <a:solidFill>
+                          <a:srgbClr val="000000"/>
+                        </a:solidFill>
+                        <a:effectLst/>
+                        <a:latin typeface="+mn-lt"/>
+                        <a:ea typeface="等线" panose="02010600030101010101" pitchFamily="2" charset="-122"/>
+                      </a:endParaRPr>
+                    </a:p>
+                  </a:txBody>
+                  <a:tcPr marL="5756" marR="5756" marT="5756" marB="0" anchor="ctr"/>
+                </a:tc>
+                <a:tc>
+                  <a:txBody>
+                    <a:bodyPr/>
+                    <a:lstStyle/>
+                    <a:p>
+                      <a:pPr algn="l" fontAlgn="ctr"/>
+                      <a:r>
+                        <a:rPr lang="zh-CN" altLang="en-US" sz="1200" u="none" strike="noStrike">
+                          <a:effectLst/>
+                          <a:latin typeface="+mn-lt"/>
+                        </a:rPr>
+                        <a:t>顺水而下（编号 </a:t>
+                      </a:r>
+                      <a:r>
+                        <a:rPr lang="en-US" altLang="zh-CN" sz="1200" u="none" strike="noStrike">
+                          <a:effectLst/>
+                          <a:latin typeface="+mn-lt"/>
+                        </a:rPr>
+                        <a:t>171</a:t>
+                      </a:r>
+                      <a:r>
+                        <a:rPr lang="zh-CN" altLang="en-US" sz="1200" u="none" strike="noStrike">
+                          <a:effectLst/>
+                          <a:latin typeface="+mn-lt"/>
+                        </a:rPr>
+                        <a:t>）、大峡谷（编号 </a:t>
+                      </a:r>
+                      <a:r>
+                        <a:rPr lang="en-US" altLang="zh-CN" sz="1200" u="none" strike="noStrike">
+                          <a:effectLst/>
+                          <a:latin typeface="+mn-lt"/>
+                        </a:rPr>
+                        <a:t>47</a:t>
+                      </a:r>
+                      <a:r>
+                        <a:rPr lang="zh-CN" altLang="en-US" sz="1200" u="none" strike="noStrike">
+                          <a:effectLst/>
+                          <a:latin typeface="+mn-lt"/>
+                        </a:rPr>
+                        <a:t>）、</a:t>
+                      </a:r>
+                      <a:r>
+                        <a:rPr lang="en-US" altLang="zh-CN" sz="1200" u="none" strike="noStrike">
+                          <a:effectLst/>
+                          <a:latin typeface="+mn-lt"/>
+                        </a:rPr>
+                        <a:t>Mercy</a:t>
+                      </a:r>
+                      <a:r>
+                        <a:rPr lang="zh-CN" altLang="en-US" sz="1200" u="none" strike="noStrike">
+                          <a:effectLst/>
+                          <a:latin typeface="+mn-lt"/>
+                        </a:rPr>
+                        <a:t>（编号 </a:t>
+                      </a:r>
+                      <a:r>
+                        <a:rPr lang="en-US" altLang="zh-CN" sz="1200" u="none" strike="noStrike">
+                          <a:effectLst/>
+                          <a:latin typeface="+mn-lt"/>
+                        </a:rPr>
+                        <a:t>36</a:t>
+                      </a:r>
+                      <a:r>
+                        <a:rPr lang="zh-CN" altLang="en-US" sz="1200" u="none" strike="noStrike">
+                          <a:effectLst/>
+                          <a:latin typeface="+mn-lt"/>
+                        </a:rPr>
+                        <a:t>）</a:t>
+                      </a:r>
+                      <a:endParaRPr lang="zh-CN" altLang="en-US" sz="1200" b="0" i="0" u="none" strike="noStrike">
+                        <a:solidFill>
+                          <a:srgbClr val="000000"/>
+                        </a:solidFill>
+                        <a:effectLst/>
+                        <a:latin typeface="+mn-lt"/>
+                        <a:ea typeface="等线" panose="02010600030101010101" pitchFamily="2" charset="-122"/>
+                      </a:endParaRPr>
+                    </a:p>
+                  </a:txBody>
+                  <a:tcPr marL="5756" marR="5756" marT="5756" marB="0" anchor="ctr"/>
+                </a:tc>
+                <a:tc>
+                  <a:txBody>
+                    <a:bodyPr/>
+                    <a:lstStyle/>
+                    <a:p>
+                      <a:pPr algn="l" fontAlgn="ctr"/>
+                      <a:r>
+                        <a:rPr lang="zh-CN" altLang="en-US" sz="1200" u="none" strike="noStrike" dirty="0">
+                          <a:effectLst/>
+                          <a:latin typeface="+mn-lt"/>
+                        </a:rPr>
+                        <a:t>助力重造梦境、探索潜意识，探索婚恋关系走向</a:t>
+                      </a:r>
+                      <a:endParaRPr lang="zh-CN" altLang="en-US" sz="1200" b="0" i="0" u="none" strike="noStrike" dirty="0">
+                        <a:solidFill>
+                          <a:srgbClr val="000000"/>
+                        </a:solidFill>
+                        <a:effectLst/>
+                        <a:latin typeface="+mn-lt"/>
+                        <a:ea typeface="等线" panose="02010600030101010101" pitchFamily="2" charset="-122"/>
+                      </a:endParaRPr>
+                    </a:p>
+                  </a:txBody>
+                  <a:tcPr marL="5756" marR="5756" marT="5756" marB="0" anchor="ctr"/>
+                </a:tc>
+                <a:tc>
+                  <a:txBody>
+                    <a:bodyPr/>
+                    <a:lstStyle/>
+                    <a:p>
+                      <a:pPr algn="l" fontAlgn="ctr"/>
+                      <a:r>
+                        <a:rPr lang="zh-CN" altLang="en-US" sz="1200" u="none" strike="noStrike">
+                          <a:effectLst/>
+                          <a:latin typeface="+mn-lt"/>
+                        </a:rPr>
+                        <a:t>“让音乐带你回到那个梦境（那段关系）里，跟随旋律自由地想象。不需要评判，只需要感受，潜意识正在通过音乐向你传递答案。”</a:t>
+                      </a:r>
+                      <a:endParaRPr lang="zh-CN" altLang="en-US" sz="1200" b="0" i="0" u="none" strike="noStrike">
+                        <a:solidFill>
+                          <a:srgbClr val="000000"/>
+                        </a:solidFill>
+                        <a:effectLst/>
+                        <a:latin typeface="+mn-lt"/>
+                        <a:ea typeface="等线" panose="02010600030101010101" pitchFamily="2" charset="-122"/>
+                      </a:endParaRPr>
+                    </a:p>
+                  </a:txBody>
+                  <a:tcPr marL="5756" marR="5756" marT="5756" marB="0" anchor="ctr"/>
+                </a:tc>
+                <a:extLst>
+                  <a:ext uri="{0D108BD9-81ED-4DB2-BD59-A6C34878D82A}">
+                    <a16:rowId xmlns:a16="http://schemas.microsoft.com/office/drawing/2014/main" val="4093069813"/>
+                  </a:ext>
+                </a:extLst>
+              </a:tr>
+              <a:tr h="677978">
+                <a:tc>
+                  <a:txBody>
+                    <a:bodyPr/>
+                    <a:lstStyle/>
+                    <a:p>
+                      <a:pPr algn="l" fontAlgn="ctr"/>
+                      <a:r>
+                        <a:rPr lang="zh-CN" altLang="en-US" sz="1200" u="none" strike="noStrike" dirty="0">
+                          <a:effectLst/>
+                          <a:latin typeface="+mn-lt"/>
+                        </a:rPr>
+                        <a:t>抑郁情绪调节</a:t>
+                      </a:r>
+                      <a:endParaRPr lang="zh-CN" altLang="en-US" sz="1200" b="0" i="0" u="none" strike="noStrike" dirty="0">
+                        <a:solidFill>
+                          <a:srgbClr val="000000"/>
+                        </a:solidFill>
+                        <a:effectLst/>
+                        <a:latin typeface="+mn-lt"/>
+                        <a:ea typeface="等线" panose="02010600030101010101" pitchFamily="2" charset="-122"/>
+                      </a:endParaRPr>
+                    </a:p>
+                  </a:txBody>
+                  <a:tcPr marL="5756" marR="5756" marT="5756" marB="0" anchor="ctr"/>
+                </a:tc>
+                <a:tc>
+                  <a:txBody>
+                    <a:bodyPr/>
+                    <a:lstStyle/>
+                    <a:p>
+                      <a:pPr algn="l" fontAlgn="ctr"/>
+                      <a:r>
+                        <a:rPr lang="en-US" sz="1200" u="none" strike="noStrike">
+                          <a:effectLst/>
+                          <a:latin typeface="+mn-lt"/>
+                        </a:rPr>
+                        <a:t>Kiss（</a:t>
+                      </a:r>
+                      <a:r>
+                        <a:rPr lang="zh-CN" altLang="en-US" sz="1200" u="none" strike="noStrike">
+                          <a:effectLst/>
+                          <a:latin typeface="+mn-lt"/>
+                        </a:rPr>
+                        <a:t>编号 </a:t>
+                      </a:r>
+                      <a:r>
+                        <a:rPr lang="en-US" altLang="zh-CN" sz="1200" u="none" strike="noStrike">
+                          <a:effectLst/>
+                          <a:latin typeface="+mn-lt"/>
+                        </a:rPr>
+                        <a:t>512</a:t>
+                      </a:r>
+                      <a:r>
+                        <a:rPr lang="zh-CN" altLang="en-US" sz="1200" u="none" strike="noStrike">
+                          <a:effectLst/>
+                          <a:latin typeface="+mn-lt"/>
+                        </a:rPr>
+                        <a:t>）</a:t>
+                      </a:r>
+                      <a:endParaRPr lang="zh-CN" altLang="en-US" sz="1200" b="0" i="0" u="none" strike="noStrike">
+                        <a:solidFill>
+                          <a:srgbClr val="000000"/>
+                        </a:solidFill>
+                        <a:effectLst/>
+                        <a:latin typeface="+mn-lt"/>
+                        <a:ea typeface="等线" panose="02010600030101010101" pitchFamily="2" charset="-122"/>
+                      </a:endParaRPr>
+                    </a:p>
+                  </a:txBody>
+                  <a:tcPr marL="5756" marR="5756" marT="5756" marB="0" anchor="ctr"/>
+                </a:tc>
+                <a:tc>
+                  <a:txBody>
+                    <a:bodyPr/>
+                    <a:lstStyle/>
+                    <a:p>
+                      <a:pPr algn="l" fontAlgn="ctr"/>
+                      <a:r>
+                        <a:rPr lang="zh-CN" altLang="en-US" sz="1200" u="none" strike="noStrike">
+                          <a:effectLst/>
+                          <a:latin typeface="+mn-lt"/>
+                        </a:rPr>
+                        <a:t>搭配旋律线技术，调节抑郁情绪</a:t>
+                      </a:r>
+                      <a:endParaRPr lang="zh-CN" altLang="en-US" sz="1200" b="0" i="0" u="none" strike="noStrike">
+                        <a:solidFill>
+                          <a:srgbClr val="000000"/>
+                        </a:solidFill>
+                        <a:effectLst/>
+                        <a:latin typeface="+mn-lt"/>
+                        <a:ea typeface="等线" panose="02010600030101010101" pitchFamily="2" charset="-122"/>
+                      </a:endParaRPr>
+                    </a:p>
+                  </a:txBody>
+                  <a:tcPr marL="5756" marR="5756" marT="5756" marB="0" anchor="ctr"/>
+                </a:tc>
+                <a:tc>
+                  <a:txBody>
+                    <a:bodyPr/>
+                    <a:lstStyle/>
+                    <a:p>
+                      <a:pPr algn="l" fontAlgn="ctr"/>
+                      <a:r>
+                        <a:rPr lang="zh-CN" altLang="en-US" sz="1200" u="none" strike="noStrike">
+                          <a:effectLst/>
+                          <a:latin typeface="+mn-lt"/>
+                        </a:rPr>
+                        <a:t>“现在，跟着音乐的旋律，用手在纸上画出它的线条。感受旋律的起伏，就像你的情绪在流动。每一笔，都在带走低落，留下轻盈。”</a:t>
+                      </a:r>
+                      <a:endParaRPr lang="zh-CN" altLang="en-US" sz="1200" b="0" i="0" u="none" strike="noStrike">
+                        <a:solidFill>
+                          <a:srgbClr val="000000"/>
+                        </a:solidFill>
+                        <a:effectLst/>
+                        <a:latin typeface="+mn-lt"/>
+                        <a:ea typeface="等线" panose="02010600030101010101" pitchFamily="2" charset="-122"/>
+                      </a:endParaRPr>
+                    </a:p>
+                  </a:txBody>
+                  <a:tcPr marL="5756" marR="5756" marT="5756" marB="0" anchor="ctr"/>
+                </a:tc>
+                <a:extLst>
+                  <a:ext uri="{0D108BD9-81ED-4DB2-BD59-A6C34878D82A}">
+                    <a16:rowId xmlns:a16="http://schemas.microsoft.com/office/drawing/2014/main" val="664482023"/>
+                  </a:ext>
+                </a:extLst>
+              </a:tr>
+              <a:tr h="766759">
+                <a:tc>
+                  <a:txBody>
+                    <a:bodyPr/>
+                    <a:lstStyle/>
+                    <a:p>
+                      <a:pPr algn="l" fontAlgn="ctr"/>
+                      <a:r>
+                        <a:rPr lang="zh-CN" altLang="en-US" sz="1200" u="none" strike="noStrike">
+                          <a:effectLst/>
+                          <a:latin typeface="+mn-lt"/>
+                        </a:rPr>
+                        <a:t>焦虑情绪调节</a:t>
+                      </a:r>
+                      <a:endParaRPr lang="zh-CN" altLang="en-US" sz="1200" b="0" i="0" u="none" strike="noStrike">
+                        <a:solidFill>
+                          <a:srgbClr val="000000"/>
+                        </a:solidFill>
+                        <a:effectLst/>
+                        <a:latin typeface="+mn-lt"/>
+                        <a:ea typeface="等线" panose="02010600030101010101" pitchFamily="2" charset="-122"/>
+                      </a:endParaRPr>
+                    </a:p>
+                  </a:txBody>
+                  <a:tcPr marL="5756" marR="5756" marT="5756" marB="0" anchor="ctr"/>
+                </a:tc>
+                <a:tc>
+                  <a:txBody>
+                    <a:bodyPr/>
+                    <a:lstStyle/>
+                    <a:p>
+                      <a:pPr algn="l" fontAlgn="ctr"/>
+                      <a:r>
+                        <a:rPr lang="en-US" altLang="zh-CN" sz="1200" u="none" strike="noStrike" dirty="0">
+                          <a:effectLst/>
+                          <a:latin typeface="+mn-lt"/>
+                        </a:rPr>
+                        <a:t>singing</a:t>
+                      </a:r>
+                      <a:r>
+                        <a:rPr lang="zh-CN" altLang="en-US" sz="1200" u="none" strike="noStrike" dirty="0">
+                          <a:effectLst/>
+                          <a:latin typeface="+mn-lt"/>
+                        </a:rPr>
+                        <a:t>（编号 </a:t>
+                      </a:r>
+                      <a:r>
+                        <a:rPr lang="en-US" altLang="zh-CN" sz="1200" u="none" strike="noStrike" dirty="0">
+                          <a:effectLst/>
+                          <a:latin typeface="+mn-lt"/>
+                        </a:rPr>
+                        <a:t>60</a:t>
+                      </a:r>
+                      <a:r>
+                        <a:rPr lang="zh-CN" altLang="en-US" sz="1200" u="none" strike="noStrike" dirty="0">
+                          <a:effectLst/>
+                          <a:latin typeface="+mn-lt"/>
+                        </a:rPr>
+                        <a:t>）、沉浸（编号 </a:t>
+                      </a:r>
+                      <a:r>
+                        <a:rPr lang="en-US" altLang="zh-CN" sz="1200" u="none" strike="noStrike" dirty="0">
+                          <a:effectLst/>
+                          <a:latin typeface="+mn-lt"/>
+                        </a:rPr>
+                        <a:t>358</a:t>
+                      </a:r>
+                      <a:r>
+                        <a:rPr lang="zh-CN" altLang="en-US" sz="1200" u="none" strike="noStrike" dirty="0">
+                          <a:effectLst/>
+                          <a:latin typeface="+mn-lt"/>
+                        </a:rPr>
+                        <a:t>）</a:t>
+                      </a:r>
+                      <a:endParaRPr lang="zh-CN" altLang="en-US" sz="1200" b="0" i="0" u="none" strike="noStrike" dirty="0">
+                        <a:solidFill>
+                          <a:srgbClr val="000000"/>
+                        </a:solidFill>
+                        <a:effectLst/>
+                        <a:latin typeface="+mn-lt"/>
+                        <a:ea typeface="等线" panose="02010600030101010101" pitchFamily="2" charset="-122"/>
+                      </a:endParaRPr>
+                    </a:p>
+                  </a:txBody>
+                  <a:tcPr marL="5756" marR="5756" marT="5756" marB="0" anchor="ctr"/>
+                </a:tc>
+                <a:tc>
+                  <a:txBody>
+                    <a:bodyPr/>
+                    <a:lstStyle/>
+                    <a:p>
+                      <a:pPr algn="l" fontAlgn="ctr"/>
+                      <a:r>
+                        <a:rPr lang="zh-CN" altLang="en-US" sz="1200" u="none" strike="noStrike">
+                          <a:effectLst/>
+                          <a:latin typeface="+mn-lt"/>
+                        </a:rPr>
+                        <a:t>搭配旋律线技术，转移注意力，缓解焦虑</a:t>
+                      </a:r>
+                      <a:endParaRPr lang="zh-CN" altLang="en-US" sz="1200" b="0" i="0" u="none" strike="noStrike">
+                        <a:solidFill>
+                          <a:srgbClr val="000000"/>
+                        </a:solidFill>
+                        <a:effectLst/>
+                        <a:latin typeface="+mn-lt"/>
+                        <a:ea typeface="等线" panose="02010600030101010101" pitchFamily="2" charset="-122"/>
+                      </a:endParaRPr>
+                    </a:p>
+                  </a:txBody>
+                  <a:tcPr marL="5756" marR="5756" marT="5756" marB="0" anchor="ctr"/>
+                </a:tc>
+                <a:tc>
+                  <a:txBody>
+                    <a:bodyPr/>
+                    <a:lstStyle/>
+                    <a:p>
+                      <a:pPr algn="l" fontAlgn="ctr"/>
+                      <a:r>
+                        <a:rPr lang="zh-CN" altLang="en-US" sz="1200" u="none" strike="noStrike">
+                          <a:effectLst/>
+                          <a:latin typeface="+mn-lt"/>
+                        </a:rPr>
+                        <a:t>“专注于音乐的旋律，跟着它的节奏画出线条。把所有的焦虑都放在这线条里，随着音乐的推进，焦虑正在慢慢消散，你越来越平静。”</a:t>
+                      </a:r>
+                      <a:endParaRPr lang="zh-CN" altLang="en-US" sz="1200" b="0" i="0" u="none" strike="noStrike">
+                        <a:solidFill>
+                          <a:srgbClr val="000000"/>
+                        </a:solidFill>
+                        <a:effectLst/>
+                        <a:latin typeface="+mn-lt"/>
+                        <a:ea typeface="等线" panose="02010600030101010101" pitchFamily="2" charset="-122"/>
+                      </a:endParaRPr>
+                    </a:p>
+                  </a:txBody>
+                  <a:tcPr marL="5756" marR="5756" marT="5756" marB="0" anchor="ctr"/>
+                </a:tc>
+                <a:extLst>
+                  <a:ext uri="{0D108BD9-81ED-4DB2-BD59-A6C34878D82A}">
+                    <a16:rowId xmlns:a16="http://schemas.microsoft.com/office/drawing/2014/main" val="3649795346"/>
+                  </a:ext>
+                </a:extLst>
+              </a:tr>
+              <a:tr h="766416">
+                <a:tc>
+                  <a:txBody>
+                    <a:bodyPr/>
+                    <a:lstStyle/>
+                    <a:p>
+                      <a:pPr algn="l" fontAlgn="ctr"/>
+                      <a:r>
+                        <a:rPr lang="zh-CN" altLang="en-US" sz="1200" u="none" strike="noStrike">
+                          <a:effectLst/>
+                          <a:latin typeface="+mn-lt"/>
+                        </a:rPr>
+                        <a:t>注意力训练、情绪调节、知识提取训练</a:t>
+                      </a:r>
+                      <a:endParaRPr lang="zh-CN" altLang="en-US" sz="1200" b="0" i="0" u="none" strike="noStrike">
+                        <a:solidFill>
+                          <a:srgbClr val="000000"/>
+                        </a:solidFill>
+                        <a:effectLst/>
+                        <a:latin typeface="+mn-lt"/>
+                        <a:ea typeface="等线" panose="02010600030101010101" pitchFamily="2" charset="-122"/>
+                      </a:endParaRPr>
+                    </a:p>
+                  </a:txBody>
+                  <a:tcPr marL="5756" marR="5756" marT="5756" marB="0" anchor="ctr"/>
+                </a:tc>
+                <a:tc>
+                  <a:txBody>
+                    <a:bodyPr/>
+                    <a:lstStyle/>
+                    <a:p>
+                      <a:pPr algn="l" fontAlgn="ctr"/>
+                      <a:r>
+                        <a:rPr lang="en-US" altLang="zh-CN" sz="1200" u="none" strike="noStrike" dirty="0">
+                          <a:effectLst/>
+                          <a:latin typeface="+mn-lt"/>
+                        </a:rPr>
+                        <a:t>Robin An Canon</a:t>
+                      </a:r>
+                      <a:r>
+                        <a:rPr lang="zh-CN" altLang="en-US" sz="1200" u="none" strike="noStrike" dirty="0">
+                          <a:effectLst/>
+                          <a:latin typeface="+mn-lt"/>
+                        </a:rPr>
+                        <a:t>（编号 </a:t>
+                      </a:r>
+                      <a:r>
+                        <a:rPr lang="en-US" altLang="zh-CN" sz="1200" u="none" strike="noStrike" dirty="0">
+                          <a:effectLst/>
+                          <a:latin typeface="+mn-lt"/>
+                        </a:rPr>
+                        <a:t>12</a:t>
+                      </a:r>
+                      <a:r>
+                        <a:rPr lang="zh-CN" altLang="en-US" sz="1200" u="none" strike="noStrike" dirty="0">
+                          <a:effectLst/>
+                          <a:latin typeface="+mn-lt"/>
+                        </a:rPr>
+                        <a:t>）、小步舞曲（编号 </a:t>
+                      </a:r>
+                      <a:r>
+                        <a:rPr lang="en-US" altLang="zh-CN" sz="1200" u="none" strike="noStrike" dirty="0">
+                          <a:effectLst/>
+                          <a:latin typeface="+mn-lt"/>
+                        </a:rPr>
+                        <a:t>2</a:t>
+                      </a:r>
+                      <a:r>
+                        <a:rPr lang="zh-CN" altLang="en-US" sz="1200" u="none" strike="noStrike" dirty="0">
+                          <a:effectLst/>
+                          <a:latin typeface="+mn-lt"/>
+                        </a:rPr>
+                        <a:t>）、手动跟随守候（编号 </a:t>
+                      </a:r>
+                      <a:r>
+                        <a:rPr lang="en-US" altLang="zh-CN" sz="1200" u="none" strike="noStrike" dirty="0">
+                          <a:effectLst/>
+                          <a:latin typeface="+mn-lt"/>
+                        </a:rPr>
+                        <a:t>8</a:t>
+                      </a:r>
+                      <a:r>
+                        <a:rPr lang="zh-CN" altLang="en-US" sz="1200" u="none" strike="noStrike" dirty="0">
+                          <a:effectLst/>
+                          <a:latin typeface="+mn-lt"/>
+                        </a:rPr>
+                        <a:t>）</a:t>
+                      </a:r>
+                      <a:endParaRPr lang="zh-CN" altLang="en-US" sz="1200" b="0" i="0" u="none" strike="noStrike" dirty="0">
+                        <a:solidFill>
+                          <a:srgbClr val="000000"/>
+                        </a:solidFill>
+                        <a:effectLst/>
+                        <a:latin typeface="+mn-lt"/>
+                        <a:ea typeface="等线" panose="02010600030101010101" pitchFamily="2" charset="-122"/>
+                      </a:endParaRPr>
+                    </a:p>
+                  </a:txBody>
+                  <a:tcPr marL="5756" marR="5756" marT="5756" marB="0" anchor="ctr"/>
+                </a:tc>
+                <a:tc>
+                  <a:txBody>
+                    <a:bodyPr/>
+                    <a:lstStyle/>
+                    <a:p>
+                      <a:pPr algn="l" fontAlgn="ctr"/>
+                      <a:r>
+                        <a:rPr lang="zh-CN" altLang="en-US" sz="1200" u="none" strike="noStrike">
+                          <a:effectLst/>
+                          <a:latin typeface="+mn-lt"/>
+                        </a:rPr>
+                        <a:t>提升注意力，调节情绪，辅助知识提取</a:t>
+                      </a:r>
+                      <a:endParaRPr lang="zh-CN" altLang="en-US" sz="1200" b="0" i="0" u="none" strike="noStrike">
+                        <a:solidFill>
+                          <a:srgbClr val="000000"/>
+                        </a:solidFill>
+                        <a:effectLst/>
+                        <a:latin typeface="+mn-lt"/>
+                        <a:ea typeface="等线" panose="02010600030101010101" pitchFamily="2" charset="-122"/>
+                      </a:endParaRPr>
+                    </a:p>
+                  </a:txBody>
+                  <a:tcPr marL="5756" marR="5756" marT="5756" marB="0" anchor="ctr"/>
+                </a:tc>
+                <a:tc>
+                  <a:txBody>
+                    <a:bodyPr/>
+                    <a:lstStyle/>
+                    <a:p>
+                      <a:pPr algn="l" fontAlgn="ctr"/>
+                      <a:r>
+                        <a:rPr lang="zh-CN" altLang="en-US" sz="1200" u="none" strike="noStrike">
+                          <a:effectLst/>
+                          <a:latin typeface="+mn-lt"/>
+                        </a:rPr>
+                        <a:t>“跟着音乐的节拍，轻轻敲击穴位，同时专注于一个你想记住的知识点。让音乐帮你强化记忆，让注意力像聚光灯一样，牢牢锁定目标。”</a:t>
+                      </a:r>
+                      <a:endParaRPr lang="zh-CN" altLang="en-US" sz="1200" b="0" i="0" u="none" strike="noStrike">
+                        <a:solidFill>
+                          <a:srgbClr val="000000"/>
+                        </a:solidFill>
+                        <a:effectLst/>
+                        <a:latin typeface="+mn-lt"/>
+                        <a:ea typeface="等线" panose="02010600030101010101" pitchFamily="2" charset="-122"/>
+                      </a:endParaRPr>
+                    </a:p>
+                  </a:txBody>
+                  <a:tcPr marL="5756" marR="5756" marT="5756" marB="0" anchor="ctr"/>
+                </a:tc>
+                <a:extLst>
+                  <a:ext uri="{0D108BD9-81ED-4DB2-BD59-A6C34878D82A}">
+                    <a16:rowId xmlns:a16="http://schemas.microsoft.com/office/drawing/2014/main" val="2767100159"/>
+                  </a:ext>
+                </a:extLst>
+              </a:tr>
+              <a:tr h="847717">
+                <a:tc>
+                  <a:txBody>
+                    <a:bodyPr/>
+                    <a:lstStyle/>
+                    <a:p>
+                      <a:pPr algn="l" fontAlgn="ctr"/>
+                      <a:r>
+                        <a:rPr lang="zh-CN" altLang="en-US" sz="1200" u="none" strike="noStrike" dirty="0">
+                          <a:effectLst/>
+                          <a:latin typeface="+mn-lt"/>
+                        </a:rPr>
+                        <a:t>孤独情绪缓解</a:t>
+                      </a:r>
+                      <a:endParaRPr lang="zh-CN" altLang="en-US" sz="1200" b="0" i="0" u="none" strike="noStrike" dirty="0">
+                        <a:solidFill>
+                          <a:srgbClr val="000000"/>
+                        </a:solidFill>
+                        <a:effectLst/>
+                        <a:latin typeface="+mn-lt"/>
+                        <a:ea typeface="等线" panose="02010600030101010101" pitchFamily="2" charset="-122"/>
+                      </a:endParaRPr>
+                    </a:p>
+                  </a:txBody>
+                  <a:tcPr marL="5756" marR="5756" marT="5756" marB="0" anchor="ctr"/>
+                </a:tc>
+                <a:tc>
+                  <a:txBody>
+                    <a:bodyPr/>
+                    <a:lstStyle/>
+                    <a:p>
+                      <a:pPr algn="l" fontAlgn="ctr"/>
+                      <a:r>
+                        <a:rPr lang="zh-CN" altLang="en-US" sz="1200" u="none" strike="noStrike">
+                          <a:effectLst/>
+                          <a:latin typeface="+mn-lt"/>
+                        </a:rPr>
+                        <a:t>孤独 玛奇朵（编号 </a:t>
+                      </a:r>
+                      <a:r>
+                        <a:rPr lang="en-US" altLang="zh-CN" sz="1200" u="none" strike="noStrike">
+                          <a:effectLst/>
+                          <a:latin typeface="+mn-lt"/>
+                        </a:rPr>
+                        <a:t>587</a:t>
+                      </a:r>
+                      <a:r>
+                        <a:rPr lang="zh-CN" altLang="en-US" sz="1200" u="none" strike="noStrike">
+                          <a:effectLst/>
+                          <a:latin typeface="+mn-lt"/>
+                        </a:rPr>
+                        <a:t>）</a:t>
+                      </a:r>
+                      <a:endParaRPr lang="zh-CN" altLang="en-US" sz="1200" b="0" i="0" u="none" strike="noStrike">
+                        <a:solidFill>
+                          <a:srgbClr val="000000"/>
+                        </a:solidFill>
+                        <a:effectLst/>
+                        <a:latin typeface="+mn-lt"/>
+                        <a:ea typeface="等线" panose="02010600030101010101" pitchFamily="2" charset="-122"/>
+                      </a:endParaRPr>
+                    </a:p>
+                  </a:txBody>
+                  <a:tcPr marL="5756" marR="5756" marT="5756" marB="0" anchor="ctr"/>
+                </a:tc>
+                <a:tc>
+                  <a:txBody>
+                    <a:bodyPr/>
+                    <a:lstStyle/>
+                    <a:p>
+                      <a:pPr algn="l" fontAlgn="ctr"/>
+                      <a:r>
+                        <a:rPr lang="zh-CN" altLang="en-US" sz="1200" u="none" strike="noStrike">
+                          <a:effectLst/>
+                          <a:latin typeface="+mn-lt"/>
+                        </a:rPr>
+                        <a:t>针对性缓解孤独感，提供情绪慰藉</a:t>
+                      </a:r>
+                      <a:endParaRPr lang="zh-CN" altLang="en-US" sz="1200" b="0" i="0" u="none" strike="noStrike">
+                        <a:solidFill>
+                          <a:srgbClr val="000000"/>
+                        </a:solidFill>
+                        <a:effectLst/>
+                        <a:latin typeface="+mn-lt"/>
+                        <a:ea typeface="等线" panose="02010600030101010101" pitchFamily="2" charset="-122"/>
+                      </a:endParaRPr>
+                    </a:p>
+                  </a:txBody>
+                  <a:tcPr marL="5756" marR="5756" marT="5756" marB="0" anchor="ctr"/>
+                </a:tc>
+                <a:tc>
+                  <a:txBody>
+                    <a:bodyPr/>
+                    <a:lstStyle/>
+                    <a:p>
+                      <a:pPr algn="l" fontAlgn="ctr"/>
+                      <a:r>
+                        <a:rPr lang="zh-CN" altLang="en-US" sz="1200" u="none" strike="noStrike">
+                          <a:effectLst/>
+                          <a:latin typeface="+mn-lt"/>
+                        </a:rPr>
+                        <a:t>“让这温柔的旋律陪伴着你，它懂你的孤独。感受音符像朋友一样，轻轻拥抱你。孤独正在被温暖填满，你并不孤单。”</a:t>
+                      </a:r>
+                      <a:endParaRPr lang="zh-CN" altLang="en-US" sz="1200" b="0" i="0" u="none" strike="noStrike">
+                        <a:solidFill>
+                          <a:srgbClr val="000000"/>
+                        </a:solidFill>
+                        <a:effectLst/>
+                        <a:latin typeface="+mn-lt"/>
+                        <a:ea typeface="等线" panose="02010600030101010101" pitchFamily="2" charset="-122"/>
+                      </a:endParaRPr>
+                    </a:p>
+                  </a:txBody>
+                  <a:tcPr marL="5756" marR="5756" marT="5756" marB="0" anchor="ctr"/>
+                </a:tc>
+                <a:extLst>
+                  <a:ext uri="{0D108BD9-81ED-4DB2-BD59-A6C34878D82A}">
+                    <a16:rowId xmlns:a16="http://schemas.microsoft.com/office/drawing/2014/main" val="3553534064"/>
+                  </a:ext>
+                </a:extLst>
+              </a:tr>
+              <a:tr h="871867">
+                <a:tc>
+                  <a:txBody>
+                    <a:bodyPr/>
+                    <a:lstStyle/>
+                    <a:p>
+                      <a:pPr algn="l" fontAlgn="ctr"/>
+                      <a:r>
+                        <a:rPr lang="zh-CN" altLang="en-US" sz="1200" u="none" strike="noStrike">
+                          <a:effectLst/>
+                          <a:latin typeface="+mn-lt"/>
+                        </a:rPr>
+                        <a:t>情绪调节、放松身心</a:t>
+                      </a:r>
+                      <a:endParaRPr lang="zh-CN" altLang="en-US" sz="1200" b="0" i="0" u="none" strike="noStrike">
+                        <a:solidFill>
+                          <a:srgbClr val="000000"/>
+                        </a:solidFill>
+                        <a:effectLst/>
+                        <a:latin typeface="+mn-lt"/>
+                        <a:ea typeface="等线" panose="02010600030101010101" pitchFamily="2" charset="-122"/>
+                      </a:endParaRPr>
+                    </a:p>
+                  </a:txBody>
+                  <a:tcPr marL="5756" marR="5756" marT="5756" marB="0" anchor="ctr"/>
+                </a:tc>
+                <a:tc>
+                  <a:txBody>
+                    <a:bodyPr/>
+                    <a:lstStyle/>
+                    <a:p>
+                      <a:pPr algn="l" fontAlgn="ctr"/>
+                      <a:r>
+                        <a:rPr lang="en-US" altLang="zh-CN" sz="1200" u="none" strike="noStrike" dirty="0">
+                          <a:effectLst/>
+                          <a:latin typeface="+mn-lt"/>
+                        </a:rPr>
+                        <a:t>Robin </a:t>
+                      </a:r>
+                      <a:r>
+                        <a:rPr lang="zh-CN" altLang="en-US" sz="1200" u="none" strike="noStrike" dirty="0">
+                          <a:effectLst/>
+                          <a:latin typeface="+mn-lt"/>
+                        </a:rPr>
+                        <a:t>弹钢琴（</a:t>
+                      </a:r>
+                      <a:r>
+                        <a:rPr lang="en-US" altLang="zh-CN" sz="1200" u="none" strike="noStrike" dirty="0">
+                          <a:effectLst/>
+                          <a:latin typeface="+mn-lt"/>
+                        </a:rPr>
+                        <a:t>30 </a:t>
+                      </a:r>
+                      <a:r>
+                        <a:rPr lang="zh-CN" altLang="en-US" sz="1200" u="none" strike="noStrike" dirty="0">
+                          <a:effectLst/>
+                          <a:latin typeface="+mn-lt"/>
+                        </a:rPr>
+                        <a:t>小夜曲）、柴科夫斯基（编号 </a:t>
+                      </a:r>
+                      <a:r>
+                        <a:rPr lang="en-US" altLang="zh-CN" sz="1200" u="none" strike="noStrike" dirty="0">
+                          <a:effectLst/>
+                          <a:latin typeface="+mn-lt"/>
+                        </a:rPr>
+                        <a:t>29</a:t>
+                      </a:r>
+                      <a:r>
+                        <a:rPr lang="zh-CN" altLang="en-US" sz="1200" u="none" strike="noStrike" dirty="0">
+                          <a:effectLst/>
+                          <a:latin typeface="+mn-lt"/>
+                        </a:rPr>
+                        <a:t>）</a:t>
+                      </a:r>
+                      <a:endParaRPr lang="zh-CN" altLang="en-US" sz="1200" b="0" i="0" u="none" strike="noStrike" dirty="0">
+                        <a:solidFill>
+                          <a:srgbClr val="000000"/>
+                        </a:solidFill>
+                        <a:effectLst/>
+                        <a:latin typeface="+mn-lt"/>
+                        <a:ea typeface="等线" panose="02010600030101010101" pitchFamily="2" charset="-122"/>
+                      </a:endParaRPr>
+                    </a:p>
+                  </a:txBody>
+                  <a:tcPr marL="5756" marR="5756" marT="5756" marB="0" anchor="ctr"/>
+                </a:tc>
+                <a:tc>
+                  <a:txBody>
+                    <a:bodyPr/>
+                    <a:lstStyle/>
+                    <a:p>
+                      <a:pPr algn="l" fontAlgn="ctr"/>
+                      <a:r>
+                        <a:rPr lang="zh-CN" altLang="en-US" sz="1200" u="none" strike="noStrike">
+                          <a:effectLst/>
+                          <a:latin typeface="+mn-lt"/>
+                        </a:rPr>
+                        <a:t>舒缓旋律，放松身心，调节日常情绪波动</a:t>
+                      </a:r>
+                      <a:endParaRPr lang="zh-CN" altLang="en-US" sz="1200" b="0" i="0" u="none" strike="noStrike">
+                        <a:solidFill>
+                          <a:srgbClr val="000000"/>
+                        </a:solidFill>
+                        <a:effectLst/>
+                        <a:latin typeface="+mn-lt"/>
+                        <a:ea typeface="等线" panose="02010600030101010101" pitchFamily="2" charset="-122"/>
+                      </a:endParaRPr>
+                    </a:p>
+                  </a:txBody>
+                  <a:tcPr marL="5756" marR="5756" marT="5756" marB="0" anchor="ctr"/>
+                </a:tc>
+                <a:tc>
+                  <a:txBody>
+                    <a:bodyPr/>
+                    <a:lstStyle/>
+                    <a:p>
+                      <a:pPr algn="l" fontAlgn="ctr"/>
+                      <a:r>
+                        <a:rPr lang="zh-CN" altLang="en-US" sz="1200" u="none" strike="noStrike" dirty="0">
+                          <a:effectLst/>
+                          <a:latin typeface="+mn-lt"/>
+                        </a:rPr>
+                        <a:t>“放下所有的疲惫和烦恼，让音乐流淌过你的身体。每一个细胞都在旋律中放松，呼吸变得缓慢而深沉，身心回归平和与宁静。”</a:t>
+                      </a:r>
+                      <a:endParaRPr lang="zh-CN" altLang="en-US" sz="1200" b="0" i="0" u="none" strike="noStrike" dirty="0">
+                        <a:solidFill>
+                          <a:srgbClr val="000000"/>
+                        </a:solidFill>
+                        <a:effectLst/>
+                        <a:latin typeface="+mn-lt"/>
+                        <a:ea typeface="等线" panose="02010600030101010101" pitchFamily="2" charset="-122"/>
+                      </a:endParaRPr>
+                    </a:p>
+                  </a:txBody>
+                  <a:tcPr marL="5756" marR="5756" marT="5756" marB="0" anchor="ctr"/>
+                </a:tc>
+                <a:extLst>
+                  <a:ext uri="{0D108BD9-81ED-4DB2-BD59-A6C34878D82A}">
+                    <a16:rowId xmlns:a16="http://schemas.microsoft.com/office/drawing/2014/main" val="2301853594"/>
+                  </a:ext>
+                </a:extLst>
+              </a:tr>
+            </a:tbl>
+          </a:graphicData>
+        </a:graphic>
+      </p:graphicFrame>
+    </p:spTree>
+    <p:extLst>
+      <p:ext uri="{BB962C8B-B14F-4D97-AF65-F5344CB8AC3E}">
+        <p14:creationId xmlns:p14="http://schemas.microsoft.com/office/powerpoint/2010/main" val="2853742185"/>
+      </p:ext>
+    </p:extLst>
+  </p:cSld>
+  <p:clrMapOvr>
+    <a:masterClrMapping/>
+  </p:clrMapOvr>
+  <p:timing>
+    <p:tnLst>
+      <p:par>
+        <p:cTn id="1" dur="indefinite" restart="never" nodeType="tmRoot"/>
+      </p:par>
+    </p:tnLst>
+  </p:timing>
+</p:sld>
+</file>
+
+<file path=ppt/slides/slide31.xml><?xml version="1.0" encoding="utf-8"?>
+<p:sld xmlns:a="http://schemas.openxmlformats.org/drawingml/2006/main" xmlns:r="http://schemas.openxmlformats.org/officeDocument/2006/relationships" xmlns:p="http://schemas.openxmlformats.org/presentationml/2006/main">
+  <p:cSld>
+    <p:spTree>
+      <p:nvGrpSpPr>
+        <p:cNvPr id="1" name="">
+          <a:extLst>
+            <a:ext uri="{FF2B5EF4-FFF2-40B4-BE49-F238E27FC236}">
+              <a16:creationId xmlns:a16="http://schemas.microsoft.com/office/drawing/2014/main" id="{342F93BE-C7A7-1FD2-AD5F-96083C37D57C}"/>
+            </a:ext>
+          </a:extLst>
+        </p:cNvPr>
+        <p:cNvGrpSpPr/>
+        <p:nvPr/>
+      </p:nvGrpSpPr>
+      <p:grpSpPr>
+        <a:xfrm>
+          <a:off x="0" y="0"/>
+          <a:ext cx="0" cy="0"/>
+          <a:chOff x="0" y="0"/>
+          <a:chExt cx="0" cy="0"/>
+        </a:xfrm>
+      </p:grpSpPr>
+      <p:pic>
+        <p:nvPicPr>
+          <p:cNvPr id="4" name="图片 3"/>
+          <p:cNvPicPr>
+            <a:picLocks noChangeAspect="1"/>
+          </p:cNvPicPr>
+          <p:nvPr/>
+        </p:nvPicPr>
+        <p:blipFill>
+          <a:blip r:embed="rId2"/>
+          <a:stretch>
+            <a:fillRect/>
+          </a:stretch>
+        </p:blipFill>
+        <p:spPr>
+          <a:xfrm>
+            <a:off x="3820552" y="4060680"/>
+            <a:ext cx="2278496" cy="2155828"/>
+          </a:xfrm>
+          <a:prstGeom prst="rect">
+            <a:avLst/>
+          </a:prstGeom>
+        </p:spPr>
+      </p:pic>
+      <p:sp>
+        <p:nvSpPr>
+          <p:cNvPr id="2" name="标题 1">
+            <a:extLst>
+              <a:ext uri="{FF2B5EF4-FFF2-40B4-BE49-F238E27FC236}">
+                <a16:creationId xmlns:a16="http://schemas.microsoft.com/office/drawing/2014/main" id="{8814383D-3559-DBE6-F00D-9A93B3A95220}"/>
+              </a:ext>
+            </a:extLst>
+          </p:cNvPr>
+          <p:cNvSpPr>
+            <a:spLocks noGrp="1"/>
+          </p:cNvSpPr>
+          <p:nvPr>
+            <p:ph type="title"/>
+          </p:nvPr>
+        </p:nvSpPr>
+        <p:spPr>
+          <a:xfrm>
+            <a:off x="521208" y="662740"/>
+            <a:ext cx="11155680" cy="936652"/>
+          </a:xfrm>
+        </p:spPr>
+        <p:txBody>
+          <a:bodyPr/>
+          <a:lstStyle/>
+          <a:p>
+            <a:r>
+              <a:rPr lang="en-US" altLang="zh-CN" sz="4400" dirty="0"/>
+              <a:t>EFT</a:t>
+            </a:r>
+            <a:r>
+              <a:rPr lang="zh-CN" altLang="en-US" sz="4400" dirty="0"/>
+              <a:t>心理自助</a:t>
+            </a:r>
+            <a:r>
+              <a:rPr lang="zh-CN" altLang="en-US" sz="4400" dirty="0" smtClean="0"/>
+              <a:t>操</a:t>
+            </a:r>
+            <a:r>
+              <a:rPr lang="zh-CN" altLang="en-US" sz="4400" dirty="0" smtClean="0"/>
+              <a:t>关键技巧</a:t>
+            </a:r>
+            <a:r>
+              <a:rPr lang="zh-CN" altLang="en-US" sz="4400" dirty="0" smtClean="0"/>
+              <a:t>（</a:t>
+            </a:r>
+            <a:r>
+              <a:rPr lang="en-US" altLang="zh-CN" sz="4400" dirty="0" smtClean="0"/>
+              <a:t>8</a:t>
+            </a:r>
+            <a:r>
+              <a:rPr lang="zh-CN" altLang="en-US" sz="4400" dirty="0" smtClean="0"/>
+              <a:t>）</a:t>
+            </a:r>
+            <a:endParaRPr lang="zh-CN" altLang="en-US" sz="4400" dirty="0"/>
           </a:p>
         </p:txBody>
       </p:sp>
@@ -19227,8 +21257,8 @@
         </p:nvSpPr>
         <p:spPr>
           <a:xfrm>
-            <a:off x="515112" y="1576785"/>
-            <a:ext cx="4691743" cy="3989337"/>
+            <a:off x="518161" y="1599392"/>
+            <a:ext cx="4691743" cy="4345735"/>
           </a:xfrm>
         </p:spPr>
         <p:txBody>
@@ -19379,7 +21409,7 @@
               <a:buNone/>
             </a:pPr>
             <a:r>
-              <a:rPr lang="zh-CN" altLang="en-US" sz="1200" smtClean="0">
+              <a:rPr lang="zh-CN" altLang="en-US" sz="1200" dirty="0" smtClean="0">
                 <a:latin typeface="+mn-ea"/>
               </a:rPr>
               <a:t>第九步</a:t>
@@ -19388,16 +21418,10 @@
               <a:rPr lang="zh-CN" altLang="en-US" sz="1200" dirty="0">
                 <a:latin typeface="+mn-ea"/>
               </a:rPr>
-              <a:t>，调整提示语，</a:t>
-            </a:r>
-            <a:r>
-              <a:rPr lang="zh-CN" altLang="en-US" sz="1200">
-                <a:latin typeface="+mn-ea"/>
-              </a:rPr>
-              <a:t>进行</a:t>
-            </a:r>
-            <a:r>
-              <a:rPr lang="zh-CN" altLang="en-US" sz="1200" smtClean="0">
+              <a:t>，调整提示语，进行</a:t>
+            </a:r>
+            <a:r>
+              <a:rPr lang="zh-CN" altLang="en-US" sz="1200" dirty="0" smtClean="0">
                 <a:latin typeface="+mn-ea"/>
               </a:rPr>
               <a:t>第三次</a:t>
@@ -19417,225 +21441,6 @@
               <a:buNone/>
             </a:pPr>
             <a:endParaRPr lang="zh-CN" altLang="en-US" sz="1200" dirty="0">
-              <a:latin typeface="+mn-ea"/>
-            </a:endParaRPr>
-          </a:p>
-        </p:txBody>
-      </p:sp>
-      <p:sp>
-        <p:nvSpPr>
-          <p:cNvPr id="14" name="内容占位符 2">
-            <a:extLst>
-              <a:ext uri="{FF2B5EF4-FFF2-40B4-BE49-F238E27FC236}">
-                <a16:creationId xmlns:a16="http://schemas.microsoft.com/office/drawing/2014/main" id="{F16DB7D6-54F0-0849-5B5E-EFE315F70565}"/>
-              </a:ext>
-            </a:extLst>
-          </p:cNvPr>
-          <p:cNvSpPr txBox="1">
-            <a:spLocks/>
-          </p:cNvSpPr>
-          <p:nvPr/>
-        </p:nvSpPr>
-        <p:spPr>
-          <a:xfrm>
-            <a:off x="272200" y="5838265"/>
-            <a:ext cx="4779454" cy="757207"/>
-          </a:xfrm>
-          <a:prstGeom prst="rect">
-            <a:avLst/>
-          </a:prstGeom>
-        </p:spPr>
-        <p:txBody>
-          <a:bodyPr lIns="109728" tIns="109728" rIns="109728" bIns="91440"/>
-          <a:lstStyle>
-            <a:lvl1pPr marL="228600" indent="-228600" algn="l" defTabSz="914400" rtl="0" eaLnBrk="1" latinLnBrk="0" hangingPunct="1">
-              <a:lnSpc>
-                <a:spcPct val="125000"/>
-              </a:lnSpc>
-              <a:spcBef>
-                <a:spcPts val="1000"/>
-              </a:spcBef>
-              <a:buFont typeface="Arial" panose="020B0604020202020204" pitchFamily="34" charset="0"/>
-              <a:buChar char="•"/>
-              <a:defRPr sz="1600" kern="1200" spc="160">
-                <a:solidFill>
-                  <a:schemeClr val="tx1"/>
-                </a:solidFill>
-                <a:latin typeface="+mn-lt"/>
-                <a:ea typeface="+mn-ea"/>
-                <a:cs typeface="+mn-cs"/>
-              </a:defRPr>
-            </a:lvl1pPr>
-            <a:lvl2pPr marL="685800" indent="-228600" algn="l" defTabSz="914400" rtl="0" eaLnBrk="1" latinLnBrk="0" hangingPunct="1">
-              <a:lnSpc>
-                <a:spcPct val="125000"/>
-              </a:lnSpc>
-              <a:spcBef>
-                <a:spcPts val="500"/>
-              </a:spcBef>
-              <a:buFont typeface="Arial" panose="020B0604020202020204" pitchFamily="34" charset="0"/>
-              <a:buChar char="•"/>
-              <a:defRPr sz="1600" kern="1200" spc="160">
-                <a:solidFill>
-                  <a:schemeClr val="tx1"/>
-                </a:solidFill>
-                <a:latin typeface="+mn-lt"/>
-                <a:ea typeface="+mn-ea"/>
-                <a:cs typeface="+mn-cs"/>
-              </a:defRPr>
-            </a:lvl2pPr>
-            <a:lvl3pPr marL="1143000" indent="-228600" algn="l" defTabSz="914400" rtl="0" eaLnBrk="1" latinLnBrk="0" hangingPunct="1">
-              <a:lnSpc>
-                <a:spcPct val="125000"/>
-              </a:lnSpc>
-              <a:spcBef>
-                <a:spcPts val="500"/>
-              </a:spcBef>
-              <a:buFont typeface="Arial" panose="020B0604020202020204" pitchFamily="34" charset="0"/>
-              <a:buChar char="•"/>
-              <a:defRPr sz="1600" kern="1200" spc="160">
-                <a:solidFill>
-                  <a:schemeClr val="tx1"/>
-                </a:solidFill>
-                <a:latin typeface="+mn-lt"/>
-                <a:ea typeface="+mn-ea"/>
-                <a:cs typeface="+mn-cs"/>
-              </a:defRPr>
-            </a:lvl3pPr>
-            <a:lvl4pPr marL="1600200" indent="-228600" algn="l" defTabSz="914400" rtl="0" eaLnBrk="1" latinLnBrk="0" hangingPunct="1">
-              <a:lnSpc>
-                <a:spcPct val="125000"/>
-              </a:lnSpc>
-              <a:spcBef>
-                <a:spcPts val="500"/>
-              </a:spcBef>
-              <a:buFont typeface="Arial" panose="020B0604020202020204" pitchFamily="34" charset="0"/>
-              <a:buChar char="•"/>
-              <a:defRPr sz="1600" kern="1200" spc="160">
-                <a:solidFill>
-                  <a:schemeClr val="tx1"/>
-                </a:solidFill>
-                <a:latin typeface="+mn-lt"/>
-                <a:ea typeface="+mn-ea"/>
-                <a:cs typeface="+mn-cs"/>
-              </a:defRPr>
-            </a:lvl4pPr>
-            <a:lvl5pPr marL="2057400" indent="-228600" algn="l" defTabSz="914400" rtl="0" eaLnBrk="1" latinLnBrk="0" hangingPunct="1">
-              <a:lnSpc>
-                <a:spcPct val="125000"/>
-              </a:lnSpc>
-              <a:spcBef>
-                <a:spcPts val="500"/>
-              </a:spcBef>
-              <a:buFont typeface="Arial" panose="020B0604020202020204" pitchFamily="34" charset="0"/>
-              <a:buChar char="•"/>
-              <a:defRPr sz="1600" kern="1200" spc="160">
-                <a:solidFill>
-                  <a:schemeClr val="tx1"/>
-                </a:solidFill>
-                <a:latin typeface="+mn-lt"/>
-                <a:ea typeface="+mn-ea"/>
-                <a:cs typeface="+mn-cs"/>
-              </a:defRPr>
-            </a:lvl5pPr>
-            <a:lvl6pPr marL="2514600" indent="-228600" algn="l" defTabSz="914400" rtl="0" eaLnBrk="1" latinLnBrk="0" hangingPunct="1">
-              <a:lnSpc>
-                <a:spcPct val="90000"/>
-              </a:lnSpc>
-              <a:spcBef>
-                <a:spcPts val="500"/>
-              </a:spcBef>
-              <a:buFont typeface="Arial" panose="020B0604020202020204" pitchFamily="34" charset="0"/>
-              <a:buChar char="•"/>
-              <a:defRPr sz="1800" kern="1200">
-                <a:solidFill>
-                  <a:schemeClr val="tx1"/>
-                </a:solidFill>
-                <a:latin typeface="+mn-lt"/>
-                <a:ea typeface="+mn-ea"/>
-                <a:cs typeface="+mn-cs"/>
-              </a:defRPr>
-            </a:lvl6pPr>
-            <a:lvl7pPr marL="2971800" indent="-228600" algn="l" defTabSz="914400" rtl="0" eaLnBrk="1" latinLnBrk="0" hangingPunct="1">
-              <a:lnSpc>
-                <a:spcPct val="90000"/>
-              </a:lnSpc>
-              <a:spcBef>
-                <a:spcPts val="500"/>
-              </a:spcBef>
-              <a:buFont typeface="Arial" panose="020B0604020202020204" pitchFamily="34" charset="0"/>
-              <a:buChar char="•"/>
-              <a:defRPr sz="1800" kern="1200">
-                <a:solidFill>
-                  <a:schemeClr val="tx1"/>
-                </a:solidFill>
-                <a:latin typeface="+mn-lt"/>
-                <a:ea typeface="+mn-ea"/>
-                <a:cs typeface="+mn-cs"/>
-              </a:defRPr>
-            </a:lvl7pPr>
-            <a:lvl8pPr marL="3429000" indent="-228600" algn="l" defTabSz="914400" rtl="0" eaLnBrk="1" latinLnBrk="0" hangingPunct="1">
-              <a:lnSpc>
-                <a:spcPct val="90000"/>
-              </a:lnSpc>
-              <a:spcBef>
-                <a:spcPts val="500"/>
-              </a:spcBef>
-              <a:buFont typeface="Arial" panose="020B0604020202020204" pitchFamily="34" charset="0"/>
-              <a:buChar char="•"/>
-              <a:defRPr sz="1800" kern="1200">
-                <a:solidFill>
-                  <a:schemeClr val="tx1"/>
-                </a:solidFill>
-                <a:latin typeface="+mn-lt"/>
-                <a:ea typeface="+mn-ea"/>
-                <a:cs typeface="+mn-cs"/>
-              </a:defRPr>
-            </a:lvl8pPr>
-            <a:lvl9pPr marL="3886200" indent="-228600" algn="l" defTabSz="914400" rtl="0" eaLnBrk="1" latinLnBrk="0" hangingPunct="1">
-              <a:lnSpc>
-                <a:spcPct val="90000"/>
-              </a:lnSpc>
-              <a:spcBef>
-                <a:spcPts val="500"/>
-              </a:spcBef>
-              <a:buFont typeface="Arial" panose="020B0604020202020204" pitchFamily="34" charset="0"/>
-              <a:buChar char="•"/>
-              <a:defRPr sz="1800" kern="1200">
-                <a:solidFill>
-                  <a:schemeClr val="tx1"/>
-                </a:solidFill>
-                <a:latin typeface="+mn-lt"/>
-                <a:ea typeface="+mn-ea"/>
-                <a:cs typeface="+mn-cs"/>
-              </a:defRPr>
-            </a:lvl9pPr>
-          </a:lstStyle>
-          <a:p>
-            <a:pPr marL="0" indent="0">
-              <a:buNone/>
-            </a:pPr>
-            <a:r>
-              <a:rPr lang="zh-CN" altLang="en-US" sz="3200" dirty="0" smtClean="0">
-                <a:effectLst>
-                  <a:outerShdw blurRad="38100" dist="38100" dir="2700000" algn="tl">
-                    <a:srgbClr val="000000">
-                      <a:alpha val="43137"/>
-                    </a:srgbClr>
-                  </a:outerShdw>
-                </a:effectLst>
-                <a:latin typeface="+mn-ea"/>
-              </a:rPr>
-              <a:t>基本操作步骤</a:t>
-            </a:r>
-            <a:endParaRPr lang="zh-CN" altLang="en-US" sz="3200" dirty="0">
-              <a:effectLst>
-                <a:outerShdw blurRad="38100" dist="38100" dir="2700000" algn="tl">
-                  <a:srgbClr val="000000">
-                    <a:alpha val="43137"/>
-                  </a:srgbClr>
-                </a:outerShdw>
-              </a:effectLst>
               <a:latin typeface="+mn-ea"/>
             </a:endParaRPr>
           </a:p>
@@ -19657,8 +21462,8 @@
         </p:nvSpPr>
         <p:spPr>
           <a:xfrm>
-            <a:off x="5206856" y="1304642"/>
-            <a:ext cx="6470032" cy="5357415"/>
+            <a:off x="5974080" y="1599392"/>
+            <a:ext cx="5702808" cy="5102942"/>
           </a:xfrm>
           <a:prstGeom prst="rect">
             <a:avLst/>
@@ -19836,22 +21641,49 @@
               <a:buNone/>
             </a:pPr>
             <a:r>
+              <a:rPr lang="zh-CN" altLang="en-US" sz="1200" b="1" dirty="0" smtClean="0">
+                <a:latin typeface="+mn-ea"/>
+              </a:rPr>
+              <a:t>负责心理指数测量方法：我们用</a:t>
+            </a:r>
+            <a:r>
+              <a:rPr lang="en-US" altLang="zh-CN" sz="1200" b="1" dirty="0" smtClean="0">
+                <a:latin typeface="+mn-ea"/>
+              </a:rPr>
+              <a:t>0~10</a:t>
+            </a:r>
+            <a:r>
+              <a:rPr lang="zh-CN" altLang="en-US" sz="1200" b="1" dirty="0" smtClean="0">
+                <a:latin typeface="+mn-ea"/>
+              </a:rPr>
+              <a:t>来表示负面心理指数。</a:t>
+            </a:r>
+            <a:endParaRPr lang="en-US" altLang="zh-CN" sz="1200" b="1" dirty="0" smtClean="0">
+              <a:latin typeface="+mn-ea"/>
+            </a:endParaRPr>
+          </a:p>
+          <a:p>
+            <a:pPr marL="0" indent="0">
+              <a:buFont typeface="Arial" panose="020B0604020202020204" pitchFamily="34" charset="0"/>
+              <a:buNone/>
+            </a:pPr>
+            <a:r>
+              <a:rPr lang="en-US" altLang="zh-CN" sz="1200" dirty="0" smtClean="0">
+                <a:latin typeface="+mn-ea"/>
+              </a:rPr>
+              <a:t>10 - </a:t>
+            </a:r>
+            <a:r>
               <a:rPr lang="zh-CN" altLang="en-US" sz="1200" dirty="0" smtClean="0">
                 <a:latin typeface="+mn-ea"/>
               </a:rPr>
-              <a:t>负责心理指数测量方法：我们用</a:t>
-            </a:r>
-            <a:r>
-              <a:rPr lang="en-US" altLang="zh-CN" sz="1200" dirty="0" smtClean="0">
-                <a:latin typeface="+mn-ea"/>
-              </a:rPr>
-              <a:t>0~10</a:t>
+              <a:t>代表</a:t>
             </a:r>
             <a:r>
               <a:rPr lang="zh-CN" altLang="en-US" sz="1200" dirty="0" smtClean="0">
                 <a:latin typeface="+mn-ea"/>
               </a:rPr>
-              <a:t>来表示负面心理指数。</a:t>
+              <a:t>对事件的负面心理已经到了不可忍受的地步。</a:t>
             </a:r>
             <a:endParaRPr lang="en-US" altLang="zh-CN" sz="1200" dirty="0" smtClean="0">
               <a:latin typeface="+mn-ea"/>
@@ -19859,20 +21691,31 @@
           </a:p>
           <a:p>
             <a:pPr marL="0" indent="0">
-              <a:buFont typeface="Arial" panose="020B0604020202020204" pitchFamily="34" charset="0"/>
               <a:buNone/>
             </a:pPr>
             <a:r>
+              <a:rPr lang="en-US" altLang="zh-CN" sz="1200" dirty="0">
+                <a:latin typeface="+mn-ea"/>
+              </a:rPr>
+              <a:t>9 </a:t>
+            </a:r>
+            <a:r>
               <a:rPr lang="en-US" altLang="zh-CN" sz="1200" dirty="0" smtClean="0">
                 <a:latin typeface="+mn-ea"/>
               </a:rPr>
-              <a:t>10</a:t>
+              <a:t>- </a:t>
             </a:r>
             <a:r>
               <a:rPr lang="zh-CN" altLang="en-US" sz="1200" dirty="0" smtClean="0">
                 <a:latin typeface="+mn-ea"/>
               </a:rPr>
-              <a:t>代表对事件的负面心理已经到了不可忍受的地步。</a:t>
+              <a:t>负面</a:t>
+            </a:r>
+            <a:r>
+              <a:rPr lang="zh-CN" altLang="en-US" sz="1200" dirty="0" smtClean="0">
+                <a:latin typeface="+mn-ea"/>
+              </a:rPr>
+              <a:t>情绪很高，感觉非常糟糕，情绪马上要失控。</a:t>
             </a:r>
             <a:endParaRPr lang="en-US" altLang="zh-CN" sz="1200" dirty="0" smtClean="0">
               <a:latin typeface="+mn-ea"/>
@@ -19880,20 +21723,31 @@
           </a:p>
           <a:p>
             <a:pPr marL="0" indent="0">
-              <a:buFont typeface="Arial" panose="020B0604020202020204" pitchFamily="34" charset="0"/>
               <a:buNone/>
             </a:pPr>
             <a:r>
+              <a:rPr lang="en-US" altLang="zh-CN" sz="1200" dirty="0">
+                <a:latin typeface="+mn-ea"/>
+              </a:rPr>
+              <a:t>8 </a:t>
+            </a:r>
+            <a:r>
               <a:rPr lang="en-US" altLang="zh-CN" sz="1200" dirty="0" smtClean="0">
                 <a:latin typeface="+mn-ea"/>
               </a:rPr>
-              <a:t>9</a:t>
+              <a:t>- </a:t>
             </a:r>
             <a:r>
               <a:rPr lang="zh-CN" altLang="en-US" sz="1200" dirty="0" smtClean="0">
                 <a:latin typeface="+mn-ea"/>
               </a:rPr>
-              <a:t>负面情绪很高，感觉非常糟糕，情绪马上要失控。</a:t>
+              <a:t>感到</a:t>
+            </a:r>
+            <a:r>
+              <a:rPr lang="zh-CN" altLang="en-US" sz="1200" dirty="0" smtClean="0">
+                <a:latin typeface="+mn-ea"/>
+              </a:rPr>
+              <a:t>糟糕，虽然还可以控制一下情绪，但一不小心会失控。</a:t>
             </a:r>
             <a:endParaRPr lang="en-US" altLang="zh-CN" sz="1200" dirty="0" smtClean="0">
               <a:latin typeface="+mn-ea"/>
@@ -19908,13 +21762,19 @@
               <a:rPr lang="en-US" altLang="zh-CN" sz="1200" dirty="0" smtClean="0">
                 <a:latin typeface="+mn-ea"/>
               </a:rPr>
-              <a:t>8</a:t>
+              <a:t>7 - </a:t>
             </a:r>
             <a:r>
               <a:rPr lang="zh-CN" altLang="en-US" sz="1200" dirty="0" smtClean="0">
                 <a:latin typeface="+mn-ea"/>
               </a:rPr>
-              <a:t>，感到糟糕，虽然还可以控制一下情绪，但一不小心会失控。</a:t>
+              <a:t>情绪</a:t>
+            </a:r>
+            <a:r>
+              <a:rPr lang="zh-CN" altLang="en-US" sz="1200" dirty="0" smtClean="0">
+                <a:latin typeface="+mn-ea"/>
+              </a:rPr>
+              <a:t>开始要崩溃，在很糟糕的情绪边缘，但还可以努力控制。</a:t>
             </a:r>
             <a:endParaRPr lang="en-US" altLang="zh-CN" sz="1200" dirty="0" smtClean="0">
               <a:latin typeface="+mn-ea"/>
@@ -19929,13 +21789,19 @@
               <a:rPr lang="en-US" altLang="zh-CN" sz="1200" dirty="0" smtClean="0">
                 <a:latin typeface="+mn-ea"/>
               </a:rPr>
-              <a:t>7</a:t>
+              <a:t>6 - </a:t>
             </a:r>
             <a:r>
               <a:rPr lang="zh-CN" altLang="en-US" sz="1200" dirty="0" smtClean="0">
                 <a:latin typeface="+mn-ea"/>
               </a:rPr>
-              <a:t>，情绪开始要崩溃，在很糟糕的情绪边缘，但还可以努力控制。</a:t>
+              <a:t>感到</a:t>
+            </a:r>
+            <a:r>
+              <a:rPr lang="zh-CN" altLang="en-US" sz="1200" dirty="0" smtClean="0">
+                <a:latin typeface="+mn-ea"/>
+              </a:rPr>
+              <a:t>挺糟糕，意识到应该想办法去调节不良情绪。</a:t>
             </a:r>
             <a:endParaRPr lang="en-US" altLang="zh-CN" sz="1200" dirty="0" smtClean="0">
               <a:latin typeface="+mn-ea"/>
@@ -19950,13 +21816,19 @@
               <a:rPr lang="en-US" altLang="zh-CN" sz="1200" dirty="0" smtClean="0">
                 <a:latin typeface="+mn-ea"/>
               </a:rPr>
-              <a:t>6</a:t>
+              <a:t>5 - </a:t>
             </a:r>
             <a:r>
               <a:rPr lang="zh-CN" altLang="en-US" sz="1200" dirty="0" smtClean="0">
                 <a:latin typeface="+mn-ea"/>
               </a:rPr>
-              <a:t>，感到挺糟糕，意识到应该想办法去调节不良情绪。</a:t>
+              <a:t>有一些</a:t>
+            </a:r>
+            <a:r>
+              <a:rPr lang="zh-CN" altLang="en-US" sz="1200" dirty="0" smtClean="0">
+                <a:latin typeface="+mn-ea"/>
+              </a:rPr>
+              <a:t>心理不舒服，但努力一下是可以控制的</a:t>
             </a:r>
             <a:endParaRPr lang="en-US" altLang="zh-CN" sz="1200" dirty="0" smtClean="0">
               <a:latin typeface="+mn-ea"/>
@@ -19971,13 +21843,19 @@
               <a:rPr lang="en-US" altLang="zh-CN" sz="1200" dirty="0" smtClean="0">
                 <a:latin typeface="+mn-ea"/>
               </a:rPr>
-              <a:t>5</a:t>
+              <a:t>4 - </a:t>
             </a:r>
             <a:r>
               <a:rPr lang="zh-CN" altLang="en-US" sz="1200" dirty="0" smtClean="0">
                 <a:latin typeface="+mn-ea"/>
               </a:rPr>
-              <a:t>，有一些心理不舒服，但努力一下是可以控制的</a:t>
+              <a:t>有一些</a:t>
+            </a:r>
+            <a:r>
+              <a:rPr lang="zh-CN" altLang="en-US" sz="1200" dirty="0" smtClean="0">
+                <a:latin typeface="+mn-ea"/>
+              </a:rPr>
+              <a:t>不痛快，无法回避感受，但能控制情绪。</a:t>
             </a:r>
             <a:endParaRPr lang="en-US" altLang="zh-CN" sz="1200" dirty="0" smtClean="0">
               <a:latin typeface="+mn-ea"/>
@@ -19992,13 +21870,19 @@
               <a:rPr lang="en-US" altLang="zh-CN" sz="1200" dirty="0" smtClean="0">
                 <a:latin typeface="+mn-ea"/>
               </a:rPr>
-              <a:t>4</a:t>
+              <a:t>3 - </a:t>
             </a:r>
             <a:r>
               <a:rPr lang="zh-CN" altLang="en-US" sz="1200" dirty="0" smtClean="0">
                 <a:latin typeface="+mn-ea"/>
               </a:rPr>
-              <a:t>，有一些不痛快，无法回避感受，但能控制情绪。</a:t>
+              <a:t>有点</a:t>
+            </a:r>
+            <a:r>
+              <a:rPr lang="zh-CN" altLang="en-US" sz="1200" dirty="0" smtClean="0">
+                <a:latin typeface="+mn-ea"/>
+              </a:rPr>
+              <a:t>不舒服，并注意到了这样的感受。</a:t>
             </a:r>
             <a:endParaRPr lang="en-US" altLang="zh-CN" sz="1200" dirty="0" smtClean="0">
               <a:latin typeface="+mn-ea"/>
@@ -20013,13 +21897,19 @@
               <a:rPr lang="en-US" altLang="zh-CN" sz="1200" dirty="0" smtClean="0">
                 <a:latin typeface="+mn-ea"/>
               </a:rPr>
-              <a:t>3</a:t>
+              <a:t>2 - </a:t>
             </a:r>
             <a:r>
               <a:rPr lang="zh-CN" altLang="en-US" sz="1200" dirty="0" smtClean="0">
                 <a:latin typeface="+mn-ea"/>
               </a:rPr>
-              <a:t>，有点不舒服，并注意到了这样的感受。</a:t>
+              <a:t>有点</a:t>
+            </a:r>
+            <a:r>
+              <a:rPr lang="zh-CN" altLang="en-US" sz="1200" dirty="0" smtClean="0">
+                <a:latin typeface="+mn-ea"/>
+              </a:rPr>
+              <a:t>不舒服，平时不注意它不会打扰你，有时想到会有点困扰。</a:t>
             </a:r>
             <a:endParaRPr lang="en-US" altLang="zh-CN" sz="1200" dirty="0" smtClean="0">
               <a:latin typeface="+mn-ea"/>
@@ -20034,13 +21924,19 @@
               <a:rPr lang="en-US" altLang="zh-CN" sz="1200" dirty="0" smtClean="0">
                 <a:latin typeface="+mn-ea"/>
               </a:rPr>
-              <a:t>2</a:t>
+              <a:t>1 - </a:t>
             </a:r>
             <a:r>
               <a:rPr lang="zh-CN" altLang="en-US" sz="1200" dirty="0" smtClean="0">
                 <a:latin typeface="+mn-ea"/>
               </a:rPr>
-              <a:t>，有点不舒服，平时不注意它不会打扰你，有时想到会有点困扰。</a:t>
+              <a:t>基本上</a:t>
+            </a:r>
+            <a:r>
+              <a:rPr lang="zh-CN" altLang="en-US" sz="1200" dirty="0" smtClean="0">
+                <a:latin typeface="+mn-ea"/>
+              </a:rPr>
+              <a:t>还好，如果很仔细想会有一丝不痛快。</a:t>
             </a:r>
             <a:endParaRPr lang="en-US" altLang="zh-CN" sz="1200" dirty="0" smtClean="0">
               <a:latin typeface="+mn-ea"/>
@@ -20055,13 +21951,19 @@
               <a:rPr lang="en-US" altLang="zh-CN" sz="1200" dirty="0" smtClean="0">
                 <a:latin typeface="+mn-ea"/>
               </a:rPr>
-              <a:t>1</a:t>
+              <a:t>0 - </a:t>
             </a:r>
             <a:r>
               <a:rPr lang="zh-CN" altLang="en-US" sz="1200" dirty="0" smtClean="0">
                 <a:latin typeface="+mn-ea"/>
               </a:rPr>
-              <a:t>，基本上还好，如果很仔细想会有一丝不痛快。</a:t>
+              <a:t>内心</a:t>
+            </a:r>
+            <a:r>
+              <a:rPr lang="zh-CN" altLang="en-US" sz="1200" dirty="0" smtClean="0">
+                <a:latin typeface="+mn-ea"/>
+              </a:rPr>
+              <a:t>平静，完全解脱，没有不愉快的感觉。</a:t>
             </a:r>
             <a:endParaRPr lang="en-US" altLang="zh-CN" sz="1200" dirty="0" smtClean="0">
               <a:latin typeface="+mn-ea"/>
@@ -20073,18 +21975,42 @@
               <a:buNone/>
             </a:pPr>
             <a:r>
-              <a:rPr lang="en-US" altLang="zh-CN" sz="1200" dirty="0" smtClean="0">
-                <a:latin typeface="+mn-ea"/>
-              </a:rPr>
-              <a:t>0</a:t>
-            </a:r>
-            <a:r>
-              <a:rPr lang="zh-CN" altLang="en-US" sz="1200" dirty="0" smtClean="0">
-                <a:latin typeface="+mn-ea"/>
-              </a:rPr>
-              <a:t>，内心平静，完全解脱，没有不愉快的感觉。</a:t>
-            </a:r>
-            <a:endParaRPr lang="en-US" altLang="zh-CN" sz="1200" dirty="0" smtClean="0">
+              <a:rPr lang="en-US" altLang="zh-CN" sz="1200" i="1" u="sng" dirty="0" smtClean="0">
+                <a:latin typeface="+mn-ea"/>
+              </a:rPr>
+              <a:t>5~8</a:t>
+            </a:r>
+            <a:r>
+              <a:rPr lang="zh-CN" altLang="en-US" sz="1200" i="1" u="sng" dirty="0" smtClean="0">
+                <a:latin typeface="+mn-ea"/>
+              </a:rPr>
+              <a:t>可以进行疏导，如果</a:t>
+            </a:r>
+            <a:r>
+              <a:rPr lang="en-US" altLang="zh-CN" sz="1200" i="1" u="sng" dirty="0" smtClean="0">
+                <a:latin typeface="+mn-ea"/>
+              </a:rPr>
+              <a:t>5</a:t>
+            </a:r>
+            <a:r>
+              <a:rPr lang="zh-CN" altLang="en-US" sz="1200" i="1" u="sng" dirty="0" smtClean="0">
+                <a:latin typeface="+mn-ea"/>
+              </a:rPr>
+              <a:t>以下甚至是</a:t>
+            </a:r>
+            <a:r>
+              <a:rPr lang="en-US" altLang="zh-CN" sz="1200" i="1" u="sng" dirty="0" smtClean="0">
+                <a:latin typeface="+mn-ea"/>
+              </a:rPr>
+              <a:t>2~3</a:t>
+            </a:r>
+            <a:r>
+              <a:rPr lang="zh-CN" altLang="en-US" sz="1200" i="1" u="sng" dirty="0" smtClean="0">
+                <a:latin typeface="+mn-ea"/>
+              </a:rPr>
+              <a:t>更低就没有必要疏导了。</a:t>
+            </a:r>
+            <a:endParaRPr lang="en-US" altLang="zh-CN" sz="1200" i="1" u="sng" dirty="0" smtClean="0">
               <a:latin typeface="+mn-ea"/>
             </a:endParaRPr>
           </a:p>
@@ -20094,71 +22020,235 @@
               <a:buNone/>
             </a:pPr>
             <a:r>
-              <a:rPr lang="en-US" altLang="zh-CN" sz="1200" dirty="0" smtClean="0">
-                <a:latin typeface="+mn-ea"/>
-              </a:rPr>
-              <a:t>5~8</a:t>
-            </a:r>
-            <a:r>
-              <a:rPr lang="zh-CN" altLang="en-US" sz="1200" dirty="0" smtClean="0">
-                <a:latin typeface="+mn-ea"/>
-              </a:rPr>
-              <a:t>可以进行疏导，如果</a:t>
-            </a:r>
-            <a:r>
-              <a:rPr lang="en-US" altLang="zh-CN" sz="1200" dirty="0" smtClean="0">
-                <a:latin typeface="+mn-ea"/>
-              </a:rPr>
-              <a:t>5</a:t>
-            </a:r>
-            <a:r>
-              <a:rPr lang="zh-CN" altLang="en-US" sz="1200" dirty="0" smtClean="0">
-                <a:latin typeface="+mn-ea"/>
-              </a:rPr>
-              <a:t>以下甚至是</a:t>
-            </a:r>
-            <a:r>
-              <a:rPr lang="en-US" altLang="zh-CN" sz="1200" dirty="0" smtClean="0">
-                <a:latin typeface="+mn-ea"/>
-              </a:rPr>
-              <a:t>2~3</a:t>
-            </a:r>
-            <a:r>
-              <a:rPr lang="zh-CN" altLang="en-US" sz="1200" dirty="0" smtClean="0">
-                <a:latin typeface="+mn-ea"/>
-              </a:rPr>
-              <a:t>更低就没有必要疏导了。</a:t>
-            </a:r>
-            <a:endParaRPr lang="en-US" altLang="zh-CN" sz="1200" dirty="0" smtClean="0">
+              <a:rPr lang="zh-CN" altLang="en-US" sz="1200" i="1" u="sng" dirty="0" smtClean="0">
+                <a:latin typeface="+mn-ea"/>
+              </a:rPr>
+              <a:t>通过操作可以将指数降低到</a:t>
+            </a:r>
+            <a:r>
+              <a:rPr lang="en-US" altLang="zh-CN" sz="1200" i="1" u="sng" dirty="0" smtClean="0">
+                <a:latin typeface="+mn-ea"/>
+              </a:rPr>
+              <a:t>0</a:t>
+            </a:r>
+            <a:r>
+              <a:rPr lang="zh-CN" altLang="en-US" sz="1200" i="1" u="sng" dirty="0" smtClean="0">
+                <a:latin typeface="+mn-ea"/>
+              </a:rPr>
+              <a:t>。</a:t>
+            </a:r>
+            <a:endParaRPr lang="zh-CN" altLang="en-US" sz="1200" i="1" u="sng" dirty="0">
               <a:latin typeface="+mn-ea"/>
             </a:endParaRPr>
           </a:p>
+        </p:txBody>
+      </p:sp>
+      <p:sp>
+        <p:nvSpPr>
+          <p:cNvPr id="6" name="内容占位符 2">
+            <a:extLst>
+              <a:ext uri="{FF2B5EF4-FFF2-40B4-BE49-F238E27FC236}">
+                <a16:creationId xmlns:a16="http://schemas.microsoft.com/office/drawing/2014/main" id="{FAD0FAE9-2ACA-D917-5BD7-0D08682B3783}"/>
+              </a:ext>
+            </a:extLst>
+          </p:cNvPr>
+          <p:cNvSpPr txBox="1">
+            <a:spLocks/>
+          </p:cNvSpPr>
+          <p:nvPr/>
+        </p:nvSpPr>
+        <p:spPr>
+          <a:xfrm>
+            <a:off x="518161" y="5945127"/>
+            <a:ext cx="4779454" cy="757207"/>
+          </a:xfrm>
+          <a:prstGeom prst="rect">
+            <a:avLst/>
+          </a:prstGeom>
+        </p:spPr>
+        <p:txBody>
+          <a:bodyPr lIns="109728" tIns="109728" rIns="109728" bIns="91440"/>
+          <a:lstStyle>
+            <a:lvl1pPr marL="228600" indent="-228600" algn="l" defTabSz="914400" rtl="0" eaLnBrk="1" latinLnBrk="0" hangingPunct="1">
+              <a:lnSpc>
+                <a:spcPct val="125000"/>
+              </a:lnSpc>
+              <a:spcBef>
+                <a:spcPts val="1000"/>
+              </a:spcBef>
+              <a:buFont typeface="Arial" panose="020B0604020202020204" pitchFamily="34" charset="0"/>
+              <a:buChar char="•"/>
+              <a:defRPr sz="1600" kern="1200" spc="160">
+                <a:solidFill>
+                  <a:schemeClr val="tx1"/>
+                </a:solidFill>
+                <a:latin typeface="+mn-lt"/>
+                <a:ea typeface="+mn-ea"/>
+                <a:cs typeface="+mn-cs"/>
+              </a:defRPr>
+            </a:lvl1pPr>
+            <a:lvl2pPr marL="685800" indent="-228600" algn="l" defTabSz="914400" rtl="0" eaLnBrk="1" latinLnBrk="0" hangingPunct="1">
+              <a:lnSpc>
+                <a:spcPct val="125000"/>
+              </a:lnSpc>
+              <a:spcBef>
+                <a:spcPts val="500"/>
+              </a:spcBef>
+              <a:buFont typeface="Arial" panose="020B0604020202020204" pitchFamily="34" charset="0"/>
+              <a:buChar char="•"/>
+              <a:defRPr sz="1600" kern="1200" spc="160">
+                <a:solidFill>
+                  <a:schemeClr val="tx1"/>
+                </a:solidFill>
+                <a:latin typeface="+mn-lt"/>
+                <a:ea typeface="+mn-ea"/>
+                <a:cs typeface="+mn-cs"/>
+              </a:defRPr>
+            </a:lvl2pPr>
+            <a:lvl3pPr marL="1143000" indent="-228600" algn="l" defTabSz="914400" rtl="0" eaLnBrk="1" latinLnBrk="0" hangingPunct="1">
+              <a:lnSpc>
+                <a:spcPct val="125000"/>
+              </a:lnSpc>
+              <a:spcBef>
+                <a:spcPts val="500"/>
+              </a:spcBef>
+              <a:buFont typeface="Arial" panose="020B0604020202020204" pitchFamily="34" charset="0"/>
+              <a:buChar char="•"/>
+              <a:defRPr sz="1600" kern="1200" spc="160">
+                <a:solidFill>
+                  <a:schemeClr val="tx1"/>
+                </a:solidFill>
+                <a:latin typeface="+mn-lt"/>
+                <a:ea typeface="+mn-ea"/>
+                <a:cs typeface="+mn-cs"/>
+              </a:defRPr>
+            </a:lvl3pPr>
+            <a:lvl4pPr marL="1600200" indent="-228600" algn="l" defTabSz="914400" rtl="0" eaLnBrk="1" latinLnBrk="0" hangingPunct="1">
+              <a:lnSpc>
+                <a:spcPct val="125000"/>
+              </a:lnSpc>
+              <a:spcBef>
+                <a:spcPts val="500"/>
+              </a:spcBef>
+              <a:buFont typeface="Arial" panose="020B0604020202020204" pitchFamily="34" charset="0"/>
+              <a:buChar char="•"/>
+              <a:defRPr sz="1600" kern="1200" spc="160">
+                <a:solidFill>
+                  <a:schemeClr val="tx1"/>
+                </a:solidFill>
+                <a:latin typeface="+mn-lt"/>
+                <a:ea typeface="+mn-ea"/>
+                <a:cs typeface="+mn-cs"/>
+              </a:defRPr>
+            </a:lvl4pPr>
+            <a:lvl5pPr marL="2057400" indent="-228600" algn="l" defTabSz="914400" rtl="0" eaLnBrk="1" latinLnBrk="0" hangingPunct="1">
+              <a:lnSpc>
+                <a:spcPct val="125000"/>
+              </a:lnSpc>
+              <a:spcBef>
+                <a:spcPts val="500"/>
+              </a:spcBef>
+              <a:buFont typeface="Arial" panose="020B0604020202020204" pitchFamily="34" charset="0"/>
+              <a:buChar char="•"/>
+              <a:defRPr sz="1600" kern="1200" spc="160">
+                <a:solidFill>
+                  <a:schemeClr val="tx1"/>
+                </a:solidFill>
+                <a:latin typeface="+mn-lt"/>
+                <a:ea typeface="+mn-ea"/>
+                <a:cs typeface="+mn-cs"/>
+              </a:defRPr>
+            </a:lvl5pPr>
+            <a:lvl6pPr marL="2514600" indent="-228600" algn="l" defTabSz="914400" rtl="0" eaLnBrk="1" latinLnBrk="0" hangingPunct="1">
+              <a:lnSpc>
+                <a:spcPct val="90000"/>
+              </a:lnSpc>
+              <a:spcBef>
+                <a:spcPts val="500"/>
+              </a:spcBef>
+              <a:buFont typeface="Arial" panose="020B0604020202020204" pitchFamily="34" charset="0"/>
+              <a:buChar char="•"/>
+              <a:defRPr sz="1800" kern="1200">
+                <a:solidFill>
+                  <a:schemeClr val="tx1"/>
+                </a:solidFill>
+                <a:latin typeface="+mn-lt"/>
+                <a:ea typeface="+mn-ea"/>
+                <a:cs typeface="+mn-cs"/>
+              </a:defRPr>
+            </a:lvl6pPr>
+            <a:lvl7pPr marL="2971800" indent="-228600" algn="l" defTabSz="914400" rtl="0" eaLnBrk="1" latinLnBrk="0" hangingPunct="1">
+              <a:lnSpc>
+                <a:spcPct val="90000"/>
+              </a:lnSpc>
+              <a:spcBef>
+                <a:spcPts val="500"/>
+              </a:spcBef>
+              <a:buFont typeface="Arial" panose="020B0604020202020204" pitchFamily="34" charset="0"/>
+              <a:buChar char="•"/>
+              <a:defRPr sz="1800" kern="1200">
+                <a:solidFill>
+                  <a:schemeClr val="tx1"/>
+                </a:solidFill>
+                <a:latin typeface="+mn-lt"/>
+                <a:ea typeface="+mn-ea"/>
+                <a:cs typeface="+mn-cs"/>
+              </a:defRPr>
+            </a:lvl7pPr>
+            <a:lvl8pPr marL="3429000" indent="-228600" algn="l" defTabSz="914400" rtl="0" eaLnBrk="1" latinLnBrk="0" hangingPunct="1">
+              <a:lnSpc>
+                <a:spcPct val="90000"/>
+              </a:lnSpc>
+              <a:spcBef>
+                <a:spcPts val="500"/>
+              </a:spcBef>
+              <a:buFont typeface="Arial" panose="020B0604020202020204" pitchFamily="34" charset="0"/>
+              <a:buChar char="•"/>
+              <a:defRPr sz="1800" kern="1200">
+                <a:solidFill>
+                  <a:schemeClr val="tx1"/>
+                </a:solidFill>
+                <a:latin typeface="+mn-lt"/>
+                <a:ea typeface="+mn-ea"/>
+                <a:cs typeface="+mn-cs"/>
+              </a:defRPr>
+            </a:lvl8pPr>
+            <a:lvl9pPr marL="3886200" indent="-228600" algn="l" defTabSz="914400" rtl="0" eaLnBrk="1" latinLnBrk="0" hangingPunct="1">
+              <a:lnSpc>
+                <a:spcPct val="90000"/>
+              </a:lnSpc>
+              <a:spcBef>
+                <a:spcPts val="500"/>
+              </a:spcBef>
+              <a:buFont typeface="Arial" panose="020B0604020202020204" pitchFamily="34" charset="0"/>
+              <a:buChar char="•"/>
+              <a:defRPr sz="1800" kern="1200">
+                <a:solidFill>
+                  <a:schemeClr val="tx1"/>
+                </a:solidFill>
+                <a:latin typeface="+mn-lt"/>
+                <a:ea typeface="+mn-ea"/>
+                <a:cs typeface="+mn-cs"/>
+              </a:defRPr>
+            </a:lvl9pPr>
+          </a:lstStyle>
           <a:p>
             <a:pPr marL="0" indent="0">
-              <a:buFont typeface="Arial" panose="020B0604020202020204" pitchFamily="34" charset="0"/>
               <a:buNone/>
             </a:pPr>
             <a:r>
-              <a:rPr lang="zh-CN" altLang="en-US" sz="1200" dirty="0" smtClean="0">
-                <a:latin typeface="+mn-ea"/>
-              </a:rPr>
-              <a:t>通过操作可以将指数降低到</a:t>
-            </a:r>
-            <a:r>
-              <a:rPr lang="en-US" altLang="zh-CN" sz="1200" dirty="0" smtClean="0">
-                <a:latin typeface="+mn-ea"/>
-              </a:rPr>
-              <a:t>0</a:t>
-            </a:r>
-            <a:r>
-              <a:rPr lang="zh-CN" altLang="en-US" sz="1200" dirty="0" smtClean="0">
-                <a:latin typeface="+mn-ea"/>
-              </a:rPr>
-              <a:t>。</a:t>
-            </a:r>
-            <a:endParaRPr lang="zh-CN" altLang="en-US" sz="1200" dirty="0">
-              <a:latin typeface="+mn-ea"/>
-            </a:endParaRPr>
+              <a:rPr lang="zh-CN" altLang="en-US" sz="3200" dirty="0">
+                <a:effectLst>
+                  <a:outerShdw blurRad="38100" dist="38100" dir="2700000" algn="tl">
+                    <a:srgbClr val="000000">
+                      <a:alpha val="43137"/>
+                    </a:srgbClr>
+                  </a:outerShdw>
+                </a:effectLst>
+                <a:latin typeface="+mn-ea"/>
+              </a:rPr>
+              <a:t>关键调整技巧</a:t>
+            </a:r>
           </a:p>
         </p:txBody>
       </p:sp>
@@ -20172,10 +22262,17 @@
   <p:clrMapOvr>
     <a:masterClrMapping/>
   </p:clrMapOvr>
+  <p:timing>
+    <p:tnLst>
+      <p:par>
+        <p:cTn id="1" dur="indefinite" restart="never" nodeType="tmRoot"/>
+      </p:par>
+    </p:tnLst>
+  </p:timing>
 </p:sld>
 </file>
 
-<file path=ppt/slides/slide31.xml><?xml version="1.0" encoding="utf-8"?>
+<file path=ppt/slides/slide32.xml><?xml version="1.0" encoding="utf-8"?>
 <p:sld xmlns:a="http://schemas.openxmlformats.org/drawingml/2006/main" xmlns:r="http://schemas.openxmlformats.org/officeDocument/2006/relationships" xmlns:p="http://schemas.openxmlformats.org/presentationml/2006/main">
   <p:cSld>
     <p:spTree>
@@ -20226,8 +22323,8 @@
         </p:blipFill>
         <p:spPr>
           <a:xfrm>
-            <a:off x="8623299" y="5377512"/>
-            <a:ext cx="3053587" cy="1345614"/>
+            <a:off x="8569979" y="5193013"/>
+            <a:ext cx="3411708" cy="1503426"/>
           </a:xfrm>
           <a:prstGeom prst="rect">
             <a:avLst/>
@@ -20264,21 +22361,30 @@
           <a:lstStyle/>
           <a:p>
             <a:r>
-              <a:rPr lang="en-US" altLang="zh-CN" sz="900" dirty="0"/>
+              <a:rPr lang="en-US" altLang="zh-CN" sz="4400" dirty="0"/>
               <a:t>EFT</a:t>
             </a:r>
             <a:r>
-              <a:rPr lang="zh-CN" altLang="en-US" sz="900" dirty="0"/>
-              <a:t>心理自助操的流程设计（</a:t>
-            </a:r>
-            <a:r>
-              <a:rPr lang="en-US" altLang="zh-CN" sz="900" dirty="0"/>
-              <a:t>5</a:t>
-            </a:r>
-            <a:r>
-              <a:rPr lang="zh-CN" altLang="en-US" sz="900" dirty="0"/>
+              <a:rPr lang="zh-CN" altLang="en-US" sz="4400" dirty="0"/>
+              <a:t>心理自助</a:t>
+            </a:r>
+            <a:r>
+              <a:rPr lang="zh-CN" altLang="en-US" sz="4400" dirty="0"/>
+              <a:t>操关键技巧</a:t>
+            </a:r>
+            <a:r>
+              <a:rPr lang="zh-CN" altLang="en-US" sz="4400" dirty="0" smtClean="0"/>
+              <a:t>（</a:t>
+            </a:r>
+            <a:r>
+              <a:rPr lang="en-US" altLang="zh-CN" sz="4400" dirty="0"/>
+              <a:t>9</a:t>
+            </a:r>
+            <a:r>
+              <a:rPr lang="zh-CN" altLang="en-US" sz="4400" dirty="0" smtClean="0"/>
               <a:t>）</a:t>
             </a:r>
+            <a:endParaRPr lang="zh-CN" altLang="en-US" sz="4400" dirty="0"/>
           </a:p>
         </p:txBody>
       </p:sp>
@@ -20300,9 +22406,13 @@
         </p:nvSpPr>
         <p:spPr>
           <a:xfrm>
-            <a:off x="515115" y="1576785"/>
-            <a:ext cx="3085590" cy="3989337"/>
+            <a:off x="515114" y="1576786"/>
+            <a:ext cx="3698743" cy="4367940"/>
           </a:xfrm>
+          <a:noFill/>
+          <a:ln>
+            <a:noFill/>
+          </a:ln>
         </p:spPr>
         <p:txBody>
           <a:bodyPr/>
@@ -20312,58 +22422,106 @@
               <a:buNone/>
             </a:pPr>
             <a:r>
-              <a:rPr lang="zh-CN" altLang="en-US" sz="1200" dirty="0">
-                <a:latin typeface="+mn-ea"/>
-              </a:rPr>
-              <a:t>    允许 </a:t>
-            </a:r>
-            <a:r>
-              <a:rPr lang="en-US" altLang="zh-CN" sz="1200" dirty="0">
+              <a:rPr lang="zh-CN" altLang="en-US" sz="1400" dirty="0">
+                <a:latin typeface="+mn-ea"/>
+              </a:rPr>
+              <a:t>    </a:t>
+            </a:r>
+            <a:r>
+              <a:rPr lang="zh-CN" altLang="en-US" sz="1400" b="1" dirty="0">
+                <a:latin typeface="+mn-ea"/>
+              </a:rPr>
+              <a:t>允许 </a:t>
+            </a:r>
+            <a:r>
+              <a:rPr lang="en-US" altLang="zh-CN" sz="1400" b="1" dirty="0">
                 <a:latin typeface="+mn-ea"/>
               </a:rPr>
               <a:t>1-2 </a:t>
             </a:r>
             <a:r>
-              <a:rPr lang="zh-CN" altLang="en-US" sz="1200" dirty="0">
-                <a:latin typeface="+mn-ea"/>
-              </a:rPr>
-              <a:t>厘米的偏差：比如 “眼侧穴”（瞳子髎附近），只要敲击在眼外侧眶骨周围 </a:t>
-            </a:r>
-            <a:r>
-              <a:rPr lang="en-US" altLang="zh-CN" sz="1200" dirty="0">
-                <a:latin typeface="+mn-ea"/>
-              </a:rPr>
-              <a:t>1 </a:t>
-            </a:r>
-            <a:r>
-              <a:rPr lang="zh-CN" altLang="en-US" sz="1200" dirty="0">
-                <a:latin typeface="+mn-ea"/>
-              </a:rPr>
-              <a:t>厘米范围内，就能触发对应的情绪能量疏导，无需严格卡在 “外眼角 </a:t>
-            </a:r>
-            <a:r>
-              <a:rPr lang="en-US" altLang="zh-CN" sz="1200" dirty="0">
-                <a:latin typeface="+mn-ea"/>
-              </a:rPr>
-              <a:t>0.5 </a:t>
-            </a:r>
-            <a:r>
-              <a:rPr lang="zh-CN" altLang="en-US" sz="1200" dirty="0">
-                <a:latin typeface="+mn-ea"/>
-              </a:rPr>
-              <a:t>厘米凹陷处”；再如 “锁骨下方穴”，只要敲击在锁骨与第一肋的交汇处附近（前后偏差不超过 </a:t>
-            </a:r>
-            <a:r>
-              <a:rPr lang="en-US" altLang="zh-CN" sz="1200" dirty="0">
-                <a:latin typeface="+mn-ea"/>
-              </a:rPr>
-              <a:t>2 </a:t>
-            </a:r>
-            <a:r>
-              <a:rPr lang="zh-CN" altLang="en-US" sz="1200" dirty="0">
-                <a:latin typeface="+mn-ea"/>
-              </a:rPr>
-              <a:t>厘米），无论是否精准命中俞府穴，都能起到缓解胸闷的作用。</a:t>
+              <a:rPr lang="zh-CN" altLang="en-US" sz="1400" b="1" dirty="0">
+                <a:latin typeface="+mn-ea"/>
+              </a:rPr>
+              <a:t>厘米的偏差：</a:t>
+            </a:r>
+            <a:r>
+              <a:rPr lang="zh-CN" altLang="en-US" sz="1400" dirty="0">
+                <a:latin typeface="+mn-ea"/>
+              </a:rPr>
+              <a:t>比如 “眼侧穴”（瞳子髎附近），只要敲击在眼外侧眶骨</a:t>
+            </a:r>
+            <a:r>
+              <a:rPr lang="zh-CN" altLang="en-US" sz="1400" dirty="0" smtClean="0">
+                <a:latin typeface="+mn-ea"/>
+              </a:rPr>
+              <a:t>周围</a:t>
+            </a:r>
+            <a:r>
+              <a:rPr lang="en-US" altLang="zh-CN" sz="1400" dirty="0" smtClean="0">
+                <a:latin typeface="+mn-ea"/>
+              </a:rPr>
+              <a:t>1</a:t>
+            </a:r>
+            <a:r>
+              <a:rPr lang="zh-CN" altLang="en-US" sz="1400" dirty="0" smtClean="0">
+                <a:latin typeface="+mn-ea"/>
+              </a:rPr>
+              <a:t>厘米</a:t>
+            </a:r>
+            <a:r>
+              <a:rPr lang="zh-CN" altLang="en-US" sz="1400" dirty="0">
+                <a:latin typeface="+mn-ea"/>
+              </a:rPr>
+              <a:t>范围内，就能触发对应的情绪能量疏导，无需严格卡在 “外</a:t>
+            </a:r>
+            <a:r>
+              <a:rPr lang="zh-CN" altLang="en-US" sz="1400" dirty="0" smtClean="0">
+                <a:latin typeface="+mn-ea"/>
+              </a:rPr>
+              <a:t>眼角</a:t>
+            </a:r>
+            <a:r>
+              <a:rPr lang="en-US" altLang="zh-CN" sz="1400" dirty="0" smtClean="0">
+                <a:latin typeface="+mn-ea"/>
+              </a:rPr>
+              <a:t>0.5</a:t>
+            </a:r>
+            <a:r>
+              <a:rPr lang="zh-CN" altLang="en-US" sz="1400" dirty="0" smtClean="0">
+                <a:latin typeface="+mn-ea"/>
+              </a:rPr>
+              <a:t>厘米</a:t>
+            </a:r>
+            <a:r>
+              <a:rPr lang="zh-CN" altLang="en-US" sz="1400" dirty="0">
+                <a:latin typeface="+mn-ea"/>
+              </a:rPr>
+              <a:t>凹陷处”；再如 “锁骨下方穴”，只要敲击在锁骨与第一肋的交汇处附近（前后偏差不</a:t>
+            </a:r>
+            <a:r>
+              <a:rPr lang="zh-CN" altLang="en-US" sz="1400" dirty="0" smtClean="0">
+                <a:latin typeface="+mn-ea"/>
+              </a:rPr>
+              <a:t>超过</a:t>
+            </a:r>
+            <a:r>
+              <a:rPr lang="en-US" altLang="zh-CN" sz="1400" dirty="0" smtClean="0">
+                <a:latin typeface="+mn-ea"/>
+              </a:rPr>
+              <a:t>2</a:t>
+            </a:r>
+            <a:r>
+              <a:rPr lang="zh-CN" altLang="en-US" sz="1400" dirty="0" smtClean="0">
+                <a:latin typeface="+mn-ea"/>
+              </a:rPr>
+              <a:t>厘米</a:t>
+            </a:r>
+            <a:r>
+              <a:rPr lang="zh-CN" altLang="en-US" sz="1400" dirty="0">
+                <a:latin typeface="+mn-ea"/>
+              </a:rPr>
+              <a:t>），无论是否精准命中俞府穴，都能起到缓解胸闷的作用。</a:t>
             </a:r>
           </a:p>
           <a:p>
@@ -20371,34 +22529,70 @@
               <a:buNone/>
             </a:pPr>
             <a:r>
-              <a:rPr lang="zh-CN" altLang="en-US" sz="1200" dirty="0">
-                <a:latin typeface="+mn-ea"/>
-              </a:rPr>
-              <a:t>    以 “感觉舒适 </a:t>
-            </a:r>
-            <a:r>
-              <a:rPr lang="en-US" altLang="zh-CN" sz="1200" dirty="0">
-                <a:latin typeface="+mn-ea"/>
-              </a:rPr>
-              <a:t>+ </a:t>
-            </a:r>
-            <a:r>
-              <a:rPr lang="zh-CN" altLang="en-US" sz="1200" dirty="0">
-                <a:latin typeface="+mn-ea"/>
-              </a:rPr>
-              <a:t>有酸胀感” 为辅助判断：敲击时若能感受到轻微的酸胀、发麻，或单纯觉得 “这个位置敲击起来情绪更易流动”，即使位置略有偏差，也符合 </a:t>
-            </a:r>
-            <a:r>
-              <a:rPr lang="en-US" altLang="zh-CN" sz="1200" dirty="0">
-                <a:latin typeface="+mn-ea"/>
-              </a:rPr>
-              <a:t>EFT </a:t>
-            </a:r>
-            <a:r>
-              <a:rPr lang="zh-CN" altLang="en-US" sz="1200" dirty="0">
-                <a:latin typeface="+mn-ea"/>
-              </a:rPr>
-              <a:t>的要求；反之，若敲击时感到疼痛、不适（如眼部周围用力过猛），则需调整位置，而非强行对准 “标准点”。</a:t>
+              <a:rPr lang="zh-CN" altLang="en-US" sz="1400" dirty="0">
+                <a:latin typeface="+mn-ea"/>
+              </a:rPr>
+              <a:t>    </a:t>
+            </a:r>
+            <a:r>
+              <a:rPr lang="zh-CN" altLang="en-US" sz="1400" b="1" dirty="0">
+                <a:latin typeface="+mn-ea"/>
+              </a:rPr>
+              <a:t>以 “感觉</a:t>
+            </a:r>
+            <a:r>
+              <a:rPr lang="zh-CN" altLang="en-US" sz="1400" b="1" dirty="0" smtClean="0">
+                <a:latin typeface="+mn-ea"/>
+              </a:rPr>
+              <a:t>舒适</a:t>
+            </a:r>
+            <a:r>
+              <a:rPr lang="en-US" altLang="zh-CN" sz="1400" b="1" dirty="0" smtClean="0">
+                <a:latin typeface="+mn-ea"/>
+              </a:rPr>
+              <a:t>+</a:t>
+            </a:r>
+            <a:r>
+              <a:rPr lang="zh-CN" altLang="en-US" sz="1400" b="1" dirty="0" smtClean="0">
+                <a:latin typeface="+mn-ea"/>
+              </a:rPr>
+              <a:t>有</a:t>
+            </a:r>
+            <a:r>
+              <a:rPr lang="zh-CN" altLang="en-US" sz="1400" b="1" dirty="0">
+                <a:latin typeface="+mn-ea"/>
+              </a:rPr>
+              <a:t>酸胀感” 为辅助判断：</a:t>
+            </a:r>
+            <a:r>
+              <a:rPr lang="zh-CN" altLang="en-US" sz="1400" dirty="0">
+                <a:latin typeface="+mn-ea"/>
+              </a:rPr>
+              <a:t>敲击时若能感受到轻微的酸胀、发麻，或单纯觉得 “这个位置敲击起来情绪更易流动”，即使位置略有偏差，也</a:t>
+            </a:r>
+            <a:r>
+              <a:rPr lang="zh-CN" altLang="en-US" sz="1400" dirty="0" smtClean="0">
+                <a:latin typeface="+mn-ea"/>
+              </a:rPr>
+              <a:t>符合</a:t>
+            </a:r>
+            <a:r>
+              <a:rPr lang="en-US" altLang="zh-CN" sz="1400" dirty="0" smtClean="0">
+                <a:latin typeface="+mn-ea"/>
+              </a:rPr>
+              <a:t>EFT</a:t>
+            </a:r>
+            <a:r>
+              <a:rPr lang="zh-CN" altLang="en-US" sz="1400" dirty="0" smtClean="0">
+                <a:latin typeface="+mn-ea"/>
+              </a:rPr>
+              <a:t>的</a:t>
+            </a:r>
+            <a:r>
+              <a:rPr lang="zh-CN" altLang="en-US" sz="1400" dirty="0">
+                <a:latin typeface="+mn-ea"/>
+              </a:rPr>
+              <a:t>要求；反之，若敲击时感到疼痛、不适（如眼部周围用力过猛），则需调整位置，而非强行对准 “标准点”。</a:t>
             </a:r>
           </a:p>
         </p:txBody>
@@ -20419,8 +22613,8 @@
         </p:nvSpPr>
         <p:spPr>
           <a:xfrm>
-            <a:off x="264035" y="5566122"/>
-            <a:ext cx="4779454" cy="757207"/>
+            <a:off x="515114" y="6004560"/>
+            <a:ext cx="4779454" cy="625864"/>
           </a:xfrm>
           <a:prstGeom prst="rect">
             <a:avLst/>
@@ -20628,12 +22822,15 @@
         </p:nvSpPr>
         <p:spPr>
           <a:xfrm>
-            <a:off x="3479800" y="1538447"/>
-            <a:ext cx="8203183" cy="2337518"/>
+            <a:off x="4213859" y="1576786"/>
+            <a:ext cx="7463027" cy="2423713"/>
           </a:xfrm>
           <a:prstGeom prst="rect">
             <a:avLst/>
           </a:prstGeom>
+          <a:ln>
+            <a:noFill/>
+          </a:ln>
         </p:spPr>
         <p:txBody>
           <a:bodyPr lIns="109728" tIns="109728" rIns="109728" bIns="91440"/>
@@ -20803,35 +23000,62 @@
           </a:lstStyle>
           <a:p>
             <a:pPr marL="0" indent="0">
+              <a:lnSpc>
+                <a:spcPts val="1600"/>
+              </a:lnSpc>
               <a:buFont typeface="Arial" panose="020B0604020202020204" pitchFamily="34" charset="0"/>
               <a:buNone/>
             </a:pPr>
             <a:r>
-              <a:rPr lang="zh-CN" altLang="en-US" sz="1200" dirty="0">
-                <a:latin typeface="+mn-ea"/>
-              </a:rPr>
-              <a:t>    穴位区域不能错：比如 “眉头穴” 必须在眉头内侧区域（不能敲到额头中间），“腋下穴” 必须在腋窝下方 </a:t>
-            </a:r>
-            <a:r>
-              <a:rPr lang="en-US" altLang="zh-CN" sz="1200" dirty="0">
-                <a:latin typeface="+mn-ea"/>
-              </a:rPr>
-              <a:t>10 </a:t>
-            </a:r>
-            <a:r>
-              <a:rPr lang="zh-CN" altLang="en-US" sz="1200" dirty="0">
-                <a:latin typeface="+mn-ea"/>
-              </a:rPr>
-              <a:t>厘米左右（不能敲到上臂或胸口正中间）</a:t>
-            </a:r>
-            <a:r>
-              <a:rPr lang="en-US" altLang="zh-CN" sz="1200" dirty="0">
+              <a:rPr lang="zh-CN" altLang="en-US" sz="1400" dirty="0">
+                <a:latin typeface="+mn-ea"/>
+              </a:rPr>
+              <a:t>    </a:t>
+            </a:r>
+            <a:r>
+              <a:rPr lang="zh-CN" altLang="en-US" sz="1400" b="1" dirty="0">
+                <a:latin typeface="+mn-ea"/>
+              </a:rPr>
+              <a:t>穴位区域不能错：</a:t>
+            </a:r>
+            <a:r>
+              <a:rPr lang="zh-CN" altLang="en-US" sz="1400" dirty="0">
+                <a:latin typeface="+mn-ea"/>
+              </a:rPr>
+              <a:t>比如 “眉头穴” 必须在眉头内侧区域（不能敲到额头中间），“腋下穴” 必须在腋窝</a:t>
+            </a:r>
+            <a:r>
+              <a:rPr lang="zh-CN" altLang="en-US" sz="1400" dirty="0" smtClean="0">
+                <a:latin typeface="+mn-ea"/>
+              </a:rPr>
+              <a:t>下方</a:t>
+            </a:r>
+            <a:r>
+              <a:rPr lang="en-US" altLang="zh-CN" sz="1400" dirty="0" smtClean="0">
+                <a:latin typeface="+mn-ea"/>
+              </a:rPr>
+              <a:t>10</a:t>
+            </a:r>
+            <a:r>
+              <a:rPr lang="zh-CN" altLang="en-US" sz="1400" dirty="0" smtClean="0">
+                <a:latin typeface="+mn-ea"/>
+              </a:rPr>
+              <a:t>厘米</a:t>
+            </a:r>
+            <a:r>
+              <a:rPr lang="zh-CN" altLang="en-US" sz="1400" dirty="0">
+                <a:latin typeface="+mn-ea"/>
+              </a:rPr>
+              <a:t>左右（不能敲到上臂或胸口正中间）</a:t>
+            </a:r>
+            <a:r>
+              <a:rPr lang="en-US" altLang="zh-CN" sz="1400" dirty="0">
                 <a:latin typeface="+mn-ea"/>
               </a:rPr>
               <a:t>—— </a:t>
             </a:r>
             <a:r>
-              <a:rPr lang="zh-CN" altLang="en-US" sz="1200" dirty="0">
+              <a:rPr lang="zh-CN" altLang="en-US" sz="1400" dirty="0">
                 <a:latin typeface="+mn-ea"/>
               </a:rPr>
               <a:t>核心区域不能偏离，否则无法联动对应的情绪疏导通道。</a:t>
@@ -20839,47 +23063,89 @@
           </a:p>
           <a:p>
             <a:pPr marL="0" indent="0">
+              <a:lnSpc>
+                <a:spcPts val="1600"/>
+              </a:lnSpc>
               <a:buFont typeface="Arial" panose="020B0604020202020204" pitchFamily="34" charset="0"/>
               <a:buNone/>
             </a:pPr>
             <a:r>
-              <a:rPr lang="zh-CN" altLang="en-US" sz="1200" dirty="0">
-                <a:latin typeface="+mn-ea"/>
-              </a:rPr>
-              <a:t>    敏感部位需轻柔 </a:t>
-            </a:r>
-            <a:r>
-              <a:rPr lang="en-US" altLang="zh-CN" sz="1200" dirty="0">
-                <a:latin typeface="+mn-ea"/>
-              </a:rPr>
-              <a:t>+ </a:t>
-            </a:r>
-            <a:r>
-              <a:rPr lang="zh-CN" altLang="en-US" sz="1200" dirty="0">
-                <a:latin typeface="+mn-ea"/>
-              </a:rPr>
-              <a:t>避开创伤：眼部周围（眼侧、眼下）、人中、头顶等部位，必须用指尖轻柔敲击（避免用力按压），且不能敲眼球、鼻孔、耳道等脆弱组织；若有面部伤口、眼部炎症、锁骨骨折等情况，需避开对应区域，不可强行敲击。</a:t>
+              <a:rPr lang="zh-CN" altLang="en-US" sz="1400" dirty="0">
+                <a:latin typeface="+mn-ea"/>
+              </a:rPr>
+              <a:t>    </a:t>
+            </a:r>
+            <a:r>
+              <a:rPr lang="zh-CN" altLang="en-US" sz="1400" b="1" dirty="0">
+                <a:latin typeface="+mn-ea"/>
+              </a:rPr>
+              <a:t>敏感部位需</a:t>
+            </a:r>
+            <a:r>
+              <a:rPr lang="zh-CN" altLang="en-US" sz="1400" b="1" dirty="0" smtClean="0">
+                <a:latin typeface="+mn-ea"/>
+              </a:rPr>
+              <a:t>轻柔</a:t>
+            </a:r>
+            <a:r>
+              <a:rPr lang="en-US" altLang="zh-CN" sz="1400" b="1" dirty="0" smtClean="0">
+                <a:latin typeface="+mn-ea"/>
+              </a:rPr>
+              <a:t>+</a:t>
+            </a:r>
+            <a:r>
+              <a:rPr lang="zh-CN" altLang="en-US" sz="1400" b="1" dirty="0" smtClean="0">
+                <a:latin typeface="+mn-ea"/>
+              </a:rPr>
+              <a:t>避开</a:t>
+            </a:r>
+            <a:r>
+              <a:rPr lang="zh-CN" altLang="en-US" sz="1400" b="1" dirty="0">
+                <a:latin typeface="+mn-ea"/>
+              </a:rPr>
+              <a:t>创伤：</a:t>
+            </a:r>
+            <a:r>
+              <a:rPr lang="zh-CN" altLang="en-US" sz="1400" dirty="0">
+                <a:latin typeface="+mn-ea"/>
+              </a:rPr>
+              <a:t>眼部周围（眼侧、眼下）、人中、头顶等部位，必须用指尖轻柔敲击（避免用力按压），且不能敲眼球、鼻孔、耳道等脆弱组织；若有面部伤口、眼部炎症、锁骨骨折等情况，需避开对应区域，不可强行敲击。</a:t>
             </a:r>
           </a:p>
           <a:p>
             <a:pPr marL="0" indent="0">
+              <a:lnSpc>
+                <a:spcPts val="1600"/>
+              </a:lnSpc>
               <a:buFont typeface="Arial" panose="020B0604020202020204" pitchFamily="34" charset="0"/>
               <a:buNone/>
             </a:pPr>
             <a:r>
-              <a:rPr lang="zh-CN" altLang="en-US" sz="1200" dirty="0">
-                <a:latin typeface="+mn-ea"/>
-              </a:rPr>
-              <a:t>    核心穴位不可随意替换：基础 </a:t>
-            </a:r>
-            <a:r>
-              <a:rPr lang="en-US" altLang="zh-CN" sz="1200" dirty="0">
-                <a:latin typeface="+mn-ea"/>
-              </a:rPr>
-              <a:t>8-9 </a:t>
-            </a:r>
-            <a:r>
-              <a:rPr lang="zh-CN" altLang="en-US" sz="1200" dirty="0">
+              <a:rPr lang="zh-CN" altLang="en-US" sz="1400" dirty="0">
+                <a:latin typeface="+mn-ea"/>
+              </a:rPr>
+              <a:t>    </a:t>
+            </a:r>
+            <a:r>
+              <a:rPr lang="zh-CN" altLang="en-US" sz="1400" b="1" dirty="0">
+                <a:latin typeface="+mn-ea"/>
+              </a:rPr>
+              <a:t>核心穴位不可随意替换：</a:t>
+            </a:r>
+            <a:r>
+              <a:rPr lang="zh-CN" altLang="en-US" sz="1400" dirty="0">
+                <a:latin typeface="+mn-ea"/>
+              </a:rPr>
+              <a:t>基础 </a:t>
+            </a:r>
+            <a:r>
+              <a:rPr lang="en-US" altLang="zh-CN" sz="1400" dirty="0" smtClean="0">
+                <a:latin typeface="+mn-ea"/>
+              </a:rPr>
+              <a:t>9-13 </a:t>
+            </a:r>
+            <a:r>
+              <a:rPr lang="zh-CN" altLang="en-US" sz="1400" dirty="0">
                 <a:latin typeface="+mn-ea"/>
               </a:rPr>
               <a:t>个核心穴位（手刀点、眉头、眼侧、眼下、人中、下巴、锁骨下方、腋下、百会）是经过长期实践验证的 “情绪疏导关键区域”，不可用完全无关的部位替代（比如用脚背、手背替代锁骨下方），否则会失去情绪联动的效果。</a:t>
@@ -20903,12 +23169,15 @@
         </p:nvSpPr>
         <p:spPr>
           <a:xfrm>
-            <a:off x="3473703" y="3985811"/>
-            <a:ext cx="8203183" cy="2337518"/>
+            <a:off x="4213857" y="4000499"/>
+            <a:ext cx="7371591" cy="2251322"/>
           </a:xfrm>
           <a:prstGeom prst="rect">
             <a:avLst/>
           </a:prstGeom>
+          <a:ln>
+            <a:noFill/>
+          </a:ln>
         </p:spPr>
         <p:txBody>
           <a:bodyPr lIns="109728" tIns="109728" rIns="109728" bIns="91440"/>
@@ -21078,23 +23347,38 @@
           </a:lstStyle>
           <a:p>
             <a:pPr marL="0" indent="0">
+              <a:lnSpc>
+                <a:spcPts val="1600"/>
+              </a:lnSpc>
               <a:buFont typeface="Arial" panose="020B0604020202020204" pitchFamily="34" charset="0"/>
               <a:buNone/>
             </a:pPr>
             <a:r>
-              <a:rPr lang="zh-CN" altLang="en-US" sz="1200" dirty="0">
-                <a:latin typeface="+mn-ea"/>
-              </a:rPr>
-              <a:t>    新手阶段：参考 “标准区域” 找感觉：初期可按 </a:t>
-            </a:r>
-            <a:r>
-              <a:rPr lang="en-US" altLang="zh-CN" sz="1200" dirty="0">
+              <a:rPr lang="zh-CN" altLang="en-US" sz="1400" dirty="0">
+                <a:latin typeface="+mn-ea"/>
+              </a:rPr>
+              <a:t>    </a:t>
+            </a:r>
+            <a:r>
+              <a:rPr lang="zh-CN" altLang="en-US" sz="1400" b="1" dirty="0">
+                <a:latin typeface="+mn-ea"/>
+              </a:rPr>
+              <a:t>新手阶段：参考 “标准区域” 找感觉：</a:t>
+            </a:r>
+            <a:r>
+              <a:rPr lang="zh-CN" altLang="en-US" sz="1400" dirty="0">
+                <a:latin typeface="+mn-ea"/>
+              </a:rPr>
+              <a:t>初期可按 </a:t>
+            </a:r>
+            <a:r>
+              <a:rPr lang="en-US" altLang="zh-CN" sz="1400" dirty="0">
                 <a:latin typeface="+mn-ea"/>
               </a:rPr>
               <a:t>EFT </a:t>
             </a:r>
             <a:r>
-              <a:rPr lang="zh-CN" altLang="en-US" sz="1200" dirty="0">
+              <a:rPr lang="zh-CN" altLang="en-US" sz="1400" dirty="0">
                 <a:latin typeface="+mn-ea"/>
               </a:rPr>
               <a:t>的标准描述（如 “眉头内侧凹陷处”“锁骨与第一肋交汇处”）定位，先建立 “区域认知”，敲击时感受情绪是否有流动（如胸闷缓解、烦躁感减轻）。</a:t>
@@ -21102,23 +23386,38 @@
           </a:p>
           <a:p>
             <a:pPr marL="0" indent="0">
+              <a:lnSpc>
+                <a:spcPts val="1600"/>
+              </a:lnSpc>
               <a:buFont typeface="Arial" panose="020B0604020202020204" pitchFamily="34" charset="0"/>
               <a:buNone/>
             </a:pPr>
             <a:r>
-              <a:rPr lang="zh-CN" altLang="en-US" sz="1200" dirty="0">
-                <a:latin typeface="+mn-ea"/>
-              </a:rPr>
-              <a:t>    熟练后：按 “个人感受” 微调：若发现 “稍微偏离标准点” 敲击时情绪释放更明显（比如有人敲 “眼侧” 时，偏上 </a:t>
-            </a:r>
-            <a:r>
-              <a:rPr lang="en-US" altLang="zh-CN" sz="1200" dirty="0">
+              <a:rPr lang="zh-CN" altLang="en-US" sz="1400" dirty="0">
+                <a:latin typeface="+mn-ea"/>
+              </a:rPr>
+              <a:t>    </a:t>
+            </a:r>
+            <a:r>
+              <a:rPr lang="zh-CN" altLang="en-US" sz="1400" b="1" dirty="0">
+                <a:latin typeface="+mn-ea"/>
+              </a:rPr>
+              <a:t>熟练后：按 “个人感受” 微调：</a:t>
+            </a:r>
+            <a:r>
+              <a:rPr lang="zh-CN" altLang="en-US" sz="1400" dirty="0">
+                <a:latin typeface="+mn-ea"/>
+              </a:rPr>
+              <a:t>若发现 “稍微偏离标准点” 敲击时情绪释放更明显（比如有人敲 “眼侧” 时，偏上 </a:t>
+            </a:r>
+            <a:r>
+              <a:rPr lang="en-US" altLang="zh-CN" sz="1400" dirty="0">
                 <a:latin typeface="+mn-ea"/>
               </a:rPr>
               <a:t>1 </a:t>
             </a:r>
             <a:r>
-              <a:rPr lang="zh-CN" altLang="en-US" sz="1200" dirty="0">
+              <a:rPr lang="zh-CN" altLang="en-US" sz="1400" dirty="0">
                 <a:latin typeface="+mn-ea"/>
               </a:rPr>
               <a:t>厘米的位置更易平复紧张），可固定自己的 “舒适位置”，无需强行纠正为 “标准点”。</a:t>
@@ -21126,22 +23425,127 @@
           </a:p>
           <a:p>
             <a:pPr marL="0" indent="0">
+              <a:lnSpc>
+                <a:spcPts val="1600"/>
+              </a:lnSpc>
               <a:buFont typeface="Arial" panose="020B0604020202020204" pitchFamily="34" charset="0"/>
               <a:buNone/>
             </a:pPr>
             <a:r>
-              <a:rPr lang="zh-CN" altLang="en-US" sz="1200" dirty="0">
-                <a:latin typeface="+mn-ea"/>
-              </a:rPr>
-              <a:t>    避免两个极端：① 不必纠结 “是否绝对精准”，过度追求解剖学定位会忽视情绪感受，反而降低效果；② 不可完全随意敲击（如把 “腋下穴” 敲到大腿上），核心区域偏离会导致情绪能量无法有效疏导，相当于 “无效敲击”。</a:t>
-            </a:r>
+              <a:rPr lang="zh-CN" altLang="en-US" sz="1400" dirty="0">
+                <a:latin typeface="+mn-ea"/>
+              </a:rPr>
+              <a:t>    </a:t>
+            </a:r>
+            <a:r>
+              <a:rPr lang="zh-CN" altLang="en-US" sz="1400" b="1" dirty="0">
+                <a:latin typeface="+mn-ea"/>
+              </a:rPr>
+              <a:t>避免两个极端：</a:t>
+            </a:r>
+            <a:r>
+              <a:rPr lang="zh-CN" altLang="en-US" sz="1400" dirty="0">
+                <a:latin typeface="+mn-ea"/>
+              </a:rPr>
+              <a:t>① 不必纠结 “是否绝对精准”</a:t>
+            </a:r>
+            <a:r>
+              <a:rPr lang="zh-CN" altLang="en-US" sz="1400" dirty="0" smtClean="0">
+                <a:latin typeface="+mn-ea"/>
+              </a:rPr>
+              <a:t>，</a:t>
+            </a:r>
+            <a:endParaRPr lang="en-US" altLang="zh-CN" sz="1400" dirty="0" smtClean="0">
+              <a:latin typeface="+mn-ea"/>
+            </a:endParaRPr>
           </a:p>
           <a:p>
             <a:pPr marL="0" indent="0">
+              <a:lnSpc>
+                <a:spcPts val="1600"/>
+              </a:lnSpc>
               <a:buFont typeface="Arial" panose="020B0604020202020204" pitchFamily="34" charset="0"/>
               <a:buNone/>
             </a:pPr>
-            <a:endParaRPr lang="zh-CN" altLang="en-US" sz="1200" dirty="0">
+            <a:r>
+              <a:rPr lang="zh-CN" altLang="en-US" sz="1400" dirty="0" smtClean="0">
+                <a:latin typeface="+mn-ea"/>
+              </a:rPr>
+              <a:t>过度</a:t>
+            </a:r>
+            <a:r>
+              <a:rPr lang="zh-CN" altLang="en-US" sz="1400" dirty="0">
+                <a:latin typeface="+mn-ea"/>
+              </a:rPr>
+              <a:t>追求解剖学定位会忽视情绪感受，反而降低效果</a:t>
+            </a:r>
+            <a:r>
+              <a:rPr lang="zh-CN" altLang="en-US" sz="1400" dirty="0" smtClean="0">
+                <a:latin typeface="+mn-ea"/>
+              </a:rPr>
+              <a:t>；</a:t>
+            </a:r>
+            <a:endParaRPr lang="en-US" altLang="zh-CN" sz="1400" dirty="0" smtClean="0">
+              <a:latin typeface="+mn-ea"/>
+            </a:endParaRPr>
+          </a:p>
+          <a:p>
+            <a:pPr marL="0" indent="0">
+              <a:lnSpc>
+                <a:spcPts val="1600"/>
+              </a:lnSpc>
+              <a:buFont typeface="Arial" panose="020B0604020202020204" pitchFamily="34" charset="0"/>
+              <a:buNone/>
+            </a:pPr>
+            <a:r>
+              <a:rPr lang="zh-CN" altLang="en-US" sz="1400" dirty="0" smtClean="0">
+                <a:latin typeface="+mn-ea"/>
+              </a:rPr>
+              <a:t>② </a:t>
+            </a:r>
+            <a:r>
+              <a:rPr lang="zh-CN" altLang="en-US" sz="1400" dirty="0">
+                <a:latin typeface="+mn-ea"/>
+              </a:rPr>
+              <a:t>不可完全随意敲击（如把 “腋下穴” 敲到大腿上</a:t>
+            </a:r>
+            <a:r>
+              <a:rPr lang="zh-CN" altLang="en-US" sz="1400" dirty="0" smtClean="0">
+                <a:latin typeface="+mn-ea"/>
+              </a:rPr>
+              <a:t>），</a:t>
+            </a:r>
+            <a:endParaRPr lang="en-US" altLang="zh-CN" sz="1400" dirty="0" smtClean="0">
+              <a:latin typeface="+mn-ea"/>
+            </a:endParaRPr>
+          </a:p>
+          <a:p>
+            <a:pPr marL="0" indent="0">
+              <a:lnSpc>
+                <a:spcPts val="1600"/>
+              </a:lnSpc>
+              <a:buFont typeface="Arial" panose="020B0604020202020204" pitchFamily="34" charset="0"/>
+              <a:buNone/>
+            </a:pPr>
+            <a:r>
+              <a:rPr lang="zh-CN" altLang="en-US" sz="1400" dirty="0" smtClean="0">
+                <a:latin typeface="+mn-ea"/>
+              </a:rPr>
+              <a:t>核心</a:t>
+            </a:r>
+            <a:r>
+              <a:rPr lang="zh-CN" altLang="en-US" sz="1400" dirty="0">
+                <a:latin typeface="+mn-ea"/>
+              </a:rPr>
+              <a:t>区域偏离会导致情绪能量无法有效疏导，相当于 “无效敲击”。</a:t>
+            </a:r>
+          </a:p>
+          <a:p>
+            <a:pPr marL="0" indent="0">
+              <a:buFont typeface="Arial" panose="020B0604020202020204" pitchFamily="34" charset="0"/>
+              <a:buNone/>
+            </a:pPr>
+            <a:endParaRPr lang="zh-CN" altLang="en-US" sz="1400" dirty="0">
               <a:latin typeface="+mn-ea"/>
             </a:endParaRPr>
           </a:p>
@@ -21157,10 +23561,17 @@
   <p:clrMapOvr>
     <a:masterClrMapping/>
   </p:clrMapOvr>
+  <p:timing>
+    <p:tnLst>
+      <p:par>
+        <p:cTn id="1" dur="indefinite" restart="never" nodeType="tmRoot"/>
+      </p:par>
+    </p:tnLst>
+  </p:timing>
 </p:sld>
 </file>
 
-<file path=ppt/slides/slide32.xml><?xml version="1.0" encoding="utf-8"?>
+<file path=ppt/slides/slide33.xml><?xml version="1.0" encoding="utf-8"?>
 <p:sld xmlns:a="http://schemas.openxmlformats.org/drawingml/2006/main" xmlns:r="http://schemas.openxmlformats.org/officeDocument/2006/relationships" xmlns:p="http://schemas.openxmlformats.org/presentationml/2006/main">
   <p:cSld>
     <p:spTree>
@@ -21183,6 +23594,45 @@
           <a:chExt cx="0" cy="0"/>
         </a:xfrm>
       </p:grpSpPr>
+      <p:pic>
+        <p:nvPicPr>
+          <p:cNvPr id="8" name="图片 7">
+            <a:extLst>
+              <a:ext uri="{FF2B5EF4-FFF2-40B4-BE49-F238E27FC236}">
+                <a16:creationId xmlns:a16="http://schemas.microsoft.com/office/drawing/2014/main" id="{5D24E448-7708-ECF7-BCD3-B5EC4EA507B8}"/>
+              </a:ext>
+            </a:extLst>
+          </p:cNvPr>
+          <p:cNvPicPr>
+            <a:picLocks noChangeAspect="1"/>
+          </p:cNvPicPr>
+          <p:nvPr/>
+        </p:nvPicPr>
+        <p:blipFill>
+          <a:blip r:embed="rId2" cstate="screen">
+            <a:extLst>
+              <a:ext uri="{28A0092B-C50C-407E-A947-70E740481C1C}">
+                <a14:useLocalDpi xmlns:a14="http://schemas.microsoft.com/office/drawing/2010/main"/>
+              </a:ext>
+            </a:extLst>
+          </a:blip>
+          <a:stretch>
+            <a:fillRect/>
+          </a:stretch>
+        </p:blipFill>
+        <p:spPr>
+          <a:xfrm>
+            <a:off x="6096000" y="3966268"/>
+            <a:ext cx="5704764" cy="2513899"/>
+          </a:xfrm>
+          <a:prstGeom prst="rect">
+            <a:avLst/>
+          </a:prstGeom>
+          <a:effectLst>
+            <a:softEdge rad="127000"/>
+          </a:effectLst>
+        </p:spPr>
+      </p:pic>
       <p:sp>
         <p:nvSpPr>
           <p:cNvPr id="2" name="标题 1">
@@ -21210,21 +23660,30 @@
           <a:lstStyle/>
           <a:p>
             <a:r>
-              <a:rPr lang="en-US" altLang="zh-CN" sz="900" dirty="0"/>
+              <a:rPr lang="en-US" altLang="zh-CN" sz="4400" dirty="0"/>
               <a:t>EFT</a:t>
             </a:r>
             <a:r>
-              <a:rPr lang="zh-CN" altLang="en-US" sz="900" dirty="0"/>
-              <a:t>心理自助操的流程设计（</a:t>
-            </a:r>
-            <a:r>
-              <a:rPr lang="en-US" altLang="zh-CN" sz="900" dirty="0"/>
-              <a:t>5</a:t>
-            </a:r>
-            <a:r>
-              <a:rPr lang="zh-CN" altLang="en-US" sz="900" dirty="0"/>
+              <a:rPr lang="zh-CN" altLang="en-US" sz="4400" dirty="0"/>
+              <a:t>心理自助</a:t>
+            </a:r>
+            <a:r>
+              <a:rPr lang="zh-CN" altLang="en-US" sz="4400" dirty="0"/>
+              <a:t>操关键技巧</a:t>
+            </a:r>
+            <a:r>
+              <a:rPr lang="zh-CN" altLang="en-US" sz="4400" dirty="0" smtClean="0"/>
+              <a:t>（</a:t>
+            </a:r>
+            <a:r>
+              <a:rPr lang="en-US" altLang="zh-CN" sz="4400" dirty="0" smtClean="0"/>
+              <a:t>10</a:t>
+            </a:r>
+            <a:r>
+              <a:rPr lang="zh-CN" altLang="en-US" sz="4400" dirty="0" smtClean="0"/>
               <a:t>）</a:t>
             </a:r>
+            <a:endParaRPr lang="zh-CN" altLang="en-US" sz="4400" dirty="0"/>
           </a:p>
         </p:txBody>
       </p:sp>
@@ -21258,16 +23717,22 @@
               <a:buNone/>
             </a:pPr>
             <a:r>
-              <a:rPr lang="en-US" altLang="zh-CN" sz="1400" dirty="0">
-                <a:latin typeface="+mn-ea"/>
-              </a:rPr>
-              <a:t>1. </a:t>
-            </a:r>
-            <a:r>
-              <a:rPr lang="zh-CN" altLang="en-US" sz="1400" dirty="0">
-                <a:latin typeface="+mn-ea"/>
-              </a:rPr>
-              <a:t>情绪强度未下降？</a:t>
+              <a:rPr lang="en-US" altLang="zh-CN" b="1" dirty="0" smtClean="0">
+                <a:latin typeface="+mn-ea"/>
+              </a:rPr>
+              <a:t>1</a:t>
+            </a:r>
+            <a:r>
+              <a:rPr lang="zh-CN" altLang="en-US" b="1" dirty="0" smtClean="0">
+                <a:latin typeface="+mn-ea"/>
+              </a:rPr>
+              <a:t>、情绪</a:t>
+            </a:r>
+            <a:r>
+              <a:rPr lang="zh-CN" altLang="en-US" b="1" dirty="0">
+                <a:latin typeface="+mn-ea"/>
+              </a:rPr>
+              <a:t>强度未下降？</a:t>
             </a:r>
           </a:p>
           <a:p>
@@ -21275,19 +23740,19 @@
               <a:buNone/>
             </a:pPr>
             <a:r>
-              <a:rPr lang="zh-CN" altLang="en-US" sz="1400" dirty="0">
+              <a:rPr lang="zh-CN" altLang="en-US" dirty="0">
                 <a:latin typeface="+mn-ea"/>
               </a:rPr>
               <a:t>   </a:t>
             </a:r>
             <a:r>
-              <a:rPr lang="en-US" altLang="zh-CN" sz="1400" dirty="0">
+              <a:rPr lang="en-US" altLang="zh-CN" dirty="0">
                 <a:latin typeface="+mn-ea"/>
               </a:rPr>
               <a:t>- </a:t>
             </a:r>
             <a:r>
-              <a:rPr lang="zh-CN" altLang="en-US" sz="1400" dirty="0">
+              <a:rPr lang="zh-CN" altLang="en-US" dirty="0">
                 <a:latin typeface="+mn-ea"/>
               </a:rPr>
               <a:t>检查是否情绪描述不够具体（如把 “怕水” 细化为 “怕泳池的深水”），重新设定语句。</a:t>
@@ -21298,34 +23763,46 @@
               <a:buNone/>
             </a:pPr>
             <a:r>
-              <a:rPr lang="zh-CN" altLang="en-US" sz="1400" dirty="0">
+              <a:rPr lang="zh-CN" altLang="en-US" dirty="0">
                 <a:latin typeface="+mn-ea"/>
               </a:rPr>
               <a:t>   </a:t>
             </a:r>
             <a:r>
-              <a:rPr lang="en-US" altLang="zh-CN" sz="1400" dirty="0">
+              <a:rPr lang="en-US" altLang="zh-CN" dirty="0">
                 <a:latin typeface="+mn-ea"/>
               </a:rPr>
               <a:t>- </a:t>
             </a:r>
             <a:r>
-              <a:rPr lang="zh-CN" altLang="en-US" sz="1400" dirty="0">
-                <a:latin typeface="+mn-ea"/>
-              </a:rPr>
-              <a:t>增加 “腋下” 和 “锁骨” 穴位的敲击次数（各 </a:t>
-            </a:r>
-            <a:r>
-              <a:rPr lang="en-US" altLang="zh-CN" sz="1400" dirty="0">
-                <a:latin typeface="+mn-ea"/>
-              </a:rPr>
-              <a:t>10 </a:t>
-            </a:r>
-            <a:r>
-              <a:rPr lang="zh-CN" altLang="en-US" sz="1400" dirty="0">
-                <a:latin typeface="+mn-ea"/>
-              </a:rPr>
-              <a:t>次），这两个穴位更易疏导深层情绪。</a:t>
+              <a:rPr lang="zh-CN" altLang="en-US" dirty="0">
+                <a:latin typeface="+mn-ea"/>
+              </a:rPr>
+              <a:t>增加 “腋下” 和 “锁骨” 穴位的敲击次数（</a:t>
+            </a:r>
+            <a:r>
+              <a:rPr lang="zh-CN" altLang="en-US" dirty="0" smtClean="0">
+                <a:latin typeface="+mn-ea"/>
+              </a:rPr>
+              <a:t>各</a:t>
+            </a:r>
+            <a:r>
+              <a:rPr lang="en-US" altLang="zh-CN" dirty="0" smtClean="0">
+                <a:latin typeface="+mn-ea"/>
+              </a:rPr>
+              <a:t>10</a:t>
+            </a:r>
+            <a:r>
+              <a:rPr lang="zh-CN" altLang="en-US" dirty="0" smtClean="0">
+                <a:latin typeface="+mn-ea"/>
+              </a:rPr>
+              <a:t>次</a:t>
+            </a:r>
+            <a:r>
+              <a:rPr lang="zh-CN" altLang="en-US" dirty="0">
+                <a:latin typeface="+mn-ea"/>
+              </a:rPr>
+              <a:t>），这两个穴位更易疏导深层情绪。</a:t>
             </a:r>
           </a:p>
           <a:p>
@@ -21333,16 +23810,22 @@
               <a:buNone/>
             </a:pPr>
             <a:r>
-              <a:rPr lang="en-US" altLang="zh-CN" sz="1400" dirty="0">
-                <a:latin typeface="+mn-ea"/>
-              </a:rPr>
-              <a:t>2. </a:t>
-            </a:r>
-            <a:r>
-              <a:rPr lang="zh-CN" altLang="en-US" sz="1400" dirty="0">
-                <a:latin typeface="+mn-ea"/>
-              </a:rPr>
-              <a:t>伴随躯体不适（如胃痛、手抖）？</a:t>
+              <a:rPr lang="en-US" altLang="zh-CN" b="1" dirty="0" smtClean="0">
+                <a:latin typeface="+mn-ea"/>
+              </a:rPr>
+              <a:t>2</a:t>
+            </a:r>
+            <a:r>
+              <a:rPr lang="zh-CN" altLang="en-US" b="1" dirty="0" smtClean="0">
+                <a:latin typeface="+mn-ea"/>
+              </a:rPr>
+              <a:t>、伴随</a:t>
+            </a:r>
+            <a:r>
+              <a:rPr lang="zh-CN" altLang="en-US" b="1" dirty="0">
+                <a:latin typeface="+mn-ea"/>
+              </a:rPr>
+              <a:t>躯体不适（如胃痛、手抖）？</a:t>
             </a:r>
           </a:p>
           <a:p>
@@ -21350,19 +23833,19 @@
               <a:buNone/>
             </a:pPr>
             <a:r>
-              <a:rPr lang="zh-CN" altLang="en-US" sz="1400" dirty="0">
+              <a:rPr lang="zh-CN" altLang="en-US" dirty="0">
                 <a:latin typeface="+mn-ea"/>
               </a:rPr>
               <a:t>   </a:t>
             </a:r>
             <a:r>
-              <a:rPr lang="en-US" altLang="zh-CN" sz="1400" dirty="0">
+              <a:rPr lang="en-US" altLang="zh-CN" dirty="0">
                 <a:latin typeface="+mn-ea"/>
               </a:rPr>
               <a:t>- </a:t>
             </a:r>
             <a:r>
-              <a:rPr lang="zh-CN" altLang="en-US" sz="1400" dirty="0">
+              <a:rPr lang="zh-CN" altLang="en-US" dirty="0">
                 <a:latin typeface="+mn-ea"/>
               </a:rPr>
               <a:t>敲击时重点强化 “眼下”“锁骨” 穴位，提示语可结合躯体感受（如 “这份怕水带来的胃痛”）。</a:t>
@@ -21373,16 +23856,22 @@
               <a:buNone/>
             </a:pPr>
             <a:r>
-              <a:rPr lang="en-US" altLang="zh-CN" sz="1400" dirty="0">
-                <a:latin typeface="+mn-ea"/>
-              </a:rPr>
-              <a:t>3. </a:t>
-            </a:r>
-            <a:r>
-              <a:rPr lang="zh-CN" altLang="en-US" sz="1400" dirty="0">
-                <a:latin typeface="+mn-ea"/>
-              </a:rPr>
-              <a:t>多次循环后仍无改善？</a:t>
+              <a:rPr lang="en-US" altLang="zh-CN" b="1" dirty="0" smtClean="0">
+                <a:latin typeface="+mn-ea"/>
+              </a:rPr>
+              <a:t>3</a:t>
+            </a:r>
+            <a:r>
+              <a:rPr lang="zh-CN" altLang="en-US" b="1" dirty="0" smtClean="0">
+                <a:latin typeface="+mn-ea"/>
+              </a:rPr>
+              <a:t>、多次</a:t>
+            </a:r>
+            <a:r>
+              <a:rPr lang="zh-CN" altLang="en-US" b="1" dirty="0">
+                <a:latin typeface="+mn-ea"/>
+              </a:rPr>
+              <a:t>循环后仍无改善？</a:t>
             </a:r>
           </a:p>
           <a:p>
@@ -21390,19 +23879,19 @@
               <a:buNone/>
             </a:pPr>
             <a:r>
-              <a:rPr lang="zh-CN" altLang="en-US" sz="1400" dirty="0">
+              <a:rPr lang="zh-CN" altLang="en-US" dirty="0">
                 <a:latin typeface="+mn-ea"/>
               </a:rPr>
               <a:t>   </a:t>
             </a:r>
             <a:r>
-              <a:rPr lang="en-US" altLang="zh-CN" sz="1400" dirty="0">
+              <a:rPr lang="en-US" altLang="zh-CN" dirty="0">
                 <a:latin typeface="+mn-ea"/>
               </a:rPr>
               <a:t>- </a:t>
             </a:r>
             <a:r>
-              <a:rPr lang="zh-CN" altLang="en-US" sz="1400" dirty="0">
+              <a:rPr lang="zh-CN" altLang="en-US" dirty="0">
                 <a:latin typeface="+mn-ea"/>
               </a:rPr>
               <a:t>暂停操作，可能是情绪根源未找到（如怕水背后有具体创伤事件），建议结合专业心理疏导后再尝试。</a:t>
@@ -21426,7 +23915,7 @@
         </p:nvSpPr>
         <p:spPr>
           <a:xfrm>
-            <a:off x="264035" y="5566122"/>
+            <a:off x="515113" y="5722960"/>
             <a:ext cx="4779454" cy="757207"/>
           </a:xfrm>
           <a:prstGeom prst="rect">
@@ -21814,7 +24303,7 @@
               <a:buNone/>
             </a:pPr>
             <a:r>
-              <a:rPr lang="zh-CN" altLang="en-US" sz="1400" i="1" dirty="0">
+              <a:rPr lang="zh-CN" altLang="en-US" i="1" dirty="0">
                 <a:latin typeface="+mn-ea"/>
               </a:rPr>
               <a:t>重要提醒</a:t>
@@ -21826,16 +24315,46 @@
               <a:buNone/>
             </a:pPr>
             <a:r>
-              <a:rPr lang="en-US" altLang="zh-CN" sz="1400" i="1" dirty="0">
+              <a:rPr lang="en-US" altLang="zh-CN" i="1" dirty="0">
                 <a:latin typeface="+mn-ea"/>
               </a:rPr>
               <a:t>- EFT </a:t>
             </a:r>
             <a:r>
-              <a:rPr lang="zh-CN" altLang="en-US" sz="1400" i="1" dirty="0">
-                <a:latin typeface="+mn-ea"/>
-              </a:rPr>
-              <a:t>是**情绪缓解辅助工具**，不能替代专业心理治疗，若情绪问题严重（如影响正常生活、有极端想法），请及时寻求心理咨询师或医生帮助。</a:t>
+              <a:rPr lang="zh-CN" altLang="en-US" i="1" dirty="0" smtClean="0">
+                <a:latin typeface="+mn-ea"/>
+              </a:rPr>
+              <a:t>是</a:t>
+            </a:r>
+            <a:r>
+              <a:rPr lang="zh-CN" altLang="en-US" b="1" i="1" dirty="0" smtClean="0">
+                <a:latin typeface="+mn-ea"/>
+              </a:rPr>
+              <a:t>情绪</a:t>
+            </a:r>
+            <a:r>
+              <a:rPr lang="zh-CN" altLang="en-US" b="1" i="1" dirty="0">
+                <a:latin typeface="+mn-ea"/>
+              </a:rPr>
+              <a:t>缓解辅助</a:t>
+            </a:r>
+            <a:r>
+              <a:rPr lang="zh-CN" altLang="en-US" b="1" i="1" dirty="0" smtClean="0">
+                <a:latin typeface="+mn-ea"/>
+              </a:rPr>
+              <a:t>工具</a:t>
+            </a:r>
+            <a:r>
+              <a:rPr lang="zh-CN" altLang="en-US" i="1" dirty="0" smtClean="0">
+                <a:latin typeface="+mn-ea"/>
+              </a:rPr>
+              <a:t>，</a:t>
+            </a:r>
+            <a:r>
+              <a:rPr lang="zh-CN" altLang="en-US" i="1" dirty="0">
+                <a:latin typeface="+mn-ea"/>
+              </a:rPr>
+              <a:t>不能替代专业心理治疗，若情绪问题严重（如影响正常生活、有极端想法），请及时寻求心理咨询师或医生帮助。</a:t>
             </a:r>
           </a:p>
           <a:p>
@@ -21844,13 +24363,13 @@
               <a:buNone/>
             </a:pPr>
             <a:r>
-              <a:rPr lang="en-US" altLang="zh-CN" sz="1400" i="1" dirty="0">
+              <a:rPr lang="en-US" altLang="zh-CN" i="1" dirty="0">
                 <a:latin typeface="+mn-ea"/>
               </a:rPr>
               <a:t>- </a:t>
             </a:r>
             <a:r>
-              <a:rPr lang="zh-CN" altLang="en-US" sz="1400" i="1" dirty="0">
+              <a:rPr lang="zh-CN" altLang="en-US" i="1" dirty="0">
                 <a:latin typeface="+mn-ea"/>
               </a:rPr>
               <a:t>操作时若出现情绪崩溃（如哭泣、强烈不适），可先停止敲击，深呼吸平复后再继续，或分多次短时间操作。</a:t>
@@ -21858,45 +24377,6 @@
           </a:p>
         </p:txBody>
       </p:sp>
-      <p:pic>
-        <p:nvPicPr>
-          <p:cNvPr id="8" name="图片 7">
-            <a:extLst>
-              <a:ext uri="{FF2B5EF4-FFF2-40B4-BE49-F238E27FC236}">
-                <a16:creationId xmlns:a16="http://schemas.microsoft.com/office/drawing/2014/main" id="{5D24E448-7708-ECF7-BCD3-B5EC4EA507B8}"/>
-              </a:ext>
-            </a:extLst>
-          </p:cNvPr>
-          <p:cNvPicPr>
-            <a:picLocks noChangeAspect="1"/>
-          </p:cNvPicPr>
-          <p:nvPr/>
-        </p:nvPicPr>
-        <p:blipFill>
-          <a:blip r:embed="rId2" cstate="screen">
-            <a:extLst>
-              <a:ext uri="{28A0092B-C50C-407E-A947-70E740481C1C}">
-                <a14:useLocalDpi xmlns:a14="http://schemas.microsoft.com/office/drawing/2010/main"/>
-              </a:ext>
-            </a:extLst>
-          </a:blip>
-          <a:stretch>
-            <a:fillRect/>
-          </a:stretch>
-        </p:blipFill>
-        <p:spPr>
-          <a:xfrm>
-            <a:off x="5972123" y="4209227"/>
-            <a:ext cx="5704764" cy="2513899"/>
-          </a:xfrm>
-          <a:prstGeom prst="rect">
-            <a:avLst/>
-          </a:prstGeom>
-          <a:effectLst>
-            <a:softEdge rad="127000"/>
-          </a:effectLst>
-        </p:spPr>
-      </p:pic>
     </p:spTree>
     <p:extLst>
       <p:ext uri="{BB962C8B-B14F-4D97-AF65-F5344CB8AC3E}">
@@ -21907,10 +24387,17 @@
   <p:clrMapOvr>
     <a:masterClrMapping/>
   </p:clrMapOvr>
+  <p:timing>
+    <p:tnLst>
+      <p:par>
+        <p:cTn id="1" dur="indefinite" restart="never" nodeType="tmRoot"/>
+      </p:par>
+    </p:tnLst>
+  </p:timing>
 </p:sld>
 </file>
 
-<file path=ppt/slides/slide33.xml><?xml version="1.0" encoding="utf-8"?>
+<file path=ppt/slides/slide34.xml><?xml version="1.0" encoding="utf-8"?>
 <p:sld xmlns:a="http://schemas.openxmlformats.org/drawingml/2006/main" xmlns:r="http://schemas.openxmlformats.org/officeDocument/2006/relationships" xmlns:p="http://schemas.openxmlformats.org/presentationml/2006/main">
   <p:cSld>
     <p:spTree>
@@ -21960,11 +24447,11 @@
           <a:lstStyle/>
           <a:p>
             <a:r>
-              <a:rPr lang="en-US" altLang="zh-CN" sz="900" dirty="0"/>
+              <a:rPr lang="en-US" altLang="zh-CN" sz="4400" dirty="0"/>
               <a:t>EFT</a:t>
             </a:r>
             <a:r>
-              <a:rPr lang="zh-CN" altLang="en-US" sz="900" dirty="0"/>
+              <a:rPr lang="zh-CN" altLang="en-US" sz="4400" dirty="0"/>
               <a:t>心理自助操的作用分析</a:t>
             </a:r>
           </a:p>
@@ -22010,228 +24497,6 @@
                 <a:latin typeface="+mn-ea"/>
               </a:rPr>
               <a:t>热身阶段迅速活跃身心状态为情绪敲击做好准备。当存在负性情绪时或多或少会伴随着相应的躯体症状，如在紧张时肌肉收缩供血受阻，在热身阶段主要开展的是以全身经络操为主的全身放松习练，设计思路借鉴了医疗体操的优势，选择了易于掌握的动作幅度和运动强度的左右协调运动动作及拍打穴位动作，在室内外均可习练，经过热身后锻炼能很快感受到精神和体力的增加，增强身体灵活度和改善气血运行状态，能较快地将身心调整状态好，为之后的敲击操集中精神聚焦并释放情绪做好准备，有益于后续情绪敲击操的习练。</a:t>
-            </a:r>
-          </a:p>
-        </p:txBody>
-      </p:sp>
-      <p:sp>
-        <p:nvSpPr>
-          <p:cNvPr id="14" name="内容占位符 2">
-            <a:extLst>
-              <a:ext uri="{FF2B5EF4-FFF2-40B4-BE49-F238E27FC236}">
-                <a16:creationId xmlns:a16="http://schemas.microsoft.com/office/drawing/2014/main" id="{60C08BF9-B244-DDD6-3562-787B531F682A}"/>
-              </a:ext>
-            </a:extLst>
-          </p:cNvPr>
-          <p:cNvSpPr txBox="1">
-            <a:spLocks/>
-          </p:cNvSpPr>
-          <p:nvPr/>
-        </p:nvSpPr>
-        <p:spPr>
-          <a:xfrm>
-            <a:off x="264035" y="5566122"/>
-            <a:ext cx="5640376" cy="757207"/>
-          </a:xfrm>
-          <a:prstGeom prst="rect">
-            <a:avLst/>
-          </a:prstGeom>
-        </p:spPr>
-        <p:txBody>
-          <a:bodyPr lIns="109728" tIns="109728" rIns="109728" bIns="91440"/>
-          <a:lstStyle>
-            <a:lvl1pPr marL="228600" indent="-228600" algn="l" defTabSz="914400" rtl="0" eaLnBrk="1" latinLnBrk="0" hangingPunct="1">
-              <a:lnSpc>
-                <a:spcPct val="125000"/>
-              </a:lnSpc>
-              <a:spcBef>
-                <a:spcPts val="1000"/>
-              </a:spcBef>
-              <a:buFont typeface="Arial" panose="020B0604020202020204" pitchFamily="34" charset="0"/>
-              <a:buChar char="•"/>
-              <a:defRPr sz="1600" kern="1200" spc="160">
-                <a:solidFill>
-                  <a:schemeClr val="tx1"/>
-                </a:solidFill>
-                <a:latin typeface="+mn-lt"/>
-                <a:ea typeface="+mn-ea"/>
-                <a:cs typeface="+mn-cs"/>
-              </a:defRPr>
-            </a:lvl1pPr>
-            <a:lvl2pPr marL="685800" indent="-228600" algn="l" defTabSz="914400" rtl="0" eaLnBrk="1" latinLnBrk="0" hangingPunct="1">
-              <a:lnSpc>
-                <a:spcPct val="125000"/>
-              </a:lnSpc>
-              <a:spcBef>
-                <a:spcPts val="500"/>
-              </a:spcBef>
-              <a:buFont typeface="Arial" panose="020B0604020202020204" pitchFamily="34" charset="0"/>
-              <a:buChar char="•"/>
-              <a:defRPr sz="1600" kern="1200" spc="160">
-                <a:solidFill>
-                  <a:schemeClr val="tx1"/>
-                </a:solidFill>
-                <a:latin typeface="+mn-lt"/>
-                <a:ea typeface="+mn-ea"/>
-                <a:cs typeface="+mn-cs"/>
-              </a:defRPr>
-            </a:lvl2pPr>
-            <a:lvl3pPr marL="1143000" indent="-228600" algn="l" defTabSz="914400" rtl="0" eaLnBrk="1" latinLnBrk="0" hangingPunct="1">
-              <a:lnSpc>
-                <a:spcPct val="125000"/>
-              </a:lnSpc>
-              <a:spcBef>
-                <a:spcPts val="500"/>
-              </a:spcBef>
-              <a:buFont typeface="Arial" panose="020B0604020202020204" pitchFamily="34" charset="0"/>
-              <a:buChar char="•"/>
-              <a:defRPr sz="1600" kern="1200" spc="160">
-                <a:solidFill>
-                  <a:schemeClr val="tx1"/>
-                </a:solidFill>
-                <a:latin typeface="+mn-lt"/>
-                <a:ea typeface="+mn-ea"/>
-                <a:cs typeface="+mn-cs"/>
-              </a:defRPr>
-            </a:lvl3pPr>
-            <a:lvl4pPr marL="1600200" indent="-228600" algn="l" defTabSz="914400" rtl="0" eaLnBrk="1" latinLnBrk="0" hangingPunct="1">
-              <a:lnSpc>
-                <a:spcPct val="125000"/>
-              </a:lnSpc>
-              <a:spcBef>
-                <a:spcPts val="500"/>
-              </a:spcBef>
-              <a:buFont typeface="Arial" panose="020B0604020202020204" pitchFamily="34" charset="0"/>
-              <a:buChar char="•"/>
-              <a:defRPr sz="1600" kern="1200" spc="160">
-                <a:solidFill>
-                  <a:schemeClr val="tx1"/>
-                </a:solidFill>
-                <a:latin typeface="+mn-lt"/>
-                <a:ea typeface="+mn-ea"/>
-                <a:cs typeface="+mn-cs"/>
-              </a:defRPr>
-            </a:lvl4pPr>
-            <a:lvl5pPr marL="2057400" indent="-228600" algn="l" defTabSz="914400" rtl="0" eaLnBrk="1" latinLnBrk="0" hangingPunct="1">
-              <a:lnSpc>
-                <a:spcPct val="125000"/>
-              </a:lnSpc>
-              <a:spcBef>
-                <a:spcPts val="500"/>
-              </a:spcBef>
-              <a:buFont typeface="Arial" panose="020B0604020202020204" pitchFamily="34" charset="0"/>
-              <a:buChar char="•"/>
-              <a:defRPr sz="1600" kern="1200" spc="160">
-                <a:solidFill>
-                  <a:schemeClr val="tx1"/>
-                </a:solidFill>
-                <a:latin typeface="+mn-lt"/>
-                <a:ea typeface="+mn-ea"/>
-                <a:cs typeface="+mn-cs"/>
-              </a:defRPr>
-            </a:lvl5pPr>
-            <a:lvl6pPr marL="2514600" indent="-228600" algn="l" defTabSz="914400" rtl="0" eaLnBrk="1" latinLnBrk="0" hangingPunct="1">
-              <a:lnSpc>
-                <a:spcPct val="90000"/>
-              </a:lnSpc>
-              <a:spcBef>
-                <a:spcPts val="500"/>
-              </a:spcBef>
-              <a:buFont typeface="Arial" panose="020B0604020202020204" pitchFamily="34" charset="0"/>
-              <a:buChar char="•"/>
-              <a:defRPr sz="1800" kern="1200">
-                <a:solidFill>
-                  <a:schemeClr val="tx1"/>
-                </a:solidFill>
-                <a:latin typeface="+mn-lt"/>
-                <a:ea typeface="+mn-ea"/>
-                <a:cs typeface="+mn-cs"/>
-              </a:defRPr>
-            </a:lvl6pPr>
-            <a:lvl7pPr marL="2971800" indent="-228600" algn="l" defTabSz="914400" rtl="0" eaLnBrk="1" latinLnBrk="0" hangingPunct="1">
-              <a:lnSpc>
-                <a:spcPct val="90000"/>
-              </a:lnSpc>
-              <a:spcBef>
-                <a:spcPts val="500"/>
-              </a:spcBef>
-              <a:buFont typeface="Arial" panose="020B0604020202020204" pitchFamily="34" charset="0"/>
-              <a:buChar char="•"/>
-              <a:defRPr sz="1800" kern="1200">
-                <a:solidFill>
-                  <a:schemeClr val="tx1"/>
-                </a:solidFill>
-                <a:latin typeface="+mn-lt"/>
-                <a:ea typeface="+mn-ea"/>
-                <a:cs typeface="+mn-cs"/>
-              </a:defRPr>
-            </a:lvl7pPr>
-            <a:lvl8pPr marL="3429000" indent="-228600" algn="l" defTabSz="914400" rtl="0" eaLnBrk="1" latinLnBrk="0" hangingPunct="1">
-              <a:lnSpc>
-                <a:spcPct val="90000"/>
-              </a:lnSpc>
-              <a:spcBef>
-                <a:spcPts val="500"/>
-              </a:spcBef>
-              <a:buFont typeface="Arial" panose="020B0604020202020204" pitchFamily="34" charset="0"/>
-              <a:buChar char="•"/>
-              <a:defRPr sz="1800" kern="1200">
-                <a:solidFill>
-                  <a:schemeClr val="tx1"/>
-                </a:solidFill>
-                <a:latin typeface="+mn-lt"/>
-                <a:ea typeface="+mn-ea"/>
-                <a:cs typeface="+mn-cs"/>
-              </a:defRPr>
-            </a:lvl8pPr>
-            <a:lvl9pPr marL="3886200" indent="-228600" algn="l" defTabSz="914400" rtl="0" eaLnBrk="1" latinLnBrk="0" hangingPunct="1">
-              <a:lnSpc>
-                <a:spcPct val="90000"/>
-              </a:lnSpc>
-              <a:spcBef>
-                <a:spcPts val="500"/>
-              </a:spcBef>
-              <a:buFont typeface="Arial" panose="020B0604020202020204" pitchFamily="34" charset="0"/>
-              <a:buChar char="•"/>
-              <a:defRPr sz="1800" kern="1200">
-                <a:solidFill>
-                  <a:schemeClr val="tx1"/>
-                </a:solidFill>
-                <a:latin typeface="+mn-lt"/>
-                <a:ea typeface="+mn-ea"/>
-                <a:cs typeface="+mn-cs"/>
-              </a:defRPr>
-            </a:lvl9pPr>
-          </a:lstStyle>
-          <a:p>
-            <a:pPr marL="0" indent="0">
-              <a:buNone/>
-            </a:pPr>
-            <a:r>
-              <a:rPr lang="en-US" altLang="zh-CN" sz="3200" dirty="0">
-                <a:effectLst>
-                  <a:outerShdw blurRad="38100" dist="38100" dir="2700000" algn="tl">
-                    <a:srgbClr val="000000">
-                      <a:alpha val="43137"/>
-                    </a:srgbClr>
-                  </a:outerShdw>
-                </a:effectLst>
-                <a:latin typeface="+mn-ea"/>
-              </a:rPr>
-              <a:t>EFT</a:t>
-            </a:r>
-            <a:r>
-              <a:rPr lang="zh-CN" altLang="en-US" sz="3200" dirty="0">
-                <a:effectLst>
-                  <a:outerShdw blurRad="38100" dist="38100" dir="2700000" algn="tl">
-                    <a:srgbClr val="000000">
-                      <a:alpha val="43137"/>
-                    </a:srgbClr>
-                  </a:outerShdw>
-                </a:effectLst>
-                <a:latin typeface="+mn-ea"/>
-              </a:rPr>
-              <a:t>心理自助操的作用分析</a:t>
             </a:r>
           </a:p>
         </p:txBody>
@@ -22676,6 +24941,13 @@
   <p:clrMapOvr>
     <a:masterClrMapping/>
   </p:clrMapOvr>
+  <p:timing>
+    <p:tnLst>
+      <p:par>
+        <p:cTn id="1" dur="indefinite" restart="never" nodeType="tmRoot"/>
+      </p:par>
+    </p:tnLst>
+  </p:timing>
 </p:sld>
 </file>
 

--- a/44_心理学/28_浥尘伙伴社团原创：音乐治疗/PPT/浥尘伙伴社团原创：情绪释放疗法（EFT）心理训练.pptx
+++ b/44_心理学/28_浥尘伙伴社团原创：音乐治疗/PPT/浥尘伙伴社团原创：情绪释放疗法（EFT）心理训练.pptx
@@ -5,7 +5,7 @@
     <p:sldMasterId id="2147483696" r:id="rId1"/>
   </p:sldMasterIdLst>
   <p:notesMasterIdLst>
-    <p:notesMasterId r:id="rId36"/>
+    <p:notesMasterId r:id="rId37"/>
   </p:notesMasterIdLst>
   <p:sldIdLst>
     <p:sldId id="256" r:id="rId2"/>
@@ -37,11 +37,12 @@
     <p:sldId id="275" r:id="rId28"/>
     <p:sldId id="266" r:id="rId29"/>
     <p:sldId id="289" r:id="rId30"/>
-    <p:sldId id="290" r:id="rId31"/>
-    <p:sldId id="286" r:id="rId32"/>
-    <p:sldId id="267" r:id="rId33"/>
-    <p:sldId id="282" r:id="rId34"/>
-    <p:sldId id="264" r:id="rId35"/>
+    <p:sldId id="291" r:id="rId31"/>
+    <p:sldId id="290" r:id="rId32"/>
+    <p:sldId id="286" r:id="rId33"/>
+    <p:sldId id="267" r:id="rId34"/>
+    <p:sldId id="282" r:id="rId35"/>
+    <p:sldId id="264" r:id="rId36"/>
   </p:sldIdLst>
   <p:sldSz cx="12192000" cy="6858000"/>
   <p:notesSz cx="6858000" cy="9144000"/>
@@ -230,7 +231,7 @@
           <a:p>
             <a:fld id="{613034E8-7B60-43FC-987C-A54D5D393751}" type="datetimeFigureOut">
               <a:rPr lang="zh-CN" altLang="en-US" smtClean="0"/>
-              <a:t>2025/12/30</a:t>
+              <a:t>2025/12/31</a:t>
             </a:fld>
             <a:endParaRPr lang="zh-CN" altLang="en-US"/>
           </a:p>
@@ -522,7 +523,7 @@
                 <a16:creationId xmlns:a16="http://schemas.microsoft.com/office/drawing/2014/main" id="{EA67E988-5919-57BB-C7DE-D3EAD38A3045}"/>
               </a:ext>
               <a:ext uri="{C183D7F6-B498-43B3-948B-1728B52AA6E4}">
-                <adec:decorative xmlns:adec="http://schemas.microsoft.com/office/drawing/2017/decorative" xmlns="" val="1"/>
+                <adec:decorative xmlns="" xmlns:adec="http://schemas.microsoft.com/office/drawing/2017/decorative" val="1"/>
               </a:ext>
             </a:extLst>
           </p:cNvPr>
@@ -778,7 +779,7 @@
           <a:p>
             <a:fld id="{E80C50CD-E178-4744-9B35-B2F624D6C5E9}" type="datetimeFigureOut">
               <a:rPr lang="en-US" smtClean="0"/>
-              <a:t>12/30/2025</a:t>
+              <a:t>12/31/2025</a:t>
             </a:fld>
             <a:endParaRPr lang="en-US"/>
           </a:p>
@@ -976,7 +977,7 @@
           <a:p>
             <a:fld id="{E80C50CD-E178-4744-9B35-B2F624D6C5E9}" type="datetimeFigureOut">
               <a:rPr lang="en-US" smtClean="0"/>
-              <a:t>12/30/2025</a:t>
+              <a:t>12/31/2025</a:t>
             </a:fld>
             <a:endParaRPr lang="en-US"/>
           </a:p>
@@ -1184,7 +1185,7 @@
           <a:p>
             <a:fld id="{E80C50CD-E178-4744-9B35-B2F624D6C5E9}" type="datetimeFigureOut">
               <a:rPr lang="en-US" smtClean="0"/>
-              <a:t>12/30/2025</a:t>
+              <a:t>12/31/2025</a:t>
             </a:fld>
             <a:endParaRPr lang="en-US"/>
           </a:p>
@@ -1464,7 +1465,7 @@
           <a:p>
             <a:fld id="{E80C50CD-E178-4744-9B35-B2F624D6C5E9}" type="datetimeFigureOut">
               <a:rPr lang="en-US" smtClean="0"/>
-              <a:t>12/30/2025</a:t>
+              <a:t>12/31/2025</a:t>
             </a:fld>
             <a:endParaRPr lang="en-US"/>
           </a:p>
@@ -1743,7 +1744,7 @@
           <a:p>
             <a:fld id="{E80C50CD-E178-4744-9B35-B2F624D6C5E9}" type="datetimeFigureOut">
               <a:rPr lang="en-US" smtClean="0"/>
-              <a:t>12/30/2025</a:t>
+              <a:t>12/31/2025</a:t>
             </a:fld>
             <a:endParaRPr lang="en-US"/>
           </a:p>
@@ -2060,7 +2061,7 @@
           <a:p>
             <a:fld id="{E80C50CD-E178-4744-9B35-B2F624D6C5E9}" type="datetimeFigureOut">
               <a:rPr lang="en-US" smtClean="0"/>
-              <a:t>12/30/2025</a:t>
+              <a:t>12/31/2025</a:t>
             </a:fld>
             <a:endParaRPr lang="en-US"/>
           </a:p>
@@ -2476,7 +2477,7 @@
           <a:p>
             <a:fld id="{E80C50CD-E178-4744-9B35-B2F624D6C5E9}" type="datetimeFigureOut">
               <a:rPr lang="en-US" smtClean="0"/>
-              <a:t>12/30/2025</a:t>
+              <a:t>12/31/2025</a:t>
             </a:fld>
             <a:endParaRPr lang="en-US"/>
           </a:p>
@@ -2617,7 +2618,7 @@
           <a:p>
             <a:fld id="{E80C50CD-E178-4744-9B35-B2F624D6C5E9}" type="datetimeFigureOut">
               <a:rPr lang="en-US" smtClean="0"/>
-              <a:t>12/30/2025</a:t>
+              <a:t>12/31/2025</a:t>
             </a:fld>
             <a:endParaRPr lang="en-US"/>
           </a:p>
@@ -2730,7 +2731,7 @@
           <a:p>
             <a:fld id="{E80C50CD-E178-4744-9B35-B2F624D6C5E9}" type="datetimeFigureOut">
               <a:rPr lang="en-US" smtClean="0"/>
-              <a:t>12/30/2025</a:t>
+              <a:t>12/31/2025</a:t>
             </a:fld>
             <a:endParaRPr lang="en-US"/>
           </a:p>
@@ -3047,7 +3048,7 @@
           <a:p>
             <a:fld id="{E80C50CD-E178-4744-9B35-B2F624D6C5E9}" type="datetimeFigureOut">
               <a:rPr lang="en-US" smtClean="0"/>
-              <a:t>12/30/2025</a:t>
+              <a:t>12/31/2025</a:t>
             </a:fld>
             <a:endParaRPr lang="en-US"/>
           </a:p>
@@ -3339,7 +3340,7 @@
           <a:p>
             <a:fld id="{E80C50CD-E178-4744-9B35-B2F624D6C5E9}" type="datetimeFigureOut">
               <a:rPr lang="en-US" smtClean="0"/>
-              <a:t>12/30/2025</a:t>
+              <a:t>12/31/2025</a:t>
             </a:fld>
             <a:endParaRPr lang="en-US"/>
           </a:p>
@@ -3575,7 +3576,7 @@
             <a:fld id="{E80C50CD-E178-4744-9B35-B2F624D6C5E9}" type="datetimeFigureOut">
               <a:rPr lang="en-US" smtClean="0"/>
               <a:pPr/>
-              <a:t>12/30/2025</a:t>
+              <a:t>12/31/2025</a:t>
             </a:fld>
             <a:endParaRPr lang="en-US"/>
           </a:p>
@@ -3676,7 +3677,7 @@
                 <a16:creationId xmlns:a16="http://schemas.microsoft.com/office/drawing/2014/main" id="{774A975B-A886-5202-0489-6965514A0D14}"/>
               </a:ext>
               <a:ext uri="{C183D7F6-B498-43B3-948B-1728B52AA6E4}">
-                <adec:decorative xmlns:adec="http://schemas.microsoft.com/office/drawing/2017/decorative" xmlns="" val="1"/>
+                <adec:decorative xmlns="" xmlns:adec="http://schemas.microsoft.com/office/drawing/2017/decorative" val="1"/>
               </a:ext>
             </a:extLst>
           </p:cNvPr>
@@ -4105,7 +4106,7 @@
                 <a16:creationId xmlns:a16="http://schemas.microsoft.com/office/drawing/2014/main" id="{0EECA69B-4C2A-7F31-8019-E90DB3BD49CB}"/>
               </a:ext>
               <a:ext uri="{C183D7F6-B498-43B3-948B-1728B52AA6E4}">
-                <adec:decorative xmlns:adec="http://schemas.microsoft.com/office/drawing/2017/decorative" xmlns="" val="1"/>
+                <adec:decorative xmlns="" xmlns:adec="http://schemas.microsoft.com/office/drawing/2017/decorative" val="1"/>
               </a:ext>
             </a:extLst>
           </p:cNvPr>
@@ -4250,7 +4251,7 @@
                 <a16:creationId xmlns:a16="http://schemas.microsoft.com/office/drawing/2014/main" id="{857DEAC1-B3AA-6569-0A44-A191DF2F3C67}"/>
               </a:ext>
               <a:ext uri="{C183D7F6-B498-43B3-948B-1728B52AA6E4}">
-                <adec:decorative xmlns:adec="http://schemas.microsoft.com/office/drawing/2017/decorative" xmlns="" val="1"/>
+                <adec:decorative xmlns="" xmlns:adec="http://schemas.microsoft.com/office/drawing/2017/decorative" val="1"/>
               </a:ext>
             </a:extLst>
           </p:cNvPr>
@@ -16093,9 +16094,6 @@
               </a:rPr>
               <a:t>降低情绪的紧张度，形成 “身心放松” 的正向循环。</a:t>
             </a:r>
-            <a:endParaRPr lang="zh-CN" altLang="en-US" dirty="0">
-              <a:latin typeface="+mn-ea"/>
-            </a:endParaRPr>
           </a:p>
         </p:txBody>
       </p:sp>
@@ -17562,13 +17560,7 @@
               <a:rPr lang="zh-CN" altLang="en-US" sz="1800" dirty="0" smtClean="0">
                 <a:latin typeface="+mn-ea"/>
               </a:rPr>
-              <a:t>、手掌</a:t>
-            </a:r>
-            <a:r>
-              <a:rPr lang="zh-CN" altLang="en-US" sz="1800" dirty="0" smtClean="0">
-                <a:latin typeface="+mn-ea"/>
-              </a:rPr>
-              <a:t>外侧 </a:t>
+              <a:t>、手掌外侧 </a:t>
             </a:r>
             <a:r>
               <a:rPr lang="en-US" altLang="zh-CN" sz="1800" dirty="0" smtClean="0">
@@ -17598,13 +17590,7 @@
               <a:rPr lang="zh-CN" altLang="en-US" sz="1800" dirty="0" smtClean="0">
                 <a:latin typeface="+mn-ea"/>
               </a:rPr>
-              <a:t>、手腕</a:t>
-            </a:r>
-            <a:r>
-              <a:rPr lang="zh-CN" altLang="en-US" sz="1800" dirty="0" smtClean="0">
-                <a:latin typeface="+mn-ea"/>
-              </a:rPr>
-              <a:t>内侧 </a:t>
+              <a:t>、手腕内侧 </a:t>
             </a:r>
             <a:r>
               <a:rPr lang="en-US" altLang="zh-CN" sz="1800" dirty="0" smtClean="0">
@@ -17664,49 +17650,31 @@
               <a:rPr lang="zh-CN" altLang="en-US" sz="1800" dirty="0" smtClean="0">
                 <a:latin typeface="+mn-ea"/>
               </a:rPr>
-              <a:t>、眼</a:t>
+              <a:t>、眼外侧 </a:t>
+            </a:r>
+            <a:r>
+              <a:rPr lang="en-US" altLang="zh-CN" sz="1800" dirty="0" smtClean="0">
+                <a:latin typeface="+mn-ea"/>
+              </a:rPr>
+              <a:t>- </a:t>
             </a:r>
             <a:r>
               <a:rPr lang="zh-CN" altLang="en-US" sz="1800" dirty="0" smtClean="0">
                 <a:latin typeface="+mn-ea"/>
               </a:rPr>
-              <a:t>外侧 </a:t>
+              <a:t>丝竹空穴</a:t>
             </a:r>
             <a:r>
               <a:rPr lang="en-US" altLang="zh-CN" sz="1800" dirty="0" smtClean="0">
                 <a:latin typeface="+mn-ea"/>
               </a:rPr>
-              <a:t>- </a:t>
+              <a:t>  </a:t>
             </a:r>
             <a:r>
               <a:rPr lang="zh-CN" altLang="en-US" sz="1800" dirty="0" smtClean="0">
                 <a:latin typeface="+mn-ea"/>
               </a:rPr>
-              <a:t>丝竹</a:t>
-            </a:r>
-            <a:r>
-              <a:rPr lang="zh-CN" altLang="en-US" sz="1800" dirty="0" smtClean="0">
-                <a:latin typeface="+mn-ea"/>
-              </a:rPr>
-              <a:t>空穴</a:t>
-            </a:r>
-            <a:r>
-              <a:rPr lang="en-US" altLang="zh-CN" sz="1800" dirty="0" smtClean="0">
-                <a:latin typeface="+mn-ea"/>
-              </a:rPr>
-              <a:t>  </a:t>
-            </a:r>
-            <a:r>
-              <a:rPr lang="zh-CN" altLang="en-US" sz="1800" dirty="0" smtClean="0">
-                <a:latin typeface="+mn-ea"/>
-              </a:rPr>
-              <a:t>瞳</a:t>
-            </a:r>
-            <a:r>
-              <a:rPr lang="zh-CN" altLang="en-US" sz="1800" dirty="0" smtClean="0">
-                <a:latin typeface="+mn-ea"/>
-              </a:rPr>
-              <a:t>子髎</a:t>
+              <a:t>瞳子髎</a:t>
             </a:r>
           </a:p>
           <a:p>
@@ -17754,13 +17722,7 @@
               <a:rPr lang="zh-CN" altLang="en-US" sz="1800" dirty="0" smtClean="0">
                 <a:latin typeface="+mn-ea"/>
               </a:rPr>
-              <a:t>、鼻</a:t>
-            </a:r>
-            <a:r>
-              <a:rPr lang="zh-CN" altLang="en-US" sz="1800" dirty="0" smtClean="0">
-                <a:latin typeface="+mn-ea"/>
-              </a:rPr>
-              <a:t>下 </a:t>
+              <a:t>、鼻下 </a:t>
             </a:r>
             <a:r>
               <a:rPr lang="en-US" altLang="zh-CN" sz="1800" dirty="0" smtClean="0">
@@ -17862,17 +17824,8 @@
               <a:rPr lang="zh-CN" altLang="en-US" sz="1800" dirty="0" smtClean="0">
                 <a:latin typeface="+mn-ea"/>
               </a:rPr>
-              <a:t>云门穴和中府</a:t>
-            </a:r>
-            <a:r>
-              <a:rPr lang="zh-CN" altLang="en-US" sz="1800" dirty="0" smtClean="0">
-                <a:latin typeface="+mn-ea"/>
-              </a:rPr>
-              <a:t>穴</a:t>
-            </a:r>
-            <a:endParaRPr lang="zh-CN" altLang="en-US" sz="1800" dirty="0" smtClean="0">
-              <a:latin typeface="+mn-ea"/>
-            </a:endParaRPr>
+              <a:t>云门穴和中府穴</a:t>
+            </a:r>
           </a:p>
         </p:txBody>
       </p:sp>
@@ -18182,13 +18135,7 @@
               <a:rPr lang="zh-CN" altLang="en-US" sz="1800" dirty="0" smtClean="0">
                 <a:latin typeface="+mn-ea"/>
               </a:rPr>
-              <a:t>百</a:t>
-            </a:r>
-            <a:r>
-              <a:rPr lang="zh-CN" altLang="en-US" sz="1800" dirty="0" smtClean="0">
-                <a:latin typeface="+mn-ea"/>
-              </a:rPr>
-              <a:t>会穴</a:t>
+              <a:t>百会穴</a:t>
             </a:r>
             <a:endParaRPr lang="zh-CN" altLang="en-US" sz="1800" dirty="0">
               <a:latin typeface="+mn-ea"/>
@@ -18217,6 +18164,1963 @@
 </file>
 
 <file path=ppt/slides/slide29.xml><?xml version="1.0" encoding="utf-8"?>
+<p:sld xmlns:a="http://schemas.openxmlformats.org/drawingml/2006/main" xmlns:r="http://schemas.openxmlformats.org/officeDocument/2006/relationships" xmlns:p="http://schemas.openxmlformats.org/presentationml/2006/main">
+  <p:cSld>
+    <p:spTree>
+      <p:nvGrpSpPr>
+        <p:cNvPr id="1" name="">
+          <a:extLst>
+            <a:ext uri="{FF2B5EF4-FFF2-40B4-BE49-F238E27FC236}">
+              <a16:creationId xmlns:a16="http://schemas.microsoft.com/office/drawing/2014/main" id="{342F93BE-C7A7-1FD2-AD5F-96083C37D57C}"/>
+            </a:ext>
+          </a:extLst>
+        </p:cNvPr>
+        <p:cNvGrpSpPr/>
+        <p:nvPr/>
+      </p:nvGrpSpPr>
+      <p:grpSpPr>
+        <a:xfrm>
+          <a:off x="0" y="0"/>
+          <a:ext cx="0" cy="0"/>
+          <a:chOff x="0" y="0"/>
+          <a:chExt cx="0" cy="0"/>
+        </a:xfrm>
+      </p:grpSpPr>
+      <p:sp>
+        <p:nvSpPr>
+          <p:cNvPr id="2" name="标题 1">
+            <a:extLst>
+              <a:ext uri="{FF2B5EF4-FFF2-40B4-BE49-F238E27FC236}">
+                <a16:creationId xmlns:a16="http://schemas.microsoft.com/office/drawing/2014/main" id="{8814383D-3559-DBE6-F00D-9A93B3A95220}"/>
+              </a:ext>
+            </a:extLst>
+          </p:cNvPr>
+          <p:cNvSpPr>
+            <a:spLocks noGrp="1"/>
+          </p:cNvSpPr>
+          <p:nvPr>
+            <p:ph type="title"/>
+          </p:nvPr>
+        </p:nvSpPr>
+        <p:spPr>
+          <a:xfrm>
+            <a:off x="521208" y="662740"/>
+            <a:ext cx="11155680" cy="936652"/>
+          </a:xfrm>
+        </p:spPr>
+        <p:txBody>
+          <a:bodyPr/>
+          <a:lstStyle/>
+          <a:p>
+            <a:r>
+              <a:rPr lang="en-US" altLang="zh-CN" sz="4400" dirty="0"/>
+              <a:t>EFT</a:t>
+            </a:r>
+            <a:r>
+              <a:rPr lang="zh-CN" altLang="en-US" sz="4400" dirty="0"/>
+              <a:t>心理自助</a:t>
+            </a:r>
+            <a:r>
+              <a:rPr lang="zh-CN" altLang="en-US" sz="4400" dirty="0" smtClean="0"/>
+              <a:t>操音乐选择（</a:t>
+            </a:r>
+            <a:r>
+              <a:rPr lang="en-US" altLang="zh-CN" sz="4400" dirty="0" smtClean="0"/>
+              <a:t>6</a:t>
+            </a:r>
+            <a:r>
+              <a:rPr lang="zh-CN" altLang="en-US" sz="4400" dirty="0" smtClean="0"/>
+              <a:t>）</a:t>
+            </a:r>
+            <a:endParaRPr lang="zh-CN" altLang="en-US" sz="4400" dirty="0"/>
+          </a:p>
+        </p:txBody>
+      </p:sp>
+      <p:graphicFrame>
+        <p:nvGraphicFramePr>
+          <p:cNvPr id="3" name="表格 2"/>
+          <p:cNvGraphicFramePr>
+            <a:graphicFrameLocks noGrp="1"/>
+          </p:cNvGraphicFramePr>
+          <p:nvPr>
+            <p:extLst>
+              <p:ext uri="{D42A27DB-BD31-4B8C-83A1-F6EECF244321}">
+                <p14:modId xmlns:p14="http://schemas.microsoft.com/office/powerpoint/2010/main" val="1687765716"/>
+              </p:ext>
+            </p:extLst>
+          </p:nvPr>
+        </p:nvGraphicFramePr>
+        <p:xfrm>
+          <a:off x="521209" y="1792289"/>
+          <a:ext cx="11155680" cy="4986744"/>
+        </p:xfrm>
+        <a:graphic>
+          <a:graphicData uri="http://schemas.openxmlformats.org/drawingml/2006/table">
+            <a:tbl>
+              <a:tblPr>
+                <a:tableStyleId>{5C22544A-7EE6-4342-B048-85BDC9FD1C3A}</a:tableStyleId>
+              </a:tblPr>
+              <a:tblGrid>
+                <a:gridCol w="1356686">
+                  <a:extLst>
+                    <a:ext uri="{9D8B030D-6E8A-4147-A177-3AD203B41FA5}">
+                      <a16:colId xmlns:a16="http://schemas.microsoft.com/office/drawing/2014/main" val="230779709"/>
+                    </a:ext>
+                  </a:extLst>
+                </a:gridCol>
+                <a:gridCol w="957359">
+                  <a:extLst>
+                    <a:ext uri="{9D8B030D-6E8A-4147-A177-3AD203B41FA5}">
+                      <a16:colId xmlns:a16="http://schemas.microsoft.com/office/drawing/2014/main" val="3617429372"/>
+                    </a:ext>
+                  </a:extLst>
+                </a:gridCol>
+                <a:gridCol w="8841635">
+                  <a:extLst>
+                    <a:ext uri="{9D8B030D-6E8A-4147-A177-3AD203B41FA5}">
+                      <a16:colId xmlns:a16="http://schemas.microsoft.com/office/drawing/2014/main" val="432370790"/>
+                    </a:ext>
+                  </a:extLst>
+                </a:gridCol>
+              </a:tblGrid>
+              <a:tr h="433797">
+                <a:tc>
+                  <a:txBody>
+                    <a:bodyPr/>
+                    <a:lstStyle/>
+                    <a:p>
+                      <a:pPr algn="ctr" fontAlgn="ctr"/>
+                      <a:r>
+                        <a:rPr lang="en-US" sz="1200" u="none" strike="noStrike">
+                          <a:effectLst/>
+                        </a:rPr>
+                        <a:t>EFT </a:t>
+                      </a:r>
+                      <a:r>
+                        <a:rPr lang="zh-CN" altLang="en-US" sz="1200" u="none" strike="noStrike">
+                          <a:effectLst/>
+                        </a:rPr>
+                        <a:t>穴位</a:t>
+                      </a:r>
+                      <a:endParaRPr lang="zh-CN" altLang="en-US" sz="1200" b="1" i="0" u="none" strike="noStrike">
+                        <a:solidFill>
+                          <a:srgbClr val="333333"/>
+                        </a:solidFill>
+                        <a:effectLst/>
+                        <a:latin typeface="Arial" panose="020B0604020202020204" pitchFamily="34" charset="0"/>
+                        <a:ea typeface="等线" panose="02010600030101010101" pitchFamily="2" charset="-122"/>
+                      </a:endParaRPr>
+                    </a:p>
+                  </a:txBody>
+                  <a:tcPr marL="3839" marR="3839" marT="3839" marB="0" anchor="ctr"/>
+                </a:tc>
+                <a:tc>
+                  <a:txBody>
+                    <a:bodyPr/>
+                    <a:lstStyle/>
+                    <a:p>
+                      <a:pPr algn="ctr" fontAlgn="ctr"/>
+                      <a:r>
+                        <a:rPr lang="zh-CN" altLang="en-US" sz="1200" b="1" i="0" u="none" strike="noStrike" dirty="0" smtClean="0">
+                          <a:solidFill>
+                            <a:srgbClr val="333333"/>
+                          </a:solidFill>
+                          <a:effectLst/>
+                          <a:latin typeface="Arial" panose="020B0604020202020204" pitchFamily="34" charset="0"/>
+                          <a:ea typeface="等线" panose="02010600030101010101" pitchFamily="2" charset="-122"/>
+                        </a:rPr>
+                        <a:t>经络</a:t>
+                      </a:r>
+                      <a:endParaRPr lang="zh-CN" altLang="en-US" sz="1200" b="1" i="0" u="none" strike="noStrike" dirty="0">
+                        <a:solidFill>
+                          <a:srgbClr val="333333"/>
+                        </a:solidFill>
+                        <a:effectLst/>
+                        <a:latin typeface="Arial" panose="020B0604020202020204" pitchFamily="34" charset="0"/>
+                        <a:ea typeface="等线" panose="02010600030101010101" pitchFamily="2" charset="-122"/>
+                      </a:endParaRPr>
+                    </a:p>
+                  </a:txBody>
+                  <a:tcPr marL="3839" marR="3839" marT="3839" marB="0" anchor="ctr"/>
+                </a:tc>
+                <a:tc>
+                  <a:txBody>
+                    <a:bodyPr/>
+                    <a:lstStyle/>
+                    <a:p>
+                      <a:pPr algn="ctr" fontAlgn="ctr"/>
+                      <a:r>
+                        <a:rPr lang="zh-CN" altLang="en-US" sz="1200" u="none" strike="noStrike" dirty="0">
+                          <a:effectLst/>
+                        </a:rPr>
+                        <a:t>匹配依据</a:t>
+                      </a:r>
+                      <a:endParaRPr lang="zh-CN" altLang="en-US" sz="1200" b="1" i="0" u="none" strike="noStrike" dirty="0">
+                        <a:solidFill>
+                          <a:srgbClr val="333333"/>
+                        </a:solidFill>
+                        <a:effectLst/>
+                        <a:latin typeface="Arial" panose="020B0604020202020204" pitchFamily="34" charset="0"/>
+                        <a:ea typeface="等线" panose="02010600030101010101" pitchFamily="2" charset="-122"/>
+                      </a:endParaRPr>
+                    </a:p>
+                  </a:txBody>
+                  <a:tcPr marL="3839" marR="3839" marT="3839" marB="0" anchor="ctr"/>
+                </a:tc>
+                <a:extLst>
+                  <a:ext uri="{0D108BD9-81ED-4DB2-BD59-A6C34878D82A}">
+                    <a16:rowId xmlns:a16="http://schemas.microsoft.com/office/drawing/2014/main" val="2061999342"/>
+                  </a:ext>
+                </a:extLst>
+              </a:tr>
+              <a:tr h="464508">
+                <a:tc>
+                  <a:txBody>
+                    <a:bodyPr/>
+                    <a:lstStyle/>
+                    <a:p>
+                      <a:pPr algn="l" fontAlgn="ctr"/>
+                      <a:r>
+                        <a:rPr lang="zh-CN" altLang="en-US" sz="1200" u="none" strike="noStrike" dirty="0">
+                          <a:effectLst/>
+                        </a:rPr>
+                        <a:t>手刀点（后溪穴）</a:t>
+                      </a:r>
+                      <a:endParaRPr lang="zh-CN" altLang="en-US" sz="1200" b="0" i="0" u="none" strike="noStrike" dirty="0">
+                        <a:solidFill>
+                          <a:srgbClr val="333333"/>
+                        </a:solidFill>
+                        <a:effectLst/>
+                        <a:latin typeface="Arial" panose="020B0604020202020204" pitchFamily="34" charset="0"/>
+                        <a:ea typeface="等线" panose="02010600030101010101" pitchFamily="2" charset="-122"/>
+                      </a:endParaRPr>
+                    </a:p>
+                  </a:txBody>
+                  <a:tcPr marL="3839" marR="3839" marT="3839" marB="0" anchor="ctr"/>
+                </a:tc>
+                <a:tc>
+                  <a:txBody>
+                    <a:bodyPr/>
+                    <a:lstStyle/>
+                    <a:p>
+                      <a:pPr algn="l" fontAlgn="ctr"/>
+                      <a:r>
+                        <a:rPr lang="zh-CN" altLang="en-US" sz="1200" b="0" i="0" u="none" strike="noStrike" dirty="0" smtClean="0">
+                          <a:solidFill>
+                            <a:srgbClr val="333333"/>
+                          </a:solidFill>
+                          <a:effectLst/>
+                          <a:latin typeface="Arial" panose="020B0604020202020204" pitchFamily="34" charset="0"/>
+                          <a:ea typeface="等线" panose="02010600030101010101" pitchFamily="2" charset="-122"/>
+                        </a:rPr>
+                        <a:t>手太阳小肠经</a:t>
+                      </a:r>
+                      <a:endParaRPr lang="zh-CN" altLang="en-US" sz="1200" b="0" i="0" u="none" strike="noStrike" dirty="0">
+                        <a:solidFill>
+                          <a:srgbClr val="333333"/>
+                        </a:solidFill>
+                        <a:effectLst/>
+                        <a:latin typeface="Arial" panose="020B0604020202020204" pitchFamily="34" charset="0"/>
+                        <a:ea typeface="等线" panose="02010600030101010101" pitchFamily="2" charset="-122"/>
+                      </a:endParaRPr>
+                    </a:p>
+                  </a:txBody>
+                  <a:tcPr marL="3839" marR="3839" marT="3839" marB="0" anchor="ctr"/>
+                </a:tc>
+                <a:tc>
+                  <a:txBody>
+                    <a:bodyPr/>
+                    <a:lstStyle/>
+                    <a:p>
+                      <a:pPr algn="l" fontAlgn="ctr"/>
+                      <a:r>
+                        <a:rPr lang="zh-CN" altLang="en-US" sz="1200" u="none" strike="noStrike" dirty="0">
+                          <a:effectLst/>
+                        </a:rPr>
+                        <a:t>手刀点常用于建立心理安全感，缓解初始焦虑与抑郁情绪</a:t>
+                      </a:r>
+                      <a:r>
+                        <a:rPr lang="zh-CN" altLang="en-US" sz="1200" u="none" strike="noStrike" dirty="0" smtClean="0">
+                          <a:effectLst/>
+                        </a:rPr>
+                        <a:t>。风格</a:t>
+                      </a:r>
+                      <a:r>
+                        <a:rPr lang="zh-CN" altLang="en-US" sz="1200" u="none" strike="noStrike" dirty="0">
+                          <a:effectLst/>
+                        </a:rPr>
+                        <a:t>舒缓无强烈波动，适合敲击起始阶段平复心绪；羽调式音乐对应肾脏，可缓解恐惧等负面情绪</a:t>
+                      </a:r>
+                      <a:r>
+                        <a:rPr lang="zh-CN" altLang="en-US" sz="1200" u="none" strike="noStrike" dirty="0" smtClean="0">
+                          <a:effectLst/>
+                        </a:rPr>
+                        <a:t>，能</a:t>
+                      </a:r>
+                      <a:r>
+                        <a:rPr lang="zh-CN" altLang="en-US" sz="1200" u="none" strike="noStrike" dirty="0">
+                          <a:effectLst/>
+                        </a:rPr>
+                        <a:t>辅助该穴位泄心火、疏抑郁的作用。</a:t>
+                      </a:r>
+                      <a:endParaRPr lang="zh-CN" altLang="en-US" sz="1200" b="0" i="0" u="none" strike="noStrike" dirty="0">
+                        <a:solidFill>
+                          <a:srgbClr val="333333"/>
+                        </a:solidFill>
+                        <a:effectLst/>
+                        <a:latin typeface="Arial" panose="020B0604020202020204" pitchFamily="34" charset="0"/>
+                        <a:ea typeface="等线" panose="02010600030101010101" pitchFamily="2" charset="-122"/>
+                      </a:endParaRPr>
+                    </a:p>
+                  </a:txBody>
+                  <a:tcPr marL="3839" marR="3839" marT="3839" marB="0" anchor="ctr"/>
+                </a:tc>
+                <a:extLst>
+                  <a:ext uri="{0D108BD9-81ED-4DB2-BD59-A6C34878D82A}">
+                    <a16:rowId xmlns:a16="http://schemas.microsoft.com/office/drawing/2014/main" val="1994296052"/>
+                  </a:ext>
+                </a:extLst>
+              </a:tr>
+              <a:tr h="433797">
+                <a:tc>
+                  <a:txBody>
+                    <a:bodyPr/>
+                    <a:lstStyle/>
+                    <a:p>
+                      <a:pPr algn="l" fontAlgn="ctr"/>
+                      <a:r>
+                        <a:rPr lang="zh-CN" altLang="en-US" sz="1200" b="0" i="0" u="none" strike="noStrike" smtClean="0">
+                          <a:solidFill>
+                            <a:srgbClr val="333333"/>
+                          </a:solidFill>
+                          <a:effectLst/>
+                          <a:latin typeface="Arial" panose="020B0604020202020204" pitchFamily="34" charset="0"/>
+                          <a:ea typeface="等线" panose="02010600030101010101" pitchFamily="2" charset="-122"/>
+                        </a:rPr>
+                        <a:t>手腕内侧（内关穴）</a:t>
+                      </a:r>
+                      <a:endParaRPr lang="zh-CN" altLang="en-US" sz="1200" b="0" i="0" u="none" strike="noStrike" dirty="0">
+                        <a:solidFill>
+                          <a:srgbClr val="333333"/>
+                        </a:solidFill>
+                        <a:effectLst/>
+                        <a:latin typeface="Arial" panose="020B0604020202020204" pitchFamily="34" charset="0"/>
+                        <a:ea typeface="等线" panose="02010600030101010101" pitchFamily="2" charset="-122"/>
+                      </a:endParaRPr>
+                    </a:p>
+                  </a:txBody>
+                  <a:tcPr marL="3839" marR="3839" marT="3839" marB="0" anchor="ctr"/>
+                </a:tc>
+                <a:tc>
+                  <a:txBody>
+                    <a:bodyPr/>
+                    <a:lstStyle/>
+                    <a:p>
+                      <a:pPr marL="0" marR="0" lvl="0" indent="0" algn="l" defTabSz="914400" rtl="0" eaLnBrk="1" fontAlgn="ctr" latinLnBrk="0" hangingPunct="1">
+                        <a:lnSpc>
+                          <a:spcPct val="100000"/>
+                        </a:lnSpc>
+                        <a:spcBef>
+                          <a:spcPts val="0"/>
+                        </a:spcBef>
+                        <a:spcAft>
+                          <a:spcPts val="0"/>
+                        </a:spcAft>
+                        <a:buClrTx/>
+                        <a:buSzTx/>
+                        <a:buFontTx/>
+                        <a:buNone/>
+                        <a:tabLst/>
+                        <a:defRPr/>
+                      </a:pPr>
+                      <a:r>
+                        <a:rPr lang="zh-CN" altLang="en-US" sz="1200" b="0" i="0" u="none" strike="noStrike" dirty="0" smtClean="0">
+                          <a:solidFill>
+                            <a:srgbClr val="333333"/>
+                          </a:solidFill>
+                          <a:effectLst/>
+                          <a:latin typeface="Arial" panose="020B0604020202020204" pitchFamily="34" charset="0"/>
+                          <a:ea typeface="等线" panose="02010600030101010101" pitchFamily="2" charset="-122"/>
+                        </a:rPr>
+                        <a:t>手厥阴心包经</a:t>
+                      </a:r>
+                    </a:p>
+                  </a:txBody>
+                  <a:tcPr marL="3839" marR="3839" marT="3839" marB="0" anchor="ctr"/>
+                </a:tc>
+                <a:tc>
+                  <a:txBody>
+                    <a:bodyPr/>
+                    <a:lstStyle/>
+                    <a:p>
+                      <a:pPr algn="l" fontAlgn="ctr"/>
+                      <a:endParaRPr lang="zh-CN" altLang="en-US" sz="1200" b="0" i="0" u="none" strike="noStrike" dirty="0">
+                        <a:solidFill>
+                          <a:srgbClr val="333333"/>
+                        </a:solidFill>
+                        <a:effectLst/>
+                        <a:latin typeface="Arial" panose="020B0604020202020204" pitchFamily="34" charset="0"/>
+                        <a:ea typeface="等线" panose="02010600030101010101" pitchFamily="2" charset="-122"/>
+                      </a:endParaRPr>
+                    </a:p>
+                  </a:txBody>
+                  <a:tcPr marL="3839" marR="3839" marT="3839" marB="0" anchor="ctr"/>
+                </a:tc>
+                <a:extLst>
+                  <a:ext uri="{0D108BD9-81ED-4DB2-BD59-A6C34878D82A}">
+                    <a16:rowId xmlns:a16="http://schemas.microsoft.com/office/drawing/2014/main" val="1579610272"/>
+                  </a:ext>
+                </a:extLst>
+              </a:tr>
+              <a:tr h="433797">
+                <a:tc>
+                  <a:txBody>
+                    <a:bodyPr/>
+                    <a:lstStyle/>
+                    <a:p>
+                      <a:pPr algn="l" fontAlgn="ctr"/>
+                      <a:r>
+                        <a:rPr lang="zh-CN" altLang="en-US" sz="1200" u="none" strike="noStrike" dirty="0">
+                          <a:effectLst/>
+                        </a:rPr>
+                        <a:t>眉头（攒竹穴）</a:t>
+                      </a:r>
+                      <a:endParaRPr lang="zh-CN" altLang="en-US" sz="1200" b="0" i="0" u="none" strike="noStrike" dirty="0">
+                        <a:solidFill>
+                          <a:srgbClr val="333333"/>
+                        </a:solidFill>
+                        <a:effectLst/>
+                        <a:latin typeface="Arial" panose="020B0604020202020204" pitchFamily="34" charset="0"/>
+                        <a:ea typeface="等线" panose="02010600030101010101" pitchFamily="2" charset="-122"/>
+                      </a:endParaRPr>
+                    </a:p>
+                  </a:txBody>
+                  <a:tcPr marL="3839" marR="3839" marT="3839" marB="0" anchor="ctr"/>
+                </a:tc>
+                <a:tc>
+                  <a:txBody>
+                    <a:bodyPr/>
+                    <a:lstStyle/>
+                    <a:p>
+                      <a:pPr algn="l" fontAlgn="ctr"/>
+                      <a:r>
+                        <a:rPr lang="zh-CN" altLang="en-US" sz="1200" b="0" i="0" u="none" strike="noStrike" dirty="0" smtClean="0">
+                          <a:solidFill>
+                            <a:srgbClr val="333333"/>
+                          </a:solidFill>
+                          <a:effectLst/>
+                          <a:latin typeface="Arial" panose="020B0604020202020204" pitchFamily="34" charset="0"/>
+                          <a:ea typeface="等线" panose="02010600030101010101" pitchFamily="2" charset="-122"/>
+                        </a:rPr>
+                        <a:t>足太阳膀胱经</a:t>
+                      </a:r>
+                      <a:endParaRPr lang="zh-CN" altLang="en-US" sz="1200" b="0" i="0" u="none" strike="noStrike" dirty="0">
+                        <a:solidFill>
+                          <a:srgbClr val="333333"/>
+                        </a:solidFill>
+                        <a:effectLst/>
+                        <a:latin typeface="Arial" panose="020B0604020202020204" pitchFamily="34" charset="0"/>
+                        <a:ea typeface="等线" panose="02010600030101010101" pitchFamily="2" charset="-122"/>
+                      </a:endParaRPr>
+                    </a:p>
+                  </a:txBody>
+                  <a:tcPr marL="3839" marR="3839" marT="3839" marB="0" anchor="ctr"/>
+                </a:tc>
+                <a:tc>
+                  <a:txBody>
+                    <a:bodyPr/>
+                    <a:lstStyle/>
+                    <a:p>
+                      <a:pPr algn="l" fontAlgn="ctr"/>
+                      <a:r>
+                        <a:rPr lang="zh-CN" altLang="en-US" sz="1200" u="none" strike="noStrike" dirty="0">
+                          <a:effectLst/>
+                        </a:rPr>
+                        <a:t>此穴位核心缓解焦虑与烦躁情绪。中医中角调对应肝脏，可疏肝理气、缓解情绪紧绷</a:t>
+                      </a:r>
+                      <a:r>
+                        <a:rPr lang="zh-CN" altLang="en-US" sz="1200" u="none" strike="noStrike" dirty="0" smtClean="0">
+                          <a:effectLst/>
+                        </a:rPr>
+                        <a:t>，角</a:t>
+                      </a:r>
+                      <a:r>
+                        <a:rPr lang="zh-CN" altLang="en-US" sz="1200" u="none" strike="noStrike" dirty="0">
+                          <a:effectLst/>
+                        </a:rPr>
+                        <a:t>调式</a:t>
+                      </a:r>
+                      <a:r>
+                        <a:rPr lang="zh-CN" altLang="en-US" sz="1200" u="none" strike="noStrike" dirty="0" smtClean="0">
+                          <a:effectLst/>
+                        </a:rPr>
+                        <a:t>音乐能</a:t>
+                      </a:r>
+                      <a:r>
+                        <a:rPr lang="zh-CN" altLang="en-US" sz="1200" u="none" strike="noStrike" dirty="0">
+                          <a:effectLst/>
+                        </a:rPr>
+                        <a:t>契合该穴位舒缓焦虑、平复烦躁的需求。</a:t>
+                      </a:r>
+                      <a:endParaRPr lang="zh-CN" altLang="en-US" sz="1200" b="0" i="0" u="none" strike="noStrike" dirty="0">
+                        <a:solidFill>
+                          <a:srgbClr val="333333"/>
+                        </a:solidFill>
+                        <a:effectLst/>
+                        <a:latin typeface="Arial" panose="020B0604020202020204" pitchFamily="34" charset="0"/>
+                        <a:ea typeface="等线" panose="02010600030101010101" pitchFamily="2" charset="-122"/>
+                      </a:endParaRPr>
+                    </a:p>
+                  </a:txBody>
+                  <a:tcPr marL="3839" marR="3839" marT="3839" marB="0" anchor="ctr"/>
+                </a:tc>
+                <a:extLst>
+                  <a:ext uri="{0D108BD9-81ED-4DB2-BD59-A6C34878D82A}">
+                    <a16:rowId xmlns:a16="http://schemas.microsoft.com/office/drawing/2014/main" val="3311110419"/>
+                  </a:ext>
+                </a:extLst>
+              </a:tr>
+              <a:tr h="433797">
+                <a:tc>
+                  <a:txBody>
+                    <a:bodyPr/>
+                    <a:lstStyle/>
+                    <a:p>
+                      <a:pPr algn="l" fontAlgn="ctr"/>
+                      <a:r>
+                        <a:rPr lang="zh-CN" altLang="en-US" sz="1200" u="none" strike="noStrike">
+                          <a:effectLst/>
+                        </a:rPr>
+                        <a:t>眼尾（瞳子髎穴）</a:t>
+                      </a:r>
+                      <a:endParaRPr lang="zh-CN" altLang="en-US" sz="1200" b="0" i="0" u="none" strike="noStrike">
+                        <a:solidFill>
+                          <a:srgbClr val="333333"/>
+                        </a:solidFill>
+                        <a:effectLst/>
+                        <a:latin typeface="Arial" panose="020B0604020202020204" pitchFamily="34" charset="0"/>
+                        <a:ea typeface="等线" panose="02010600030101010101" pitchFamily="2" charset="-122"/>
+                      </a:endParaRPr>
+                    </a:p>
+                  </a:txBody>
+                  <a:tcPr marL="3839" marR="3839" marT="3839" marB="0" anchor="ctr"/>
+                </a:tc>
+                <a:tc>
+                  <a:txBody>
+                    <a:bodyPr/>
+                    <a:lstStyle/>
+                    <a:p>
+                      <a:pPr algn="l" fontAlgn="ctr"/>
+                      <a:endParaRPr lang="zh-CN" altLang="en-US" sz="1200" b="0" i="0" u="none" strike="noStrike" dirty="0">
+                        <a:solidFill>
+                          <a:srgbClr val="333333"/>
+                        </a:solidFill>
+                        <a:effectLst/>
+                        <a:latin typeface="Arial" panose="020B0604020202020204" pitchFamily="34" charset="0"/>
+                        <a:ea typeface="等线" panose="02010600030101010101" pitchFamily="2" charset="-122"/>
+                      </a:endParaRPr>
+                    </a:p>
+                  </a:txBody>
+                  <a:tcPr marL="3839" marR="3839" marT="3839" marB="0" anchor="ctr"/>
+                </a:tc>
+                <a:tc>
+                  <a:txBody>
+                    <a:bodyPr/>
+                    <a:lstStyle/>
+                    <a:p>
+                      <a:pPr algn="l" fontAlgn="ctr"/>
+                      <a:r>
+                        <a:rPr lang="zh-CN" altLang="en-US" sz="1200" u="none" strike="noStrike" dirty="0">
+                          <a:effectLst/>
+                        </a:rPr>
+                        <a:t>该穴位主打缓解紧张情绪</a:t>
+                      </a:r>
+                      <a:r>
+                        <a:rPr lang="zh-CN" altLang="en-US" sz="1200" u="none" strike="noStrike" dirty="0" smtClean="0">
+                          <a:effectLst/>
+                        </a:rPr>
+                        <a:t>。主题</a:t>
+                      </a:r>
+                      <a:r>
+                        <a:rPr lang="zh-CN" altLang="en-US" sz="1200" u="none" strike="noStrike" dirty="0">
+                          <a:effectLst/>
+                        </a:rPr>
+                        <a:t>音乐多为轻柔器乐，能避免刺激眼部感官，适配眼尾穴位的敏感特性；商调式对应肺，节奏明快清越</a:t>
+                      </a:r>
+                      <a:r>
+                        <a:rPr lang="zh-CN" altLang="en-US" sz="1200" u="none" strike="noStrike" dirty="0" smtClean="0">
+                          <a:effectLst/>
+                        </a:rPr>
+                        <a:t>，可</a:t>
+                      </a:r>
+                      <a:r>
+                        <a:rPr lang="zh-CN" altLang="en-US" sz="1200" u="none" strike="noStrike" dirty="0">
+                          <a:effectLst/>
+                        </a:rPr>
+                        <a:t>辅助调节神经，配合敲击缓解紧张，同时弱化眼部周围的不适感。</a:t>
+                      </a:r>
+                      <a:endParaRPr lang="zh-CN" altLang="en-US" sz="1200" b="0" i="0" u="none" strike="noStrike" dirty="0">
+                        <a:solidFill>
+                          <a:srgbClr val="333333"/>
+                        </a:solidFill>
+                        <a:effectLst/>
+                        <a:latin typeface="Arial" panose="020B0604020202020204" pitchFamily="34" charset="0"/>
+                        <a:ea typeface="等线" panose="02010600030101010101" pitchFamily="2" charset="-122"/>
+                      </a:endParaRPr>
+                    </a:p>
+                  </a:txBody>
+                  <a:tcPr marL="3839" marR="3839" marT="3839" marB="0" anchor="ctr"/>
+                </a:tc>
+                <a:extLst>
+                  <a:ext uri="{0D108BD9-81ED-4DB2-BD59-A6C34878D82A}">
+                    <a16:rowId xmlns:a16="http://schemas.microsoft.com/office/drawing/2014/main" val="603465208"/>
+                  </a:ext>
+                </a:extLst>
+              </a:tr>
+              <a:tr h="464508">
+                <a:tc>
+                  <a:txBody>
+                    <a:bodyPr/>
+                    <a:lstStyle/>
+                    <a:p>
+                      <a:pPr algn="l" fontAlgn="ctr"/>
+                      <a:r>
+                        <a:rPr lang="zh-CN" altLang="en-US" sz="1200" u="none" strike="noStrike">
+                          <a:effectLst/>
+                        </a:rPr>
+                        <a:t>眼下（承泣穴）</a:t>
+                      </a:r>
+                      <a:endParaRPr lang="zh-CN" altLang="en-US" sz="1200" b="0" i="0" u="none" strike="noStrike">
+                        <a:solidFill>
+                          <a:srgbClr val="333333"/>
+                        </a:solidFill>
+                        <a:effectLst/>
+                        <a:latin typeface="Arial" panose="020B0604020202020204" pitchFamily="34" charset="0"/>
+                        <a:ea typeface="等线" panose="02010600030101010101" pitchFamily="2" charset="-122"/>
+                      </a:endParaRPr>
+                    </a:p>
+                  </a:txBody>
+                  <a:tcPr marL="3839" marR="3839" marT="3839" marB="0" anchor="ctr"/>
+                </a:tc>
+                <a:tc>
+                  <a:txBody>
+                    <a:bodyPr/>
+                    <a:lstStyle/>
+                    <a:p>
+                      <a:pPr algn="l" fontAlgn="ctr"/>
+                      <a:endParaRPr lang="zh-CN" altLang="en-US" sz="1200" b="0" i="0" u="none" strike="noStrike" dirty="0">
+                        <a:solidFill>
+                          <a:srgbClr val="333333"/>
+                        </a:solidFill>
+                        <a:effectLst/>
+                        <a:latin typeface="Arial" panose="020B0604020202020204" pitchFamily="34" charset="0"/>
+                        <a:ea typeface="等线" panose="02010600030101010101" pitchFamily="2" charset="-122"/>
+                      </a:endParaRPr>
+                    </a:p>
+                  </a:txBody>
+                  <a:tcPr marL="3839" marR="3839" marT="3839" marB="0" anchor="ctr"/>
+                </a:tc>
+                <a:tc>
+                  <a:txBody>
+                    <a:bodyPr/>
+                    <a:lstStyle/>
+                    <a:p>
+                      <a:pPr algn="l" fontAlgn="ctr"/>
+                      <a:r>
+                        <a:rPr lang="zh-CN" altLang="en-US" sz="1200" u="none" strike="noStrike" dirty="0">
+                          <a:effectLst/>
+                        </a:rPr>
+                        <a:t>该穴位常用来缓解悲伤与忧郁。徵音对应心脏，能养心安神</a:t>
+                      </a:r>
+                      <a:r>
+                        <a:rPr lang="zh-CN" altLang="en-US" sz="1200" u="none" strike="noStrike" dirty="0" smtClean="0">
+                          <a:effectLst/>
+                        </a:rPr>
+                        <a:t>，经典</a:t>
+                      </a:r>
+                      <a:r>
+                        <a:rPr lang="zh-CN" altLang="en-US" sz="1200" u="none" strike="noStrike" dirty="0">
+                          <a:effectLst/>
+                        </a:rPr>
+                        <a:t>徵调</a:t>
+                      </a:r>
+                      <a:r>
+                        <a:rPr lang="zh-CN" altLang="en-US" sz="1200" u="none" strike="noStrike" dirty="0" smtClean="0">
+                          <a:effectLst/>
+                        </a:rPr>
+                        <a:t>曲可</a:t>
+                      </a:r>
+                      <a:r>
+                        <a:rPr lang="zh-CN" altLang="en-US" sz="1200" u="none" strike="noStrike" dirty="0">
+                          <a:effectLst/>
+                        </a:rPr>
+                        <a:t>辅助疏导悲伤情绪，契合穴位的情绪功能</a:t>
+                      </a:r>
+                      <a:r>
+                        <a:rPr lang="zh-CN" altLang="en-US" sz="1200" u="none" strike="noStrike" dirty="0" smtClean="0">
+                          <a:effectLst/>
+                        </a:rPr>
+                        <a:t>；轻柔</a:t>
+                      </a:r>
+                      <a:r>
+                        <a:rPr lang="zh-CN" altLang="en-US" sz="1200" u="none" strike="noStrike" dirty="0">
+                          <a:effectLst/>
+                        </a:rPr>
+                        <a:t>钢琴曲无突兀旋律，既能安抚情绪，也能搭配该穴位缓解眼部疲劳的躯体作用。</a:t>
+                      </a:r>
+                      <a:endParaRPr lang="zh-CN" altLang="en-US" sz="1200" b="0" i="0" u="none" strike="noStrike" dirty="0">
+                        <a:solidFill>
+                          <a:srgbClr val="333333"/>
+                        </a:solidFill>
+                        <a:effectLst/>
+                        <a:latin typeface="Arial" panose="020B0604020202020204" pitchFamily="34" charset="0"/>
+                        <a:ea typeface="等线" panose="02010600030101010101" pitchFamily="2" charset="-122"/>
+                      </a:endParaRPr>
+                    </a:p>
+                  </a:txBody>
+                  <a:tcPr marL="3839" marR="3839" marT="3839" marB="0" anchor="ctr"/>
+                </a:tc>
+                <a:extLst>
+                  <a:ext uri="{0D108BD9-81ED-4DB2-BD59-A6C34878D82A}">
+                    <a16:rowId xmlns:a16="http://schemas.microsoft.com/office/drawing/2014/main" val="3963269176"/>
+                  </a:ext>
+                </a:extLst>
+              </a:tr>
+              <a:tr h="464508">
+                <a:tc>
+                  <a:txBody>
+                    <a:bodyPr/>
+                    <a:lstStyle/>
+                    <a:p>
+                      <a:pPr algn="l" fontAlgn="ctr"/>
+                      <a:r>
+                        <a:rPr lang="zh-CN" altLang="en-US" sz="1200" u="none" strike="noStrike">
+                          <a:effectLst/>
+                        </a:rPr>
+                        <a:t>人中（水沟穴）</a:t>
+                      </a:r>
+                      <a:endParaRPr lang="zh-CN" altLang="en-US" sz="1200" b="0" i="0" u="none" strike="noStrike">
+                        <a:solidFill>
+                          <a:srgbClr val="333333"/>
+                        </a:solidFill>
+                        <a:effectLst/>
+                        <a:latin typeface="Arial" panose="020B0604020202020204" pitchFamily="34" charset="0"/>
+                        <a:ea typeface="等线" panose="02010600030101010101" pitchFamily="2" charset="-122"/>
+                      </a:endParaRPr>
+                    </a:p>
+                  </a:txBody>
+                  <a:tcPr marL="3839" marR="3839" marT="3839" marB="0" anchor="ctr"/>
+                </a:tc>
+                <a:tc>
+                  <a:txBody>
+                    <a:bodyPr/>
+                    <a:lstStyle/>
+                    <a:p>
+                      <a:pPr algn="l" fontAlgn="ctr"/>
+                      <a:endParaRPr lang="zh-CN" altLang="en-US" sz="1200" b="0" i="0" u="none" strike="noStrike" dirty="0">
+                        <a:solidFill>
+                          <a:srgbClr val="333333"/>
+                        </a:solidFill>
+                        <a:effectLst/>
+                        <a:latin typeface="Arial" panose="020B0604020202020204" pitchFamily="34" charset="0"/>
+                        <a:ea typeface="等线" panose="02010600030101010101" pitchFamily="2" charset="-122"/>
+                      </a:endParaRPr>
+                    </a:p>
+                  </a:txBody>
+                  <a:tcPr marL="3839" marR="3839" marT="3839" marB="0" anchor="ctr"/>
+                </a:tc>
+                <a:tc>
+                  <a:txBody>
+                    <a:bodyPr/>
+                    <a:lstStyle/>
+                    <a:p>
+                      <a:pPr algn="l" fontAlgn="ctr"/>
+                      <a:r>
+                        <a:rPr lang="zh-CN" altLang="en-US" sz="1200" u="none" strike="noStrike" dirty="0">
+                          <a:effectLst/>
+                        </a:rPr>
+                        <a:t>人中穴多用于情绪激动时醒脑、调节呼吸</a:t>
+                      </a:r>
+                      <a:r>
+                        <a:rPr lang="zh-CN" altLang="en-US" sz="1200" u="none" strike="noStrike" dirty="0" smtClean="0">
+                          <a:effectLst/>
+                        </a:rPr>
+                        <a:t>。羽</a:t>
+                      </a:r>
+                      <a:r>
+                        <a:rPr lang="zh-CN" altLang="en-US" sz="1200" u="none" strike="noStrike" dirty="0">
+                          <a:effectLst/>
+                        </a:rPr>
+                        <a:t>调式</a:t>
+                      </a:r>
+                      <a:r>
+                        <a:rPr lang="zh-CN" altLang="en-US" sz="1200" u="none" strike="noStrike" dirty="0" smtClean="0">
+                          <a:effectLst/>
+                        </a:rPr>
+                        <a:t>音乐音色</a:t>
+                      </a:r>
+                      <a:r>
+                        <a:rPr lang="zh-CN" altLang="en-US" sz="1200" u="none" strike="noStrike" dirty="0">
+                          <a:effectLst/>
+                        </a:rPr>
+                        <a:t>低沉柔和，可引导呼吸平稳，缓解急促呼吸带来的窒息感；箫曲的悠远</a:t>
+                      </a:r>
+                      <a:r>
+                        <a:rPr lang="zh-CN" altLang="en-US" sz="1200" u="none" strike="noStrike" dirty="0" smtClean="0">
+                          <a:effectLst/>
+                        </a:rPr>
+                        <a:t>意境，</a:t>
+                      </a:r>
+                      <a:r>
+                        <a:rPr lang="zh-CN" altLang="en-US" sz="1200" u="none" strike="noStrike" dirty="0">
+                          <a:effectLst/>
+                        </a:rPr>
+                        <a:t>能让呼吸节奏与旋律同步，配合敲击帮助平复激动情绪。</a:t>
+                      </a:r>
+                      <a:endParaRPr lang="zh-CN" altLang="en-US" sz="1200" b="0" i="0" u="none" strike="noStrike" dirty="0">
+                        <a:solidFill>
+                          <a:srgbClr val="333333"/>
+                        </a:solidFill>
+                        <a:effectLst/>
+                        <a:latin typeface="Arial" panose="020B0604020202020204" pitchFamily="34" charset="0"/>
+                        <a:ea typeface="等线" panose="02010600030101010101" pitchFamily="2" charset="-122"/>
+                      </a:endParaRPr>
+                    </a:p>
+                  </a:txBody>
+                  <a:tcPr marL="3839" marR="3839" marT="3839" marB="0" anchor="ctr"/>
+                </a:tc>
+                <a:extLst>
+                  <a:ext uri="{0D108BD9-81ED-4DB2-BD59-A6C34878D82A}">
+                    <a16:rowId xmlns:a16="http://schemas.microsoft.com/office/drawing/2014/main" val="1076230948"/>
+                  </a:ext>
+                </a:extLst>
+              </a:tr>
+              <a:tr h="464508">
+                <a:tc>
+                  <a:txBody>
+                    <a:bodyPr/>
+                    <a:lstStyle/>
+                    <a:p>
+                      <a:pPr algn="l" fontAlgn="ctr"/>
+                      <a:r>
+                        <a:rPr lang="zh-CN" altLang="en-US" sz="1200" u="none" strike="noStrike">
+                          <a:effectLst/>
+                        </a:rPr>
+                        <a:t>下巴（承浆穴）</a:t>
+                      </a:r>
+                      <a:endParaRPr lang="zh-CN" altLang="en-US" sz="1200" b="0" i="0" u="none" strike="noStrike">
+                        <a:solidFill>
+                          <a:srgbClr val="333333"/>
+                        </a:solidFill>
+                        <a:effectLst/>
+                        <a:latin typeface="Arial" panose="020B0604020202020204" pitchFamily="34" charset="0"/>
+                        <a:ea typeface="等线" panose="02010600030101010101" pitchFamily="2" charset="-122"/>
+                      </a:endParaRPr>
+                    </a:p>
+                  </a:txBody>
+                  <a:tcPr marL="3839" marR="3839" marT="3839" marB="0" anchor="ctr"/>
+                </a:tc>
+                <a:tc>
+                  <a:txBody>
+                    <a:bodyPr/>
+                    <a:lstStyle/>
+                    <a:p>
+                      <a:pPr algn="l" fontAlgn="ctr"/>
+                      <a:endParaRPr lang="zh-CN" altLang="en-US" sz="1200" b="0" i="0" u="none" strike="noStrike" dirty="0">
+                        <a:solidFill>
+                          <a:srgbClr val="333333"/>
+                        </a:solidFill>
+                        <a:effectLst/>
+                        <a:latin typeface="Arial" panose="020B0604020202020204" pitchFamily="34" charset="0"/>
+                        <a:ea typeface="等线" panose="02010600030101010101" pitchFamily="2" charset="-122"/>
+                      </a:endParaRPr>
+                    </a:p>
+                  </a:txBody>
+                  <a:tcPr marL="3839" marR="3839" marT="3839" marB="0" anchor="ctr"/>
+                </a:tc>
+                <a:tc>
+                  <a:txBody>
+                    <a:bodyPr/>
+                    <a:lstStyle/>
+                    <a:p>
+                      <a:pPr algn="l" fontAlgn="ctr"/>
+                      <a:r>
+                        <a:rPr lang="zh-CN" altLang="en-US" sz="1200" u="none" strike="noStrike" dirty="0">
+                          <a:effectLst/>
+                        </a:rPr>
+                        <a:t>该穴位可化解情绪紧绷，缓解颞下颌关节压力。宫调对应脾脏，旋律浑厚庄重，能缓解思虑过度</a:t>
+                      </a:r>
+                      <a:r>
+                        <a:rPr lang="zh-CN" altLang="en-US" sz="1200" u="none" strike="noStrike" dirty="0" smtClean="0">
+                          <a:effectLst/>
+                        </a:rPr>
+                        <a:t>，宫调曲可</a:t>
+                      </a:r>
+                      <a:r>
+                        <a:rPr lang="zh-CN" altLang="en-US" sz="1200" u="none" strike="noStrike" dirty="0">
+                          <a:effectLst/>
+                        </a:rPr>
+                        <a:t>辅助放松面部肌肉，配合敲击减轻因情绪紧绷导致的下颌不适；</a:t>
+                      </a:r>
+                      <a:r>
+                        <a:rPr lang="zh-CN" altLang="en-US" sz="1200" u="none" strike="noStrike" dirty="0" smtClean="0">
+                          <a:effectLst/>
+                        </a:rPr>
+                        <a:t>同时音乐</a:t>
+                      </a:r>
+                      <a:r>
+                        <a:rPr lang="zh-CN" altLang="en-US" sz="1200" u="none" strike="noStrike" dirty="0">
+                          <a:effectLst/>
+                        </a:rPr>
+                        <a:t>节奏平稳，</a:t>
+                      </a:r>
+                      <a:r>
+                        <a:rPr lang="zh-CN" altLang="en-US" sz="1200" u="none" strike="noStrike" dirty="0" smtClean="0">
+                          <a:effectLst/>
+                        </a:rPr>
+                        <a:t>契合“</a:t>
+                      </a:r>
+                      <a:r>
+                        <a:rPr lang="zh-CN" altLang="en-US" sz="1200" u="none" strike="noStrike" dirty="0">
+                          <a:effectLst/>
+                        </a:rPr>
+                        <a:t>弱化身体不适感” 的音乐选择原则。</a:t>
+                      </a:r>
+                      <a:endParaRPr lang="zh-CN" altLang="en-US" sz="1200" b="0" i="0" u="none" strike="noStrike" dirty="0">
+                        <a:solidFill>
+                          <a:srgbClr val="333333"/>
+                        </a:solidFill>
+                        <a:effectLst/>
+                        <a:latin typeface="Arial" panose="020B0604020202020204" pitchFamily="34" charset="0"/>
+                        <a:ea typeface="等线" panose="02010600030101010101" pitchFamily="2" charset="-122"/>
+                      </a:endParaRPr>
+                    </a:p>
+                  </a:txBody>
+                  <a:tcPr marL="3839" marR="3839" marT="3839" marB="0" anchor="ctr"/>
+                </a:tc>
+                <a:extLst>
+                  <a:ext uri="{0D108BD9-81ED-4DB2-BD59-A6C34878D82A}">
+                    <a16:rowId xmlns:a16="http://schemas.microsoft.com/office/drawing/2014/main" val="3700704300"/>
+                  </a:ext>
+                </a:extLst>
+              </a:tr>
+              <a:tr h="464508">
+                <a:tc>
+                  <a:txBody>
+                    <a:bodyPr/>
+                    <a:lstStyle/>
+                    <a:p>
+                      <a:pPr algn="l" fontAlgn="ctr"/>
+                      <a:r>
+                        <a:rPr lang="zh-CN" altLang="en-US" sz="1200" u="none" strike="noStrike">
+                          <a:effectLst/>
+                        </a:rPr>
+                        <a:t>锁骨下方（俞府穴）</a:t>
+                      </a:r>
+                      <a:endParaRPr lang="zh-CN" altLang="en-US" sz="1200" b="0" i="0" u="none" strike="noStrike">
+                        <a:solidFill>
+                          <a:srgbClr val="333333"/>
+                        </a:solidFill>
+                        <a:effectLst/>
+                        <a:latin typeface="Arial" panose="020B0604020202020204" pitchFamily="34" charset="0"/>
+                        <a:ea typeface="等线" panose="02010600030101010101" pitchFamily="2" charset="-122"/>
+                      </a:endParaRPr>
+                    </a:p>
+                  </a:txBody>
+                  <a:tcPr marL="3839" marR="3839" marT="3839" marB="0" anchor="ctr"/>
+                </a:tc>
+                <a:tc>
+                  <a:txBody>
+                    <a:bodyPr/>
+                    <a:lstStyle/>
+                    <a:p>
+                      <a:pPr algn="l" fontAlgn="ctr"/>
+                      <a:endParaRPr lang="zh-CN" altLang="en-US" sz="1200" b="0" i="0" u="none" strike="noStrike" dirty="0">
+                        <a:solidFill>
+                          <a:srgbClr val="333333"/>
+                        </a:solidFill>
+                        <a:effectLst/>
+                        <a:latin typeface="Arial" panose="020B0604020202020204" pitchFamily="34" charset="0"/>
+                        <a:ea typeface="等线" panose="02010600030101010101" pitchFamily="2" charset="-122"/>
+                      </a:endParaRPr>
+                    </a:p>
+                  </a:txBody>
+                  <a:tcPr marL="3839" marR="3839" marT="3839" marB="0" anchor="ctr"/>
+                </a:tc>
+                <a:tc>
+                  <a:txBody>
+                    <a:bodyPr/>
+                    <a:lstStyle/>
+                    <a:p>
+                      <a:pPr algn="l" fontAlgn="ctr"/>
+                      <a:r>
+                        <a:rPr lang="zh-CN" altLang="en-US" sz="1200" u="none" strike="noStrike" dirty="0">
+                          <a:effectLst/>
+                        </a:rPr>
+                        <a:t>此穴位可缓解胸闷气短，释放胸腔积压的情绪</a:t>
+                      </a:r>
+                      <a:r>
+                        <a:rPr lang="zh-CN" altLang="en-US" sz="1200" u="none" strike="noStrike" dirty="0" smtClean="0">
+                          <a:effectLst/>
+                        </a:rPr>
+                        <a:t>。徵</a:t>
+                      </a:r>
+                      <a:r>
+                        <a:rPr lang="zh-CN" altLang="en-US" sz="1200" u="none" strike="noStrike" dirty="0">
+                          <a:effectLst/>
+                        </a:rPr>
+                        <a:t>调式代表曲，热烈明亮，能养心安神，促进胸腔气血循环，适配该穴位疏导胸腔情绪的功能</a:t>
+                      </a:r>
+                      <a:r>
+                        <a:rPr lang="zh-CN" altLang="en-US" sz="1200" u="none" strike="noStrike" dirty="0" smtClean="0">
+                          <a:effectLst/>
+                        </a:rPr>
+                        <a:t>；轻快</a:t>
+                      </a:r>
+                      <a:r>
+                        <a:rPr lang="zh-CN" altLang="en-US" sz="1200" u="none" strike="noStrike" dirty="0">
+                          <a:effectLst/>
+                        </a:rPr>
+                        <a:t>民乐，搭配锁骨下方穴位敲击，</a:t>
+                      </a:r>
+                      <a:r>
+                        <a:rPr lang="zh-CN" altLang="en-US" sz="1200" u="none" strike="noStrike" dirty="0" smtClean="0">
+                          <a:effectLst/>
+                        </a:rPr>
+                        <a:t>帮助缓解</a:t>
+                      </a:r>
+                      <a:r>
+                        <a:rPr lang="zh-CN" altLang="en-US" sz="1200" u="none" strike="noStrike" dirty="0">
+                          <a:effectLst/>
+                        </a:rPr>
+                        <a:t>职场压力带来的胸闷，提升情绪释放效率。</a:t>
+                      </a:r>
+                      <a:endParaRPr lang="zh-CN" altLang="en-US" sz="1200" b="0" i="0" u="none" strike="noStrike" dirty="0">
+                        <a:solidFill>
+                          <a:srgbClr val="333333"/>
+                        </a:solidFill>
+                        <a:effectLst/>
+                        <a:latin typeface="Arial" panose="020B0604020202020204" pitchFamily="34" charset="0"/>
+                        <a:ea typeface="等线" panose="02010600030101010101" pitchFamily="2" charset="-122"/>
+                      </a:endParaRPr>
+                    </a:p>
+                  </a:txBody>
+                  <a:tcPr marL="3839" marR="3839" marT="3839" marB="0" anchor="ctr"/>
+                </a:tc>
+                <a:extLst>
+                  <a:ext uri="{0D108BD9-81ED-4DB2-BD59-A6C34878D82A}">
+                    <a16:rowId xmlns:a16="http://schemas.microsoft.com/office/drawing/2014/main" val="2095075859"/>
+                  </a:ext>
+                </a:extLst>
+              </a:tr>
+              <a:tr h="464508">
+                <a:tc>
+                  <a:txBody>
+                    <a:bodyPr/>
+                    <a:lstStyle/>
+                    <a:p>
+                      <a:pPr algn="l" fontAlgn="ctr"/>
+                      <a:r>
+                        <a:rPr lang="zh-CN" altLang="en-US" sz="1200" u="none" strike="noStrike">
+                          <a:effectLst/>
+                        </a:rPr>
+                        <a:t>腋下（大包穴）</a:t>
+                      </a:r>
+                      <a:endParaRPr lang="zh-CN" altLang="en-US" sz="1200" b="0" i="0" u="none" strike="noStrike">
+                        <a:solidFill>
+                          <a:srgbClr val="333333"/>
+                        </a:solidFill>
+                        <a:effectLst/>
+                        <a:latin typeface="Arial" panose="020B0604020202020204" pitchFamily="34" charset="0"/>
+                        <a:ea typeface="等线" panose="02010600030101010101" pitchFamily="2" charset="-122"/>
+                      </a:endParaRPr>
+                    </a:p>
+                  </a:txBody>
+                  <a:tcPr marL="3839" marR="3839" marT="3839" marB="0" anchor="ctr"/>
+                </a:tc>
+                <a:tc>
+                  <a:txBody>
+                    <a:bodyPr/>
+                    <a:lstStyle/>
+                    <a:p>
+                      <a:pPr algn="l" fontAlgn="ctr"/>
+                      <a:endParaRPr lang="zh-CN" altLang="en-US" sz="1200" b="0" i="0" u="none" strike="noStrike" dirty="0">
+                        <a:solidFill>
+                          <a:srgbClr val="333333"/>
+                        </a:solidFill>
+                        <a:effectLst/>
+                        <a:latin typeface="Arial" panose="020B0604020202020204" pitchFamily="34" charset="0"/>
+                        <a:ea typeface="等线" panose="02010600030101010101" pitchFamily="2" charset="-122"/>
+                      </a:endParaRPr>
+                    </a:p>
+                  </a:txBody>
+                  <a:tcPr marL="3839" marR="3839" marT="3839" marB="0" anchor="ctr"/>
+                </a:tc>
+                <a:tc>
+                  <a:txBody>
+                    <a:bodyPr/>
+                    <a:lstStyle/>
+                    <a:p>
+                      <a:pPr algn="l" fontAlgn="ctr"/>
+                      <a:r>
+                        <a:rPr lang="zh-CN" altLang="en-US" sz="1200" u="none" strike="noStrike" dirty="0">
+                          <a:effectLst/>
+                        </a:rPr>
+                        <a:t>腋下大包穴可疏肝健脾，释放胸腔负面情绪。商调</a:t>
+                      </a:r>
+                      <a:r>
+                        <a:rPr lang="zh-CN" altLang="en-US" sz="1200" u="none" strike="noStrike" dirty="0" smtClean="0">
+                          <a:effectLst/>
+                        </a:rPr>
+                        <a:t>式高亢</a:t>
+                      </a:r>
+                      <a:r>
+                        <a:rPr lang="zh-CN" altLang="en-US" sz="1200" u="none" strike="noStrike" dirty="0">
+                          <a:effectLst/>
+                        </a:rPr>
+                        <a:t>清越，能辅助疏肝理气，配合敲击释放压抑的复杂情绪，契合穴位调节脏腑与情绪的双重作用；这类合奏乐的治愈力</a:t>
+                      </a:r>
+                      <a:r>
+                        <a:rPr lang="zh-CN" altLang="en-US" sz="1200" u="none" strike="noStrike" dirty="0" smtClean="0">
+                          <a:effectLst/>
+                        </a:rPr>
+                        <a:t>与 </a:t>
+                      </a:r>
+                      <a:r>
+                        <a:rPr lang="zh-CN" altLang="en-US" sz="1200" u="none" strike="noStrike" dirty="0">
+                          <a:effectLst/>
+                        </a:rPr>
+                        <a:t>“音乐强化穴位情绪联动” 理念相符，可帮助卸掉猜忌等负面情绪。</a:t>
+                      </a:r>
+                      <a:endParaRPr lang="zh-CN" altLang="en-US" sz="1200" b="0" i="0" u="none" strike="noStrike" dirty="0">
+                        <a:solidFill>
+                          <a:srgbClr val="333333"/>
+                        </a:solidFill>
+                        <a:effectLst/>
+                        <a:latin typeface="Arial" panose="020B0604020202020204" pitchFamily="34" charset="0"/>
+                        <a:ea typeface="等线" panose="02010600030101010101" pitchFamily="2" charset="-122"/>
+                      </a:endParaRPr>
+                    </a:p>
+                  </a:txBody>
+                  <a:tcPr marL="3839" marR="3839" marT="3839" marB="0" anchor="ctr"/>
+                </a:tc>
+                <a:extLst>
+                  <a:ext uri="{0D108BD9-81ED-4DB2-BD59-A6C34878D82A}">
+                    <a16:rowId xmlns:a16="http://schemas.microsoft.com/office/drawing/2014/main" val="3451696052"/>
+                  </a:ext>
+                </a:extLst>
+              </a:tr>
+              <a:tr h="464508">
+                <a:tc>
+                  <a:txBody>
+                    <a:bodyPr/>
+                    <a:lstStyle/>
+                    <a:p>
+                      <a:pPr algn="l" fontAlgn="ctr"/>
+                      <a:r>
+                        <a:rPr lang="zh-CN" altLang="en-US" sz="1200" u="none" strike="noStrike">
+                          <a:effectLst/>
+                        </a:rPr>
+                        <a:t>头顶（百会穴）</a:t>
+                      </a:r>
+                      <a:endParaRPr lang="zh-CN" altLang="en-US" sz="1200" b="0" i="0" u="none" strike="noStrike">
+                        <a:solidFill>
+                          <a:srgbClr val="333333"/>
+                        </a:solidFill>
+                        <a:effectLst/>
+                        <a:latin typeface="Arial" panose="020B0604020202020204" pitchFamily="34" charset="0"/>
+                        <a:ea typeface="等线" panose="02010600030101010101" pitchFamily="2" charset="-122"/>
+                      </a:endParaRPr>
+                    </a:p>
+                  </a:txBody>
+                  <a:tcPr marL="3839" marR="3839" marT="3839" marB="0" anchor="ctr"/>
+                </a:tc>
+                <a:tc>
+                  <a:txBody>
+                    <a:bodyPr/>
+                    <a:lstStyle/>
+                    <a:p>
+                      <a:pPr algn="l" fontAlgn="ctr"/>
+                      <a:endParaRPr lang="zh-CN" altLang="en-US" sz="1200" b="0" i="0" u="none" strike="noStrike" dirty="0">
+                        <a:solidFill>
+                          <a:srgbClr val="333333"/>
+                        </a:solidFill>
+                        <a:effectLst/>
+                        <a:latin typeface="Arial" panose="020B0604020202020204" pitchFamily="34" charset="0"/>
+                        <a:ea typeface="等线" panose="02010600030101010101" pitchFamily="2" charset="-122"/>
+                      </a:endParaRPr>
+                    </a:p>
+                  </a:txBody>
+                  <a:tcPr marL="3839" marR="3839" marT="3839" marB="0" anchor="ctr"/>
+                </a:tc>
+                <a:tc>
+                  <a:txBody>
+                    <a:bodyPr/>
+                    <a:lstStyle/>
+                    <a:p>
+                      <a:pPr algn="l" fontAlgn="ctr"/>
+                      <a:r>
+                        <a:rPr lang="zh-CN" altLang="en-US" sz="1200" u="none" strike="noStrike" dirty="0">
+                          <a:effectLst/>
+                        </a:rPr>
+                        <a:t>百会穴负责平衡整体情绪，释放恐惧，调节大脑功能</a:t>
+                      </a:r>
+                      <a:r>
+                        <a:rPr lang="zh-CN" altLang="en-US" sz="1200" u="none" strike="noStrike" dirty="0" smtClean="0">
+                          <a:effectLst/>
+                        </a:rPr>
+                        <a:t>。选用</a:t>
+                      </a:r>
+                      <a:r>
+                        <a:rPr lang="zh-CN" altLang="en-US" sz="1200" u="none" strike="noStrike" dirty="0">
+                          <a:effectLst/>
+                        </a:rPr>
+                        <a:t>空灵意境的音乐搭配这类核心调节穴位，这类音乐能引导身心能量流通</a:t>
+                      </a:r>
+                      <a:r>
+                        <a:rPr lang="zh-CN" altLang="en-US" sz="1200" u="none" strike="noStrike" dirty="0" smtClean="0">
+                          <a:effectLst/>
+                        </a:rPr>
+                        <a:t>；羽</a:t>
+                      </a:r>
+                      <a:r>
+                        <a:rPr lang="zh-CN" altLang="en-US" sz="1200" u="none" strike="noStrike" dirty="0">
+                          <a:effectLst/>
+                        </a:rPr>
+                        <a:t>调</a:t>
+                      </a:r>
+                      <a:r>
+                        <a:rPr lang="zh-CN" altLang="en-US" sz="1200" u="none" strike="noStrike" dirty="0" smtClean="0">
+                          <a:effectLst/>
+                        </a:rPr>
+                        <a:t>曲可</a:t>
+                      </a:r>
+                      <a:r>
+                        <a:rPr lang="zh-CN" altLang="en-US" sz="1200" u="none" strike="noStrike" dirty="0">
+                          <a:effectLst/>
+                        </a:rPr>
+                        <a:t>补肾固精、缓解恐惧，与百会穴驱散强烈负面情绪、平衡身心的核心作用高度匹配。</a:t>
+                      </a:r>
+                      <a:endParaRPr lang="zh-CN" altLang="en-US" sz="1200" b="0" i="0" u="none" strike="noStrike" dirty="0">
+                        <a:solidFill>
+                          <a:srgbClr val="333333"/>
+                        </a:solidFill>
+                        <a:effectLst/>
+                        <a:latin typeface="Arial" panose="020B0604020202020204" pitchFamily="34" charset="0"/>
+                        <a:ea typeface="等线" panose="02010600030101010101" pitchFamily="2" charset="-122"/>
+                      </a:endParaRPr>
+                    </a:p>
+                  </a:txBody>
+                  <a:tcPr marL="3839" marR="3839" marT="3839" marB="0" anchor="ctr"/>
+                </a:tc>
+                <a:extLst>
+                  <a:ext uri="{0D108BD9-81ED-4DB2-BD59-A6C34878D82A}">
+                    <a16:rowId xmlns:a16="http://schemas.microsoft.com/office/drawing/2014/main" val="3927589382"/>
+                  </a:ext>
+                </a:extLst>
+              </a:tr>
+            </a:tbl>
+          </a:graphicData>
+        </a:graphic>
+      </p:graphicFrame>
+    </p:spTree>
+    <p:extLst>
+      <p:ext uri="{BB962C8B-B14F-4D97-AF65-F5344CB8AC3E}">
+        <p14:creationId xmlns:p14="http://schemas.microsoft.com/office/powerpoint/2010/main" val="387099857"/>
+      </p:ext>
+    </p:extLst>
+  </p:cSld>
+  <p:clrMapOvr>
+    <a:masterClrMapping/>
+  </p:clrMapOvr>
+  <p:timing>
+    <p:tnLst>
+      <p:par>
+        <p:cTn id="1" dur="indefinite" restart="never" nodeType="tmRoot"/>
+      </p:par>
+    </p:tnLst>
+  </p:timing>
+</p:sld>
+</file>
+
+<file path=ppt/slides/slide3.xml><?xml version="1.0" encoding="utf-8"?>
+<p:sld xmlns:a="http://schemas.openxmlformats.org/drawingml/2006/main" xmlns:r="http://schemas.openxmlformats.org/officeDocument/2006/relationships" xmlns:p="http://schemas.openxmlformats.org/presentationml/2006/main">
+  <p:cSld>
+    <p:spTree>
+      <p:nvGrpSpPr>
+        <p:cNvPr id="1" name="">
+          <a:extLst>
+            <a:ext uri="{FF2B5EF4-FFF2-40B4-BE49-F238E27FC236}">
+              <a16:creationId xmlns:a16="http://schemas.microsoft.com/office/drawing/2014/main" id="{46DE9D2F-1F09-0631-8AF8-DAFD261605EE}"/>
+            </a:ext>
+          </a:extLst>
+        </p:cNvPr>
+        <p:cNvGrpSpPr/>
+        <p:nvPr/>
+      </p:nvGrpSpPr>
+      <p:grpSpPr>
+        <a:xfrm>
+          <a:off x="0" y="0"/>
+          <a:ext cx="0" cy="0"/>
+          <a:chOff x="0" y="0"/>
+          <a:chExt cx="0" cy="0"/>
+        </a:xfrm>
+      </p:grpSpPr>
+      <p:sp>
+        <p:nvSpPr>
+          <p:cNvPr id="2" name="标题 1">
+            <a:extLst>
+              <a:ext uri="{FF2B5EF4-FFF2-40B4-BE49-F238E27FC236}">
+                <a16:creationId xmlns:a16="http://schemas.microsoft.com/office/drawing/2014/main" id="{E056FC73-5505-DDD6-8338-9EEEF774262A}"/>
+              </a:ext>
+            </a:extLst>
+          </p:cNvPr>
+          <p:cNvSpPr>
+            <a:spLocks noGrp="1"/>
+          </p:cNvSpPr>
+          <p:nvPr>
+            <p:ph type="title"/>
+          </p:nvPr>
+        </p:nvSpPr>
+        <p:spPr>
+          <a:xfrm>
+            <a:off x="521208" y="662740"/>
+            <a:ext cx="11155680" cy="936652"/>
+          </a:xfrm>
+        </p:spPr>
+        <p:txBody>
+          <a:bodyPr/>
+          <a:lstStyle/>
+          <a:p>
+            <a:r>
+              <a:rPr lang="zh-CN" altLang="en-US" sz="4400" dirty="0"/>
+              <a:t>情绪释放技术</a:t>
+            </a:r>
+            <a:r>
+              <a:rPr lang="en-US" altLang="zh-CN" sz="4400" dirty="0"/>
+              <a:t>EFT</a:t>
+            </a:r>
+            <a:r>
+              <a:rPr lang="zh-CN" altLang="en-US" sz="4400" dirty="0"/>
+              <a:t>的主要特点</a:t>
+            </a:r>
+          </a:p>
+        </p:txBody>
+      </p:sp>
+      <p:sp>
+        <p:nvSpPr>
+          <p:cNvPr id="3" name="内容占位符 2">
+            <a:extLst>
+              <a:ext uri="{FF2B5EF4-FFF2-40B4-BE49-F238E27FC236}">
+                <a16:creationId xmlns:a16="http://schemas.microsoft.com/office/drawing/2014/main" id="{C3C90094-C0B5-790F-FC0B-773883AD0A9A}"/>
+              </a:ext>
+            </a:extLst>
+          </p:cNvPr>
+          <p:cNvSpPr>
+            <a:spLocks noGrp="1"/>
+          </p:cNvSpPr>
+          <p:nvPr>
+            <p:ph idx="1"/>
+          </p:nvPr>
+        </p:nvSpPr>
+        <p:spPr>
+          <a:xfrm>
+            <a:off x="2906437" y="1599391"/>
+            <a:ext cx="6385221" cy="1773593"/>
+          </a:xfrm>
+        </p:spPr>
+        <p:txBody>
+          <a:bodyPr/>
+          <a:lstStyle/>
+          <a:p>
+            <a:pPr marL="0" indent="0">
+              <a:buNone/>
+            </a:pPr>
+            <a:r>
+              <a:rPr lang="zh-CN" altLang="en-US" sz="2400" dirty="0" smtClean="0">
+                <a:effectLst>
+                  <a:outerShdw blurRad="50800" dist="38100" dir="2700000" algn="tl" rotWithShape="0">
+                    <a:prstClr val="black">
+                      <a:alpha val="40000"/>
+                    </a:prstClr>
+                  </a:outerShdw>
+                </a:effectLst>
+                <a:latin typeface="+mn-ea"/>
+              </a:rPr>
+              <a:t>特点</a:t>
+            </a:r>
+            <a:r>
+              <a:rPr lang="zh-CN" altLang="en-US" sz="2400" dirty="0">
+                <a:effectLst>
+                  <a:outerShdw blurRad="50800" dist="38100" dir="2700000" algn="tl" rotWithShape="0">
+                    <a:prstClr val="black">
+                      <a:alpha val="40000"/>
+                    </a:prstClr>
+                  </a:outerShdw>
+                </a:effectLst>
+                <a:latin typeface="+mn-ea"/>
+              </a:rPr>
+              <a:t>一</a:t>
+            </a:r>
+            <a:endParaRPr lang="en-US" altLang="zh-CN" sz="2400" dirty="0">
+              <a:effectLst>
+                <a:outerShdw blurRad="50800" dist="38100" dir="2700000" algn="tl" rotWithShape="0">
+                  <a:prstClr val="black">
+                    <a:alpha val="40000"/>
+                  </a:prstClr>
+                </a:outerShdw>
+              </a:effectLst>
+              <a:latin typeface="+mn-ea"/>
+            </a:endParaRPr>
+          </a:p>
+          <a:p>
+            <a:pPr marL="0" indent="0">
+              <a:buNone/>
+            </a:pPr>
+            <a:r>
+              <a:rPr lang="zh-CN" altLang="en-US" sz="1800" dirty="0">
+                <a:latin typeface="+mn-ea"/>
+              </a:rPr>
+              <a:t>一是基于中医的经络理论根植于中国的传统文化，具有明显的中国特色，符合中国人的情感特点，在普通大众中推行更易于被接受</a:t>
+            </a:r>
+            <a:r>
+              <a:rPr lang="zh-CN" altLang="en-US" sz="1800" dirty="0" smtClean="0">
+                <a:latin typeface="+mn-ea"/>
+              </a:rPr>
+              <a:t>；</a:t>
+            </a:r>
+            <a:endParaRPr lang="en-US" altLang="zh-CN" sz="1800" dirty="0">
+              <a:latin typeface="+mn-ea"/>
+            </a:endParaRPr>
+          </a:p>
+        </p:txBody>
+      </p:sp>
+      <p:pic>
+        <p:nvPicPr>
+          <p:cNvPr id="5" name="图片 4" descr="卡通人物&#10;&#10;AI 生成的内容可能不正确。">
+            <a:extLst>
+              <a:ext uri="{FF2B5EF4-FFF2-40B4-BE49-F238E27FC236}">
+                <a16:creationId xmlns:a16="http://schemas.microsoft.com/office/drawing/2014/main" id="{41B65075-63F5-D672-A41B-CC761312EAD7}"/>
+              </a:ext>
+            </a:extLst>
+          </p:cNvPr>
+          <p:cNvPicPr>
+            <a:picLocks noChangeAspect="1"/>
+          </p:cNvPicPr>
+          <p:nvPr/>
+        </p:nvPicPr>
+        <p:blipFill>
+          <a:blip r:embed="rId2" cstate="screen">
+            <a:extLst>
+              <a:ext uri="{28A0092B-C50C-407E-A947-70E740481C1C}">
+                <a14:useLocalDpi xmlns:a14="http://schemas.microsoft.com/office/drawing/2010/main"/>
+              </a:ext>
+            </a:extLst>
+          </a:blip>
+          <a:stretch>
+            <a:fillRect/>
+          </a:stretch>
+        </p:blipFill>
+        <p:spPr>
+          <a:xfrm>
+            <a:off x="3894783" y="3702693"/>
+            <a:ext cx="3233738" cy="2155825"/>
+          </a:xfrm>
+          <a:prstGeom prst="rect">
+            <a:avLst/>
+          </a:prstGeom>
+          <a:effectLst>
+            <a:softEdge rad="127000"/>
+          </a:effectLst>
+        </p:spPr>
+      </p:pic>
+      <p:sp>
+        <p:nvSpPr>
+          <p:cNvPr id="6" name="内容占位符 2">
+            <a:extLst>
+              <a:ext uri="{FF2B5EF4-FFF2-40B4-BE49-F238E27FC236}">
+                <a16:creationId xmlns:a16="http://schemas.microsoft.com/office/drawing/2014/main" id="{C3C90094-C0B5-790F-FC0B-773883AD0A9A}"/>
+              </a:ext>
+            </a:extLst>
+          </p:cNvPr>
+          <p:cNvSpPr txBox="1">
+            <a:spLocks/>
+          </p:cNvSpPr>
+          <p:nvPr/>
+        </p:nvSpPr>
+        <p:spPr>
+          <a:xfrm>
+            <a:off x="570665" y="3644862"/>
+            <a:ext cx="3324118" cy="2271488"/>
+          </a:xfrm>
+          <a:prstGeom prst="rect">
+            <a:avLst/>
+          </a:prstGeom>
+        </p:spPr>
+        <p:txBody>
+          <a:bodyPr lIns="109728" tIns="109728" rIns="109728" bIns="91440"/>
+          <a:lstStyle>
+            <a:lvl1pPr marL="228600" indent="-228600" algn="l" defTabSz="914400" rtl="0" eaLnBrk="1" latinLnBrk="0" hangingPunct="1">
+              <a:lnSpc>
+                <a:spcPct val="125000"/>
+              </a:lnSpc>
+              <a:spcBef>
+                <a:spcPts val="1000"/>
+              </a:spcBef>
+              <a:buFont typeface="Arial" panose="020B0604020202020204" pitchFamily="34" charset="0"/>
+              <a:buChar char="•"/>
+              <a:defRPr sz="1600" kern="1200" spc="160">
+                <a:solidFill>
+                  <a:schemeClr val="tx1"/>
+                </a:solidFill>
+                <a:latin typeface="+mn-lt"/>
+                <a:ea typeface="+mn-ea"/>
+                <a:cs typeface="+mn-cs"/>
+              </a:defRPr>
+            </a:lvl1pPr>
+            <a:lvl2pPr marL="685800" indent="-228600" algn="l" defTabSz="914400" rtl="0" eaLnBrk="1" latinLnBrk="0" hangingPunct="1">
+              <a:lnSpc>
+                <a:spcPct val="125000"/>
+              </a:lnSpc>
+              <a:spcBef>
+                <a:spcPts val="500"/>
+              </a:spcBef>
+              <a:buFont typeface="Arial" panose="020B0604020202020204" pitchFamily="34" charset="0"/>
+              <a:buChar char="•"/>
+              <a:defRPr sz="1600" kern="1200" spc="160">
+                <a:solidFill>
+                  <a:schemeClr val="tx1"/>
+                </a:solidFill>
+                <a:latin typeface="+mn-lt"/>
+                <a:ea typeface="+mn-ea"/>
+                <a:cs typeface="+mn-cs"/>
+              </a:defRPr>
+            </a:lvl2pPr>
+            <a:lvl3pPr marL="1143000" indent="-228600" algn="l" defTabSz="914400" rtl="0" eaLnBrk="1" latinLnBrk="0" hangingPunct="1">
+              <a:lnSpc>
+                <a:spcPct val="125000"/>
+              </a:lnSpc>
+              <a:spcBef>
+                <a:spcPts val="500"/>
+              </a:spcBef>
+              <a:buFont typeface="Arial" panose="020B0604020202020204" pitchFamily="34" charset="0"/>
+              <a:buChar char="•"/>
+              <a:defRPr sz="1600" kern="1200" spc="160">
+                <a:solidFill>
+                  <a:schemeClr val="tx1"/>
+                </a:solidFill>
+                <a:latin typeface="+mn-lt"/>
+                <a:ea typeface="+mn-ea"/>
+                <a:cs typeface="+mn-cs"/>
+              </a:defRPr>
+            </a:lvl3pPr>
+            <a:lvl4pPr marL="1600200" indent="-228600" algn="l" defTabSz="914400" rtl="0" eaLnBrk="1" latinLnBrk="0" hangingPunct="1">
+              <a:lnSpc>
+                <a:spcPct val="125000"/>
+              </a:lnSpc>
+              <a:spcBef>
+                <a:spcPts val="500"/>
+              </a:spcBef>
+              <a:buFont typeface="Arial" panose="020B0604020202020204" pitchFamily="34" charset="0"/>
+              <a:buChar char="•"/>
+              <a:defRPr sz="1600" kern="1200" spc="160">
+                <a:solidFill>
+                  <a:schemeClr val="tx1"/>
+                </a:solidFill>
+                <a:latin typeface="+mn-lt"/>
+                <a:ea typeface="+mn-ea"/>
+                <a:cs typeface="+mn-cs"/>
+              </a:defRPr>
+            </a:lvl4pPr>
+            <a:lvl5pPr marL="2057400" indent="-228600" algn="l" defTabSz="914400" rtl="0" eaLnBrk="1" latinLnBrk="0" hangingPunct="1">
+              <a:lnSpc>
+                <a:spcPct val="125000"/>
+              </a:lnSpc>
+              <a:spcBef>
+                <a:spcPts val="500"/>
+              </a:spcBef>
+              <a:buFont typeface="Arial" panose="020B0604020202020204" pitchFamily="34" charset="0"/>
+              <a:buChar char="•"/>
+              <a:defRPr sz="1600" kern="1200" spc="160">
+                <a:solidFill>
+                  <a:schemeClr val="tx1"/>
+                </a:solidFill>
+                <a:latin typeface="+mn-lt"/>
+                <a:ea typeface="+mn-ea"/>
+                <a:cs typeface="+mn-cs"/>
+              </a:defRPr>
+            </a:lvl5pPr>
+            <a:lvl6pPr marL="2514600" indent="-228600" algn="l" defTabSz="914400" rtl="0" eaLnBrk="1" latinLnBrk="0" hangingPunct="1">
+              <a:lnSpc>
+                <a:spcPct val="90000"/>
+              </a:lnSpc>
+              <a:spcBef>
+                <a:spcPts val="500"/>
+              </a:spcBef>
+              <a:buFont typeface="Arial" panose="020B0604020202020204" pitchFamily="34" charset="0"/>
+              <a:buChar char="•"/>
+              <a:defRPr sz="1800" kern="1200">
+                <a:solidFill>
+                  <a:schemeClr val="tx1"/>
+                </a:solidFill>
+                <a:latin typeface="+mn-lt"/>
+                <a:ea typeface="+mn-ea"/>
+                <a:cs typeface="+mn-cs"/>
+              </a:defRPr>
+            </a:lvl6pPr>
+            <a:lvl7pPr marL="2971800" indent="-228600" algn="l" defTabSz="914400" rtl="0" eaLnBrk="1" latinLnBrk="0" hangingPunct="1">
+              <a:lnSpc>
+                <a:spcPct val="90000"/>
+              </a:lnSpc>
+              <a:spcBef>
+                <a:spcPts val="500"/>
+              </a:spcBef>
+              <a:buFont typeface="Arial" panose="020B0604020202020204" pitchFamily="34" charset="0"/>
+              <a:buChar char="•"/>
+              <a:defRPr sz="1800" kern="1200">
+                <a:solidFill>
+                  <a:schemeClr val="tx1"/>
+                </a:solidFill>
+                <a:latin typeface="+mn-lt"/>
+                <a:ea typeface="+mn-ea"/>
+                <a:cs typeface="+mn-cs"/>
+              </a:defRPr>
+            </a:lvl7pPr>
+            <a:lvl8pPr marL="3429000" indent="-228600" algn="l" defTabSz="914400" rtl="0" eaLnBrk="1" latinLnBrk="0" hangingPunct="1">
+              <a:lnSpc>
+                <a:spcPct val="90000"/>
+              </a:lnSpc>
+              <a:spcBef>
+                <a:spcPts val="500"/>
+              </a:spcBef>
+              <a:buFont typeface="Arial" panose="020B0604020202020204" pitchFamily="34" charset="0"/>
+              <a:buChar char="•"/>
+              <a:defRPr sz="1800" kern="1200">
+                <a:solidFill>
+                  <a:schemeClr val="tx1"/>
+                </a:solidFill>
+                <a:latin typeface="+mn-lt"/>
+                <a:ea typeface="+mn-ea"/>
+                <a:cs typeface="+mn-cs"/>
+              </a:defRPr>
+            </a:lvl8pPr>
+            <a:lvl9pPr marL="3886200" indent="-228600" algn="l" defTabSz="914400" rtl="0" eaLnBrk="1" latinLnBrk="0" hangingPunct="1">
+              <a:lnSpc>
+                <a:spcPct val="90000"/>
+              </a:lnSpc>
+              <a:spcBef>
+                <a:spcPts val="500"/>
+              </a:spcBef>
+              <a:buFont typeface="Arial" panose="020B0604020202020204" pitchFamily="34" charset="0"/>
+              <a:buChar char="•"/>
+              <a:defRPr sz="1800" kern="1200">
+                <a:solidFill>
+                  <a:schemeClr val="tx1"/>
+                </a:solidFill>
+                <a:latin typeface="+mn-lt"/>
+                <a:ea typeface="+mn-ea"/>
+                <a:cs typeface="+mn-cs"/>
+              </a:defRPr>
+            </a:lvl9pPr>
+          </a:lstStyle>
+          <a:p>
+            <a:pPr marL="0" indent="0">
+              <a:buNone/>
+            </a:pPr>
+            <a:r>
+              <a:rPr lang="zh-CN" altLang="en-US" sz="2400" dirty="0" smtClean="0">
+                <a:effectLst>
+                  <a:outerShdw blurRad="50800" dist="38100" dir="2700000" algn="tl" rotWithShape="0">
+                    <a:prstClr val="black">
+                      <a:alpha val="40000"/>
+                    </a:prstClr>
+                  </a:outerShdw>
+                </a:effectLst>
+                <a:latin typeface="+mn-ea"/>
+              </a:rPr>
+              <a:t>特点二</a:t>
+            </a:r>
+            <a:endParaRPr lang="en-US" altLang="zh-CN" sz="2400" dirty="0" smtClean="0">
+              <a:effectLst>
+                <a:outerShdw blurRad="50800" dist="38100" dir="2700000" algn="tl" rotWithShape="0">
+                  <a:prstClr val="black">
+                    <a:alpha val="40000"/>
+                  </a:prstClr>
+                </a:outerShdw>
+              </a:effectLst>
+              <a:latin typeface="+mn-ea"/>
+            </a:endParaRPr>
+          </a:p>
+          <a:p>
+            <a:pPr marL="0" indent="0">
+              <a:buNone/>
+            </a:pPr>
+            <a:r>
+              <a:rPr lang="zh-CN" altLang="en-US" sz="1800" dirty="0" smtClean="0">
+                <a:latin typeface="+mn-ea"/>
+              </a:rPr>
+              <a:t>简单易学、便捷有效，普通人不需要学习太多深奥的心理学知识，操作流程一学就会，立即使用就能有较明显效果；</a:t>
+            </a:r>
+            <a:endParaRPr lang="en-US" altLang="zh-CN" sz="1800" dirty="0" smtClean="0">
+              <a:latin typeface="+mn-ea"/>
+            </a:endParaRPr>
+          </a:p>
+        </p:txBody>
+      </p:sp>
+      <p:sp>
+        <p:nvSpPr>
+          <p:cNvPr id="7" name="内容占位符 2">
+            <a:extLst>
+              <a:ext uri="{FF2B5EF4-FFF2-40B4-BE49-F238E27FC236}">
+                <a16:creationId xmlns:a16="http://schemas.microsoft.com/office/drawing/2014/main" id="{C3C90094-C0B5-790F-FC0B-773883AD0A9A}"/>
+              </a:ext>
+            </a:extLst>
+          </p:cNvPr>
+          <p:cNvSpPr txBox="1">
+            <a:spLocks/>
+          </p:cNvSpPr>
+          <p:nvPr/>
+        </p:nvSpPr>
+        <p:spPr>
+          <a:xfrm>
+            <a:off x="7357589" y="3372984"/>
+            <a:ext cx="4319298" cy="1846858"/>
+          </a:xfrm>
+          <a:prstGeom prst="rect">
+            <a:avLst/>
+          </a:prstGeom>
+        </p:spPr>
+        <p:txBody>
+          <a:bodyPr lIns="109728" tIns="109728" rIns="109728" bIns="91440"/>
+          <a:lstStyle>
+            <a:lvl1pPr marL="228600" indent="-228600" algn="l" defTabSz="914400" rtl="0" eaLnBrk="1" latinLnBrk="0" hangingPunct="1">
+              <a:lnSpc>
+                <a:spcPct val="125000"/>
+              </a:lnSpc>
+              <a:spcBef>
+                <a:spcPts val="1000"/>
+              </a:spcBef>
+              <a:buFont typeface="Arial" panose="020B0604020202020204" pitchFamily="34" charset="0"/>
+              <a:buChar char="•"/>
+              <a:defRPr sz="1600" kern="1200" spc="160">
+                <a:solidFill>
+                  <a:schemeClr val="tx1"/>
+                </a:solidFill>
+                <a:latin typeface="+mn-lt"/>
+                <a:ea typeface="+mn-ea"/>
+                <a:cs typeface="+mn-cs"/>
+              </a:defRPr>
+            </a:lvl1pPr>
+            <a:lvl2pPr marL="685800" indent="-228600" algn="l" defTabSz="914400" rtl="0" eaLnBrk="1" latinLnBrk="0" hangingPunct="1">
+              <a:lnSpc>
+                <a:spcPct val="125000"/>
+              </a:lnSpc>
+              <a:spcBef>
+                <a:spcPts val="500"/>
+              </a:spcBef>
+              <a:buFont typeface="Arial" panose="020B0604020202020204" pitchFamily="34" charset="0"/>
+              <a:buChar char="•"/>
+              <a:defRPr sz="1600" kern="1200" spc="160">
+                <a:solidFill>
+                  <a:schemeClr val="tx1"/>
+                </a:solidFill>
+                <a:latin typeface="+mn-lt"/>
+                <a:ea typeface="+mn-ea"/>
+                <a:cs typeface="+mn-cs"/>
+              </a:defRPr>
+            </a:lvl2pPr>
+            <a:lvl3pPr marL="1143000" indent="-228600" algn="l" defTabSz="914400" rtl="0" eaLnBrk="1" latinLnBrk="0" hangingPunct="1">
+              <a:lnSpc>
+                <a:spcPct val="125000"/>
+              </a:lnSpc>
+              <a:spcBef>
+                <a:spcPts val="500"/>
+              </a:spcBef>
+              <a:buFont typeface="Arial" panose="020B0604020202020204" pitchFamily="34" charset="0"/>
+              <a:buChar char="•"/>
+              <a:defRPr sz="1600" kern="1200" spc="160">
+                <a:solidFill>
+                  <a:schemeClr val="tx1"/>
+                </a:solidFill>
+                <a:latin typeface="+mn-lt"/>
+                <a:ea typeface="+mn-ea"/>
+                <a:cs typeface="+mn-cs"/>
+              </a:defRPr>
+            </a:lvl3pPr>
+            <a:lvl4pPr marL="1600200" indent="-228600" algn="l" defTabSz="914400" rtl="0" eaLnBrk="1" latinLnBrk="0" hangingPunct="1">
+              <a:lnSpc>
+                <a:spcPct val="125000"/>
+              </a:lnSpc>
+              <a:spcBef>
+                <a:spcPts val="500"/>
+              </a:spcBef>
+              <a:buFont typeface="Arial" panose="020B0604020202020204" pitchFamily="34" charset="0"/>
+              <a:buChar char="•"/>
+              <a:defRPr sz="1600" kern="1200" spc="160">
+                <a:solidFill>
+                  <a:schemeClr val="tx1"/>
+                </a:solidFill>
+                <a:latin typeface="+mn-lt"/>
+                <a:ea typeface="+mn-ea"/>
+                <a:cs typeface="+mn-cs"/>
+              </a:defRPr>
+            </a:lvl4pPr>
+            <a:lvl5pPr marL="2057400" indent="-228600" algn="l" defTabSz="914400" rtl="0" eaLnBrk="1" latinLnBrk="0" hangingPunct="1">
+              <a:lnSpc>
+                <a:spcPct val="125000"/>
+              </a:lnSpc>
+              <a:spcBef>
+                <a:spcPts val="500"/>
+              </a:spcBef>
+              <a:buFont typeface="Arial" panose="020B0604020202020204" pitchFamily="34" charset="0"/>
+              <a:buChar char="•"/>
+              <a:defRPr sz="1600" kern="1200" spc="160">
+                <a:solidFill>
+                  <a:schemeClr val="tx1"/>
+                </a:solidFill>
+                <a:latin typeface="+mn-lt"/>
+                <a:ea typeface="+mn-ea"/>
+                <a:cs typeface="+mn-cs"/>
+              </a:defRPr>
+            </a:lvl5pPr>
+            <a:lvl6pPr marL="2514600" indent="-228600" algn="l" defTabSz="914400" rtl="0" eaLnBrk="1" latinLnBrk="0" hangingPunct="1">
+              <a:lnSpc>
+                <a:spcPct val="90000"/>
+              </a:lnSpc>
+              <a:spcBef>
+                <a:spcPts val="500"/>
+              </a:spcBef>
+              <a:buFont typeface="Arial" panose="020B0604020202020204" pitchFamily="34" charset="0"/>
+              <a:buChar char="•"/>
+              <a:defRPr sz="1800" kern="1200">
+                <a:solidFill>
+                  <a:schemeClr val="tx1"/>
+                </a:solidFill>
+                <a:latin typeface="+mn-lt"/>
+                <a:ea typeface="+mn-ea"/>
+                <a:cs typeface="+mn-cs"/>
+              </a:defRPr>
+            </a:lvl6pPr>
+            <a:lvl7pPr marL="2971800" indent="-228600" algn="l" defTabSz="914400" rtl="0" eaLnBrk="1" latinLnBrk="0" hangingPunct="1">
+              <a:lnSpc>
+                <a:spcPct val="90000"/>
+              </a:lnSpc>
+              <a:spcBef>
+                <a:spcPts val="500"/>
+              </a:spcBef>
+              <a:buFont typeface="Arial" panose="020B0604020202020204" pitchFamily="34" charset="0"/>
+              <a:buChar char="•"/>
+              <a:defRPr sz="1800" kern="1200">
+                <a:solidFill>
+                  <a:schemeClr val="tx1"/>
+                </a:solidFill>
+                <a:latin typeface="+mn-lt"/>
+                <a:ea typeface="+mn-ea"/>
+                <a:cs typeface="+mn-cs"/>
+              </a:defRPr>
+            </a:lvl7pPr>
+            <a:lvl8pPr marL="3429000" indent="-228600" algn="l" defTabSz="914400" rtl="0" eaLnBrk="1" latinLnBrk="0" hangingPunct="1">
+              <a:lnSpc>
+                <a:spcPct val="90000"/>
+              </a:lnSpc>
+              <a:spcBef>
+                <a:spcPts val="500"/>
+              </a:spcBef>
+              <a:buFont typeface="Arial" panose="020B0604020202020204" pitchFamily="34" charset="0"/>
+              <a:buChar char="•"/>
+              <a:defRPr sz="1800" kern="1200">
+                <a:solidFill>
+                  <a:schemeClr val="tx1"/>
+                </a:solidFill>
+                <a:latin typeface="+mn-lt"/>
+                <a:ea typeface="+mn-ea"/>
+                <a:cs typeface="+mn-cs"/>
+              </a:defRPr>
+            </a:lvl8pPr>
+            <a:lvl9pPr marL="3886200" indent="-228600" algn="l" defTabSz="914400" rtl="0" eaLnBrk="1" latinLnBrk="0" hangingPunct="1">
+              <a:lnSpc>
+                <a:spcPct val="90000"/>
+              </a:lnSpc>
+              <a:spcBef>
+                <a:spcPts val="500"/>
+              </a:spcBef>
+              <a:buFont typeface="Arial" panose="020B0604020202020204" pitchFamily="34" charset="0"/>
+              <a:buChar char="•"/>
+              <a:defRPr sz="1800" kern="1200">
+                <a:solidFill>
+                  <a:schemeClr val="tx1"/>
+                </a:solidFill>
+                <a:latin typeface="+mn-lt"/>
+                <a:ea typeface="+mn-ea"/>
+                <a:cs typeface="+mn-cs"/>
+              </a:defRPr>
+            </a:lvl9pPr>
+          </a:lstStyle>
+          <a:p>
+            <a:pPr marL="0" indent="0">
+              <a:buNone/>
+            </a:pPr>
+            <a:r>
+              <a:rPr lang="zh-CN" altLang="en-US" sz="2400" dirty="0" smtClean="0">
+                <a:effectLst>
+                  <a:outerShdw blurRad="50800" dist="38100" dir="2700000" algn="tl" rotWithShape="0">
+                    <a:prstClr val="black">
+                      <a:alpha val="40000"/>
+                    </a:prstClr>
+                  </a:outerShdw>
+                </a:effectLst>
+                <a:latin typeface="+mn-ea"/>
+              </a:rPr>
+              <a:t>特点三</a:t>
+            </a:r>
+            <a:endParaRPr lang="en-US" altLang="zh-CN" sz="2400" dirty="0" smtClean="0">
+              <a:effectLst>
+                <a:outerShdw blurRad="50800" dist="38100" dir="2700000" algn="tl" rotWithShape="0">
+                  <a:prstClr val="black">
+                    <a:alpha val="40000"/>
+                  </a:prstClr>
+                </a:outerShdw>
+              </a:effectLst>
+              <a:latin typeface="+mn-ea"/>
+            </a:endParaRPr>
+          </a:p>
+          <a:p>
+            <a:pPr marL="0" indent="0">
+              <a:buNone/>
+            </a:pPr>
+            <a:r>
+              <a:rPr lang="zh-CN" altLang="en-US" sz="1800" dirty="0" smtClean="0">
+                <a:latin typeface="+mn-ea"/>
+              </a:rPr>
+              <a:t>操作流程规范统一、可推广性强，针对不同的情绪问题可使用同样的治疗流程和方法，学会之后可自行习练改善自身情绪问题，又能教会身边人进行习练，能较容易实现自助和助人。</a:t>
+            </a:r>
+            <a:endParaRPr lang="en-US" altLang="zh-CN" sz="1800" dirty="0" smtClean="0">
+              <a:latin typeface="+mn-ea"/>
+            </a:endParaRPr>
+          </a:p>
+        </p:txBody>
+      </p:sp>
+    </p:spTree>
+    <p:extLst>
+      <p:ext uri="{BB962C8B-B14F-4D97-AF65-F5344CB8AC3E}">
+        <p14:creationId xmlns:p14="http://schemas.microsoft.com/office/powerpoint/2010/main" val="2808385552"/>
+      </p:ext>
+    </p:extLst>
+  </p:cSld>
+  <p:clrMapOvr>
+    <a:masterClrMapping/>
+  </p:clrMapOvr>
+  <p:timing>
+    <p:tnLst>
+      <p:par>
+        <p:cTn id="1" dur="indefinite" restart="never" nodeType="tmRoot"/>
+      </p:par>
+    </p:tnLst>
+  </p:timing>
+</p:sld>
+</file>
+
+<file path=ppt/slides/slide30.xml><?xml version="1.0" encoding="utf-8"?>
 <p:sld xmlns:a="http://schemas.openxmlformats.org/drawingml/2006/main" xmlns:r="http://schemas.openxmlformats.org/officeDocument/2006/relationships" xmlns:p="http://schemas.openxmlformats.org/presentationml/2006/main">
   <p:cSld>
     <p:spTree>
@@ -19196,13 +21100,13 @@
                     <a:p>
                       <a:pPr algn="l" fontAlgn="ctr"/>
                       <a:r>
-                        <a:rPr lang="zh-CN" altLang="en-US" sz="1200" u="none" strike="noStrike">
+                        <a:rPr lang="zh-CN" altLang="en-US" sz="1200" u="none" strike="noStrike" dirty="0">
                           <a:effectLst/>
                           <a:latin typeface="+mn-lt"/>
                         </a:rPr>
                         <a:t>团队性格投射、自我内部关系探索</a:t>
                       </a:r>
-                      <a:endParaRPr lang="zh-CN" altLang="en-US" sz="1200" b="0" i="0" u="none" strike="noStrike">
+                      <a:endParaRPr lang="zh-CN" altLang="en-US" sz="1200" b="0" i="0" u="none" strike="noStrike" dirty="0">
                         <a:solidFill>
                           <a:srgbClr val="000000"/>
                         </a:solidFill>
@@ -19316,7 +21220,7 @@
     </p:spTree>
     <p:extLst>
       <p:ext uri="{BB962C8B-B14F-4D97-AF65-F5344CB8AC3E}">
-        <p14:creationId xmlns:p14="http://schemas.microsoft.com/office/powerpoint/2010/main" val="387099857"/>
+        <p14:creationId xmlns:p14="http://schemas.microsoft.com/office/powerpoint/2010/main" val="1333943595"/>
       </p:ext>
     </p:extLst>
   </p:cSld>
@@ -19333,684 +21237,7 @@
 </p:sld>
 </file>
 
-<file path=ppt/slides/slide3.xml><?xml version="1.0" encoding="utf-8"?>
-<p:sld xmlns:a="http://schemas.openxmlformats.org/drawingml/2006/main" xmlns:r="http://schemas.openxmlformats.org/officeDocument/2006/relationships" xmlns:p="http://schemas.openxmlformats.org/presentationml/2006/main">
-  <p:cSld>
-    <p:spTree>
-      <p:nvGrpSpPr>
-        <p:cNvPr id="1" name="">
-          <a:extLst>
-            <a:ext uri="{FF2B5EF4-FFF2-40B4-BE49-F238E27FC236}">
-              <a16:creationId xmlns:a16="http://schemas.microsoft.com/office/drawing/2014/main" id="{46DE9D2F-1F09-0631-8AF8-DAFD261605EE}"/>
-            </a:ext>
-          </a:extLst>
-        </p:cNvPr>
-        <p:cNvGrpSpPr/>
-        <p:nvPr/>
-      </p:nvGrpSpPr>
-      <p:grpSpPr>
-        <a:xfrm>
-          <a:off x="0" y="0"/>
-          <a:ext cx="0" cy="0"/>
-          <a:chOff x="0" y="0"/>
-          <a:chExt cx="0" cy="0"/>
-        </a:xfrm>
-      </p:grpSpPr>
-      <p:sp>
-        <p:nvSpPr>
-          <p:cNvPr id="2" name="标题 1">
-            <a:extLst>
-              <a:ext uri="{FF2B5EF4-FFF2-40B4-BE49-F238E27FC236}">
-                <a16:creationId xmlns:a16="http://schemas.microsoft.com/office/drawing/2014/main" id="{E056FC73-5505-DDD6-8338-9EEEF774262A}"/>
-              </a:ext>
-            </a:extLst>
-          </p:cNvPr>
-          <p:cNvSpPr>
-            <a:spLocks noGrp="1"/>
-          </p:cNvSpPr>
-          <p:nvPr>
-            <p:ph type="title"/>
-          </p:nvPr>
-        </p:nvSpPr>
-        <p:spPr>
-          <a:xfrm>
-            <a:off x="521208" y="662740"/>
-            <a:ext cx="11155680" cy="936652"/>
-          </a:xfrm>
-        </p:spPr>
-        <p:txBody>
-          <a:bodyPr/>
-          <a:lstStyle/>
-          <a:p>
-            <a:r>
-              <a:rPr lang="zh-CN" altLang="en-US" sz="4400" dirty="0"/>
-              <a:t>情绪释放技术</a:t>
-            </a:r>
-            <a:r>
-              <a:rPr lang="en-US" altLang="zh-CN" sz="4400" dirty="0"/>
-              <a:t>EFT</a:t>
-            </a:r>
-            <a:r>
-              <a:rPr lang="zh-CN" altLang="en-US" sz="4400" dirty="0"/>
-              <a:t>的主要特点</a:t>
-            </a:r>
-          </a:p>
-        </p:txBody>
-      </p:sp>
-      <p:sp>
-        <p:nvSpPr>
-          <p:cNvPr id="3" name="内容占位符 2">
-            <a:extLst>
-              <a:ext uri="{FF2B5EF4-FFF2-40B4-BE49-F238E27FC236}">
-                <a16:creationId xmlns:a16="http://schemas.microsoft.com/office/drawing/2014/main" id="{C3C90094-C0B5-790F-FC0B-773883AD0A9A}"/>
-              </a:ext>
-            </a:extLst>
-          </p:cNvPr>
-          <p:cNvSpPr>
-            <a:spLocks noGrp="1"/>
-          </p:cNvSpPr>
-          <p:nvPr>
-            <p:ph idx="1"/>
-          </p:nvPr>
-        </p:nvSpPr>
-        <p:spPr>
-          <a:xfrm>
-            <a:off x="2906437" y="1599391"/>
-            <a:ext cx="6385221" cy="1773593"/>
-          </a:xfrm>
-        </p:spPr>
-        <p:txBody>
-          <a:bodyPr/>
-          <a:lstStyle/>
-          <a:p>
-            <a:pPr marL="0" indent="0">
-              <a:buNone/>
-            </a:pPr>
-            <a:r>
-              <a:rPr lang="zh-CN" altLang="en-US" sz="2400" dirty="0" smtClean="0">
-                <a:effectLst>
-                  <a:outerShdw blurRad="50800" dist="38100" dir="2700000" algn="tl" rotWithShape="0">
-                    <a:prstClr val="black">
-                      <a:alpha val="40000"/>
-                    </a:prstClr>
-                  </a:outerShdw>
-                </a:effectLst>
-                <a:latin typeface="+mn-ea"/>
-              </a:rPr>
-              <a:t>特点</a:t>
-            </a:r>
-            <a:r>
-              <a:rPr lang="zh-CN" altLang="en-US" sz="2400" dirty="0">
-                <a:effectLst>
-                  <a:outerShdw blurRad="50800" dist="38100" dir="2700000" algn="tl" rotWithShape="0">
-                    <a:prstClr val="black">
-                      <a:alpha val="40000"/>
-                    </a:prstClr>
-                  </a:outerShdw>
-                </a:effectLst>
-                <a:latin typeface="+mn-ea"/>
-              </a:rPr>
-              <a:t>一</a:t>
-            </a:r>
-            <a:endParaRPr lang="en-US" altLang="zh-CN" sz="2400" dirty="0">
-              <a:effectLst>
-                <a:outerShdw blurRad="50800" dist="38100" dir="2700000" algn="tl" rotWithShape="0">
-                  <a:prstClr val="black">
-                    <a:alpha val="40000"/>
-                  </a:prstClr>
-                </a:outerShdw>
-              </a:effectLst>
-              <a:latin typeface="+mn-ea"/>
-            </a:endParaRPr>
-          </a:p>
-          <a:p>
-            <a:pPr marL="0" indent="0">
-              <a:buNone/>
-            </a:pPr>
-            <a:r>
-              <a:rPr lang="zh-CN" altLang="en-US" sz="1800" dirty="0">
-                <a:latin typeface="+mn-ea"/>
-              </a:rPr>
-              <a:t>一是基于中医的经络理论根植于中国的传统文化，具有明显的中国特色，符合中国人的情感特点，在普通大众中推行更易于被接受</a:t>
-            </a:r>
-            <a:r>
-              <a:rPr lang="zh-CN" altLang="en-US" sz="1800" dirty="0" smtClean="0">
-                <a:latin typeface="+mn-ea"/>
-              </a:rPr>
-              <a:t>；</a:t>
-            </a:r>
-            <a:endParaRPr lang="en-US" altLang="zh-CN" sz="1800" dirty="0">
-              <a:latin typeface="+mn-ea"/>
-            </a:endParaRPr>
-          </a:p>
-        </p:txBody>
-      </p:sp>
-      <p:pic>
-        <p:nvPicPr>
-          <p:cNvPr id="5" name="图片 4" descr="卡通人物&#10;&#10;AI 生成的内容可能不正确。">
-            <a:extLst>
-              <a:ext uri="{FF2B5EF4-FFF2-40B4-BE49-F238E27FC236}">
-                <a16:creationId xmlns:a16="http://schemas.microsoft.com/office/drawing/2014/main" id="{41B65075-63F5-D672-A41B-CC761312EAD7}"/>
-              </a:ext>
-            </a:extLst>
-          </p:cNvPr>
-          <p:cNvPicPr>
-            <a:picLocks noChangeAspect="1"/>
-          </p:cNvPicPr>
-          <p:nvPr/>
-        </p:nvPicPr>
-        <p:blipFill>
-          <a:blip r:embed="rId2" cstate="screen">
-            <a:extLst>
-              <a:ext uri="{28A0092B-C50C-407E-A947-70E740481C1C}">
-                <a14:useLocalDpi xmlns:a14="http://schemas.microsoft.com/office/drawing/2010/main"/>
-              </a:ext>
-            </a:extLst>
-          </a:blip>
-          <a:stretch>
-            <a:fillRect/>
-          </a:stretch>
-        </p:blipFill>
-        <p:spPr>
-          <a:xfrm>
-            <a:off x="3894783" y="3702693"/>
-            <a:ext cx="3233738" cy="2155825"/>
-          </a:xfrm>
-          <a:prstGeom prst="rect">
-            <a:avLst/>
-          </a:prstGeom>
-          <a:effectLst>
-            <a:softEdge rad="127000"/>
-          </a:effectLst>
-        </p:spPr>
-      </p:pic>
-      <p:sp>
-        <p:nvSpPr>
-          <p:cNvPr id="6" name="内容占位符 2">
-            <a:extLst>
-              <a:ext uri="{FF2B5EF4-FFF2-40B4-BE49-F238E27FC236}">
-                <a16:creationId xmlns:a16="http://schemas.microsoft.com/office/drawing/2014/main" id="{C3C90094-C0B5-790F-FC0B-773883AD0A9A}"/>
-              </a:ext>
-            </a:extLst>
-          </p:cNvPr>
-          <p:cNvSpPr txBox="1">
-            <a:spLocks/>
-          </p:cNvSpPr>
-          <p:nvPr/>
-        </p:nvSpPr>
-        <p:spPr>
-          <a:xfrm>
-            <a:off x="570665" y="3644862"/>
-            <a:ext cx="3324118" cy="2271488"/>
-          </a:xfrm>
-          <a:prstGeom prst="rect">
-            <a:avLst/>
-          </a:prstGeom>
-        </p:spPr>
-        <p:txBody>
-          <a:bodyPr lIns="109728" tIns="109728" rIns="109728" bIns="91440"/>
-          <a:lstStyle>
-            <a:lvl1pPr marL="228600" indent="-228600" algn="l" defTabSz="914400" rtl="0" eaLnBrk="1" latinLnBrk="0" hangingPunct="1">
-              <a:lnSpc>
-                <a:spcPct val="125000"/>
-              </a:lnSpc>
-              <a:spcBef>
-                <a:spcPts val="1000"/>
-              </a:spcBef>
-              <a:buFont typeface="Arial" panose="020B0604020202020204" pitchFamily="34" charset="0"/>
-              <a:buChar char="•"/>
-              <a:defRPr sz="1600" kern="1200" spc="160">
-                <a:solidFill>
-                  <a:schemeClr val="tx1"/>
-                </a:solidFill>
-                <a:latin typeface="+mn-lt"/>
-                <a:ea typeface="+mn-ea"/>
-                <a:cs typeface="+mn-cs"/>
-              </a:defRPr>
-            </a:lvl1pPr>
-            <a:lvl2pPr marL="685800" indent="-228600" algn="l" defTabSz="914400" rtl="0" eaLnBrk="1" latinLnBrk="0" hangingPunct="1">
-              <a:lnSpc>
-                <a:spcPct val="125000"/>
-              </a:lnSpc>
-              <a:spcBef>
-                <a:spcPts val="500"/>
-              </a:spcBef>
-              <a:buFont typeface="Arial" panose="020B0604020202020204" pitchFamily="34" charset="0"/>
-              <a:buChar char="•"/>
-              <a:defRPr sz="1600" kern="1200" spc="160">
-                <a:solidFill>
-                  <a:schemeClr val="tx1"/>
-                </a:solidFill>
-                <a:latin typeface="+mn-lt"/>
-                <a:ea typeface="+mn-ea"/>
-                <a:cs typeface="+mn-cs"/>
-              </a:defRPr>
-            </a:lvl2pPr>
-            <a:lvl3pPr marL="1143000" indent="-228600" algn="l" defTabSz="914400" rtl="0" eaLnBrk="1" latinLnBrk="0" hangingPunct="1">
-              <a:lnSpc>
-                <a:spcPct val="125000"/>
-              </a:lnSpc>
-              <a:spcBef>
-                <a:spcPts val="500"/>
-              </a:spcBef>
-              <a:buFont typeface="Arial" panose="020B0604020202020204" pitchFamily="34" charset="0"/>
-              <a:buChar char="•"/>
-              <a:defRPr sz="1600" kern="1200" spc="160">
-                <a:solidFill>
-                  <a:schemeClr val="tx1"/>
-                </a:solidFill>
-                <a:latin typeface="+mn-lt"/>
-                <a:ea typeface="+mn-ea"/>
-                <a:cs typeface="+mn-cs"/>
-              </a:defRPr>
-            </a:lvl3pPr>
-            <a:lvl4pPr marL="1600200" indent="-228600" algn="l" defTabSz="914400" rtl="0" eaLnBrk="1" latinLnBrk="0" hangingPunct="1">
-              <a:lnSpc>
-                <a:spcPct val="125000"/>
-              </a:lnSpc>
-              <a:spcBef>
-                <a:spcPts val="500"/>
-              </a:spcBef>
-              <a:buFont typeface="Arial" panose="020B0604020202020204" pitchFamily="34" charset="0"/>
-              <a:buChar char="•"/>
-              <a:defRPr sz="1600" kern="1200" spc="160">
-                <a:solidFill>
-                  <a:schemeClr val="tx1"/>
-                </a:solidFill>
-                <a:latin typeface="+mn-lt"/>
-                <a:ea typeface="+mn-ea"/>
-                <a:cs typeface="+mn-cs"/>
-              </a:defRPr>
-            </a:lvl4pPr>
-            <a:lvl5pPr marL="2057400" indent="-228600" algn="l" defTabSz="914400" rtl="0" eaLnBrk="1" latinLnBrk="0" hangingPunct="1">
-              <a:lnSpc>
-                <a:spcPct val="125000"/>
-              </a:lnSpc>
-              <a:spcBef>
-                <a:spcPts val="500"/>
-              </a:spcBef>
-              <a:buFont typeface="Arial" panose="020B0604020202020204" pitchFamily="34" charset="0"/>
-              <a:buChar char="•"/>
-              <a:defRPr sz="1600" kern="1200" spc="160">
-                <a:solidFill>
-                  <a:schemeClr val="tx1"/>
-                </a:solidFill>
-                <a:latin typeface="+mn-lt"/>
-                <a:ea typeface="+mn-ea"/>
-                <a:cs typeface="+mn-cs"/>
-              </a:defRPr>
-            </a:lvl5pPr>
-            <a:lvl6pPr marL="2514600" indent="-228600" algn="l" defTabSz="914400" rtl="0" eaLnBrk="1" latinLnBrk="0" hangingPunct="1">
-              <a:lnSpc>
-                <a:spcPct val="90000"/>
-              </a:lnSpc>
-              <a:spcBef>
-                <a:spcPts val="500"/>
-              </a:spcBef>
-              <a:buFont typeface="Arial" panose="020B0604020202020204" pitchFamily="34" charset="0"/>
-              <a:buChar char="•"/>
-              <a:defRPr sz="1800" kern="1200">
-                <a:solidFill>
-                  <a:schemeClr val="tx1"/>
-                </a:solidFill>
-                <a:latin typeface="+mn-lt"/>
-                <a:ea typeface="+mn-ea"/>
-                <a:cs typeface="+mn-cs"/>
-              </a:defRPr>
-            </a:lvl6pPr>
-            <a:lvl7pPr marL="2971800" indent="-228600" algn="l" defTabSz="914400" rtl="0" eaLnBrk="1" latinLnBrk="0" hangingPunct="1">
-              <a:lnSpc>
-                <a:spcPct val="90000"/>
-              </a:lnSpc>
-              <a:spcBef>
-                <a:spcPts val="500"/>
-              </a:spcBef>
-              <a:buFont typeface="Arial" panose="020B0604020202020204" pitchFamily="34" charset="0"/>
-              <a:buChar char="•"/>
-              <a:defRPr sz="1800" kern="1200">
-                <a:solidFill>
-                  <a:schemeClr val="tx1"/>
-                </a:solidFill>
-                <a:latin typeface="+mn-lt"/>
-                <a:ea typeface="+mn-ea"/>
-                <a:cs typeface="+mn-cs"/>
-              </a:defRPr>
-            </a:lvl7pPr>
-            <a:lvl8pPr marL="3429000" indent="-228600" algn="l" defTabSz="914400" rtl="0" eaLnBrk="1" latinLnBrk="0" hangingPunct="1">
-              <a:lnSpc>
-                <a:spcPct val="90000"/>
-              </a:lnSpc>
-              <a:spcBef>
-                <a:spcPts val="500"/>
-              </a:spcBef>
-              <a:buFont typeface="Arial" panose="020B0604020202020204" pitchFamily="34" charset="0"/>
-              <a:buChar char="•"/>
-              <a:defRPr sz="1800" kern="1200">
-                <a:solidFill>
-                  <a:schemeClr val="tx1"/>
-                </a:solidFill>
-                <a:latin typeface="+mn-lt"/>
-                <a:ea typeface="+mn-ea"/>
-                <a:cs typeface="+mn-cs"/>
-              </a:defRPr>
-            </a:lvl8pPr>
-            <a:lvl9pPr marL="3886200" indent="-228600" algn="l" defTabSz="914400" rtl="0" eaLnBrk="1" latinLnBrk="0" hangingPunct="1">
-              <a:lnSpc>
-                <a:spcPct val="90000"/>
-              </a:lnSpc>
-              <a:spcBef>
-                <a:spcPts val="500"/>
-              </a:spcBef>
-              <a:buFont typeface="Arial" panose="020B0604020202020204" pitchFamily="34" charset="0"/>
-              <a:buChar char="•"/>
-              <a:defRPr sz="1800" kern="1200">
-                <a:solidFill>
-                  <a:schemeClr val="tx1"/>
-                </a:solidFill>
-                <a:latin typeface="+mn-lt"/>
-                <a:ea typeface="+mn-ea"/>
-                <a:cs typeface="+mn-cs"/>
-              </a:defRPr>
-            </a:lvl9pPr>
-          </a:lstStyle>
-          <a:p>
-            <a:pPr marL="0" indent="0">
-              <a:buNone/>
-            </a:pPr>
-            <a:r>
-              <a:rPr lang="zh-CN" altLang="en-US" sz="2400" dirty="0" smtClean="0">
-                <a:effectLst>
-                  <a:outerShdw blurRad="50800" dist="38100" dir="2700000" algn="tl" rotWithShape="0">
-                    <a:prstClr val="black">
-                      <a:alpha val="40000"/>
-                    </a:prstClr>
-                  </a:outerShdw>
-                </a:effectLst>
-                <a:latin typeface="+mn-ea"/>
-              </a:rPr>
-              <a:t>特点二</a:t>
-            </a:r>
-            <a:endParaRPr lang="en-US" altLang="zh-CN" sz="2400" dirty="0" smtClean="0">
-              <a:effectLst>
-                <a:outerShdw blurRad="50800" dist="38100" dir="2700000" algn="tl" rotWithShape="0">
-                  <a:prstClr val="black">
-                    <a:alpha val="40000"/>
-                  </a:prstClr>
-                </a:outerShdw>
-              </a:effectLst>
-              <a:latin typeface="+mn-ea"/>
-            </a:endParaRPr>
-          </a:p>
-          <a:p>
-            <a:pPr marL="0" indent="0">
-              <a:buNone/>
-            </a:pPr>
-            <a:r>
-              <a:rPr lang="zh-CN" altLang="en-US" sz="1800" dirty="0" smtClean="0">
-                <a:latin typeface="+mn-ea"/>
-              </a:rPr>
-              <a:t>简单易学、便捷有效，普通人不需要学习太多深奥的心理学知识，操作流程一学就会，立即使用就能有较明显效果；</a:t>
-            </a:r>
-            <a:endParaRPr lang="en-US" altLang="zh-CN" sz="1800" dirty="0" smtClean="0">
-              <a:latin typeface="+mn-ea"/>
-            </a:endParaRPr>
-          </a:p>
-        </p:txBody>
-      </p:sp>
-      <p:sp>
-        <p:nvSpPr>
-          <p:cNvPr id="7" name="内容占位符 2">
-            <a:extLst>
-              <a:ext uri="{FF2B5EF4-FFF2-40B4-BE49-F238E27FC236}">
-                <a16:creationId xmlns:a16="http://schemas.microsoft.com/office/drawing/2014/main" id="{C3C90094-C0B5-790F-FC0B-773883AD0A9A}"/>
-              </a:ext>
-            </a:extLst>
-          </p:cNvPr>
-          <p:cNvSpPr txBox="1">
-            <a:spLocks/>
-          </p:cNvSpPr>
-          <p:nvPr/>
-        </p:nvSpPr>
-        <p:spPr>
-          <a:xfrm>
-            <a:off x="7357589" y="3372984"/>
-            <a:ext cx="4319298" cy="1846858"/>
-          </a:xfrm>
-          <a:prstGeom prst="rect">
-            <a:avLst/>
-          </a:prstGeom>
-        </p:spPr>
-        <p:txBody>
-          <a:bodyPr lIns="109728" tIns="109728" rIns="109728" bIns="91440"/>
-          <a:lstStyle>
-            <a:lvl1pPr marL="228600" indent="-228600" algn="l" defTabSz="914400" rtl="0" eaLnBrk="1" latinLnBrk="0" hangingPunct="1">
-              <a:lnSpc>
-                <a:spcPct val="125000"/>
-              </a:lnSpc>
-              <a:spcBef>
-                <a:spcPts val="1000"/>
-              </a:spcBef>
-              <a:buFont typeface="Arial" panose="020B0604020202020204" pitchFamily="34" charset="0"/>
-              <a:buChar char="•"/>
-              <a:defRPr sz="1600" kern="1200" spc="160">
-                <a:solidFill>
-                  <a:schemeClr val="tx1"/>
-                </a:solidFill>
-                <a:latin typeface="+mn-lt"/>
-                <a:ea typeface="+mn-ea"/>
-                <a:cs typeface="+mn-cs"/>
-              </a:defRPr>
-            </a:lvl1pPr>
-            <a:lvl2pPr marL="685800" indent="-228600" algn="l" defTabSz="914400" rtl="0" eaLnBrk="1" latinLnBrk="0" hangingPunct="1">
-              <a:lnSpc>
-                <a:spcPct val="125000"/>
-              </a:lnSpc>
-              <a:spcBef>
-                <a:spcPts val="500"/>
-              </a:spcBef>
-              <a:buFont typeface="Arial" panose="020B0604020202020204" pitchFamily="34" charset="0"/>
-              <a:buChar char="•"/>
-              <a:defRPr sz="1600" kern="1200" spc="160">
-                <a:solidFill>
-                  <a:schemeClr val="tx1"/>
-                </a:solidFill>
-                <a:latin typeface="+mn-lt"/>
-                <a:ea typeface="+mn-ea"/>
-                <a:cs typeface="+mn-cs"/>
-              </a:defRPr>
-            </a:lvl2pPr>
-            <a:lvl3pPr marL="1143000" indent="-228600" algn="l" defTabSz="914400" rtl="0" eaLnBrk="1" latinLnBrk="0" hangingPunct="1">
-              <a:lnSpc>
-                <a:spcPct val="125000"/>
-              </a:lnSpc>
-              <a:spcBef>
-                <a:spcPts val="500"/>
-              </a:spcBef>
-              <a:buFont typeface="Arial" panose="020B0604020202020204" pitchFamily="34" charset="0"/>
-              <a:buChar char="•"/>
-              <a:defRPr sz="1600" kern="1200" spc="160">
-                <a:solidFill>
-                  <a:schemeClr val="tx1"/>
-                </a:solidFill>
-                <a:latin typeface="+mn-lt"/>
-                <a:ea typeface="+mn-ea"/>
-                <a:cs typeface="+mn-cs"/>
-              </a:defRPr>
-            </a:lvl3pPr>
-            <a:lvl4pPr marL="1600200" indent="-228600" algn="l" defTabSz="914400" rtl="0" eaLnBrk="1" latinLnBrk="0" hangingPunct="1">
-              <a:lnSpc>
-                <a:spcPct val="125000"/>
-              </a:lnSpc>
-              <a:spcBef>
-                <a:spcPts val="500"/>
-              </a:spcBef>
-              <a:buFont typeface="Arial" panose="020B0604020202020204" pitchFamily="34" charset="0"/>
-              <a:buChar char="•"/>
-              <a:defRPr sz="1600" kern="1200" spc="160">
-                <a:solidFill>
-                  <a:schemeClr val="tx1"/>
-                </a:solidFill>
-                <a:latin typeface="+mn-lt"/>
-                <a:ea typeface="+mn-ea"/>
-                <a:cs typeface="+mn-cs"/>
-              </a:defRPr>
-            </a:lvl4pPr>
-            <a:lvl5pPr marL="2057400" indent="-228600" algn="l" defTabSz="914400" rtl="0" eaLnBrk="1" latinLnBrk="0" hangingPunct="1">
-              <a:lnSpc>
-                <a:spcPct val="125000"/>
-              </a:lnSpc>
-              <a:spcBef>
-                <a:spcPts val="500"/>
-              </a:spcBef>
-              <a:buFont typeface="Arial" panose="020B0604020202020204" pitchFamily="34" charset="0"/>
-              <a:buChar char="•"/>
-              <a:defRPr sz="1600" kern="1200" spc="160">
-                <a:solidFill>
-                  <a:schemeClr val="tx1"/>
-                </a:solidFill>
-                <a:latin typeface="+mn-lt"/>
-                <a:ea typeface="+mn-ea"/>
-                <a:cs typeface="+mn-cs"/>
-              </a:defRPr>
-            </a:lvl5pPr>
-            <a:lvl6pPr marL="2514600" indent="-228600" algn="l" defTabSz="914400" rtl="0" eaLnBrk="1" latinLnBrk="0" hangingPunct="1">
-              <a:lnSpc>
-                <a:spcPct val="90000"/>
-              </a:lnSpc>
-              <a:spcBef>
-                <a:spcPts val="500"/>
-              </a:spcBef>
-              <a:buFont typeface="Arial" panose="020B0604020202020204" pitchFamily="34" charset="0"/>
-              <a:buChar char="•"/>
-              <a:defRPr sz="1800" kern="1200">
-                <a:solidFill>
-                  <a:schemeClr val="tx1"/>
-                </a:solidFill>
-                <a:latin typeface="+mn-lt"/>
-                <a:ea typeface="+mn-ea"/>
-                <a:cs typeface="+mn-cs"/>
-              </a:defRPr>
-            </a:lvl6pPr>
-            <a:lvl7pPr marL="2971800" indent="-228600" algn="l" defTabSz="914400" rtl="0" eaLnBrk="1" latinLnBrk="0" hangingPunct="1">
-              <a:lnSpc>
-                <a:spcPct val="90000"/>
-              </a:lnSpc>
-              <a:spcBef>
-                <a:spcPts val="500"/>
-              </a:spcBef>
-              <a:buFont typeface="Arial" panose="020B0604020202020204" pitchFamily="34" charset="0"/>
-              <a:buChar char="•"/>
-              <a:defRPr sz="1800" kern="1200">
-                <a:solidFill>
-                  <a:schemeClr val="tx1"/>
-                </a:solidFill>
-                <a:latin typeface="+mn-lt"/>
-                <a:ea typeface="+mn-ea"/>
-                <a:cs typeface="+mn-cs"/>
-              </a:defRPr>
-            </a:lvl7pPr>
-            <a:lvl8pPr marL="3429000" indent="-228600" algn="l" defTabSz="914400" rtl="0" eaLnBrk="1" latinLnBrk="0" hangingPunct="1">
-              <a:lnSpc>
-                <a:spcPct val="90000"/>
-              </a:lnSpc>
-              <a:spcBef>
-                <a:spcPts val="500"/>
-              </a:spcBef>
-              <a:buFont typeface="Arial" panose="020B0604020202020204" pitchFamily="34" charset="0"/>
-              <a:buChar char="•"/>
-              <a:defRPr sz="1800" kern="1200">
-                <a:solidFill>
-                  <a:schemeClr val="tx1"/>
-                </a:solidFill>
-                <a:latin typeface="+mn-lt"/>
-                <a:ea typeface="+mn-ea"/>
-                <a:cs typeface="+mn-cs"/>
-              </a:defRPr>
-            </a:lvl8pPr>
-            <a:lvl9pPr marL="3886200" indent="-228600" algn="l" defTabSz="914400" rtl="0" eaLnBrk="1" latinLnBrk="0" hangingPunct="1">
-              <a:lnSpc>
-                <a:spcPct val="90000"/>
-              </a:lnSpc>
-              <a:spcBef>
-                <a:spcPts val="500"/>
-              </a:spcBef>
-              <a:buFont typeface="Arial" panose="020B0604020202020204" pitchFamily="34" charset="0"/>
-              <a:buChar char="•"/>
-              <a:defRPr sz="1800" kern="1200">
-                <a:solidFill>
-                  <a:schemeClr val="tx1"/>
-                </a:solidFill>
-                <a:latin typeface="+mn-lt"/>
-                <a:ea typeface="+mn-ea"/>
-                <a:cs typeface="+mn-cs"/>
-              </a:defRPr>
-            </a:lvl9pPr>
-          </a:lstStyle>
-          <a:p>
-            <a:pPr marL="0" indent="0">
-              <a:buNone/>
-            </a:pPr>
-            <a:r>
-              <a:rPr lang="zh-CN" altLang="en-US" sz="2400" dirty="0" smtClean="0">
-                <a:effectLst>
-                  <a:outerShdw blurRad="50800" dist="38100" dir="2700000" algn="tl" rotWithShape="0">
-                    <a:prstClr val="black">
-                      <a:alpha val="40000"/>
-                    </a:prstClr>
-                  </a:outerShdw>
-                </a:effectLst>
-                <a:latin typeface="+mn-ea"/>
-              </a:rPr>
-              <a:t>特点三</a:t>
-            </a:r>
-            <a:endParaRPr lang="en-US" altLang="zh-CN" sz="2400" dirty="0" smtClean="0">
-              <a:effectLst>
-                <a:outerShdw blurRad="50800" dist="38100" dir="2700000" algn="tl" rotWithShape="0">
-                  <a:prstClr val="black">
-                    <a:alpha val="40000"/>
-                  </a:prstClr>
-                </a:outerShdw>
-              </a:effectLst>
-              <a:latin typeface="+mn-ea"/>
-            </a:endParaRPr>
-          </a:p>
-          <a:p>
-            <a:pPr marL="0" indent="0">
-              <a:buNone/>
-            </a:pPr>
-            <a:r>
-              <a:rPr lang="zh-CN" altLang="en-US" sz="1800" dirty="0" smtClean="0">
-                <a:latin typeface="+mn-ea"/>
-              </a:rPr>
-              <a:t>操作流程规范统一、可推广性强，针对不同的情绪问题可使用同样的治疗流程和方法，学会之后可自行习练改善自身情绪问题，又能教会身边人进行习练，能较容易实现自助和助人。</a:t>
-            </a:r>
-            <a:endParaRPr lang="en-US" altLang="zh-CN" sz="1800" dirty="0" smtClean="0">
-              <a:latin typeface="+mn-ea"/>
-            </a:endParaRPr>
-          </a:p>
-        </p:txBody>
-      </p:sp>
-    </p:spTree>
-    <p:extLst>
-      <p:ext uri="{BB962C8B-B14F-4D97-AF65-F5344CB8AC3E}">
-        <p14:creationId xmlns:p14="http://schemas.microsoft.com/office/powerpoint/2010/main" val="2808385552"/>
-      </p:ext>
-    </p:extLst>
-  </p:cSld>
-  <p:clrMapOvr>
-    <a:masterClrMapping/>
-  </p:clrMapOvr>
-  <p:timing>
-    <p:tnLst>
-      <p:par>
-        <p:cTn id="1" dur="indefinite" restart="never" nodeType="tmRoot"/>
-      </p:par>
-    </p:tnLst>
-  </p:timing>
-</p:sld>
-</file>
-
-<file path=ppt/slides/slide30.xml><?xml version="1.0" encoding="utf-8"?>
+<file path=ppt/slides/slide31.xml><?xml version="1.0" encoding="utf-8"?>
 <p:sld xmlns:a="http://schemas.openxmlformats.org/drawingml/2006/main" xmlns:r="http://schemas.openxmlformats.org/officeDocument/2006/relationships" xmlns:p="http://schemas.openxmlformats.org/presentationml/2006/main">
   <p:cSld>
     <p:spTree>
@@ -21134,7 +22361,7 @@
 </p:sld>
 </file>
 
-<file path=ppt/slides/slide31.xml><?xml version="1.0" encoding="utf-8"?>
+<file path=ppt/slides/slide32.xml><?xml version="1.0" encoding="utf-8"?>
 <p:sld xmlns:a="http://schemas.openxmlformats.org/drawingml/2006/main" xmlns:r="http://schemas.openxmlformats.org/officeDocument/2006/relationships" xmlns:p="http://schemas.openxmlformats.org/presentationml/2006/main">
   <p:cSld>
     <p:spTree>
@@ -21217,15 +22444,7 @@
             </a:r>
             <a:r>
               <a:rPr lang="zh-CN" altLang="en-US" sz="4400" dirty="0" smtClean="0"/>
-              <a:t>操</a:t>
-            </a:r>
-            <a:r>
-              <a:rPr lang="zh-CN" altLang="en-US" sz="4400" dirty="0" smtClean="0"/>
-              <a:t>关键技巧</a:t>
-            </a:r>
-            <a:r>
-              <a:rPr lang="zh-CN" altLang="en-US" sz="4400" dirty="0" smtClean="0"/>
-              <a:t>（</a:t>
+              <a:t>操关键技巧（</a:t>
             </a:r>
             <a:r>
               <a:rPr lang="en-US" altLang="zh-CN" sz="4400" dirty="0" smtClean="0"/>
@@ -21677,13 +22896,7 @@
               <a:rPr lang="zh-CN" altLang="en-US" sz="1200" dirty="0" smtClean="0">
                 <a:latin typeface="+mn-ea"/>
               </a:rPr>
-              <a:t>代表</a:t>
-            </a:r>
-            <a:r>
-              <a:rPr lang="zh-CN" altLang="en-US" sz="1200" dirty="0" smtClean="0">
-                <a:latin typeface="+mn-ea"/>
-              </a:rPr>
-              <a:t>对事件的负面心理已经到了不可忍受的地步。</a:t>
+              <a:t>代表对事件的负面心理已经到了不可忍受的地步。</a:t>
             </a:r>
             <a:endParaRPr lang="en-US" altLang="zh-CN" sz="1200" dirty="0" smtClean="0">
               <a:latin typeface="+mn-ea"/>
@@ -21709,13 +22922,7 @@
               <a:rPr lang="zh-CN" altLang="en-US" sz="1200" dirty="0" smtClean="0">
                 <a:latin typeface="+mn-ea"/>
               </a:rPr>
-              <a:t>负面</a:t>
-            </a:r>
-            <a:r>
-              <a:rPr lang="zh-CN" altLang="en-US" sz="1200" dirty="0" smtClean="0">
-                <a:latin typeface="+mn-ea"/>
-              </a:rPr>
-              <a:t>情绪很高，感觉非常糟糕，情绪马上要失控。</a:t>
+              <a:t>负面情绪很高，感觉非常糟糕，情绪马上要失控。</a:t>
             </a:r>
             <a:endParaRPr lang="en-US" altLang="zh-CN" sz="1200" dirty="0" smtClean="0">
               <a:latin typeface="+mn-ea"/>
@@ -21741,13 +22948,7 @@
               <a:rPr lang="zh-CN" altLang="en-US" sz="1200" dirty="0" smtClean="0">
                 <a:latin typeface="+mn-ea"/>
               </a:rPr>
-              <a:t>感到</a:t>
-            </a:r>
-            <a:r>
-              <a:rPr lang="zh-CN" altLang="en-US" sz="1200" dirty="0" smtClean="0">
-                <a:latin typeface="+mn-ea"/>
-              </a:rPr>
-              <a:t>糟糕，虽然还可以控制一下情绪，但一不小心会失控。</a:t>
+              <a:t>感到糟糕，虽然还可以控制一下情绪，但一不小心会失控。</a:t>
             </a:r>
             <a:endParaRPr lang="en-US" altLang="zh-CN" sz="1200" dirty="0" smtClean="0">
               <a:latin typeface="+mn-ea"/>
@@ -21768,13 +22969,7 @@
               <a:rPr lang="zh-CN" altLang="en-US" sz="1200" dirty="0" smtClean="0">
                 <a:latin typeface="+mn-ea"/>
               </a:rPr>
-              <a:t>情绪</a:t>
-            </a:r>
-            <a:r>
-              <a:rPr lang="zh-CN" altLang="en-US" sz="1200" dirty="0" smtClean="0">
-                <a:latin typeface="+mn-ea"/>
-              </a:rPr>
-              <a:t>开始要崩溃，在很糟糕的情绪边缘，但还可以努力控制。</a:t>
+              <a:t>情绪开始要崩溃，在很糟糕的情绪边缘，但还可以努力控制。</a:t>
             </a:r>
             <a:endParaRPr lang="en-US" altLang="zh-CN" sz="1200" dirty="0" smtClean="0">
               <a:latin typeface="+mn-ea"/>
@@ -21795,13 +22990,7 @@
               <a:rPr lang="zh-CN" altLang="en-US" sz="1200" dirty="0" smtClean="0">
                 <a:latin typeface="+mn-ea"/>
               </a:rPr>
-              <a:t>感到</a:t>
-            </a:r>
-            <a:r>
-              <a:rPr lang="zh-CN" altLang="en-US" sz="1200" dirty="0" smtClean="0">
-                <a:latin typeface="+mn-ea"/>
-              </a:rPr>
-              <a:t>挺糟糕，意识到应该想办法去调节不良情绪。</a:t>
+              <a:t>感到挺糟糕，意识到应该想办法去调节不良情绪。</a:t>
             </a:r>
             <a:endParaRPr lang="en-US" altLang="zh-CN" sz="1200" dirty="0" smtClean="0">
               <a:latin typeface="+mn-ea"/>
@@ -21822,13 +23011,7 @@
               <a:rPr lang="zh-CN" altLang="en-US" sz="1200" dirty="0" smtClean="0">
                 <a:latin typeface="+mn-ea"/>
               </a:rPr>
-              <a:t>有一些</a:t>
-            </a:r>
-            <a:r>
-              <a:rPr lang="zh-CN" altLang="en-US" sz="1200" dirty="0" smtClean="0">
-                <a:latin typeface="+mn-ea"/>
-              </a:rPr>
-              <a:t>心理不舒服，但努力一下是可以控制的</a:t>
+              <a:t>有一些心理不舒服，但努力一下是可以控制的</a:t>
             </a:r>
             <a:endParaRPr lang="en-US" altLang="zh-CN" sz="1200" dirty="0" smtClean="0">
               <a:latin typeface="+mn-ea"/>
@@ -21849,13 +23032,7 @@
               <a:rPr lang="zh-CN" altLang="en-US" sz="1200" dirty="0" smtClean="0">
                 <a:latin typeface="+mn-ea"/>
               </a:rPr>
-              <a:t>有一些</a:t>
-            </a:r>
-            <a:r>
-              <a:rPr lang="zh-CN" altLang="en-US" sz="1200" dirty="0" smtClean="0">
-                <a:latin typeface="+mn-ea"/>
-              </a:rPr>
-              <a:t>不痛快，无法回避感受，但能控制情绪。</a:t>
+              <a:t>有一些不痛快，无法回避感受，但能控制情绪。</a:t>
             </a:r>
             <a:endParaRPr lang="en-US" altLang="zh-CN" sz="1200" dirty="0" smtClean="0">
               <a:latin typeface="+mn-ea"/>
@@ -21876,13 +23053,7 @@
               <a:rPr lang="zh-CN" altLang="en-US" sz="1200" dirty="0" smtClean="0">
                 <a:latin typeface="+mn-ea"/>
               </a:rPr>
-              <a:t>有点</a:t>
-            </a:r>
-            <a:r>
-              <a:rPr lang="zh-CN" altLang="en-US" sz="1200" dirty="0" smtClean="0">
-                <a:latin typeface="+mn-ea"/>
-              </a:rPr>
-              <a:t>不舒服，并注意到了这样的感受。</a:t>
+              <a:t>有点不舒服，并注意到了这样的感受。</a:t>
             </a:r>
             <a:endParaRPr lang="en-US" altLang="zh-CN" sz="1200" dirty="0" smtClean="0">
               <a:latin typeface="+mn-ea"/>
@@ -21903,13 +23074,7 @@
               <a:rPr lang="zh-CN" altLang="en-US" sz="1200" dirty="0" smtClean="0">
                 <a:latin typeface="+mn-ea"/>
               </a:rPr>
-              <a:t>有点</a:t>
-            </a:r>
-            <a:r>
-              <a:rPr lang="zh-CN" altLang="en-US" sz="1200" dirty="0" smtClean="0">
-                <a:latin typeface="+mn-ea"/>
-              </a:rPr>
-              <a:t>不舒服，平时不注意它不会打扰你，有时想到会有点困扰。</a:t>
+              <a:t>有点不舒服，平时不注意它不会打扰你，有时想到会有点困扰。</a:t>
             </a:r>
             <a:endParaRPr lang="en-US" altLang="zh-CN" sz="1200" dirty="0" smtClean="0">
               <a:latin typeface="+mn-ea"/>
@@ -21930,13 +23095,7 @@
               <a:rPr lang="zh-CN" altLang="en-US" sz="1200" dirty="0" smtClean="0">
                 <a:latin typeface="+mn-ea"/>
               </a:rPr>
-              <a:t>基本上</a:t>
-            </a:r>
-            <a:r>
-              <a:rPr lang="zh-CN" altLang="en-US" sz="1200" dirty="0" smtClean="0">
-                <a:latin typeface="+mn-ea"/>
-              </a:rPr>
-              <a:t>还好，如果很仔细想会有一丝不痛快。</a:t>
+              <a:t>基本上还好，如果很仔细想会有一丝不痛快。</a:t>
             </a:r>
             <a:endParaRPr lang="en-US" altLang="zh-CN" sz="1200" dirty="0" smtClean="0">
               <a:latin typeface="+mn-ea"/>
@@ -21957,13 +23116,7 @@
               <a:rPr lang="zh-CN" altLang="en-US" sz="1200" dirty="0" smtClean="0">
                 <a:latin typeface="+mn-ea"/>
               </a:rPr>
-              <a:t>内心</a:t>
-            </a:r>
-            <a:r>
-              <a:rPr lang="zh-CN" altLang="en-US" sz="1200" dirty="0" smtClean="0">
-                <a:latin typeface="+mn-ea"/>
-              </a:rPr>
-              <a:t>平静，完全解脱，没有不愉快的感觉。</a:t>
+              <a:t>内心平静，完全解脱，没有不愉快的感觉。</a:t>
             </a:r>
             <a:endParaRPr lang="en-US" altLang="zh-CN" sz="1200" dirty="0" smtClean="0">
               <a:latin typeface="+mn-ea"/>
@@ -22272,7 +23425,7 @@
 </p:sld>
 </file>
 
-<file path=ppt/slides/slide32.xml><?xml version="1.0" encoding="utf-8"?>
+<file path=ppt/slides/slide33.xml><?xml version="1.0" encoding="utf-8"?>
 <p:sld xmlns:a="http://schemas.openxmlformats.org/drawingml/2006/main" xmlns:r="http://schemas.openxmlformats.org/officeDocument/2006/relationships" xmlns:p="http://schemas.openxmlformats.org/presentationml/2006/main">
   <p:cSld>
     <p:spTree>
@@ -22366,11 +23519,7 @@
             </a:r>
             <a:r>
               <a:rPr lang="zh-CN" altLang="en-US" sz="4400" dirty="0"/>
-              <a:t>心理自助</a:t>
-            </a:r>
-            <a:r>
-              <a:rPr lang="zh-CN" altLang="en-US" sz="4400" dirty="0"/>
-              <a:t>操关键技巧</a:t>
+              <a:t>心理自助操关键技巧</a:t>
             </a:r>
             <a:r>
               <a:rPr lang="zh-CN" altLang="en-US" sz="4400" dirty="0" smtClean="0"/>
@@ -23571,7 +24720,7 @@
 </p:sld>
 </file>
 
-<file path=ppt/slides/slide33.xml><?xml version="1.0" encoding="utf-8"?>
+<file path=ppt/slides/slide34.xml><?xml version="1.0" encoding="utf-8"?>
 <p:sld xmlns:a="http://schemas.openxmlformats.org/drawingml/2006/main" xmlns:r="http://schemas.openxmlformats.org/officeDocument/2006/relationships" xmlns:p="http://schemas.openxmlformats.org/presentationml/2006/main">
   <p:cSld>
     <p:spTree>
@@ -23665,11 +24814,7 @@
             </a:r>
             <a:r>
               <a:rPr lang="zh-CN" altLang="en-US" sz="4400" dirty="0"/>
-              <a:t>心理自助</a:t>
-            </a:r>
-            <a:r>
-              <a:rPr lang="zh-CN" altLang="en-US" sz="4400" dirty="0"/>
-              <a:t>操关键技巧</a:t>
+              <a:t>心理自助操关键技巧</a:t>
             </a:r>
             <a:r>
               <a:rPr lang="zh-CN" altLang="en-US" sz="4400" dirty="0" smtClean="0"/>
@@ -24397,7 +25542,7 @@
 </p:sld>
 </file>
 
-<file path=ppt/slides/slide34.xml><?xml version="1.0" encoding="utf-8"?>
+<file path=ppt/slides/slide35.xml><?xml version="1.0" encoding="utf-8"?>
 <p:sld xmlns:a="http://schemas.openxmlformats.org/drawingml/2006/main" xmlns:r="http://schemas.openxmlformats.org/officeDocument/2006/relationships" xmlns:p="http://schemas.openxmlformats.org/presentationml/2006/main">
   <p:cSld>
     <p:spTree>
@@ -24420,6 +25565,33 @@
           <a:chExt cx="0" cy="0"/>
         </a:xfrm>
       </p:grpSpPr>
+      <p:pic>
+        <p:nvPicPr>
+          <p:cNvPr id="7" name="图片 6"/>
+          <p:cNvPicPr>
+            <a:picLocks noChangeAspect="1"/>
+          </p:cNvPicPr>
+          <p:nvPr/>
+        </p:nvPicPr>
+        <p:blipFill>
+          <a:blip r:embed="rId2"/>
+          <a:stretch>
+            <a:fillRect/>
+          </a:stretch>
+        </p:blipFill>
+        <p:spPr>
+          <a:xfrm>
+            <a:off x="6198282" y="4597599"/>
+            <a:ext cx="3963678" cy="2202044"/>
+          </a:xfrm>
+          <a:prstGeom prst="rect">
+            <a:avLst/>
+          </a:prstGeom>
+          <a:effectLst>
+            <a:softEdge rad="127000"/>
+          </a:effectLst>
+        </p:spPr>
+      </p:pic>
       <p:sp>
         <p:nvSpPr>
           <p:cNvPr id="2" name="标题 1">
@@ -24487,16 +25659,22 @@
               <a:buNone/>
             </a:pPr>
             <a:r>
-              <a:rPr lang="en-US" altLang="zh-CN" sz="1400" dirty="0">
+              <a:rPr lang="en-US" altLang="zh-CN" sz="1400" b="1" dirty="0">
                 <a:latin typeface="+mn-ea"/>
               </a:rPr>
               <a:t>1.</a:t>
             </a:r>
             <a:r>
+              <a:rPr lang="zh-CN" altLang="en-US" sz="1400" b="1" dirty="0">
+                <a:latin typeface="+mn-ea"/>
+              </a:rPr>
+              <a:t>热身阶段迅速活跃身心状态为情绪敲击做好准备。</a:t>
+            </a:r>
+            <a:r>
               <a:rPr lang="zh-CN" altLang="en-US" sz="1400" dirty="0">
                 <a:latin typeface="+mn-ea"/>
               </a:rPr>
-              <a:t>热身阶段迅速活跃身心状态为情绪敲击做好准备。当存在负性情绪时或多或少会伴随着相应的躯体症状，如在紧张时肌肉收缩供血受阻，在热身阶段主要开展的是以全身经络操为主的全身放松习练，设计思路借鉴了医疗体操的优势，选择了易于掌握的动作幅度和运动强度的左右协调运动动作及拍打穴位动作，在室内外均可习练，经过热身后锻炼能很快感受到精神和体力的增加，增强身体灵活度和改善气血运行状态，能较快地将身心调整状态好，为之后的敲击操集中精神聚焦并释放情绪做好准备，有益于后续情绪敲击操的习练。</a:t>
+              <a:t>当存在负性情绪时或多或少会伴随着相应的躯体症状，如在紧张时肌肉收缩供血受阻，在热身阶段主要开展的是以全身经络操为主的全身放松习练，设计思路借鉴了医疗体操的优势，选择了易于掌握的动作幅度和运动强度的左右协调运动动作及拍打穴位动作，在室内外均可习练，经过热身后锻炼能很快感受到精神和体力的增加，增强身体灵活度和改善气血运行状态，能较快地将身心调整状态好，为之后的敲击操集中精神聚焦并释放情绪做好准备，有益于后续情绪敲击操的习练。</a:t>
             </a:r>
           </a:p>
         </p:txBody>
@@ -24517,8 +25695,8 @@
         </p:nvSpPr>
         <p:spPr>
           <a:xfrm>
-            <a:off x="521208" y="2969347"/>
-            <a:ext cx="5703678" cy="1226821"/>
+            <a:off x="509016" y="3135086"/>
+            <a:ext cx="4406651" cy="1226821"/>
           </a:xfrm>
           <a:prstGeom prst="rect">
             <a:avLst/>
@@ -24696,16 +25874,22 @@
               <a:buNone/>
             </a:pPr>
             <a:r>
-              <a:rPr lang="en-US" altLang="zh-CN" sz="1400" dirty="0">
+              <a:rPr lang="en-US" altLang="zh-CN" sz="1400" b="1" dirty="0">
                 <a:latin typeface="+mn-ea"/>
               </a:rPr>
               <a:t>2.</a:t>
             </a:r>
             <a:r>
+              <a:rPr lang="zh-CN" altLang="en-US" sz="1400" b="1" dirty="0">
+                <a:latin typeface="+mn-ea"/>
+              </a:rPr>
+              <a:t>情绪聚焦找准问题实现心理反转机制的有效解除。</a:t>
+            </a:r>
+            <a:r>
               <a:rPr lang="zh-CN" altLang="en-US" sz="1400" dirty="0">
                 <a:latin typeface="+mn-ea"/>
               </a:rPr>
-              <a:t>情绪聚焦找准问题实现心理反转机制的有效解除。聚焦情绪的阶段是释放情绪前的必备动作，主要目的在于为调整情绪解除心理反转机制。心理反转是一些疾病呈现慢性化并且对传统治疗反应不良的原因，由于心理病患大脑功能长期受到物质成瘾的损害，在处理情绪问题时，更容易引起潜意识中自我挫败感与负向思考习惯，通常这个状态是不被觉知的，但常常为其所苦，这也是心理病患情绪调节困难的原因所在，当这样的心理反转机制存在往往会影响到心理病患接受心理咨询的效果，因此，心理反转必须通过聚焦情绪这一环节进行修正，否则</a:t>
+              <a:t>聚焦情绪的阶段是释放情绪前的必备动作，主要目的在于为调整情绪解除心理反转机制。心理反转是一些疾病呈现慢性化并且对传统治疗反应不良的原因，由于心理病患大脑功能长期受到物质成瘾的损害，在处理情绪问题时，更容易引起潜意识中自我挫败感与负向思考习惯，通常这个状态是不被觉知的，但常常为其所苦，这也是心理病患情绪调节困难的原因所在，当这样的心理反转机制存在往往会影响到心理病患接受心理咨询的效果，因此，心理反转必须通过聚焦情绪这一环节进行修正，否则</a:t>
             </a:r>
             <a:r>
               <a:rPr lang="en-US" altLang="zh-CN" sz="1400" dirty="0">
@@ -24738,8 +25922,8 @@
         </p:nvSpPr>
         <p:spPr>
           <a:xfrm>
-            <a:off x="6230982" y="2899819"/>
-            <a:ext cx="5316583" cy="2261218"/>
+            <a:off x="4915667" y="2810706"/>
+            <a:ext cx="6619706" cy="2585598"/>
           </a:xfrm>
           <a:prstGeom prst="rect">
             <a:avLst/>
@@ -24917,16 +26101,22 @@
               <a:buNone/>
             </a:pPr>
             <a:r>
-              <a:rPr lang="en-US" altLang="zh-CN" sz="1400" dirty="0">
+              <a:rPr lang="en-US" altLang="zh-CN" sz="1400" b="1" dirty="0">
                 <a:latin typeface="+mn-ea"/>
               </a:rPr>
               <a:t>3.</a:t>
             </a:r>
             <a:r>
+              <a:rPr lang="zh-CN" altLang="en-US" sz="1400" b="1" dirty="0">
+                <a:latin typeface="+mn-ea"/>
+              </a:rPr>
+              <a:t>用中立化的引导语有效帮助修改心理反转机制。</a:t>
+            </a:r>
+            <a:r>
               <a:rPr lang="zh-CN" altLang="en-US" sz="1400" dirty="0">
                 <a:latin typeface="+mn-ea"/>
               </a:rPr>
-              <a:t>用中立化的引导语有效帮助修改心理反转机制。因心理病患的心理反转机制有可能引起负性思考，所以必须使用中立化的心理支持引导语去修改心理反转机制，一边敲击对应穴位堵点，一边说出心理支持引导语，这一过程能够有效地帮助心理病患识别自己的真实感受和实际行为之间的差异，思考负性情绪形成的原因，从接受自己的真实感受、理解自己开始，再到使用合理方式去表达自己的负面感受，即可有效疏通情绪、减少自我隔离和压抑，从而实现改变自己矛盾的行为状态，做到身心的内外一致。</a:t>
+              <a:t>因心理病患的心理反转机制有可能引起负性思考，所以必须使用中立化的心理支持引导语去修改心理反转机制，一边敲击对应穴位堵点，一边说出心理支持引导语，这一过程能够有效地帮助心理病患识别自己的真实感受和实际行为之间的差异，思考负性情绪形成的原因，从接受自己的真实感受、理解自己开始，再到使用合理方式去表达自己的负面感受，即可有效疏通情绪、减少自我隔离和压抑，从而实现改变自己矛盾的行为状态，做到身心的内外一致。</a:t>
             </a:r>
           </a:p>
         </p:txBody>

--- a/44_心理学/28_浥尘伙伴社团原创：音乐治疗/PPT/浥尘伙伴社团原创：情绪释放疗法（EFT）心理训练.pptx
+++ b/44_心理学/28_浥尘伙伴社团原创：音乐治疗/PPT/浥尘伙伴社团原创：情绪释放疗法（EFT）心理训练.pptx
@@ -5,7 +5,7 @@
     <p:sldMasterId id="2147483696" r:id="rId1"/>
   </p:sldMasterIdLst>
   <p:notesMasterIdLst>
-    <p:notesMasterId r:id="rId37"/>
+    <p:notesMasterId r:id="rId39"/>
   </p:notesMasterIdLst>
   <p:sldIdLst>
     <p:sldId id="256" r:id="rId2"/>
@@ -37,12 +37,14 @@
     <p:sldId id="275" r:id="rId28"/>
     <p:sldId id="266" r:id="rId29"/>
     <p:sldId id="289" r:id="rId30"/>
-    <p:sldId id="291" r:id="rId31"/>
-    <p:sldId id="290" r:id="rId32"/>
-    <p:sldId id="286" r:id="rId33"/>
-    <p:sldId id="267" r:id="rId34"/>
-    <p:sldId id="282" r:id="rId35"/>
-    <p:sldId id="264" r:id="rId36"/>
+    <p:sldId id="293" r:id="rId31"/>
+    <p:sldId id="291" r:id="rId32"/>
+    <p:sldId id="290" r:id="rId33"/>
+    <p:sldId id="286" r:id="rId34"/>
+    <p:sldId id="267" r:id="rId35"/>
+    <p:sldId id="282" r:id="rId36"/>
+    <p:sldId id="264" r:id="rId37"/>
+    <p:sldId id="292" r:id="rId38"/>
   </p:sldIdLst>
   <p:sldSz cx="12192000" cy="6858000"/>
   <p:notesSz cx="6858000" cy="9144000"/>
@@ -523,7 +525,7 @@
                 <a16:creationId xmlns:a16="http://schemas.microsoft.com/office/drawing/2014/main" id="{EA67E988-5919-57BB-C7DE-D3EAD38A3045}"/>
               </a:ext>
               <a:ext uri="{C183D7F6-B498-43B3-948B-1728B52AA6E4}">
-                <adec:decorative xmlns="" xmlns:adec="http://schemas.microsoft.com/office/drawing/2017/decorative" val="1"/>
+                <adec:decorative xmlns:adec="http://schemas.microsoft.com/office/drawing/2017/decorative" xmlns="" val="1"/>
               </a:ext>
             </a:extLst>
           </p:cNvPr>
@@ -3677,7 +3679,7 @@
                 <a16:creationId xmlns:a16="http://schemas.microsoft.com/office/drawing/2014/main" id="{774A975B-A886-5202-0489-6965514A0D14}"/>
               </a:ext>
               <a:ext uri="{C183D7F6-B498-43B3-948B-1728B52AA6E4}">
-                <adec:decorative xmlns="" xmlns:adec="http://schemas.microsoft.com/office/drawing/2017/decorative" val="1"/>
+                <adec:decorative xmlns:adec="http://schemas.microsoft.com/office/drawing/2017/decorative" xmlns="" val="1"/>
               </a:ext>
             </a:extLst>
           </p:cNvPr>
@@ -4106,7 +4108,7 @@
                 <a16:creationId xmlns:a16="http://schemas.microsoft.com/office/drawing/2014/main" id="{0EECA69B-4C2A-7F31-8019-E90DB3BD49CB}"/>
               </a:ext>
               <a:ext uri="{C183D7F6-B498-43B3-948B-1728B52AA6E4}">
-                <adec:decorative xmlns="" xmlns:adec="http://schemas.microsoft.com/office/drawing/2017/decorative" val="1"/>
+                <adec:decorative xmlns:adec="http://schemas.microsoft.com/office/drawing/2017/decorative" xmlns="" val="1"/>
               </a:ext>
             </a:extLst>
           </p:cNvPr>
@@ -4251,7 +4253,7 @@
                 <a16:creationId xmlns:a16="http://schemas.microsoft.com/office/drawing/2014/main" id="{857DEAC1-B3AA-6569-0A44-A191DF2F3C67}"/>
               </a:ext>
               <a:ext uri="{C183D7F6-B498-43B3-948B-1728B52AA6E4}">
-                <adec:decorative xmlns="" xmlns:adec="http://schemas.microsoft.com/office/drawing/2017/decorative" val="1"/>
+                <adec:decorative xmlns:adec="http://schemas.microsoft.com/office/drawing/2017/decorative" xmlns="" val="1"/>
               </a:ext>
             </a:extLst>
           </p:cNvPr>
@@ -4356,7 +4358,7 @@
         <p:spPr>
           <a:xfrm>
             <a:off x="320040" y="5739969"/>
-            <a:ext cx="10252710" cy="960120"/>
+            <a:ext cx="8136626" cy="960120"/>
           </a:xfrm>
           <a:ln>
             <a:noFill/>
@@ -4378,7 +4380,7 @@
             </a:r>
             <a:r>
               <a:rPr lang="zh-CN" altLang="en-US" sz="5400" dirty="0" smtClean="0"/>
-              <a:t>自助操心理训练</a:t>
+              <a:t>心理自助操</a:t>
             </a:r>
             <a:endParaRPr lang="zh-CN" altLang="en-US" sz="5400" dirty="0"/>
           </a:p>
@@ -4402,8 +4404,8 @@
         </p:nvSpPr>
         <p:spPr>
           <a:xfrm>
-            <a:off x="7386639" y="5739969"/>
-            <a:ext cx="4610646" cy="960120"/>
+            <a:off x="8456667" y="5739969"/>
+            <a:ext cx="3540618" cy="960120"/>
           </a:xfrm>
         </p:spPr>
         <p:txBody>
@@ -4454,6 +4456,13 @@
   <p:clrMapOvr>
     <a:masterClrMapping/>
   </p:clrMapOvr>
+  <p:timing>
+    <p:tnLst>
+      <p:par>
+        <p:cTn id="1" dur="indefinite" restart="never" nodeType="tmRoot"/>
+      </p:par>
+    </p:tnLst>
+  </p:timing>
 </p:sld>
 </file>
 
@@ -4508,7 +4517,7 @@
         </p:blipFill>
         <p:spPr>
           <a:xfrm>
-            <a:off x="8503920" y="4838193"/>
+            <a:off x="7970009" y="4868877"/>
             <a:ext cx="3166872" cy="2111248"/>
           </a:xfrm>
           <a:prstGeom prst="rect">
@@ -5173,7 +5182,13 @@
           <p:nvPr/>
         </p:nvPicPr>
         <p:blipFill>
-          <a:blip r:embed="rId2"/>
+          <a:blip r:embed="rId2" cstate="screen">
+            <a:extLst>
+              <a:ext uri="{28A0092B-C50C-407E-A947-70E740481C1C}">
+                <a14:useLocalDpi xmlns:a14="http://schemas.microsoft.com/office/drawing/2010/main"/>
+              </a:ext>
+            </a:extLst>
+          </a:blip>
           <a:stretch>
             <a:fillRect/>
           </a:stretch>
@@ -5662,16 +5677,22 @@
               <a:rPr lang="zh-CN" altLang="en-US" sz="1800" dirty="0">
                 <a:latin typeface="+mn-ea"/>
               </a:rPr>
-              <a:t>具体情绪 </a:t>
-            </a:r>
-            <a:r>
-              <a:rPr lang="en-US" altLang="zh-CN" sz="1800" dirty="0">
-                <a:latin typeface="+mn-ea"/>
-              </a:rPr>
-              <a:t>+ </a:t>
-            </a:r>
-            <a:r>
-              <a:rPr lang="zh-CN" altLang="en-US" sz="1800" dirty="0">
+              <a:t>具体</a:t>
+            </a:r>
+            <a:r>
+              <a:rPr lang="zh-CN" altLang="en-US" sz="1800" dirty="0" smtClean="0">
+                <a:latin typeface="+mn-ea"/>
+              </a:rPr>
+              <a:t>情绪</a:t>
+            </a:r>
+            <a:r>
+              <a:rPr lang="en-US" altLang="zh-CN" sz="1800" dirty="0" smtClean="0">
+                <a:latin typeface="+mn-ea"/>
+              </a:rPr>
+              <a:t>+</a:t>
+            </a:r>
+            <a:r>
+              <a:rPr lang="zh-CN" altLang="en-US" sz="1800" dirty="0" smtClean="0">
                 <a:latin typeface="+mn-ea"/>
               </a:rPr>
               <a:t>场景</a:t>
@@ -5740,6 +5761,13 @@
   <p:clrMapOvr>
     <a:masterClrMapping/>
   </p:clrMapOvr>
+  <p:timing>
+    <p:tnLst>
+      <p:par>
+        <p:cTn id="1" dur="indefinite" restart="never" nodeType="tmRoot"/>
+      </p:par>
+    </p:tnLst>
+  </p:timing>
 </p:sld>
 </file>
 
@@ -6500,6 +6528,13 @@
   <p:clrMapOvr>
     <a:masterClrMapping/>
   </p:clrMapOvr>
+  <p:timing>
+    <p:tnLst>
+      <p:par>
+        <p:cTn id="1" dur="indefinite" restart="never" nodeType="tmRoot"/>
+      </p:par>
+    </p:tnLst>
+  </p:timing>
 </p:sld>
 </file>
 
@@ -6782,6 +6817,13 @@
   <p:clrMapOvr>
     <a:masterClrMapping/>
   </p:clrMapOvr>
+  <p:timing>
+    <p:tnLst>
+      <p:par>
+        <p:cTn id="1" dur="indefinite" restart="never" nodeType="tmRoot"/>
+      </p:par>
+    </p:tnLst>
+  </p:timing>
 </p:sld>
 </file>
 
@@ -7066,6 +7108,13 @@
   <p:clrMapOvr>
     <a:masterClrMapping/>
   </p:clrMapOvr>
+  <p:timing>
+    <p:tnLst>
+      <p:par>
+        <p:cTn id="1" dur="indefinite" restart="never" nodeType="tmRoot"/>
+      </p:par>
+    </p:tnLst>
+  </p:timing>
 </p:sld>
 </file>
 
@@ -7298,7 +7347,7 @@
         </p:nvSpPr>
         <p:spPr>
           <a:xfrm>
-            <a:off x="264033" y="5566122"/>
+            <a:off x="515112" y="5559927"/>
             <a:ext cx="10280142" cy="757207"/>
           </a:xfrm>
           <a:prstGeom prst="rect">
@@ -7588,6 +7637,13 @@
   <p:clrMapOvr>
     <a:masterClrMapping/>
   </p:clrMapOvr>
+  <p:timing>
+    <p:tnLst>
+      <p:par>
+        <p:cTn id="1" dur="indefinite" restart="never" nodeType="tmRoot"/>
+      </p:par>
+    </p:tnLst>
+  </p:timing>
 </p:sld>
 </file>
 
@@ -7782,7 +7838,7 @@
         </p:nvSpPr>
         <p:spPr>
           <a:xfrm>
-            <a:off x="264033" y="5566122"/>
+            <a:off x="515112" y="5566122"/>
             <a:ext cx="10280142" cy="757207"/>
           </a:xfrm>
           <a:prstGeom prst="rect">
@@ -8050,6 +8106,13 @@
   <p:clrMapOvr>
     <a:masterClrMapping/>
   </p:clrMapOvr>
+  <p:timing>
+    <p:tnLst>
+      <p:par>
+        <p:cTn id="1" dur="indefinite" restart="never" nodeType="tmRoot"/>
+      </p:par>
+    </p:tnLst>
+  </p:timing>
 </p:sld>
 </file>
 
@@ -8223,7 +8286,7 @@
         </p:nvSpPr>
         <p:spPr>
           <a:xfrm>
-            <a:off x="264035" y="5566122"/>
+            <a:off x="521208" y="5486896"/>
             <a:ext cx="6565390" cy="757207"/>
           </a:xfrm>
           <a:prstGeom prst="rect">
@@ -8724,6 +8787,13 @@
   <p:clrMapOvr>
     <a:masterClrMapping/>
   </p:clrMapOvr>
+  <p:timing>
+    <p:tnLst>
+      <p:par>
+        <p:cTn id="1" dur="indefinite" restart="never" nodeType="tmRoot"/>
+      </p:par>
+    </p:tnLst>
+  </p:timing>
 </p:sld>
 </file>
 
@@ -8978,7 +9048,7 @@
         </p:nvSpPr>
         <p:spPr>
           <a:xfrm>
-            <a:off x="233757" y="5930044"/>
+            <a:off x="513909" y="5942318"/>
             <a:ext cx="11156882" cy="757207"/>
           </a:xfrm>
           <a:prstGeom prst="rect">
@@ -9577,6 +9647,13 @@
   <p:clrMapOvr>
     <a:masterClrMapping/>
   </p:clrMapOvr>
+  <p:timing>
+    <p:tnLst>
+      <p:par>
+        <p:cTn id="1" dur="indefinite" restart="never" nodeType="tmRoot"/>
+      </p:par>
+    </p:tnLst>
+  </p:timing>
 </p:sld>
 </file>
 
@@ -9789,7 +9866,7 @@
         </p:nvSpPr>
         <p:spPr>
           <a:xfrm>
-            <a:off x="282201" y="5953682"/>
+            <a:off x="515112" y="5887389"/>
             <a:ext cx="8551353" cy="757207"/>
           </a:xfrm>
           <a:prstGeom prst="rect">
@@ -10567,6 +10644,13 @@
   <p:clrMapOvr>
     <a:masterClrMapping/>
   </p:clrMapOvr>
+  <p:timing>
+    <p:tnLst>
+      <p:par>
+        <p:cTn id="1" dur="indefinite" restart="never" nodeType="tmRoot"/>
+      </p:par>
+    </p:tnLst>
+  </p:timing>
 </p:sld>
 </file>
 
@@ -11536,7 +11620,7 @@
         </p:nvSpPr>
         <p:spPr>
           <a:xfrm>
-            <a:off x="319267" y="5627491"/>
+            <a:off x="515112" y="5627491"/>
             <a:ext cx="9337166" cy="757207"/>
           </a:xfrm>
           <a:prstGeom prst="rect">
@@ -12324,7 +12408,7 @@
         </p:nvSpPr>
         <p:spPr>
           <a:xfrm>
-            <a:off x="248800" y="5971849"/>
+            <a:off x="521208" y="5921693"/>
             <a:ext cx="9337166" cy="757207"/>
           </a:xfrm>
           <a:prstGeom prst="rect">
@@ -13481,7 +13565,7 @@
         </p:nvSpPr>
         <p:spPr>
           <a:xfrm>
-            <a:off x="264034" y="5566122"/>
+            <a:off x="515112" y="5566122"/>
             <a:ext cx="6511118" cy="757207"/>
           </a:xfrm>
           <a:prstGeom prst="rect">
@@ -14032,7 +14116,7 @@
         </p:nvSpPr>
         <p:spPr>
           <a:xfrm>
-            <a:off x="264034" y="5566122"/>
+            <a:off x="515112" y="5566122"/>
             <a:ext cx="9337166" cy="757207"/>
           </a:xfrm>
           <a:prstGeom prst="rect">
@@ -14399,7 +14483,7 @@
         </p:nvSpPr>
         <p:spPr>
           <a:xfrm>
-            <a:off x="282445" y="5816655"/>
+            <a:off x="515112" y="5761423"/>
             <a:ext cx="9337166" cy="757207"/>
           </a:xfrm>
           <a:prstGeom prst="rect">
@@ -15259,6 +15343,13 @@
   <p:clrMapOvr>
     <a:masterClrMapping/>
   </p:clrMapOvr>
+  <p:timing>
+    <p:tnLst>
+      <p:par>
+        <p:cTn id="1" dur="indefinite" restart="never" nodeType="tmRoot"/>
+      </p:par>
+    </p:tnLst>
+  </p:timing>
 </p:sld>
 </file>
 
@@ -15571,7 +15662,7 @@
         </p:nvSpPr>
         <p:spPr>
           <a:xfrm>
-            <a:off x="264034" y="5845698"/>
+            <a:off x="515112" y="5857972"/>
             <a:ext cx="9337166" cy="757207"/>
           </a:xfrm>
           <a:prstGeom prst="rect">
@@ -15800,6 +15891,13 @@
   <p:clrMapOvr>
     <a:masterClrMapping/>
   </p:clrMapOvr>
+  <p:timing>
+    <p:tnLst>
+      <p:par>
+        <p:cTn id="1" dur="indefinite" restart="never" nodeType="tmRoot"/>
+      </p:par>
+    </p:tnLst>
+  </p:timing>
 </p:sld>
 </file>
 
@@ -16113,7 +16211,7 @@
         </p:nvSpPr>
         <p:spPr>
           <a:xfrm>
-            <a:off x="264034" y="5566122"/>
+            <a:off x="515112" y="5566122"/>
             <a:ext cx="9337166" cy="757207"/>
           </a:xfrm>
           <a:prstGeom prst="rect">
@@ -16404,6 +16502,13 @@
   <p:clrMapOvr>
     <a:masterClrMapping/>
   </p:clrMapOvr>
+  <p:timing>
+    <p:tnLst>
+      <p:par>
+        <p:cTn id="1" dur="indefinite" restart="never" nodeType="tmRoot"/>
+      </p:par>
+    </p:tnLst>
+  </p:timing>
 </p:sld>
 </file>
 
@@ -16725,7 +16830,7 @@
         </p:nvSpPr>
         <p:spPr>
           <a:xfrm>
-            <a:off x="264034" y="5361050"/>
+            <a:off x="515112" y="5274470"/>
             <a:ext cx="9337166" cy="1100816"/>
           </a:xfrm>
           <a:prstGeom prst="rect">
@@ -18222,11 +18327,19 @@
             </a:r>
             <a:r>
               <a:rPr lang="zh-CN" altLang="en-US" sz="4400" dirty="0" smtClean="0"/>
-              <a:t>操音乐选择（</a:t>
+              <a:t>操的音乐</a:t>
+            </a:r>
+            <a:r>
+              <a:rPr lang="zh-CN" altLang="en-US" sz="4400" dirty="0" smtClean="0"/>
+              <a:t>选择</a:t>
+            </a:r>
+            <a:r>
+              <a:rPr lang="zh-CN" altLang="en-US" sz="4400" dirty="0" smtClean="0"/>
+              <a:t>（</a:t>
             </a:r>
             <a:r>
               <a:rPr lang="en-US" altLang="zh-CN" sz="4400" dirty="0" smtClean="0"/>
-              <a:t>6</a:t>
+              <a:t>1</a:t>
             </a:r>
             <a:r>
               <a:rPr lang="zh-CN" altLang="en-US" sz="4400" dirty="0" smtClean="0"/>
@@ -18236,1193 +18349,542 @@
           </a:p>
         </p:txBody>
       </p:sp>
-      <p:graphicFrame>
-        <p:nvGraphicFramePr>
-          <p:cNvPr id="3" name="表格 2"/>
-          <p:cNvGraphicFramePr>
-            <a:graphicFrameLocks noGrp="1"/>
-          </p:cNvGraphicFramePr>
+      <p:pic>
+        <p:nvPicPr>
+          <p:cNvPr id="4" name="图片 3"/>
+          <p:cNvPicPr>
+            <a:picLocks noChangeAspect="1"/>
+          </p:cNvPicPr>
+          <p:nvPr/>
+        </p:nvPicPr>
+        <p:blipFill>
+          <a:blip r:embed="rId2" cstate="screen">
+            <a:extLst>
+              <a:ext uri="{28A0092B-C50C-407E-A947-70E740481C1C}">
+                <a14:useLocalDpi xmlns:a14="http://schemas.microsoft.com/office/drawing/2010/main"/>
+              </a:ext>
+            </a:extLst>
+          </a:blip>
+          <a:stretch>
+            <a:fillRect/>
+          </a:stretch>
+        </p:blipFill>
+        <p:spPr>
+          <a:xfrm>
+            <a:off x="2508320" y="3983502"/>
+            <a:ext cx="4185211" cy="2788920"/>
+          </a:xfrm>
+          <a:prstGeom prst="rect">
+            <a:avLst/>
+          </a:prstGeom>
+        </p:spPr>
+      </p:pic>
+      <p:sp>
+        <p:nvSpPr>
+          <p:cNvPr id="5" name="内容占位符 2">
+            <a:extLst>
+              <a:ext uri="{FF2B5EF4-FFF2-40B4-BE49-F238E27FC236}">
+                <a16:creationId xmlns:a16="http://schemas.microsoft.com/office/drawing/2014/main" id="{9BB5BFA0-421E-7149-5025-230269CDD21A}"/>
+              </a:ext>
+            </a:extLst>
+          </p:cNvPr>
+          <p:cNvSpPr>
+            <a:spLocks noGrp="1"/>
+          </p:cNvSpPr>
           <p:nvPr>
-            <p:extLst>
-              <p:ext uri="{D42A27DB-BD31-4B8C-83A1-F6EECF244321}">
-                <p14:modId xmlns:p14="http://schemas.microsoft.com/office/powerpoint/2010/main" val="1687765716"/>
-              </p:ext>
-            </p:extLst>
+            <p:ph idx="1"/>
           </p:nvPr>
-        </p:nvGraphicFramePr>
-        <p:xfrm>
-          <a:off x="521209" y="1792289"/>
-          <a:ext cx="11155680" cy="4986744"/>
-        </p:xfrm>
-        <a:graphic>
-          <a:graphicData uri="http://schemas.openxmlformats.org/drawingml/2006/table">
-            <a:tbl>
-              <a:tblPr>
-                <a:tableStyleId>{5C22544A-7EE6-4342-B048-85BDC9FD1C3A}</a:tableStyleId>
-              </a:tblPr>
-              <a:tblGrid>
-                <a:gridCol w="1356686">
-                  <a:extLst>
-                    <a:ext uri="{9D8B030D-6E8A-4147-A177-3AD203B41FA5}">
-                      <a16:colId xmlns:a16="http://schemas.microsoft.com/office/drawing/2014/main" val="230779709"/>
-                    </a:ext>
-                  </a:extLst>
-                </a:gridCol>
-                <a:gridCol w="957359">
-                  <a:extLst>
-                    <a:ext uri="{9D8B030D-6E8A-4147-A177-3AD203B41FA5}">
-                      <a16:colId xmlns:a16="http://schemas.microsoft.com/office/drawing/2014/main" val="3617429372"/>
-                    </a:ext>
-                  </a:extLst>
-                </a:gridCol>
-                <a:gridCol w="8841635">
-                  <a:extLst>
-                    <a:ext uri="{9D8B030D-6E8A-4147-A177-3AD203B41FA5}">
-                      <a16:colId xmlns:a16="http://schemas.microsoft.com/office/drawing/2014/main" val="432370790"/>
-                    </a:ext>
-                  </a:extLst>
-                </a:gridCol>
-              </a:tblGrid>
-              <a:tr h="433797">
-                <a:tc>
-                  <a:txBody>
-                    <a:bodyPr/>
-                    <a:lstStyle/>
-                    <a:p>
-                      <a:pPr algn="ctr" fontAlgn="ctr"/>
-                      <a:r>
-                        <a:rPr lang="en-US" sz="1200" u="none" strike="noStrike">
-                          <a:effectLst/>
-                        </a:rPr>
-                        <a:t>EFT </a:t>
-                      </a:r>
-                      <a:r>
-                        <a:rPr lang="zh-CN" altLang="en-US" sz="1200" u="none" strike="noStrike">
-                          <a:effectLst/>
-                        </a:rPr>
-                        <a:t>穴位</a:t>
-                      </a:r>
-                      <a:endParaRPr lang="zh-CN" altLang="en-US" sz="1200" b="1" i="0" u="none" strike="noStrike">
-                        <a:solidFill>
-                          <a:srgbClr val="333333"/>
-                        </a:solidFill>
-                        <a:effectLst/>
-                        <a:latin typeface="Arial" panose="020B0604020202020204" pitchFamily="34" charset="0"/>
-                        <a:ea typeface="等线" panose="02010600030101010101" pitchFamily="2" charset="-122"/>
-                      </a:endParaRPr>
-                    </a:p>
-                  </a:txBody>
-                  <a:tcPr marL="3839" marR="3839" marT="3839" marB="0" anchor="ctr"/>
-                </a:tc>
-                <a:tc>
-                  <a:txBody>
-                    <a:bodyPr/>
-                    <a:lstStyle/>
-                    <a:p>
-                      <a:pPr algn="ctr" fontAlgn="ctr"/>
-                      <a:r>
-                        <a:rPr lang="zh-CN" altLang="en-US" sz="1200" b="1" i="0" u="none" strike="noStrike" dirty="0" smtClean="0">
-                          <a:solidFill>
-                            <a:srgbClr val="333333"/>
-                          </a:solidFill>
-                          <a:effectLst/>
-                          <a:latin typeface="Arial" panose="020B0604020202020204" pitchFamily="34" charset="0"/>
-                          <a:ea typeface="等线" panose="02010600030101010101" pitchFamily="2" charset="-122"/>
-                        </a:rPr>
-                        <a:t>经络</a:t>
-                      </a:r>
-                      <a:endParaRPr lang="zh-CN" altLang="en-US" sz="1200" b="1" i="0" u="none" strike="noStrike" dirty="0">
-                        <a:solidFill>
-                          <a:srgbClr val="333333"/>
-                        </a:solidFill>
-                        <a:effectLst/>
-                        <a:latin typeface="Arial" panose="020B0604020202020204" pitchFamily="34" charset="0"/>
-                        <a:ea typeface="等线" panose="02010600030101010101" pitchFamily="2" charset="-122"/>
-                      </a:endParaRPr>
-                    </a:p>
-                  </a:txBody>
-                  <a:tcPr marL="3839" marR="3839" marT="3839" marB="0" anchor="ctr"/>
-                </a:tc>
-                <a:tc>
-                  <a:txBody>
-                    <a:bodyPr/>
-                    <a:lstStyle/>
-                    <a:p>
-                      <a:pPr algn="ctr" fontAlgn="ctr"/>
-                      <a:r>
-                        <a:rPr lang="zh-CN" altLang="en-US" sz="1200" u="none" strike="noStrike" dirty="0">
-                          <a:effectLst/>
-                        </a:rPr>
-                        <a:t>匹配依据</a:t>
-                      </a:r>
-                      <a:endParaRPr lang="zh-CN" altLang="en-US" sz="1200" b="1" i="0" u="none" strike="noStrike" dirty="0">
-                        <a:solidFill>
-                          <a:srgbClr val="333333"/>
-                        </a:solidFill>
-                        <a:effectLst/>
-                        <a:latin typeface="Arial" panose="020B0604020202020204" pitchFamily="34" charset="0"/>
-                        <a:ea typeface="等线" panose="02010600030101010101" pitchFamily="2" charset="-122"/>
-                      </a:endParaRPr>
-                    </a:p>
-                  </a:txBody>
-                  <a:tcPr marL="3839" marR="3839" marT="3839" marB="0" anchor="ctr"/>
-                </a:tc>
-                <a:extLst>
-                  <a:ext uri="{0D108BD9-81ED-4DB2-BD59-A6C34878D82A}">
-                    <a16:rowId xmlns:a16="http://schemas.microsoft.com/office/drawing/2014/main" val="2061999342"/>
-                  </a:ext>
-                </a:extLst>
-              </a:tr>
-              <a:tr h="464508">
-                <a:tc>
-                  <a:txBody>
-                    <a:bodyPr/>
-                    <a:lstStyle/>
-                    <a:p>
-                      <a:pPr algn="l" fontAlgn="ctr"/>
-                      <a:r>
-                        <a:rPr lang="zh-CN" altLang="en-US" sz="1200" u="none" strike="noStrike" dirty="0">
-                          <a:effectLst/>
-                        </a:rPr>
-                        <a:t>手刀点（后溪穴）</a:t>
-                      </a:r>
-                      <a:endParaRPr lang="zh-CN" altLang="en-US" sz="1200" b="0" i="0" u="none" strike="noStrike" dirty="0">
-                        <a:solidFill>
-                          <a:srgbClr val="333333"/>
-                        </a:solidFill>
-                        <a:effectLst/>
-                        <a:latin typeface="Arial" panose="020B0604020202020204" pitchFamily="34" charset="0"/>
-                        <a:ea typeface="等线" panose="02010600030101010101" pitchFamily="2" charset="-122"/>
-                      </a:endParaRPr>
-                    </a:p>
-                  </a:txBody>
-                  <a:tcPr marL="3839" marR="3839" marT="3839" marB="0" anchor="ctr"/>
-                </a:tc>
-                <a:tc>
-                  <a:txBody>
-                    <a:bodyPr/>
-                    <a:lstStyle/>
-                    <a:p>
-                      <a:pPr algn="l" fontAlgn="ctr"/>
-                      <a:r>
-                        <a:rPr lang="zh-CN" altLang="en-US" sz="1200" b="0" i="0" u="none" strike="noStrike" dirty="0" smtClean="0">
-                          <a:solidFill>
-                            <a:srgbClr val="333333"/>
-                          </a:solidFill>
-                          <a:effectLst/>
-                          <a:latin typeface="Arial" panose="020B0604020202020204" pitchFamily="34" charset="0"/>
-                          <a:ea typeface="等线" panose="02010600030101010101" pitchFamily="2" charset="-122"/>
-                        </a:rPr>
-                        <a:t>手太阳小肠经</a:t>
-                      </a:r>
-                      <a:endParaRPr lang="zh-CN" altLang="en-US" sz="1200" b="0" i="0" u="none" strike="noStrike" dirty="0">
-                        <a:solidFill>
-                          <a:srgbClr val="333333"/>
-                        </a:solidFill>
-                        <a:effectLst/>
-                        <a:latin typeface="Arial" panose="020B0604020202020204" pitchFamily="34" charset="0"/>
-                        <a:ea typeface="等线" panose="02010600030101010101" pitchFamily="2" charset="-122"/>
-                      </a:endParaRPr>
-                    </a:p>
-                  </a:txBody>
-                  <a:tcPr marL="3839" marR="3839" marT="3839" marB="0" anchor="ctr"/>
-                </a:tc>
-                <a:tc>
-                  <a:txBody>
-                    <a:bodyPr/>
-                    <a:lstStyle/>
-                    <a:p>
-                      <a:pPr algn="l" fontAlgn="ctr"/>
-                      <a:r>
-                        <a:rPr lang="zh-CN" altLang="en-US" sz="1200" u="none" strike="noStrike" dirty="0">
-                          <a:effectLst/>
-                        </a:rPr>
-                        <a:t>手刀点常用于建立心理安全感，缓解初始焦虑与抑郁情绪</a:t>
-                      </a:r>
-                      <a:r>
-                        <a:rPr lang="zh-CN" altLang="en-US" sz="1200" u="none" strike="noStrike" dirty="0" smtClean="0">
-                          <a:effectLst/>
-                        </a:rPr>
-                        <a:t>。风格</a:t>
-                      </a:r>
-                      <a:r>
-                        <a:rPr lang="zh-CN" altLang="en-US" sz="1200" u="none" strike="noStrike" dirty="0">
-                          <a:effectLst/>
-                        </a:rPr>
-                        <a:t>舒缓无强烈波动，适合敲击起始阶段平复心绪；羽调式音乐对应肾脏，可缓解恐惧等负面情绪</a:t>
-                      </a:r>
-                      <a:r>
-                        <a:rPr lang="zh-CN" altLang="en-US" sz="1200" u="none" strike="noStrike" dirty="0" smtClean="0">
-                          <a:effectLst/>
-                        </a:rPr>
-                        <a:t>，能</a:t>
-                      </a:r>
-                      <a:r>
-                        <a:rPr lang="zh-CN" altLang="en-US" sz="1200" u="none" strike="noStrike" dirty="0">
-                          <a:effectLst/>
-                        </a:rPr>
-                        <a:t>辅助该穴位泄心火、疏抑郁的作用。</a:t>
-                      </a:r>
-                      <a:endParaRPr lang="zh-CN" altLang="en-US" sz="1200" b="0" i="0" u="none" strike="noStrike" dirty="0">
-                        <a:solidFill>
-                          <a:srgbClr val="333333"/>
-                        </a:solidFill>
-                        <a:effectLst/>
-                        <a:latin typeface="Arial" panose="020B0604020202020204" pitchFamily="34" charset="0"/>
-                        <a:ea typeface="等线" panose="02010600030101010101" pitchFamily="2" charset="-122"/>
-                      </a:endParaRPr>
-                    </a:p>
-                  </a:txBody>
-                  <a:tcPr marL="3839" marR="3839" marT="3839" marB="0" anchor="ctr"/>
-                </a:tc>
-                <a:extLst>
-                  <a:ext uri="{0D108BD9-81ED-4DB2-BD59-A6C34878D82A}">
-                    <a16:rowId xmlns:a16="http://schemas.microsoft.com/office/drawing/2014/main" val="1994296052"/>
-                  </a:ext>
-                </a:extLst>
-              </a:tr>
-              <a:tr h="433797">
-                <a:tc>
-                  <a:txBody>
-                    <a:bodyPr/>
-                    <a:lstStyle/>
-                    <a:p>
-                      <a:pPr algn="l" fontAlgn="ctr"/>
-                      <a:r>
-                        <a:rPr lang="zh-CN" altLang="en-US" sz="1200" b="0" i="0" u="none" strike="noStrike" smtClean="0">
-                          <a:solidFill>
-                            <a:srgbClr val="333333"/>
-                          </a:solidFill>
-                          <a:effectLst/>
-                          <a:latin typeface="Arial" panose="020B0604020202020204" pitchFamily="34" charset="0"/>
-                          <a:ea typeface="等线" panose="02010600030101010101" pitchFamily="2" charset="-122"/>
-                        </a:rPr>
-                        <a:t>手腕内侧（内关穴）</a:t>
-                      </a:r>
-                      <a:endParaRPr lang="zh-CN" altLang="en-US" sz="1200" b="0" i="0" u="none" strike="noStrike" dirty="0">
-                        <a:solidFill>
-                          <a:srgbClr val="333333"/>
-                        </a:solidFill>
-                        <a:effectLst/>
-                        <a:latin typeface="Arial" panose="020B0604020202020204" pitchFamily="34" charset="0"/>
-                        <a:ea typeface="等线" panose="02010600030101010101" pitchFamily="2" charset="-122"/>
-                      </a:endParaRPr>
-                    </a:p>
-                  </a:txBody>
-                  <a:tcPr marL="3839" marR="3839" marT="3839" marB="0" anchor="ctr"/>
-                </a:tc>
-                <a:tc>
-                  <a:txBody>
-                    <a:bodyPr/>
-                    <a:lstStyle/>
-                    <a:p>
-                      <a:pPr marL="0" marR="0" lvl="0" indent="0" algn="l" defTabSz="914400" rtl="0" eaLnBrk="1" fontAlgn="ctr" latinLnBrk="0" hangingPunct="1">
-                        <a:lnSpc>
-                          <a:spcPct val="100000"/>
-                        </a:lnSpc>
-                        <a:spcBef>
-                          <a:spcPts val="0"/>
-                        </a:spcBef>
-                        <a:spcAft>
-                          <a:spcPts val="0"/>
-                        </a:spcAft>
-                        <a:buClrTx/>
-                        <a:buSzTx/>
-                        <a:buFontTx/>
-                        <a:buNone/>
-                        <a:tabLst/>
-                        <a:defRPr/>
-                      </a:pPr>
-                      <a:r>
-                        <a:rPr lang="zh-CN" altLang="en-US" sz="1200" b="0" i="0" u="none" strike="noStrike" dirty="0" smtClean="0">
-                          <a:solidFill>
-                            <a:srgbClr val="333333"/>
-                          </a:solidFill>
-                          <a:effectLst/>
-                          <a:latin typeface="Arial" panose="020B0604020202020204" pitchFamily="34" charset="0"/>
-                          <a:ea typeface="等线" panose="02010600030101010101" pitchFamily="2" charset="-122"/>
-                        </a:rPr>
-                        <a:t>手厥阴心包经</a:t>
-                      </a:r>
-                    </a:p>
-                  </a:txBody>
-                  <a:tcPr marL="3839" marR="3839" marT="3839" marB="0" anchor="ctr"/>
-                </a:tc>
-                <a:tc>
-                  <a:txBody>
-                    <a:bodyPr/>
-                    <a:lstStyle/>
-                    <a:p>
-                      <a:pPr algn="l" fontAlgn="ctr"/>
-                      <a:endParaRPr lang="zh-CN" altLang="en-US" sz="1200" b="0" i="0" u="none" strike="noStrike" dirty="0">
-                        <a:solidFill>
-                          <a:srgbClr val="333333"/>
-                        </a:solidFill>
-                        <a:effectLst/>
-                        <a:latin typeface="Arial" panose="020B0604020202020204" pitchFamily="34" charset="0"/>
-                        <a:ea typeface="等线" panose="02010600030101010101" pitchFamily="2" charset="-122"/>
-                      </a:endParaRPr>
-                    </a:p>
-                  </a:txBody>
-                  <a:tcPr marL="3839" marR="3839" marT="3839" marB="0" anchor="ctr"/>
-                </a:tc>
-                <a:extLst>
-                  <a:ext uri="{0D108BD9-81ED-4DB2-BD59-A6C34878D82A}">
-                    <a16:rowId xmlns:a16="http://schemas.microsoft.com/office/drawing/2014/main" val="1579610272"/>
-                  </a:ext>
-                </a:extLst>
-              </a:tr>
-              <a:tr h="433797">
-                <a:tc>
-                  <a:txBody>
-                    <a:bodyPr/>
-                    <a:lstStyle/>
-                    <a:p>
-                      <a:pPr algn="l" fontAlgn="ctr"/>
-                      <a:r>
-                        <a:rPr lang="zh-CN" altLang="en-US" sz="1200" u="none" strike="noStrike" dirty="0">
-                          <a:effectLst/>
-                        </a:rPr>
-                        <a:t>眉头（攒竹穴）</a:t>
-                      </a:r>
-                      <a:endParaRPr lang="zh-CN" altLang="en-US" sz="1200" b="0" i="0" u="none" strike="noStrike" dirty="0">
-                        <a:solidFill>
-                          <a:srgbClr val="333333"/>
-                        </a:solidFill>
-                        <a:effectLst/>
-                        <a:latin typeface="Arial" panose="020B0604020202020204" pitchFamily="34" charset="0"/>
-                        <a:ea typeface="等线" panose="02010600030101010101" pitchFamily="2" charset="-122"/>
-                      </a:endParaRPr>
-                    </a:p>
-                  </a:txBody>
-                  <a:tcPr marL="3839" marR="3839" marT="3839" marB="0" anchor="ctr"/>
-                </a:tc>
-                <a:tc>
-                  <a:txBody>
-                    <a:bodyPr/>
-                    <a:lstStyle/>
-                    <a:p>
-                      <a:pPr algn="l" fontAlgn="ctr"/>
-                      <a:r>
-                        <a:rPr lang="zh-CN" altLang="en-US" sz="1200" b="0" i="0" u="none" strike="noStrike" dirty="0" smtClean="0">
-                          <a:solidFill>
-                            <a:srgbClr val="333333"/>
-                          </a:solidFill>
-                          <a:effectLst/>
-                          <a:latin typeface="Arial" panose="020B0604020202020204" pitchFamily="34" charset="0"/>
-                          <a:ea typeface="等线" panose="02010600030101010101" pitchFamily="2" charset="-122"/>
-                        </a:rPr>
-                        <a:t>足太阳膀胱经</a:t>
-                      </a:r>
-                      <a:endParaRPr lang="zh-CN" altLang="en-US" sz="1200" b="0" i="0" u="none" strike="noStrike" dirty="0">
-                        <a:solidFill>
-                          <a:srgbClr val="333333"/>
-                        </a:solidFill>
-                        <a:effectLst/>
-                        <a:latin typeface="Arial" panose="020B0604020202020204" pitchFamily="34" charset="0"/>
-                        <a:ea typeface="等线" panose="02010600030101010101" pitchFamily="2" charset="-122"/>
-                      </a:endParaRPr>
-                    </a:p>
-                  </a:txBody>
-                  <a:tcPr marL="3839" marR="3839" marT="3839" marB="0" anchor="ctr"/>
-                </a:tc>
-                <a:tc>
-                  <a:txBody>
-                    <a:bodyPr/>
-                    <a:lstStyle/>
-                    <a:p>
-                      <a:pPr algn="l" fontAlgn="ctr"/>
-                      <a:r>
-                        <a:rPr lang="zh-CN" altLang="en-US" sz="1200" u="none" strike="noStrike" dirty="0">
-                          <a:effectLst/>
-                        </a:rPr>
-                        <a:t>此穴位核心缓解焦虑与烦躁情绪。中医中角调对应肝脏，可疏肝理气、缓解情绪紧绷</a:t>
-                      </a:r>
-                      <a:r>
-                        <a:rPr lang="zh-CN" altLang="en-US" sz="1200" u="none" strike="noStrike" dirty="0" smtClean="0">
-                          <a:effectLst/>
-                        </a:rPr>
-                        <a:t>，角</a:t>
-                      </a:r>
-                      <a:r>
-                        <a:rPr lang="zh-CN" altLang="en-US" sz="1200" u="none" strike="noStrike" dirty="0">
-                          <a:effectLst/>
-                        </a:rPr>
-                        <a:t>调式</a:t>
-                      </a:r>
-                      <a:r>
-                        <a:rPr lang="zh-CN" altLang="en-US" sz="1200" u="none" strike="noStrike" dirty="0" smtClean="0">
-                          <a:effectLst/>
-                        </a:rPr>
-                        <a:t>音乐能</a:t>
-                      </a:r>
-                      <a:r>
-                        <a:rPr lang="zh-CN" altLang="en-US" sz="1200" u="none" strike="noStrike" dirty="0">
-                          <a:effectLst/>
-                        </a:rPr>
-                        <a:t>契合该穴位舒缓焦虑、平复烦躁的需求。</a:t>
-                      </a:r>
-                      <a:endParaRPr lang="zh-CN" altLang="en-US" sz="1200" b="0" i="0" u="none" strike="noStrike" dirty="0">
-                        <a:solidFill>
-                          <a:srgbClr val="333333"/>
-                        </a:solidFill>
-                        <a:effectLst/>
-                        <a:latin typeface="Arial" panose="020B0604020202020204" pitchFamily="34" charset="0"/>
-                        <a:ea typeface="等线" panose="02010600030101010101" pitchFamily="2" charset="-122"/>
-                      </a:endParaRPr>
-                    </a:p>
-                  </a:txBody>
-                  <a:tcPr marL="3839" marR="3839" marT="3839" marB="0" anchor="ctr"/>
-                </a:tc>
-                <a:extLst>
-                  <a:ext uri="{0D108BD9-81ED-4DB2-BD59-A6C34878D82A}">
-                    <a16:rowId xmlns:a16="http://schemas.microsoft.com/office/drawing/2014/main" val="3311110419"/>
-                  </a:ext>
-                </a:extLst>
-              </a:tr>
-              <a:tr h="433797">
-                <a:tc>
-                  <a:txBody>
-                    <a:bodyPr/>
-                    <a:lstStyle/>
-                    <a:p>
-                      <a:pPr algn="l" fontAlgn="ctr"/>
-                      <a:r>
-                        <a:rPr lang="zh-CN" altLang="en-US" sz="1200" u="none" strike="noStrike">
-                          <a:effectLst/>
-                        </a:rPr>
-                        <a:t>眼尾（瞳子髎穴）</a:t>
-                      </a:r>
-                      <a:endParaRPr lang="zh-CN" altLang="en-US" sz="1200" b="0" i="0" u="none" strike="noStrike">
-                        <a:solidFill>
-                          <a:srgbClr val="333333"/>
-                        </a:solidFill>
-                        <a:effectLst/>
-                        <a:latin typeface="Arial" panose="020B0604020202020204" pitchFamily="34" charset="0"/>
-                        <a:ea typeface="等线" panose="02010600030101010101" pitchFamily="2" charset="-122"/>
-                      </a:endParaRPr>
-                    </a:p>
-                  </a:txBody>
-                  <a:tcPr marL="3839" marR="3839" marT="3839" marB="0" anchor="ctr"/>
-                </a:tc>
-                <a:tc>
-                  <a:txBody>
-                    <a:bodyPr/>
-                    <a:lstStyle/>
-                    <a:p>
-                      <a:pPr algn="l" fontAlgn="ctr"/>
-                      <a:endParaRPr lang="zh-CN" altLang="en-US" sz="1200" b="0" i="0" u="none" strike="noStrike" dirty="0">
-                        <a:solidFill>
-                          <a:srgbClr val="333333"/>
-                        </a:solidFill>
-                        <a:effectLst/>
-                        <a:latin typeface="Arial" panose="020B0604020202020204" pitchFamily="34" charset="0"/>
-                        <a:ea typeface="等线" panose="02010600030101010101" pitchFamily="2" charset="-122"/>
-                      </a:endParaRPr>
-                    </a:p>
-                  </a:txBody>
-                  <a:tcPr marL="3839" marR="3839" marT="3839" marB="0" anchor="ctr"/>
-                </a:tc>
-                <a:tc>
-                  <a:txBody>
-                    <a:bodyPr/>
-                    <a:lstStyle/>
-                    <a:p>
-                      <a:pPr algn="l" fontAlgn="ctr"/>
-                      <a:r>
-                        <a:rPr lang="zh-CN" altLang="en-US" sz="1200" u="none" strike="noStrike" dirty="0">
-                          <a:effectLst/>
-                        </a:rPr>
-                        <a:t>该穴位主打缓解紧张情绪</a:t>
-                      </a:r>
-                      <a:r>
-                        <a:rPr lang="zh-CN" altLang="en-US" sz="1200" u="none" strike="noStrike" dirty="0" smtClean="0">
-                          <a:effectLst/>
-                        </a:rPr>
-                        <a:t>。主题</a:t>
-                      </a:r>
-                      <a:r>
-                        <a:rPr lang="zh-CN" altLang="en-US" sz="1200" u="none" strike="noStrike" dirty="0">
-                          <a:effectLst/>
-                        </a:rPr>
-                        <a:t>音乐多为轻柔器乐，能避免刺激眼部感官，适配眼尾穴位的敏感特性；商调式对应肺，节奏明快清越</a:t>
-                      </a:r>
-                      <a:r>
-                        <a:rPr lang="zh-CN" altLang="en-US" sz="1200" u="none" strike="noStrike" dirty="0" smtClean="0">
-                          <a:effectLst/>
-                        </a:rPr>
-                        <a:t>，可</a:t>
-                      </a:r>
-                      <a:r>
-                        <a:rPr lang="zh-CN" altLang="en-US" sz="1200" u="none" strike="noStrike" dirty="0">
-                          <a:effectLst/>
-                        </a:rPr>
-                        <a:t>辅助调节神经，配合敲击缓解紧张，同时弱化眼部周围的不适感。</a:t>
-                      </a:r>
-                      <a:endParaRPr lang="zh-CN" altLang="en-US" sz="1200" b="0" i="0" u="none" strike="noStrike" dirty="0">
-                        <a:solidFill>
-                          <a:srgbClr val="333333"/>
-                        </a:solidFill>
-                        <a:effectLst/>
-                        <a:latin typeface="Arial" panose="020B0604020202020204" pitchFamily="34" charset="0"/>
-                        <a:ea typeface="等线" panose="02010600030101010101" pitchFamily="2" charset="-122"/>
-                      </a:endParaRPr>
-                    </a:p>
-                  </a:txBody>
-                  <a:tcPr marL="3839" marR="3839" marT="3839" marB="0" anchor="ctr"/>
-                </a:tc>
-                <a:extLst>
-                  <a:ext uri="{0D108BD9-81ED-4DB2-BD59-A6C34878D82A}">
-                    <a16:rowId xmlns:a16="http://schemas.microsoft.com/office/drawing/2014/main" val="603465208"/>
-                  </a:ext>
-                </a:extLst>
-              </a:tr>
-              <a:tr h="464508">
-                <a:tc>
-                  <a:txBody>
-                    <a:bodyPr/>
-                    <a:lstStyle/>
-                    <a:p>
-                      <a:pPr algn="l" fontAlgn="ctr"/>
-                      <a:r>
-                        <a:rPr lang="zh-CN" altLang="en-US" sz="1200" u="none" strike="noStrike">
-                          <a:effectLst/>
-                        </a:rPr>
-                        <a:t>眼下（承泣穴）</a:t>
-                      </a:r>
-                      <a:endParaRPr lang="zh-CN" altLang="en-US" sz="1200" b="0" i="0" u="none" strike="noStrike">
-                        <a:solidFill>
-                          <a:srgbClr val="333333"/>
-                        </a:solidFill>
-                        <a:effectLst/>
-                        <a:latin typeface="Arial" panose="020B0604020202020204" pitchFamily="34" charset="0"/>
-                        <a:ea typeface="等线" panose="02010600030101010101" pitchFamily="2" charset="-122"/>
-                      </a:endParaRPr>
-                    </a:p>
-                  </a:txBody>
-                  <a:tcPr marL="3839" marR="3839" marT="3839" marB="0" anchor="ctr"/>
-                </a:tc>
-                <a:tc>
-                  <a:txBody>
-                    <a:bodyPr/>
-                    <a:lstStyle/>
-                    <a:p>
-                      <a:pPr algn="l" fontAlgn="ctr"/>
-                      <a:endParaRPr lang="zh-CN" altLang="en-US" sz="1200" b="0" i="0" u="none" strike="noStrike" dirty="0">
-                        <a:solidFill>
-                          <a:srgbClr val="333333"/>
-                        </a:solidFill>
-                        <a:effectLst/>
-                        <a:latin typeface="Arial" panose="020B0604020202020204" pitchFamily="34" charset="0"/>
-                        <a:ea typeface="等线" panose="02010600030101010101" pitchFamily="2" charset="-122"/>
-                      </a:endParaRPr>
-                    </a:p>
-                  </a:txBody>
-                  <a:tcPr marL="3839" marR="3839" marT="3839" marB="0" anchor="ctr"/>
-                </a:tc>
-                <a:tc>
-                  <a:txBody>
-                    <a:bodyPr/>
-                    <a:lstStyle/>
-                    <a:p>
-                      <a:pPr algn="l" fontAlgn="ctr"/>
-                      <a:r>
-                        <a:rPr lang="zh-CN" altLang="en-US" sz="1200" u="none" strike="noStrike" dirty="0">
-                          <a:effectLst/>
-                        </a:rPr>
-                        <a:t>该穴位常用来缓解悲伤与忧郁。徵音对应心脏，能养心安神</a:t>
-                      </a:r>
-                      <a:r>
-                        <a:rPr lang="zh-CN" altLang="en-US" sz="1200" u="none" strike="noStrike" dirty="0" smtClean="0">
-                          <a:effectLst/>
-                        </a:rPr>
-                        <a:t>，经典</a:t>
-                      </a:r>
-                      <a:r>
-                        <a:rPr lang="zh-CN" altLang="en-US" sz="1200" u="none" strike="noStrike" dirty="0">
-                          <a:effectLst/>
-                        </a:rPr>
-                        <a:t>徵调</a:t>
-                      </a:r>
-                      <a:r>
-                        <a:rPr lang="zh-CN" altLang="en-US" sz="1200" u="none" strike="noStrike" dirty="0" smtClean="0">
-                          <a:effectLst/>
-                        </a:rPr>
-                        <a:t>曲可</a:t>
-                      </a:r>
-                      <a:r>
-                        <a:rPr lang="zh-CN" altLang="en-US" sz="1200" u="none" strike="noStrike" dirty="0">
-                          <a:effectLst/>
-                        </a:rPr>
-                        <a:t>辅助疏导悲伤情绪，契合穴位的情绪功能</a:t>
-                      </a:r>
-                      <a:r>
-                        <a:rPr lang="zh-CN" altLang="en-US" sz="1200" u="none" strike="noStrike" dirty="0" smtClean="0">
-                          <a:effectLst/>
-                        </a:rPr>
-                        <a:t>；轻柔</a:t>
-                      </a:r>
-                      <a:r>
-                        <a:rPr lang="zh-CN" altLang="en-US" sz="1200" u="none" strike="noStrike" dirty="0">
-                          <a:effectLst/>
-                        </a:rPr>
-                        <a:t>钢琴曲无突兀旋律，既能安抚情绪，也能搭配该穴位缓解眼部疲劳的躯体作用。</a:t>
-                      </a:r>
-                      <a:endParaRPr lang="zh-CN" altLang="en-US" sz="1200" b="0" i="0" u="none" strike="noStrike" dirty="0">
-                        <a:solidFill>
-                          <a:srgbClr val="333333"/>
-                        </a:solidFill>
-                        <a:effectLst/>
-                        <a:latin typeface="Arial" panose="020B0604020202020204" pitchFamily="34" charset="0"/>
-                        <a:ea typeface="等线" panose="02010600030101010101" pitchFamily="2" charset="-122"/>
-                      </a:endParaRPr>
-                    </a:p>
-                  </a:txBody>
-                  <a:tcPr marL="3839" marR="3839" marT="3839" marB="0" anchor="ctr"/>
-                </a:tc>
-                <a:extLst>
-                  <a:ext uri="{0D108BD9-81ED-4DB2-BD59-A6C34878D82A}">
-                    <a16:rowId xmlns:a16="http://schemas.microsoft.com/office/drawing/2014/main" val="3963269176"/>
-                  </a:ext>
-                </a:extLst>
-              </a:tr>
-              <a:tr h="464508">
-                <a:tc>
-                  <a:txBody>
-                    <a:bodyPr/>
-                    <a:lstStyle/>
-                    <a:p>
-                      <a:pPr algn="l" fontAlgn="ctr"/>
-                      <a:r>
-                        <a:rPr lang="zh-CN" altLang="en-US" sz="1200" u="none" strike="noStrike">
-                          <a:effectLst/>
-                        </a:rPr>
-                        <a:t>人中（水沟穴）</a:t>
-                      </a:r>
-                      <a:endParaRPr lang="zh-CN" altLang="en-US" sz="1200" b="0" i="0" u="none" strike="noStrike">
-                        <a:solidFill>
-                          <a:srgbClr val="333333"/>
-                        </a:solidFill>
-                        <a:effectLst/>
-                        <a:latin typeface="Arial" panose="020B0604020202020204" pitchFamily="34" charset="0"/>
-                        <a:ea typeface="等线" panose="02010600030101010101" pitchFamily="2" charset="-122"/>
-                      </a:endParaRPr>
-                    </a:p>
-                  </a:txBody>
-                  <a:tcPr marL="3839" marR="3839" marT="3839" marB="0" anchor="ctr"/>
-                </a:tc>
-                <a:tc>
-                  <a:txBody>
-                    <a:bodyPr/>
-                    <a:lstStyle/>
-                    <a:p>
-                      <a:pPr algn="l" fontAlgn="ctr"/>
-                      <a:endParaRPr lang="zh-CN" altLang="en-US" sz="1200" b="0" i="0" u="none" strike="noStrike" dirty="0">
-                        <a:solidFill>
-                          <a:srgbClr val="333333"/>
-                        </a:solidFill>
-                        <a:effectLst/>
-                        <a:latin typeface="Arial" panose="020B0604020202020204" pitchFamily="34" charset="0"/>
-                        <a:ea typeface="等线" panose="02010600030101010101" pitchFamily="2" charset="-122"/>
-                      </a:endParaRPr>
-                    </a:p>
-                  </a:txBody>
-                  <a:tcPr marL="3839" marR="3839" marT="3839" marB="0" anchor="ctr"/>
-                </a:tc>
-                <a:tc>
-                  <a:txBody>
-                    <a:bodyPr/>
-                    <a:lstStyle/>
-                    <a:p>
-                      <a:pPr algn="l" fontAlgn="ctr"/>
-                      <a:r>
-                        <a:rPr lang="zh-CN" altLang="en-US" sz="1200" u="none" strike="noStrike" dirty="0">
-                          <a:effectLst/>
-                        </a:rPr>
-                        <a:t>人中穴多用于情绪激动时醒脑、调节呼吸</a:t>
-                      </a:r>
-                      <a:r>
-                        <a:rPr lang="zh-CN" altLang="en-US" sz="1200" u="none" strike="noStrike" dirty="0" smtClean="0">
-                          <a:effectLst/>
-                        </a:rPr>
-                        <a:t>。羽</a:t>
-                      </a:r>
-                      <a:r>
-                        <a:rPr lang="zh-CN" altLang="en-US" sz="1200" u="none" strike="noStrike" dirty="0">
-                          <a:effectLst/>
-                        </a:rPr>
-                        <a:t>调式</a:t>
-                      </a:r>
-                      <a:r>
-                        <a:rPr lang="zh-CN" altLang="en-US" sz="1200" u="none" strike="noStrike" dirty="0" smtClean="0">
-                          <a:effectLst/>
-                        </a:rPr>
-                        <a:t>音乐音色</a:t>
-                      </a:r>
-                      <a:r>
-                        <a:rPr lang="zh-CN" altLang="en-US" sz="1200" u="none" strike="noStrike" dirty="0">
-                          <a:effectLst/>
-                        </a:rPr>
-                        <a:t>低沉柔和，可引导呼吸平稳，缓解急促呼吸带来的窒息感；箫曲的悠远</a:t>
-                      </a:r>
-                      <a:r>
-                        <a:rPr lang="zh-CN" altLang="en-US" sz="1200" u="none" strike="noStrike" dirty="0" smtClean="0">
-                          <a:effectLst/>
-                        </a:rPr>
-                        <a:t>意境，</a:t>
-                      </a:r>
-                      <a:r>
-                        <a:rPr lang="zh-CN" altLang="en-US" sz="1200" u="none" strike="noStrike" dirty="0">
-                          <a:effectLst/>
-                        </a:rPr>
-                        <a:t>能让呼吸节奏与旋律同步，配合敲击帮助平复激动情绪。</a:t>
-                      </a:r>
-                      <a:endParaRPr lang="zh-CN" altLang="en-US" sz="1200" b="0" i="0" u="none" strike="noStrike" dirty="0">
-                        <a:solidFill>
-                          <a:srgbClr val="333333"/>
-                        </a:solidFill>
-                        <a:effectLst/>
-                        <a:latin typeface="Arial" panose="020B0604020202020204" pitchFamily="34" charset="0"/>
-                        <a:ea typeface="等线" panose="02010600030101010101" pitchFamily="2" charset="-122"/>
-                      </a:endParaRPr>
-                    </a:p>
-                  </a:txBody>
-                  <a:tcPr marL="3839" marR="3839" marT="3839" marB="0" anchor="ctr"/>
-                </a:tc>
-                <a:extLst>
-                  <a:ext uri="{0D108BD9-81ED-4DB2-BD59-A6C34878D82A}">
-                    <a16:rowId xmlns:a16="http://schemas.microsoft.com/office/drawing/2014/main" val="1076230948"/>
-                  </a:ext>
-                </a:extLst>
-              </a:tr>
-              <a:tr h="464508">
-                <a:tc>
-                  <a:txBody>
-                    <a:bodyPr/>
-                    <a:lstStyle/>
-                    <a:p>
-                      <a:pPr algn="l" fontAlgn="ctr"/>
-                      <a:r>
-                        <a:rPr lang="zh-CN" altLang="en-US" sz="1200" u="none" strike="noStrike">
-                          <a:effectLst/>
-                        </a:rPr>
-                        <a:t>下巴（承浆穴）</a:t>
-                      </a:r>
-                      <a:endParaRPr lang="zh-CN" altLang="en-US" sz="1200" b="0" i="0" u="none" strike="noStrike">
-                        <a:solidFill>
-                          <a:srgbClr val="333333"/>
-                        </a:solidFill>
-                        <a:effectLst/>
-                        <a:latin typeface="Arial" panose="020B0604020202020204" pitchFamily="34" charset="0"/>
-                        <a:ea typeface="等线" panose="02010600030101010101" pitchFamily="2" charset="-122"/>
-                      </a:endParaRPr>
-                    </a:p>
-                  </a:txBody>
-                  <a:tcPr marL="3839" marR="3839" marT="3839" marB="0" anchor="ctr"/>
-                </a:tc>
-                <a:tc>
-                  <a:txBody>
-                    <a:bodyPr/>
-                    <a:lstStyle/>
-                    <a:p>
-                      <a:pPr algn="l" fontAlgn="ctr"/>
-                      <a:endParaRPr lang="zh-CN" altLang="en-US" sz="1200" b="0" i="0" u="none" strike="noStrike" dirty="0">
-                        <a:solidFill>
-                          <a:srgbClr val="333333"/>
-                        </a:solidFill>
-                        <a:effectLst/>
-                        <a:latin typeface="Arial" panose="020B0604020202020204" pitchFamily="34" charset="0"/>
-                        <a:ea typeface="等线" panose="02010600030101010101" pitchFamily="2" charset="-122"/>
-                      </a:endParaRPr>
-                    </a:p>
-                  </a:txBody>
-                  <a:tcPr marL="3839" marR="3839" marT="3839" marB="0" anchor="ctr"/>
-                </a:tc>
-                <a:tc>
-                  <a:txBody>
-                    <a:bodyPr/>
-                    <a:lstStyle/>
-                    <a:p>
-                      <a:pPr algn="l" fontAlgn="ctr"/>
-                      <a:r>
-                        <a:rPr lang="zh-CN" altLang="en-US" sz="1200" u="none" strike="noStrike" dirty="0">
-                          <a:effectLst/>
-                        </a:rPr>
-                        <a:t>该穴位可化解情绪紧绷，缓解颞下颌关节压力。宫调对应脾脏，旋律浑厚庄重，能缓解思虑过度</a:t>
-                      </a:r>
-                      <a:r>
-                        <a:rPr lang="zh-CN" altLang="en-US" sz="1200" u="none" strike="noStrike" dirty="0" smtClean="0">
-                          <a:effectLst/>
-                        </a:rPr>
-                        <a:t>，宫调曲可</a:t>
-                      </a:r>
-                      <a:r>
-                        <a:rPr lang="zh-CN" altLang="en-US" sz="1200" u="none" strike="noStrike" dirty="0">
-                          <a:effectLst/>
-                        </a:rPr>
-                        <a:t>辅助放松面部肌肉，配合敲击减轻因情绪紧绷导致的下颌不适；</a:t>
-                      </a:r>
-                      <a:r>
-                        <a:rPr lang="zh-CN" altLang="en-US" sz="1200" u="none" strike="noStrike" dirty="0" smtClean="0">
-                          <a:effectLst/>
-                        </a:rPr>
-                        <a:t>同时音乐</a:t>
-                      </a:r>
-                      <a:r>
-                        <a:rPr lang="zh-CN" altLang="en-US" sz="1200" u="none" strike="noStrike" dirty="0">
-                          <a:effectLst/>
-                        </a:rPr>
-                        <a:t>节奏平稳，</a:t>
-                      </a:r>
-                      <a:r>
-                        <a:rPr lang="zh-CN" altLang="en-US" sz="1200" u="none" strike="noStrike" dirty="0" smtClean="0">
-                          <a:effectLst/>
-                        </a:rPr>
-                        <a:t>契合“</a:t>
-                      </a:r>
-                      <a:r>
-                        <a:rPr lang="zh-CN" altLang="en-US" sz="1200" u="none" strike="noStrike" dirty="0">
-                          <a:effectLst/>
-                        </a:rPr>
-                        <a:t>弱化身体不适感” 的音乐选择原则。</a:t>
-                      </a:r>
-                      <a:endParaRPr lang="zh-CN" altLang="en-US" sz="1200" b="0" i="0" u="none" strike="noStrike" dirty="0">
-                        <a:solidFill>
-                          <a:srgbClr val="333333"/>
-                        </a:solidFill>
-                        <a:effectLst/>
-                        <a:latin typeface="Arial" panose="020B0604020202020204" pitchFamily="34" charset="0"/>
-                        <a:ea typeface="等线" panose="02010600030101010101" pitchFamily="2" charset="-122"/>
-                      </a:endParaRPr>
-                    </a:p>
-                  </a:txBody>
-                  <a:tcPr marL="3839" marR="3839" marT="3839" marB="0" anchor="ctr"/>
-                </a:tc>
-                <a:extLst>
-                  <a:ext uri="{0D108BD9-81ED-4DB2-BD59-A6C34878D82A}">
-                    <a16:rowId xmlns:a16="http://schemas.microsoft.com/office/drawing/2014/main" val="3700704300"/>
-                  </a:ext>
-                </a:extLst>
-              </a:tr>
-              <a:tr h="464508">
-                <a:tc>
-                  <a:txBody>
-                    <a:bodyPr/>
-                    <a:lstStyle/>
-                    <a:p>
-                      <a:pPr algn="l" fontAlgn="ctr"/>
-                      <a:r>
-                        <a:rPr lang="zh-CN" altLang="en-US" sz="1200" u="none" strike="noStrike">
-                          <a:effectLst/>
-                        </a:rPr>
-                        <a:t>锁骨下方（俞府穴）</a:t>
-                      </a:r>
-                      <a:endParaRPr lang="zh-CN" altLang="en-US" sz="1200" b="0" i="0" u="none" strike="noStrike">
-                        <a:solidFill>
-                          <a:srgbClr val="333333"/>
-                        </a:solidFill>
-                        <a:effectLst/>
-                        <a:latin typeface="Arial" panose="020B0604020202020204" pitchFamily="34" charset="0"/>
-                        <a:ea typeface="等线" panose="02010600030101010101" pitchFamily="2" charset="-122"/>
-                      </a:endParaRPr>
-                    </a:p>
-                  </a:txBody>
-                  <a:tcPr marL="3839" marR="3839" marT="3839" marB="0" anchor="ctr"/>
-                </a:tc>
-                <a:tc>
-                  <a:txBody>
-                    <a:bodyPr/>
-                    <a:lstStyle/>
-                    <a:p>
-                      <a:pPr algn="l" fontAlgn="ctr"/>
-                      <a:endParaRPr lang="zh-CN" altLang="en-US" sz="1200" b="0" i="0" u="none" strike="noStrike" dirty="0">
-                        <a:solidFill>
-                          <a:srgbClr val="333333"/>
-                        </a:solidFill>
-                        <a:effectLst/>
-                        <a:latin typeface="Arial" panose="020B0604020202020204" pitchFamily="34" charset="0"/>
-                        <a:ea typeface="等线" panose="02010600030101010101" pitchFamily="2" charset="-122"/>
-                      </a:endParaRPr>
-                    </a:p>
-                  </a:txBody>
-                  <a:tcPr marL="3839" marR="3839" marT="3839" marB="0" anchor="ctr"/>
-                </a:tc>
-                <a:tc>
-                  <a:txBody>
-                    <a:bodyPr/>
-                    <a:lstStyle/>
-                    <a:p>
-                      <a:pPr algn="l" fontAlgn="ctr"/>
-                      <a:r>
-                        <a:rPr lang="zh-CN" altLang="en-US" sz="1200" u="none" strike="noStrike" dirty="0">
-                          <a:effectLst/>
-                        </a:rPr>
-                        <a:t>此穴位可缓解胸闷气短，释放胸腔积压的情绪</a:t>
-                      </a:r>
-                      <a:r>
-                        <a:rPr lang="zh-CN" altLang="en-US" sz="1200" u="none" strike="noStrike" dirty="0" smtClean="0">
-                          <a:effectLst/>
-                        </a:rPr>
-                        <a:t>。徵</a:t>
-                      </a:r>
-                      <a:r>
-                        <a:rPr lang="zh-CN" altLang="en-US" sz="1200" u="none" strike="noStrike" dirty="0">
-                          <a:effectLst/>
-                        </a:rPr>
-                        <a:t>调式代表曲，热烈明亮，能养心安神，促进胸腔气血循环，适配该穴位疏导胸腔情绪的功能</a:t>
-                      </a:r>
-                      <a:r>
-                        <a:rPr lang="zh-CN" altLang="en-US" sz="1200" u="none" strike="noStrike" dirty="0" smtClean="0">
-                          <a:effectLst/>
-                        </a:rPr>
-                        <a:t>；轻快</a:t>
-                      </a:r>
-                      <a:r>
-                        <a:rPr lang="zh-CN" altLang="en-US" sz="1200" u="none" strike="noStrike" dirty="0">
-                          <a:effectLst/>
-                        </a:rPr>
-                        <a:t>民乐，搭配锁骨下方穴位敲击，</a:t>
-                      </a:r>
-                      <a:r>
-                        <a:rPr lang="zh-CN" altLang="en-US" sz="1200" u="none" strike="noStrike" dirty="0" smtClean="0">
-                          <a:effectLst/>
-                        </a:rPr>
-                        <a:t>帮助缓解</a:t>
-                      </a:r>
-                      <a:r>
-                        <a:rPr lang="zh-CN" altLang="en-US" sz="1200" u="none" strike="noStrike" dirty="0">
-                          <a:effectLst/>
-                        </a:rPr>
-                        <a:t>职场压力带来的胸闷，提升情绪释放效率。</a:t>
-                      </a:r>
-                      <a:endParaRPr lang="zh-CN" altLang="en-US" sz="1200" b="0" i="0" u="none" strike="noStrike" dirty="0">
-                        <a:solidFill>
-                          <a:srgbClr val="333333"/>
-                        </a:solidFill>
-                        <a:effectLst/>
-                        <a:latin typeface="Arial" panose="020B0604020202020204" pitchFamily="34" charset="0"/>
-                        <a:ea typeface="等线" panose="02010600030101010101" pitchFamily="2" charset="-122"/>
-                      </a:endParaRPr>
-                    </a:p>
-                  </a:txBody>
-                  <a:tcPr marL="3839" marR="3839" marT="3839" marB="0" anchor="ctr"/>
-                </a:tc>
-                <a:extLst>
-                  <a:ext uri="{0D108BD9-81ED-4DB2-BD59-A6C34878D82A}">
-                    <a16:rowId xmlns:a16="http://schemas.microsoft.com/office/drawing/2014/main" val="2095075859"/>
-                  </a:ext>
-                </a:extLst>
-              </a:tr>
-              <a:tr h="464508">
-                <a:tc>
-                  <a:txBody>
-                    <a:bodyPr/>
-                    <a:lstStyle/>
-                    <a:p>
-                      <a:pPr algn="l" fontAlgn="ctr"/>
-                      <a:r>
-                        <a:rPr lang="zh-CN" altLang="en-US" sz="1200" u="none" strike="noStrike">
-                          <a:effectLst/>
-                        </a:rPr>
-                        <a:t>腋下（大包穴）</a:t>
-                      </a:r>
-                      <a:endParaRPr lang="zh-CN" altLang="en-US" sz="1200" b="0" i="0" u="none" strike="noStrike">
-                        <a:solidFill>
-                          <a:srgbClr val="333333"/>
-                        </a:solidFill>
-                        <a:effectLst/>
-                        <a:latin typeface="Arial" panose="020B0604020202020204" pitchFamily="34" charset="0"/>
-                        <a:ea typeface="等线" panose="02010600030101010101" pitchFamily="2" charset="-122"/>
-                      </a:endParaRPr>
-                    </a:p>
-                  </a:txBody>
-                  <a:tcPr marL="3839" marR="3839" marT="3839" marB="0" anchor="ctr"/>
-                </a:tc>
-                <a:tc>
-                  <a:txBody>
-                    <a:bodyPr/>
-                    <a:lstStyle/>
-                    <a:p>
-                      <a:pPr algn="l" fontAlgn="ctr"/>
-                      <a:endParaRPr lang="zh-CN" altLang="en-US" sz="1200" b="0" i="0" u="none" strike="noStrike" dirty="0">
-                        <a:solidFill>
-                          <a:srgbClr val="333333"/>
-                        </a:solidFill>
-                        <a:effectLst/>
-                        <a:latin typeface="Arial" panose="020B0604020202020204" pitchFamily="34" charset="0"/>
-                        <a:ea typeface="等线" panose="02010600030101010101" pitchFamily="2" charset="-122"/>
-                      </a:endParaRPr>
-                    </a:p>
-                  </a:txBody>
-                  <a:tcPr marL="3839" marR="3839" marT="3839" marB="0" anchor="ctr"/>
-                </a:tc>
-                <a:tc>
-                  <a:txBody>
-                    <a:bodyPr/>
-                    <a:lstStyle/>
-                    <a:p>
-                      <a:pPr algn="l" fontAlgn="ctr"/>
-                      <a:r>
-                        <a:rPr lang="zh-CN" altLang="en-US" sz="1200" u="none" strike="noStrike" dirty="0">
-                          <a:effectLst/>
-                        </a:rPr>
-                        <a:t>腋下大包穴可疏肝健脾，释放胸腔负面情绪。商调</a:t>
-                      </a:r>
-                      <a:r>
-                        <a:rPr lang="zh-CN" altLang="en-US" sz="1200" u="none" strike="noStrike" dirty="0" smtClean="0">
-                          <a:effectLst/>
-                        </a:rPr>
-                        <a:t>式高亢</a:t>
-                      </a:r>
-                      <a:r>
-                        <a:rPr lang="zh-CN" altLang="en-US" sz="1200" u="none" strike="noStrike" dirty="0">
-                          <a:effectLst/>
-                        </a:rPr>
-                        <a:t>清越，能辅助疏肝理气，配合敲击释放压抑的复杂情绪，契合穴位调节脏腑与情绪的双重作用；这类合奏乐的治愈力</a:t>
-                      </a:r>
-                      <a:r>
-                        <a:rPr lang="zh-CN" altLang="en-US" sz="1200" u="none" strike="noStrike" dirty="0" smtClean="0">
-                          <a:effectLst/>
-                        </a:rPr>
-                        <a:t>与 </a:t>
-                      </a:r>
-                      <a:r>
-                        <a:rPr lang="zh-CN" altLang="en-US" sz="1200" u="none" strike="noStrike" dirty="0">
-                          <a:effectLst/>
-                        </a:rPr>
-                        <a:t>“音乐强化穴位情绪联动” 理念相符，可帮助卸掉猜忌等负面情绪。</a:t>
-                      </a:r>
-                      <a:endParaRPr lang="zh-CN" altLang="en-US" sz="1200" b="0" i="0" u="none" strike="noStrike" dirty="0">
-                        <a:solidFill>
-                          <a:srgbClr val="333333"/>
-                        </a:solidFill>
-                        <a:effectLst/>
-                        <a:latin typeface="Arial" panose="020B0604020202020204" pitchFamily="34" charset="0"/>
-                        <a:ea typeface="等线" panose="02010600030101010101" pitchFamily="2" charset="-122"/>
-                      </a:endParaRPr>
-                    </a:p>
-                  </a:txBody>
-                  <a:tcPr marL="3839" marR="3839" marT="3839" marB="0" anchor="ctr"/>
-                </a:tc>
-                <a:extLst>
-                  <a:ext uri="{0D108BD9-81ED-4DB2-BD59-A6C34878D82A}">
-                    <a16:rowId xmlns:a16="http://schemas.microsoft.com/office/drawing/2014/main" val="3451696052"/>
-                  </a:ext>
-                </a:extLst>
-              </a:tr>
-              <a:tr h="464508">
-                <a:tc>
-                  <a:txBody>
-                    <a:bodyPr/>
-                    <a:lstStyle/>
-                    <a:p>
-                      <a:pPr algn="l" fontAlgn="ctr"/>
-                      <a:r>
-                        <a:rPr lang="zh-CN" altLang="en-US" sz="1200" u="none" strike="noStrike">
-                          <a:effectLst/>
-                        </a:rPr>
-                        <a:t>头顶（百会穴）</a:t>
-                      </a:r>
-                      <a:endParaRPr lang="zh-CN" altLang="en-US" sz="1200" b="0" i="0" u="none" strike="noStrike">
-                        <a:solidFill>
-                          <a:srgbClr val="333333"/>
-                        </a:solidFill>
-                        <a:effectLst/>
-                        <a:latin typeface="Arial" panose="020B0604020202020204" pitchFamily="34" charset="0"/>
-                        <a:ea typeface="等线" panose="02010600030101010101" pitchFamily="2" charset="-122"/>
-                      </a:endParaRPr>
-                    </a:p>
-                  </a:txBody>
-                  <a:tcPr marL="3839" marR="3839" marT="3839" marB="0" anchor="ctr"/>
-                </a:tc>
-                <a:tc>
-                  <a:txBody>
-                    <a:bodyPr/>
-                    <a:lstStyle/>
-                    <a:p>
-                      <a:pPr algn="l" fontAlgn="ctr"/>
-                      <a:endParaRPr lang="zh-CN" altLang="en-US" sz="1200" b="0" i="0" u="none" strike="noStrike" dirty="0">
-                        <a:solidFill>
-                          <a:srgbClr val="333333"/>
-                        </a:solidFill>
-                        <a:effectLst/>
-                        <a:latin typeface="Arial" panose="020B0604020202020204" pitchFamily="34" charset="0"/>
-                        <a:ea typeface="等线" panose="02010600030101010101" pitchFamily="2" charset="-122"/>
-                      </a:endParaRPr>
-                    </a:p>
-                  </a:txBody>
-                  <a:tcPr marL="3839" marR="3839" marT="3839" marB="0" anchor="ctr"/>
-                </a:tc>
-                <a:tc>
-                  <a:txBody>
-                    <a:bodyPr/>
-                    <a:lstStyle/>
-                    <a:p>
-                      <a:pPr algn="l" fontAlgn="ctr"/>
-                      <a:r>
-                        <a:rPr lang="zh-CN" altLang="en-US" sz="1200" u="none" strike="noStrike" dirty="0">
-                          <a:effectLst/>
-                        </a:rPr>
-                        <a:t>百会穴负责平衡整体情绪，释放恐惧，调节大脑功能</a:t>
-                      </a:r>
-                      <a:r>
-                        <a:rPr lang="zh-CN" altLang="en-US" sz="1200" u="none" strike="noStrike" dirty="0" smtClean="0">
-                          <a:effectLst/>
-                        </a:rPr>
-                        <a:t>。选用</a:t>
-                      </a:r>
-                      <a:r>
-                        <a:rPr lang="zh-CN" altLang="en-US" sz="1200" u="none" strike="noStrike" dirty="0">
-                          <a:effectLst/>
-                        </a:rPr>
-                        <a:t>空灵意境的音乐搭配这类核心调节穴位，这类音乐能引导身心能量流通</a:t>
-                      </a:r>
-                      <a:r>
-                        <a:rPr lang="zh-CN" altLang="en-US" sz="1200" u="none" strike="noStrike" dirty="0" smtClean="0">
-                          <a:effectLst/>
-                        </a:rPr>
-                        <a:t>；羽</a:t>
-                      </a:r>
-                      <a:r>
-                        <a:rPr lang="zh-CN" altLang="en-US" sz="1200" u="none" strike="noStrike" dirty="0">
-                          <a:effectLst/>
-                        </a:rPr>
-                        <a:t>调</a:t>
-                      </a:r>
-                      <a:r>
-                        <a:rPr lang="zh-CN" altLang="en-US" sz="1200" u="none" strike="noStrike" dirty="0" smtClean="0">
-                          <a:effectLst/>
-                        </a:rPr>
-                        <a:t>曲可</a:t>
-                      </a:r>
-                      <a:r>
-                        <a:rPr lang="zh-CN" altLang="en-US" sz="1200" u="none" strike="noStrike" dirty="0">
-                          <a:effectLst/>
-                        </a:rPr>
-                        <a:t>补肾固精、缓解恐惧，与百会穴驱散强烈负面情绪、平衡身心的核心作用高度匹配。</a:t>
-                      </a:r>
-                      <a:endParaRPr lang="zh-CN" altLang="en-US" sz="1200" b="0" i="0" u="none" strike="noStrike" dirty="0">
-                        <a:solidFill>
-                          <a:srgbClr val="333333"/>
-                        </a:solidFill>
-                        <a:effectLst/>
-                        <a:latin typeface="Arial" panose="020B0604020202020204" pitchFamily="34" charset="0"/>
-                        <a:ea typeface="等线" panose="02010600030101010101" pitchFamily="2" charset="-122"/>
-                      </a:endParaRPr>
-                    </a:p>
-                  </a:txBody>
-                  <a:tcPr marL="3839" marR="3839" marT="3839" marB="0" anchor="ctr"/>
-                </a:tc>
-                <a:extLst>
-                  <a:ext uri="{0D108BD9-81ED-4DB2-BD59-A6C34878D82A}">
-                    <a16:rowId xmlns:a16="http://schemas.microsoft.com/office/drawing/2014/main" val="3927589382"/>
-                  </a:ext>
-                </a:extLst>
-              </a:tr>
-            </a:tbl>
-          </a:graphicData>
-        </a:graphic>
-      </p:graphicFrame>
+        </p:nvSpPr>
+        <p:spPr>
+          <a:xfrm>
+            <a:off x="521208" y="1988026"/>
+            <a:ext cx="6613194" cy="2448469"/>
+          </a:xfrm>
+        </p:spPr>
+        <p:txBody>
+          <a:bodyPr/>
+          <a:lstStyle/>
+          <a:p>
+            <a:pPr marL="0" indent="0">
+              <a:buNone/>
+            </a:pPr>
+            <a:r>
+              <a:rPr lang="en-US" altLang="zh-CN" sz="1800" dirty="0" smtClean="0">
+                <a:latin typeface="+mn-ea"/>
+              </a:rPr>
+              <a:t>EFT</a:t>
+            </a:r>
+            <a:r>
+              <a:rPr lang="zh-CN" altLang="en-US" sz="1800" dirty="0" smtClean="0">
+                <a:latin typeface="+mn-ea"/>
+              </a:rPr>
+              <a:t>音乐的选择是严格按照本地化音乐治疗理论定制的。</a:t>
+            </a:r>
+            <a:endParaRPr lang="zh-CN" altLang="en-US" sz="1800" dirty="0">
+              <a:latin typeface="+mn-ea"/>
+            </a:endParaRPr>
+          </a:p>
+          <a:p>
+            <a:pPr>
+              <a:buFont typeface="Wingdings" panose="05000000000000000000" pitchFamily="2" charset="2"/>
+              <a:buChar char="l"/>
+            </a:pPr>
+            <a:r>
+              <a:rPr lang="zh-CN" altLang="en-US" sz="1800" dirty="0" smtClean="0">
+                <a:latin typeface="+mn-ea"/>
+              </a:rPr>
+              <a:t>通过认知方面，从歌词的理解来选择。</a:t>
+            </a:r>
+            <a:endParaRPr lang="zh-CN" altLang="en-US" sz="1800" dirty="0">
+              <a:latin typeface="+mn-ea"/>
+            </a:endParaRPr>
+          </a:p>
+          <a:p>
+            <a:pPr>
+              <a:buFont typeface="Wingdings" panose="05000000000000000000" pitchFamily="2" charset="2"/>
+              <a:buChar char="l"/>
+            </a:pPr>
+            <a:r>
+              <a:rPr lang="zh-CN" altLang="en-US" sz="1800" dirty="0" smtClean="0">
+                <a:latin typeface="+mn-ea"/>
+              </a:rPr>
+              <a:t>基于当下的情绪关系来选择。</a:t>
+            </a:r>
+            <a:endParaRPr lang="en-US" altLang="zh-CN" sz="1800" dirty="0" smtClean="0">
+              <a:latin typeface="+mn-ea"/>
+            </a:endParaRPr>
+          </a:p>
+          <a:p>
+            <a:pPr>
+              <a:buFont typeface="Wingdings" panose="05000000000000000000" pitchFamily="2" charset="2"/>
+              <a:buChar char="l"/>
+            </a:pPr>
+            <a:r>
+              <a:rPr lang="zh-CN" altLang="en-US" sz="1800" dirty="0" smtClean="0">
+                <a:latin typeface="+mn-ea"/>
+              </a:rPr>
+              <a:t>基于人际关系模型来定位音乐所具有的内涵表达来选择。</a:t>
+            </a:r>
+            <a:endParaRPr lang="en-US" altLang="zh-CN" sz="1800" dirty="0" smtClean="0">
+              <a:latin typeface="+mn-ea"/>
+            </a:endParaRPr>
+          </a:p>
+          <a:p>
+            <a:pPr>
+              <a:buFont typeface="Wingdings" panose="05000000000000000000" pitchFamily="2" charset="2"/>
+              <a:buChar char="l"/>
+            </a:pPr>
+            <a:r>
+              <a:rPr lang="zh-CN" altLang="en-US" sz="1800" dirty="0" smtClean="0">
+                <a:latin typeface="+mn-ea"/>
+              </a:rPr>
+              <a:t>依据个人的情结自由选择。</a:t>
+            </a:r>
+            <a:endParaRPr lang="en-US" altLang="zh-CN" sz="1800" dirty="0" smtClean="0">
+              <a:latin typeface="+mn-ea"/>
+            </a:endParaRPr>
+          </a:p>
+          <a:p>
+            <a:pPr marL="0" indent="0">
+              <a:buNone/>
+            </a:pPr>
+            <a:endParaRPr lang="zh-CN" altLang="en-US" sz="1800" dirty="0">
+              <a:latin typeface="+mn-ea"/>
+            </a:endParaRPr>
+          </a:p>
+        </p:txBody>
+      </p:sp>
+      <p:sp>
+        <p:nvSpPr>
+          <p:cNvPr id="6" name="内容占位符 2">
+            <a:extLst>
+              <a:ext uri="{FF2B5EF4-FFF2-40B4-BE49-F238E27FC236}">
+                <a16:creationId xmlns:a16="http://schemas.microsoft.com/office/drawing/2014/main" id="{9BB5BFA0-421E-7149-5025-230269CDD21A}"/>
+              </a:ext>
+            </a:extLst>
+          </p:cNvPr>
+          <p:cNvSpPr txBox="1">
+            <a:spLocks/>
+          </p:cNvSpPr>
+          <p:nvPr/>
+        </p:nvSpPr>
+        <p:spPr>
+          <a:xfrm>
+            <a:off x="7763052" y="2135791"/>
+            <a:ext cx="3740427" cy="3989337"/>
+          </a:xfrm>
+          <a:prstGeom prst="rect">
+            <a:avLst/>
+          </a:prstGeom>
+        </p:spPr>
+        <p:txBody>
+          <a:bodyPr lIns="109728" tIns="109728" rIns="109728" bIns="91440"/>
+          <a:lstStyle>
+            <a:lvl1pPr marL="228600" indent="-228600" algn="l" defTabSz="914400" rtl="0" eaLnBrk="1" latinLnBrk="0" hangingPunct="1">
+              <a:lnSpc>
+                <a:spcPct val="125000"/>
+              </a:lnSpc>
+              <a:spcBef>
+                <a:spcPts val="1000"/>
+              </a:spcBef>
+              <a:buFont typeface="Arial" panose="020B0604020202020204" pitchFamily="34" charset="0"/>
+              <a:buChar char="•"/>
+              <a:defRPr sz="1600" kern="1200" spc="160">
+                <a:solidFill>
+                  <a:schemeClr val="tx1"/>
+                </a:solidFill>
+                <a:latin typeface="+mn-lt"/>
+                <a:ea typeface="+mn-ea"/>
+                <a:cs typeface="+mn-cs"/>
+              </a:defRPr>
+            </a:lvl1pPr>
+            <a:lvl2pPr marL="685800" indent="-228600" algn="l" defTabSz="914400" rtl="0" eaLnBrk="1" latinLnBrk="0" hangingPunct="1">
+              <a:lnSpc>
+                <a:spcPct val="125000"/>
+              </a:lnSpc>
+              <a:spcBef>
+                <a:spcPts val="500"/>
+              </a:spcBef>
+              <a:buFont typeface="Arial" panose="020B0604020202020204" pitchFamily="34" charset="0"/>
+              <a:buChar char="•"/>
+              <a:defRPr sz="1600" kern="1200" spc="160">
+                <a:solidFill>
+                  <a:schemeClr val="tx1"/>
+                </a:solidFill>
+                <a:latin typeface="+mn-lt"/>
+                <a:ea typeface="+mn-ea"/>
+                <a:cs typeface="+mn-cs"/>
+              </a:defRPr>
+            </a:lvl2pPr>
+            <a:lvl3pPr marL="1143000" indent="-228600" algn="l" defTabSz="914400" rtl="0" eaLnBrk="1" latinLnBrk="0" hangingPunct="1">
+              <a:lnSpc>
+                <a:spcPct val="125000"/>
+              </a:lnSpc>
+              <a:spcBef>
+                <a:spcPts val="500"/>
+              </a:spcBef>
+              <a:buFont typeface="Arial" panose="020B0604020202020204" pitchFamily="34" charset="0"/>
+              <a:buChar char="•"/>
+              <a:defRPr sz="1600" kern="1200" spc="160">
+                <a:solidFill>
+                  <a:schemeClr val="tx1"/>
+                </a:solidFill>
+                <a:latin typeface="+mn-lt"/>
+                <a:ea typeface="+mn-ea"/>
+                <a:cs typeface="+mn-cs"/>
+              </a:defRPr>
+            </a:lvl3pPr>
+            <a:lvl4pPr marL="1600200" indent="-228600" algn="l" defTabSz="914400" rtl="0" eaLnBrk="1" latinLnBrk="0" hangingPunct="1">
+              <a:lnSpc>
+                <a:spcPct val="125000"/>
+              </a:lnSpc>
+              <a:spcBef>
+                <a:spcPts val="500"/>
+              </a:spcBef>
+              <a:buFont typeface="Arial" panose="020B0604020202020204" pitchFamily="34" charset="0"/>
+              <a:buChar char="•"/>
+              <a:defRPr sz="1600" kern="1200" spc="160">
+                <a:solidFill>
+                  <a:schemeClr val="tx1"/>
+                </a:solidFill>
+                <a:latin typeface="+mn-lt"/>
+                <a:ea typeface="+mn-ea"/>
+                <a:cs typeface="+mn-cs"/>
+              </a:defRPr>
+            </a:lvl4pPr>
+            <a:lvl5pPr marL="2057400" indent="-228600" algn="l" defTabSz="914400" rtl="0" eaLnBrk="1" latinLnBrk="0" hangingPunct="1">
+              <a:lnSpc>
+                <a:spcPct val="125000"/>
+              </a:lnSpc>
+              <a:spcBef>
+                <a:spcPts val="500"/>
+              </a:spcBef>
+              <a:buFont typeface="Arial" panose="020B0604020202020204" pitchFamily="34" charset="0"/>
+              <a:buChar char="•"/>
+              <a:defRPr sz="1600" kern="1200" spc="160">
+                <a:solidFill>
+                  <a:schemeClr val="tx1"/>
+                </a:solidFill>
+                <a:latin typeface="+mn-lt"/>
+                <a:ea typeface="+mn-ea"/>
+                <a:cs typeface="+mn-cs"/>
+              </a:defRPr>
+            </a:lvl5pPr>
+            <a:lvl6pPr marL="2514600" indent="-228600" algn="l" defTabSz="914400" rtl="0" eaLnBrk="1" latinLnBrk="0" hangingPunct="1">
+              <a:lnSpc>
+                <a:spcPct val="90000"/>
+              </a:lnSpc>
+              <a:spcBef>
+                <a:spcPts val="500"/>
+              </a:spcBef>
+              <a:buFont typeface="Arial" panose="020B0604020202020204" pitchFamily="34" charset="0"/>
+              <a:buChar char="•"/>
+              <a:defRPr sz="1800" kern="1200">
+                <a:solidFill>
+                  <a:schemeClr val="tx1"/>
+                </a:solidFill>
+                <a:latin typeface="+mn-lt"/>
+                <a:ea typeface="+mn-ea"/>
+                <a:cs typeface="+mn-cs"/>
+              </a:defRPr>
+            </a:lvl6pPr>
+            <a:lvl7pPr marL="2971800" indent="-228600" algn="l" defTabSz="914400" rtl="0" eaLnBrk="1" latinLnBrk="0" hangingPunct="1">
+              <a:lnSpc>
+                <a:spcPct val="90000"/>
+              </a:lnSpc>
+              <a:spcBef>
+                <a:spcPts val="500"/>
+              </a:spcBef>
+              <a:buFont typeface="Arial" panose="020B0604020202020204" pitchFamily="34" charset="0"/>
+              <a:buChar char="•"/>
+              <a:defRPr sz="1800" kern="1200">
+                <a:solidFill>
+                  <a:schemeClr val="tx1"/>
+                </a:solidFill>
+                <a:latin typeface="+mn-lt"/>
+                <a:ea typeface="+mn-ea"/>
+                <a:cs typeface="+mn-cs"/>
+              </a:defRPr>
+            </a:lvl7pPr>
+            <a:lvl8pPr marL="3429000" indent="-228600" algn="l" defTabSz="914400" rtl="0" eaLnBrk="1" latinLnBrk="0" hangingPunct="1">
+              <a:lnSpc>
+                <a:spcPct val="90000"/>
+              </a:lnSpc>
+              <a:spcBef>
+                <a:spcPts val="500"/>
+              </a:spcBef>
+              <a:buFont typeface="Arial" panose="020B0604020202020204" pitchFamily="34" charset="0"/>
+              <a:buChar char="•"/>
+              <a:defRPr sz="1800" kern="1200">
+                <a:solidFill>
+                  <a:schemeClr val="tx1"/>
+                </a:solidFill>
+                <a:latin typeface="+mn-lt"/>
+                <a:ea typeface="+mn-ea"/>
+                <a:cs typeface="+mn-cs"/>
+              </a:defRPr>
+            </a:lvl8pPr>
+            <a:lvl9pPr marL="3886200" indent="-228600" algn="l" defTabSz="914400" rtl="0" eaLnBrk="1" latinLnBrk="0" hangingPunct="1">
+              <a:lnSpc>
+                <a:spcPct val="90000"/>
+              </a:lnSpc>
+              <a:spcBef>
+                <a:spcPts val="500"/>
+              </a:spcBef>
+              <a:buFont typeface="Arial" panose="020B0604020202020204" pitchFamily="34" charset="0"/>
+              <a:buChar char="•"/>
+              <a:defRPr sz="1800" kern="1200">
+                <a:solidFill>
+                  <a:schemeClr val="tx1"/>
+                </a:solidFill>
+                <a:latin typeface="+mn-lt"/>
+                <a:ea typeface="+mn-ea"/>
+                <a:cs typeface="+mn-cs"/>
+              </a:defRPr>
+            </a:lvl9pPr>
+          </a:lstStyle>
+          <a:p>
+            <a:pPr marL="0" indent="0">
+              <a:buNone/>
+            </a:pPr>
+            <a:r>
+              <a:rPr lang="zh-CN" altLang="en-US" sz="1800" dirty="0">
+                <a:latin typeface="+mn-ea"/>
+              </a:rPr>
+              <a:t>本土化音乐治疗技术：</a:t>
+            </a:r>
+            <a:endParaRPr lang="en-US" altLang="zh-CN" sz="1800" dirty="0">
+              <a:latin typeface="+mn-ea"/>
+            </a:endParaRPr>
+          </a:p>
+          <a:p>
+            <a:pPr>
+              <a:buFont typeface="Wingdings" panose="05000000000000000000" pitchFamily="2" charset="2"/>
+              <a:buChar char="l"/>
+            </a:pPr>
+            <a:r>
+              <a:rPr lang="zh-CN" altLang="en-US" sz="1800" dirty="0">
+                <a:latin typeface="+mn-ea"/>
+              </a:rPr>
+              <a:t>旋律</a:t>
+            </a:r>
+            <a:r>
+              <a:rPr lang="zh-CN" altLang="en-US" sz="1800" dirty="0" smtClean="0">
+                <a:latin typeface="+mn-ea"/>
+              </a:rPr>
+              <a:t>线 </a:t>
+            </a:r>
+            <a:r>
+              <a:rPr lang="en-US" altLang="zh-CN" sz="1800" dirty="0" smtClean="0">
+                <a:latin typeface="+mn-ea"/>
+              </a:rPr>
+              <a:t>– </a:t>
+            </a:r>
+            <a:r>
+              <a:rPr lang="zh-CN" altLang="en-US" sz="1800" dirty="0" smtClean="0">
+                <a:latin typeface="+mn-ea"/>
+              </a:rPr>
+              <a:t>情感表达</a:t>
+            </a:r>
+            <a:endParaRPr lang="en-US" altLang="zh-CN" sz="1800" dirty="0">
+              <a:latin typeface="+mn-ea"/>
+            </a:endParaRPr>
+          </a:p>
+          <a:p>
+            <a:pPr>
+              <a:buFont typeface="Wingdings" panose="05000000000000000000" pitchFamily="2" charset="2"/>
+              <a:buChar char="l"/>
+            </a:pPr>
+            <a:r>
+              <a:rPr lang="zh-CN" altLang="en-US" sz="1800" dirty="0">
+                <a:latin typeface="+mn-ea"/>
+              </a:rPr>
+              <a:t>记忆</a:t>
+            </a:r>
+            <a:r>
+              <a:rPr lang="zh-CN" altLang="en-US" sz="1800" dirty="0" smtClean="0">
+                <a:latin typeface="+mn-ea"/>
+              </a:rPr>
+              <a:t>数轴 </a:t>
+            </a:r>
+            <a:r>
+              <a:rPr lang="en-US" altLang="zh-CN" sz="1800" dirty="0" smtClean="0">
+                <a:latin typeface="+mn-ea"/>
+              </a:rPr>
+              <a:t>– </a:t>
+            </a:r>
+            <a:r>
+              <a:rPr lang="zh-CN" altLang="en-US" sz="1800" dirty="0" smtClean="0">
+                <a:latin typeface="+mn-ea"/>
+              </a:rPr>
+              <a:t>信念系统</a:t>
+            </a:r>
+            <a:endParaRPr lang="en-US" altLang="zh-CN" sz="1800" dirty="0">
+              <a:latin typeface="+mn-ea"/>
+            </a:endParaRPr>
+          </a:p>
+          <a:p>
+            <a:pPr>
+              <a:buFont typeface="Wingdings" panose="05000000000000000000" pitchFamily="2" charset="2"/>
+              <a:buChar char="l"/>
+            </a:pPr>
+            <a:r>
+              <a:rPr lang="zh-CN" altLang="en-US" sz="1800" dirty="0" smtClean="0">
+                <a:latin typeface="+mn-ea"/>
+              </a:rPr>
+              <a:t>安全岛 </a:t>
+            </a:r>
+            <a:r>
+              <a:rPr lang="en-US" altLang="zh-CN" sz="1800" dirty="0" smtClean="0">
+                <a:latin typeface="+mn-ea"/>
+              </a:rPr>
+              <a:t>– </a:t>
+            </a:r>
+            <a:r>
+              <a:rPr lang="zh-CN" altLang="en-US" sz="1800" dirty="0" smtClean="0">
+                <a:latin typeface="+mn-ea"/>
+              </a:rPr>
+              <a:t>冥想、正念</a:t>
+            </a:r>
+            <a:endParaRPr lang="en-US" altLang="zh-CN" sz="1800" dirty="0">
+              <a:latin typeface="+mn-ea"/>
+            </a:endParaRPr>
+          </a:p>
+          <a:p>
+            <a:pPr>
+              <a:buFont typeface="Wingdings" panose="05000000000000000000" pitchFamily="2" charset="2"/>
+              <a:buChar char="l"/>
+            </a:pPr>
+            <a:r>
+              <a:rPr lang="zh-CN" altLang="en-US" sz="1800" dirty="0" smtClean="0">
+                <a:latin typeface="+mn-ea"/>
+              </a:rPr>
+              <a:t>注意力 </a:t>
+            </a:r>
+            <a:r>
+              <a:rPr lang="en-US" altLang="zh-CN" sz="1800" dirty="0" smtClean="0">
+                <a:latin typeface="+mn-ea"/>
+              </a:rPr>
+              <a:t>– </a:t>
+            </a:r>
+            <a:r>
+              <a:rPr lang="zh-CN" altLang="en-US" sz="1800" dirty="0" smtClean="0">
+                <a:latin typeface="+mn-ea"/>
+              </a:rPr>
+              <a:t>迁移理论</a:t>
+            </a:r>
+            <a:endParaRPr lang="en-US" altLang="zh-CN" sz="1800" dirty="0">
+              <a:latin typeface="+mn-ea"/>
+            </a:endParaRPr>
+          </a:p>
+          <a:p>
+            <a:pPr>
+              <a:buFont typeface="Wingdings" panose="05000000000000000000" pitchFamily="2" charset="2"/>
+              <a:buChar char="l"/>
+            </a:pPr>
+            <a:r>
+              <a:rPr lang="zh-CN" altLang="en-US" sz="1800" dirty="0">
+                <a:latin typeface="+mn-ea"/>
+              </a:rPr>
+              <a:t>学习</a:t>
+            </a:r>
+            <a:r>
+              <a:rPr lang="zh-CN" altLang="en-US" sz="1800" dirty="0" smtClean="0">
+                <a:latin typeface="+mn-ea"/>
+              </a:rPr>
+              <a:t>力 </a:t>
+            </a:r>
+            <a:r>
+              <a:rPr lang="en-US" altLang="zh-CN" sz="1800" dirty="0" smtClean="0">
+                <a:latin typeface="+mn-ea"/>
+              </a:rPr>
+              <a:t>– </a:t>
+            </a:r>
+            <a:r>
+              <a:rPr lang="zh-CN" altLang="en-US" sz="1800" dirty="0" smtClean="0">
+                <a:latin typeface="+mn-ea"/>
+              </a:rPr>
+              <a:t>知识提取</a:t>
+            </a:r>
+            <a:endParaRPr lang="en-US" altLang="zh-CN" sz="1800" dirty="0">
+              <a:latin typeface="+mn-ea"/>
+            </a:endParaRPr>
+          </a:p>
+          <a:p>
+            <a:pPr>
+              <a:buFont typeface="Wingdings" panose="05000000000000000000" pitchFamily="2" charset="2"/>
+              <a:buChar char="l"/>
+            </a:pPr>
+            <a:r>
+              <a:rPr lang="zh-CN" altLang="en-US" sz="1800" dirty="0">
+                <a:latin typeface="+mn-ea"/>
+              </a:rPr>
+              <a:t>呼吸</a:t>
+            </a:r>
+            <a:r>
+              <a:rPr lang="zh-CN" altLang="en-US" sz="1800" dirty="0" smtClean="0">
+                <a:latin typeface="+mn-ea"/>
+              </a:rPr>
+              <a:t>式 </a:t>
+            </a:r>
+            <a:r>
+              <a:rPr lang="en-US" altLang="zh-CN" sz="1800" dirty="0" smtClean="0">
+                <a:latin typeface="+mn-ea"/>
+              </a:rPr>
+              <a:t>– </a:t>
+            </a:r>
+            <a:r>
+              <a:rPr lang="zh-CN" altLang="en-US" sz="1800" dirty="0" smtClean="0">
+                <a:latin typeface="+mn-ea"/>
+              </a:rPr>
+              <a:t>焦虑、愤怒</a:t>
+            </a:r>
+            <a:endParaRPr lang="en-US" altLang="zh-CN" sz="1800" dirty="0">
+              <a:latin typeface="+mn-ea"/>
+            </a:endParaRPr>
+          </a:p>
+        </p:txBody>
+      </p:sp>
     </p:spTree>
     <p:extLst>
       <p:ext uri="{BB962C8B-B14F-4D97-AF65-F5344CB8AC3E}">
@@ -20179,11 +19641,1217 @@
             </a:r>
             <a:r>
               <a:rPr lang="zh-CN" altLang="en-US" sz="4400" dirty="0" smtClean="0"/>
-              <a:t>操音乐选择（</a:t>
+              <a:t>操的音乐</a:t>
+            </a:r>
+            <a:r>
+              <a:rPr lang="zh-CN" altLang="en-US" sz="4400" dirty="0" smtClean="0"/>
+              <a:t>选择</a:t>
+            </a:r>
+            <a:r>
+              <a:rPr lang="zh-CN" altLang="en-US" sz="4400" dirty="0" smtClean="0"/>
+              <a:t>（</a:t>
             </a:r>
             <a:r>
               <a:rPr lang="en-US" altLang="zh-CN" sz="4400" dirty="0" smtClean="0"/>
-              <a:t>6</a:t>
+              <a:t>2</a:t>
+            </a:r>
+            <a:r>
+              <a:rPr lang="zh-CN" altLang="en-US" sz="4400" dirty="0" smtClean="0"/>
+              <a:t>）</a:t>
+            </a:r>
+            <a:endParaRPr lang="zh-CN" altLang="en-US" sz="4400" dirty="0"/>
+          </a:p>
+        </p:txBody>
+      </p:sp>
+      <p:graphicFrame>
+        <p:nvGraphicFramePr>
+          <p:cNvPr id="3" name="表格 2"/>
+          <p:cNvGraphicFramePr>
+            <a:graphicFrameLocks noGrp="1"/>
+          </p:cNvGraphicFramePr>
+          <p:nvPr>
+            <p:extLst>
+              <p:ext uri="{D42A27DB-BD31-4B8C-83A1-F6EECF244321}">
+                <p14:modId xmlns:p14="http://schemas.microsoft.com/office/powerpoint/2010/main" val="3882083318"/>
+              </p:ext>
+            </p:extLst>
+          </p:nvPr>
+        </p:nvGraphicFramePr>
+        <p:xfrm>
+          <a:off x="521210" y="1599393"/>
+          <a:ext cx="11155678" cy="4832092"/>
+        </p:xfrm>
+        <a:graphic>
+          <a:graphicData uri="http://schemas.openxmlformats.org/drawingml/2006/table">
+            <a:tbl>
+              <a:tblPr>
+                <a:tableStyleId>{5C22544A-7EE6-4342-B048-85BDC9FD1C3A}</a:tableStyleId>
+              </a:tblPr>
+              <a:tblGrid>
+                <a:gridCol w="1565341">
+                  <a:extLst>
+                    <a:ext uri="{9D8B030D-6E8A-4147-A177-3AD203B41FA5}">
+                      <a16:colId xmlns:a16="http://schemas.microsoft.com/office/drawing/2014/main" val="230779709"/>
+                    </a:ext>
+                  </a:extLst>
+                </a:gridCol>
+                <a:gridCol w="9590337">
+                  <a:extLst>
+                    <a:ext uri="{9D8B030D-6E8A-4147-A177-3AD203B41FA5}">
+                      <a16:colId xmlns:a16="http://schemas.microsoft.com/office/drawing/2014/main" val="432370790"/>
+                    </a:ext>
+                  </a:extLst>
+                </a:gridCol>
+              </a:tblGrid>
+              <a:tr h="382830">
+                <a:tc>
+                  <a:txBody>
+                    <a:bodyPr/>
+                    <a:lstStyle/>
+                    <a:p>
+                      <a:pPr algn="ctr" fontAlgn="ctr"/>
+                      <a:r>
+                        <a:rPr lang="en-US" sz="1200" b="1" u="none" strike="noStrike" dirty="0" smtClean="0">
+                          <a:effectLst/>
+                          <a:latin typeface="+mn-ea"/>
+                          <a:ea typeface="+mn-ea"/>
+                        </a:rPr>
+                        <a:t>EFT</a:t>
+                      </a:r>
+                      <a:r>
+                        <a:rPr lang="zh-CN" altLang="en-US" sz="1200" b="1" u="none" strike="noStrike" dirty="0" smtClean="0">
+                          <a:effectLst/>
+                          <a:latin typeface="+mn-ea"/>
+                          <a:ea typeface="+mn-ea"/>
+                        </a:rPr>
+                        <a:t>穴位</a:t>
+                      </a:r>
+                      <a:endParaRPr lang="zh-CN" altLang="en-US" sz="1200" b="1" i="0" u="none" strike="noStrike" dirty="0">
+                        <a:solidFill>
+                          <a:srgbClr val="333333"/>
+                        </a:solidFill>
+                        <a:effectLst/>
+                        <a:latin typeface="+mn-ea"/>
+                        <a:ea typeface="+mn-ea"/>
+                      </a:endParaRPr>
+                    </a:p>
+                  </a:txBody>
+                  <a:tcPr marL="3839" marR="3839" marT="3839" marB="0" anchor="ctr"/>
+                </a:tc>
+                <a:tc>
+                  <a:txBody>
+                    <a:bodyPr/>
+                    <a:lstStyle/>
+                    <a:p>
+                      <a:pPr algn="ctr" fontAlgn="ctr"/>
+                      <a:r>
+                        <a:rPr lang="zh-CN" altLang="en-US" sz="1200" b="1" u="none" strike="noStrike" dirty="0" smtClean="0">
+                          <a:effectLst/>
+                          <a:latin typeface="+mn-ea"/>
+                          <a:ea typeface="+mn-ea"/>
+                        </a:rPr>
+                        <a:t>选择搭配音乐</a:t>
+                      </a:r>
+                      <a:endParaRPr lang="zh-CN" altLang="en-US" sz="1200" b="1" i="0" u="none" strike="noStrike" dirty="0">
+                        <a:solidFill>
+                          <a:srgbClr val="333333"/>
+                        </a:solidFill>
+                        <a:effectLst/>
+                        <a:latin typeface="+mn-ea"/>
+                        <a:ea typeface="+mn-ea"/>
+                      </a:endParaRPr>
+                    </a:p>
+                  </a:txBody>
+                  <a:tcPr marL="3839" marR="3839" marT="3839" marB="0" anchor="ctr"/>
+                </a:tc>
+                <a:extLst>
+                  <a:ext uri="{0D108BD9-81ED-4DB2-BD59-A6C34878D82A}">
+                    <a16:rowId xmlns:a16="http://schemas.microsoft.com/office/drawing/2014/main" val="2061999342"/>
+                  </a:ext>
+                </a:extLst>
+              </a:tr>
+              <a:tr h="482476">
+                <a:tc>
+                  <a:txBody>
+                    <a:bodyPr/>
+                    <a:lstStyle/>
+                    <a:p>
+                      <a:pPr algn="l" fontAlgn="ctr"/>
+                      <a:r>
+                        <a:rPr lang="zh-CN" altLang="en-US" sz="1200" u="none" strike="noStrike" dirty="0">
+                          <a:effectLst/>
+                          <a:latin typeface="+mn-ea"/>
+                          <a:ea typeface="+mn-ea"/>
+                        </a:rPr>
+                        <a:t>手刀点（后溪穴）</a:t>
+                      </a:r>
+                      <a:endParaRPr lang="zh-CN" altLang="en-US" sz="1200" b="0" i="0" u="none" strike="noStrike" dirty="0">
+                        <a:solidFill>
+                          <a:srgbClr val="333333"/>
+                        </a:solidFill>
+                        <a:effectLst/>
+                        <a:latin typeface="+mn-ea"/>
+                        <a:ea typeface="+mn-ea"/>
+                      </a:endParaRPr>
+                    </a:p>
+                  </a:txBody>
+                  <a:tcPr marL="3839" marR="3839" marT="3839" marB="0" anchor="ctr"/>
+                </a:tc>
+                <a:tc>
+                  <a:txBody>
+                    <a:bodyPr/>
+                    <a:lstStyle/>
+                    <a:p>
+                      <a:pPr algn="l" fontAlgn="ctr"/>
+                      <a:r>
+                        <a:rPr lang="zh-CN" altLang="en-US" sz="1200" u="none" strike="noStrike" dirty="0">
+                          <a:effectLst/>
+                          <a:latin typeface="+mn-ea"/>
+                          <a:ea typeface="+mn-ea"/>
+                        </a:rPr>
+                        <a:t>手刀点常用于建立心理安全感，缓解初始焦虑与抑郁情绪</a:t>
+                      </a:r>
+                      <a:r>
+                        <a:rPr lang="zh-CN" altLang="en-US" sz="1200" u="none" strike="noStrike" dirty="0" smtClean="0">
+                          <a:effectLst/>
+                          <a:latin typeface="+mn-ea"/>
+                          <a:ea typeface="+mn-ea"/>
+                        </a:rPr>
+                        <a:t>。风格</a:t>
+                      </a:r>
+                      <a:r>
+                        <a:rPr lang="zh-CN" altLang="en-US" sz="1200" u="none" strike="noStrike" dirty="0">
+                          <a:effectLst/>
+                          <a:latin typeface="+mn-ea"/>
+                          <a:ea typeface="+mn-ea"/>
+                        </a:rPr>
+                        <a:t>舒缓无强烈波动，适合敲击起始阶段平复心绪；羽调式音乐对应肾脏，可缓解恐惧等负面情绪</a:t>
+                      </a:r>
+                      <a:r>
+                        <a:rPr lang="zh-CN" altLang="en-US" sz="1200" u="none" strike="noStrike" dirty="0" smtClean="0">
+                          <a:effectLst/>
+                          <a:latin typeface="+mn-ea"/>
+                          <a:ea typeface="+mn-ea"/>
+                        </a:rPr>
+                        <a:t>，能</a:t>
+                      </a:r>
+                      <a:r>
+                        <a:rPr lang="zh-CN" altLang="en-US" sz="1200" u="none" strike="noStrike" dirty="0">
+                          <a:effectLst/>
+                          <a:latin typeface="+mn-ea"/>
+                          <a:ea typeface="+mn-ea"/>
+                        </a:rPr>
+                        <a:t>辅助该穴位泄心火、疏抑郁的作用。</a:t>
+                      </a:r>
+                      <a:endParaRPr lang="zh-CN" altLang="en-US" sz="1200" b="0" i="0" u="none" strike="noStrike" dirty="0">
+                        <a:solidFill>
+                          <a:srgbClr val="333333"/>
+                        </a:solidFill>
+                        <a:effectLst/>
+                        <a:latin typeface="+mn-ea"/>
+                        <a:ea typeface="+mn-ea"/>
+                      </a:endParaRPr>
+                    </a:p>
+                  </a:txBody>
+                  <a:tcPr marL="3839" marR="3839" marT="3839" marB="0" anchor="ctr"/>
+                </a:tc>
+                <a:extLst>
+                  <a:ext uri="{0D108BD9-81ED-4DB2-BD59-A6C34878D82A}">
+                    <a16:rowId xmlns:a16="http://schemas.microsoft.com/office/drawing/2014/main" val="1994296052"/>
+                  </a:ext>
+                </a:extLst>
+              </a:tr>
+              <a:tr h="450577">
+                <a:tc>
+                  <a:txBody>
+                    <a:bodyPr/>
+                    <a:lstStyle/>
+                    <a:p>
+                      <a:pPr algn="l" fontAlgn="ctr"/>
+                      <a:r>
+                        <a:rPr lang="zh-CN" altLang="en-US" sz="1200" b="0" i="0" u="none" strike="noStrike" dirty="0" smtClean="0">
+                          <a:solidFill>
+                            <a:srgbClr val="333333"/>
+                          </a:solidFill>
+                          <a:effectLst/>
+                          <a:latin typeface="+mn-ea"/>
+                          <a:ea typeface="+mn-ea"/>
+                        </a:rPr>
+                        <a:t>手腕内侧（内关穴）</a:t>
+                      </a:r>
+                      <a:endParaRPr lang="zh-CN" altLang="en-US" sz="1200" b="0" i="0" u="none" strike="noStrike" dirty="0">
+                        <a:solidFill>
+                          <a:srgbClr val="333333"/>
+                        </a:solidFill>
+                        <a:effectLst/>
+                        <a:latin typeface="+mn-ea"/>
+                        <a:ea typeface="+mn-ea"/>
+                      </a:endParaRPr>
+                    </a:p>
+                  </a:txBody>
+                  <a:tcPr marL="3839" marR="3839" marT="3839" marB="0" anchor="ctr"/>
+                </a:tc>
+                <a:tc>
+                  <a:txBody>
+                    <a:bodyPr/>
+                    <a:lstStyle/>
+                    <a:p>
+                      <a:pPr algn="l" fontAlgn="ctr"/>
+                      <a:r>
+                        <a:rPr lang="zh-CN" altLang="en-US" sz="1200" b="0" i="0" u="none" strike="noStrike" dirty="0" smtClean="0">
+                          <a:solidFill>
+                            <a:srgbClr val="333333"/>
+                          </a:solidFill>
+                          <a:effectLst/>
+                          <a:latin typeface="+mn-ea"/>
+                          <a:ea typeface="+mn-ea"/>
+                        </a:rPr>
+                        <a:t>内关穴适配的情绪音乐需围绕养心安神、疏解心郁的核心目标。音调明亮而不躁、欢快而舒缓，与心包经 “通脉安神” 的功效共振。播放徵调式音乐，可强化 “疏通心包经气机</a:t>
+                      </a:r>
+                      <a:r>
+                        <a:rPr lang="en-US" altLang="zh-CN" sz="1200" b="0" i="0" u="none" strike="noStrike" dirty="0" smtClean="0">
+                          <a:solidFill>
+                            <a:srgbClr val="333333"/>
+                          </a:solidFill>
+                          <a:effectLst/>
+                          <a:latin typeface="+mn-ea"/>
+                          <a:ea typeface="+mn-ea"/>
+                        </a:rPr>
+                        <a:t>+</a:t>
+                      </a:r>
+                      <a:r>
+                        <a:rPr lang="zh-CN" altLang="en-US" sz="1200" b="0" i="0" u="none" strike="noStrike" dirty="0" smtClean="0">
+                          <a:solidFill>
+                            <a:srgbClr val="333333"/>
+                          </a:solidFill>
+                          <a:effectLst/>
+                          <a:latin typeface="+mn-ea"/>
+                          <a:ea typeface="+mn-ea"/>
+                        </a:rPr>
+                        <a:t>平复心神” 的双重效果。</a:t>
+                      </a:r>
+                      <a:endParaRPr lang="zh-CN" altLang="en-US" sz="1200" b="0" i="0" u="none" strike="noStrike" dirty="0">
+                        <a:solidFill>
+                          <a:srgbClr val="333333"/>
+                        </a:solidFill>
+                        <a:effectLst/>
+                        <a:latin typeface="+mn-ea"/>
+                        <a:ea typeface="+mn-ea"/>
+                      </a:endParaRPr>
+                    </a:p>
+                  </a:txBody>
+                  <a:tcPr marL="3839" marR="3839" marT="3839" marB="0" anchor="ctr"/>
+                </a:tc>
+                <a:extLst>
+                  <a:ext uri="{0D108BD9-81ED-4DB2-BD59-A6C34878D82A}">
+                    <a16:rowId xmlns:a16="http://schemas.microsoft.com/office/drawing/2014/main" val="1579610272"/>
+                  </a:ext>
+                </a:extLst>
+              </a:tr>
+              <a:tr h="453889">
+                <a:tc>
+                  <a:txBody>
+                    <a:bodyPr/>
+                    <a:lstStyle/>
+                    <a:p>
+                      <a:pPr algn="l" fontAlgn="ctr"/>
+                      <a:r>
+                        <a:rPr lang="zh-CN" altLang="en-US" sz="1200" u="none" strike="noStrike" dirty="0">
+                          <a:effectLst/>
+                          <a:latin typeface="+mn-ea"/>
+                          <a:ea typeface="+mn-ea"/>
+                        </a:rPr>
+                        <a:t>眉头（攒竹穴）</a:t>
+                      </a:r>
+                      <a:endParaRPr lang="zh-CN" altLang="en-US" sz="1200" b="0" i="0" u="none" strike="noStrike" dirty="0">
+                        <a:solidFill>
+                          <a:srgbClr val="333333"/>
+                        </a:solidFill>
+                        <a:effectLst/>
+                        <a:latin typeface="+mn-ea"/>
+                        <a:ea typeface="+mn-ea"/>
+                      </a:endParaRPr>
+                    </a:p>
+                  </a:txBody>
+                  <a:tcPr marL="3839" marR="3839" marT="3839" marB="0" anchor="ctr"/>
+                </a:tc>
+                <a:tc>
+                  <a:txBody>
+                    <a:bodyPr/>
+                    <a:lstStyle/>
+                    <a:p>
+                      <a:pPr algn="l" fontAlgn="ctr"/>
+                      <a:r>
+                        <a:rPr lang="zh-CN" altLang="en-US" sz="1200" u="none" strike="noStrike" dirty="0">
+                          <a:effectLst/>
+                          <a:latin typeface="+mn-ea"/>
+                          <a:ea typeface="+mn-ea"/>
+                        </a:rPr>
+                        <a:t>此穴位核心缓解焦虑与烦躁情绪。中医中角调对应肝脏，可疏肝理气、缓解情绪紧绷</a:t>
+                      </a:r>
+                      <a:r>
+                        <a:rPr lang="zh-CN" altLang="en-US" sz="1200" u="none" strike="noStrike" dirty="0" smtClean="0">
+                          <a:effectLst/>
+                          <a:latin typeface="+mn-ea"/>
+                          <a:ea typeface="+mn-ea"/>
+                        </a:rPr>
+                        <a:t>，角</a:t>
+                      </a:r>
+                      <a:r>
+                        <a:rPr lang="zh-CN" altLang="en-US" sz="1200" u="none" strike="noStrike" dirty="0">
+                          <a:effectLst/>
+                          <a:latin typeface="+mn-ea"/>
+                          <a:ea typeface="+mn-ea"/>
+                        </a:rPr>
+                        <a:t>调式</a:t>
+                      </a:r>
+                      <a:r>
+                        <a:rPr lang="zh-CN" altLang="en-US" sz="1200" u="none" strike="noStrike" dirty="0" smtClean="0">
+                          <a:effectLst/>
+                          <a:latin typeface="+mn-ea"/>
+                          <a:ea typeface="+mn-ea"/>
+                        </a:rPr>
+                        <a:t>音乐能</a:t>
+                      </a:r>
+                      <a:r>
+                        <a:rPr lang="zh-CN" altLang="en-US" sz="1200" u="none" strike="noStrike" dirty="0">
+                          <a:effectLst/>
+                          <a:latin typeface="+mn-ea"/>
+                          <a:ea typeface="+mn-ea"/>
+                        </a:rPr>
+                        <a:t>契合该穴位舒缓焦虑、平复烦躁的需求。</a:t>
+                      </a:r>
+                      <a:endParaRPr lang="zh-CN" altLang="en-US" sz="1200" b="0" i="0" u="none" strike="noStrike" dirty="0">
+                        <a:solidFill>
+                          <a:srgbClr val="333333"/>
+                        </a:solidFill>
+                        <a:effectLst/>
+                        <a:latin typeface="+mn-ea"/>
+                        <a:ea typeface="+mn-ea"/>
+                      </a:endParaRPr>
+                    </a:p>
+                  </a:txBody>
+                  <a:tcPr marL="3839" marR="3839" marT="3839" marB="0" anchor="ctr"/>
+                </a:tc>
+                <a:extLst>
+                  <a:ext uri="{0D108BD9-81ED-4DB2-BD59-A6C34878D82A}">
+                    <a16:rowId xmlns:a16="http://schemas.microsoft.com/office/drawing/2014/main" val="3311110419"/>
+                  </a:ext>
+                </a:extLst>
+              </a:tr>
+              <a:tr h="405036">
+                <a:tc>
+                  <a:txBody>
+                    <a:bodyPr/>
+                    <a:lstStyle/>
+                    <a:p>
+                      <a:pPr algn="l" fontAlgn="ctr"/>
+                      <a:r>
+                        <a:rPr lang="zh-CN" altLang="en-US" sz="1200" u="none" strike="noStrike">
+                          <a:effectLst/>
+                          <a:latin typeface="+mn-ea"/>
+                          <a:ea typeface="+mn-ea"/>
+                        </a:rPr>
+                        <a:t>眼尾（瞳子髎穴）</a:t>
+                      </a:r>
+                      <a:endParaRPr lang="zh-CN" altLang="en-US" sz="1200" b="0" i="0" u="none" strike="noStrike">
+                        <a:solidFill>
+                          <a:srgbClr val="333333"/>
+                        </a:solidFill>
+                        <a:effectLst/>
+                        <a:latin typeface="+mn-ea"/>
+                        <a:ea typeface="+mn-ea"/>
+                      </a:endParaRPr>
+                    </a:p>
+                  </a:txBody>
+                  <a:tcPr marL="3839" marR="3839" marT="3839" marB="0" anchor="ctr"/>
+                </a:tc>
+                <a:tc>
+                  <a:txBody>
+                    <a:bodyPr/>
+                    <a:lstStyle/>
+                    <a:p>
+                      <a:pPr algn="l" fontAlgn="ctr"/>
+                      <a:r>
+                        <a:rPr lang="zh-CN" altLang="en-US" sz="1200" u="none" strike="noStrike" dirty="0">
+                          <a:effectLst/>
+                          <a:latin typeface="+mn-ea"/>
+                          <a:ea typeface="+mn-ea"/>
+                        </a:rPr>
+                        <a:t>该穴位主打缓解紧张情绪</a:t>
+                      </a:r>
+                      <a:r>
+                        <a:rPr lang="zh-CN" altLang="en-US" sz="1200" u="none" strike="noStrike" dirty="0" smtClean="0">
+                          <a:effectLst/>
+                          <a:latin typeface="+mn-ea"/>
+                          <a:ea typeface="+mn-ea"/>
+                        </a:rPr>
+                        <a:t>。主题</a:t>
+                      </a:r>
+                      <a:r>
+                        <a:rPr lang="zh-CN" altLang="en-US" sz="1200" u="none" strike="noStrike" dirty="0">
+                          <a:effectLst/>
+                          <a:latin typeface="+mn-ea"/>
+                          <a:ea typeface="+mn-ea"/>
+                        </a:rPr>
+                        <a:t>音乐多为轻柔器乐，能避免刺激眼部感官，适配眼尾穴位的敏感特性；商调式对应肺，节奏明快清越</a:t>
+                      </a:r>
+                      <a:r>
+                        <a:rPr lang="zh-CN" altLang="en-US" sz="1200" u="none" strike="noStrike" dirty="0" smtClean="0">
+                          <a:effectLst/>
+                          <a:latin typeface="+mn-ea"/>
+                          <a:ea typeface="+mn-ea"/>
+                        </a:rPr>
+                        <a:t>，可</a:t>
+                      </a:r>
+                      <a:r>
+                        <a:rPr lang="zh-CN" altLang="en-US" sz="1200" u="none" strike="noStrike" dirty="0">
+                          <a:effectLst/>
+                          <a:latin typeface="+mn-ea"/>
+                          <a:ea typeface="+mn-ea"/>
+                        </a:rPr>
+                        <a:t>辅助调节神经，配合敲击缓解紧张，同时弱化眼部周围的不适感。</a:t>
+                      </a:r>
+                      <a:endParaRPr lang="zh-CN" altLang="en-US" sz="1200" b="0" i="0" u="none" strike="noStrike" dirty="0">
+                        <a:solidFill>
+                          <a:srgbClr val="333333"/>
+                        </a:solidFill>
+                        <a:effectLst/>
+                        <a:latin typeface="+mn-ea"/>
+                        <a:ea typeface="+mn-ea"/>
+                      </a:endParaRPr>
+                    </a:p>
+                  </a:txBody>
+                  <a:tcPr marL="3839" marR="3839" marT="3839" marB="0" anchor="ctr"/>
+                </a:tc>
+                <a:extLst>
+                  <a:ext uri="{0D108BD9-81ED-4DB2-BD59-A6C34878D82A}">
+                    <a16:rowId xmlns:a16="http://schemas.microsoft.com/office/drawing/2014/main" val="603465208"/>
+                  </a:ext>
+                </a:extLst>
+              </a:tr>
+              <a:tr h="435721">
+                <a:tc>
+                  <a:txBody>
+                    <a:bodyPr/>
+                    <a:lstStyle/>
+                    <a:p>
+                      <a:pPr algn="l" fontAlgn="ctr"/>
+                      <a:r>
+                        <a:rPr lang="zh-CN" altLang="en-US" sz="1200" u="none" strike="noStrike">
+                          <a:effectLst/>
+                          <a:latin typeface="+mn-ea"/>
+                          <a:ea typeface="+mn-ea"/>
+                        </a:rPr>
+                        <a:t>眼下（承泣穴）</a:t>
+                      </a:r>
+                      <a:endParaRPr lang="zh-CN" altLang="en-US" sz="1200" b="0" i="0" u="none" strike="noStrike">
+                        <a:solidFill>
+                          <a:srgbClr val="333333"/>
+                        </a:solidFill>
+                        <a:effectLst/>
+                        <a:latin typeface="+mn-ea"/>
+                        <a:ea typeface="+mn-ea"/>
+                      </a:endParaRPr>
+                    </a:p>
+                  </a:txBody>
+                  <a:tcPr marL="3839" marR="3839" marT="3839" marB="0" anchor="ctr"/>
+                </a:tc>
+                <a:tc>
+                  <a:txBody>
+                    <a:bodyPr/>
+                    <a:lstStyle/>
+                    <a:p>
+                      <a:pPr algn="l" fontAlgn="ctr"/>
+                      <a:r>
+                        <a:rPr lang="zh-CN" altLang="en-US" sz="1200" u="none" strike="noStrike" dirty="0">
+                          <a:effectLst/>
+                          <a:latin typeface="+mn-ea"/>
+                          <a:ea typeface="+mn-ea"/>
+                        </a:rPr>
+                        <a:t>该穴位常用来缓解悲伤与忧郁。徵音对应心脏，能养心安神</a:t>
+                      </a:r>
+                      <a:r>
+                        <a:rPr lang="zh-CN" altLang="en-US" sz="1200" u="none" strike="noStrike" dirty="0" smtClean="0">
+                          <a:effectLst/>
+                          <a:latin typeface="+mn-ea"/>
+                          <a:ea typeface="+mn-ea"/>
+                        </a:rPr>
+                        <a:t>，经典</a:t>
+                      </a:r>
+                      <a:r>
+                        <a:rPr lang="zh-CN" altLang="en-US" sz="1200" u="none" strike="noStrike" dirty="0">
+                          <a:effectLst/>
+                          <a:latin typeface="+mn-ea"/>
+                          <a:ea typeface="+mn-ea"/>
+                        </a:rPr>
+                        <a:t>徵调</a:t>
+                      </a:r>
+                      <a:r>
+                        <a:rPr lang="zh-CN" altLang="en-US" sz="1200" u="none" strike="noStrike" dirty="0" smtClean="0">
+                          <a:effectLst/>
+                          <a:latin typeface="+mn-ea"/>
+                          <a:ea typeface="+mn-ea"/>
+                        </a:rPr>
+                        <a:t>曲可</a:t>
+                      </a:r>
+                      <a:r>
+                        <a:rPr lang="zh-CN" altLang="en-US" sz="1200" u="none" strike="noStrike" dirty="0">
+                          <a:effectLst/>
+                          <a:latin typeface="+mn-ea"/>
+                          <a:ea typeface="+mn-ea"/>
+                        </a:rPr>
+                        <a:t>辅助疏导悲伤情绪，契合穴位的情绪功能</a:t>
+                      </a:r>
+                      <a:r>
+                        <a:rPr lang="zh-CN" altLang="en-US" sz="1200" u="none" strike="noStrike" dirty="0" smtClean="0">
+                          <a:effectLst/>
+                          <a:latin typeface="+mn-ea"/>
+                          <a:ea typeface="+mn-ea"/>
+                        </a:rPr>
+                        <a:t>；轻柔</a:t>
+                      </a:r>
+                      <a:r>
+                        <a:rPr lang="zh-CN" altLang="en-US" sz="1200" u="none" strike="noStrike" dirty="0">
+                          <a:effectLst/>
+                          <a:latin typeface="+mn-ea"/>
+                          <a:ea typeface="+mn-ea"/>
+                        </a:rPr>
+                        <a:t>钢琴曲无突兀旋律，既能安抚情绪，也能搭配该穴位缓解眼部疲劳的躯体作用。</a:t>
+                      </a:r>
+                      <a:endParaRPr lang="zh-CN" altLang="en-US" sz="1200" b="0" i="0" u="none" strike="noStrike" dirty="0">
+                        <a:solidFill>
+                          <a:srgbClr val="333333"/>
+                        </a:solidFill>
+                        <a:effectLst/>
+                        <a:latin typeface="+mn-ea"/>
+                        <a:ea typeface="+mn-ea"/>
+                      </a:endParaRPr>
+                    </a:p>
+                  </a:txBody>
+                  <a:tcPr marL="3839" marR="3839" marT="3839" marB="0" anchor="ctr"/>
+                </a:tc>
+                <a:extLst>
+                  <a:ext uri="{0D108BD9-81ED-4DB2-BD59-A6C34878D82A}">
+                    <a16:rowId xmlns:a16="http://schemas.microsoft.com/office/drawing/2014/main" val="3963269176"/>
+                  </a:ext>
+                </a:extLst>
+              </a:tr>
+              <a:tr h="466406">
+                <a:tc>
+                  <a:txBody>
+                    <a:bodyPr/>
+                    <a:lstStyle/>
+                    <a:p>
+                      <a:pPr algn="l" fontAlgn="ctr"/>
+                      <a:r>
+                        <a:rPr lang="zh-CN" altLang="en-US" sz="1200" u="none" strike="noStrike">
+                          <a:effectLst/>
+                          <a:latin typeface="+mn-ea"/>
+                          <a:ea typeface="+mn-ea"/>
+                        </a:rPr>
+                        <a:t>人中（水沟穴）</a:t>
+                      </a:r>
+                      <a:endParaRPr lang="zh-CN" altLang="en-US" sz="1200" b="0" i="0" u="none" strike="noStrike">
+                        <a:solidFill>
+                          <a:srgbClr val="333333"/>
+                        </a:solidFill>
+                        <a:effectLst/>
+                        <a:latin typeface="+mn-ea"/>
+                        <a:ea typeface="+mn-ea"/>
+                      </a:endParaRPr>
+                    </a:p>
+                  </a:txBody>
+                  <a:tcPr marL="3839" marR="3839" marT="3839" marB="0" anchor="ctr"/>
+                </a:tc>
+                <a:tc>
+                  <a:txBody>
+                    <a:bodyPr/>
+                    <a:lstStyle/>
+                    <a:p>
+                      <a:pPr algn="l" fontAlgn="ctr"/>
+                      <a:r>
+                        <a:rPr lang="zh-CN" altLang="en-US" sz="1200" u="none" strike="noStrike" dirty="0">
+                          <a:effectLst/>
+                          <a:latin typeface="+mn-ea"/>
+                          <a:ea typeface="+mn-ea"/>
+                        </a:rPr>
+                        <a:t>人中穴多用于情绪激动时醒脑、调节呼吸</a:t>
+                      </a:r>
+                      <a:r>
+                        <a:rPr lang="zh-CN" altLang="en-US" sz="1200" u="none" strike="noStrike" dirty="0" smtClean="0">
+                          <a:effectLst/>
+                          <a:latin typeface="+mn-ea"/>
+                          <a:ea typeface="+mn-ea"/>
+                        </a:rPr>
+                        <a:t>。羽</a:t>
+                      </a:r>
+                      <a:r>
+                        <a:rPr lang="zh-CN" altLang="en-US" sz="1200" u="none" strike="noStrike" dirty="0">
+                          <a:effectLst/>
+                          <a:latin typeface="+mn-ea"/>
+                          <a:ea typeface="+mn-ea"/>
+                        </a:rPr>
+                        <a:t>调式</a:t>
+                      </a:r>
+                      <a:r>
+                        <a:rPr lang="zh-CN" altLang="en-US" sz="1200" u="none" strike="noStrike" dirty="0" smtClean="0">
+                          <a:effectLst/>
+                          <a:latin typeface="+mn-ea"/>
+                          <a:ea typeface="+mn-ea"/>
+                        </a:rPr>
+                        <a:t>音乐音色</a:t>
+                      </a:r>
+                      <a:r>
+                        <a:rPr lang="zh-CN" altLang="en-US" sz="1200" u="none" strike="noStrike" dirty="0">
+                          <a:effectLst/>
+                          <a:latin typeface="+mn-ea"/>
+                          <a:ea typeface="+mn-ea"/>
+                        </a:rPr>
+                        <a:t>低沉柔和，可引导呼吸平稳，缓解急促呼吸带来的窒息感；箫曲的悠远</a:t>
+                      </a:r>
+                      <a:r>
+                        <a:rPr lang="zh-CN" altLang="en-US" sz="1200" u="none" strike="noStrike" dirty="0" smtClean="0">
+                          <a:effectLst/>
+                          <a:latin typeface="+mn-ea"/>
+                          <a:ea typeface="+mn-ea"/>
+                        </a:rPr>
+                        <a:t>意境，</a:t>
+                      </a:r>
+                      <a:r>
+                        <a:rPr lang="zh-CN" altLang="en-US" sz="1200" u="none" strike="noStrike" dirty="0">
+                          <a:effectLst/>
+                          <a:latin typeface="+mn-ea"/>
+                          <a:ea typeface="+mn-ea"/>
+                        </a:rPr>
+                        <a:t>能让呼吸节奏与旋律同步，配合敲击帮助平复激动情绪。</a:t>
+                      </a:r>
+                      <a:endParaRPr lang="zh-CN" altLang="en-US" sz="1200" b="0" i="0" u="none" strike="noStrike" dirty="0">
+                        <a:solidFill>
+                          <a:srgbClr val="333333"/>
+                        </a:solidFill>
+                        <a:effectLst/>
+                        <a:latin typeface="+mn-ea"/>
+                        <a:ea typeface="+mn-ea"/>
+                      </a:endParaRPr>
+                    </a:p>
+                  </a:txBody>
+                  <a:tcPr marL="3839" marR="3839" marT="3839" marB="0" anchor="ctr"/>
+                </a:tc>
+                <a:extLst>
+                  <a:ext uri="{0D108BD9-81ED-4DB2-BD59-A6C34878D82A}">
+                    <a16:rowId xmlns:a16="http://schemas.microsoft.com/office/drawing/2014/main" val="1076230948"/>
+                  </a:ext>
+                </a:extLst>
+              </a:tr>
+              <a:tr h="417310">
+                <a:tc>
+                  <a:txBody>
+                    <a:bodyPr/>
+                    <a:lstStyle/>
+                    <a:p>
+                      <a:pPr algn="l" fontAlgn="ctr"/>
+                      <a:r>
+                        <a:rPr lang="zh-CN" altLang="en-US" sz="1200" u="none" strike="noStrike">
+                          <a:effectLst/>
+                          <a:latin typeface="+mn-ea"/>
+                          <a:ea typeface="+mn-ea"/>
+                        </a:rPr>
+                        <a:t>下巴（承浆穴）</a:t>
+                      </a:r>
+                      <a:endParaRPr lang="zh-CN" altLang="en-US" sz="1200" b="0" i="0" u="none" strike="noStrike">
+                        <a:solidFill>
+                          <a:srgbClr val="333333"/>
+                        </a:solidFill>
+                        <a:effectLst/>
+                        <a:latin typeface="+mn-ea"/>
+                        <a:ea typeface="+mn-ea"/>
+                      </a:endParaRPr>
+                    </a:p>
+                  </a:txBody>
+                  <a:tcPr marL="3839" marR="3839" marT="3839" marB="0" anchor="ctr"/>
+                </a:tc>
+                <a:tc>
+                  <a:txBody>
+                    <a:bodyPr/>
+                    <a:lstStyle/>
+                    <a:p>
+                      <a:pPr algn="l" fontAlgn="ctr"/>
+                      <a:r>
+                        <a:rPr lang="zh-CN" altLang="en-US" sz="1200" u="none" strike="noStrike" dirty="0">
+                          <a:effectLst/>
+                          <a:latin typeface="+mn-ea"/>
+                          <a:ea typeface="+mn-ea"/>
+                        </a:rPr>
+                        <a:t>该穴位可化解情绪紧绷，缓解颞下颌关节压力。宫调对应脾脏，旋律浑厚庄重，能缓解思虑过度</a:t>
+                      </a:r>
+                      <a:r>
+                        <a:rPr lang="zh-CN" altLang="en-US" sz="1200" u="none" strike="noStrike" dirty="0" smtClean="0">
+                          <a:effectLst/>
+                          <a:latin typeface="+mn-ea"/>
+                          <a:ea typeface="+mn-ea"/>
+                        </a:rPr>
+                        <a:t>，宫调曲可</a:t>
+                      </a:r>
+                      <a:r>
+                        <a:rPr lang="zh-CN" altLang="en-US" sz="1200" u="none" strike="noStrike" dirty="0">
+                          <a:effectLst/>
+                          <a:latin typeface="+mn-ea"/>
+                          <a:ea typeface="+mn-ea"/>
+                        </a:rPr>
+                        <a:t>辅助放松面部肌肉，配合敲击减轻因情绪紧绷导致的下颌不适；</a:t>
+                      </a:r>
+                      <a:r>
+                        <a:rPr lang="zh-CN" altLang="en-US" sz="1200" u="none" strike="noStrike" dirty="0" smtClean="0">
+                          <a:effectLst/>
+                          <a:latin typeface="+mn-ea"/>
+                          <a:ea typeface="+mn-ea"/>
+                        </a:rPr>
+                        <a:t>同时音乐</a:t>
+                      </a:r>
+                      <a:r>
+                        <a:rPr lang="zh-CN" altLang="en-US" sz="1200" u="none" strike="noStrike" dirty="0">
+                          <a:effectLst/>
+                          <a:latin typeface="+mn-ea"/>
+                          <a:ea typeface="+mn-ea"/>
+                        </a:rPr>
+                        <a:t>节奏平稳，</a:t>
+                      </a:r>
+                      <a:r>
+                        <a:rPr lang="zh-CN" altLang="en-US" sz="1200" u="none" strike="noStrike" dirty="0" smtClean="0">
+                          <a:effectLst/>
+                          <a:latin typeface="+mn-ea"/>
+                          <a:ea typeface="+mn-ea"/>
+                        </a:rPr>
+                        <a:t>契合“</a:t>
+                      </a:r>
+                      <a:r>
+                        <a:rPr lang="zh-CN" altLang="en-US" sz="1200" u="none" strike="noStrike" dirty="0">
+                          <a:effectLst/>
+                          <a:latin typeface="+mn-ea"/>
+                          <a:ea typeface="+mn-ea"/>
+                        </a:rPr>
+                        <a:t>弱化身体不适感” 的音乐选择原则。</a:t>
+                      </a:r>
+                      <a:endParaRPr lang="zh-CN" altLang="en-US" sz="1200" b="0" i="0" u="none" strike="noStrike" dirty="0">
+                        <a:solidFill>
+                          <a:srgbClr val="333333"/>
+                        </a:solidFill>
+                        <a:effectLst/>
+                        <a:latin typeface="+mn-ea"/>
+                        <a:ea typeface="+mn-ea"/>
+                      </a:endParaRPr>
+                    </a:p>
+                  </a:txBody>
+                  <a:tcPr marL="3839" marR="3839" marT="3839" marB="0" anchor="ctr"/>
+                </a:tc>
+                <a:extLst>
+                  <a:ext uri="{0D108BD9-81ED-4DB2-BD59-A6C34878D82A}">
+                    <a16:rowId xmlns:a16="http://schemas.microsoft.com/office/drawing/2014/main" val="3700704300"/>
+                  </a:ext>
+                </a:extLst>
+              </a:tr>
+              <a:tr h="454131">
+                <a:tc>
+                  <a:txBody>
+                    <a:bodyPr/>
+                    <a:lstStyle/>
+                    <a:p>
+                      <a:pPr algn="l" fontAlgn="ctr"/>
+                      <a:r>
+                        <a:rPr lang="zh-CN" altLang="en-US" sz="1200" u="none" strike="noStrike">
+                          <a:effectLst/>
+                          <a:latin typeface="+mn-ea"/>
+                          <a:ea typeface="+mn-ea"/>
+                        </a:rPr>
+                        <a:t>锁骨下方（俞府穴）</a:t>
+                      </a:r>
+                      <a:endParaRPr lang="zh-CN" altLang="en-US" sz="1200" b="0" i="0" u="none" strike="noStrike">
+                        <a:solidFill>
+                          <a:srgbClr val="333333"/>
+                        </a:solidFill>
+                        <a:effectLst/>
+                        <a:latin typeface="+mn-ea"/>
+                        <a:ea typeface="+mn-ea"/>
+                      </a:endParaRPr>
+                    </a:p>
+                  </a:txBody>
+                  <a:tcPr marL="3839" marR="3839" marT="3839" marB="0" anchor="ctr"/>
+                </a:tc>
+                <a:tc>
+                  <a:txBody>
+                    <a:bodyPr/>
+                    <a:lstStyle/>
+                    <a:p>
+                      <a:pPr algn="l" fontAlgn="ctr"/>
+                      <a:r>
+                        <a:rPr lang="zh-CN" altLang="en-US" sz="1200" u="none" strike="noStrike" dirty="0">
+                          <a:effectLst/>
+                          <a:latin typeface="+mn-ea"/>
+                          <a:ea typeface="+mn-ea"/>
+                        </a:rPr>
+                        <a:t>此穴位可缓解胸闷气短，释放胸腔积压的情绪</a:t>
+                      </a:r>
+                      <a:r>
+                        <a:rPr lang="zh-CN" altLang="en-US" sz="1200" u="none" strike="noStrike" dirty="0" smtClean="0">
+                          <a:effectLst/>
+                          <a:latin typeface="+mn-ea"/>
+                          <a:ea typeface="+mn-ea"/>
+                        </a:rPr>
+                        <a:t>。徵</a:t>
+                      </a:r>
+                      <a:r>
+                        <a:rPr lang="zh-CN" altLang="en-US" sz="1200" u="none" strike="noStrike" dirty="0">
+                          <a:effectLst/>
+                          <a:latin typeface="+mn-ea"/>
+                          <a:ea typeface="+mn-ea"/>
+                        </a:rPr>
+                        <a:t>调式代表曲，热烈明亮，能养心安神，促进胸腔气血循环，适配该穴位疏导胸腔情绪的功能</a:t>
+                      </a:r>
+                      <a:r>
+                        <a:rPr lang="zh-CN" altLang="en-US" sz="1200" u="none" strike="noStrike" dirty="0" smtClean="0">
+                          <a:effectLst/>
+                          <a:latin typeface="+mn-ea"/>
+                          <a:ea typeface="+mn-ea"/>
+                        </a:rPr>
+                        <a:t>；轻快</a:t>
+                      </a:r>
+                      <a:r>
+                        <a:rPr lang="zh-CN" altLang="en-US" sz="1200" u="none" strike="noStrike" dirty="0">
+                          <a:effectLst/>
+                          <a:latin typeface="+mn-ea"/>
+                          <a:ea typeface="+mn-ea"/>
+                        </a:rPr>
+                        <a:t>民乐，搭配锁骨下方穴位敲击，</a:t>
+                      </a:r>
+                      <a:r>
+                        <a:rPr lang="zh-CN" altLang="en-US" sz="1200" u="none" strike="noStrike" dirty="0" smtClean="0">
+                          <a:effectLst/>
+                          <a:latin typeface="+mn-ea"/>
+                          <a:ea typeface="+mn-ea"/>
+                        </a:rPr>
+                        <a:t>帮助缓解</a:t>
+                      </a:r>
+                      <a:r>
+                        <a:rPr lang="zh-CN" altLang="en-US" sz="1200" u="none" strike="noStrike" dirty="0">
+                          <a:effectLst/>
+                          <a:latin typeface="+mn-ea"/>
+                          <a:ea typeface="+mn-ea"/>
+                        </a:rPr>
+                        <a:t>职场压力带来的胸闷，提升情绪释放效率。</a:t>
+                      </a:r>
+                      <a:endParaRPr lang="zh-CN" altLang="en-US" sz="1200" b="0" i="0" u="none" strike="noStrike" dirty="0">
+                        <a:solidFill>
+                          <a:srgbClr val="333333"/>
+                        </a:solidFill>
+                        <a:effectLst/>
+                        <a:latin typeface="+mn-ea"/>
+                        <a:ea typeface="+mn-ea"/>
+                      </a:endParaRPr>
+                    </a:p>
+                  </a:txBody>
+                  <a:tcPr marL="3839" marR="3839" marT="3839" marB="0" anchor="ctr"/>
+                </a:tc>
+                <a:extLst>
+                  <a:ext uri="{0D108BD9-81ED-4DB2-BD59-A6C34878D82A}">
+                    <a16:rowId xmlns:a16="http://schemas.microsoft.com/office/drawing/2014/main" val="2095075859"/>
+                  </a:ext>
+                </a:extLst>
+              </a:tr>
+              <a:tr h="478679">
+                <a:tc>
+                  <a:txBody>
+                    <a:bodyPr/>
+                    <a:lstStyle/>
+                    <a:p>
+                      <a:pPr algn="l" fontAlgn="ctr"/>
+                      <a:r>
+                        <a:rPr lang="zh-CN" altLang="en-US" sz="1200" u="none" strike="noStrike">
+                          <a:effectLst/>
+                          <a:latin typeface="+mn-ea"/>
+                          <a:ea typeface="+mn-ea"/>
+                        </a:rPr>
+                        <a:t>腋下（大包穴）</a:t>
+                      </a:r>
+                      <a:endParaRPr lang="zh-CN" altLang="en-US" sz="1200" b="0" i="0" u="none" strike="noStrike">
+                        <a:solidFill>
+                          <a:srgbClr val="333333"/>
+                        </a:solidFill>
+                        <a:effectLst/>
+                        <a:latin typeface="+mn-ea"/>
+                        <a:ea typeface="+mn-ea"/>
+                      </a:endParaRPr>
+                    </a:p>
+                  </a:txBody>
+                  <a:tcPr marL="3839" marR="3839" marT="3839" marB="0" anchor="ctr"/>
+                </a:tc>
+                <a:tc>
+                  <a:txBody>
+                    <a:bodyPr/>
+                    <a:lstStyle/>
+                    <a:p>
+                      <a:pPr algn="l" fontAlgn="ctr"/>
+                      <a:r>
+                        <a:rPr lang="zh-CN" altLang="en-US" sz="1200" u="none" strike="noStrike" dirty="0">
+                          <a:effectLst/>
+                          <a:latin typeface="+mn-ea"/>
+                          <a:ea typeface="+mn-ea"/>
+                        </a:rPr>
+                        <a:t>腋下大包穴可疏肝健脾，释放胸腔负面情绪。商调</a:t>
+                      </a:r>
+                      <a:r>
+                        <a:rPr lang="zh-CN" altLang="en-US" sz="1200" u="none" strike="noStrike" dirty="0" smtClean="0">
+                          <a:effectLst/>
+                          <a:latin typeface="+mn-ea"/>
+                          <a:ea typeface="+mn-ea"/>
+                        </a:rPr>
+                        <a:t>式高亢</a:t>
+                      </a:r>
+                      <a:r>
+                        <a:rPr lang="zh-CN" altLang="en-US" sz="1200" u="none" strike="noStrike" dirty="0">
+                          <a:effectLst/>
+                          <a:latin typeface="+mn-ea"/>
+                          <a:ea typeface="+mn-ea"/>
+                        </a:rPr>
+                        <a:t>清越，能辅助疏肝理气，配合敲击释放压抑的复杂情绪，契合穴位调节脏腑与情绪的双重作用；这类合奏乐的治愈力</a:t>
+                      </a:r>
+                      <a:r>
+                        <a:rPr lang="zh-CN" altLang="en-US" sz="1200" u="none" strike="noStrike" dirty="0" smtClean="0">
+                          <a:effectLst/>
+                          <a:latin typeface="+mn-ea"/>
+                          <a:ea typeface="+mn-ea"/>
+                        </a:rPr>
+                        <a:t>与 </a:t>
+                      </a:r>
+                      <a:r>
+                        <a:rPr lang="zh-CN" altLang="en-US" sz="1200" u="none" strike="noStrike" dirty="0">
+                          <a:effectLst/>
+                          <a:latin typeface="+mn-ea"/>
+                          <a:ea typeface="+mn-ea"/>
+                        </a:rPr>
+                        <a:t>“音乐强化穴位情绪联动” 理念相符，可帮助卸掉猜忌等负面情绪。</a:t>
+                      </a:r>
+                      <a:endParaRPr lang="zh-CN" altLang="en-US" sz="1200" b="0" i="0" u="none" strike="noStrike" dirty="0">
+                        <a:solidFill>
+                          <a:srgbClr val="333333"/>
+                        </a:solidFill>
+                        <a:effectLst/>
+                        <a:latin typeface="+mn-ea"/>
+                        <a:ea typeface="+mn-ea"/>
+                      </a:endParaRPr>
+                    </a:p>
+                  </a:txBody>
+                  <a:tcPr marL="3839" marR="3839" marT="3839" marB="0" anchor="ctr"/>
+                </a:tc>
+                <a:extLst>
+                  <a:ext uri="{0D108BD9-81ED-4DB2-BD59-A6C34878D82A}">
+                    <a16:rowId xmlns:a16="http://schemas.microsoft.com/office/drawing/2014/main" val="3451696052"/>
+                  </a:ext>
+                </a:extLst>
+              </a:tr>
+              <a:tr h="405037">
+                <a:tc>
+                  <a:txBody>
+                    <a:bodyPr/>
+                    <a:lstStyle/>
+                    <a:p>
+                      <a:pPr algn="l" fontAlgn="ctr"/>
+                      <a:r>
+                        <a:rPr lang="zh-CN" altLang="en-US" sz="1200" u="none" strike="noStrike">
+                          <a:effectLst/>
+                          <a:latin typeface="+mn-ea"/>
+                          <a:ea typeface="+mn-ea"/>
+                        </a:rPr>
+                        <a:t>头顶（百会穴）</a:t>
+                      </a:r>
+                      <a:endParaRPr lang="zh-CN" altLang="en-US" sz="1200" b="0" i="0" u="none" strike="noStrike">
+                        <a:solidFill>
+                          <a:srgbClr val="333333"/>
+                        </a:solidFill>
+                        <a:effectLst/>
+                        <a:latin typeface="+mn-ea"/>
+                        <a:ea typeface="+mn-ea"/>
+                      </a:endParaRPr>
+                    </a:p>
+                  </a:txBody>
+                  <a:tcPr marL="3839" marR="3839" marT="3839" marB="0" anchor="ctr"/>
+                </a:tc>
+                <a:tc>
+                  <a:txBody>
+                    <a:bodyPr/>
+                    <a:lstStyle/>
+                    <a:p>
+                      <a:pPr algn="l" fontAlgn="ctr"/>
+                      <a:r>
+                        <a:rPr lang="zh-CN" altLang="en-US" sz="1200" u="none" strike="noStrike" dirty="0">
+                          <a:effectLst/>
+                          <a:latin typeface="+mn-ea"/>
+                          <a:ea typeface="+mn-ea"/>
+                        </a:rPr>
+                        <a:t>百会穴负责平衡整体情绪，释放恐惧，调节大脑功能</a:t>
+                      </a:r>
+                      <a:r>
+                        <a:rPr lang="zh-CN" altLang="en-US" sz="1200" u="none" strike="noStrike" dirty="0" smtClean="0">
+                          <a:effectLst/>
+                          <a:latin typeface="+mn-ea"/>
+                          <a:ea typeface="+mn-ea"/>
+                        </a:rPr>
+                        <a:t>。选用</a:t>
+                      </a:r>
+                      <a:r>
+                        <a:rPr lang="zh-CN" altLang="en-US" sz="1200" u="none" strike="noStrike" dirty="0">
+                          <a:effectLst/>
+                          <a:latin typeface="+mn-ea"/>
+                          <a:ea typeface="+mn-ea"/>
+                        </a:rPr>
+                        <a:t>空灵意境的音乐搭配这类核心调节穴位，这类音乐能引导身心能量流通</a:t>
+                      </a:r>
+                      <a:r>
+                        <a:rPr lang="zh-CN" altLang="en-US" sz="1200" u="none" strike="noStrike" dirty="0" smtClean="0">
+                          <a:effectLst/>
+                          <a:latin typeface="+mn-ea"/>
+                          <a:ea typeface="+mn-ea"/>
+                        </a:rPr>
+                        <a:t>；羽</a:t>
+                      </a:r>
+                      <a:r>
+                        <a:rPr lang="zh-CN" altLang="en-US" sz="1200" u="none" strike="noStrike" dirty="0">
+                          <a:effectLst/>
+                          <a:latin typeface="+mn-ea"/>
+                          <a:ea typeface="+mn-ea"/>
+                        </a:rPr>
+                        <a:t>调</a:t>
+                      </a:r>
+                      <a:r>
+                        <a:rPr lang="zh-CN" altLang="en-US" sz="1200" u="none" strike="noStrike" dirty="0" smtClean="0">
+                          <a:effectLst/>
+                          <a:latin typeface="+mn-ea"/>
+                          <a:ea typeface="+mn-ea"/>
+                        </a:rPr>
+                        <a:t>曲可</a:t>
+                      </a:r>
+                      <a:r>
+                        <a:rPr lang="zh-CN" altLang="en-US" sz="1200" u="none" strike="noStrike" dirty="0">
+                          <a:effectLst/>
+                          <a:latin typeface="+mn-ea"/>
+                          <a:ea typeface="+mn-ea"/>
+                        </a:rPr>
+                        <a:t>补肾固精、缓解恐惧，与百会穴驱散强烈负面情绪、平衡身心的核心作用高度匹配。</a:t>
+                      </a:r>
+                      <a:endParaRPr lang="zh-CN" altLang="en-US" sz="1200" b="0" i="0" u="none" strike="noStrike" dirty="0">
+                        <a:solidFill>
+                          <a:srgbClr val="333333"/>
+                        </a:solidFill>
+                        <a:effectLst/>
+                        <a:latin typeface="+mn-ea"/>
+                        <a:ea typeface="+mn-ea"/>
+                      </a:endParaRPr>
+                    </a:p>
+                  </a:txBody>
+                  <a:tcPr marL="3839" marR="3839" marT="3839" marB="0" anchor="ctr"/>
+                </a:tc>
+                <a:extLst>
+                  <a:ext uri="{0D108BD9-81ED-4DB2-BD59-A6C34878D82A}">
+                    <a16:rowId xmlns:a16="http://schemas.microsoft.com/office/drawing/2014/main" val="3927589382"/>
+                  </a:ext>
+                </a:extLst>
+              </a:tr>
+            </a:tbl>
+          </a:graphicData>
+        </a:graphic>
+      </p:graphicFrame>
+    </p:spTree>
+    <p:extLst>
+      <p:ext uri="{BB962C8B-B14F-4D97-AF65-F5344CB8AC3E}">
+        <p14:creationId xmlns:p14="http://schemas.microsoft.com/office/powerpoint/2010/main" val="1448848533"/>
+      </p:ext>
+    </p:extLst>
+  </p:cSld>
+  <p:clrMapOvr>
+    <a:masterClrMapping/>
+  </p:clrMapOvr>
+  <p:timing>
+    <p:tnLst>
+      <p:par>
+        <p:cTn id="1" dur="indefinite" restart="never" nodeType="tmRoot"/>
+      </p:par>
+    </p:tnLst>
+  </p:timing>
+</p:sld>
+</file>
+
+<file path=ppt/slides/slide31.xml><?xml version="1.0" encoding="utf-8"?>
+<p:sld xmlns:a="http://schemas.openxmlformats.org/drawingml/2006/main" xmlns:r="http://schemas.openxmlformats.org/officeDocument/2006/relationships" xmlns:p="http://schemas.openxmlformats.org/presentationml/2006/main">
+  <p:cSld>
+    <p:spTree>
+      <p:nvGrpSpPr>
+        <p:cNvPr id="1" name="">
+          <a:extLst>
+            <a:ext uri="{FF2B5EF4-FFF2-40B4-BE49-F238E27FC236}">
+              <a16:creationId xmlns:a16="http://schemas.microsoft.com/office/drawing/2014/main" id="{342F93BE-C7A7-1FD2-AD5F-96083C37D57C}"/>
+            </a:ext>
+          </a:extLst>
+        </p:cNvPr>
+        <p:cNvGrpSpPr/>
+        <p:nvPr/>
+      </p:nvGrpSpPr>
+      <p:grpSpPr>
+        <a:xfrm>
+          <a:off x="0" y="0"/>
+          <a:ext cx="0" cy="0"/>
+          <a:chOff x="0" y="0"/>
+          <a:chExt cx="0" cy="0"/>
+        </a:xfrm>
+      </p:grpSpPr>
+      <p:sp>
+        <p:nvSpPr>
+          <p:cNvPr id="2" name="标题 1">
+            <a:extLst>
+              <a:ext uri="{FF2B5EF4-FFF2-40B4-BE49-F238E27FC236}">
+                <a16:creationId xmlns:a16="http://schemas.microsoft.com/office/drawing/2014/main" id="{8814383D-3559-DBE6-F00D-9A93B3A95220}"/>
+              </a:ext>
+            </a:extLst>
+          </p:cNvPr>
+          <p:cNvSpPr>
+            <a:spLocks noGrp="1"/>
+          </p:cNvSpPr>
+          <p:nvPr>
+            <p:ph type="title"/>
+          </p:nvPr>
+        </p:nvSpPr>
+        <p:spPr>
+          <a:xfrm>
+            <a:off x="521208" y="662740"/>
+            <a:ext cx="11155680" cy="936652"/>
+          </a:xfrm>
+        </p:spPr>
+        <p:txBody>
+          <a:bodyPr/>
+          <a:lstStyle/>
+          <a:p>
+            <a:r>
+              <a:rPr lang="en-US" altLang="zh-CN" sz="4400" dirty="0"/>
+              <a:t>EFT</a:t>
+            </a:r>
+            <a:r>
+              <a:rPr lang="zh-CN" altLang="en-US" sz="4400" dirty="0"/>
+              <a:t>心理自助</a:t>
+            </a:r>
+            <a:r>
+              <a:rPr lang="zh-CN" altLang="en-US" sz="4400" dirty="0" smtClean="0"/>
+              <a:t>操的音乐</a:t>
+            </a:r>
+            <a:r>
+              <a:rPr lang="zh-CN" altLang="en-US" sz="4400" dirty="0" smtClean="0"/>
+              <a:t>选择</a:t>
+            </a:r>
+            <a:r>
+              <a:rPr lang="zh-CN" altLang="en-US" sz="4400" dirty="0" smtClean="0"/>
+              <a:t>（</a:t>
+            </a:r>
+            <a:r>
+              <a:rPr lang="en-US" altLang="zh-CN" sz="4400" dirty="0" smtClean="0"/>
+              <a:t>3</a:t>
             </a:r>
             <a:r>
               <a:rPr lang="zh-CN" altLang="en-US" sz="4400" dirty="0" smtClean="0"/>
@@ -20202,7 +20870,7 @@
           <p:nvPr>
             <p:extLst>
               <p:ext uri="{D42A27DB-BD31-4B8C-83A1-F6EECF244321}">
-                <p14:modId xmlns:p14="http://schemas.microsoft.com/office/powerpoint/2010/main" val="2913299919"/>
+                <p14:modId xmlns:p14="http://schemas.microsoft.com/office/powerpoint/2010/main" val="2438531158"/>
               </p:ext>
             </p:extLst>
           </p:nvPr>
@@ -20255,21 +20923,21 @@
                     <a:p>
                       <a:pPr algn="ctr" fontAlgn="ctr"/>
                       <a:r>
-                        <a:rPr lang="zh-CN" altLang="en-US" sz="1200" u="none" strike="noStrike" dirty="0">
+                        <a:rPr lang="zh-CN" altLang="en-US" sz="1200" b="1" u="none" strike="noStrike" dirty="0">
                           <a:effectLst/>
                           <a:latin typeface="+mn-lt"/>
                         </a:rPr>
                         <a:t>对应情绪 </a:t>
                       </a:r>
                       <a:r>
-                        <a:rPr lang="en-US" altLang="zh-CN" sz="1200" u="none" strike="noStrike" dirty="0">
+                        <a:rPr lang="en-US" altLang="zh-CN" sz="1200" b="1" u="none" strike="noStrike" dirty="0">
                           <a:effectLst/>
                           <a:latin typeface="+mn-lt"/>
                         </a:rPr>
                         <a:t>/ </a:t>
                       </a:r>
                       <a:r>
-                        <a:rPr lang="zh-CN" altLang="en-US" sz="1200" u="none" strike="noStrike" dirty="0">
+                        <a:rPr lang="zh-CN" altLang="en-US" sz="1200" b="1" u="none" strike="noStrike" dirty="0">
                           <a:effectLst/>
                           <a:latin typeface="+mn-lt"/>
                         </a:rPr>
@@ -20294,13 +20962,13 @@
                     <a:p>
                       <a:pPr algn="ctr" fontAlgn="ctr"/>
                       <a:r>
-                        <a:rPr lang="zh-CN" altLang="en-US" sz="1200" u="none" strike="noStrike">
+                        <a:rPr lang="zh-CN" altLang="en-US" sz="1200" b="1" u="none" strike="noStrike" dirty="0">
                           <a:effectLst/>
                           <a:latin typeface="+mn-lt"/>
                         </a:rPr>
                         <a:t>音乐</a:t>
                       </a:r>
-                      <a:endParaRPr lang="zh-CN" altLang="en-US" sz="1200" b="1" i="0" u="none" strike="noStrike">
+                      <a:endParaRPr lang="zh-CN" altLang="en-US" sz="1200" b="1" i="0" u="none" strike="noStrike" dirty="0">
                         <a:solidFill>
                           <a:srgbClr val="000000"/>
                         </a:solidFill>
@@ -20319,13 +20987,13 @@
                     <a:p>
                       <a:pPr algn="ctr" fontAlgn="ctr"/>
                       <a:r>
-                        <a:rPr lang="zh-CN" altLang="en-US" sz="1200" u="none" strike="noStrike">
+                        <a:rPr lang="zh-CN" altLang="en-US" sz="1200" b="1" u="none" strike="noStrike" dirty="0">
                           <a:effectLst/>
                           <a:latin typeface="+mn-lt"/>
                         </a:rPr>
                         <a:t>具体作用</a:t>
                       </a:r>
-                      <a:endParaRPr lang="zh-CN" altLang="en-US" sz="1200" b="1" i="0" u="none" strike="noStrike">
+                      <a:endParaRPr lang="zh-CN" altLang="en-US" sz="1200" b="1" i="0" u="none" strike="noStrike" dirty="0">
                         <a:solidFill>
                           <a:srgbClr val="000000"/>
                         </a:solidFill>
@@ -20344,13 +21012,13 @@
                     <a:p>
                       <a:pPr algn="ctr" fontAlgn="ctr"/>
                       <a:r>
-                        <a:rPr lang="zh-CN" altLang="en-US" sz="1200" u="none" strike="noStrike">
+                        <a:rPr lang="zh-CN" altLang="en-US" sz="1200" b="1" u="none" strike="noStrike" dirty="0">
                           <a:effectLst/>
                           <a:latin typeface="+mn-lt"/>
                         </a:rPr>
                         <a:t>配套引导语</a:t>
                       </a:r>
-                      <a:endParaRPr lang="zh-CN" altLang="en-US" sz="1200" b="1" i="0" u="none" strike="noStrike">
+                      <a:endParaRPr lang="zh-CN" altLang="en-US" sz="1200" b="1" i="0" u="none" strike="noStrike" dirty="0">
                         <a:solidFill>
                           <a:srgbClr val="000000"/>
                         </a:solidFill>
@@ -20401,34 +21069,34 @@
                     <a:p>
                       <a:pPr algn="l" fontAlgn="ctr"/>
                       <a:r>
-                        <a:rPr lang="en-US" sz="1200" u="none" strike="noStrike">
+                        <a:rPr lang="en-US" sz="1200" u="none" strike="noStrike" dirty="0">
                           <a:effectLst/>
                           <a:latin typeface="+mn-lt"/>
                         </a:rPr>
                         <a:t>going home（</a:t>
                       </a:r>
                       <a:r>
-                        <a:rPr lang="zh-CN" altLang="en-US" sz="1200" u="none" strike="noStrike">
+                        <a:rPr lang="zh-CN" altLang="en-US" sz="1200" u="none" strike="noStrike" dirty="0">
                           <a:effectLst/>
                           <a:latin typeface="+mn-lt"/>
                         </a:rPr>
                         <a:t>编号 </a:t>
                       </a:r>
                       <a:r>
-                        <a:rPr lang="en-US" altLang="zh-CN" sz="1200" u="none" strike="noStrike">
+                        <a:rPr lang="en-US" altLang="zh-CN" sz="1200" u="none" strike="noStrike" dirty="0">
                           <a:effectLst/>
                           <a:latin typeface="+mn-lt"/>
                         </a:rPr>
                         <a:t>61</a:t>
                       </a:r>
                       <a:r>
-                        <a:rPr lang="zh-CN" altLang="en-US" sz="1200" u="none" strike="noStrike">
+                        <a:rPr lang="zh-CN" altLang="en-US" sz="1200" u="none" strike="noStrike" dirty="0">
                           <a:effectLst/>
                           <a:latin typeface="+mn-lt"/>
                         </a:rPr>
                         <a:t>）</a:t>
                       </a:r>
-                      <a:endParaRPr lang="zh-CN" altLang="en-US" sz="1200" b="0" i="0" u="none" strike="noStrike">
+                      <a:endParaRPr lang="zh-CN" altLang="en-US" sz="1200" b="0" i="0" u="none" strike="noStrike" dirty="0">
                         <a:solidFill>
                           <a:srgbClr val="000000"/>
                         </a:solidFill>
@@ -21237,7 +21905,7 @@
 </p:sld>
 </file>
 
-<file path=ppt/slides/slide31.xml><?xml version="1.0" encoding="utf-8"?>
+<file path=ppt/slides/slide32.xml><?xml version="1.0" encoding="utf-8"?>
 <p:sld xmlns:a="http://schemas.openxmlformats.org/drawingml/2006/main" xmlns:r="http://schemas.openxmlformats.org/officeDocument/2006/relationships" xmlns:p="http://schemas.openxmlformats.org/presentationml/2006/main">
   <p:cSld>
     <p:spTree>
@@ -21296,11 +21964,19 @@
             </a:r>
             <a:r>
               <a:rPr lang="zh-CN" altLang="en-US" sz="4400" dirty="0" smtClean="0"/>
-              <a:t>操音乐选择（</a:t>
+              <a:t>操的音乐</a:t>
+            </a:r>
+            <a:r>
+              <a:rPr lang="zh-CN" altLang="en-US" sz="4400" dirty="0" smtClean="0"/>
+              <a:t>选择</a:t>
+            </a:r>
+            <a:r>
+              <a:rPr lang="zh-CN" altLang="en-US" sz="4400" dirty="0" smtClean="0"/>
+              <a:t>（</a:t>
             </a:r>
             <a:r>
               <a:rPr lang="en-US" altLang="zh-CN" sz="4400" dirty="0" smtClean="0"/>
-              <a:t>7</a:t>
+              <a:t>4</a:t>
             </a:r>
             <a:r>
               <a:rPr lang="zh-CN" altLang="en-US" sz="4400" dirty="0" smtClean="0"/>
@@ -21319,7 +21995,7 @@
           <p:nvPr>
             <p:extLst>
               <p:ext uri="{D42A27DB-BD31-4B8C-83A1-F6EECF244321}">
-                <p14:modId xmlns:p14="http://schemas.microsoft.com/office/powerpoint/2010/main" val="2625207432"/>
+                <p14:modId xmlns:p14="http://schemas.microsoft.com/office/powerpoint/2010/main" val="505731903"/>
               </p:ext>
             </p:extLst>
           </p:nvPr>
@@ -21372,27 +22048,27 @@
                     <a:p>
                       <a:pPr algn="ctr" fontAlgn="ctr"/>
                       <a:r>
-                        <a:rPr lang="zh-CN" altLang="en-US" sz="1200" u="none" strike="noStrike">
+                        <a:rPr lang="zh-CN" altLang="en-US" sz="1200" b="1" u="none" strike="noStrike" dirty="0">
                           <a:effectLst/>
                           <a:latin typeface="+mn-lt"/>
                         </a:rPr>
                         <a:t>对应情绪 </a:t>
                       </a:r>
                       <a:r>
-                        <a:rPr lang="en-US" altLang="zh-CN" sz="1200" u="none" strike="noStrike">
+                        <a:rPr lang="en-US" altLang="zh-CN" sz="1200" b="1" u="none" strike="noStrike" dirty="0">
                           <a:effectLst/>
                           <a:latin typeface="+mn-lt"/>
                         </a:rPr>
                         <a:t>/ </a:t>
                       </a:r>
                       <a:r>
-                        <a:rPr lang="zh-CN" altLang="en-US" sz="1200" u="none" strike="noStrike">
+                        <a:rPr lang="zh-CN" altLang="en-US" sz="1200" b="1" u="none" strike="noStrike" dirty="0">
                           <a:effectLst/>
                           <a:latin typeface="+mn-lt"/>
                         </a:rPr>
                         <a:t>情况</a:t>
                       </a:r>
-                      <a:endParaRPr lang="zh-CN" altLang="en-US" sz="1200" b="1" i="0" u="none" strike="noStrike">
+                      <a:endParaRPr lang="zh-CN" altLang="en-US" sz="1200" b="1" i="0" u="none" strike="noStrike" dirty="0">
                         <a:solidFill>
                           <a:srgbClr val="000000"/>
                         </a:solidFill>
@@ -21411,13 +22087,13 @@
                     <a:p>
                       <a:pPr algn="ctr" fontAlgn="ctr"/>
                       <a:r>
-                        <a:rPr lang="zh-CN" altLang="en-US" sz="1200" u="none" strike="noStrike">
+                        <a:rPr lang="zh-CN" altLang="en-US" sz="1200" b="1" u="none" strike="noStrike" dirty="0">
                           <a:effectLst/>
                           <a:latin typeface="+mn-lt"/>
                         </a:rPr>
                         <a:t>音乐</a:t>
                       </a:r>
-                      <a:endParaRPr lang="zh-CN" altLang="en-US" sz="1200" b="1" i="0" u="none" strike="noStrike">
+                      <a:endParaRPr lang="zh-CN" altLang="en-US" sz="1200" b="1" i="0" u="none" strike="noStrike" dirty="0">
                         <a:solidFill>
                           <a:srgbClr val="000000"/>
                         </a:solidFill>
@@ -21436,13 +22112,13 @@
                     <a:p>
                       <a:pPr algn="ctr" fontAlgn="ctr"/>
                       <a:r>
-                        <a:rPr lang="zh-CN" altLang="en-US" sz="1200" u="none" strike="noStrike">
+                        <a:rPr lang="zh-CN" altLang="en-US" sz="1200" b="1" u="none" strike="noStrike" dirty="0">
                           <a:effectLst/>
                           <a:latin typeface="+mn-lt"/>
                         </a:rPr>
                         <a:t>具体作用</a:t>
                       </a:r>
-                      <a:endParaRPr lang="zh-CN" altLang="en-US" sz="1200" b="1" i="0" u="none" strike="noStrike">
+                      <a:endParaRPr lang="zh-CN" altLang="en-US" sz="1200" b="1" i="0" u="none" strike="noStrike" dirty="0">
                         <a:solidFill>
                           <a:srgbClr val="000000"/>
                         </a:solidFill>
@@ -21461,13 +22137,13 @@
                     <a:p>
                       <a:pPr algn="ctr" fontAlgn="ctr"/>
                       <a:r>
-                        <a:rPr lang="zh-CN" altLang="en-US" sz="1200" u="none" strike="noStrike">
+                        <a:rPr lang="zh-CN" altLang="en-US" sz="1200" b="1" u="none" strike="noStrike" dirty="0">
                           <a:effectLst/>
                           <a:latin typeface="+mn-lt"/>
                         </a:rPr>
                         <a:t>配套引导语</a:t>
                       </a:r>
-                      <a:endParaRPr lang="zh-CN" altLang="en-US" sz="1200" b="1" i="0" u="none" strike="noStrike">
+                      <a:endParaRPr lang="zh-CN" altLang="en-US" sz="1200" b="1" i="0" u="none" strike="noStrike" dirty="0">
                         <a:solidFill>
                           <a:srgbClr val="000000"/>
                         </a:solidFill>
@@ -22361,7 +23037,7 @@
 </p:sld>
 </file>
 
-<file path=ppt/slides/slide32.xml><?xml version="1.0" encoding="utf-8"?>
+<file path=ppt/slides/slide33.xml><?xml version="1.0" encoding="utf-8"?>
 <p:sld xmlns:a="http://schemas.openxmlformats.org/drawingml/2006/main" xmlns:r="http://schemas.openxmlformats.org/officeDocument/2006/relationships" xmlns:p="http://schemas.openxmlformats.org/presentationml/2006/main">
   <p:cSld>
     <p:spTree>
@@ -22393,14 +23069,20 @@
           <p:nvPr/>
         </p:nvPicPr>
         <p:blipFill>
-          <a:blip r:embed="rId2"/>
+          <a:blip r:embed="rId2" cstate="screen">
+            <a:extLst>
+              <a:ext uri="{28A0092B-C50C-407E-A947-70E740481C1C}">
+                <a14:useLocalDpi xmlns:a14="http://schemas.microsoft.com/office/drawing/2010/main"/>
+              </a:ext>
+            </a:extLst>
+          </a:blip>
           <a:stretch>
             <a:fillRect/>
           </a:stretch>
         </p:blipFill>
         <p:spPr>
           <a:xfrm>
-            <a:off x="3820552" y="4060680"/>
+            <a:off x="3940028" y="3227924"/>
             <a:ext cx="2278496" cy="2155828"/>
           </a:xfrm>
           <a:prstGeom prst="rect">
@@ -22444,11 +23126,27 @@
             </a:r>
             <a:r>
               <a:rPr lang="zh-CN" altLang="en-US" sz="4400" dirty="0" smtClean="0"/>
-              <a:t>操关键技巧（</a:t>
+              <a:t>操</a:t>
+            </a:r>
+            <a:r>
+              <a:rPr lang="zh-CN" altLang="en-US" sz="4400" dirty="0"/>
+              <a:t>的</a:t>
+            </a:r>
+            <a:r>
+              <a:rPr lang="zh-CN" altLang="en-US" sz="4400" dirty="0" smtClean="0"/>
+              <a:t>关键</a:t>
+            </a:r>
+            <a:r>
+              <a:rPr lang="zh-CN" altLang="en-US" sz="4400" dirty="0" smtClean="0"/>
+              <a:t>技巧</a:t>
+            </a:r>
+            <a:r>
+              <a:rPr lang="zh-CN" altLang="en-US" sz="4400" dirty="0" smtClean="0"/>
+              <a:t>（</a:t>
             </a:r>
             <a:r>
               <a:rPr lang="en-US" altLang="zh-CN" sz="4400" dirty="0" smtClean="0"/>
-              <a:t>8</a:t>
+              <a:t>1</a:t>
             </a:r>
             <a:r>
               <a:rPr lang="zh-CN" altLang="en-US" sz="4400" dirty="0" smtClean="0"/>
@@ -22476,7 +23174,7 @@
         </p:nvSpPr>
         <p:spPr>
           <a:xfrm>
-            <a:off x="518161" y="1599392"/>
+            <a:off x="518161" y="1509209"/>
             <a:ext cx="4691743" cy="4345735"/>
           </a:xfrm>
         </p:spPr>
@@ -22485,15 +23183,206 @@
           <a:lstStyle/>
           <a:p>
             <a:pPr marL="0" indent="0">
+              <a:lnSpc>
+                <a:spcPts val="1700"/>
+              </a:lnSpc>
               <a:buNone/>
             </a:pPr>
             <a:r>
-              <a:rPr lang="zh-CN" altLang="en-US" sz="1200" dirty="0" smtClean="0">
+              <a:rPr lang="zh-CN" altLang="en-US" sz="1400" dirty="0" smtClean="0">
                 <a:latin typeface="+mn-ea"/>
               </a:rPr>
               <a:t>第一步，心理调节目标的确定</a:t>
             </a:r>
-            <a:endParaRPr lang="en-US" altLang="zh-CN" sz="1200" dirty="0" smtClean="0">
+            <a:endParaRPr lang="en-US" altLang="zh-CN" sz="1400" dirty="0" smtClean="0">
+              <a:latin typeface="+mn-ea"/>
+            </a:endParaRPr>
+          </a:p>
+          <a:p>
+            <a:pPr marL="0" indent="0">
+              <a:lnSpc>
+                <a:spcPts val="1700"/>
+              </a:lnSpc>
+              <a:buNone/>
+            </a:pPr>
+            <a:r>
+              <a:rPr lang="zh-CN" altLang="en-US" sz="1400" dirty="0" smtClean="0">
+                <a:latin typeface="+mn-ea"/>
+              </a:rPr>
+              <a:t>首先要确定我们要调节什么样的负面心理，是一个痛苦的回忆，一个心结，还是抑郁症、焦虑、强迫等等。</a:t>
+            </a:r>
+            <a:endParaRPr lang="en-US" altLang="zh-CN" sz="1400" dirty="0" smtClean="0">
+              <a:latin typeface="+mn-ea"/>
+            </a:endParaRPr>
+          </a:p>
+          <a:p>
+            <a:pPr marL="0" indent="0">
+              <a:lnSpc>
+                <a:spcPts val="1700"/>
+              </a:lnSpc>
+              <a:buNone/>
+            </a:pPr>
+            <a:r>
+              <a:rPr lang="zh-CN" altLang="en-US" sz="1400" dirty="0" smtClean="0">
+                <a:latin typeface="+mn-ea"/>
+              </a:rPr>
+              <a:t>第二步，负面心理指数的确定</a:t>
+            </a:r>
+            <a:endParaRPr lang="en-US" altLang="zh-CN" sz="1400" dirty="0" smtClean="0">
+              <a:latin typeface="+mn-ea"/>
+            </a:endParaRPr>
+          </a:p>
+          <a:p>
+            <a:pPr marL="0" indent="0">
+              <a:lnSpc>
+                <a:spcPts val="1700"/>
+              </a:lnSpc>
+              <a:buNone/>
+            </a:pPr>
+            <a:r>
+              <a:rPr lang="zh-CN" altLang="en-US" sz="1400" dirty="0" smtClean="0">
+                <a:latin typeface="+mn-ea"/>
+              </a:rPr>
+              <a:t>这样可以在调节完成后对心理状态进行比较，看看效果如何。</a:t>
+            </a:r>
+            <a:endParaRPr lang="en-US" altLang="zh-CN" sz="1400" dirty="0" smtClean="0">
+              <a:latin typeface="+mn-ea"/>
+            </a:endParaRPr>
+          </a:p>
+          <a:p>
+            <a:pPr marL="0" indent="0">
+              <a:lnSpc>
+                <a:spcPts val="1700"/>
+              </a:lnSpc>
+              <a:buNone/>
+            </a:pPr>
+            <a:r>
+              <a:rPr lang="zh-CN" altLang="en-US" sz="1400" dirty="0" smtClean="0">
+                <a:latin typeface="+mn-ea"/>
+              </a:rPr>
+              <a:t>第三步，组织提示语</a:t>
+            </a:r>
+            <a:endParaRPr lang="en-US" altLang="zh-CN" sz="1400" dirty="0" smtClean="0">
+              <a:latin typeface="+mn-ea"/>
+            </a:endParaRPr>
+          </a:p>
+          <a:p>
+            <a:pPr marL="0" indent="0">
+              <a:lnSpc>
+                <a:spcPts val="1700"/>
+              </a:lnSpc>
+              <a:buNone/>
+            </a:pPr>
+            <a:r>
+              <a:rPr lang="zh-CN" altLang="en-US" sz="1400" dirty="0" smtClean="0">
+                <a:latin typeface="+mn-ea"/>
+              </a:rPr>
+              <a:t>第四步，一边弹一边大声说出提示语</a:t>
+            </a:r>
+            <a:endParaRPr lang="en-US" altLang="zh-CN" sz="1400" dirty="0" smtClean="0">
+              <a:latin typeface="+mn-ea"/>
+            </a:endParaRPr>
+          </a:p>
+          <a:p>
+            <a:pPr marL="0" indent="0">
+              <a:lnSpc>
+                <a:spcPts val="1700"/>
+              </a:lnSpc>
+              <a:buNone/>
+            </a:pPr>
+            <a:r>
+              <a:rPr lang="zh-CN" altLang="en-US" sz="1400" dirty="0" smtClean="0">
+                <a:latin typeface="+mn-ea"/>
+              </a:rPr>
+              <a:t>第五步，深呼吸两次，吐出浊气</a:t>
+            </a:r>
+            <a:endParaRPr lang="en-US" altLang="zh-CN" sz="1400" dirty="0" smtClean="0">
+              <a:latin typeface="+mn-ea"/>
+            </a:endParaRPr>
+          </a:p>
+          <a:p>
+            <a:pPr marL="0" indent="0">
+              <a:lnSpc>
+                <a:spcPts val="1700"/>
+              </a:lnSpc>
+              <a:buNone/>
+            </a:pPr>
+            <a:r>
+              <a:rPr lang="zh-CN" altLang="en-US" sz="1400" dirty="0" smtClean="0">
+                <a:latin typeface="+mn-ea"/>
+              </a:rPr>
+              <a:t>第六步，评估第一次心理调节的效果</a:t>
+            </a:r>
+            <a:endParaRPr lang="en-US" altLang="zh-CN" sz="1400" dirty="0" smtClean="0">
+              <a:latin typeface="+mn-ea"/>
+            </a:endParaRPr>
+          </a:p>
+          <a:p>
+            <a:pPr marL="0" indent="0">
+              <a:lnSpc>
+                <a:spcPts val="1700"/>
+              </a:lnSpc>
+              <a:buNone/>
+            </a:pPr>
+            <a:r>
+              <a:rPr lang="zh-CN" altLang="en-US" sz="1400" dirty="0" smtClean="0">
+                <a:latin typeface="+mn-ea"/>
+              </a:rPr>
+              <a:t>第七步，调整提示语，进行第二次心理疏导</a:t>
+            </a:r>
+            <a:endParaRPr lang="en-US" altLang="zh-CN" sz="1400" dirty="0" smtClean="0">
+              <a:latin typeface="+mn-ea"/>
+            </a:endParaRPr>
+          </a:p>
+          <a:p>
+            <a:pPr marL="0" indent="0">
+              <a:lnSpc>
+                <a:spcPts val="1700"/>
+              </a:lnSpc>
+              <a:buNone/>
+            </a:pPr>
+            <a:r>
+              <a:rPr lang="zh-CN" altLang="en-US" sz="1400" dirty="0" smtClean="0">
+                <a:latin typeface="+mn-ea"/>
+              </a:rPr>
+              <a:t>第八步，评估第二次心理疏导的效果</a:t>
+            </a:r>
+            <a:endParaRPr lang="en-US" altLang="zh-CN" sz="1400" dirty="0" smtClean="0">
+              <a:latin typeface="+mn-ea"/>
+            </a:endParaRPr>
+          </a:p>
+          <a:p>
+            <a:pPr marL="0" indent="0">
+              <a:lnSpc>
+                <a:spcPts val="1700"/>
+              </a:lnSpc>
+              <a:buNone/>
+            </a:pPr>
+            <a:r>
+              <a:rPr lang="zh-CN" altLang="en-US" sz="1400" dirty="0" smtClean="0">
+                <a:latin typeface="+mn-ea"/>
+              </a:rPr>
+              <a:t>第九步</a:t>
+            </a:r>
+            <a:r>
+              <a:rPr lang="zh-CN" altLang="en-US" sz="1400" dirty="0">
+                <a:latin typeface="+mn-ea"/>
+              </a:rPr>
+              <a:t>，调整提示语，进行</a:t>
+            </a:r>
+            <a:r>
+              <a:rPr lang="zh-CN" altLang="en-US" sz="1400" dirty="0" smtClean="0">
+                <a:latin typeface="+mn-ea"/>
+              </a:rPr>
+              <a:t>第三次</a:t>
+            </a:r>
+            <a:r>
+              <a:rPr lang="zh-CN" altLang="en-US" sz="1400" dirty="0">
+                <a:latin typeface="+mn-ea"/>
+              </a:rPr>
+              <a:t>心理疏导</a:t>
+            </a:r>
+            <a:endParaRPr lang="en-US" altLang="zh-CN" sz="1400" dirty="0">
               <a:latin typeface="+mn-ea"/>
             </a:endParaRPr>
           </a:p>
@@ -22501,165 +23390,7 @@
             <a:pPr marL="0" indent="0">
               <a:buNone/>
             </a:pPr>
-            <a:r>
-              <a:rPr lang="zh-CN" altLang="en-US" sz="1200" dirty="0" smtClean="0">
-                <a:latin typeface="+mn-ea"/>
-              </a:rPr>
-              <a:t>首先要确定我们要调节什么样的负面心理，是一个痛苦的回忆，一个心结，还是抑郁症、焦虑、强迫等等。</a:t>
-            </a:r>
-            <a:endParaRPr lang="en-US" altLang="zh-CN" sz="1200" dirty="0" smtClean="0">
-              <a:latin typeface="+mn-ea"/>
-            </a:endParaRPr>
-          </a:p>
-          <a:p>
-            <a:pPr marL="0" indent="0">
-              <a:buNone/>
-            </a:pPr>
-            <a:r>
-              <a:rPr lang="zh-CN" altLang="en-US" sz="1200" dirty="0" smtClean="0">
-                <a:latin typeface="+mn-ea"/>
-              </a:rPr>
-              <a:t>第二步，负面心理指数的确定</a:t>
-            </a:r>
-            <a:endParaRPr lang="en-US" altLang="zh-CN" sz="1200" dirty="0" smtClean="0">
-              <a:latin typeface="+mn-ea"/>
-            </a:endParaRPr>
-          </a:p>
-          <a:p>
-            <a:pPr marL="0" indent="0">
-              <a:buNone/>
-            </a:pPr>
-            <a:r>
-              <a:rPr lang="zh-CN" altLang="en-US" sz="1200" dirty="0" smtClean="0">
-                <a:latin typeface="+mn-ea"/>
-              </a:rPr>
-              <a:t>这样可以在调节完成后对心理状态进行比较，看看效果如何。</a:t>
-            </a:r>
-            <a:endParaRPr lang="en-US" altLang="zh-CN" sz="1200" dirty="0" smtClean="0">
-              <a:latin typeface="+mn-ea"/>
-            </a:endParaRPr>
-          </a:p>
-          <a:p>
-            <a:pPr marL="0" indent="0">
-              <a:buNone/>
-            </a:pPr>
-            <a:r>
-              <a:rPr lang="zh-CN" altLang="en-US" sz="1200" dirty="0" smtClean="0">
-                <a:latin typeface="+mn-ea"/>
-              </a:rPr>
-              <a:t>第三步，组织提示语</a:t>
-            </a:r>
-            <a:endParaRPr lang="en-US" altLang="zh-CN" sz="1200" dirty="0" smtClean="0">
-              <a:latin typeface="+mn-ea"/>
-            </a:endParaRPr>
-          </a:p>
-          <a:p>
-            <a:pPr marL="0" indent="0">
-              <a:buNone/>
-            </a:pPr>
-            <a:r>
-              <a:rPr lang="zh-CN" altLang="en-US" sz="1200" dirty="0" smtClean="0">
-                <a:latin typeface="+mn-ea"/>
-              </a:rPr>
-              <a:t>第四步，一边弹一边大声说出提示语</a:t>
-            </a:r>
-            <a:endParaRPr lang="en-US" altLang="zh-CN" sz="1200" dirty="0" smtClean="0">
-              <a:latin typeface="+mn-ea"/>
-            </a:endParaRPr>
-          </a:p>
-          <a:p>
-            <a:pPr marL="0" indent="0">
-              <a:buNone/>
-            </a:pPr>
-            <a:r>
-              <a:rPr lang="zh-CN" altLang="en-US" sz="1200" dirty="0" smtClean="0">
-                <a:latin typeface="+mn-ea"/>
-              </a:rPr>
-              <a:t>第五步，深呼吸两次，吐出浊气</a:t>
-            </a:r>
-            <a:endParaRPr lang="en-US" altLang="zh-CN" sz="1200" dirty="0" smtClean="0">
-              <a:latin typeface="+mn-ea"/>
-            </a:endParaRPr>
-          </a:p>
-          <a:p>
-            <a:pPr marL="0" indent="0">
-              <a:buNone/>
-            </a:pPr>
-            <a:r>
-              <a:rPr lang="zh-CN" altLang="en-US" sz="1200" dirty="0" smtClean="0">
-                <a:latin typeface="+mn-ea"/>
-              </a:rPr>
-              <a:t>第六步，评估第一次心理调节的效果</a:t>
-            </a:r>
-            <a:endParaRPr lang="en-US" altLang="zh-CN" sz="1200" dirty="0" smtClean="0">
-              <a:latin typeface="+mn-ea"/>
-            </a:endParaRPr>
-          </a:p>
-          <a:p>
-            <a:pPr marL="0" indent="0">
-              <a:buNone/>
-            </a:pPr>
-            <a:r>
-              <a:rPr lang="zh-CN" altLang="en-US" sz="1200" dirty="0" smtClean="0">
-                <a:latin typeface="+mn-ea"/>
-              </a:rPr>
-              <a:t>第七步，调整提示语，进行第二次心理疏导</a:t>
-            </a:r>
-            <a:endParaRPr lang="en-US" altLang="zh-CN" sz="1200" dirty="0" smtClean="0">
-              <a:latin typeface="+mn-ea"/>
-            </a:endParaRPr>
-          </a:p>
-          <a:p>
-            <a:pPr marL="0" indent="0">
-              <a:buNone/>
-            </a:pPr>
-            <a:r>
-              <a:rPr lang="zh-CN" altLang="en-US" sz="1200" dirty="0" smtClean="0">
-                <a:latin typeface="+mn-ea"/>
-              </a:rPr>
-              <a:t>第八步，评估第二次心理疏导的效果</a:t>
-            </a:r>
-            <a:endParaRPr lang="en-US" altLang="zh-CN" sz="1200" dirty="0" smtClean="0">
-              <a:latin typeface="+mn-ea"/>
-            </a:endParaRPr>
-          </a:p>
-          <a:p>
-            <a:pPr marL="0" indent="0">
-              <a:buNone/>
-            </a:pPr>
-            <a:r>
-              <a:rPr lang="zh-CN" altLang="en-US" sz="1200" dirty="0" smtClean="0">
-                <a:latin typeface="+mn-ea"/>
-              </a:rPr>
-              <a:t>第九步</a:t>
-            </a:r>
-            <a:r>
-              <a:rPr lang="zh-CN" altLang="en-US" sz="1200" dirty="0">
-                <a:latin typeface="+mn-ea"/>
-              </a:rPr>
-              <a:t>，调整提示语，进行</a:t>
-            </a:r>
-            <a:r>
-              <a:rPr lang="zh-CN" altLang="en-US" sz="1200" dirty="0" smtClean="0">
-                <a:latin typeface="+mn-ea"/>
-              </a:rPr>
-              <a:t>第三次</a:t>
-            </a:r>
-            <a:r>
-              <a:rPr lang="zh-CN" altLang="en-US" sz="1200" dirty="0">
-                <a:latin typeface="+mn-ea"/>
-              </a:rPr>
-              <a:t>心理疏导</a:t>
-            </a:r>
-            <a:endParaRPr lang="en-US" altLang="zh-CN" sz="1200" dirty="0">
-              <a:latin typeface="+mn-ea"/>
-            </a:endParaRPr>
-          </a:p>
-          <a:p>
-            <a:pPr marL="0" indent="0">
-              <a:buNone/>
-            </a:pPr>
-            <a:endParaRPr lang="zh-CN" altLang="en-US" sz="1200" dirty="0">
+            <a:endParaRPr lang="zh-CN" altLang="en-US" sz="1400" dirty="0">
               <a:latin typeface="+mn-ea"/>
             </a:endParaRPr>
           </a:p>
@@ -22681,8 +23412,8 @@
         </p:nvSpPr>
         <p:spPr>
           <a:xfrm>
-            <a:off x="5974080" y="1599392"/>
-            <a:ext cx="5702808" cy="5102942"/>
+            <a:off x="6041571" y="1509209"/>
+            <a:ext cx="5760285" cy="5102942"/>
           </a:xfrm>
           <a:prstGeom prst="rect">
             <a:avLst/>
@@ -22856,341 +23587,383 @@
           </a:lstStyle>
           <a:p>
             <a:pPr marL="0" indent="0">
+              <a:lnSpc>
+                <a:spcPts val="1600"/>
+              </a:lnSpc>
               <a:buFont typeface="Arial" panose="020B0604020202020204" pitchFamily="34" charset="0"/>
               <a:buNone/>
             </a:pPr>
             <a:r>
-              <a:rPr lang="zh-CN" altLang="en-US" sz="1200" b="1" dirty="0" smtClean="0">
+              <a:rPr lang="zh-CN" altLang="en-US" sz="1400" b="1" dirty="0" smtClean="0">
                 <a:latin typeface="+mn-ea"/>
               </a:rPr>
               <a:t>负责心理指数测量方法：我们用</a:t>
             </a:r>
             <a:r>
-              <a:rPr lang="en-US" altLang="zh-CN" sz="1200" b="1" dirty="0" smtClean="0">
+              <a:rPr lang="en-US" altLang="zh-CN" sz="1400" b="1" dirty="0" smtClean="0">
                 <a:latin typeface="+mn-ea"/>
               </a:rPr>
               <a:t>0~10</a:t>
             </a:r>
             <a:r>
-              <a:rPr lang="zh-CN" altLang="en-US" sz="1200" b="1" dirty="0" smtClean="0">
+              <a:rPr lang="zh-CN" altLang="en-US" sz="1400" b="1" dirty="0" smtClean="0">
                 <a:latin typeface="+mn-ea"/>
               </a:rPr>
               <a:t>来表示负面心理指数。</a:t>
             </a:r>
-            <a:endParaRPr lang="en-US" altLang="zh-CN" sz="1200" b="1" dirty="0" smtClean="0">
+            <a:endParaRPr lang="en-US" altLang="zh-CN" sz="1400" b="1" dirty="0" smtClean="0">
               <a:latin typeface="+mn-ea"/>
             </a:endParaRPr>
           </a:p>
           <a:p>
             <a:pPr marL="0" indent="0">
+              <a:lnSpc>
+                <a:spcPts val="1600"/>
+              </a:lnSpc>
               <a:buFont typeface="Arial" panose="020B0604020202020204" pitchFamily="34" charset="0"/>
               <a:buNone/>
             </a:pPr>
             <a:r>
-              <a:rPr lang="en-US" altLang="zh-CN" sz="1200" dirty="0" smtClean="0">
+              <a:rPr lang="en-US" altLang="zh-CN" sz="1400" dirty="0" smtClean="0">
                 <a:latin typeface="+mn-ea"/>
               </a:rPr>
               <a:t>10 - </a:t>
             </a:r>
             <a:r>
-              <a:rPr lang="zh-CN" altLang="en-US" sz="1200" dirty="0" smtClean="0">
+              <a:rPr lang="zh-CN" altLang="en-US" sz="1400" dirty="0" smtClean="0">
                 <a:latin typeface="+mn-ea"/>
               </a:rPr>
               <a:t>代表对事件的负面心理已经到了不可忍受的地步。</a:t>
             </a:r>
-            <a:endParaRPr lang="en-US" altLang="zh-CN" sz="1200" dirty="0" smtClean="0">
+            <a:endParaRPr lang="en-US" altLang="zh-CN" sz="1400" dirty="0" smtClean="0">
               <a:latin typeface="+mn-ea"/>
             </a:endParaRPr>
           </a:p>
           <a:p>
             <a:pPr marL="0" indent="0">
+              <a:lnSpc>
+                <a:spcPts val="1600"/>
+              </a:lnSpc>
               <a:buNone/>
             </a:pPr>
             <a:r>
-              <a:rPr lang="en-US" altLang="zh-CN" sz="1200" dirty="0">
+              <a:rPr lang="en-US" altLang="zh-CN" sz="1400" dirty="0">
                 <a:latin typeface="+mn-ea"/>
               </a:rPr>
               <a:t>9 </a:t>
             </a:r>
             <a:r>
-              <a:rPr lang="en-US" altLang="zh-CN" sz="1200" dirty="0" smtClean="0">
+              <a:rPr lang="en-US" altLang="zh-CN" sz="1400" dirty="0" smtClean="0">
                 <a:latin typeface="+mn-ea"/>
               </a:rPr>
               <a:t>- </a:t>
             </a:r>
             <a:r>
-              <a:rPr lang="zh-CN" altLang="en-US" sz="1200" dirty="0" smtClean="0">
+              <a:rPr lang="zh-CN" altLang="en-US" sz="1400" dirty="0" smtClean="0">
                 <a:latin typeface="+mn-ea"/>
               </a:rPr>
               <a:t>负面情绪很高，感觉非常糟糕，情绪马上要失控。</a:t>
             </a:r>
-            <a:endParaRPr lang="en-US" altLang="zh-CN" sz="1200" dirty="0" smtClean="0">
+            <a:endParaRPr lang="en-US" altLang="zh-CN" sz="1400" dirty="0" smtClean="0">
               <a:latin typeface="+mn-ea"/>
             </a:endParaRPr>
           </a:p>
           <a:p>
             <a:pPr marL="0" indent="0">
+              <a:lnSpc>
+                <a:spcPts val="1600"/>
+              </a:lnSpc>
               <a:buNone/>
             </a:pPr>
             <a:r>
-              <a:rPr lang="en-US" altLang="zh-CN" sz="1200" dirty="0">
+              <a:rPr lang="en-US" altLang="zh-CN" sz="1400" dirty="0">
                 <a:latin typeface="+mn-ea"/>
               </a:rPr>
               <a:t>8 </a:t>
             </a:r>
             <a:r>
-              <a:rPr lang="en-US" altLang="zh-CN" sz="1200" dirty="0" smtClean="0">
+              <a:rPr lang="en-US" altLang="zh-CN" sz="1400" dirty="0" smtClean="0">
                 <a:latin typeface="+mn-ea"/>
               </a:rPr>
               <a:t>- </a:t>
             </a:r>
             <a:r>
-              <a:rPr lang="zh-CN" altLang="en-US" sz="1200" dirty="0" smtClean="0">
+              <a:rPr lang="zh-CN" altLang="en-US" sz="1400" dirty="0" smtClean="0">
                 <a:latin typeface="+mn-ea"/>
               </a:rPr>
               <a:t>感到糟糕，虽然还可以控制一下情绪，但一不小心会失控。</a:t>
             </a:r>
-            <a:endParaRPr lang="en-US" altLang="zh-CN" sz="1200" dirty="0" smtClean="0">
+            <a:endParaRPr lang="en-US" altLang="zh-CN" sz="1400" dirty="0" smtClean="0">
               <a:latin typeface="+mn-ea"/>
             </a:endParaRPr>
           </a:p>
           <a:p>
             <a:pPr marL="0" indent="0">
+              <a:lnSpc>
+                <a:spcPts val="1600"/>
+              </a:lnSpc>
               <a:buFont typeface="Arial" panose="020B0604020202020204" pitchFamily="34" charset="0"/>
               <a:buNone/>
             </a:pPr>
             <a:r>
-              <a:rPr lang="en-US" altLang="zh-CN" sz="1200" dirty="0" smtClean="0">
+              <a:rPr lang="en-US" altLang="zh-CN" sz="1400" dirty="0" smtClean="0">
                 <a:latin typeface="+mn-ea"/>
               </a:rPr>
               <a:t>7 - </a:t>
             </a:r>
             <a:r>
-              <a:rPr lang="zh-CN" altLang="en-US" sz="1200" dirty="0" smtClean="0">
+              <a:rPr lang="zh-CN" altLang="en-US" sz="1400" dirty="0" smtClean="0">
                 <a:latin typeface="+mn-ea"/>
               </a:rPr>
               <a:t>情绪开始要崩溃，在很糟糕的情绪边缘，但还可以努力控制。</a:t>
             </a:r>
-            <a:endParaRPr lang="en-US" altLang="zh-CN" sz="1200" dirty="0" smtClean="0">
+            <a:endParaRPr lang="en-US" altLang="zh-CN" sz="1400" dirty="0" smtClean="0">
               <a:latin typeface="+mn-ea"/>
             </a:endParaRPr>
           </a:p>
           <a:p>
             <a:pPr marL="0" indent="0">
+              <a:lnSpc>
+                <a:spcPts val="1600"/>
+              </a:lnSpc>
               <a:buFont typeface="Arial" panose="020B0604020202020204" pitchFamily="34" charset="0"/>
               <a:buNone/>
             </a:pPr>
             <a:r>
-              <a:rPr lang="en-US" altLang="zh-CN" sz="1200" dirty="0" smtClean="0">
+              <a:rPr lang="en-US" altLang="zh-CN" sz="1400" dirty="0" smtClean="0">
                 <a:latin typeface="+mn-ea"/>
               </a:rPr>
               <a:t>6 - </a:t>
             </a:r>
             <a:r>
-              <a:rPr lang="zh-CN" altLang="en-US" sz="1200" dirty="0" smtClean="0">
+              <a:rPr lang="zh-CN" altLang="en-US" sz="1400" dirty="0" smtClean="0">
                 <a:latin typeface="+mn-ea"/>
               </a:rPr>
               <a:t>感到挺糟糕，意识到应该想办法去调节不良情绪。</a:t>
             </a:r>
-            <a:endParaRPr lang="en-US" altLang="zh-CN" sz="1200" dirty="0" smtClean="0">
+            <a:endParaRPr lang="en-US" altLang="zh-CN" sz="1400" dirty="0" smtClean="0">
               <a:latin typeface="+mn-ea"/>
             </a:endParaRPr>
           </a:p>
           <a:p>
             <a:pPr marL="0" indent="0">
+              <a:lnSpc>
+                <a:spcPts val="1600"/>
+              </a:lnSpc>
               <a:buFont typeface="Arial" panose="020B0604020202020204" pitchFamily="34" charset="0"/>
               <a:buNone/>
             </a:pPr>
             <a:r>
-              <a:rPr lang="en-US" altLang="zh-CN" sz="1200" dirty="0" smtClean="0">
+              <a:rPr lang="en-US" altLang="zh-CN" sz="1400" dirty="0" smtClean="0">
                 <a:latin typeface="+mn-ea"/>
               </a:rPr>
               <a:t>5 - </a:t>
             </a:r>
             <a:r>
-              <a:rPr lang="zh-CN" altLang="en-US" sz="1200" dirty="0" smtClean="0">
+              <a:rPr lang="zh-CN" altLang="en-US" sz="1400" dirty="0" smtClean="0">
                 <a:latin typeface="+mn-ea"/>
               </a:rPr>
               <a:t>有一些心理不舒服，但努力一下是可以控制的</a:t>
             </a:r>
-            <a:endParaRPr lang="en-US" altLang="zh-CN" sz="1200" dirty="0" smtClean="0">
+            <a:endParaRPr lang="en-US" altLang="zh-CN" sz="1400" dirty="0" smtClean="0">
               <a:latin typeface="+mn-ea"/>
             </a:endParaRPr>
           </a:p>
           <a:p>
             <a:pPr marL="0" indent="0">
+              <a:lnSpc>
+                <a:spcPts val="1600"/>
+              </a:lnSpc>
               <a:buFont typeface="Arial" panose="020B0604020202020204" pitchFamily="34" charset="0"/>
               <a:buNone/>
             </a:pPr>
             <a:r>
-              <a:rPr lang="en-US" altLang="zh-CN" sz="1200" dirty="0" smtClean="0">
+              <a:rPr lang="en-US" altLang="zh-CN" sz="1400" dirty="0" smtClean="0">
                 <a:latin typeface="+mn-ea"/>
               </a:rPr>
               <a:t>4 - </a:t>
             </a:r>
             <a:r>
-              <a:rPr lang="zh-CN" altLang="en-US" sz="1200" dirty="0" smtClean="0">
+              <a:rPr lang="zh-CN" altLang="en-US" sz="1400" dirty="0" smtClean="0">
                 <a:latin typeface="+mn-ea"/>
               </a:rPr>
               <a:t>有一些不痛快，无法回避感受，但能控制情绪。</a:t>
             </a:r>
-            <a:endParaRPr lang="en-US" altLang="zh-CN" sz="1200" dirty="0" smtClean="0">
+            <a:endParaRPr lang="en-US" altLang="zh-CN" sz="1400" dirty="0" smtClean="0">
               <a:latin typeface="+mn-ea"/>
             </a:endParaRPr>
           </a:p>
           <a:p>
             <a:pPr marL="0" indent="0">
+              <a:lnSpc>
+                <a:spcPts val="1600"/>
+              </a:lnSpc>
               <a:buFont typeface="Arial" panose="020B0604020202020204" pitchFamily="34" charset="0"/>
               <a:buNone/>
             </a:pPr>
             <a:r>
-              <a:rPr lang="en-US" altLang="zh-CN" sz="1200" dirty="0" smtClean="0">
+              <a:rPr lang="en-US" altLang="zh-CN" sz="1400" dirty="0" smtClean="0">
                 <a:latin typeface="+mn-ea"/>
               </a:rPr>
               <a:t>3 - </a:t>
             </a:r>
             <a:r>
-              <a:rPr lang="zh-CN" altLang="en-US" sz="1200" dirty="0" smtClean="0">
+              <a:rPr lang="zh-CN" altLang="en-US" sz="1400" dirty="0" smtClean="0">
                 <a:latin typeface="+mn-ea"/>
               </a:rPr>
               <a:t>有点不舒服，并注意到了这样的感受。</a:t>
             </a:r>
-            <a:endParaRPr lang="en-US" altLang="zh-CN" sz="1200" dirty="0" smtClean="0">
+            <a:endParaRPr lang="en-US" altLang="zh-CN" sz="1400" dirty="0" smtClean="0">
               <a:latin typeface="+mn-ea"/>
             </a:endParaRPr>
           </a:p>
           <a:p>
             <a:pPr marL="0" indent="0">
+              <a:lnSpc>
+                <a:spcPts val="1600"/>
+              </a:lnSpc>
               <a:buFont typeface="Arial" panose="020B0604020202020204" pitchFamily="34" charset="0"/>
               <a:buNone/>
             </a:pPr>
             <a:r>
-              <a:rPr lang="en-US" altLang="zh-CN" sz="1200" dirty="0" smtClean="0">
+              <a:rPr lang="en-US" altLang="zh-CN" sz="1400" dirty="0" smtClean="0">
                 <a:latin typeface="+mn-ea"/>
               </a:rPr>
               <a:t>2 - </a:t>
             </a:r>
             <a:r>
-              <a:rPr lang="zh-CN" altLang="en-US" sz="1200" dirty="0" smtClean="0">
+              <a:rPr lang="zh-CN" altLang="en-US" sz="1400" dirty="0" smtClean="0">
                 <a:latin typeface="+mn-ea"/>
               </a:rPr>
               <a:t>有点不舒服，平时不注意它不会打扰你，有时想到会有点困扰。</a:t>
             </a:r>
-            <a:endParaRPr lang="en-US" altLang="zh-CN" sz="1200" dirty="0" smtClean="0">
+            <a:endParaRPr lang="en-US" altLang="zh-CN" sz="1400" dirty="0" smtClean="0">
               <a:latin typeface="+mn-ea"/>
             </a:endParaRPr>
           </a:p>
           <a:p>
             <a:pPr marL="0" indent="0">
+              <a:lnSpc>
+                <a:spcPts val="1600"/>
+              </a:lnSpc>
               <a:buFont typeface="Arial" panose="020B0604020202020204" pitchFamily="34" charset="0"/>
               <a:buNone/>
             </a:pPr>
             <a:r>
-              <a:rPr lang="en-US" altLang="zh-CN" sz="1200" dirty="0" smtClean="0">
+              <a:rPr lang="en-US" altLang="zh-CN" sz="1400" dirty="0" smtClean="0">
                 <a:latin typeface="+mn-ea"/>
               </a:rPr>
               <a:t>1 - </a:t>
             </a:r>
             <a:r>
-              <a:rPr lang="zh-CN" altLang="en-US" sz="1200" dirty="0" smtClean="0">
+              <a:rPr lang="zh-CN" altLang="en-US" sz="1400" dirty="0" smtClean="0">
                 <a:latin typeface="+mn-ea"/>
               </a:rPr>
               <a:t>基本上还好，如果很仔细想会有一丝不痛快。</a:t>
             </a:r>
-            <a:endParaRPr lang="en-US" altLang="zh-CN" sz="1200" dirty="0" smtClean="0">
+            <a:endParaRPr lang="en-US" altLang="zh-CN" sz="1400" dirty="0" smtClean="0">
               <a:latin typeface="+mn-ea"/>
             </a:endParaRPr>
           </a:p>
           <a:p>
             <a:pPr marL="0" indent="0">
+              <a:lnSpc>
+                <a:spcPts val="1600"/>
+              </a:lnSpc>
               <a:buFont typeface="Arial" panose="020B0604020202020204" pitchFamily="34" charset="0"/>
               <a:buNone/>
             </a:pPr>
             <a:r>
-              <a:rPr lang="en-US" altLang="zh-CN" sz="1200" dirty="0" smtClean="0">
+              <a:rPr lang="en-US" altLang="zh-CN" sz="1400" dirty="0" smtClean="0">
                 <a:latin typeface="+mn-ea"/>
               </a:rPr>
               <a:t>0 - </a:t>
             </a:r>
             <a:r>
-              <a:rPr lang="zh-CN" altLang="en-US" sz="1200" dirty="0" smtClean="0">
+              <a:rPr lang="zh-CN" altLang="en-US" sz="1400" dirty="0" smtClean="0">
                 <a:latin typeface="+mn-ea"/>
               </a:rPr>
               <a:t>内心平静，完全解脱，没有不愉快的感觉。</a:t>
             </a:r>
-            <a:endParaRPr lang="en-US" altLang="zh-CN" sz="1200" dirty="0" smtClean="0">
+            <a:endParaRPr lang="en-US" altLang="zh-CN" sz="1400" dirty="0" smtClean="0">
               <a:latin typeface="+mn-ea"/>
             </a:endParaRPr>
           </a:p>
           <a:p>
             <a:pPr marL="0" indent="0">
+              <a:lnSpc>
+                <a:spcPts val="1600"/>
+              </a:lnSpc>
               <a:buFont typeface="Arial" panose="020B0604020202020204" pitchFamily="34" charset="0"/>
               <a:buNone/>
             </a:pPr>
             <a:r>
-              <a:rPr lang="en-US" altLang="zh-CN" sz="1200" i="1" u="sng" dirty="0" smtClean="0">
+              <a:rPr lang="en-US" altLang="zh-CN" sz="1400" i="1" u="sng" dirty="0" smtClean="0">
                 <a:latin typeface="+mn-ea"/>
               </a:rPr>
               <a:t>5~8</a:t>
             </a:r>
             <a:r>
-              <a:rPr lang="zh-CN" altLang="en-US" sz="1200" i="1" u="sng" dirty="0" smtClean="0">
+              <a:rPr lang="zh-CN" altLang="en-US" sz="1400" i="1" u="sng" dirty="0" smtClean="0">
                 <a:latin typeface="+mn-ea"/>
               </a:rPr>
               <a:t>可以进行疏导，如果</a:t>
             </a:r>
             <a:r>
-              <a:rPr lang="en-US" altLang="zh-CN" sz="1200" i="1" u="sng" dirty="0" smtClean="0">
+              <a:rPr lang="en-US" altLang="zh-CN" sz="1400" i="1" u="sng" dirty="0" smtClean="0">
                 <a:latin typeface="+mn-ea"/>
               </a:rPr>
               <a:t>5</a:t>
             </a:r>
             <a:r>
-              <a:rPr lang="zh-CN" altLang="en-US" sz="1200" i="1" u="sng" dirty="0" smtClean="0">
+              <a:rPr lang="zh-CN" altLang="en-US" sz="1400" i="1" u="sng" dirty="0" smtClean="0">
                 <a:latin typeface="+mn-ea"/>
               </a:rPr>
               <a:t>以下甚至是</a:t>
             </a:r>
             <a:r>
-              <a:rPr lang="en-US" altLang="zh-CN" sz="1200" i="1" u="sng" dirty="0" smtClean="0">
+              <a:rPr lang="en-US" altLang="zh-CN" sz="1400" i="1" u="sng" dirty="0" smtClean="0">
                 <a:latin typeface="+mn-ea"/>
               </a:rPr>
               <a:t>2~3</a:t>
             </a:r>
             <a:r>
-              <a:rPr lang="zh-CN" altLang="en-US" sz="1200" i="1" u="sng" dirty="0" smtClean="0">
+              <a:rPr lang="zh-CN" altLang="en-US" sz="1400" i="1" u="sng" dirty="0" smtClean="0">
                 <a:latin typeface="+mn-ea"/>
               </a:rPr>
               <a:t>更低就没有必要疏导了。</a:t>
             </a:r>
-            <a:endParaRPr lang="en-US" altLang="zh-CN" sz="1200" i="1" u="sng" dirty="0" smtClean="0">
+            <a:endParaRPr lang="en-US" altLang="zh-CN" sz="1400" i="1" u="sng" dirty="0" smtClean="0">
               <a:latin typeface="+mn-ea"/>
             </a:endParaRPr>
           </a:p>
           <a:p>
             <a:pPr marL="0" indent="0">
+              <a:lnSpc>
+                <a:spcPts val="1600"/>
+              </a:lnSpc>
               <a:buFont typeface="Arial" panose="020B0604020202020204" pitchFamily="34" charset="0"/>
               <a:buNone/>
             </a:pPr>
             <a:r>
-              <a:rPr lang="zh-CN" altLang="en-US" sz="1200" i="1" u="sng" dirty="0" smtClean="0">
+              <a:rPr lang="zh-CN" altLang="en-US" sz="1400" i="1" u="sng" dirty="0" smtClean="0">
                 <a:latin typeface="+mn-ea"/>
               </a:rPr>
               <a:t>通过操作可以将指数降低到</a:t>
             </a:r>
             <a:r>
-              <a:rPr lang="en-US" altLang="zh-CN" sz="1200" i="1" u="sng" dirty="0" smtClean="0">
+              <a:rPr lang="en-US" altLang="zh-CN" sz="1400" i="1" u="sng" dirty="0" smtClean="0">
                 <a:latin typeface="+mn-ea"/>
               </a:rPr>
               <a:t>0</a:t>
             </a:r>
             <a:r>
-              <a:rPr lang="zh-CN" altLang="en-US" sz="1200" i="1" u="sng" dirty="0" smtClean="0">
+              <a:rPr lang="zh-CN" altLang="en-US" sz="1400" i="1" u="sng" dirty="0" smtClean="0">
                 <a:latin typeface="+mn-ea"/>
               </a:rPr>
               <a:t>。</a:t>
             </a:r>
-            <a:endParaRPr lang="zh-CN" altLang="en-US" sz="1200" i="1" u="sng" dirty="0">
+            <a:endParaRPr lang="zh-CN" altLang="en-US" sz="1400" i="1" u="sng" dirty="0">
               <a:latin typeface="+mn-ea"/>
             </a:endParaRPr>
           </a:p>
@@ -23425,7 +24198,7 @@
 </p:sld>
 </file>
 
-<file path=ppt/slides/slide33.xml><?xml version="1.0" encoding="utf-8"?>
+<file path=ppt/slides/slide34.xml><?xml version="1.0" encoding="utf-8"?>
 <p:sld xmlns:a="http://schemas.openxmlformats.org/drawingml/2006/main" xmlns:r="http://schemas.openxmlformats.org/officeDocument/2006/relationships" xmlns:p="http://schemas.openxmlformats.org/presentationml/2006/main">
   <p:cSld>
     <p:spTree>
@@ -23519,15 +24292,23 @@
             </a:r>
             <a:r>
               <a:rPr lang="zh-CN" altLang="en-US" sz="4400" dirty="0"/>
-              <a:t>心理自助操关键技巧</a:t>
+              <a:t>心理自助</a:t>
+            </a:r>
+            <a:r>
+              <a:rPr lang="zh-CN" altLang="en-US" sz="4400" dirty="0" smtClean="0"/>
+              <a:t>操的关键</a:t>
+            </a:r>
+            <a:r>
+              <a:rPr lang="zh-CN" altLang="en-US" sz="4400" dirty="0"/>
+              <a:t>技巧</a:t>
             </a:r>
             <a:r>
               <a:rPr lang="zh-CN" altLang="en-US" sz="4400" dirty="0" smtClean="0"/>
               <a:t>（</a:t>
             </a:r>
             <a:r>
-              <a:rPr lang="en-US" altLang="zh-CN" sz="4400" dirty="0"/>
-              <a:t>9</a:t>
+              <a:rPr lang="en-US" altLang="zh-CN" sz="4400" dirty="0" smtClean="0"/>
+              <a:t>2</a:t>
             </a:r>
             <a:r>
               <a:rPr lang="zh-CN" altLang="en-US" sz="4400" dirty="0" smtClean="0"/>
@@ -24720,7 +25501,7 @@
 </p:sld>
 </file>
 
-<file path=ppt/slides/slide34.xml><?xml version="1.0" encoding="utf-8"?>
+<file path=ppt/slides/slide35.xml><?xml version="1.0" encoding="utf-8"?>
 <p:sld xmlns:a="http://schemas.openxmlformats.org/drawingml/2006/main" xmlns:r="http://schemas.openxmlformats.org/officeDocument/2006/relationships" xmlns:p="http://schemas.openxmlformats.org/presentationml/2006/main">
   <p:cSld>
     <p:spTree>
@@ -24814,7 +25595,15 @@
             </a:r>
             <a:r>
               <a:rPr lang="zh-CN" altLang="en-US" sz="4400" dirty="0"/>
-              <a:t>心理自助操关键技巧</a:t>
+              <a:t>心理自助</a:t>
+            </a:r>
+            <a:r>
+              <a:rPr lang="zh-CN" altLang="en-US" sz="4400" dirty="0" smtClean="0"/>
+              <a:t>操的关键</a:t>
+            </a:r>
+            <a:r>
+              <a:rPr lang="zh-CN" altLang="en-US" sz="4400" dirty="0"/>
+              <a:t>技巧</a:t>
             </a:r>
             <a:r>
               <a:rPr lang="zh-CN" altLang="en-US" sz="4400" dirty="0" smtClean="0"/>
@@ -24822,7 +25611,7 @@
             </a:r>
             <a:r>
               <a:rPr lang="en-US" altLang="zh-CN" sz="4400" dirty="0" smtClean="0"/>
-              <a:t>10</a:t>
+              <a:t>3</a:t>
             </a:r>
             <a:r>
               <a:rPr lang="zh-CN" altLang="en-US" sz="4400" dirty="0" smtClean="0"/>
@@ -25463,7 +26252,13 @@
               <a:rPr lang="en-US" altLang="zh-CN" i="1" dirty="0">
                 <a:latin typeface="+mn-ea"/>
               </a:rPr>
-              <a:t>- EFT </a:t>
+              <a:t>- </a:t>
+            </a:r>
+            <a:r>
+              <a:rPr lang="en-US" altLang="zh-CN" i="1" dirty="0" smtClean="0">
+                <a:latin typeface="+mn-ea"/>
+              </a:rPr>
+              <a:t>EFT</a:t>
             </a:r>
             <a:r>
               <a:rPr lang="zh-CN" altLang="en-US" i="1" dirty="0" smtClean="0">
@@ -25542,7 +26337,7 @@
 </p:sld>
 </file>
 
-<file path=ppt/slides/slide35.xml><?xml version="1.0" encoding="utf-8"?>
+<file path=ppt/slides/slide36.xml><?xml version="1.0" encoding="utf-8"?>
 <p:sld xmlns:a="http://schemas.openxmlformats.org/drawingml/2006/main" xmlns:r="http://schemas.openxmlformats.org/officeDocument/2006/relationships" xmlns:p="http://schemas.openxmlformats.org/presentationml/2006/main">
   <p:cSld>
     <p:spTree>
@@ -25574,7 +26369,13 @@
           <p:nvPr/>
         </p:nvPicPr>
         <p:blipFill>
-          <a:blip r:embed="rId2"/>
+          <a:blip r:embed="rId2" cstate="screen">
+            <a:extLst>
+              <a:ext uri="{28A0092B-C50C-407E-A947-70E740481C1C}">
+                <a14:useLocalDpi xmlns:a14="http://schemas.microsoft.com/office/drawing/2010/main"/>
+              </a:ext>
+            </a:extLst>
+          </a:blip>
           <a:stretch>
             <a:fillRect/>
           </a:stretch>
@@ -26125,6 +26926,181 @@
     <p:extLst>
       <p:ext uri="{BB962C8B-B14F-4D97-AF65-F5344CB8AC3E}">
         <p14:creationId xmlns:p14="http://schemas.microsoft.com/office/powerpoint/2010/main" val="4187150082"/>
+      </p:ext>
+    </p:extLst>
+  </p:cSld>
+  <p:clrMapOvr>
+    <a:masterClrMapping/>
+  </p:clrMapOvr>
+  <p:timing>
+    <p:tnLst>
+      <p:par>
+        <p:cTn id="1" dur="indefinite" restart="never" nodeType="tmRoot"/>
+      </p:par>
+    </p:tnLst>
+  </p:timing>
+</p:sld>
+</file>
+
+<file path=ppt/slides/slide37.xml><?xml version="1.0" encoding="utf-8"?>
+<p:sld xmlns:a="http://schemas.openxmlformats.org/drawingml/2006/main" xmlns:r="http://schemas.openxmlformats.org/officeDocument/2006/relationships" xmlns:p="http://schemas.openxmlformats.org/presentationml/2006/main">
+  <p:cSld>
+    <p:spTree>
+      <p:nvGrpSpPr>
+        <p:cNvPr id="1" name="">
+          <a:extLst>
+            <a:ext uri="{FF2B5EF4-FFF2-40B4-BE49-F238E27FC236}">
+              <a16:creationId xmlns:a16="http://schemas.microsoft.com/office/drawing/2014/main" id="{D5741CD7-9FB1-F657-C907-C25081611DE1}"/>
+            </a:ext>
+          </a:extLst>
+        </p:cNvPr>
+        <p:cNvGrpSpPr/>
+        <p:nvPr/>
+      </p:nvGrpSpPr>
+      <p:grpSpPr>
+        <a:xfrm>
+          <a:off x="0" y="0"/>
+          <a:ext cx="0" cy="0"/>
+          <a:chOff x="0" y="0"/>
+          <a:chExt cx="0" cy="0"/>
+        </a:xfrm>
+      </p:grpSpPr>
+      <p:sp>
+        <p:nvSpPr>
+          <p:cNvPr id="2" name="标题 1">
+            <a:extLst>
+              <a:ext uri="{FF2B5EF4-FFF2-40B4-BE49-F238E27FC236}">
+                <a16:creationId xmlns:a16="http://schemas.microsoft.com/office/drawing/2014/main" id="{BA21492E-272F-CB51-C162-76EBACDA2B4F}"/>
+              </a:ext>
+            </a:extLst>
+          </p:cNvPr>
+          <p:cNvSpPr>
+            <a:spLocks noGrp="1"/>
+          </p:cNvSpPr>
+          <p:nvPr>
+            <p:ph type="title"/>
+          </p:nvPr>
+        </p:nvSpPr>
+        <p:spPr>
+          <a:xfrm>
+            <a:off x="521208" y="662740"/>
+            <a:ext cx="11155680" cy="936652"/>
+          </a:xfrm>
+        </p:spPr>
+        <p:txBody>
+          <a:bodyPr/>
+          <a:lstStyle/>
+          <a:p>
+            <a:pPr algn="ctr"/>
+            <a:r>
+              <a:rPr lang="zh-CN" altLang="en-US" sz="4400" dirty="0" smtClean="0"/>
+              <a:t>音乐</a:t>
+            </a:r>
+            <a:r>
+              <a:rPr lang="en-US" altLang="zh-CN" sz="4400" dirty="0" smtClean="0"/>
+              <a:t>EFT</a:t>
+            </a:r>
+            <a:r>
+              <a:rPr lang="zh-CN" altLang="en-US" sz="4400" dirty="0"/>
+              <a:t>心理自助</a:t>
+            </a:r>
+            <a:r>
+              <a:rPr lang="zh-CN" altLang="en-US" sz="4400" dirty="0" smtClean="0"/>
+              <a:t>操</a:t>
+            </a:r>
+            <a:r>
+              <a:rPr lang="en-US" altLang="zh-CN" sz="4400" dirty="0" smtClean="0"/>
+              <a:t/>
+            </a:r>
+            <a:br>
+              <a:rPr lang="en-US" altLang="zh-CN" sz="4400" dirty="0" smtClean="0"/>
+            </a:br>
+            <a:r>
+              <a:rPr lang="zh-CN" altLang="en-US" sz="4400" dirty="0" smtClean="0"/>
+              <a:t>感谢您的关注！</a:t>
+            </a:r>
+            <a:endParaRPr lang="zh-CN" altLang="en-US" sz="4400" dirty="0"/>
+          </a:p>
+        </p:txBody>
+      </p:sp>
+      <p:pic>
+        <p:nvPicPr>
+          <p:cNvPr id="9" name="图片 8"/>
+          <p:cNvPicPr>
+            <a:picLocks noChangeAspect="1"/>
+          </p:cNvPicPr>
+          <p:nvPr/>
+        </p:nvPicPr>
+        <p:blipFill>
+          <a:blip r:embed="rId2"/>
+          <a:stretch>
+            <a:fillRect/>
+          </a:stretch>
+        </p:blipFill>
+        <p:spPr>
+          <a:xfrm>
+            <a:off x="4651172" y="2386160"/>
+            <a:ext cx="2895749" cy="2895749"/>
+          </a:xfrm>
+          <a:prstGeom prst="rect">
+            <a:avLst/>
+          </a:prstGeom>
+          <a:effectLst>
+            <a:softEdge rad="127000"/>
+          </a:effectLst>
+        </p:spPr>
+      </p:pic>
+      <p:sp>
+        <p:nvSpPr>
+          <p:cNvPr id="10" name="内容占位符 2">
+            <a:extLst>
+              <a:ext uri="{FF2B5EF4-FFF2-40B4-BE49-F238E27FC236}">
+                <a16:creationId xmlns:a16="http://schemas.microsoft.com/office/drawing/2014/main" id="{13A7921E-A193-DF0A-DDCC-CA2CFD1B8CE5}"/>
+              </a:ext>
+            </a:extLst>
+          </p:cNvPr>
+          <p:cNvSpPr>
+            <a:spLocks noGrp="1"/>
+          </p:cNvSpPr>
+          <p:nvPr>
+            <p:ph idx="1"/>
+          </p:nvPr>
+        </p:nvSpPr>
+        <p:spPr>
+          <a:xfrm>
+            <a:off x="521207" y="5455716"/>
+            <a:ext cx="11155680" cy="913524"/>
+          </a:xfrm>
+        </p:spPr>
+        <p:txBody>
+          <a:bodyPr/>
+          <a:lstStyle/>
+          <a:p>
+            <a:pPr marL="0" indent="0" algn="ctr">
+              <a:buNone/>
+            </a:pPr>
+            <a:r>
+              <a:rPr lang="zh-CN" altLang="en-US" sz="1400" dirty="0" smtClean="0">
+                <a:latin typeface="+mn-ea"/>
+              </a:rPr>
+              <a:t>浥尘伙伴社团 </a:t>
+            </a:r>
+            <a:r>
+              <a:rPr lang="en-US" altLang="zh-CN" sz="1400" dirty="0" smtClean="0">
+                <a:latin typeface="+mn-ea"/>
+              </a:rPr>
+              <a:t>/ 2026.1</a:t>
+            </a:r>
+            <a:endParaRPr lang="zh-CN" altLang="en-US" sz="1400" dirty="0">
+              <a:latin typeface="+mn-ea"/>
+            </a:endParaRPr>
+          </a:p>
+        </p:txBody>
+      </p:sp>
+    </p:spTree>
+    <p:extLst>
+      <p:ext uri="{BB962C8B-B14F-4D97-AF65-F5344CB8AC3E}">
+        <p14:creationId xmlns:p14="http://schemas.microsoft.com/office/powerpoint/2010/main" val="450107272"/>
       </p:ext>
     </p:extLst>
   </p:cSld>
@@ -27517,7 +28493,7 @@
         </p:blipFill>
         <p:spPr>
           <a:xfrm>
-            <a:off x="4578666" y="4209441"/>
+            <a:off x="5034914" y="4209441"/>
             <a:ext cx="3857625" cy="2571750"/>
           </a:xfrm>
           <a:prstGeom prst="rect">
@@ -29373,7 +30349,7 @@
         <p:spPr>
           <a:xfrm>
             <a:off x="521208" y="5788373"/>
-            <a:ext cx="4779454" cy="757207"/>
+            <a:ext cx="5314996" cy="757207"/>
           </a:xfrm>
           <a:prstGeom prst="rect">
             <a:avLst/>
@@ -29576,7 +30552,7 @@
               <a:t>EFT</a:t>
             </a:r>
             <a:r>
-              <a:rPr lang="zh-CN" altLang="en-US" sz="3200" dirty="0">
+              <a:rPr lang="zh-CN" altLang="en-US" sz="3200" dirty="0" smtClean="0">
                 <a:effectLst>
                   <a:outerShdw blurRad="38100" dist="38100" dir="2700000" algn="tl">
                     <a:srgbClr val="000000">
@@ -29588,6 +30564,16 @@
               </a:rPr>
               <a:t>心理自助操</a:t>
             </a:r>
+            <a:endParaRPr lang="zh-CN" altLang="en-US" sz="3200" dirty="0">
+              <a:effectLst>
+                <a:outerShdw blurRad="38100" dist="38100" dir="2700000" algn="tl">
+                  <a:srgbClr val="000000">
+                    <a:alpha val="43137"/>
+                  </a:srgbClr>
+                </a:outerShdw>
+              </a:effectLst>
+              <a:latin typeface="+mn-ea"/>
+            </a:endParaRPr>
           </a:p>
         </p:txBody>
       </p:sp>
@@ -29676,7 +30662,13 @@
           <p:nvPr/>
         </p:nvPicPr>
         <p:blipFill>
-          <a:blip r:embed="rId2"/>
+          <a:blip r:embed="rId2" cstate="screen">
+            <a:extLst>
+              <a:ext uri="{28A0092B-C50C-407E-A947-70E740481C1C}">
+                <a14:useLocalDpi xmlns:a14="http://schemas.microsoft.com/office/drawing/2010/main"/>
+              </a:ext>
+            </a:extLst>
+          </a:blip>
           <a:stretch>
             <a:fillRect/>
           </a:stretch>

--- a/44_心理学/28_浥尘伙伴社团原创：音乐治疗/PPT/浥尘伙伴社团原创：情绪释放疗法（EFT）心理训练.pptx
+++ b/44_心理学/28_浥尘伙伴社团原创：音乐治疗/PPT/浥尘伙伴社团原创：情绪释放疗法（EFT）心理训练.pptx
@@ -233,7 +233,7 @@
           <a:p>
             <a:fld id="{613034E8-7B60-43FC-987C-A54D5D393751}" type="datetimeFigureOut">
               <a:rPr lang="zh-CN" altLang="en-US" smtClean="0"/>
-              <a:t>2025/12/31</a:t>
+              <a:t>2026/1/7</a:t>
             </a:fld>
             <a:endParaRPr lang="zh-CN" altLang="en-US"/>
           </a:p>
@@ -500,6 +500,90 @@
 </p:notesMaster>
 </file>
 
+<file path=ppt/notesSlides/notesSlide1.xml><?xml version="1.0" encoding="utf-8"?>
+<p:notes xmlns:a="http://schemas.openxmlformats.org/drawingml/2006/main" xmlns:r="http://schemas.openxmlformats.org/officeDocument/2006/relationships" xmlns:p="http://schemas.openxmlformats.org/presentationml/2006/main">
+  <p:cSld>
+    <p:spTree>
+      <p:nvGrpSpPr>
+        <p:cNvPr id="1" name=""/>
+        <p:cNvGrpSpPr/>
+        <p:nvPr/>
+      </p:nvGrpSpPr>
+      <p:grpSpPr>
+        <a:xfrm>
+          <a:off x="0" y="0"/>
+          <a:ext cx="0" cy="0"/>
+          <a:chOff x="0" y="0"/>
+          <a:chExt cx="0" cy="0"/>
+        </a:xfrm>
+      </p:grpSpPr>
+      <p:sp>
+        <p:nvSpPr>
+          <p:cNvPr id="2" name="幻灯片图像占位符 1"/>
+          <p:cNvSpPr>
+            <a:spLocks noGrp="1" noRot="1" noChangeAspect="1"/>
+          </p:cNvSpPr>
+          <p:nvPr>
+            <p:ph type="sldImg"/>
+          </p:nvPr>
+        </p:nvSpPr>
+        <p:spPr/>
+      </p:sp>
+      <p:sp>
+        <p:nvSpPr>
+          <p:cNvPr id="3" name="备注占位符 2"/>
+          <p:cNvSpPr>
+            <a:spLocks noGrp="1"/>
+          </p:cNvSpPr>
+          <p:nvPr>
+            <p:ph type="body" idx="1"/>
+          </p:nvPr>
+        </p:nvSpPr>
+        <p:spPr/>
+        <p:txBody>
+          <a:bodyPr/>
+          <a:lstStyle/>
+          <a:p>
+            <a:endParaRPr lang="zh-CN" altLang="en-US" dirty="0"/>
+          </a:p>
+        </p:txBody>
+      </p:sp>
+      <p:sp>
+        <p:nvSpPr>
+          <p:cNvPr id="4" name="灯片编号占位符 3"/>
+          <p:cNvSpPr>
+            <a:spLocks noGrp="1"/>
+          </p:cNvSpPr>
+          <p:nvPr>
+            <p:ph type="sldNum" sz="quarter" idx="5"/>
+          </p:nvPr>
+        </p:nvSpPr>
+        <p:spPr/>
+        <p:txBody>
+          <a:bodyPr/>
+          <a:lstStyle/>
+          <a:p>
+            <a:fld id="{2BDFCB7D-42D9-486B-87B3-4BC90113BD50}" type="slidenum">
+              <a:rPr lang="zh-CN" altLang="en-US" smtClean="0"/>
+              <a:t>1</a:t>
+            </a:fld>
+            <a:endParaRPr lang="zh-CN" altLang="en-US"/>
+          </a:p>
+        </p:txBody>
+      </p:sp>
+    </p:spTree>
+    <p:extLst>
+      <p:ext uri="{BB962C8B-B14F-4D97-AF65-F5344CB8AC3E}">
+        <p14:creationId xmlns:p14="http://schemas.microsoft.com/office/powerpoint/2010/main" val="1958231812"/>
+      </p:ext>
+    </p:extLst>
+  </p:cSld>
+  <p:clrMapOvr>
+    <a:masterClrMapping/>
+  </p:clrMapOvr>
+</p:notes>
+</file>
+
 <file path=ppt/slideLayouts/slideLayout1.xml><?xml version="1.0" encoding="utf-8"?>
 <p:sldLayout xmlns:a="http://schemas.openxmlformats.org/drawingml/2006/main" xmlns:r="http://schemas.openxmlformats.org/officeDocument/2006/relationships" xmlns:p="http://schemas.openxmlformats.org/presentationml/2006/main" type="title" preserve="1">
   <p:cSld name="Title Slide">
@@ -525,7 +609,7 @@
                 <a16:creationId xmlns:a16="http://schemas.microsoft.com/office/drawing/2014/main" id="{EA67E988-5919-57BB-C7DE-D3EAD38A3045}"/>
               </a:ext>
               <a:ext uri="{C183D7F6-B498-43B3-948B-1728B52AA6E4}">
-                <adec:decorative xmlns:adec="http://schemas.microsoft.com/office/drawing/2017/decorative" xmlns="" val="1"/>
+                <adec:decorative xmlns:adec="http://schemas.microsoft.com/office/drawing/2017/decorative" val="1"/>
               </a:ext>
             </a:extLst>
           </p:cNvPr>
@@ -781,7 +865,7 @@
           <a:p>
             <a:fld id="{E80C50CD-E178-4744-9B35-B2F624D6C5E9}" type="datetimeFigureOut">
               <a:rPr lang="en-US" smtClean="0"/>
-              <a:t>12/31/2025</a:t>
+              <a:t>1/7/2026</a:t>
             </a:fld>
             <a:endParaRPr lang="en-US"/>
           </a:p>
@@ -979,7 +1063,7 @@
           <a:p>
             <a:fld id="{E80C50CD-E178-4744-9B35-B2F624D6C5E9}" type="datetimeFigureOut">
               <a:rPr lang="en-US" smtClean="0"/>
-              <a:t>12/31/2025</a:t>
+              <a:t>1/7/2026</a:t>
             </a:fld>
             <a:endParaRPr lang="en-US"/>
           </a:p>
@@ -1187,7 +1271,7 @@
           <a:p>
             <a:fld id="{E80C50CD-E178-4744-9B35-B2F624D6C5E9}" type="datetimeFigureOut">
               <a:rPr lang="en-US" smtClean="0"/>
-              <a:t>12/31/2025</a:t>
+              <a:t>1/7/2026</a:t>
             </a:fld>
             <a:endParaRPr lang="en-US"/>
           </a:p>
@@ -1467,7 +1551,7 @@
           <a:p>
             <a:fld id="{E80C50CD-E178-4744-9B35-B2F624D6C5E9}" type="datetimeFigureOut">
               <a:rPr lang="en-US" smtClean="0"/>
-              <a:t>12/31/2025</a:t>
+              <a:t>1/7/2026</a:t>
             </a:fld>
             <a:endParaRPr lang="en-US"/>
           </a:p>
@@ -1746,7 +1830,7 @@
           <a:p>
             <a:fld id="{E80C50CD-E178-4744-9B35-B2F624D6C5E9}" type="datetimeFigureOut">
               <a:rPr lang="en-US" smtClean="0"/>
-              <a:t>12/31/2025</a:t>
+              <a:t>1/7/2026</a:t>
             </a:fld>
             <a:endParaRPr lang="en-US"/>
           </a:p>
@@ -2063,7 +2147,7 @@
           <a:p>
             <a:fld id="{E80C50CD-E178-4744-9B35-B2F624D6C5E9}" type="datetimeFigureOut">
               <a:rPr lang="en-US" smtClean="0"/>
-              <a:t>12/31/2025</a:t>
+              <a:t>1/7/2026</a:t>
             </a:fld>
             <a:endParaRPr lang="en-US"/>
           </a:p>
@@ -2479,7 +2563,7 @@
           <a:p>
             <a:fld id="{E80C50CD-E178-4744-9B35-B2F624D6C5E9}" type="datetimeFigureOut">
               <a:rPr lang="en-US" smtClean="0"/>
-              <a:t>12/31/2025</a:t>
+              <a:t>1/7/2026</a:t>
             </a:fld>
             <a:endParaRPr lang="en-US"/>
           </a:p>
@@ -2620,7 +2704,7 @@
           <a:p>
             <a:fld id="{E80C50CD-E178-4744-9B35-B2F624D6C5E9}" type="datetimeFigureOut">
               <a:rPr lang="en-US" smtClean="0"/>
-              <a:t>12/31/2025</a:t>
+              <a:t>1/7/2026</a:t>
             </a:fld>
             <a:endParaRPr lang="en-US"/>
           </a:p>
@@ -2733,7 +2817,7 @@
           <a:p>
             <a:fld id="{E80C50CD-E178-4744-9B35-B2F624D6C5E9}" type="datetimeFigureOut">
               <a:rPr lang="en-US" smtClean="0"/>
-              <a:t>12/31/2025</a:t>
+              <a:t>1/7/2026</a:t>
             </a:fld>
             <a:endParaRPr lang="en-US"/>
           </a:p>
@@ -3050,7 +3134,7 @@
           <a:p>
             <a:fld id="{E80C50CD-E178-4744-9B35-B2F624D6C5E9}" type="datetimeFigureOut">
               <a:rPr lang="en-US" smtClean="0"/>
-              <a:t>12/31/2025</a:t>
+              <a:t>1/7/2026</a:t>
             </a:fld>
             <a:endParaRPr lang="en-US"/>
           </a:p>
@@ -3342,7 +3426,7 @@
           <a:p>
             <a:fld id="{E80C50CD-E178-4744-9B35-B2F624D6C5E9}" type="datetimeFigureOut">
               <a:rPr lang="en-US" smtClean="0"/>
-              <a:t>12/31/2025</a:t>
+              <a:t>1/7/2026</a:t>
             </a:fld>
             <a:endParaRPr lang="en-US"/>
           </a:p>
@@ -3578,7 +3662,7 @@
             <a:fld id="{E80C50CD-E178-4744-9B35-B2F624D6C5E9}" type="datetimeFigureOut">
               <a:rPr lang="en-US" smtClean="0"/>
               <a:pPr/>
-              <a:t>12/31/2025</a:t>
+              <a:t>1/7/2026</a:t>
             </a:fld>
             <a:endParaRPr lang="en-US"/>
           </a:p>
@@ -3679,7 +3763,7 @@
                 <a16:creationId xmlns:a16="http://schemas.microsoft.com/office/drawing/2014/main" id="{774A975B-A886-5202-0489-6965514A0D14}"/>
               </a:ext>
               <a:ext uri="{C183D7F6-B498-43B3-948B-1728B52AA6E4}">
-                <adec:decorative xmlns:adec="http://schemas.microsoft.com/office/drawing/2017/decorative" xmlns="" val="1"/>
+                <adec:decorative xmlns:adec="http://schemas.microsoft.com/office/drawing/2017/decorative" val="1"/>
               </a:ext>
             </a:extLst>
           </p:cNvPr>
@@ -4108,7 +4192,7 @@
                 <a16:creationId xmlns:a16="http://schemas.microsoft.com/office/drawing/2014/main" id="{0EECA69B-4C2A-7F31-8019-E90DB3BD49CB}"/>
               </a:ext>
               <a:ext uri="{C183D7F6-B498-43B3-948B-1728B52AA6E4}">
-                <adec:decorative xmlns:adec="http://schemas.microsoft.com/office/drawing/2017/decorative" xmlns="" val="1"/>
+                <adec:decorative xmlns:adec="http://schemas.microsoft.com/office/drawing/2017/decorative" val="1"/>
               </a:ext>
             </a:extLst>
           </p:cNvPr>
@@ -4223,7 +4307,7 @@
           <p:nvPr/>
         </p:nvPicPr>
         <p:blipFill>
-          <a:blip r:embed="rId2" cstate="screen">
+          <a:blip r:embed="rId3" cstate="screen">
             <a:extLst>
               <a:ext uri="{28A0092B-C50C-407E-A947-70E740481C1C}">
                 <a14:useLocalDpi xmlns:a14="http://schemas.microsoft.com/office/drawing/2010/main"/>
@@ -4253,7 +4337,7 @@
                 <a16:creationId xmlns:a16="http://schemas.microsoft.com/office/drawing/2014/main" id="{857DEAC1-B3AA-6569-0A44-A191DF2F3C67}"/>
               </a:ext>
               <a:ext uri="{C183D7F6-B498-43B3-948B-1728B52AA6E4}">
-                <adec:decorative xmlns:adec="http://schemas.microsoft.com/office/drawing/2017/decorative" xmlns="" val="1"/>
+                <adec:decorative xmlns:adec="http://schemas.microsoft.com/office/drawing/2017/decorative" val="1"/>
               </a:ext>
             </a:extLst>
           </p:cNvPr>
@@ -4358,7 +4442,7 @@
         <p:spPr>
           <a:xfrm>
             <a:off x="320040" y="5739969"/>
-            <a:ext cx="8136626" cy="960120"/>
+            <a:ext cx="6828905" cy="960120"/>
           </a:xfrm>
           <a:ln>
             <a:noFill/>
@@ -4371,18 +4455,17 @@
           <a:lstStyle/>
           <a:p>
             <a:r>
-              <a:rPr lang="zh-CN" altLang="en-US" sz="5400" dirty="0" smtClean="0"/>
+              <a:rPr lang="zh-CN" altLang="en-US" sz="5400" dirty="0"/>
               <a:t>音乐</a:t>
             </a:r>
             <a:r>
-              <a:rPr lang="en-US" altLang="zh-CN" sz="5400" dirty="0" smtClean="0"/>
+              <a:rPr lang="en-US" altLang="zh-CN" sz="5400" dirty="0"/>
               <a:t>EFT</a:t>
             </a:r>
             <a:r>
-              <a:rPr lang="zh-CN" altLang="en-US" sz="5400" dirty="0" smtClean="0"/>
+              <a:rPr lang="zh-CN" altLang="en-US" sz="5400" dirty="0"/>
               <a:t>心理自助操</a:t>
             </a:r>
-            <a:endParaRPr lang="zh-CN" altLang="en-US" sz="5400" dirty="0"/>
           </a:p>
         </p:txBody>
       </p:sp>
@@ -4404,48 +4487,78 @@
         </p:nvSpPr>
         <p:spPr>
           <a:xfrm>
-            <a:off x="8456667" y="5739969"/>
-            <a:ext cx="3540618" cy="960120"/>
+            <a:off x="7468965" y="5739969"/>
+            <a:ext cx="3366306" cy="960120"/>
           </a:xfrm>
         </p:spPr>
         <p:txBody>
           <a:bodyPr anchor="ctr">
-            <a:normAutofit fontScale="92500" lnSpcReduction="10000"/>
+            <a:noAutofit/>
           </a:bodyPr>
           <a:lstStyle/>
           <a:p>
             <a:pPr algn="r"/>
             <a:r>
-              <a:rPr lang="zh-CN" altLang="en-US" sz="1900" dirty="0"/>
-              <a:t>浥尘伙伴社团</a:t>
-            </a:r>
-            <a:endParaRPr lang="en-US" altLang="zh-CN" sz="1900" dirty="0"/>
+              <a:rPr lang="zh-CN" altLang="en-US" sz="1800" dirty="0"/>
+              <a:t>浥尘伙伴社团内部密训课程</a:t>
+            </a:r>
+            <a:endParaRPr lang="en-US" altLang="zh-CN" sz="1800" dirty="0"/>
           </a:p>
           <a:p>
             <a:pPr algn="r"/>
             <a:r>
-              <a:rPr lang="zh-CN" altLang="en-US" sz="1900" dirty="0"/>
+              <a:rPr lang="zh-CN" altLang="en-US" sz="1800" dirty="0"/>
               <a:t> </a:t>
             </a:r>
             <a:r>
-              <a:rPr lang="en-US" altLang="zh-CN" sz="1900" dirty="0"/>
+              <a:rPr lang="en-US" altLang="zh-CN" sz="1800" dirty="0"/>
               <a:t>2026</a:t>
             </a:r>
             <a:r>
-              <a:rPr lang="zh-CN" altLang="en-US" sz="1900" dirty="0"/>
+              <a:rPr lang="zh-CN" altLang="en-US" sz="1800" dirty="0"/>
               <a:t>年</a:t>
             </a:r>
             <a:r>
-              <a:rPr lang="en-US" altLang="zh-CN" sz="1900" dirty="0"/>
+              <a:rPr lang="en-US" altLang="zh-CN" sz="1800" dirty="0"/>
               <a:t>1</a:t>
             </a:r>
             <a:r>
-              <a:rPr lang="zh-CN" altLang="en-US" sz="1900" dirty="0"/>
+              <a:rPr lang="zh-CN" altLang="en-US" sz="1800" dirty="0"/>
               <a:t>月</a:t>
             </a:r>
           </a:p>
         </p:txBody>
       </p:sp>
+      <p:pic>
+        <p:nvPicPr>
+          <p:cNvPr id="6" name="图片 5">
+            <a:extLst>
+              <a:ext uri="{FF2B5EF4-FFF2-40B4-BE49-F238E27FC236}">
+                <a16:creationId xmlns:a16="http://schemas.microsoft.com/office/drawing/2014/main" id="{F591D6BB-48ED-6480-AF23-1FC615EF833D}"/>
+              </a:ext>
+            </a:extLst>
+          </p:cNvPr>
+          <p:cNvPicPr>
+            <a:picLocks noChangeAspect="1"/>
+          </p:cNvPicPr>
+          <p:nvPr/>
+        </p:nvPicPr>
+        <p:blipFill>
+          <a:blip r:embed="rId4"/>
+          <a:stretch>
+            <a:fillRect/>
+          </a:stretch>
+        </p:blipFill>
+        <p:spPr>
+          <a:xfrm>
+            <a:off x="10835272" y="5641734"/>
+            <a:ext cx="1152372" cy="1152372"/>
+          </a:xfrm>
+          <a:prstGeom prst="rect">
+            <a:avLst/>
+          </a:prstGeom>
+        </p:spPr>
+      </p:pic>
     </p:spTree>
     <p:extLst>
       <p:ext uri="{BB962C8B-B14F-4D97-AF65-F5344CB8AC3E}">
@@ -4456,13 +4569,6 @@
   <p:clrMapOvr>
     <a:masterClrMapping/>
   </p:clrMapOvr>
-  <p:timing>
-    <p:tnLst>
-      <p:par>
-        <p:cTn id="1" dur="indefinite" restart="never" nodeType="tmRoot"/>
-      </p:par>
-    </p:tnLst>
-  </p:timing>
 </p:sld>
 </file>
 
@@ -4623,19 +4729,7 @@
               <a:rPr lang="zh-CN" altLang="en-US" sz="1800" dirty="0">
                 <a:latin typeface="+mn-ea"/>
               </a:rPr>
-              <a:t>用两根手指依次敲击或按摩攒竹、瞳子髎、承泣、人中、承浆、俞府、檀中、百会等穴位，同时保持持续聚焦情绪的状态，敲击穴位时重复心理提示语“虽然我现在有一些（当下的情绪状态）问题，但我完完全全接受和爱自己</a:t>
-            </a:r>
-            <a:r>
-              <a:rPr lang="zh-CN" altLang="en-US" sz="1800" dirty="0" smtClean="0">
-                <a:latin typeface="+mn-ea"/>
-              </a:rPr>
-              <a:t>”</a:t>
-            </a:r>
-            <a:r>
-              <a:rPr lang="zh-CN" altLang="en-US" sz="1800" dirty="0">
-                <a:latin typeface="+mn-ea"/>
-              </a:rPr>
-              <a:t>。</a:t>
+              <a:t>用两根手指依次敲击或按摩攒竹、瞳子髎、承泣、人中、承浆、俞府、檀中、百会等穴位，同时保持持续聚焦情绪的状态，敲击穴位时重复心理提示语“虽然我现在有一些（当下的情绪状态）问题，但我完完全全接受和爱自己”。</a:t>
             </a:r>
           </a:p>
         </p:txBody>
@@ -4856,19 +4950,7 @@
               <a:rPr lang="zh-CN" altLang="en-US" sz="1800" dirty="0">
                 <a:latin typeface="+mn-ea"/>
               </a:rPr>
-              <a:t>敲击</a:t>
-            </a:r>
-            <a:r>
-              <a:rPr lang="zh-CN" altLang="en-US" sz="1800" dirty="0" smtClean="0">
-                <a:latin typeface="+mn-ea"/>
-              </a:rPr>
-              <a:t>中各穴</a:t>
-            </a:r>
-            <a:r>
-              <a:rPr lang="zh-CN" altLang="en-US" sz="1800" dirty="0">
-                <a:latin typeface="+mn-ea"/>
-              </a:rPr>
-              <a:t>时，运用</a:t>
+              <a:t>敲击中各穴时，运用</a:t>
             </a:r>
             <a:r>
               <a:rPr lang="en-US" altLang="zh-CN" sz="1800" dirty="0">
@@ -5140,13 +5222,6 @@
   <p:clrMapOvr>
     <a:masterClrMapping/>
   </p:clrMapOvr>
-  <p:timing>
-    <p:tnLst>
-      <p:par>
-        <p:cTn id="1" dur="indefinite" restart="never" nodeType="tmRoot"/>
-      </p:par>
-    </p:tnLst>
-  </p:timing>
 </p:sld>
 </file>
 
@@ -5281,16 +5356,10 @@
               <a:buNone/>
             </a:pPr>
             <a:r>
-              <a:rPr lang="zh-CN" altLang="en-US" sz="1800" b="1" dirty="0" smtClean="0">
-                <a:latin typeface="+mn-ea"/>
-              </a:rPr>
-              <a:t>热身</a:t>
-            </a:r>
-            <a:r>
               <a:rPr lang="zh-CN" altLang="en-US" sz="1800" b="1" dirty="0">
                 <a:latin typeface="+mn-ea"/>
               </a:rPr>
-              <a:t>环节</a:t>
+              <a:t>热身环节</a:t>
             </a:r>
           </a:p>
           <a:p>
@@ -5635,66 +5704,42 @@
               <a:rPr lang="zh-CN" altLang="en-US" sz="1800" dirty="0">
                 <a:latin typeface="+mn-ea"/>
               </a:rPr>
-              <a:t>做法：用一只手持续轻</a:t>
-            </a:r>
-            <a:r>
-              <a:rPr lang="zh-CN" altLang="en-US" sz="1800" dirty="0" smtClean="0">
-                <a:latin typeface="+mn-ea"/>
-              </a:rPr>
-              <a:t>敲手腕</a:t>
+              <a:t>做法：用一只手持续轻敲手腕内侧（备用穴位 </a:t>
+            </a:r>
+            <a:r>
+              <a:rPr lang="en-US" altLang="zh-CN" sz="1800" dirty="0">
+                <a:latin typeface="+mn-ea"/>
+              </a:rPr>
+              <a:t>KC</a:t>
             </a:r>
             <a:r>
               <a:rPr lang="zh-CN" altLang="en-US" sz="1800" dirty="0">
                 <a:latin typeface="+mn-ea"/>
               </a:rPr>
-              <a:t>内侧（备用穴位 </a:t>
+              <a:t>），同时大声或默念设定语句，格式为：“尽管我 </a:t>
             </a:r>
             <a:r>
               <a:rPr lang="en-US" altLang="zh-CN" sz="1800" dirty="0">
                 <a:latin typeface="+mn-ea"/>
               </a:rPr>
-              <a:t>KC</a:t>
-            </a:r>
-            <a:r>
-              <a:rPr lang="zh-CN" altLang="en-US" sz="1800" dirty="0" smtClean="0">
-                <a:latin typeface="+mn-ea"/>
-              </a:rPr>
-              <a:t>），</a:t>
+              <a:t>[</a:t>
             </a:r>
             <a:r>
               <a:rPr lang="zh-CN" altLang="en-US" sz="1800" dirty="0">
                 <a:latin typeface="+mn-ea"/>
               </a:rPr>
-              <a:t>同时大声或默念设定语句，格式为：“尽管我 </a:t>
+              <a:t>具体情绪</a:t>
             </a:r>
             <a:r>
               <a:rPr lang="en-US" altLang="zh-CN" sz="1800" dirty="0">
                 <a:latin typeface="+mn-ea"/>
               </a:rPr>
-              <a:t>[</a:t>
+              <a:t>+</a:t>
             </a:r>
             <a:r>
               <a:rPr lang="zh-CN" altLang="en-US" sz="1800" dirty="0">
                 <a:latin typeface="+mn-ea"/>
               </a:rPr>
-              <a:t>具体</a:t>
-            </a:r>
-            <a:r>
-              <a:rPr lang="zh-CN" altLang="en-US" sz="1800" dirty="0" smtClean="0">
-                <a:latin typeface="+mn-ea"/>
-              </a:rPr>
-              <a:t>情绪</a:t>
-            </a:r>
-            <a:r>
-              <a:rPr lang="en-US" altLang="zh-CN" sz="1800" dirty="0" smtClean="0">
-                <a:latin typeface="+mn-ea"/>
-              </a:rPr>
-              <a:t>+</a:t>
-            </a:r>
-            <a:r>
-              <a:rPr lang="zh-CN" altLang="en-US" sz="1800" dirty="0" smtClean="0">
-                <a:latin typeface="+mn-ea"/>
-              </a:rPr>
               <a:t>场景</a:t>
             </a:r>
             <a:r>
@@ -5725,19 +5770,7 @@
               <a:rPr lang="zh-CN" altLang="en-US" sz="1800" dirty="0">
                 <a:latin typeface="+mn-ea"/>
               </a:rPr>
-              <a:t>示例：“尽管我害怕接触水，想到靠近水就心慌</a:t>
-            </a:r>
-            <a:r>
-              <a:rPr lang="zh-CN" altLang="en-US" sz="1800" dirty="0" smtClean="0">
-                <a:latin typeface="+mn-ea"/>
-              </a:rPr>
-              <a:t>，但</a:t>
-            </a:r>
-            <a:r>
-              <a:rPr lang="zh-CN" altLang="en-US" sz="1800" dirty="0">
-                <a:latin typeface="+mn-ea"/>
-              </a:rPr>
-              <a:t>我完全接纳自己现在的感受和状态”。</a:t>
+              <a:t>示例：“尽管我害怕接触水，想到靠近水就心慌，但我完全接纳自己现在的感受和状态”。</a:t>
             </a:r>
           </a:p>
           <a:p>
@@ -5761,13 +5794,6 @@
   <p:clrMapOvr>
     <a:masterClrMapping/>
   </p:clrMapOvr>
-  <p:timing>
-    <p:tnLst>
-      <p:par>
-        <p:cTn id="1" dur="indefinite" restart="never" nodeType="tmRoot"/>
-      </p:par>
-    </p:tnLst>
-  </p:timing>
 </p:sld>
 </file>
 
@@ -5869,16 +5895,10 @@
               <a:buNone/>
             </a:pPr>
             <a:r>
-              <a:rPr lang="zh-CN" altLang="en-US" b="1" dirty="0" smtClean="0">
-                <a:latin typeface="+mn-ea"/>
-              </a:rPr>
-              <a:t>情绪</a:t>
-            </a:r>
-            <a:r>
               <a:rPr lang="zh-CN" altLang="en-US" b="1" dirty="0">
                 <a:latin typeface="+mn-ea"/>
               </a:rPr>
-              <a:t>调节敲击操环节</a:t>
+              <a:t>情绪调节敲击操环节</a:t>
             </a:r>
           </a:p>
           <a:p>
@@ -6528,13 +6548,6 @@
   <p:clrMapOvr>
     <a:masterClrMapping/>
   </p:clrMapOvr>
-  <p:timing>
-    <p:tnLst>
-      <p:par>
-        <p:cTn id="1" dur="indefinite" restart="never" nodeType="tmRoot"/>
-      </p:par>
-    </p:tnLst>
-  </p:timing>
 </p:sld>
 </file>
 
@@ -6648,7 +6661,7 @@
               <a:buNone/>
             </a:pPr>
             <a:r>
-              <a:rPr lang="en-US" altLang="zh-CN" sz="1800" dirty="0" smtClean="0">
+              <a:rPr lang="en-US" altLang="zh-CN" sz="1800" dirty="0">
                 <a:latin typeface="+mn-ea"/>
               </a:rPr>
               <a:t>- </a:t>
@@ -6817,13 +6830,6 @@
   <p:clrMapOvr>
     <a:masterClrMapping/>
   </p:clrMapOvr>
-  <p:timing>
-    <p:tnLst>
-      <p:par>
-        <p:cTn id="1" dur="indefinite" restart="never" nodeType="tmRoot"/>
-      </p:par>
-    </p:tnLst>
-  </p:timing>
 </p:sld>
 </file>
 
@@ -6972,24 +6978,18 @@
               <a:buNone/>
             </a:pPr>
             <a:r>
-              <a:rPr lang="en-US" altLang="zh-CN" sz="1800" dirty="0" smtClean="0">
+              <a:rPr lang="en-US" altLang="zh-CN" sz="1800" dirty="0">
                 <a:latin typeface="+mn-ea"/>
               </a:rPr>
               <a:t>- </a:t>
             </a:r>
             <a:r>
-              <a:rPr lang="zh-CN" altLang="en-US" sz="1800" dirty="0" smtClean="0">
-                <a:latin typeface="+mn-ea"/>
-              </a:rPr>
-              <a:t>敲击方法</a:t>
-            </a:r>
-            <a:r>
               <a:rPr lang="zh-CN" altLang="en-US" sz="1800" dirty="0">
                 <a:latin typeface="+mn-ea"/>
               </a:rPr>
-              <a:t>：用两根手指（随便哪只手都行）敲击或按摩。</a:t>
-            </a:r>
-            <a:endParaRPr lang="en-US" altLang="zh-CN" sz="1800" dirty="0" smtClean="0">
+              <a:t>敲击方法：用两根手指（随便哪只手都行）敲击或按摩。</a:t>
+            </a:r>
+            <a:endParaRPr lang="en-US" altLang="zh-CN" sz="1800" dirty="0">
               <a:latin typeface="+mn-ea"/>
             </a:endParaRPr>
           </a:p>
@@ -6998,7 +6998,7 @@
               <a:buNone/>
             </a:pPr>
             <a:r>
-              <a:rPr lang="en-US" altLang="zh-CN" sz="1800" dirty="0" smtClean="0">
+              <a:rPr lang="en-US" altLang="zh-CN" sz="1800" dirty="0">
                 <a:latin typeface="+mn-ea"/>
               </a:rPr>
               <a:t>- </a:t>
@@ -7057,42 +7057,24 @@
               <a:buChar char="-"/>
             </a:pPr>
             <a:r>
-              <a:rPr lang="zh-CN" altLang="en-US" sz="1800" dirty="0" smtClean="0">
-                <a:latin typeface="+mn-ea"/>
-              </a:rPr>
-              <a:t>注意</a:t>
-            </a:r>
-            <a:r>
               <a:rPr lang="zh-CN" altLang="en-US" sz="1800" dirty="0">
                 <a:latin typeface="+mn-ea"/>
               </a:rPr>
-              <a:t>：</a:t>
-            </a:r>
-            <a:r>
-              <a:rPr lang="en-US" altLang="zh-CN" sz="1800" dirty="0" smtClean="0">
+              <a:t>注意：</a:t>
+            </a:r>
+            <a:r>
+              <a:rPr lang="en-US" altLang="zh-CN" sz="1800" dirty="0">
                 <a:latin typeface="+mn-ea"/>
               </a:rPr>
               <a:t>EFT</a:t>
             </a:r>
             <a:r>
-              <a:rPr lang="zh-CN" altLang="en-US" sz="1800" dirty="0" smtClean="0">
-                <a:latin typeface="+mn-ea"/>
-              </a:rPr>
-              <a:t>仅</a:t>
-            </a:r>
-            <a:r>
               <a:rPr lang="zh-CN" altLang="en-US" sz="1800" dirty="0">
                 <a:latin typeface="+mn-ea"/>
               </a:rPr>
-              <a:t>作为情绪缓解的辅助方式，若有严重心理问题，仍需结合专业心理治疗</a:t>
-            </a:r>
-            <a:r>
-              <a:rPr lang="zh-CN" altLang="en-US" sz="1800" dirty="0" smtClean="0">
-                <a:latin typeface="+mn-ea"/>
-              </a:rPr>
-              <a:t>。</a:t>
-            </a:r>
-            <a:endParaRPr lang="en-US" altLang="zh-CN" sz="1800" dirty="0" smtClean="0">
+              <a:t>仅作为情绪缓解的辅助方式，若有严重心理问题，仍需结合专业心理治疗。</a:t>
+            </a:r>
+            <a:endParaRPr lang="en-US" altLang="zh-CN" sz="1800" dirty="0">
               <a:latin typeface="+mn-ea"/>
             </a:endParaRPr>
           </a:p>
@@ -7108,13 +7090,6 @@
   <p:clrMapOvr>
     <a:masterClrMapping/>
   </p:clrMapOvr>
-  <p:timing>
-    <p:tnLst>
-      <p:par>
-        <p:cTn id="1" dur="indefinite" restart="never" nodeType="tmRoot"/>
-      </p:par>
-    </p:tnLst>
-  </p:timing>
 </p:sld>
 </file>
 
@@ -7173,21 +7148,16 @@
             </a:r>
             <a:r>
               <a:rPr lang="zh-CN" altLang="en-US" sz="4400" dirty="0"/>
-              <a:t>核心敲击穴位</a:t>
-            </a:r>
-            <a:r>
-              <a:rPr lang="zh-CN" altLang="en-US" sz="4400" dirty="0" smtClean="0"/>
-              <a:t>（</a:t>
-            </a:r>
-            <a:r>
-              <a:rPr lang="en-US" altLang="zh-CN" sz="4400" dirty="0" smtClean="0"/>
+              <a:t>核心敲击穴位（</a:t>
+            </a:r>
+            <a:r>
+              <a:rPr lang="en-US" altLang="zh-CN" sz="4400" dirty="0"/>
               <a:t>1</a:t>
             </a:r>
             <a:r>
-              <a:rPr lang="zh-CN" altLang="en-US" sz="4400" dirty="0" smtClean="0"/>
+              <a:rPr lang="zh-CN" altLang="en-US" sz="4400" dirty="0"/>
               <a:t>）</a:t>
             </a:r>
-            <a:endParaRPr lang="zh-CN" altLang="en-US" sz="4400" dirty="0"/>
           </a:p>
         </p:txBody>
       </p:sp>
@@ -7240,13 +7210,7 @@
               <a:rPr lang="zh-CN" altLang="en-US" sz="1800" dirty="0">
                 <a:latin typeface="+mn-ea"/>
               </a:rPr>
-              <a:t>穴位位置：握拳，靠近小指那一侧的皮肉皱折</a:t>
-            </a:r>
-            <a:r>
-              <a:rPr lang="zh-CN" altLang="en-US" sz="1800" dirty="0" smtClean="0">
-                <a:latin typeface="+mn-ea"/>
-              </a:rPr>
-              <a:t>处</a:t>
+              <a:t>穴位位置：握拳，靠近小指那一侧的皮肉皱折处</a:t>
             </a:r>
             <a:endParaRPr lang="en-US" altLang="zh-CN" sz="1800" dirty="0">
               <a:latin typeface="+mn-ea"/>
@@ -7261,13 +7225,7 @@
               <a:rPr lang="zh-CN" altLang="en-US" sz="1800" dirty="0">
                 <a:latin typeface="+mn-ea"/>
               </a:rPr>
-              <a:t>功效作用：小肠对能量非常敏感，对各种食物和养分会立即做出反应，所有的食物进到体内，是小肠决定什么可以消化，什么不能</a:t>
-            </a:r>
-            <a:r>
-              <a:rPr lang="zh-CN" altLang="en-US" sz="1800" dirty="0" smtClean="0">
-                <a:latin typeface="+mn-ea"/>
-              </a:rPr>
-              <a:t>消化</a:t>
+              <a:t>功效作用：小肠对能量非常敏感，对各种食物和养分会立即做出反应，所有的食物进到体内，是小肠决定什么可以消化，什么不能消化</a:t>
             </a:r>
             <a:endParaRPr lang="en-US" altLang="zh-CN" sz="1800" dirty="0">
               <a:latin typeface="+mn-ea"/>
@@ -7281,17 +7239,8 @@
               <a:rPr lang="zh-CN" altLang="en-US" sz="1800" dirty="0">
                 <a:latin typeface="+mn-ea"/>
               </a:rPr>
-              <a:t>情绪上也是如此，我们对环境的变化，必须决定什么事要反应，什么事不</a:t>
-            </a:r>
-            <a:r>
-              <a:rPr lang="zh-CN" altLang="en-US" sz="1800" dirty="0" smtClean="0">
-                <a:latin typeface="+mn-ea"/>
-              </a:rPr>
-              <a:t>反应。</a:t>
-            </a:r>
-            <a:endParaRPr lang="zh-CN" altLang="en-US" sz="1800" dirty="0">
-              <a:latin typeface="+mn-ea"/>
-            </a:endParaRPr>
+              <a:t>情绪上也是如此，我们对环境的变化，必须决定什么事要反应，什么事不反应。</a:t>
+            </a:r>
           </a:p>
           <a:p>
             <a:pPr marL="0" indent="0">
@@ -7301,17 +7250,8 @@
               <a:rPr lang="zh-CN" altLang="en-US" sz="1800" dirty="0">
                 <a:latin typeface="+mn-ea"/>
               </a:rPr>
-              <a:t>与小肠有关的情绪有：脆弱，敏感，觉得失落，缺乏安全感，过度敏感，觉得没人在意我，觉得没有人关心我，觉得付出得不到</a:t>
-            </a:r>
-            <a:r>
-              <a:rPr lang="zh-CN" altLang="en-US" sz="1800" dirty="0" smtClean="0">
-                <a:latin typeface="+mn-ea"/>
-              </a:rPr>
-              <a:t>回报。</a:t>
-            </a:r>
-            <a:endParaRPr lang="zh-CN" altLang="en-US" sz="1800" dirty="0">
-              <a:latin typeface="+mn-ea"/>
-            </a:endParaRPr>
+              <a:t>与小肠有关的情绪有：脆弱，敏感，觉得失落，缺乏安全感，过度敏感，觉得没人在意我，觉得没有人关心我，觉得付出得不到回报。</a:t>
+            </a:r>
           </a:p>
           <a:p>
             <a:pPr marL="0" indent="0">
@@ -7637,13 +7577,6 @@
   <p:clrMapOvr>
     <a:masterClrMapping/>
   </p:clrMapOvr>
-  <p:timing>
-    <p:tnLst>
-      <p:par>
-        <p:cTn id="1" dur="indefinite" restart="never" nodeType="tmRoot"/>
-      </p:par>
-    </p:tnLst>
-  </p:timing>
 </p:sld>
 </file>
 
@@ -7702,21 +7635,16 @@
             </a:r>
             <a:r>
               <a:rPr lang="zh-CN" altLang="en-US" sz="4400" dirty="0"/>
-              <a:t>核心敲击穴位</a:t>
-            </a:r>
-            <a:r>
-              <a:rPr lang="zh-CN" altLang="en-US" sz="4400" dirty="0" smtClean="0"/>
-              <a:t>（</a:t>
-            </a:r>
-            <a:r>
-              <a:rPr lang="en-US" altLang="zh-CN" sz="4400" dirty="0" smtClean="0"/>
+              <a:t>核心敲击穴位（</a:t>
+            </a:r>
+            <a:r>
+              <a:rPr lang="en-US" altLang="zh-CN" sz="4400" dirty="0"/>
               <a:t>2</a:t>
             </a:r>
             <a:r>
-              <a:rPr lang="zh-CN" altLang="en-US" sz="4400" dirty="0" smtClean="0"/>
+              <a:rPr lang="zh-CN" altLang="en-US" sz="4400" dirty="0"/>
               <a:t>）</a:t>
             </a:r>
-            <a:endParaRPr lang="zh-CN" altLang="en-US" sz="4400" dirty="0"/>
           </a:p>
         </p:txBody>
       </p:sp>
@@ -7766,13 +7694,7 @@
               <a:rPr lang="zh-CN" altLang="en-US" sz="1800" dirty="0">
                 <a:latin typeface="+mn-ea"/>
               </a:rPr>
-              <a:t>穴位位置：手腕内侧横纹上方，肌腱之间的凹陷</a:t>
-            </a:r>
-            <a:r>
-              <a:rPr lang="zh-CN" altLang="en-US" sz="1800" dirty="0" smtClean="0">
-                <a:latin typeface="+mn-ea"/>
-              </a:rPr>
-              <a:t>处</a:t>
+              <a:t>穴位位置：手腕内侧横纹上方，肌腱之间的凹陷处</a:t>
             </a:r>
             <a:endParaRPr lang="en-US" altLang="zh-CN" sz="1800" dirty="0">
               <a:latin typeface="+mn-ea"/>
@@ -7787,13 +7709,7 @@
               <a:rPr lang="zh-CN" altLang="en-US" sz="1800" dirty="0">
                 <a:latin typeface="+mn-ea"/>
               </a:rPr>
-              <a:t>功效作用：适合不方便敲击面部、头部时使用，可快速缓解情绪</a:t>
-            </a:r>
-            <a:r>
-              <a:rPr lang="zh-CN" altLang="en-US" sz="1800" dirty="0" smtClean="0">
-                <a:latin typeface="+mn-ea"/>
-              </a:rPr>
-              <a:t>紧张</a:t>
+              <a:t>功效作用：适合不方便敲击面部、头部时使用，可快速缓解情绪紧张</a:t>
             </a:r>
             <a:endParaRPr lang="en-US" altLang="zh-CN" sz="1800" dirty="0">
               <a:latin typeface="+mn-ea"/>
@@ -7808,13 +7724,7 @@
               <a:rPr lang="zh-CN" altLang="en-US" sz="1800" dirty="0">
                 <a:latin typeface="+mn-ea"/>
               </a:rPr>
-              <a:t>引导用语：用指尖轻拍内关穴，同时默念 “即使我现在很焦虑，我依然能从容应对工作”，重复几次后往往能感受到情绪和身体的双重</a:t>
-            </a:r>
-            <a:r>
-              <a:rPr lang="zh-CN" altLang="en-US" sz="1800" dirty="0" smtClean="0">
-                <a:latin typeface="+mn-ea"/>
-              </a:rPr>
-              <a:t>放松</a:t>
+              <a:t>引导用语：用指尖轻拍内关穴，同时默念 “即使我现在很焦虑，我依然能从容应对工作”，重复几次后往往能感受到情绪和身体的双重放松</a:t>
             </a:r>
             <a:endParaRPr lang="en-US" altLang="zh-CN" sz="1800" dirty="0">
               <a:latin typeface="+mn-ea"/>
@@ -8106,13 +8016,6 @@
   <p:clrMapOvr>
     <a:masterClrMapping/>
   </p:clrMapOvr>
-  <p:timing>
-    <p:tnLst>
-      <p:par>
-        <p:cTn id="1" dur="indefinite" restart="never" nodeType="tmRoot"/>
-      </p:par>
-    </p:tnLst>
-  </p:timing>
 </p:sld>
 </file>
 
@@ -8171,21 +8074,16 @@
             </a:r>
             <a:r>
               <a:rPr lang="zh-CN" altLang="en-US" sz="4400" dirty="0"/>
-              <a:t>核心敲击穴位</a:t>
-            </a:r>
-            <a:r>
-              <a:rPr lang="zh-CN" altLang="en-US" sz="4400" dirty="0" smtClean="0"/>
-              <a:t>（</a:t>
-            </a:r>
-            <a:r>
-              <a:rPr lang="en-US" altLang="zh-CN" sz="4400" dirty="0" smtClean="0"/>
+              <a:t>核心敲击穴位（</a:t>
+            </a:r>
+            <a:r>
+              <a:rPr lang="en-US" altLang="zh-CN" sz="4400" dirty="0"/>
               <a:t>3</a:t>
             </a:r>
             <a:r>
-              <a:rPr lang="zh-CN" altLang="en-US" sz="4400" dirty="0" smtClean="0"/>
+              <a:rPr lang="zh-CN" altLang="en-US" sz="4400" dirty="0"/>
               <a:t>）</a:t>
             </a:r>
-            <a:endParaRPr lang="zh-CN" altLang="en-US" sz="4400" dirty="0"/>
           </a:p>
         </p:txBody>
       </p:sp>
@@ -8235,13 +8133,7 @@
               <a:rPr lang="zh-CN" altLang="en-US" sz="1800" dirty="0">
                 <a:latin typeface="+mn-ea"/>
               </a:rPr>
-              <a:t>穴位位置：两侧眉头内侧端点（靠近鼻梁处</a:t>
-            </a:r>
-            <a:r>
-              <a:rPr lang="zh-CN" altLang="en-US" sz="1800" dirty="0" smtClean="0">
-                <a:latin typeface="+mn-ea"/>
-              </a:rPr>
-              <a:t>）</a:t>
+              <a:t>穴位位置：两侧眉头内侧端点（靠近鼻梁处）</a:t>
             </a:r>
             <a:endParaRPr lang="en-US" altLang="zh-CN" sz="1800" dirty="0">
               <a:latin typeface="+mn-ea"/>
@@ -8256,17 +8148,8 @@
               <a:rPr lang="zh-CN" altLang="en-US" sz="1800" dirty="0">
                 <a:latin typeface="+mn-ea"/>
               </a:rPr>
-              <a:t>功效作用：对应情绪与压力的核心反应区，缓解焦虑、恐惧等初始</a:t>
-            </a:r>
-            <a:r>
-              <a:rPr lang="zh-CN" altLang="en-US" sz="1800" dirty="0" smtClean="0">
-                <a:latin typeface="+mn-ea"/>
-              </a:rPr>
-              <a:t>情绪</a:t>
-            </a:r>
-            <a:endParaRPr lang="zh-CN" altLang="en-US" sz="1800" dirty="0">
-              <a:latin typeface="+mn-ea"/>
-            </a:endParaRPr>
+              <a:t>功效作用：对应情绪与压力的核心反应区，缓解焦虑、恐惧等初始情绪</a:t>
+            </a:r>
           </a:p>
         </p:txBody>
       </p:sp>
@@ -8739,16 +8622,10 @@
               <a:buNone/>
             </a:pPr>
             <a:r>
-              <a:rPr lang="zh-CN" altLang="en-US" sz="1800" dirty="0" smtClean="0">
-                <a:latin typeface="+mn-ea"/>
-              </a:rPr>
-              <a:t>膀胱</a:t>
-            </a:r>
-            <a:r>
               <a:rPr lang="zh-CN" altLang="en-US" sz="1800" dirty="0">
                 <a:latin typeface="+mn-ea"/>
               </a:rPr>
-              <a:t>经这条经络的情绪包括，优柔寡断，无能为力，没有意志力，无法或很难下决定，缺乏安全感，绝望，没耐性，害怕冒犯他人。</a:t>
+              <a:t>膀胱经这条经络的情绪包括，优柔寡断，无能为力，没有意志力，无法或很难下决定，缺乏安全感，绝望，没耐性，害怕冒犯他人。</a:t>
             </a:r>
           </a:p>
           <a:p>
@@ -8787,13 +8664,6 @@
   <p:clrMapOvr>
     <a:masterClrMapping/>
   </p:clrMapOvr>
-  <p:timing>
-    <p:tnLst>
-      <p:par>
-        <p:cTn id="1" dur="indefinite" restart="never" nodeType="tmRoot"/>
-      </p:par>
-    </p:tnLst>
-  </p:timing>
 </p:sld>
 </file>
 
@@ -8852,21 +8722,16 @@
             </a:r>
             <a:r>
               <a:rPr lang="zh-CN" altLang="en-US" sz="4400" dirty="0"/>
-              <a:t>核心敲击穴位</a:t>
-            </a:r>
-            <a:r>
-              <a:rPr lang="zh-CN" altLang="en-US" sz="4400" dirty="0" smtClean="0"/>
-              <a:t>（</a:t>
-            </a:r>
-            <a:r>
-              <a:rPr lang="en-US" altLang="zh-CN" sz="4400" dirty="0" smtClean="0"/>
+              <a:t>核心敲击穴位（</a:t>
+            </a:r>
+            <a:r>
+              <a:rPr lang="en-US" altLang="zh-CN" sz="4400" dirty="0"/>
               <a:t>4</a:t>
             </a:r>
             <a:r>
-              <a:rPr lang="zh-CN" altLang="en-US" sz="4400" dirty="0" smtClean="0"/>
+              <a:rPr lang="zh-CN" altLang="en-US" sz="4400" dirty="0"/>
               <a:t>）</a:t>
             </a:r>
-            <a:endParaRPr lang="zh-CN" altLang="en-US" sz="4400" dirty="0"/>
           </a:p>
         </p:txBody>
       </p:sp>
@@ -8904,17 +8769,8 @@
               <a:rPr lang="zh-CN" altLang="en-US" sz="1800" dirty="0">
                 <a:latin typeface="+mn-ea"/>
               </a:rPr>
-              <a:t>对应情绪</a:t>
-            </a:r>
-            <a:r>
-              <a:rPr lang="zh-CN" altLang="en-US" sz="1800" dirty="0" smtClean="0">
-                <a:latin typeface="+mn-ea"/>
-              </a:rPr>
-              <a:t>：挫折感</a:t>
-            </a:r>
-            <a:endParaRPr lang="zh-CN" altLang="en-US" sz="1800" dirty="0">
-              <a:latin typeface="+mn-ea"/>
-            </a:endParaRPr>
+              <a:t>对应情绪：挫折感</a:t>
+            </a:r>
           </a:p>
           <a:p>
             <a:pPr>
@@ -8925,73 +8781,19 @@
               <a:rPr lang="zh-CN" altLang="en-US" sz="1800" dirty="0">
                 <a:latin typeface="+mn-ea"/>
               </a:rPr>
-              <a:t>穴位位置</a:t>
-            </a:r>
-            <a:r>
-              <a:rPr lang="zh-CN" altLang="en-US" sz="1800" dirty="0" smtClean="0">
-                <a:latin typeface="+mn-ea"/>
-              </a:rPr>
-              <a:t>：</a:t>
+              <a:t>穴位位置：两侧眼尾外侧约</a:t>
+            </a:r>
+            <a:r>
+              <a:rPr lang="en-US" altLang="zh-CN" sz="1800" dirty="0">
+                <a:latin typeface="+mn-ea"/>
+              </a:rPr>
+              <a:t>1</a:t>
             </a:r>
             <a:r>
               <a:rPr lang="zh-CN" altLang="en-US" sz="1800" dirty="0">
                 <a:latin typeface="+mn-ea"/>
               </a:rPr>
-              <a:t>两侧眼尾外侧</a:t>
-            </a:r>
-            <a:r>
-              <a:rPr lang="zh-CN" altLang="en-US" sz="1800" dirty="0" smtClean="0">
-                <a:latin typeface="+mn-ea"/>
-              </a:rPr>
-              <a:t>约</a:t>
-            </a:r>
-            <a:r>
-              <a:rPr lang="en-US" altLang="zh-CN" sz="1800" dirty="0" smtClean="0">
-                <a:latin typeface="+mn-ea"/>
-              </a:rPr>
-              <a:t>1</a:t>
-            </a:r>
-            <a:r>
-              <a:rPr lang="zh-CN" altLang="en-US" sz="1800" dirty="0" smtClean="0">
-                <a:latin typeface="+mn-ea"/>
-              </a:rPr>
-              <a:t>厘米</a:t>
-            </a:r>
-            <a:r>
-              <a:rPr lang="zh-CN" altLang="en-US" sz="1800" dirty="0">
-                <a:latin typeface="+mn-ea"/>
-              </a:rPr>
-              <a:t>处（不压眼球，在眼眶骨边缘</a:t>
-            </a:r>
-            <a:r>
-              <a:rPr lang="zh-CN" altLang="en-US" sz="1800" dirty="0" smtClean="0">
-                <a:latin typeface="+mn-ea"/>
-              </a:rPr>
-              <a:t>），瞳</a:t>
-            </a:r>
-            <a:r>
-              <a:rPr lang="zh-CN" altLang="en-US" sz="1800" dirty="0">
-                <a:latin typeface="+mn-ea"/>
-              </a:rPr>
-              <a:t>子</a:t>
-            </a:r>
-            <a:r>
-              <a:rPr lang="zh-CN" altLang="en-US" sz="1800" dirty="0" smtClean="0">
-                <a:latin typeface="+mn-ea"/>
-              </a:rPr>
-              <a:t>髎，</a:t>
-            </a:r>
-            <a:r>
-              <a:rPr lang="zh-CN" altLang="en-US" sz="1800" dirty="0">
-                <a:latin typeface="+mn-ea"/>
-              </a:rPr>
-              <a:t>位于两眼尾外角约两指宽的</a:t>
-            </a:r>
-            <a:r>
-              <a:rPr lang="zh-CN" altLang="en-US" sz="1800" dirty="0" smtClean="0">
-                <a:latin typeface="+mn-ea"/>
-              </a:rPr>
-              <a:t>位置</a:t>
+              <a:t>厘米处（不压眼球，在眼眶骨边缘），瞳子髎，位于两眼尾外角约两指宽的位置</a:t>
             </a:r>
             <a:endParaRPr lang="en-US" altLang="zh-CN" sz="1800" dirty="0">
               <a:latin typeface="+mn-ea"/>
@@ -9006,25 +8808,7 @@
               <a:rPr lang="zh-CN" altLang="en-US" sz="1800" dirty="0">
                 <a:latin typeface="+mn-ea"/>
               </a:rPr>
-              <a:t>功效作用</a:t>
-            </a:r>
-            <a:r>
-              <a:rPr lang="zh-CN" altLang="en-US" sz="1800" dirty="0" smtClean="0">
-                <a:latin typeface="+mn-ea"/>
-              </a:rPr>
-              <a:t>：</a:t>
-            </a:r>
-            <a:r>
-              <a:rPr lang="zh-CN" altLang="en-US" sz="1800" dirty="0">
-                <a:latin typeface="+mn-ea"/>
-              </a:rPr>
-              <a:t>调节情绪波动，尤其适合缓解因恐惧、担忧引发的身体</a:t>
-            </a:r>
-            <a:r>
-              <a:rPr lang="zh-CN" altLang="en-US" sz="1800" dirty="0" smtClean="0">
-                <a:latin typeface="+mn-ea"/>
-              </a:rPr>
-              <a:t>紧张</a:t>
+              <a:t>功效作用：调节情绪波动，尤其适合缓解因恐惧、担忧引发的身体紧张</a:t>
             </a:r>
             <a:endParaRPr lang="en-US" altLang="zh-CN" sz="1800" dirty="0">
               <a:latin typeface="+mn-ea"/>
@@ -9262,33 +9046,7 @@
                 </a:effectLst>
                 <a:latin typeface="+mn-ea"/>
               </a:rPr>
-              <a:t>丝竹空穴（手少阳三焦经</a:t>
-            </a:r>
-            <a:r>
-              <a:rPr lang="zh-CN" altLang="en-US" sz="3200" dirty="0" smtClean="0">
-                <a:effectLst>
-                  <a:outerShdw blurRad="38100" dist="38100" dir="2700000" algn="tl">
-                    <a:srgbClr val="000000">
-                      <a:alpha val="43137"/>
-                    </a:srgbClr>
-                  </a:outerShdw>
-                </a:effectLst>
-                <a:latin typeface="+mn-ea"/>
-              </a:rPr>
-              <a:t>）瞳</a:t>
-            </a:r>
-            <a:r>
-              <a:rPr lang="zh-CN" altLang="en-US" sz="3200" dirty="0">
-                <a:effectLst>
-                  <a:outerShdw blurRad="38100" dist="38100" dir="2700000" algn="tl">
-                    <a:srgbClr val="000000">
-                      <a:alpha val="43137"/>
-                    </a:srgbClr>
-                  </a:outerShdw>
-                </a:effectLst>
-                <a:latin typeface="+mn-ea"/>
-              </a:rPr>
-              <a:t>子髎（足少阳胆经）</a:t>
+              <a:t>丝竹空穴（手少阳三焦经）瞳子髎（足少阳胆经）</a:t>
             </a:r>
           </a:p>
         </p:txBody>
@@ -9527,24 +9285,24 @@
               <a:buNone/>
             </a:pPr>
             <a:r>
-              <a:rPr lang="zh-CN" altLang="en-US" sz="1800" dirty="0" smtClean="0">
-                <a:latin typeface="+mn-ea"/>
-              </a:rPr>
-              <a:t>胆经的</a:t>
-            </a:r>
-            <a:r>
               <a:rPr lang="zh-CN" altLang="en-US" sz="1800" dirty="0">
                 <a:latin typeface="+mn-ea"/>
               </a:rPr>
-              <a:t>情绪包括，挫折感，痛苦，投射在他人身上，认为不是自己的错，指责，觉得自己像受害者，拒绝承担责任，优柔寡断，羞愧，懊悔，忧郁，恼怒，很难宽恕并放下，不讲理，过度反应，易怒，爱挑信，有攻击性，粗鲁，觉得被</a:t>
-            </a:r>
-            <a:r>
-              <a:rPr lang="zh-CN" altLang="en-US" sz="1800" dirty="0" smtClean="0">
-                <a:latin typeface="+mn-ea"/>
-              </a:rPr>
-              <a:t>虐待。</a:t>
-            </a:r>
-            <a:endParaRPr lang="zh-CN" altLang="en-US" sz="1800" dirty="0">
+              <a:t>胆经的情绪包括，挫折感，痛苦，投射在他人身上，认为不是自己的错，指责，觉得自己像受害者，拒绝承担责任，优柔寡断，羞愧，懊悔，忧郁，恼怒，很难宽恕并放下，不讲理，过度反应，易怒，爱挑信，有攻击性，粗鲁，觉得被虐待。</a:t>
+            </a:r>
+          </a:p>
+          <a:p>
+            <a:pPr marL="0" indent="0">
+              <a:buFont typeface="Arial" panose="020B0604020202020204" pitchFamily="34" charset="0"/>
+              <a:buNone/>
+            </a:pPr>
+            <a:r>
+              <a:rPr lang="zh-CN" altLang="en-US" sz="1800" dirty="0">
+                <a:latin typeface="+mn-ea"/>
+              </a:rPr>
+              <a:t>首先，闭上眼睛，回想过去让你感受到这些情绪的情境，</a:t>
+            </a:r>
+            <a:endParaRPr lang="en-US" altLang="zh-CN" sz="1800" dirty="0">
               <a:latin typeface="+mn-ea"/>
             </a:endParaRPr>
           </a:p>
@@ -9557,15 +9315,9 @@
               <a:rPr lang="zh-CN" altLang="en-US" sz="1800" dirty="0">
                 <a:latin typeface="+mn-ea"/>
               </a:rPr>
-              <a:t>首先，闭上眼睛，回想过去让你感受到这些情绪的情境</a:t>
-            </a:r>
-            <a:r>
-              <a:rPr lang="zh-CN" altLang="en-US" sz="1800" dirty="0" smtClean="0">
-                <a:latin typeface="+mn-ea"/>
-              </a:rPr>
-              <a:t>，</a:t>
-            </a:r>
-            <a:endParaRPr lang="en-US" altLang="zh-CN" sz="1800" dirty="0" smtClean="0">
+              <a:t>想起那时的感觉，当时的事件，参与的人，当时的场景。</a:t>
+            </a:r>
+            <a:endParaRPr lang="en-US" altLang="zh-CN" sz="1800" dirty="0">
               <a:latin typeface="+mn-ea"/>
             </a:endParaRPr>
           </a:p>
@@ -9575,65 +9327,11 @@
               <a:buNone/>
             </a:pPr>
             <a:r>
-              <a:rPr lang="zh-CN" altLang="en-US" sz="1800" dirty="0" smtClean="0">
-                <a:latin typeface="+mn-ea"/>
-              </a:rPr>
-              <a:t>想起</a:t>
-            </a:r>
-            <a:r>
               <a:rPr lang="zh-CN" altLang="en-US" sz="1800" dirty="0">
                 <a:latin typeface="+mn-ea"/>
               </a:rPr>
-              <a:t>那时的感觉，当时的事件，参与的人，当时的场景</a:t>
-            </a:r>
-            <a:r>
-              <a:rPr lang="zh-CN" altLang="en-US" sz="1800" dirty="0" smtClean="0">
-                <a:latin typeface="+mn-ea"/>
-              </a:rPr>
-              <a:t>。</a:t>
-            </a:r>
-            <a:endParaRPr lang="en-US" altLang="zh-CN" sz="1800" dirty="0" smtClean="0">
-              <a:latin typeface="+mn-ea"/>
-            </a:endParaRPr>
-          </a:p>
-          <a:p>
-            <a:pPr marL="0" indent="0">
-              <a:buFont typeface="Arial" panose="020B0604020202020204" pitchFamily="34" charset="0"/>
-              <a:buNone/>
-            </a:pPr>
-            <a:r>
-              <a:rPr lang="zh-CN" altLang="en-US" sz="1800" dirty="0" smtClean="0">
-                <a:latin typeface="+mn-ea"/>
-              </a:rPr>
-              <a:t>将</a:t>
-            </a:r>
-            <a:r>
-              <a:rPr lang="zh-CN" altLang="en-US" sz="1800" dirty="0">
-                <a:latin typeface="+mn-ea"/>
-              </a:rPr>
-              <a:t>那些情境带回到现在</a:t>
-            </a:r>
-            <a:r>
-              <a:rPr lang="zh-CN" altLang="en-US" sz="1800" dirty="0" smtClean="0">
-                <a:latin typeface="+mn-ea"/>
-              </a:rPr>
-              <a:t>。接着</a:t>
-            </a:r>
-            <a:r>
-              <a:rPr lang="zh-CN" altLang="en-US" sz="1800" dirty="0">
-                <a:latin typeface="+mn-ea"/>
-              </a:rPr>
-              <a:t>，轻敲或</a:t>
-            </a:r>
-            <a:r>
-              <a:rPr lang="zh-CN" altLang="en-US" sz="1800" dirty="0" smtClean="0">
-                <a:latin typeface="+mn-ea"/>
-              </a:rPr>
-              <a:t>按摩穴道</a:t>
-            </a:r>
-            <a:endParaRPr lang="zh-CN" altLang="en-US" sz="1800" dirty="0">
-              <a:latin typeface="+mn-ea"/>
-            </a:endParaRPr>
+              <a:t>将那些情境带回到现在。接着，轻敲或按摩穴道</a:t>
+            </a:r>
           </a:p>
         </p:txBody>
       </p:sp>
@@ -9647,13 +9345,6 @@
   <p:clrMapOvr>
     <a:masterClrMapping/>
   </p:clrMapOvr>
-  <p:timing>
-    <p:tnLst>
-      <p:par>
-        <p:cTn id="1" dur="indefinite" restart="never" nodeType="tmRoot"/>
-      </p:par>
-    </p:tnLst>
-  </p:timing>
 </p:sld>
 </file>
 
@@ -9712,21 +9403,16 @@
             </a:r>
             <a:r>
               <a:rPr lang="zh-CN" altLang="en-US" sz="4400" dirty="0"/>
-              <a:t>核心敲击穴位</a:t>
-            </a:r>
-            <a:r>
-              <a:rPr lang="zh-CN" altLang="en-US" sz="4400" dirty="0" smtClean="0"/>
-              <a:t>（</a:t>
-            </a:r>
-            <a:r>
-              <a:rPr lang="en-US" altLang="zh-CN" sz="4400" dirty="0" smtClean="0"/>
+              <a:t>核心敲击穴位（</a:t>
+            </a:r>
+            <a:r>
+              <a:rPr lang="en-US" altLang="zh-CN" sz="4400" dirty="0"/>
               <a:t>5</a:t>
             </a:r>
             <a:r>
-              <a:rPr lang="zh-CN" altLang="en-US" sz="4400" dirty="0" smtClean="0"/>
+              <a:rPr lang="zh-CN" altLang="en-US" sz="4400" dirty="0"/>
               <a:t>）</a:t>
             </a:r>
-            <a:endParaRPr lang="zh-CN" altLang="en-US" sz="4400" dirty="0"/>
           </a:p>
         </p:txBody>
       </p:sp>
@@ -9761,22 +9447,10 @@
               <a:buChar char="n"/>
             </a:pPr>
             <a:r>
-              <a:rPr lang="zh-CN" altLang="en-US" sz="1800" dirty="0" smtClean="0">
-                <a:latin typeface="+mn-ea"/>
-              </a:rPr>
-              <a:t>对应情绪：</a:t>
-            </a:r>
-            <a:r>
               <a:rPr lang="zh-CN" altLang="en-US" sz="1800" dirty="0">
                 <a:latin typeface="+mn-ea"/>
               </a:rPr>
-              <a:t>担忧、</a:t>
-            </a:r>
-            <a:r>
-              <a:rPr lang="zh-CN" altLang="en-US" sz="1800" dirty="0" smtClean="0">
-                <a:latin typeface="+mn-ea"/>
-              </a:rPr>
-              <a:t>忧虑</a:t>
+              <a:t>对应情绪：担忧、忧虑</a:t>
             </a:r>
           </a:p>
           <a:p>
@@ -9785,36 +9459,12 @@
               <a:buChar char="n"/>
             </a:pPr>
             <a:r>
-              <a:rPr lang="zh-CN" altLang="en-US" sz="1800" dirty="0" smtClean="0">
-                <a:latin typeface="+mn-ea"/>
-              </a:rPr>
-              <a:t>穴位</a:t>
-            </a:r>
-            <a:r>
               <a:rPr lang="zh-CN" altLang="en-US" sz="1800" dirty="0">
                 <a:latin typeface="+mn-ea"/>
               </a:rPr>
-              <a:t>位置</a:t>
-            </a:r>
-            <a:r>
-              <a:rPr lang="zh-CN" altLang="en-US" sz="1800" dirty="0" smtClean="0">
-                <a:latin typeface="+mn-ea"/>
-              </a:rPr>
-              <a:t>：</a:t>
-            </a:r>
-            <a:r>
-              <a:rPr lang="zh-CN" altLang="en-US" sz="1800" dirty="0">
-                <a:latin typeface="+mn-ea"/>
-              </a:rPr>
-              <a:t>位于眼睛下方，眼窝和骨头的交会</a:t>
-            </a:r>
-            <a:r>
-              <a:rPr lang="zh-CN" altLang="en-US" sz="1800" dirty="0" smtClean="0">
-                <a:latin typeface="+mn-ea"/>
-              </a:rPr>
-              <a:t>处</a:t>
-            </a:r>
-            <a:endParaRPr lang="en-US" altLang="zh-CN" sz="1800" dirty="0" smtClean="0">
+              <a:t>穴位位置：位于眼睛下方，眼窝和骨头的交会处</a:t>
+            </a:r>
+            <a:endParaRPr lang="en-US" altLang="zh-CN" sz="1800" dirty="0">
               <a:latin typeface="+mn-ea"/>
             </a:endParaRPr>
           </a:p>
@@ -9824,28 +9474,10 @@
               <a:buChar char="n"/>
             </a:pPr>
             <a:r>
-              <a:rPr lang="zh-CN" altLang="en-US" sz="1800" dirty="0" smtClean="0">
-                <a:latin typeface="+mn-ea"/>
-              </a:rPr>
-              <a:t>功效</a:t>
-            </a:r>
-            <a:r>
               <a:rPr lang="zh-CN" altLang="en-US" sz="1800" dirty="0">
                 <a:latin typeface="+mn-ea"/>
               </a:rPr>
-              <a:t>作用</a:t>
-            </a:r>
-            <a:r>
-              <a:rPr lang="zh-CN" altLang="en-US" sz="1800" dirty="0" smtClean="0">
-                <a:latin typeface="+mn-ea"/>
-              </a:rPr>
-              <a:t>：连接</a:t>
-            </a:r>
-            <a:r>
-              <a:rPr lang="zh-CN" altLang="en-US" sz="1800" dirty="0">
-                <a:latin typeface="+mn-ea"/>
-              </a:rPr>
-              <a:t>身体情绪与消化系统反应，缓解伴随情绪的躯体不适（如恶心、胃部紧张）。</a:t>
+              <a:t>功效作用：连接身体情绪与消化系统反应，缓解伴随情绪的躯体不适（如恶心、胃部紧张）。</a:t>
             </a:r>
           </a:p>
         </p:txBody>
@@ -10080,33 +9712,7 @@
                 </a:effectLst>
                 <a:latin typeface="+mn-ea"/>
               </a:rPr>
-              <a:t>承泣穴和四白</a:t>
-            </a:r>
-            <a:r>
-              <a:rPr lang="zh-CN" altLang="en-US" sz="3200" dirty="0" smtClean="0">
-                <a:effectLst>
-                  <a:outerShdw blurRad="38100" dist="38100" dir="2700000" algn="tl">
-                    <a:srgbClr val="000000">
-                      <a:alpha val="43137"/>
-                    </a:srgbClr>
-                  </a:outerShdw>
-                </a:effectLst>
-                <a:latin typeface="+mn-ea"/>
-              </a:rPr>
-              <a:t>穴</a:t>
-            </a:r>
-            <a:r>
-              <a:rPr lang="zh-CN" altLang="en-US" sz="3200" dirty="0">
-                <a:effectLst>
-                  <a:outerShdw blurRad="38100" dist="38100" dir="2700000" algn="tl">
-                    <a:srgbClr val="000000">
-                      <a:alpha val="43137"/>
-                    </a:srgbClr>
-                  </a:outerShdw>
-                </a:effectLst>
-                <a:latin typeface="+mn-ea"/>
-              </a:rPr>
-              <a:t>（足阳明胃经）</a:t>
+              <a:t>承泣穴和四白穴（足阳明胃经）</a:t>
             </a:r>
           </a:p>
         </p:txBody>
@@ -10345,16 +9951,10 @@
               <a:buNone/>
             </a:pPr>
             <a:r>
-              <a:rPr lang="zh-CN" altLang="en-US" sz="1800" dirty="0" smtClean="0">
-                <a:latin typeface="+mn-ea"/>
-              </a:rPr>
-              <a:t>胃</a:t>
-            </a:r>
-            <a:r>
               <a:rPr lang="zh-CN" altLang="en-US" sz="1800" dirty="0">
                 <a:latin typeface="+mn-ea"/>
               </a:rPr>
-              <a:t>经是一条很特别的经络，这条经络的情绪都和未来的预期有关，担忧未来的事情是否能按自己期望发生。</a:t>
+              <a:t>胃经是一条很特别的经络，这条经络的情绪都和未来的预期有关，担忧未来的事情是否能按自己期望发生。</a:t>
             </a:r>
           </a:p>
           <a:p>
@@ -10366,41 +9966,8 @@
               <a:rPr lang="zh-CN" altLang="en-US" sz="1800" dirty="0">
                 <a:latin typeface="+mn-ea"/>
               </a:rPr>
-              <a:t>胃经的能量阻塞会造成的情绪包括：过度担心，抗拒所做的事，厌恶，妄想行为，自私，冷漠，不信任，不断担心别人无法信守承诺，或怀疑别人会反对我，失望，贪婪</a:t>
-            </a:r>
-            <a:r>
-              <a:rPr lang="zh-CN" altLang="en-US" sz="1800" dirty="0" smtClean="0">
-                <a:latin typeface="+mn-ea"/>
-              </a:rPr>
-              <a:t>，很难</a:t>
-            </a:r>
-            <a:r>
-              <a:rPr lang="zh-CN" altLang="en-US" sz="1800" dirty="0">
-                <a:latin typeface="+mn-ea"/>
-              </a:rPr>
-              <a:t>把钱花在别人身上，不满，对匮乏的恐惧，例如别人只要插队</a:t>
-            </a:r>
-            <a:r>
-              <a:rPr lang="zh-CN" altLang="en-US" sz="1800" dirty="0" smtClean="0">
-                <a:latin typeface="+mn-ea"/>
-              </a:rPr>
-              <a:t>，就</a:t>
-            </a:r>
-            <a:r>
-              <a:rPr lang="zh-CN" altLang="en-US" sz="1800" dirty="0">
-                <a:latin typeface="+mn-ea"/>
-              </a:rPr>
-              <a:t>勃然大怒，对未来的恐惧，嫌恶</a:t>
-            </a:r>
-            <a:r>
-              <a:rPr lang="zh-CN" altLang="en-US" sz="1800" dirty="0" smtClean="0">
-                <a:latin typeface="+mn-ea"/>
-              </a:rPr>
-              <a:t>。</a:t>
-            </a:r>
-            <a:endParaRPr lang="zh-CN" altLang="en-US" sz="1800" dirty="0">
-              <a:latin typeface="+mn-ea"/>
-            </a:endParaRPr>
+              <a:t>胃经的能量阻塞会造成的情绪包括：过度担心，抗拒所做的事，厌恶，妄想行为，自私，冷漠，不信任，不断担心别人无法信守承诺，或怀疑别人会反对我，失望，贪婪，很难把钱花在别人身上，不满，对匮乏的恐惧，例如别人只要插队，就勃然大怒，对未来的恐惧，嫌恶。</a:t>
+            </a:r>
           </a:p>
         </p:txBody>
       </p:sp>
@@ -10599,38 +10166,11 @@
               <a:buNone/>
             </a:pPr>
             <a:r>
-              <a:rPr lang="zh-CN" altLang="en-US" sz="1800" dirty="0" smtClean="0">
-                <a:latin typeface="+mn-ea"/>
-              </a:rPr>
-              <a:t>首先</a:t>
-            </a:r>
-            <a:r>
               <a:rPr lang="zh-CN" altLang="en-US" sz="1800" dirty="0">
                 <a:latin typeface="+mn-ea"/>
               </a:rPr>
-              <a:t>，闭上眼睛，回想过去让你感受到这些情绪的情境，想起那时的感觉，当时的事件，参与的人，当时的场景。将那些情境带回到现在</a:t>
-            </a:r>
-            <a:r>
-              <a:rPr lang="zh-CN" altLang="en-US" sz="1800" dirty="0" smtClean="0">
-                <a:latin typeface="+mn-ea"/>
-              </a:rPr>
-              <a:t>。接着</a:t>
-            </a:r>
-            <a:r>
-              <a:rPr lang="zh-CN" altLang="en-US" sz="1800" dirty="0">
-                <a:latin typeface="+mn-ea"/>
-              </a:rPr>
-              <a:t>，轻敲或按摩胃经的穴道「承泣</a:t>
-            </a:r>
-            <a:r>
-              <a:rPr lang="zh-CN" altLang="en-US" sz="1800" dirty="0" smtClean="0">
-                <a:latin typeface="+mn-ea"/>
-              </a:rPr>
-              <a:t>」。</a:t>
-            </a:r>
-            <a:endParaRPr lang="zh-CN" altLang="en-US" sz="1800" dirty="0">
-              <a:latin typeface="+mn-ea"/>
-            </a:endParaRPr>
+              <a:t>首先，闭上眼睛，回想过去让你感受到这些情绪的情境，想起那时的感觉，当时的事件，参与的人，当时的场景。将那些情境带回到现在。接着，轻敲或按摩胃经的穴道「承泣」。</a:t>
+            </a:r>
           </a:p>
         </p:txBody>
       </p:sp>
@@ -10644,13 +10184,6 @@
   <p:clrMapOvr>
     <a:masterClrMapping/>
   </p:clrMapOvr>
-  <p:timing>
-    <p:tnLst>
-      <p:par>
-        <p:cTn id="1" dur="indefinite" restart="never" nodeType="tmRoot"/>
-      </p:par>
-    </p:tnLst>
-  </p:timing>
 </p:sld>
 </file>
 
@@ -10698,26 +10231,17 @@
           <a:lstStyle/>
           <a:p>
             <a:r>
-              <a:rPr lang="zh-CN" altLang="en-US" sz="4400" dirty="0" smtClean="0"/>
-              <a:t>什么是情绪</a:t>
-            </a:r>
-            <a:r>
               <a:rPr lang="zh-CN" altLang="en-US" sz="4400" dirty="0"/>
-              <a:t>释放</a:t>
-            </a:r>
-            <a:r>
-              <a:rPr lang="zh-CN" altLang="en-US" sz="4400" dirty="0" smtClean="0"/>
-              <a:t>技术（</a:t>
-            </a:r>
-            <a:r>
-              <a:rPr lang="en-US" altLang="zh-CN" sz="4400" dirty="0" smtClean="0"/>
+              <a:t>什么是情绪释放技术（</a:t>
+            </a:r>
+            <a:r>
+              <a:rPr lang="en-US" altLang="zh-CN" sz="4400" dirty="0"/>
               <a:t>EFT</a:t>
             </a:r>
             <a:r>
-              <a:rPr lang="zh-CN" altLang="en-US" sz="4400" dirty="0" smtClean="0"/>
+              <a:rPr lang="zh-CN" altLang="en-US" sz="4400" dirty="0"/>
               <a:t>）</a:t>
             </a:r>
-            <a:endParaRPr lang="zh-CN" altLang="en-US" sz="4400" dirty="0"/>
           </a:p>
         </p:txBody>
       </p:sp>
@@ -10752,16 +10276,10 @@
               <a:buChar char="l"/>
             </a:pPr>
             <a:r>
-              <a:rPr lang="zh-CN" altLang="en-US" sz="1800" dirty="0" smtClean="0">
-                <a:latin typeface="+mn-ea"/>
-              </a:rPr>
-              <a:t>情绪</a:t>
-            </a:r>
-            <a:r>
               <a:rPr lang="zh-CN" altLang="en-US" sz="1800" dirty="0">
                 <a:latin typeface="+mn-ea"/>
               </a:rPr>
-              <a:t>释放技术（</a:t>
+              <a:t>情绪释放技术（</a:t>
             </a:r>
             <a:r>
               <a:rPr lang="en-US" altLang="zh-CN" sz="1800" dirty="0">
@@ -10773,31 +10291,7 @@
               <a:rPr lang="zh-CN" altLang="en-US" sz="1800" dirty="0">
                 <a:latin typeface="+mn-ea"/>
               </a:rPr>
-              <a:t>）是借鉴中医经络理论并结合心理学创建的一种心理治疗</a:t>
-            </a:r>
-            <a:r>
-              <a:rPr lang="zh-CN" altLang="en-US" sz="1800" dirty="0" smtClean="0">
-                <a:latin typeface="+mn-ea"/>
-              </a:rPr>
-              <a:t>技术。通过</a:t>
-            </a:r>
-            <a:r>
-              <a:rPr lang="zh-CN" altLang="en-US" sz="1800" dirty="0">
-                <a:latin typeface="+mn-ea"/>
-              </a:rPr>
-              <a:t>敲击特定的身体部位（眉头、眼尾、眼下、鼻下、下巴、锁骨、腋下、</a:t>
-            </a:r>
-            <a:r>
-              <a:rPr lang="zh-CN" altLang="en-US" sz="1800" dirty="0" smtClean="0">
-                <a:latin typeface="+mn-ea"/>
-              </a:rPr>
-              <a:t>头顶等十几个</a:t>
-            </a:r>
-            <a:r>
-              <a:rPr lang="zh-CN" altLang="en-US" sz="1800" dirty="0">
-                <a:latin typeface="+mn-ea"/>
-              </a:rPr>
-              <a:t>穴位），同时倾吐出内心积压的情绪事件，再通过积极赋义，转变信念和惯性模式，以达到清理潜意识和缓解身心不适的目的。 </a:t>
+              <a:t>）是借鉴中医经络理论并结合心理学创建的一种心理治疗技术。通过敲击特定的身体部位（眉头、眼尾、眼下、鼻下、下巴、锁骨、腋下、头顶等十几个穴位），同时倾吐出内心积压的情绪事件，再通过积极赋义，转变信念和惯性模式，以达到清理潜意识和缓解身心不适的目的。 </a:t>
             </a:r>
           </a:p>
         </p:txBody>
@@ -11000,49 +10494,31 @@
               <a:rPr lang="zh-CN" altLang="en-US" sz="1800" dirty="0">
                 <a:latin typeface="+mn-ea"/>
               </a:rPr>
-              <a:t>情绪释放技术可以视为能量心理学的一个有效应用，就像是一个“情绪橡皮擦”，可以快速地抚平情绪，如愤怒、委屈、恐惧</a:t>
-            </a:r>
-            <a:r>
-              <a:rPr lang="zh-CN" altLang="en-US" sz="1800" dirty="0" smtClean="0">
-                <a:latin typeface="+mn-ea"/>
-              </a:rPr>
-              <a:t>等。心理学家</a:t>
+              <a:t>情绪释放技术可以视为能量心理学的一个有效应用，就像是一个“情绪橡皮擦”，可以快速地抚平情绪，如愤怒、委屈、恐惧等。心理学家、医师、治疗师等采用</a:t>
+            </a:r>
+            <a:r>
+              <a:rPr lang="en-US" altLang="zh-CN" sz="1800" dirty="0">
+                <a:latin typeface="+mn-ea"/>
+              </a:rPr>
+              <a:t>EFT</a:t>
             </a:r>
             <a:r>
               <a:rPr lang="zh-CN" altLang="en-US" sz="1800" dirty="0">
                 <a:latin typeface="+mn-ea"/>
               </a:rPr>
-              <a:t>、医师、治疗师等采用</a:t>
-            </a:r>
-            <a:r>
-              <a:rPr lang="en-US" altLang="zh-CN" sz="1800" dirty="0">
-                <a:latin typeface="+mn-ea"/>
-              </a:rPr>
-              <a:t>EFT</a:t>
-            </a:r>
+              <a:t>治疗焦虑症、抑郁症、恐惧障碍等多种心理疾病和心理问题，其疗效已得到公认。</a:t>
+            </a:r>
+          </a:p>
+          <a:p>
+            <a:pPr marL="0" indent="0">
+              <a:buFont typeface="Arial" panose="020B0604020202020204" pitchFamily="34" charset="0"/>
+              <a:buNone/>
+            </a:pPr>
             <a:r>
               <a:rPr lang="zh-CN" altLang="en-US" sz="1800" dirty="0">
                 <a:latin typeface="+mn-ea"/>
               </a:rPr>
-              <a:t>治疗焦虑症、抑郁症、恐惧障碍等多种心理疾病和心理问题，其疗效已得到公认。</a:t>
-            </a:r>
-          </a:p>
-          <a:p>
-            <a:pPr marL="0" indent="0">
-              <a:buFont typeface="Arial" panose="020B0604020202020204" pitchFamily="34" charset="0"/>
-              <a:buNone/>
-            </a:pPr>
-            <a:r>
-              <a:rPr lang="zh-CN" altLang="en-US" sz="1800" dirty="0" smtClean="0">
-                <a:latin typeface="+mn-ea"/>
-              </a:rPr>
-              <a:t>云南省戒毒管理</a:t>
-            </a:r>
-            <a:r>
-              <a:rPr lang="zh-CN" altLang="en-US" sz="1800" dirty="0">
-                <a:latin typeface="+mn-ea"/>
-              </a:rPr>
-              <a:t>以</a:t>
+              <a:t>云南省戒毒管理以</a:t>
             </a:r>
             <a:r>
               <a:rPr lang="en-US" altLang="zh-CN" sz="1800" dirty="0">
@@ -11254,46 +10730,22 @@
               <a:buChar char="l"/>
             </a:pPr>
             <a:r>
-              <a:rPr lang="en-US" altLang="zh-CN" sz="1800" dirty="0" smtClean="0">
+              <a:rPr lang="en-US" altLang="zh-CN" sz="1800" dirty="0">
                 <a:latin typeface="+mn-ea"/>
               </a:rPr>
               <a:t>EFT</a:t>
             </a:r>
             <a:r>
-              <a:rPr lang="zh-CN" altLang="en-US" sz="1800" dirty="0" smtClean="0">
-                <a:latin typeface="+mn-ea"/>
-              </a:rPr>
-              <a:t>源于</a:t>
-            </a:r>
-            <a:r>
               <a:rPr lang="zh-CN" altLang="en-US" sz="1800" dirty="0">
                 <a:latin typeface="+mn-ea"/>
               </a:rPr>
-              <a:t>美国，由</a:t>
-            </a:r>
-            <a:r>
-              <a:rPr lang="zh-CN" altLang="en-US" sz="1800" dirty="0" smtClean="0">
-                <a:latin typeface="+mn-ea"/>
-              </a:rPr>
-              <a:t>盖瑞・奎格</a:t>
-            </a:r>
-            <a:r>
-              <a:rPr lang="zh-CN" altLang="en-US" sz="1800" dirty="0">
-                <a:latin typeface="+mn-ea"/>
-              </a:rPr>
-              <a:t>（</a:t>
+              <a:t>源于美国，由盖瑞・奎格（</a:t>
             </a:r>
             <a:r>
               <a:rPr lang="en-US" altLang="zh-CN" sz="1800" dirty="0">
                 <a:latin typeface="+mn-ea"/>
               </a:rPr>
-              <a:t>Gary </a:t>
-            </a:r>
-            <a:r>
-              <a:rPr lang="en-US" altLang="zh-CN" sz="1800" dirty="0" smtClean="0">
-                <a:latin typeface="+mn-ea"/>
-              </a:rPr>
-              <a:t>Craig</a:t>
+              <a:t>Gary Craig</a:t>
             </a:r>
             <a:r>
               <a:rPr lang="zh-CN" altLang="en-US" sz="1800" dirty="0">
@@ -11401,13 +10853,6 @@
   <p:clrMapOvr>
     <a:masterClrMapping/>
   </p:clrMapOvr>
-  <p:timing>
-    <p:tnLst>
-      <p:par>
-        <p:cTn id="1" dur="indefinite" restart="never" nodeType="tmRoot"/>
-      </p:par>
-    </p:tnLst>
-  </p:timing>
 </p:sld>
 </file>
 
@@ -11466,21 +10911,16 @@
             </a:r>
             <a:r>
               <a:rPr lang="zh-CN" altLang="en-US" sz="4400" dirty="0"/>
-              <a:t>核心敲击穴位</a:t>
-            </a:r>
-            <a:r>
-              <a:rPr lang="zh-CN" altLang="en-US" sz="4400" dirty="0" smtClean="0"/>
-              <a:t>（</a:t>
-            </a:r>
-            <a:r>
-              <a:rPr lang="en-US" altLang="zh-CN" sz="4400" dirty="0" smtClean="0"/>
+              <a:t>核心敲击穴位（</a:t>
+            </a:r>
+            <a:r>
+              <a:rPr lang="en-US" altLang="zh-CN" sz="4400" dirty="0"/>
               <a:t>6</a:t>
             </a:r>
             <a:r>
-              <a:rPr lang="zh-CN" altLang="en-US" sz="4400" dirty="0" smtClean="0"/>
+              <a:rPr lang="zh-CN" altLang="en-US" sz="4400" dirty="0"/>
               <a:t>）</a:t>
             </a:r>
-            <a:endParaRPr lang="zh-CN" altLang="en-US" sz="4400" dirty="0"/>
           </a:p>
         </p:txBody>
       </p:sp>
@@ -11518,17 +10958,8 @@
               <a:rPr lang="zh-CN" altLang="en-US" sz="1800" dirty="0">
                 <a:latin typeface="+mn-ea"/>
               </a:rPr>
-              <a:t>对应情绪</a:t>
-            </a:r>
-            <a:r>
-              <a:rPr lang="zh-CN" altLang="en-US" sz="1800" dirty="0" smtClean="0">
-                <a:latin typeface="+mn-ea"/>
-              </a:rPr>
-              <a:t>：压力</a:t>
-            </a:r>
-            <a:endParaRPr lang="zh-CN" altLang="en-US" sz="1800" dirty="0">
-              <a:latin typeface="+mn-ea"/>
-            </a:endParaRPr>
+              <a:t>对应情绪：压力</a:t>
+            </a:r>
           </a:p>
           <a:p>
             <a:pPr>
@@ -11539,27 +10970,9 @@
               <a:rPr lang="zh-CN" altLang="en-US" sz="1800" dirty="0">
                 <a:latin typeface="+mn-ea"/>
               </a:rPr>
-              <a:t>穴位位置</a:t>
-            </a:r>
-            <a:r>
-              <a:rPr lang="zh-CN" altLang="en-US" sz="1800" dirty="0" smtClean="0">
-                <a:latin typeface="+mn-ea"/>
-              </a:rPr>
-              <a:t>：</a:t>
-            </a:r>
-            <a:r>
-              <a:rPr lang="zh-CN" altLang="en-US" sz="1800" dirty="0">
-                <a:latin typeface="+mn-ea"/>
-              </a:rPr>
-              <a:t>人中沟下半部分（上嘴唇与鼻底之间的凹陷处</a:t>
-            </a:r>
-            <a:r>
-              <a:rPr lang="zh-CN" altLang="en-US" sz="1800" dirty="0" smtClean="0">
-                <a:latin typeface="+mn-ea"/>
-              </a:rPr>
-              <a:t>）</a:t>
-            </a:r>
-            <a:endParaRPr lang="en-US" altLang="zh-CN" sz="1800" dirty="0" smtClean="0">
+              <a:t>穴位位置：人中沟下半部分（上嘴唇与鼻底之间的凹陷处）</a:t>
+            </a:r>
+            <a:endParaRPr lang="en-US" altLang="zh-CN" sz="1800" dirty="0">
               <a:latin typeface="+mn-ea"/>
             </a:endParaRPr>
           </a:p>
@@ -11569,38 +10982,11 @@
               <a:buChar char="n"/>
             </a:pPr>
             <a:r>
-              <a:rPr lang="zh-CN" altLang="en-US" sz="1800" dirty="0" smtClean="0">
-                <a:latin typeface="+mn-ea"/>
-              </a:rPr>
-              <a:t>功效</a:t>
-            </a:r>
-            <a:r>
               <a:rPr lang="zh-CN" altLang="en-US" sz="1800" dirty="0">
                 <a:latin typeface="+mn-ea"/>
               </a:rPr>
-              <a:t>作用</a:t>
-            </a:r>
-            <a:r>
-              <a:rPr lang="zh-CN" altLang="en-US" sz="1800" dirty="0" smtClean="0">
-                <a:latin typeface="+mn-ea"/>
-              </a:rPr>
-              <a:t>：平衡</a:t>
-            </a:r>
-            <a:r>
-              <a:rPr lang="zh-CN" altLang="en-US" sz="1800" dirty="0">
-                <a:latin typeface="+mn-ea"/>
-              </a:rPr>
-              <a:t>情绪与身体的连接，缓解强烈的情绪冲击（如恐慌、崩溃感</a:t>
-            </a:r>
-            <a:r>
-              <a:rPr lang="zh-CN" altLang="en-US" sz="1800" dirty="0" smtClean="0">
-                <a:latin typeface="+mn-ea"/>
-              </a:rPr>
-              <a:t>）</a:t>
-            </a:r>
-            <a:endParaRPr lang="zh-CN" altLang="en-US" sz="1800" dirty="0">
-              <a:latin typeface="+mn-ea"/>
-            </a:endParaRPr>
+              <a:t>功效作用：平衡情绪与身体的连接，缓解强烈的情绪冲击（如恐慌、崩溃感）</a:t>
+            </a:r>
           </a:p>
         </p:txBody>
       </p:sp>
@@ -11834,31 +11220,8 @@
                 </a:effectLst>
                 <a:latin typeface="+mn-ea"/>
               </a:rPr>
-              <a:t>人中穴（水沟穴）（督</a:t>
-            </a:r>
-            <a:r>
-              <a:rPr lang="zh-CN" altLang="en-US" sz="3200" dirty="0" smtClean="0">
-                <a:effectLst>
-                  <a:outerShdw blurRad="38100" dist="38100" dir="2700000" algn="tl">
-                    <a:srgbClr val="000000">
-                      <a:alpha val="43137"/>
-                    </a:srgbClr>
-                  </a:outerShdw>
-                </a:effectLst>
-                <a:latin typeface="+mn-ea"/>
-              </a:rPr>
-              <a:t>脉）</a:t>
-            </a:r>
-            <a:endParaRPr lang="zh-CN" altLang="en-US" sz="3200" dirty="0">
-              <a:effectLst>
-                <a:outerShdw blurRad="38100" dist="38100" dir="2700000" algn="tl">
-                  <a:srgbClr val="000000">
-                    <a:alpha val="43137"/>
-                  </a:srgbClr>
-                </a:outerShdw>
-              </a:effectLst>
-              <a:latin typeface="+mn-ea"/>
-            </a:endParaRPr>
+              <a:t>人中穴（水沟穴）（督脉）</a:t>
+            </a:r>
           </a:p>
         </p:txBody>
       </p:sp>
@@ -12096,26 +11459,11 @@
               <a:buNone/>
             </a:pPr>
             <a:r>
-              <a:rPr lang="zh-CN" altLang="en-US" sz="1800" dirty="0" smtClean="0">
-                <a:latin typeface="+mn-ea"/>
-              </a:rPr>
-              <a:t>督</a:t>
-            </a:r>
-            <a:r>
               <a:rPr lang="zh-CN" altLang="en-US" sz="1800" dirty="0">
                 <a:latin typeface="+mn-ea"/>
               </a:rPr>
-              <a:t>脉是一条非常强而有力的经络，对慢性疾病和生命力的影响非常</a:t>
-            </a:r>
-            <a:r>
-              <a:rPr lang="zh-CN" altLang="en-US" sz="1800" dirty="0" smtClean="0">
-                <a:latin typeface="+mn-ea"/>
-              </a:rPr>
-              <a:t>重要</a:t>
-            </a:r>
-            <a:endParaRPr lang="zh-CN" altLang="en-US" sz="1800" dirty="0">
-              <a:latin typeface="+mn-ea"/>
-            </a:endParaRPr>
+              <a:t>督脉是一条非常强而有力的经络，对慢性疾病和生命力的影响非常重要</a:t>
+            </a:r>
           </a:p>
           <a:p>
             <a:pPr marL="0" indent="0">
@@ -12126,17 +11474,8 @@
               <a:rPr lang="zh-CN" altLang="en-US" sz="1800" dirty="0">
                 <a:latin typeface="+mn-ea"/>
               </a:rPr>
-              <a:t>首先，闭上眼睛，回想过去让你觉得有压力的情境。观想在家里感受到压力的情境，社交场合，工作上感受到让你紧张，有压力的情境，想起那时的感觉，当时的事件，参与的人，当时的场景。将那些情境带回到</a:t>
-            </a:r>
-            <a:r>
-              <a:rPr lang="zh-CN" altLang="en-US" sz="1800" dirty="0" smtClean="0">
-                <a:latin typeface="+mn-ea"/>
-              </a:rPr>
-              <a:t>现在</a:t>
-            </a:r>
-            <a:endParaRPr lang="zh-CN" altLang="en-US" sz="1800" dirty="0">
-              <a:latin typeface="+mn-ea"/>
-            </a:endParaRPr>
+              <a:t>首先，闭上眼睛，回想过去让你觉得有压力的情境。观想在家里感受到压力的情境，社交场合，工作上感受到让你紧张，有压力的情境，想起那时的感觉，当时的事件，参与的人，当时的场景。将那些情境带回到现在</a:t>
+            </a:r>
           </a:p>
           <a:p>
             <a:pPr marL="0" indent="0">
@@ -12147,17 +11486,8 @@
               <a:rPr lang="zh-CN" altLang="en-US" sz="1800" dirty="0">
                 <a:latin typeface="+mn-ea"/>
               </a:rPr>
-              <a:t>接着，轻敲或按摩督脉的穴道「水沟」，又名「人中</a:t>
-            </a:r>
-            <a:r>
-              <a:rPr lang="zh-CN" altLang="en-US" sz="1800" dirty="0" smtClean="0">
-                <a:latin typeface="+mn-ea"/>
-              </a:rPr>
-              <a:t>」。</a:t>
-            </a:r>
-            <a:endParaRPr lang="zh-CN" altLang="en-US" sz="1800" dirty="0">
-              <a:latin typeface="+mn-ea"/>
-            </a:endParaRPr>
+              <a:t>接着，轻敲或按摩督脉的穴道「水沟」，又名「人中」。</a:t>
+            </a:r>
           </a:p>
         </p:txBody>
       </p:sp>
@@ -12171,13 +11501,6 @@
   <p:clrMapOvr>
     <a:masterClrMapping/>
   </p:clrMapOvr>
-  <p:timing>
-    <p:tnLst>
-      <p:par>
-        <p:cTn id="1" dur="indefinite" restart="never" nodeType="tmRoot"/>
-      </p:par>
-    </p:tnLst>
-  </p:timing>
 </p:sld>
 </file>
 
@@ -12236,21 +11559,16 @@
             </a:r>
             <a:r>
               <a:rPr lang="zh-CN" altLang="en-US" sz="4400" dirty="0"/>
-              <a:t>核心敲击穴位</a:t>
-            </a:r>
-            <a:r>
-              <a:rPr lang="zh-CN" altLang="en-US" sz="4400" dirty="0" smtClean="0"/>
-              <a:t>（</a:t>
-            </a:r>
-            <a:r>
-              <a:rPr lang="en-US" altLang="zh-CN" sz="4400" dirty="0" smtClean="0"/>
+              <a:t>核心敲击穴位（</a:t>
+            </a:r>
+            <a:r>
+              <a:rPr lang="en-US" altLang="zh-CN" sz="4400" dirty="0"/>
               <a:t>7</a:t>
             </a:r>
             <a:r>
-              <a:rPr lang="zh-CN" altLang="en-US" sz="4400" dirty="0" smtClean="0"/>
+              <a:rPr lang="zh-CN" altLang="en-US" sz="4400" dirty="0"/>
               <a:t>）</a:t>
             </a:r>
-            <a:endParaRPr lang="zh-CN" altLang="en-US" sz="4400" dirty="0"/>
           </a:p>
         </p:txBody>
       </p:sp>
@@ -12288,27 +11606,9 @@
               <a:rPr lang="zh-CN" altLang="en-US" sz="1400" dirty="0">
                 <a:latin typeface="+mn-ea"/>
               </a:rPr>
-              <a:t>对应情绪</a:t>
-            </a:r>
-            <a:r>
-              <a:rPr lang="zh-CN" altLang="en-US" sz="1400" dirty="0" smtClean="0">
-                <a:latin typeface="+mn-ea"/>
-              </a:rPr>
-              <a:t>：</a:t>
-            </a:r>
-            <a:r>
-              <a:rPr lang="zh-CN" altLang="en-US" sz="1400" dirty="0">
-                <a:latin typeface="+mn-ea"/>
-              </a:rPr>
-              <a:t>被压抑的</a:t>
-            </a:r>
-            <a:r>
-              <a:rPr lang="zh-CN" altLang="en-US" sz="1400" dirty="0" smtClean="0">
-                <a:latin typeface="+mn-ea"/>
-              </a:rPr>
-              <a:t>情绪</a:t>
-            </a:r>
-            <a:endParaRPr lang="en-US" altLang="zh-CN" sz="1400" dirty="0" smtClean="0">
+              <a:t>对应情绪：被压抑的情绪</a:t>
+            </a:r>
+            <a:endParaRPr lang="en-US" altLang="zh-CN" sz="1400" dirty="0">
               <a:latin typeface="+mn-ea"/>
             </a:endParaRPr>
           </a:p>
@@ -12318,36 +11618,12 @@
               <a:buChar char="n"/>
             </a:pPr>
             <a:r>
-              <a:rPr lang="zh-CN" altLang="en-US" sz="1400" dirty="0" smtClean="0">
-                <a:latin typeface="+mn-ea"/>
-              </a:rPr>
-              <a:t>穴位</a:t>
-            </a:r>
-            <a:r>
               <a:rPr lang="zh-CN" altLang="en-US" sz="1400" dirty="0">
                 <a:latin typeface="+mn-ea"/>
               </a:rPr>
-              <a:t>位置</a:t>
-            </a:r>
-            <a:r>
-              <a:rPr lang="zh-CN" altLang="en-US" sz="1400" dirty="0" smtClean="0">
-                <a:latin typeface="+mn-ea"/>
-              </a:rPr>
-              <a:t>：</a:t>
-            </a:r>
-            <a:r>
-              <a:rPr lang="zh-CN" altLang="en-US" sz="1400" dirty="0">
-                <a:latin typeface="+mn-ea"/>
-              </a:rPr>
-              <a:t>下嘴唇下方、下巴骨上方的凹陷</a:t>
-            </a:r>
-            <a:r>
-              <a:rPr lang="zh-CN" altLang="en-US" sz="1400" dirty="0" smtClean="0">
-                <a:latin typeface="+mn-ea"/>
-              </a:rPr>
-              <a:t>处</a:t>
-            </a:r>
-            <a:endParaRPr lang="en-US" altLang="zh-CN" sz="1400" dirty="0" smtClean="0">
+              <a:t>穴位位置：下嘴唇下方、下巴骨上方的凹陷处</a:t>
+            </a:r>
+            <a:endParaRPr lang="en-US" altLang="zh-CN" sz="1400" dirty="0">
               <a:latin typeface="+mn-ea"/>
             </a:endParaRPr>
           </a:p>
@@ -12357,38 +11633,11 @@
               <a:buChar char="n"/>
             </a:pPr>
             <a:r>
-              <a:rPr lang="zh-CN" altLang="en-US" sz="1400" dirty="0" smtClean="0">
-                <a:latin typeface="+mn-ea"/>
-              </a:rPr>
-              <a:t>功效</a:t>
-            </a:r>
-            <a:r>
               <a:rPr lang="zh-CN" altLang="en-US" sz="1400" dirty="0">
                 <a:latin typeface="+mn-ea"/>
               </a:rPr>
-              <a:t>作用</a:t>
-            </a:r>
-            <a:r>
-              <a:rPr lang="zh-CN" altLang="en-US" sz="1400" dirty="0" smtClean="0">
-                <a:latin typeface="+mn-ea"/>
-              </a:rPr>
-              <a:t>：稳定</a:t>
-            </a:r>
-            <a:r>
-              <a:rPr lang="zh-CN" altLang="en-US" sz="1400" dirty="0">
-                <a:latin typeface="+mn-ea"/>
-              </a:rPr>
-              <a:t>情绪状态，尤其适合缓解失控感、无助</a:t>
-            </a:r>
-            <a:r>
-              <a:rPr lang="zh-CN" altLang="en-US" sz="1400" dirty="0" smtClean="0">
-                <a:latin typeface="+mn-ea"/>
-              </a:rPr>
-              <a:t>感</a:t>
-            </a:r>
-            <a:endParaRPr lang="zh-CN" altLang="en-US" sz="1400" dirty="0">
-              <a:latin typeface="+mn-ea"/>
-            </a:endParaRPr>
+              <a:t>功效作用：稳定情绪状态，尤其适合缓解失控感、无助感</a:t>
+            </a:r>
           </a:p>
         </p:txBody>
       </p:sp>
@@ -12864,16 +12113,10 @@
               <a:buNone/>
             </a:pPr>
             <a:r>
-              <a:rPr lang="zh-CN" altLang="en-US" sz="1400" dirty="0" smtClean="0">
-                <a:latin typeface="+mn-ea"/>
-              </a:rPr>
-              <a:t>任</a:t>
-            </a:r>
-            <a:r>
               <a:rPr lang="zh-CN" altLang="en-US" sz="1400" dirty="0">
                 <a:latin typeface="+mn-ea"/>
               </a:rPr>
-              <a:t>脉和督脉一样，与内在器官连结。</a:t>
+              <a:t>任脉和督脉一样，与内在器官连结。</a:t>
             </a:r>
           </a:p>
           <a:p>
@@ -12888,15 +12131,9 @@
               <a:rPr lang="zh-CN" altLang="en-US" sz="1400" dirty="0">
                 <a:latin typeface="+mn-ea"/>
               </a:rPr>
-              <a:t>与生殖荷尔蒙及生殖器官，也就是摄护腺和子宫，有着紧密的连结</a:t>
-            </a:r>
-            <a:r>
-              <a:rPr lang="zh-CN" altLang="en-US" sz="1400" dirty="0" smtClean="0">
-                <a:latin typeface="+mn-ea"/>
-              </a:rPr>
-              <a:t>。</a:t>
-            </a:r>
-            <a:endParaRPr lang="en-US" altLang="zh-CN" sz="1400" dirty="0" smtClean="0">
+              <a:t>与生殖荷尔蒙及生殖器官，也就是摄护腺和子宫，有着紧密的连结。</a:t>
+            </a:r>
+            <a:endParaRPr lang="en-US" altLang="zh-CN" sz="1400" dirty="0">
               <a:latin typeface="+mn-ea"/>
             </a:endParaRPr>
           </a:p>
@@ -12909,16 +12146,10 @@
               <a:buNone/>
             </a:pPr>
             <a:r>
-              <a:rPr lang="zh-CN" altLang="en-US" sz="1400" dirty="0" smtClean="0">
-                <a:latin typeface="+mn-ea"/>
-              </a:rPr>
-              <a:t>这</a:t>
-            </a:r>
-            <a:r>
               <a:rPr lang="zh-CN" altLang="en-US" sz="1400" dirty="0">
                 <a:latin typeface="+mn-ea"/>
               </a:rPr>
-              <a:t>是一条强而有力的经络，对急性的压力和环境的反应有重大影响。</a:t>
+              <a:t>这是一条强而有力的经络，对急性的压力和环境的反应有重大影响。</a:t>
             </a:r>
           </a:p>
           <a:p>
@@ -12933,15 +12164,9 @@
               <a:rPr lang="zh-CN" altLang="en-US" sz="1400" dirty="0">
                 <a:latin typeface="+mn-ea"/>
               </a:rPr>
-              <a:t>我们常常为了好面子，而假装自己没有受到压力</a:t>
-            </a:r>
-            <a:r>
-              <a:rPr lang="zh-CN" altLang="en-US" sz="1400" dirty="0" smtClean="0">
-                <a:latin typeface="+mn-ea"/>
-              </a:rPr>
-              <a:t>，</a:t>
-            </a:r>
-            <a:endParaRPr lang="en-US" altLang="zh-CN" sz="1400" dirty="0" smtClean="0">
+              <a:t>我们常常为了好面子，而假装自己没有受到压力，</a:t>
+            </a:r>
+            <a:endParaRPr lang="en-US" altLang="zh-CN" sz="1400" dirty="0">
               <a:latin typeface="+mn-ea"/>
             </a:endParaRPr>
           </a:p>
@@ -12954,16 +12179,10 @@
               <a:buNone/>
             </a:pPr>
             <a:r>
-              <a:rPr lang="zh-CN" altLang="en-US" sz="1400" dirty="0" smtClean="0">
-                <a:latin typeface="+mn-ea"/>
-              </a:rPr>
-              <a:t>我们</a:t>
-            </a:r>
-            <a:r>
               <a:rPr lang="zh-CN" altLang="en-US" sz="1400" dirty="0">
                 <a:latin typeface="+mn-ea"/>
               </a:rPr>
-              <a:t>学会了压抑自己的情绪和感觉，而且非常擅于此道。</a:t>
+              <a:t>我们学会了压抑自己的情绪和感觉，而且非常擅于此道。</a:t>
             </a:r>
           </a:p>
           <a:p>
@@ -13247,19 +12466,19 @@
               <a:rPr lang="zh-CN" altLang="en-US" sz="1400" dirty="0">
                 <a:latin typeface="+mn-ea"/>
               </a:rPr>
-              <a:t>将那些情境带回到现在</a:t>
-            </a:r>
-            <a:r>
-              <a:rPr lang="zh-CN" altLang="en-US" sz="1400" dirty="0" smtClean="0">
-                <a:latin typeface="+mn-ea"/>
-              </a:rPr>
-              <a:t>。那时</a:t>
-            </a:r>
+              <a:t>将那些情境带回到现在。那时你觉得脆弱，不想表露自己，让其他人知道。现在就让自己去感受那些情绪，体验自己的情绪，不要和它对抗，去感受它的存在，就像你有时候会忍住泪水。</a:t>
+            </a:r>
+          </a:p>
+          <a:p>
+            <a:pPr marL="0" indent="0">
+              <a:buFont typeface="Arial" panose="020B0604020202020204" pitchFamily="34" charset="0"/>
+              <a:buNone/>
+            </a:pPr>
             <a:r>
               <a:rPr lang="zh-CN" altLang="en-US" sz="1400" dirty="0">
                 <a:latin typeface="+mn-ea"/>
               </a:rPr>
-              <a:t>你觉得脆弱，不想表露自己，让其他人知道。现在就让自己去感受那些情绪，体验自己的情绪，不要和它对抗，去感受它的存在，就像你有时候会忍住泪水。</a:t>
+              <a:t>是的，只要是人，就会有情绪，请允许自己接受这点。</a:t>
             </a:r>
           </a:p>
           <a:p>
@@ -13271,29 +12490,8 @@
               <a:rPr lang="zh-CN" altLang="en-US" sz="1400" dirty="0">
                 <a:latin typeface="+mn-ea"/>
               </a:rPr>
-              <a:t>是的，只要是人，就会有情绪，请允许自己接受这点。</a:t>
-            </a:r>
-          </a:p>
-          <a:p>
-            <a:pPr marL="0" indent="0">
-              <a:buFont typeface="Arial" panose="020B0604020202020204" pitchFamily="34" charset="0"/>
-              <a:buNone/>
-            </a:pPr>
-            <a:r>
-              <a:rPr lang="zh-CN" altLang="en-US" sz="1400" dirty="0">
-                <a:latin typeface="+mn-ea"/>
-              </a:rPr>
-              <a:t>接着，轻敲或按摩任脉的穴道「承浆</a:t>
-            </a:r>
-            <a:r>
-              <a:rPr lang="zh-CN" altLang="en-US" sz="1400" dirty="0" smtClean="0">
-                <a:latin typeface="+mn-ea"/>
-              </a:rPr>
-              <a:t>」。</a:t>
-            </a:r>
-            <a:endParaRPr lang="zh-CN" altLang="en-US" sz="1400" dirty="0">
-              <a:latin typeface="+mn-ea"/>
-            </a:endParaRPr>
+              <a:t>接着，轻敲或按摩任脉的穴道「承浆」。</a:t>
+            </a:r>
           </a:p>
         </p:txBody>
       </p:sp>
@@ -13307,13 +12505,6 @@
   <p:clrMapOvr>
     <a:masterClrMapping/>
   </p:clrMapOvr>
-  <p:timing>
-    <p:tnLst>
-      <p:par>
-        <p:cTn id="1" dur="indefinite" restart="never" nodeType="tmRoot"/>
-      </p:par>
-    </p:tnLst>
-  </p:timing>
 </p:sld>
 </file>
 
@@ -13372,21 +12563,16 @@
             </a:r>
             <a:r>
               <a:rPr lang="zh-CN" altLang="en-US" sz="4400" dirty="0"/>
-              <a:t>核心敲击穴位</a:t>
-            </a:r>
-            <a:r>
-              <a:rPr lang="zh-CN" altLang="en-US" sz="4400" dirty="0" smtClean="0"/>
-              <a:t>（</a:t>
-            </a:r>
-            <a:r>
-              <a:rPr lang="en-US" altLang="zh-CN" sz="4400" dirty="0" smtClean="0"/>
+              <a:t>核心敲击穴位（</a:t>
+            </a:r>
+            <a:r>
+              <a:rPr lang="en-US" altLang="zh-CN" sz="4400" dirty="0"/>
               <a:t>8</a:t>
             </a:r>
             <a:r>
-              <a:rPr lang="zh-CN" altLang="en-US" sz="4400" dirty="0" smtClean="0"/>
+              <a:rPr lang="zh-CN" altLang="en-US" sz="4400" dirty="0"/>
               <a:t>）</a:t>
             </a:r>
-            <a:endParaRPr lang="zh-CN" altLang="en-US" sz="4400" dirty="0"/>
           </a:p>
         </p:txBody>
       </p:sp>
@@ -13424,45 +12610,9 @@
               <a:rPr lang="zh-CN" altLang="en-US" sz="1800" dirty="0">
                 <a:latin typeface="+mn-ea"/>
               </a:rPr>
-              <a:t>对应情绪</a:t>
-            </a:r>
-            <a:r>
-              <a:rPr lang="zh-CN" altLang="en-US" sz="1800" dirty="0" smtClean="0">
-                <a:latin typeface="+mn-ea"/>
-              </a:rPr>
-              <a:t>：</a:t>
-            </a:r>
-            <a:r>
-              <a:rPr lang="zh-CN" altLang="en-US" sz="1800" dirty="0">
-                <a:latin typeface="+mn-ea"/>
-              </a:rPr>
-              <a:t>平复烦躁</a:t>
-            </a:r>
-            <a:r>
-              <a:rPr lang="zh-CN" altLang="en-US" sz="1800" dirty="0" smtClean="0">
-                <a:latin typeface="+mn-ea"/>
-              </a:rPr>
-              <a:t>焦虑，</a:t>
-            </a:r>
-            <a:r>
-              <a:rPr lang="zh-CN" altLang="en-US" sz="1800" dirty="0">
-                <a:latin typeface="+mn-ea"/>
-              </a:rPr>
-              <a:t>改善失眠多梦引发的情绪</a:t>
-            </a:r>
-            <a:r>
-              <a:rPr lang="zh-CN" altLang="en-US" sz="1800" dirty="0" smtClean="0">
-                <a:latin typeface="+mn-ea"/>
-              </a:rPr>
-              <a:t>低落，</a:t>
-            </a:r>
-            <a:r>
-              <a:rPr lang="zh-CN" altLang="en-US" sz="1800" dirty="0">
-                <a:latin typeface="+mn-ea"/>
-              </a:rPr>
-              <a:t>缓解情志郁结导致的胸闷</a:t>
-            </a:r>
-            <a:endParaRPr lang="en-US" altLang="zh-CN" sz="1800" dirty="0" smtClean="0">
+              <a:t>对应情绪：平复烦躁焦虑，改善失眠多梦引发的情绪低落，缓解情志郁结导致的胸闷</a:t>
+            </a:r>
+            <a:endParaRPr lang="en-US" altLang="zh-CN" sz="1800" dirty="0">
               <a:latin typeface="+mn-ea"/>
             </a:endParaRPr>
           </a:p>
@@ -13475,19 +12625,7 @@
               <a:rPr lang="zh-CN" altLang="en-US" sz="1800" dirty="0">
                 <a:latin typeface="+mn-ea"/>
               </a:rPr>
-              <a:t>穴位</a:t>
-            </a:r>
-            <a:r>
-              <a:rPr lang="zh-CN" altLang="en-US" sz="1800" dirty="0" smtClean="0">
-                <a:latin typeface="+mn-ea"/>
-              </a:rPr>
-              <a:t>位置：胸部第二肋间隙，前正中线旁开两寸</a:t>
-            </a:r>
-            <a:r>
-              <a:rPr lang="zh-CN" altLang="en-US" sz="1800" dirty="0">
-                <a:latin typeface="+mn-ea"/>
-              </a:rPr>
-              <a:t>。低头时摸到锁骨，向中间靠近胸骨的位置，能感受到明显凹陷。</a:t>
+              <a:t>穴位位置：胸部第二肋间隙，前正中线旁开两寸。低头时摸到锁骨，向中间靠近胸骨的位置，能感受到明显凹陷。</a:t>
             </a:r>
           </a:p>
           <a:p>
@@ -13496,12 +12634,12 @@
               <a:buChar char="n"/>
             </a:pPr>
             <a:r>
-              <a:rPr lang="zh-CN" altLang="en-US" sz="1800" dirty="0" smtClean="0">
+              <a:rPr lang="zh-CN" altLang="en-US" sz="1800" dirty="0">
                 <a:latin typeface="+mn-ea"/>
               </a:rPr>
               <a:t>功效作用：疏通肾经，改善心脏供血以安神（不痛快，胸口堵得慌，挺胸就是在拍神藏穴）。</a:t>
             </a:r>
-            <a:endParaRPr lang="en-US" altLang="zh-CN" sz="1800" dirty="0" smtClean="0">
+            <a:endParaRPr lang="en-US" altLang="zh-CN" sz="1800" dirty="0">
               <a:latin typeface="+mn-ea"/>
             </a:endParaRPr>
           </a:p>
@@ -13510,16 +12648,10 @@
               <a:buNone/>
             </a:pPr>
             <a:r>
-              <a:rPr lang="zh-CN" altLang="en-US" sz="1800" dirty="0" smtClean="0">
-                <a:latin typeface="+mn-ea"/>
-              </a:rPr>
-              <a:t>神</a:t>
-            </a:r>
-            <a:r>
               <a:rPr lang="zh-CN" altLang="en-US" sz="1800" dirty="0">
                 <a:latin typeface="+mn-ea"/>
               </a:rPr>
-              <a:t>藏穴名中的 “神” 指心神、神志，“藏” 有收纳、安定之意，穴性与 “心神安定” 直接相关。</a:t>
+              <a:t>神藏穴名中的 “神” 指心神、神志，“藏” 有收纳、安定之意，穴性与 “心神安定” 直接相关。</a:t>
             </a:r>
           </a:p>
           <a:p>
@@ -13527,16 +12659,10 @@
               <a:buNone/>
             </a:pPr>
             <a:r>
-              <a:rPr lang="zh-CN" altLang="en-US" sz="1800" dirty="0" smtClean="0">
-                <a:latin typeface="+mn-ea"/>
-              </a:rPr>
-              <a:t>足</a:t>
-            </a:r>
-            <a:r>
               <a:rPr lang="zh-CN" altLang="en-US" sz="1800" dirty="0">
                 <a:latin typeface="+mn-ea"/>
               </a:rPr>
-              <a:t>少阴肾经与心、肝等脏腑关联密切：肾主藏精，精能生血，血能养神；同时肾水可滋养肝木，避免肝失疏泄导致的情绪郁结。神藏穴作为肾经胸部穴位，能疏通本经气血，间接调和心、肝的情志功能。</a:t>
+              <a:t>足少阴肾经与心、肝等脏腑关联密切：肾主藏精，精能生血，血能养神；同时肾水可滋养肝木，避免肝失疏泄导致的情绪郁结。神藏穴作为肾经胸部穴位，能疏通本经气血，间接调和心、肝的情志功能。</a:t>
             </a:r>
           </a:p>
           <a:p>
@@ -13743,45 +12869,6 @@
               <a:buNone/>
             </a:pPr>
             <a:r>
-              <a:rPr lang="zh-CN" altLang="en-US" sz="3200" dirty="0" smtClean="0">
-                <a:effectLst>
-                  <a:outerShdw blurRad="38100" dist="38100" dir="2700000" algn="tl">
-                    <a:srgbClr val="000000">
-                      <a:alpha val="43137"/>
-                    </a:srgbClr>
-                  </a:outerShdw>
-                </a:effectLst>
-                <a:latin typeface="+mn-ea"/>
-              </a:rPr>
-              <a:t>前胸 </a:t>
-            </a:r>
-            <a:r>
-              <a:rPr lang="en-US" altLang="zh-CN" sz="3200" dirty="0" smtClean="0">
-                <a:effectLst>
-                  <a:outerShdw blurRad="38100" dist="38100" dir="2700000" algn="tl">
-                    <a:srgbClr val="000000">
-                      <a:alpha val="43137"/>
-                    </a:srgbClr>
-                  </a:outerShdw>
-                </a:effectLst>
-                <a:latin typeface="+mn-ea"/>
-              </a:rPr>
-              <a:t>- </a:t>
-            </a:r>
-            <a:r>
-              <a:rPr lang="zh-CN" altLang="en-US" sz="3200" dirty="0" smtClean="0">
-                <a:effectLst>
-                  <a:outerShdw blurRad="38100" dist="38100" dir="2700000" algn="tl">
-                    <a:srgbClr val="000000">
-                      <a:alpha val="43137"/>
-                    </a:srgbClr>
-                  </a:outerShdw>
-                </a:effectLst>
-                <a:latin typeface="+mn-ea"/>
-              </a:rPr>
-              <a:t>神</a:t>
-            </a:r>
-            <a:r>
               <a:rPr lang="zh-CN" altLang="en-US" sz="3200" dirty="0">
                 <a:effectLst>
                   <a:outerShdw blurRad="38100" dist="38100" dir="2700000" algn="tl">
@@ -13792,10 +12879,10 @@
                 </a:effectLst>
                 <a:latin typeface="+mn-ea"/>
               </a:rPr>
-              <a:t>藏</a:t>
-            </a:r>
-            <a:r>
-              <a:rPr lang="zh-CN" altLang="en-US" sz="3200" dirty="0" smtClean="0">
+              <a:t>前胸 </a:t>
+            </a:r>
+            <a:r>
+              <a:rPr lang="en-US" altLang="zh-CN" sz="3200" dirty="0">
                 <a:effectLst>
                   <a:outerShdw blurRad="38100" dist="38100" dir="2700000" algn="tl">
                     <a:srgbClr val="000000">
@@ -13805,18 +12892,21 @@
                 </a:effectLst>
                 <a:latin typeface="+mn-ea"/>
               </a:rPr>
-              <a:t>穴（足少阴肾经）</a:t>
-            </a:r>
-            <a:endParaRPr lang="zh-CN" altLang="en-US" sz="3200" dirty="0">
-              <a:effectLst>
-                <a:outerShdw blurRad="38100" dist="38100" dir="2700000" algn="tl">
-                  <a:srgbClr val="000000">
-                    <a:alpha val="43137"/>
-                  </a:srgbClr>
-                </a:outerShdw>
-              </a:effectLst>
-              <a:latin typeface="+mn-ea"/>
-            </a:endParaRPr>
+              <a:t>- </a:t>
+            </a:r>
+            <a:r>
+              <a:rPr lang="zh-CN" altLang="en-US" sz="3200" dirty="0">
+                <a:effectLst>
+                  <a:outerShdw blurRad="38100" dist="38100" dir="2700000" algn="tl">
+                    <a:srgbClr val="000000">
+                      <a:alpha val="43137"/>
+                    </a:srgbClr>
+                  </a:outerShdw>
+                </a:effectLst>
+                <a:latin typeface="+mn-ea"/>
+              </a:rPr>
+              <a:t>神藏穴（足少阴肾经）</a:t>
+            </a:r>
           </a:p>
         </p:txBody>
       </p:sp>
@@ -13863,13 +12953,6 @@
   <p:clrMapOvr>
     <a:masterClrMapping/>
   </p:clrMapOvr>
-  <p:timing>
-    <p:tnLst>
-      <p:par>
-        <p:cTn id="1" dur="indefinite" restart="never" nodeType="tmRoot"/>
-      </p:par>
-    </p:tnLst>
-  </p:timing>
 </p:sld>
 </file>
 
@@ -13928,21 +13011,16 @@
             </a:r>
             <a:r>
               <a:rPr lang="zh-CN" altLang="en-US" sz="4400" dirty="0"/>
-              <a:t>核心敲击穴位</a:t>
-            </a:r>
-            <a:r>
-              <a:rPr lang="zh-CN" altLang="en-US" sz="4400" dirty="0" smtClean="0"/>
-              <a:t>（</a:t>
-            </a:r>
-            <a:r>
-              <a:rPr lang="en-US" altLang="zh-CN" sz="4400" dirty="0" smtClean="0"/>
+              <a:t>核心敲击穴位（</a:t>
+            </a:r>
+            <a:r>
+              <a:rPr lang="en-US" altLang="zh-CN" sz="4400" dirty="0"/>
               <a:t>9</a:t>
             </a:r>
             <a:r>
-              <a:rPr lang="zh-CN" altLang="en-US" sz="4400" dirty="0" smtClean="0"/>
+              <a:rPr lang="zh-CN" altLang="en-US" sz="4400" dirty="0"/>
               <a:t>）</a:t>
             </a:r>
-            <a:endParaRPr lang="zh-CN" altLang="en-US" sz="4400" dirty="0"/>
           </a:p>
         </p:txBody>
       </p:sp>
@@ -13980,13 +13058,7 @@
               <a:rPr lang="zh-CN" altLang="en-US" sz="1800" dirty="0">
                 <a:latin typeface="+mn-ea"/>
               </a:rPr>
-              <a:t>对应情绪：疏解胸闷烦躁，改善焦虑引发的呼吸不畅，平复情绪激动引发的气</a:t>
-            </a:r>
-            <a:r>
-              <a:rPr lang="zh-CN" altLang="en-US" sz="1800" dirty="0" smtClean="0">
-                <a:latin typeface="+mn-ea"/>
-              </a:rPr>
-              <a:t>逆。</a:t>
+              <a:t>对应情绪：疏解胸闷烦躁，改善焦虑引发的呼吸不畅，平复情绪激动引发的气逆。</a:t>
             </a:r>
             <a:endParaRPr lang="en-US" altLang="zh-CN" sz="1800" dirty="0">
               <a:latin typeface="+mn-ea"/>
@@ -13998,22 +13070,10 @@
               <a:buChar char="n"/>
             </a:pPr>
             <a:r>
-              <a:rPr lang="zh-CN" altLang="en-US" sz="1800" dirty="0" smtClean="0">
-                <a:latin typeface="+mn-ea"/>
-              </a:rPr>
-              <a:t>穴位位置：</a:t>
-            </a:r>
-            <a:r>
               <a:rPr lang="zh-CN" altLang="en-US" sz="1800" dirty="0">
                 <a:latin typeface="+mn-ea"/>
               </a:rPr>
-              <a:t>两侧锁骨与胸骨连接处的凹陷处（锁骨内侧端点下方）</a:t>
-            </a:r>
-            <a:r>
-              <a:rPr lang="zh-CN" altLang="en-US" sz="1800" dirty="0" smtClean="0">
-                <a:latin typeface="+mn-ea"/>
-              </a:rPr>
-              <a:t>。</a:t>
+              <a:t>穴位位置：两侧锁骨与胸骨连接处的凹陷处（锁骨内侧端点下方）。</a:t>
             </a:r>
           </a:p>
           <a:p>
@@ -14022,36 +13082,12 @@
               <a:buChar char="n"/>
             </a:pPr>
             <a:r>
-              <a:rPr lang="zh-CN" altLang="en-US" sz="1800" dirty="0" smtClean="0">
-                <a:latin typeface="+mn-ea"/>
-              </a:rPr>
-              <a:t>功效</a:t>
-            </a:r>
-            <a:r>
               <a:rPr lang="zh-CN" altLang="en-US" sz="1800" dirty="0">
                 <a:latin typeface="+mn-ea"/>
               </a:rPr>
-              <a:t>作用</a:t>
-            </a:r>
-            <a:r>
-              <a:rPr lang="zh-CN" altLang="en-US" sz="1800" dirty="0" smtClean="0">
-                <a:latin typeface="+mn-ea"/>
-              </a:rPr>
-              <a:t>：</a:t>
-            </a:r>
-            <a:r>
-              <a:rPr lang="zh-CN" altLang="en-US" sz="1800" dirty="0">
-                <a:latin typeface="+mn-ea"/>
-              </a:rPr>
-              <a:t>释放深层压力，调节呼吸相关的情绪反应（如紧张导致的呼吸急促）</a:t>
-            </a:r>
-            <a:r>
-              <a:rPr lang="zh-CN" altLang="en-US" sz="1800" dirty="0" smtClean="0">
-                <a:latin typeface="+mn-ea"/>
-              </a:rPr>
-              <a:t>。</a:t>
-            </a:r>
-            <a:endParaRPr lang="en-US" altLang="zh-CN" sz="1800" dirty="0" smtClean="0">
+              <a:t>功效作用：释放深层压力，调节呼吸相关的情绪反应（如紧张导致的呼吸急促）。</a:t>
+            </a:r>
+            <a:endParaRPr lang="en-US" altLang="zh-CN" sz="1800" dirty="0">
               <a:latin typeface="+mn-ea"/>
             </a:endParaRPr>
           </a:p>
@@ -14060,20 +13096,6 @@
               <a:buFont typeface="Wingdings" panose="05000000000000000000" pitchFamily="2" charset="2"/>
               <a:buChar char="n"/>
             </a:pPr>
-            <a:endParaRPr lang="en-US" altLang="zh-CN" sz="1800" dirty="0" smtClean="0">
-              <a:latin typeface="+mn-ea"/>
-            </a:endParaRPr>
-          </a:p>
-          <a:p>
-            <a:pPr marL="0" indent="0">
-              <a:buNone/>
-            </a:pPr>
-            <a:r>
-              <a:rPr lang="zh-CN" altLang="en-US" sz="1800" dirty="0">
-                <a:latin typeface="+mn-ea"/>
-              </a:rPr>
-              <a:t>云门穴是肺经的起始穴，中府穴是肺经的募穴，二者协同作用，能疏通肺经气血、调节胸中气机，从根源上改善因肺气不畅引发的情绪失调。</a:t>
-            </a:r>
             <a:endParaRPr lang="en-US" altLang="zh-CN" sz="1800" dirty="0">
               <a:latin typeface="+mn-ea"/>
             </a:endParaRPr>
@@ -14086,15 +13108,23 @@
               <a:rPr lang="zh-CN" altLang="en-US" sz="1800" dirty="0">
                 <a:latin typeface="+mn-ea"/>
               </a:rPr>
-              <a:t>两穴位于胸部，邻近胸腔脏器，禁止用力按压、捶打，尤其体质虚弱者、孕妇需轻柔</a:t>
-            </a:r>
-            <a:r>
-              <a:rPr lang="zh-CN" altLang="en-US" sz="1800" dirty="0" smtClean="0">
-                <a:latin typeface="+mn-ea"/>
-              </a:rPr>
-              <a:t>操作。</a:t>
-            </a:r>
-            <a:endParaRPr lang="en-US" altLang="zh-CN" sz="1800" dirty="0" smtClean="0">
+              <a:t>云门穴是肺经的起始穴，中府穴是肺经的募穴，二者协同作用，能疏通肺经气血、调节胸中气机，从根源上改善因肺气不畅引发的情绪失调。</a:t>
+            </a:r>
+            <a:endParaRPr lang="en-US" altLang="zh-CN" sz="1800" dirty="0">
+              <a:latin typeface="+mn-ea"/>
+            </a:endParaRPr>
+          </a:p>
+          <a:p>
+            <a:pPr marL="0" indent="0">
+              <a:buNone/>
+            </a:pPr>
+            <a:r>
+              <a:rPr lang="zh-CN" altLang="en-US" sz="1800" dirty="0">
+                <a:latin typeface="+mn-ea"/>
+              </a:rPr>
+              <a:t>两穴位于胸部，邻近胸腔脏器，禁止用力按压、捶打，尤其体质虚弱者、孕妇需轻柔操作。</a:t>
+            </a:r>
+            <a:endParaRPr lang="en-US" altLang="zh-CN" sz="1800" dirty="0">
               <a:latin typeface="+mn-ea"/>
             </a:endParaRPr>
           </a:p>
@@ -14384,13 +13414,6 @@
   <p:clrMapOvr>
     <a:masterClrMapping/>
   </p:clrMapOvr>
-  <p:timing>
-    <p:tnLst>
-      <p:par>
-        <p:cTn id="1" dur="indefinite" restart="never" nodeType="tmRoot"/>
-      </p:par>
-    </p:tnLst>
-  </p:timing>
 </p:sld>
 </file>
 
@@ -14449,21 +13472,16 @@
             </a:r>
             <a:r>
               <a:rPr lang="zh-CN" altLang="en-US" sz="4400" dirty="0"/>
-              <a:t>核心敲击穴位</a:t>
-            </a:r>
-            <a:r>
-              <a:rPr lang="zh-CN" altLang="en-US" sz="4400" dirty="0" smtClean="0"/>
-              <a:t>（</a:t>
-            </a:r>
-            <a:r>
-              <a:rPr lang="en-US" altLang="zh-CN" sz="4400" dirty="0" smtClean="0"/>
+              <a:t>核心敲击穴位（</a:t>
+            </a:r>
+            <a:r>
+              <a:rPr lang="en-US" altLang="zh-CN" sz="4400" dirty="0"/>
               <a:t>10</a:t>
             </a:r>
             <a:r>
-              <a:rPr lang="zh-CN" altLang="en-US" sz="4400" dirty="0" smtClean="0"/>
+              <a:rPr lang="zh-CN" altLang="en-US" sz="4400" dirty="0"/>
               <a:t>）</a:t>
             </a:r>
-            <a:endParaRPr lang="zh-CN" altLang="en-US" sz="4400" dirty="0"/>
           </a:p>
         </p:txBody>
       </p:sp>
@@ -14903,15 +13921,9 @@
               <a:rPr lang="zh-CN" altLang="en-US" sz="1400" dirty="0">
                 <a:latin typeface="+mn-ea"/>
               </a:rPr>
-              <a:t>对应情绪：缓解心肾不交引发的烦躁失眠，疏解胸中气机郁滞导致的压抑胸闷，辅助改善脾胃失调引发的</a:t>
-            </a:r>
-            <a:r>
-              <a:rPr lang="zh-CN" altLang="en-US" sz="1400" dirty="0" smtClean="0">
-                <a:latin typeface="+mn-ea"/>
-              </a:rPr>
-              <a:t>情绪不稳。</a:t>
-            </a:r>
-            <a:endParaRPr lang="en-US" altLang="zh-CN" sz="1400" dirty="0" smtClean="0">
+              <a:t>对应情绪：缓解心肾不交引发的烦躁失眠，疏解胸中气机郁滞导致的压抑胸闷，辅助改善脾胃失调引发的情绪不稳。</a:t>
+            </a:r>
+            <a:endParaRPr lang="en-US" altLang="zh-CN" sz="1400" dirty="0">
               <a:latin typeface="+mn-ea"/>
             </a:endParaRPr>
           </a:p>
@@ -14924,16 +13936,10 @@
               <a:buChar char="n"/>
             </a:pPr>
             <a:r>
-              <a:rPr lang="zh-CN" altLang="en-US" sz="1400" dirty="0" smtClean="0">
-                <a:latin typeface="+mn-ea"/>
-              </a:rPr>
-              <a:t>穴位</a:t>
-            </a:r>
-            <a:r>
               <a:rPr lang="zh-CN" altLang="en-US" sz="1400" dirty="0">
                 <a:latin typeface="+mn-ea"/>
               </a:rPr>
-              <a:t>位置：在胸部，锁骨下缘，前正中线旁开 </a:t>
+              <a:t>穴位位置：在胸部，锁骨下缘，前正中线旁开 </a:t>
             </a:r>
             <a:r>
               <a:rPr lang="en-US" altLang="zh-CN" sz="1400" dirty="0">
@@ -14957,39 +13963,101 @@
               <a:rPr lang="zh-CN" altLang="en-US" sz="1400" dirty="0">
                 <a:latin typeface="+mn-ea"/>
               </a:rPr>
-              <a:t>寸处），再在锁骨下缘处取穴</a:t>
-            </a:r>
-            <a:r>
-              <a:rPr lang="zh-CN" altLang="en-US" sz="1400" dirty="0" smtClean="0">
-                <a:latin typeface="+mn-ea"/>
-              </a:rPr>
-              <a:t>。</a:t>
-            </a:r>
-            <a:endParaRPr lang="zh-CN" altLang="en-US" sz="1400" dirty="0">
+              <a:t>寸处），再在锁骨下缘处取穴。</a:t>
+            </a:r>
+          </a:p>
+          <a:p>
+            <a:pPr>
+              <a:lnSpc>
+                <a:spcPts val="1800"/>
+              </a:lnSpc>
+              <a:buFont typeface="Wingdings" panose="05000000000000000000" pitchFamily="2" charset="2"/>
+              <a:buChar char="n"/>
+            </a:pPr>
+            <a:r>
+              <a:rPr lang="zh-CN" altLang="en-US" sz="1400" dirty="0">
+                <a:latin typeface="+mn-ea"/>
+              </a:rPr>
+              <a:t>功效作用：通过疏通胸部气机、滋养肾精心神，实现情绪的平稳疏导。</a:t>
+            </a:r>
+            <a:endParaRPr lang="en-US" altLang="zh-CN" sz="1400" dirty="0">
               <a:latin typeface="+mn-ea"/>
             </a:endParaRPr>
           </a:p>
           <a:p>
-            <a:pPr>
+            <a:pPr marL="0" indent="0">
               <a:lnSpc>
                 <a:spcPts val="1800"/>
               </a:lnSpc>
-              <a:buFont typeface="Wingdings" panose="05000000000000000000" pitchFamily="2" charset="2"/>
-              <a:buChar char="n"/>
+              <a:buNone/>
             </a:pPr>
             <a:r>
               <a:rPr lang="zh-CN" altLang="en-US" sz="1400" dirty="0">
                 <a:latin typeface="+mn-ea"/>
               </a:rPr>
-              <a:t>功效作用：通过疏通胸部气机、滋养肾精心神，实现情绪的平稳</a:t>
-            </a:r>
-            <a:r>
-              <a:rPr lang="zh-CN" altLang="en-US" sz="1400" dirty="0" smtClean="0">
-                <a:latin typeface="+mn-ea"/>
-              </a:rPr>
-              <a:t>疏导。</a:t>
-            </a:r>
-            <a:endParaRPr lang="en-US" altLang="zh-CN" sz="1400" dirty="0" smtClean="0">
+              <a:t>与肾经相关的能量与情绪有，不信任，怀疑，觉得自己被利用，心神不宁，害怕，觉得不安全。</a:t>
+            </a:r>
+          </a:p>
+          <a:p>
+            <a:pPr marL="0" indent="0">
+              <a:lnSpc>
+                <a:spcPts val="1800"/>
+              </a:lnSpc>
+              <a:buFont typeface="Arial" panose="020B0604020202020204" pitchFamily="34" charset="0"/>
+              <a:buNone/>
+            </a:pPr>
+            <a:r>
+              <a:rPr lang="zh-CN" altLang="en-US" sz="1400" dirty="0">
+                <a:latin typeface="+mn-ea"/>
+              </a:rPr>
+              <a:t>恐惧是通往生命进化的一扇门，勇敢的面对恐惧，往前大步迈进。如果不敢面对恐惧，我们就无法真正的活着，而且某些门永远不会为我们而开。</a:t>
+            </a:r>
+          </a:p>
+          <a:p>
+            <a:pPr marL="0" indent="0">
+              <a:lnSpc>
+                <a:spcPts val="1800"/>
+              </a:lnSpc>
+              <a:buFont typeface="Arial" panose="020B0604020202020204" pitchFamily="34" charset="0"/>
+              <a:buNone/>
+            </a:pPr>
+            <a:r>
+              <a:rPr lang="zh-CN" altLang="en-US" sz="1400" dirty="0">
+                <a:latin typeface="+mn-ea"/>
+              </a:rPr>
+              <a:t>怀着这样的心情，我们要勇敢的面对，被拒绝，对立，被指责，被批判，等等等等的恐惧。我们要接受，每个人都可能这样子对待我，这是人生的一部分。</a:t>
+            </a:r>
+          </a:p>
+          <a:p>
+            <a:pPr marL="0" indent="0">
+              <a:lnSpc>
+                <a:spcPts val="1800"/>
+              </a:lnSpc>
+              <a:buFont typeface="Arial" panose="020B0604020202020204" pitchFamily="34" charset="0"/>
+              <a:buNone/>
+            </a:pPr>
+            <a:r>
+              <a:rPr lang="zh-CN" altLang="en-US" sz="1400" dirty="0">
+                <a:latin typeface="+mn-ea"/>
+              </a:rPr>
+              <a:t>我们每个人都有权力对别人说不，不让别人越雷池一步。</a:t>
+            </a:r>
+          </a:p>
+          <a:p>
+            <a:pPr marL="0" indent="0">
+              <a:lnSpc>
+                <a:spcPts val="1800"/>
+              </a:lnSpc>
+              <a:buFont typeface="Arial" panose="020B0604020202020204" pitchFamily="34" charset="0"/>
+              <a:buNone/>
+            </a:pPr>
+            <a:r>
+              <a:rPr lang="zh-CN" altLang="en-US" sz="1400" dirty="0">
+                <a:latin typeface="+mn-ea"/>
+              </a:rPr>
+              <a:t>对死亡的恐惧，是恐惧放下我们所知的一切，恐惧未知，</a:t>
+            </a:r>
+            <a:endParaRPr lang="en-US" altLang="zh-CN" sz="1400" dirty="0">
               <a:latin typeface="+mn-ea"/>
             </a:endParaRPr>
           </a:p>
@@ -14998,133 +14066,14 @@
               <a:lnSpc>
                 <a:spcPts val="1800"/>
               </a:lnSpc>
-              <a:buNone/>
-            </a:pPr>
-            <a:r>
-              <a:rPr lang="zh-CN" altLang="en-US" sz="1400" dirty="0" smtClean="0">
-                <a:latin typeface="+mn-ea"/>
-              </a:rPr>
-              <a:t>与</a:t>
-            </a:r>
+              <a:buFont typeface="Arial" panose="020B0604020202020204" pitchFamily="34" charset="0"/>
+              <a:buNone/>
+            </a:pPr>
             <a:r>
               <a:rPr lang="zh-CN" altLang="en-US" sz="1400" dirty="0">
                 <a:latin typeface="+mn-ea"/>
               </a:rPr>
-              <a:t>肾经相关的能量与情绪有，不信任，怀疑，觉得自己被利用，心神不宁，害怕，觉得不安全。</a:t>
-            </a:r>
-          </a:p>
-          <a:p>
-            <a:pPr marL="0" indent="0">
-              <a:lnSpc>
-                <a:spcPts val="1800"/>
-              </a:lnSpc>
-              <a:buFont typeface="Arial" panose="020B0604020202020204" pitchFamily="34" charset="0"/>
-              <a:buNone/>
-            </a:pPr>
-            <a:r>
-              <a:rPr lang="zh-CN" altLang="en-US" sz="1400" dirty="0" smtClean="0">
-                <a:latin typeface="+mn-ea"/>
-              </a:rPr>
-              <a:t>恐惧</a:t>
-            </a:r>
-            <a:r>
-              <a:rPr lang="zh-CN" altLang="en-US" sz="1400" dirty="0">
-                <a:latin typeface="+mn-ea"/>
-              </a:rPr>
-              <a:t>是通往生命进化的一扇门，勇敢的面对恐惧，往前大步迈进。如果不敢面对恐惧，我们就无法真正的活着，而且某些门永远不会为我们而开。</a:t>
-            </a:r>
-          </a:p>
-          <a:p>
-            <a:pPr marL="0" indent="0">
-              <a:lnSpc>
-                <a:spcPts val="1800"/>
-              </a:lnSpc>
-              <a:buFont typeface="Arial" panose="020B0604020202020204" pitchFamily="34" charset="0"/>
-              <a:buNone/>
-            </a:pPr>
-            <a:r>
-              <a:rPr lang="zh-CN" altLang="en-US" sz="1400" dirty="0" smtClean="0">
-                <a:latin typeface="+mn-ea"/>
-              </a:rPr>
-              <a:t>怀着</a:t>
-            </a:r>
-            <a:r>
-              <a:rPr lang="zh-CN" altLang="en-US" sz="1400" dirty="0">
-                <a:latin typeface="+mn-ea"/>
-              </a:rPr>
-              <a:t>这样的心情，我们要勇敢的面对，被拒绝，对立，被指责，被批判，等等等等的恐惧。我们要接受，每个人都可能这样子对待我，这是人生的一部分。</a:t>
-            </a:r>
-          </a:p>
-          <a:p>
-            <a:pPr marL="0" indent="0">
-              <a:lnSpc>
-                <a:spcPts val="1800"/>
-              </a:lnSpc>
-              <a:buFont typeface="Arial" panose="020B0604020202020204" pitchFamily="34" charset="0"/>
-              <a:buNone/>
-            </a:pPr>
-            <a:r>
-              <a:rPr lang="zh-CN" altLang="en-US" sz="1400" dirty="0" smtClean="0">
-                <a:latin typeface="+mn-ea"/>
-              </a:rPr>
-              <a:t>我们</a:t>
-            </a:r>
-            <a:r>
-              <a:rPr lang="zh-CN" altLang="en-US" sz="1400" dirty="0">
-                <a:latin typeface="+mn-ea"/>
-              </a:rPr>
-              <a:t>每个人都有权力对别人说不，不让别人越雷池一步。</a:t>
-            </a:r>
-          </a:p>
-          <a:p>
-            <a:pPr marL="0" indent="0">
-              <a:lnSpc>
-                <a:spcPts val="1800"/>
-              </a:lnSpc>
-              <a:buFont typeface="Arial" panose="020B0604020202020204" pitchFamily="34" charset="0"/>
-              <a:buNone/>
-            </a:pPr>
-            <a:r>
-              <a:rPr lang="zh-CN" altLang="en-US" sz="1400" dirty="0" smtClean="0">
-                <a:latin typeface="+mn-ea"/>
-              </a:rPr>
-              <a:t>对</a:t>
-            </a:r>
-            <a:r>
-              <a:rPr lang="zh-CN" altLang="en-US" sz="1400" dirty="0">
-                <a:latin typeface="+mn-ea"/>
-              </a:rPr>
-              <a:t>死亡的恐惧，是恐惧放下我们所知的一切，恐惧未知</a:t>
-            </a:r>
-            <a:r>
-              <a:rPr lang="zh-CN" altLang="en-US" sz="1400" dirty="0" smtClean="0">
-                <a:latin typeface="+mn-ea"/>
-              </a:rPr>
-              <a:t>，</a:t>
-            </a:r>
-            <a:endParaRPr lang="en-US" altLang="zh-CN" sz="1400" dirty="0" smtClean="0">
-              <a:latin typeface="+mn-ea"/>
-            </a:endParaRPr>
-          </a:p>
-          <a:p>
-            <a:pPr marL="0" indent="0">
-              <a:lnSpc>
-                <a:spcPts val="1800"/>
-              </a:lnSpc>
-              <a:buFont typeface="Arial" panose="020B0604020202020204" pitchFamily="34" charset="0"/>
-              <a:buNone/>
-            </a:pPr>
-            <a:r>
-              <a:rPr lang="zh-CN" altLang="en-US" sz="1400" dirty="0" smtClean="0">
-                <a:latin typeface="+mn-ea"/>
-              </a:rPr>
-              <a:t>克服</a:t>
-            </a:r>
-            <a:r>
-              <a:rPr lang="zh-CN" altLang="en-US" sz="1400" dirty="0">
-                <a:latin typeface="+mn-ea"/>
-              </a:rPr>
-              <a:t>死亡的恐惧，是接受人生，只是一趟短暂的旅程。</a:t>
+              <a:t>克服死亡的恐惧，是接受人生，只是一趟短暂的旅程。</a:t>
             </a:r>
           </a:p>
         </p:txBody>
@@ -15264,32 +14213,20 @@
           </a:p>
           <a:p>
             <a:r>
-              <a:rPr lang="zh-CN" altLang="en-US" sz="1400" dirty="0" smtClean="0"/>
-              <a:t>观</a:t>
-            </a:r>
-            <a:r>
               <a:rPr lang="zh-CN" altLang="en-US" sz="1400" dirty="0"/>
-              <a:t>想那时的感觉，当时的事件，参与的人，当时的场景。将那些情境带回到现在。</a:t>
-            </a:r>
-          </a:p>
-          <a:p>
-            <a:r>
-              <a:rPr lang="zh-CN" altLang="en-US" sz="1400" dirty="0" smtClean="0"/>
-              <a:t>允许</a:t>
-            </a:r>
+              <a:t>观想那时的感觉，当时的事件，参与的人，当时的场景。将那些情境带回到现在。</a:t>
+            </a:r>
+          </a:p>
+          <a:p>
             <a:r>
               <a:rPr lang="zh-CN" altLang="en-US" sz="1400" dirty="0"/>
-              <a:t>自己去感受那些情绪，体验自己的情绪，不要和它对抗，去感受它的存在。</a:t>
-            </a:r>
-          </a:p>
-          <a:p>
-            <a:r>
-              <a:rPr lang="zh-CN" altLang="en-US" sz="1400" dirty="0" smtClean="0"/>
-              <a:t>接着</a:t>
-            </a:r>
+              <a:t>允许自己去感受那些情绪，体验自己的情绪，不要和它对抗，去感受它的存在。</a:t>
+            </a:r>
+          </a:p>
+          <a:p>
             <a:r>
               <a:rPr lang="zh-CN" altLang="en-US" sz="1400" dirty="0"/>
-              <a:t>，轻敲或按摩肾经的穴道「俞府」，位于锁骨下方与肋骨中间的位置。</a:t>
+              <a:t>接着，轻敲或按摩肾经的穴道「俞府」，位于锁骨下方与肋骨中间的位置。</a:t>
             </a:r>
           </a:p>
         </p:txBody>
@@ -15343,13 +14280,6 @@
   <p:clrMapOvr>
     <a:masterClrMapping/>
   </p:clrMapOvr>
-  <p:timing>
-    <p:tnLst>
-      <p:par>
-        <p:cTn id="1" dur="indefinite" restart="never" nodeType="tmRoot"/>
-      </p:par>
-    </p:tnLst>
-  </p:timing>
 </p:sld>
 </file>
 
@@ -15447,21 +14377,16 @@
             </a:r>
             <a:r>
               <a:rPr lang="zh-CN" altLang="en-US" sz="4400" dirty="0"/>
-              <a:t>核心敲击穴位</a:t>
-            </a:r>
-            <a:r>
-              <a:rPr lang="zh-CN" altLang="en-US" sz="4400" dirty="0" smtClean="0"/>
-              <a:t>（</a:t>
-            </a:r>
-            <a:r>
-              <a:rPr lang="en-US" altLang="zh-CN" sz="4400" dirty="0" smtClean="0"/>
+              <a:t>核心敲击穴位（</a:t>
+            </a:r>
+            <a:r>
+              <a:rPr lang="en-US" altLang="zh-CN" sz="4400" dirty="0"/>
               <a:t>11</a:t>
             </a:r>
             <a:r>
-              <a:rPr lang="zh-CN" altLang="en-US" sz="4400" dirty="0" smtClean="0"/>
+              <a:rPr lang="zh-CN" altLang="en-US" sz="4400" dirty="0"/>
               <a:t>）</a:t>
             </a:r>
-            <a:endParaRPr lang="zh-CN" altLang="en-US" sz="4400" dirty="0"/>
           </a:p>
         </p:txBody>
       </p:sp>
@@ -15498,19 +14423,30 @@
               <a:rPr lang="zh-CN" altLang="en-US" dirty="0">
                 <a:latin typeface="+mn-ea"/>
               </a:rPr>
-              <a:t>对应情绪</a:t>
-            </a:r>
-            <a:r>
-              <a:rPr lang="zh-CN" altLang="en-US" dirty="0" smtClean="0">
-                <a:latin typeface="+mn-ea"/>
-              </a:rPr>
-              <a:t>：</a:t>
-            </a:r>
+              <a:t>对应情绪：低自尊，情绪低落、思虑过重。</a:t>
+            </a:r>
+          </a:p>
+          <a:p>
+            <a:pPr marL="0" indent="0">
+              <a:buNone/>
+            </a:pPr>
             <a:r>
               <a:rPr lang="zh-CN" altLang="en-US" dirty="0">
                 <a:latin typeface="+mn-ea"/>
               </a:rPr>
-              <a:t>低自尊，情绪低落、思虑过重。</a:t>
+              <a:t>穴位位置：侧胸部，腋窝下的腋中线与第 </a:t>
+            </a:r>
+            <a:r>
+              <a:rPr lang="en-US" altLang="zh-CN" dirty="0">
+                <a:latin typeface="+mn-ea"/>
+              </a:rPr>
+              <a:t>6 </a:t>
+            </a:r>
+            <a:r>
+              <a:rPr lang="zh-CN" altLang="en-US" dirty="0">
+                <a:latin typeface="+mn-ea"/>
+              </a:rPr>
+              <a:t>肋间隙的交点。</a:t>
             </a:r>
           </a:p>
           <a:p>
@@ -15521,39 +14457,9 @@
               <a:rPr lang="zh-CN" altLang="en-US" dirty="0">
                 <a:latin typeface="+mn-ea"/>
               </a:rPr>
-              <a:t>穴位位置：侧胸部</a:t>
-            </a:r>
-            <a:r>
-              <a:rPr lang="zh-CN" altLang="en-US" dirty="0" smtClean="0">
-                <a:latin typeface="+mn-ea"/>
-              </a:rPr>
-              <a:t>，</a:t>
-            </a:r>
-            <a:r>
-              <a:rPr lang="zh-CN" altLang="en-US" dirty="0">
-                <a:latin typeface="+mn-ea"/>
-              </a:rPr>
-              <a:t>腋窝下的腋中线与第 </a:t>
-            </a:r>
-            <a:r>
-              <a:rPr lang="en-US" altLang="zh-CN" dirty="0">
-                <a:latin typeface="+mn-ea"/>
-              </a:rPr>
-              <a:t>6 </a:t>
-            </a:r>
-            <a:r>
-              <a:rPr lang="zh-CN" altLang="en-US" dirty="0">
-                <a:latin typeface="+mn-ea"/>
-              </a:rPr>
-              <a:t>肋间隙的交点</a:t>
-            </a:r>
-            <a:r>
-              <a:rPr lang="zh-CN" altLang="en-US" dirty="0" smtClean="0">
-                <a:latin typeface="+mn-ea"/>
-              </a:rPr>
-              <a:t>。</a:t>
-            </a:r>
-            <a:endParaRPr lang="zh-CN" altLang="en-US" dirty="0">
+              <a:t>功效作用：疏通全身经络气机，尤其擅长缓解因气血瘀滞或不足引发的情志失调。</a:t>
+            </a:r>
+            <a:endParaRPr lang="en-US" altLang="zh-CN" dirty="0">
               <a:latin typeface="+mn-ea"/>
             </a:endParaRPr>
           </a:p>
@@ -15565,27 +14471,18 @@
               <a:rPr lang="zh-CN" altLang="en-US" dirty="0">
                 <a:latin typeface="+mn-ea"/>
               </a:rPr>
-              <a:t>功效作用：疏通全身经络气机，尤其擅长缓解因气血瘀滞或不足引发的情志失调。</a:t>
-            </a:r>
-            <a:endParaRPr lang="en-US" altLang="zh-CN" dirty="0" smtClean="0">
-              <a:latin typeface="+mn-ea"/>
-            </a:endParaRPr>
+              <a:t>脾经，对免疫系统非常重要，与内分泌系统息息相关。</a:t>
+            </a:r>
           </a:p>
           <a:p>
             <a:pPr marL="0" indent="0">
               <a:buNone/>
             </a:pPr>
             <a:r>
-              <a:rPr lang="zh-CN" altLang="en-US" dirty="0" smtClean="0">
-                <a:latin typeface="+mn-ea"/>
-              </a:rPr>
-              <a:t>脾</a:t>
-            </a:r>
-            <a:r>
               <a:rPr lang="zh-CN" altLang="en-US" dirty="0">
                 <a:latin typeface="+mn-ea"/>
               </a:rPr>
-              <a:t>经，对免疫系统非常重要，与内分泌系统息息相关。</a:t>
+              <a:t>和脾经相连结的情绪有：缺乏自尊，不敢悍卫自己，胆怯，软弱，缺乏魄力，依赖他人，缺乏安全感，觉得没有希望，无法控制自己的人生，忧虑，怀疑并恐惧未来，觉得自己不好，不美，不聪明，充满负面的信念：「我不苗条」，「不坚强」，「不够勇敢」，「我不值得，不该得到这样的报偿」，「我做不到」。</a:t>
             </a:r>
           </a:p>
           <a:p>
@@ -15593,33 +14490,10 @@
               <a:buNone/>
             </a:pPr>
             <a:r>
-              <a:rPr lang="zh-CN" altLang="en-US" dirty="0" smtClean="0">
-                <a:latin typeface="+mn-ea"/>
-              </a:rPr>
-              <a:t>和</a:t>
-            </a:r>
-            <a:r>
               <a:rPr lang="zh-CN" altLang="en-US" dirty="0">
                 <a:latin typeface="+mn-ea"/>
               </a:rPr>
-              <a:t>脾经相连结的情绪有：缺乏自尊，不敢悍卫自己，胆怯，软弱，缺乏魄力，依赖他人，缺乏安全感，觉得没有希望，无法控制自己的人生，忧虑，怀疑并恐惧未来，觉得自己不好，不美，不聪明，充满负面的信念：「我不苗条」，「不坚强」，「不够勇敢」，「我不值得，不该得到这样的报偿」，「我做不到」。</a:t>
-            </a:r>
-          </a:p>
-          <a:p>
-            <a:pPr marL="0" indent="0">
-              <a:buNone/>
-            </a:pPr>
-            <a:r>
-              <a:rPr lang="zh-CN" altLang="en-US" dirty="0" smtClean="0">
-                <a:latin typeface="+mn-ea"/>
-              </a:rPr>
-              <a:t>去</a:t>
-            </a:r>
-            <a:r>
-              <a:rPr lang="zh-CN" altLang="en-US" dirty="0">
-                <a:latin typeface="+mn-ea"/>
-              </a:rPr>
-              <a:t>观想，你是否有这些情绪。</a:t>
+              <a:t>去观想，你是否有这些情绪。</a:t>
             </a:r>
           </a:p>
           <a:p>
@@ -15891,13 +14765,6 @@
   <p:clrMapOvr>
     <a:masterClrMapping/>
   </p:clrMapOvr>
-  <p:timing>
-    <p:tnLst>
-      <p:par>
-        <p:cTn id="1" dur="indefinite" restart="never" nodeType="tmRoot"/>
-      </p:par>
-    </p:tnLst>
-  </p:timing>
 </p:sld>
 </file>
 
@@ -15956,21 +14823,16 @@
             </a:r>
             <a:r>
               <a:rPr lang="zh-CN" altLang="en-US" sz="4400" dirty="0"/>
-              <a:t>核心敲击穴位</a:t>
-            </a:r>
-            <a:r>
-              <a:rPr lang="zh-CN" altLang="en-US" sz="4400" dirty="0" smtClean="0"/>
-              <a:t>（</a:t>
-            </a:r>
-            <a:r>
-              <a:rPr lang="en-US" altLang="zh-CN" sz="4400" dirty="0" smtClean="0"/>
+              <a:t>核心敲击穴位（</a:t>
+            </a:r>
+            <a:r>
+              <a:rPr lang="en-US" altLang="zh-CN" sz="4400" dirty="0"/>
               <a:t>12</a:t>
             </a:r>
             <a:r>
-              <a:rPr lang="zh-CN" altLang="en-US" sz="4400" dirty="0" smtClean="0"/>
+              <a:rPr lang="zh-CN" altLang="en-US" sz="4400" dirty="0"/>
               <a:t>）</a:t>
             </a:r>
-            <a:endParaRPr lang="zh-CN" altLang="en-US" sz="4400" dirty="0"/>
           </a:p>
         </p:txBody>
       </p:sp>
@@ -16007,31 +14869,30 @@
               <a:rPr lang="zh-CN" altLang="en-US" dirty="0">
                 <a:latin typeface="+mn-ea"/>
               </a:rPr>
-              <a:t>对应情绪</a:t>
-            </a:r>
-            <a:r>
-              <a:rPr lang="zh-CN" altLang="en-US" dirty="0" smtClean="0">
-                <a:latin typeface="+mn-ea"/>
-              </a:rPr>
-              <a:t>：焦虑</a:t>
-            </a:r>
+              <a:t>对应情绪：焦虑、烦躁，抑郁、情绪低落，躯体紧张。</a:t>
+            </a:r>
+          </a:p>
+          <a:p>
+            <a:pPr marL="0" indent="0">
+              <a:buNone/>
+            </a:pPr>
             <a:r>
               <a:rPr lang="zh-CN" altLang="en-US" dirty="0">
                 <a:latin typeface="+mn-ea"/>
               </a:rPr>
-              <a:t>、烦躁</a:t>
-            </a:r>
-            <a:r>
-              <a:rPr lang="zh-CN" altLang="en-US" dirty="0" smtClean="0">
-                <a:latin typeface="+mn-ea"/>
-              </a:rPr>
-              <a:t>，抑郁</a:t>
+              <a:t>穴位位置：两侧腋下约</a:t>
+            </a:r>
+            <a:r>
+              <a:rPr lang="en-US" altLang="zh-CN" dirty="0">
+                <a:latin typeface="+mn-ea"/>
+              </a:rPr>
+              <a:t>10</a:t>
             </a:r>
             <a:r>
               <a:rPr lang="zh-CN" altLang="en-US" dirty="0">
                 <a:latin typeface="+mn-ea"/>
               </a:rPr>
-              <a:t>、情绪低落，躯体紧张。</a:t>
+              <a:t>厘米处。</a:t>
             </a:r>
           </a:p>
           <a:p>
@@ -16042,56 +14903,9 @@
               <a:rPr lang="zh-CN" altLang="en-US" dirty="0">
                 <a:latin typeface="+mn-ea"/>
               </a:rPr>
-              <a:t>穴位位置：两侧腋下</a:t>
-            </a:r>
-            <a:r>
-              <a:rPr lang="zh-CN" altLang="en-US" dirty="0" smtClean="0">
-                <a:latin typeface="+mn-ea"/>
-              </a:rPr>
-              <a:t>约</a:t>
-            </a:r>
-            <a:r>
-              <a:rPr lang="en-US" altLang="zh-CN" dirty="0" smtClean="0">
-                <a:latin typeface="+mn-ea"/>
-              </a:rPr>
-              <a:t>10</a:t>
-            </a:r>
-            <a:r>
-              <a:rPr lang="zh-CN" altLang="en-US" dirty="0" smtClean="0">
-                <a:latin typeface="+mn-ea"/>
-              </a:rPr>
-              <a:t>厘米</a:t>
-            </a:r>
-            <a:r>
-              <a:rPr lang="zh-CN" altLang="en-US" dirty="0">
-                <a:latin typeface="+mn-ea"/>
-              </a:rPr>
-              <a:t>处。</a:t>
-            </a:r>
-          </a:p>
-          <a:p>
-            <a:pPr marL="0" indent="0">
-              <a:buNone/>
-            </a:pPr>
-            <a:r>
-              <a:rPr lang="zh-CN" altLang="en-US" dirty="0">
-                <a:latin typeface="+mn-ea"/>
-              </a:rPr>
-              <a:t>功效作用</a:t>
-            </a:r>
-            <a:r>
-              <a:rPr lang="zh-CN" altLang="en-US" dirty="0" smtClean="0">
-                <a:latin typeface="+mn-ea"/>
-              </a:rPr>
-              <a:t>：</a:t>
-            </a:r>
-            <a:r>
-              <a:rPr lang="zh-CN" altLang="en-US" dirty="0">
-                <a:latin typeface="+mn-ea"/>
-              </a:rPr>
-              <a:t>疏通心经气血、平复心神、缓解情志郁结</a:t>
-            </a:r>
-            <a:endParaRPr lang="en-US" altLang="zh-CN" dirty="0" smtClean="0">
+              <a:t>功效作用：疏通心经气血、平复心神、缓解情志郁结</a:t>
+            </a:r>
+            <a:endParaRPr lang="en-US" altLang="zh-CN" dirty="0">
               <a:latin typeface="+mn-ea"/>
             </a:endParaRPr>
           </a:p>
@@ -16100,16 +14914,10 @@
               <a:buNone/>
             </a:pPr>
             <a:r>
-              <a:rPr lang="zh-CN" altLang="en-US" dirty="0" smtClean="0">
-                <a:latin typeface="+mn-ea"/>
-              </a:rPr>
-              <a:t>极</a:t>
-            </a:r>
-            <a:r>
               <a:rPr lang="zh-CN" altLang="en-US" dirty="0">
                 <a:latin typeface="+mn-ea"/>
               </a:rPr>
-              <a:t>泉穴归属于手少阴心经，心主神明，是人体情志活动的中枢。当心经气血瘀滞时，容易出现心烦、焦虑、易怒、抑郁等情绪问题；刺激极泉穴可直接疏通心经气血，改善心脏的气血供应，进而安定心神，调节情绪波动。</a:t>
+              <a:t>极泉穴归属于手少阴心经，心主神明，是人体情志活动的中枢。当心经气血瘀滞时，容易出现心烦、焦虑、易怒、抑郁等情绪问题；刺激极泉穴可直接疏通心经气血，改善心脏的气血供应，进而安定心神，调节情绪波动。</a:t>
             </a:r>
           </a:p>
           <a:p>
@@ -16117,36 +14925,12 @@
               <a:buNone/>
             </a:pPr>
             <a:r>
-              <a:rPr lang="zh-CN" altLang="en-US" dirty="0" smtClean="0">
-                <a:latin typeface="+mn-ea"/>
-              </a:rPr>
-              <a:t>情绪</a:t>
-            </a:r>
-            <a:r>
               <a:rPr lang="zh-CN" altLang="en-US" dirty="0">
                 <a:latin typeface="+mn-ea"/>
               </a:rPr>
-              <a:t>郁结时，人体容易出现胸闷、心悸、腋下胀痛</a:t>
-            </a:r>
-            <a:r>
-              <a:rPr lang="zh-CN" altLang="en-US" dirty="0" smtClean="0">
-                <a:latin typeface="+mn-ea"/>
-              </a:rPr>
-              <a:t>、上肢</a:t>
-            </a:r>
-            <a:r>
-              <a:rPr lang="zh-CN" altLang="en-US" dirty="0">
-                <a:latin typeface="+mn-ea"/>
-              </a:rPr>
-              <a:t>麻木等躯体表现（这是心经循行路线上的典型反应）</a:t>
-            </a:r>
-            <a:r>
-              <a:rPr lang="zh-CN" altLang="en-US" dirty="0" smtClean="0">
-                <a:latin typeface="+mn-ea"/>
-              </a:rPr>
-              <a:t>。</a:t>
-            </a:r>
-            <a:endParaRPr lang="en-US" altLang="zh-CN" dirty="0" smtClean="0">
+              <a:t>情绪郁结时，人体容易出现胸闷、心悸、腋下胀痛、上肢麻木等躯体表现（这是心经循行路线上的典型反应）。</a:t>
+            </a:r>
+            <a:endParaRPr lang="en-US" altLang="zh-CN" dirty="0">
               <a:latin typeface="+mn-ea"/>
             </a:endParaRPr>
           </a:p>
@@ -16155,24 +14939,12 @@
               <a:buNone/>
             </a:pPr>
             <a:r>
-              <a:rPr lang="zh-CN" altLang="en-US" dirty="0" smtClean="0">
-                <a:latin typeface="+mn-ea"/>
-              </a:rPr>
-              <a:t>按</a:t>
-            </a:r>
-            <a:r>
               <a:rPr lang="zh-CN" altLang="en-US" dirty="0">
                 <a:latin typeface="+mn-ea"/>
               </a:rPr>
-              <a:t>揉极泉穴能快速缓解这些躯体不适，而躯体症状的减轻</a:t>
-            </a:r>
-            <a:r>
-              <a:rPr lang="zh-CN" altLang="en-US" dirty="0" smtClean="0">
-                <a:latin typeface="+mn-ea"/>
-              </a:rPr>
-              <a:t>会</a:t>
-            </a:r>
-            <a:endParaRPr lang="en-US" altLang="zh-CN" dirty="0" smtClean="0">
+              <a:t>按揉极泉穴能快速缓解这些躯体不适，而躯体症状的减轻会</a:t>
+            </a:r>
+            <a:endParaRPr lang="en-US" altLang="zh-CN" dirty="0">
               <a:latin typeface="+mn-ea"/>
             </a:endParaRPr>
           </a:p>
@@ -16181,16 +14953,10 @@
               <a:buNone/>
             </a:pPr>
             <a:r>
-              <a:rPr lang="zh-CN" altLang="en-US" dirty="0" smtClean="0">
-                <a:latin typeface="+mn-ea"/>
-              </a:rPr>
-              <a:t>反过来</a:t>
-            </a:r>
-            <a:r>
               <a:rPr lang="zh-CN" altLang="en-US" dirty="0">
                 <a:latin typeface="+mn-ea"/>
               </a:rPr>
-              <a:t>降低情绪的紧张度，形成 “身心放松” 的正向循环。</a:t>
+              <a:t>反过来降低情绪的紧张度，形成 “身心放松” 的正向循环。</a:t>
             </a:r>
           </a:p>
         </p:txBody>
@@ -16389,32 +15155,6 @@
               <a:buNone/>
             </a:pPr>
             <a:r>
-              <a:rPr lang="zh-CN" altLang="en-US" sz="3200" dirty="0" smtClean="0">
-                <a:effectLst>
-                  <a:outerShdw blurRad="38100" dist="38100" dir="2700000" algn="tl">
-                    <a:srgbClr val="000000">
-                      <a:alpha val="43137"/>
-                    </a:srgbClr>
-                  </a:outerShdw>
-                </a:effectLst>
-                <a:latin typeface="+mn-ea"/>
-              </a:rPr>
-              <a:t>腋下 </a:t>
-            </a:r>
-            <a:r>
-              <a:rPr lang="en-US" altLang="zh-CN" sz="3200" dirty="0" smtClean="0">
-                <a:effectLst>
-                  <a:outerShdw blurRad="38100" dist="38100" dir="2700000" algn="tl">
-                    <a:srgbClr val="000000">
-                      <a:alpha val="43137"/>
-                    </a:srgbClr>
-                  </a:outerShdw>
-                </a:effectLst>
-                <a:latin typeface="+mn-ea"/>
-              </a:rPr>
-              <a:t>- </a:t>
-            </a:r>
-            <a:r>
               <a:rPr lang="zh-CN" altLang="en-US" sz="3200" dirty="0">
                 <a:effectLst>
                   <a:outerShdw blurRad="38100" dist="38100" dir="2700000" algn="tl">
@@ -16425,10 +15165,10 @@
                 </a:effectLst>
                 <a:latin typeface="+mn-ea"/>
               </a:rPr>
-              <a:t>极泉穴（手少阴心</a:t>
-            </a:r>
-            <a:r>
-              <a:rPr lang="zh-CN" altLang="en-US" sz="3200" dirty="0" smtClean="0">
+              <a:t>腋下 </a:t>
+            </a:r>
+            <a:r>
+              <a:rPr lang="en-US" altLang="zh-CN" sz="3200" dirty="0">
                 <a:effectLst>
                   <a:outerShdw blurRad="38100" dist="38100" dir="2700000" algn="tl">
                     <a:srgbClr val="000000">
@@ -16438,18 +15178,21 @@
                 </a:effectLst>
                 <a:latin typeface="+mn-ea"/>
               </a:rPr>
-              <a:t>经）</a:t>
-            </a:r>
-            <a:endParaRPr lang="zh-CN" altLang="en-US" sz="3200" dirty="0">
-              <a:effectLst>
-                <a:outerShdw blurRad="38100" dist="38100" dir="2700000" algn="tl">
-                  <a:srgbClr val="000000">
-                    <a:alpha val="43137"/>
-                  </a:srgbClr>
-                </a:outerShdw>
-              </a:effectLst>
-              <a:latin typeface="+mn-ea"/>
-            </a:endParaRPr>
+              <a:t>- </a:t>
+            </a:r>
+            <a:r>
+              <a:rPr lang="zh-CN" altLang="en-US" sz="3200" dirty="0">
+                <a:effectLst>
+                  <a:outerShdw blurRad="38100" dist="38100" dir="2700000" algn="tl">
+                    <a:srgbClr val="000000">
+                      <a:alpha val="43137"/>
+                    </a:srgbClr>
+                  </a:outerShdw>
+                </a:effectLst>
+                <a:latin typeface="+mn-ea"/>
+              </a:rPr>
+              <a:t>极泉穴（手少阴心经）</a:t>
+            </a:r>
           </a:p>
         </p:txBody>
       </p:sp>
@@ -16502,13 +15245,6 @@
   <p:clrMapOvr>
     <a:masterClrMapping/>
   </p:clrMapOvr>
-  <p:timing>
-    <p:tnLst>
-      <p:par>
-        <p:cTn id="1" dur="indefinite" restart="never" nodeType="tmRoot"/>
-      </p:par>
-    </p:tnLst>
-  </p:timing>
 </p:sld>
 </file>
 
@@ -16567,21 +15303,16 @@
             </a:r>
             <a:r>
               <a:rPr lang="zh-CN" altLang="en-US" sz="4400" dirty="0"/>
-              <a:t>核心敲击穴位</a:t>
-            </a:r>
-            <a:r>
-              <a:rPr lang="zh-CN" altLang="en-US" sz="4400" dirty="0" smtClean="0"/>
-              <a:t>（</a:t>
-            </a:r>
-            <a:r>
-              <a:rPr lang="en-US" altLang="zh-CN" sz="4400" dirty="0" smtClean="0"/>
+              <a:t>核心敲击穴位（</a:t>
+            </a:r>
+            <a:r>
+              <a:rPr lang="en-US" altLang="zh-CN" sz="4400" dirty="0"/>
               <a:t>13</a:t>
             </a:r>
             <a:r>
-              <a:rPr lang="zh-CN" altLang="en-US" sz="4400" dirty="0" smtClean="0"/>
+              <a:rPr lang="zh-CN" altLang="en-US" sz="4400" dirty="0"/>
               <a:t>）</a:t>
             </a:r>
-            <a:endParaRPr lang="zh-CN" altLang="en-US" sz="4400" dirty="0"/>
           </a:p>
         </p:txBody>
       </p:sp>
@@ -16618,74 +15349,31 @@
               <a:rPr lang="zh-CN" altLang="en-US" sz="1800" dirty="0">
                 <a:latin typeface="+mn-ea"/>
               </a:rPr>
-              <a:t>对应情绪</a:t>
-            </a:r>
-            <a:r>
-              <a:rPr lang="zh-CN" altLang="en-US" sz="1800" dirty="0" smtClean="0">
-                <a:latin typeface="+mn-ea"/>
-              </a:rPr>
-              <a:t>：抑郁</a:t>
-            </a:r>
+              <a:t>对应情绪：抑郁、情绪低落，焦虑、烦躁、失眠，头部紧张。</a:t>
+            </a:r>
+          </a:p>
+          <a:p>
+            <a:pPr marL="0" indent="0">
+              <a:buNone/>
+            </a:pPr>
             <a:r>
               <a:rPr lang="zh-CN" altLang="en-US" sz="1800" dirty="0">
                 <a:latin typeface="+mn-ea"/>
               </a:rPr>
-              <a:t>、情绪低落</a:t>
-            </a:r>
-            <a:r>
-              <a:rPr lang="zh-CN" altLang="en-US" sz="1800" dirty="0" smtClean="0">
-                <a:latin typeface="+mn-ea"/>
-              </a:rPr>
-              <a:t>，焦虑、烦躁、失眠</a:t>
-            </a:r>
+              <a:t>穴位位置：头顶正中央，两耳尖连线与头顶中线的交点。</a:t>
+            </a:r>
+          </a:p>
+          <a:p>
+            <a:pPr marL="0" indent="0">
+              <a:buNone/>
+            </a:pPr>
             <a:r>
               <a:rPr lang="zh-CN" altLang="en-US" sz="1800" dirty="0">
                 <a:latin typeface="+mn-ea"/>
               </a:rPr>
-              <a:t>，头部紧张。</a:t>
-            </a:r>
-          </a:p>
-          <a:p>
-            <a:pPr marL="0" indent="0">
-              <a:buNone/>
-            </a:pPr>
-            <a:r>
-              <a:rPr lang="zh-CN" altLang="en-US" sz="1800" dirty="0">
-                <a:latin typeface="+mn-ea"/>
-              </a:rPr>
-              <a:t>穴位位置</a:t>
-            </a:r>
-            <a:r>
-              <a:rPr lang="zh-CN" altLang="en-US" sz="1800" dirty="0" smtClean="0">
-                <a:latin typeface="+mn-ea"/>
-              </a:rPr>
-              <a:t>：</a:t>
-            </a:r>
-            <a:r>
-              <a:rPr lang="zh-CN" altLang="en-US" sz="1800" dirty="0">
-                <a:latin typeface="+mn-ea"/>
-              </a:rPr>
-              <a:t>头顶正</a:t>
-            </a:r>
-            <a:r>
-              <a:rPr lang="zh-CN" altLang="en-US" sz="1800" dirty="0" smtClean="0">
-                <a:latin typeface="+mn-ea"/>
-              </a:rPr>
-              <a:t>中央，</a:t>
-            </a:r>
-            <a:r>
-              <a:rPr lang="zh-CN" altLang="en-US" sz="1800" dirty="0">
-                <a:latin typeface="+mn-ea"/>
-              </a:rPr>
-              <a:t>两耳尖连线与头顶中线的交点</a:t>
-            </a:r>
-            <a:r>
-              <a:rPr lang="zh-CN" altLang="en-US" sz="1800" dirty="0" smtClean="0">
-                <a:latin typeface="+mn-ea"/>
-              </a:rPr>
-              <a:t>。</a:t>
-            </a:r>
-            <a:endParaRPr lang="zh-CN" altLang="en-US" sz="1800" dirty="0">
+              <a:t>功效作用：升阳益气、安神定志、醒脑解郁</a:t>
+            </a:r>
+            <a:endParaRPr lang="en-US" altLang="zh-CN" sz="1800" dirty="0">
               <a:latin typeface="+mn-ea"/>
             </a:endParaRPr>
           </a:p>
@@ -16693,13 +15381,7 @@
             <a:pPr marL="0" indent="0">
               <a:buNone/>
             </a:pPr>
-            <a:r>
-              <a:rPr lang="zh-CN" altLang="en-US" sz="1800" dirty="0">
-                <a:latin typeface="+mn-ea"/>
-              </a:rPr>
-              <a:t>功效作用：升阳益气、安神定志、醒脑解郁</a:t>
-            </a:r>
-            <a:endParaRPr lang="en-US" altLang="zh-CN" sz="1800" dirty="0" smtClean="0">
+            <a:endParaRPr lang="en-US" altLang="zh-CN" sz="1800" dirty="0">
               <a:latin typeface="+mn-ea"/>
             </a:endParaRPr>
           </a:p>
@@ -16707,7 +15389,13 @@
             <a:pPr marL="0" indent="0">
               <a:buNone/>
             </a:pPr>
-            <a:endParaRPr lang="en-US" altLang="zh-CN" sz="1800" dirty="0" smtClean="0">
+            <a:r>
+              <a:rPr lang="zh-CN" altLang="en-US" sz="1800" dirty="0">
+                <a:latin typeface="+mn-ea"/>
+              </a:rPr>
+              <a:t>百会穴能升举阳气，改善 “清阳不升” 导致的心神失养，帮助提振精神、缓解低落情绪。</a:t>
+            </a:r>
+            <a:endParaRPr lang="en-US" altLang="zh-CN" sz="1800" dirty="0">
               <a:latin typeface="+mn-ea"/>
             </a:endParaRPr>
           </a:p>
@@ -16716,24 +15404,12 @@
               <a:buNone/>
             </a:pPr>
             <a:r>
-              <a:rPr lang="zh-CN" altLang="en-US" sz="1800" dirty="0" smtClean="0">
-                <a:latin typeface="+mn-ea"/>
-              </a:rPr>
-              <a:t>百</a:t>
-            </a:r>
-            <a:r>
               <a:rPr lang="zh-CN" altLang="en-US" sz="1800" dirty="0">
                 <a:latin typeface="+mn-ea"/>
               </a:rPr>
-              <a:t>会穴能升举阳气，改善 “清阳不升” 导致的心神失养，帮助提振精神、缓解低落情绪</a:t>
-            </a:r>
-            <a:r>
-              <a:rPr lang="zh-CN" altLang="en-US" sz="1800" dirty="0" smtClean="0">
-                <a:latin typeface="+mn-ea"/>
-              </a:rPr>
-              <a:t>。</a:t>
-            </a:r>
-            <a:endParaRPr lang="en-US" altLang="zh-CN" sz="1800" dirty="0" smtClean="0">
+              <a:t>百会穴可平复亢盛的阳气，安定心神，缓解脑部过度兴奋的状态。</a:t>
+            </a:r>
+            <a:endParaRPr lang="en-US" altLang="zh-CN" sz="1800" dirty="0">
               <a:latin typeface="+mn-ea"/>
             </a:endParaRPr>
           </a:p>
@@ -16742,36 +15418,12 @@
               <a:buNone/>
             </a:pPr>
             <a:r>
-              <a:rPr lang="zh-CN" altLang="en-US" sz="1800" dirty="0" smtClean="0">
-                <a:latin typeface="+mn-ea"/>
-              </a:rPr>
-              <a:t>百</a:t>
-            </a:r>
-            <a:r>
               <a:rPr lang="zh-CN" altLang="en-US" sz="1800" dirty="0">
                 <a:latin typeface="+mn-ea"/>
               </a:rPr>
-              <a:t>会穴可平复亢盛的阳气，安定心神，缓解</a:t>
-            </a:r>
-            <a:r>
-              <a:rPr lang="zh-CN" altLang="en-US" sz="1800" dirty="0" smtClean="0">
-                <a:latin typeface="+mn-ea"/>
-              </a:rPr>
-              <a:t>脑部</a:t>
-            </a:r>
-            <a:r>
-              <a:rPr lang="zh-CN" altLang="en-US" sz="1800" dirty="0">
-                <a:latin typeface="+mn-ea"/>
-              </a:rPr>
-              <a:t>过度兴奋的状态</a:t>
-            </a:r>
-            <a:r>
-              <a:rPr lang="zh-CN" altLang="en-US" sz="1800" dirty="0" smtClean="0">
-                <a:latin typeface="+mn-ea"/>
-              </a:rPr>
-              <a:t>。</a:t>
-            </a:r>
-            <a:endParaRPr lang="en-US" altLang="zh-CN" sz="1800" dirty="0" smtClean="0">
+              <a:t>敲击时可配合深呼吸，利用其 “升阳安神” 的特性，</a:t>
+            </a:r>
+            <a:endParaRPr lang="en-US" altLang="zh-CN" sz="1800" dirty="0">
               <a:latin typeface="+mn-ea"/>
             </a:endParaRPr>
           </a:p>
@@ -16783,33 +15435,7 @@
               <a:rPr lang="zh-CN" altLang="en-US" sz="1800" dirty="0">
                 <a:latin typeface="+mn-ea"/>
               </a:rPr>
-              <a:t>敲击时可配合深呼吸，利用其 “升阳安神” 的特性</a:t>
-            </a:r>
-            <a:r>
-              <a:rPr lang="zh-CN" altLang="en-US" sz="1800" dirty="0" smtClean="0">
-                <a:latin typeface="+mn-ea"/>
-              </a:rPr>
-              <a:t>，</a:t>
-            </a:r>
-            <a:endParaRPr lang="en-US" altLang="zh-CN" sz="1800" dirty="0" smtClean="0">
-              <a:latin typeface="+mn-ea"/>
-            </a:endParaRPr>
-          </a:p>
-          <a:p>
-            <a:pPr marL="0" indent="0">
-              <a:buNone/>
-            </a:pPr>
-            <a:r>
-              <a:rPr lang="zh-CN" altLang="en-US" sz="1800" dirty="0" smtClean="0">
-                <a:latin typeface="+mn-ea"/>
-              </a:rPr>
-              <a:t>强化</a:t>
-            </a:r>
-            <a:r>
-              <a:rPr lang="zh-CN" altLang="en-US" sz="1800" dirty="0">
-                <a:latin typeface="+mn-ea"/>
-              </a:rPr>
-              <a:t>情绪释放的深度。</a:t>
+              <a:t>强化情绪释放的深度。</a:t>
             </a:r>
           </a:p>
         </p:txBody>
@@ -17008,32 +15634,6 @@
               <a:buNone/>
             </a:pPr>
             <a:r>
-              <a:rPr lang="zh-CN" altLang="en-US" sz="3200" dirty="0" smtClean="0">
-                <a:effectLst>
-                  <a:outerShdw blurRad="38100" dist="38100" dir="2700000" algn="tl">
-                    <a:srgbClr val="000000">
-                      <a:alpha val="43137"/>
-                    </a:srgbClr>
-                  </a:outerShdw>
-                </a:effectLst>
-                <a:latin typeface="+mn-ea"/>
-              </a:rPr>
-              <a:t>头顶 </a:t>
-            </a:r>
-            <a:r>
-              <a:rPr lang="en-US" altLang="zh-CN" sz="3200" dirty="0" smtClean="0">
-                <a:effectLst>
-                  <a:outerShdw blurRad="38100" dist="38100" dir="2700000" algn="tl">
-                    <a:srgbClr val="000000">
-                      <a:alpha val="43137"/>
-                    </a:srgbClr>
-                  </a:outerShdw>
-                </a:effectLst>
-                <a:latin typeface="+mn-ea"/>
-              </a:rPr>
-              <a:t>- </a:t>
-            </a:r>
-            <a:r>
               <a:rPr lang="zh-CN" altLang="en-US" sz="3200" dirty="0">
                 <a:effectLst>
                   <a:outerShdw blurRad="38100" dist="38100" dir="2700000" algn="tl">
@@ -17044,10 +15644,10 @@
                 </a:effectLst>
                 <a:latin typeface="+mn-ea"/>
               </a:rPr>
-              <a:t>百会</a:t>
-            </a:r>
-            <a:r>
-              <a:rPr lang="zh-CN" altLang="en-US" sz="3200" dirty="0" smtClean="0">
+              <a:t>头顶 </a:t>
+            </a:r>
+            <a:r>
+              <a:rPr lang="en-US" altLang="zh-CN" sz="3200" dirty="0">
                 <a:effectLst>
                   <a:outerShdw blurRad="38100" dist="38100" dir="2700000" algn="tl">
                     <a:srgbClr val="000000">
@@ -17057,7 +15657,7 @@
                 </a:effectLst>
                 <a:latin typeface="+mn-ea"/>
               </a:rPr>
-              <a:t>穴（</a:t>
+              <a:t>- </a:t>
             </a:r>
             <a:r>
               <a:rPr lang="zh-CN" altLang="en-US" sz="3200" dirty="0">
@@ -17070,22 +15670,9 @@
                 </a:effectLst>
                 <a:latin typeface="+mn-ea"/>
               </a:rPr>
-              <a:t>督脉与足太阳膀胱经</a:t>
-            </a:r>
-            <a:r>
-              <a:rPr lang="zh-CN" altLang="en-US" sz="3200" dirty="0" smtClean="0">
-                <a:effectLst>
-                  <a:outerShdw blurRad="38100" dist="38100" dir="2700000" algn="tl">
-                    <a:srgbClr val="000000">
-                      <a:alpha val="43137"/>
-                    </a:srgbClr>
-                  </a:outerShdw>
-                </a:effectLst>
-                <a:latin typeface="+mn-ea"/>
-              </a:rPr>
-              <a:t>、</a:t>
-            </a:r>
-            <a:endParaRPr lang="en-US" altLang="zh-CN" sz="3200" dirty="0" smtClean="0">
+              <a:t>百会穴（督脉与足太阳膀胱经、</a:t>
+            </a:r>
+            <a:endParaRPr lang="en-US" altLang="zh-CN" sz="3200" dirty="0">
               <a:effectLst>
                 <a:outerShdw blurRad="38100" dist="38100" dir="2700000" algn="tl">
                   <a:srgbClr val="000000">
@@ -17101,19 +15688,6 @@
               <a:buNone/>
             </a:pPr>
             <a:r>
-              <a:rPr lang="zh-CN" altLang="en-US" sz="3200" dirty="0" smtClean="0">
-                <a:effectLst>
-                  <a:outerShdw blurRad="38100" dist="38100" dir="2700000" algn="tl">
-                    <a:srgbClr val="000000">
-                      <a:alpha val="43137"/>
-                    </a:srgbClr>
-                  </a:outerShdw>
-                </a:effectLst>
-                <a:latin typeface="+mn-ea"/>
-              </a:rPr>
-              <a:t>足</a:t>
-            </a:r>
-            <a:r>
               <a:rPr lang="zh-CN" altLang="en-US" sz="3200" dirty="0">
                 <a:effectLst>
                   <a:outerShdw blurRad="38100" dist="38100" dir="2700000" algn="tl">
@@ -17124,7 +15698,7 @@
                 </a:effectLst>
                 <a:latin typeface="+mn-ea"/>
               </a:rPr>
-              <a:t>少阳胆经等多条经脉的交会穴）</a:t>
+              <a:t>足少阳胆经等多条经脉的交会穴）</a:t>
             </a:r>
           </a:p>
         </p:txBody>
@@ -17178,13 +15752,6 @@
   <p:clrMapOvr>
     <a:masterClrMapping/>
   </p:clrMapOvr>
-  <p:timing>
-    <p:tnLst>
-      <p:par>
-        <p:cTn id="1" dur="indefinite" restart="never" nodeType="tmRoot"/>
-      </p:par>
-    </p:tnLst>
-  </p:timing>
 </p:sld>
 </file>
 
@@ -17287,21 +15854,16 @@
             </a:r>
             <a:r>
               <a:rPr lang="zh-CN" altLang="en-US" sz="4400" dirty="0"/>
-              <a:t>心理自助操的流程设计</a:t>
-            </a:r>
-            <a:r>
-              <a:rPr lang="zh-CN" altLang="en-US" sz="4400" dirty="0" smtClean="0"/>
-              <a:t>（</a:t>
-            </a:r>
-            <a:r>
-              <a:rPr lang="en-US" altLang="zh-CN" sz="4400" dirty="0" smtClean="0"/>
+              <a:t>心理自助操的流程设计（</a:t>
+            </a:r>
+            <a:r>
+              <a:rPr lang="en-US" altLang="zh-CN" sz="4400" dirty="0"/>
               <a:t>5</a:t>
             </a:r>
             <a:r>
-              <a:rPr lang="zh-CN" altLang="en-US" sz="4400" dirty="0" smtClean="0"/>
+              <a:rPr lang="zh-CN" altLang="en-US" sz="4400" dirty="0"/>
               <a:t>）</a:t>
             </a:r>
-            <a:endParaRPr lang="zh-CN" altLang="en-US" sz="4400" dirty="0"/>
           </a:p>
         </p:txBody>
       </p:sp>
@@ -17335,34 +15897,22 @@
               <a:buNone/>
             </a:pPr>
             <a:r>
-              <a:rPr lang="zh-CN" altLang="en-US" sz="1800" b="1" dirty="0" smtClean="0">
-                <a:latin typeface="+mn-ea"/>
-              </a:rPr>
-              <a:t>收尾</a:t>
-            </a:r>
-            <a:r>
               <a:rPr lang="zh-CN" altLang="en-US" sz="1800" b="1" dirty="0">
                 <a:latin typeface="+mn-ea"/>
               </a:rPr>
-              <a:t>稳定（</a:t>
-            </a:r>
-            <a:r>
-              <a:rPr lang="en-US" altLang="zh-CN" sz="1800" b="1" dirty="0" smtClean="0">
+              <a:t>收尾稳定（</a:t>
+            </a:r>
+            <a:r>
+              <a:rPr lang="en-US" altLang="zh-CN" sz="1800" b="1" dirty="0">
                 <a:latin typeface="+mn-ea"/>
               </a:rPr>
               <a:t>1</a:t>
             </a:r>
             <a:r>
-              <a:rPr lang="zh-CN" altLang="en-US" sz="1800" b="1" dirty="0" smtClean="0">
-                <a:latin typeface="+mn-ea"/>
-              </a:rPr>
-              <a:t>分钟</a:t>
-            </a:r>
-            <a:r>
               <a:rPr lang="zh-CN" altLang="en-US" sz="1800" b="1" dirty="0">
                 <a:latin typeface="+mn-ea"/>
               </a:rPr>
-              <a:t>）</a:t>
+              <a:t>分钟）</a:t>
             </a:r>
           </a:p>
           <a:p>
@@ -17379,13 +15929,13 @@
               <a:buChar char="l"/>
             </a:pPr>
             <a:r>
-              <a:rPr lang="zh-CN" altLang="en-US" sz="1800" dirty="0" smtClean="0">
+              <a:rPr lang="zh-CN" altLang="en-US" sz="1800" dirty="0">
                 <a:latin typeface="+mn-ea"/>
               </a:rPr>
               <a:t>持续敲击头顶穴位</a:t>
             </a:r>
             <a:r>
-              <a:rPr lang="en-US" altLang="zh-CN" sz="1800" dirty="0" smtClean="0">
+              <a:rPr lang="en-US" altLang="zh-CN" sz="1800" dirty="0">
                 <a:latin typeface="+mn-ea"/>
               </a:rPr>
               <a:t>10 </a:t>
@@ -17403,16 +15953,10 @@
               <a:buChar char="l"/>
             </a:pPr>
             <a:r>
-              <a:rPr lang="zh-CN" altLang="en-US" sz="1800" dirty="0" smtClean="0">
-                <a:latin typeface="+mn-ea"/>
-              </a:rPr>
-              <a:t>再</a:t>
-            </a:r>
-            <a:r>
               <a:rPr lang="zh-CN" altLang="en-US" sz="1800" dirty="0">
                 <a:latin typeface="+mn-ea"/>
               </a:rPr>
-              <a:t>深呼吸 </a:t>
+              <a:t>再深呼吸 </a:t>
             </a:r>
             <a:r>
               <a:rPr lang="en-US" altLang="zh-CN" sz="1800" dirty="0">
@@ -17424,15 +15968,9 @@
               <a:rPr lang="zh-CN" altLang="en-US" sz="1800" dirty="0">
                 <a:latin typeface="+mn-ea"/>
               </a:rPr>
-              <a:t>次，感受身体变化（如紧张感是否减轻、呼吸是否平稳），结束操作</a:t>
-            </a:r>
-            <a:r>
-              <a:rPr lang="zh-CN" altLang="en-US" sz="1800" dirty="0" smtClean="0">
-                <a:latin typeface="+mn-ea"/>
-              </a:rPr>
-              <a:t>。</a:t>
-            </a:r>
-            <a:endParaRPr lang="en-US" altLang="zh-CN" sz="1800" dirty="0" smtClean="0">
+              <a:t>次，感受身体变化（如紧张感是否减轻、呼吸是否平稳），结束操作。</a:t>
+            </a:r>
+            <a:endParaRPr lang="en-US" altLang="zh-CN" sz="1800" dirty="0">
               <a:latin typeface="+mn-ea"/>
             </a:endParaRPr>
           </a:p>
@@ -17641,12 +16179,12 @@
               <a:buNone/>
             </a:pPr>
             <a:r>
-              <a:rPr lang="zh-CN" altLang="en-US" sz="1800" dirty="0" smtClean="0">
+              <a:rPr lang="zh-CN" altLang="en-US" sz="1800" dirty="0">
                 <a:latin typeface="+mn-ea"/>
               </a:rPr>
               <a:t>叩击顺序总结：</a:t>
             </a:r>
-            <a:endParaRPr lang="en-US" altLang="zh-CN" sz="1800" dirty="0" smtClean="0">
+            <a:endParaRPr lang="en-US" altLang="zh-CN" sz="1800" dirty="0">
               <a:latin typeface="+mn-ea"/>
             </a:endParaRPr>
           </a:p>
@@ -17656,25 +16194,25 @@
               <a:buNone/>
             </a:pPr>
             <a:r>
-              <a:rPr lang="en-US" altLang="zh-CN" sz="1800" dirty="0" smtClean="0">
+              <a:rPr lang="en-US" altLang="zh-CN" sz="1800" dirty="0">
                 <a:latin typeface="+mn-ea"/>
               </a:rPr>
               <a:t>1</a:t>
             </a:r>
             <a:r>
-              <a:rPr lang="zh-CN" altLang="en-US" sz="1800" dirty="0" smtClean="0">
+              <a:rPr lang="zh-CN" altLang="en-US" sz="1800" dirty="0">
                 <a:latin typeface="+mn-ea"/>
               </a:rPr>
               <a:t>、手掌外侧 </a:t>
             </a:r>
             <a:r>
-              <a:rPr lang="en-US" altLang="zh-CN" sz="1800" dirty="0" smtClean="0">
+              <a:rPr lang="en-US" altLang="zh-CN" sz="1800" dirty="0">
                 <a:latin typeface="+mn-ea"/>
               </a:rPr>
               <a:t>- </a:t>
             </a:r>
             <a:r>
-              <a:rPr lang="zh-CN" altLang="en-US" sz="1800" dirty="0" smtClean="0">
+              <a:rPr lang="zh-CN" altLang="en-US" sz="1800" dirty="0">
                 <a:latin typeface="+mn-ea"/>
               </a:rPr>
               <a:t>后溪穴</a:t>
@@ -17686,25 +16224,25 @@
               <a:buNone/>
             </a:pPr>
             <a:r>
-              <a:rPr lang="en-US" altLang="zh-CN" sz="1800" dirty="0" smtClean="0">
+              <a:rPr lang="en-US" altLang="zh-CN" sz="1800" dirty="0">
                 <a:latin typeface="+mn-ea"/>
               </a:rPr>
               <a:t>2</a:t>
             </a:r>
             <a:r>
-              <a:rPr lang="zh-CN" altLang="en-US" sz="1800" dirty="0" smtClean="0">
+              <a:rPr lang="zh-CN" altLang="en-US" sz="1800" dirty="0">
                 <a:latin typeface="+mn-ea"/>
               </a:rPr>
               <a:t>、手腕内侧 </a:t>
             </a:r>
             <a:r>
-              <a:rPr lang="en-US" altLang="zh-CN" sz="1800" dirty="0" smtClean="0">
+              <a:rPr lang="en-US" altLang="zh-CN" sz="1800" dirty="0">
                 <a:latin typeface="+mn-ea"/>
               </a:rPr>
               <a:t>- </a:t>
             </a:r>
             <a:r>
-              <a:rPr lang="zh-CN" altLang="en-US" sz="1800" dirty="0" smtClean="0">
+              <a:rPr lang="zh-CN" altLang="en-US" sz="1800" dirty="0">
                 <a:latin typeface="+mn-ea"/>
               </a:rPr>
               <a:t>内关穴</a:t>
@@ -17716,25 +16254,25 @@
               <a:buNone/>
             </a:pPr>
             <a:r>
-              <a:rPr lang="en-US" altLang="zh-CN" sz="1800" dirty="0" smtClean="0">
+              <a:rPr lang="en-US" altLang="zh-CN" sz="1800" dirty="0">
                 <a:latin typeface="+mn-ea"/>
               </a:rPr>
               <a:t>3</a:t>
             </a:r>
             <a:r>
-              <a:rPr lang="zh-CN" altLang="en-US" sz="1800" dirty="0" smtClean="0">
+              <a:rPr lang="zh-CN" altLang="en-US" sz="1800" dirty="0">
                 <a:latin typeface="+mn-ea"/>
               </a:rPr>
               <a:t>、眉头 </a:t>
             </a:r>
             <a:r>
-              <a:rPr lang="en-US" altLang="zh-CN" sz="1800" dirty="0" smtClean="0">
+              <a:rPr lang="en-US" altLang="zh-CN" sz="1800" dirty="0">
                 <a:latin typeface="+mn-ea"/>
               </a:rPr>
               <a:t>- </a:t>
             </a:r>
             <a:r>
-              <a:rPr lang="zh-CN" altLang="en-US" sz="1800" dirty="0" smtClean="0">
+              <a:rPr lang="zh-CN" altLang="en-US" sz="1800" dirty="0">
                 <a:latin typeface="+mn-ea"/>
               </a:rPr>
               <a:t>攒竹穴</a:t>
@@ -17746,37 +16284,37 @@
               <a:buNone/>
             </a:pPr>
             <a:r>
-              <a:rPr lang="en-US" altLang="zh-CN" sz="1800" dirty="0" smtClean="0">
+              <a:rPr lang="en-US" altLang="zh-CN" sz="1800" dirty="0">
                 <a:latin typeface="+mn-ea"/>
               </a:rPr>
               <a:t>4</a:t>
             </a:r>
             <a:r>
-              <a:rPr lang="zh-CN" altLang="en-US" sz="1800" dirty="0" smtClean="0">
+              <a:rPr lang="zh-CN" altLang="en-US" sz="1800" dirty="0">
                 <a:latin typeface="+mn-ea"/>
               </a:rPr>
               <a:t>、眼外侧 </a:t>
             </a:r>
             <a:r>
-              <a:rPr lang="en-US" altLang="zh-CN" sz="1800" dirty="0" smtClean="0">
+              <a:rPr lang="en-US" altLang="zh-CN" sz="1800" dirty="0">
                 <a:latin typeface="+mn-ea"/>
               </a:rPr>
               <a:t>- </a:t>
             </a:r>
             <a:r>
-              <a:rPr lang="zh-CN" altLang="en-US" sz="1800" dirty="0" smtClean="0">
+              <a:rPr lang="zh-CN" altLang="en-US" sz="1800" dirty="0">
                 <a:latin typeface="+mn-ea"/>
               </a:rPr>
               <a:t>丝竹空穴</a:t>
             </a:r>
             <a:r>
-              <a:rPr lang="en-US" altLang="zh-CN" sz="1800" dirty="0" smtClean="0">
+              <a:rPr lang="en-US" altLang="zh-CN" sz="1800" dirty="0">
                 <a:latin typeface="+mn-ea"/>
               </a:rPr>
               <a:t>  </a:t>
             </a:r>
             <a:r>
-              <a:rPr lang="zh-CN" altLang="en-US" sz="1800" dirty="0" smtClean="0">
+              <a:rPr lang="zh-CN" altLang="en-US" sz="1800" dirty="0">
                 <a:latin typeface="+mn-ea"/>
               </a:rPr>
               <a:t>瞳子髎</a:t>
@@ -17788,25 +16326,25 @@
               <a:buNone/>
             </a:pPr>
             <a:r>
-              <a:rPr lang="en-US" altLang="zh-CN" sz="1800" dirty="0" smtClean="0">
+              <a:rPr lang="en-US" altLang="zh-CN" sz="1800" dirty="0">
                 <a:latin typeface="+mn-ea"/>
               </a:rPr>
               <a:t>5</a:t>
             </a:r>
             <a:r>
-              <a:rPr lang="zh-CN" altLang="en-US" sz="1800" dirty="0" smtClean="0">
+              <a:rPr lang="zh-CN" altLang="en-US" sz="1800" dirty="0">
                 <a:latin typeface="+mn-ea"/>
               </a:rPr>
               <a:t>、眼下 </a:t>
             </a:r>
             <a:r>
-              <a:rPr lang="en-US" altLang="zh-CN" sz="1800" dirty="0" smtClean="0">
+              <a:rPr lang="en-US" altLang="zh-CN" sz="1800" dirty="0">
                 <a:latin typeface="+mn-ea"/>
               </a:rPr>
               <a:t>- </a:t>
             </a:r>
             <a:r>
-              <a:rPr lang="zh-CN" altLang="en-US" sz="1800" dirty="0" smtClean="0">
+              <a:rPr lang="zh-CN" altLang="en-US" sz="1800" dirty="0">
                 <a:latin typeface="+mn-ea"/>
               </a:rPr>
               <a:t>承泣穴和四白穴</a:t>
@@ -17818,25 +16356,25 @@
               <a:buNone/>
             </a:pPr>
             <a:r>
-              <a:rPr lang="en-US" altLang="zh-CN" sz="1800" dirty="0" smtClean="0">
+              <a:rPr lang="en-US" altLang="zh-CN" sz="1800" dirty="0">
                 <a:latin typeface="+mn-ea"/>
               </a:rPr>
               <a:t>6</a:t>
             </a:r>
             <a:r>
-              <a:rPr lang="zh-CN" altLang="en-US" sz="1800" dirty="0" smtClean="0">
+              <a:rPr lang="zh-CN" altLang="en-US" sz="1800" dirty="0">
                 <a:latin typeface="+mn-ea"/>
               </a:rPr>
               <a:t>、鼻下 </a:t>
             </a:r>
             <a:r>
-              <a:rPr lang="en-US" altLang="zh-CN" sz="1800" dirty="0" smtClean="0">
+              <a:rPr lang="en-US" altLang="zh-CN" sz="1800" dirty="0">
                 <a:latin typeface="+mn-ea"/>
               </a:rPr>
               <a:t>- </a:t>
             </a:r>
             <a:r>
-              <a:rPr lang="zh-CN" altLang="en-US" sz="1800" dirty="0" smtClean="0">
+              <a:rPr lang="zh-CN" altLang="en-US" sz="1800" dirty="0">
                 <a:latin typeface="+mn-ea"/>
               </a:rPr>
               <a:t>人中穴</a:t>
@@ -17848,25 +16386,25 @@
               <a:buNone/>
             </a:pPr>
             <a:r>
-              <a:rPr lang="en-US" altLang="zh-CN" sz="1800" dirty="0" smtClean="0">
+              <a:rPr lang="en-US" altLang="zh-CN" sz="1800" dirty="0">
                 <a:latin typeface="+mn-ea"/>
               </a:rPr>
               <a:t>7</a:t>
             </a:r>
             <a:r>
-              <a:rPr lang="zh-CN" altLang="en-US" sz="1800" dirty="0" smtClean="0">
+              <a:rPr lang="zh-CN" altLang="en-US" sz="1800" dirty="0">
                 <a:latin typeface="+mn-ea"/>
               </a:rPr>
               <a:t>、下巴 </a:t>
             </a:r>
             <a:r>
-              <a:rPr lang="en-US" altLang="zh-CN" sz="1800" dirty="0" smtClean="0">
+              <a:rPr lang="en-US" altLang="zh-CN" sz="1800" dirty="0">
                 <a:latin typeface="+mn-ea"/>
               </a:rPr>
               <a:t>- </a:t>
             </a:r>
             <a:r>
-              <a:rPr lang="zh-CN" altLang="en-US" sz="1800" dirty="0" smtClean="0">
+              <a:rPr lang="zh-CN" altLang="en-US" sz="1800" dirty="0">
                 <a:latin typeface="+mn-ea"/>
               </a:rPr>
               <a:t>承浆穴</a:t>
@@ -17878,25 +16416,25 @@
               <a:buNone/>
             </a:pPr>
             <a:r>
-              <a:rPr lang="en-US" altLang="zh-CN" sz="1800" dirty="0" smtClean="0">
+              <a:rPr lang="en-US" altLang="zh-CN" sz="1800" dirty="0">
                 <a:latin typeface="+mn-ea"/>
               </a:rPr>
               <a:t>8</a:t>
             </a:r>
             <a:r>
-              <a:rPr lang="zh-CN" altLang="en-US" sz="1800" dirty="0" smtClean="0">
+              <a:rPr lang="zh-CN" altLang="en-US" sz="1800" dirty="0">
                 <a:latin typeface="+mn-ea"/>
               </a:rPr>
               <a:t>、前胸 </a:t>
             </a:r>
             <a:r>
-              <a:rPr lang="en-US" altLang="zh-CN" sz="1800" dirty="0" smtClean="0">
+              <a:rPr lang="en-US" altLang="zh-CN" sz="1800" dirty="0">
                 <a:latin typeface="+mn-ea"/>
               </a:rPr>
               <a:t>- </a:t>
             </a:r>
             <a:r>
-              <a:rPr lang="zh-CN" altLang="en-US" sz="1800" dirty="0" smtClean="0">
+              <a:rPr lang="zh-CN" altLang="en-US" sz="1800" dirty="0">
                 <a:latin typeface="+mn-ea"/>
               </a:rPr>
               <a:t>神藏穴</a:t>
@@ -17908,25 +16446,25 @@
               <a:buNone/>
             </a:pPr>
             <a:r>
-              <a:rPr lang="en-US" altLang="zh-CN" sz="1800" dirty="0" smtClean="0">
+              <a:rPr lang="en-US" altLang="zh-CN" sz="1800" dirty="0">
                 <a:latin typeface="+mn-ea"/>
               </a:rPr>
               <a:t>9</a:t>
             </a:r>
             <a:r>
-              <a:rPr lang="zh-CN" altLang="en-US" sz="1800" dirty="0" smtClean="0">
+              <a:rPr lang="zh-CN" altLang="en-US" sz="1800" dirty="0">
                 <a:latin typeface="+mn-ea"/>
               </a:rPr>
               <a:t>、锁骨 </a:t>
             </a:r>
             <a:r>
-              <a:rPr lang="en-US" altLang="zh-CN" sz="1800" dirty="0" smtClean="0">
+              <a:rPr lang="en-US" altLang="zh-CN" sz="1800" dirty="0">
                 <a:latin typeface="+mn-ea"/>
               </a:rPr>
               <a:t>- </a:t>
             </a:r>
             <a:r>
-              <a:rPr lang="zh-CN" altLang="en-US" sz="1800" dirty="0" smtClean="0">
+              <a:rPr lang="zh-CN" altLang="en-US" sz="1800" dirty="0">
                 <a:latin typeface="+mn-ea"/>
               </a:rPr>
               <a:t>云门穴和中府穴</a:t>
@@ -18129,25 +16667,25 @@
               <a:buNone/>
             </a:pPr>
             <a:r>
-              <a:rPr lang="en-US" altLang="zh-CN" sz="1800" dirty="0" smtClean="0">
+              <a:rPr lang="en-US" altLang="zh-CN" sz="1800" dirty="0">
                 <a:latin typeface="+mn-ea"/>
               </a:rPr>
               <a:t>10</a:t>
             </a:r>
             <a:r>
-              <a:rPr lang="zh-CN" altLang="en-US" sz="1800" dirty="0" smtClean="0">
+              <a:rPr lang="zh-CN" altLang="en-US" sz="1800" dirty="0">
                 <a:latin typeface="+mn-ea"/>
               </a:rPr>
               <a:t>、锁骨 </a:t>
             </a:r>
             <a:r>
-              <a:rPr lang="en-US" altLang="zh-CN" sz="1800" dirty="0" smtClean="0">
+              <a:rPr lang="en-US" altLang="zh-CN" sz="1800" dirty="0">
                 <a:latin typeface="+mn-ea"/>
               </a:rPr>
               <a:t>- </a:t>
             </a:r>
             <a:r>
-              <a:rPr lang="zh-CN" altLang="en-US" sz="1800" dirty="0" smtClean="0">
+              <a:rPr lang="zh-CN" altLang="en-US" sz="1800" dirty="0">
                 <a:latin typeface="+mn-ea"/>
               </a:rPr>
               <a:t>俞府穴</a:t>
@@ -18159,25 +16697,25 @@
               <a:buNone/>
             </a:pPr>
             <a:r>
-              <a:rPr lang="en-US" altLang="zh-CN" sz="1800" dirty="0" smtClean="0">
+              <a:rPr lang="en-US" altLang="zh-CN" sz="1800" dirty="0">
                 <a:latin typeface="+mn-ea"/>
               </a:rPr>
               <a:t>11</a:t>
             </a:r>
             <a:r>
-              <a:rPr lang="zh-CN" altLang="en-US" sz="1800" dirty="0" smtClean="0">
+              <a:rPr lang="zh-CN" altLang="en-US" sz="1800" dirty="0">
                 <a:latin typeface="+mn-ea"/>
               </a:rPr>
               <a:t>、腋下 </a:t>
             </a:r>
             <a:r>
-              <a:rPr lang="en-US" altLang="zh-CN" sz="1800" dirty="0" smtClean="0">
+              <a:rPr lang="en-US" altLang="zh-CN" sz="1800" dirty="0">
                 <a:latin typeface="+mn-ea"/>
               </a:rPr>
               <a:t>- </a:t>
             </a:r>
             <a:r>
-              <a:rPr lang="zh-CN" altLang="en-US" sz="1800" dirty="0" smtClean="0">
+              <a:rPr lang="zh-CN" altLang="en-US" sz="1800" dirty="0">
                 <a:latin typeface="+mn-ea"/>
               </a:rPr>
               <a:t>大包穴</a:t>
@@ -18189,25 +16727,25 @@
               <a:buNone/>
             </a:pPr>
             <a:r>
-              <a:rPr lang="en-US" altLang="zh-CN" sz="1800" dirty="0" smtClean="0">
+              <a:rPr lang="en-US" altLang="zh-CN" sz="1800" dirty="0">
                 <a:latin typeface="+mn-ea"/>
               </a:rPr>
               <a:t>12</a:t>
             </a:r>
             <a:r>
-              <a:rPr lang="zh-CN" altLang="en-US" sz="1800" dirty="0" smtClean="0">
+              <a:rPr lang="zh-CN" altLang="en-US" sz="1800" dirty="0">
                 <a:latin typeface="+mn-ea"/>
               </a:rPr>
               <a:t>、腋下 </a:t>
             </a:r>
             <a:r>
-              <a:rPr lang="en-US" altLang="zh-CN" sz="1800" dirty="0" smtClean="0">
+              <a:rPr lang="en-US" altLang="zh-CN" sz="1800" dirty="0">
                 <a:latin typeface="+mn-ea"/>
               </a:rPr>
               <a:t>- </a:t>
             </a:r>
             <a:r>
-              <a:rPr lang="zh-CN" altLang="en-US" sz="1800" dirty="0" smtClean="0">
+              <a:rPr lang="zh-CN" altLang="en-US" sz="1800" dirty="0">
                 <a:latin typeface="+mn-ea"/>
               </a:rPr>
               <a:t>极泉穴</a:t>
@@ -18219,32 +16757,29 @@
               <a:buNone/>
             </a:pPr>
             <a:r>
-              <a:rPr lang="en-US" altLang="zh-CN" sz="1800" dirty="0" smtClean="0">
+              <a:rPr lang="en-US" altLang="zh-CN" sz="1800" dirty="0">
                 <a:latin typeface="+mn-ea"/>
               </a:rPr>
               <a:t>13</a:t>
             </a:r>
             <a:r>
-              <a:rPr lang="zh-CN" altLang="en-US" sz="1800" dirty="0" smtClean="0">
+              <a:rPr lang="zh-CN" altLang="en-US" sz="1800" dirty="0">
                 <a:latin typeface="+mn-ea"/>
               </a:rPr>
               <a:t>、头顶 </a:t>
             </a:r>
             <a:r>
-              <a:rPr lang="en-US" altLang="zh-CN" sz="1800" dirty="0" smtClean="0">
+              <a:rPr lang="en-US" altLang="zh-CN" sz="1800" dirty="0">
                 <a:latin typeface="+mn-ea"/>
               </a:rPr>
               <a:t>- </a:t>
             </a:r>
             <a:r>
-              <a:rPr lang="zh-CN" altLang="en-US" sz="1800" dirty="0" smtClean="0">
+              <a:rPr lang="zh-CN" altLang="en-US" sz="1800" dirty="0">
                 <a:latin typeface="+mn-ea"/>
               </a:rPr>
               <a:t>百会穴</a:t>
             </a:r>
-            <a:endParaRPr lang="zh-CN" altLang="en-US" sz="1800" dirty="0">
-              <a:latin typeface="+mn-ea"/>
-            </a:endParaRPr>
           </a:p>
         </p:txBody>
       </p:sp>
@@ -18258,13 +16793,6 @@
   <p:clrMapOvr>
     <a:masterClrMapping/>
   </p:clrMapOvr>
-  <p:timing>
-    <p:tnLst>
-      <p:par>
-        <p:cTn id="1" dur="indefinite" restart="never" nodeType="tmRoot"/>
-      </p:par>
-    </p:tnLst>
-  </p:timing>
 </p:sld>
 </file>
 
@@ -18323,29 +16851,16 @@
             </a:r>
             <a:r>
               <a:rPr lang="zh-CN" altLang="en-US" sz="4400" dirty="0"/>
-              <a:t>心理自助</a:t>
-            </a:r>
-            <a:r>
-              <a:rPr lang="zh-CN" altLang="en-US" sz="4400" dirty="0" smtClean="0"/>
-              <a:t>操的音乐</a:t>
-            </a:r>
-            <a:r>
-              <a:rPr lang="zh-CN" altLang="en-US" sz="4400" dirty="0" smtClean="0"/>
-              <a:t>选择</a:t>
-            </a:r>
-            <a:r>
-              <a:rPr lang="zh-CN" altLang="en-US" sz="4400" dirty="0" smtClean="0"/>
-              <a:t>（</a:t>
-            </a:r>
-            <a:r>
-              <a:rPr lang="en-US" altLang="zh-CN" sz="4400" dirty="0" smtClean="0"/>
+              <a:t>心理自助操的音乐选择（</a:t>
+            </a:r>
+            <a:r>
+              <a:rPr lang="en-US" altLang="zh-CN" sz="4400" dirty="0"/>
               <a:t>1</a:t>
             </a:r>
             <a:r>
-              <a:rPr lang="zh-CN" altLang="en-US" sz="4400" dirty="0" smtClean="0"/>
+              <a:rPr lang="zh-CN" altLang="en-US" sz="4400" dirty="0"/>
               <a:t>）</a:t>
             </a:r>
-            <a:endParaRPr lang="zh-CN" altLang="en-US" sz="4400" dirty="0"/>
           </a:p>
         </p:txBody>
       </p:sp>
@@ -18409,20 +16924,17 @@
               <a:buNone/>
             </a:pPr>
             <a:r>
-              <a:rPr lang="en-US" altLang="zh-CN" sz="1800" dirty="0" smtClean="0">
+              <a:rPr lang="en-US" altLang="zh-CN" sz="1800" dirty="0">
                 <a:latin typeface="+mn-ea"/>
               </a:rPr>
               <a:t>EFT</a:t>
             </a:r>
             <a:r>
-              <a:rPr lang="zh-CN" altLang="en-US" sz="1800" dirty="0" smtClean="0">
+              <a:rPr lang="zh-CN" altLang="en-US" sz="1800" dirty="0">
                 <a:latin typeface="+mn-ea"/>
               </a:rPr>
               <a:t>音乐的选择是严格按照本地化音乐治疗理论定制的。</a:t>
             </a:r>
-            <a:endParaRPr lang="zh-CN" altLang="en-US" sz="1800" dirty="0">
-              <a:latin typeface="+mn-ea"/>
-            </a:endParaRPr>
           </a:p>
           <a:p>
             <a:pPr>
@@ -18430,14 +16942,11 @@
               <a:buChar char="l"/>
             </a:pPr>
             <a:r>
-              <a:rPr lang="zh-CN" altLang="en-US" sz="1800" dirty="0" smtClean="0">
+              <a:rPr lang="zh-CN" altLang="en-US" sz="1800" dirty="0">
                 <a:latin typeface="+mn-ea"/>
               </a:rPr>
               <a:t>通过认知方面，从歌词的理解来选择。</a:t>
             </a:r>
-            <a:endParaRPr lang="zh-CN" altLang="en-US" sz="1800" dirty="0">
-              <a:latin typeface="+mn-ea"/>
-            </a:endParaRPr>
           </a:p>
           <a:p>
             <a:pPr>
@@ -18445,12 +16954,12 @@
               <a:buChar char="l"/>
             </a:pPr>
             <a:r>
-              <a:rPr lang="zh-CN" altLang="en-US" sz="1800" dirty="0" smtClean="0">
+              <a:rPr lang="zh-CN" altLang="en-US" sz="1800" dirty="0">
                 <a:latin typeface="+mn-ea"/>
               </a:rPr>
               <a:t>基于当下的情绪关系来选择。</a:t>
             </a:r>
-            <a:endParaRPr lang="en-US" altLang="zh-CN" sz="1800" dirty="0" smtClean="0">
+            <a:endParaRPr lang="en-US" altLang="zh-CN" sz="1800" dirty="0">
               <a:latin typeface="+mn-ea"/>
             </a:endParaRPr>
           </a:p>
@@ -18460,12 +16969,12 @@
               <a:buChar char="l"/>
             </a:pPr>
             <a:r>
-              <a:rPr lang="zh-CN" altLang="en-US" sz="1800" dirty="0" smtClean="0">
+              <a:rPr lang="zh-CN" altLang="en-US" sz="1800" dirty="0">
                 <a:latin typeface="+mn-ea"/>
               </a:rPr>
               <a:t>基于人际关系模型来定位音乐所具有的内涵表达来选择。</a:t>
             </a:r>
-            <a:endParaRPr lang="en-US" altLang="zh-CN" sz="1800" dirty="0" smtClean="0">
+            <a:endParaRPr lang="en-US" altLang="zh-CN" sz="1800" dirty="0">
               <a:latin typeface="+mn-ea"/>
             </a:endParaRPr>
           </a:p>
@@ -18475,12 +16984,12 @@
               <a:buChar char="l"/>
             </a:pPr>
             <a:r>
-              <a:rPr lang="zh-CN" altLang="en-US" sz="1800" dirty="0" smtClean="0">
+              <a:rPr lang="zh-CN" altLang="en-US" sz="1800" dirty="0">
                 <a:latin typeface="+mn-ea"/>
               </a:rPr>
               <a:t>依据个人的情结自由选择。</a:t>
             </a:r>
-            <a:endParaRPr lang="en-US" altLang="zh-CN" sz="1800" dirty="0" smtClean="0">
+            <a:endParaRPr lang="en-US" altLang="zh-CN" sz="1800" dirty="0">
               <a:latin typeface="+mn-ea"/>
             </a:endParaRPr>
           </a:p>
@@ -18706,22 +17215,16 @@
               <a:rPr lang="zh-CN" altLang="en-US" sz="1800" dirty="0">
                 <a:latin typeface="+mn-ea"/>
               </a:rPr>
-              <a:t>旋律</a:t>
-            </a:r>
-            <a:r>
-              <a:rPr lang="zh-CN" altLang="en-US" sz="1800" dirty="0" smtClean="0">
-                <a:latin typeface="+mn-ea"/>
-              </a:rPr>
-              <a:t>线 </a:t>
-            </a:r>
-            <a:r>
-              <a:rPr lang="en-US" altLang="zh-CN" sz="1800" dirty="0" smtClean="0">
+              <a:t>旋律线 </a:t>
+            </a:r>
+            <a:r>
+              <a:rPr lang="en-US" altLang="zh-CN" sz="1800" dirty="0">
                 <a:latin typeface="+mn-ea"/>
               </a:rPr>
               <a:t>– </a:t>
             </a:r>
             <a:r>
-              <a:rPr lang="zh-CN" altLang="en-US" sz="1800" dirty="0" smtClean="0">
+              <a:rPr lang="zh-CN" altLang="en-US" sz="1800" dirty="0">
                 <a:latin typeface="+mn-ea"/>
               </a:rPr>
               <a:t>情感表达</a:t>
@@ -18739,22 +17242,16 @@
               <a:rPr lang="zh-CN" altLang="en-US" sz="1800" dirty="0">
                 <a:latin typeface="+mn-ea"/>
               </a:rPr>
-              <a:t>记忆</a:t>
-            </a:r>
-            <a:r>
-              <a:rPr lang="zh-CN" altLang="en-US" sz="1800" dirty="0" smtClean="0">
-                <a:latin typeface="+mn-ea"/>
-              </a:rPr>
-              <a:t>数轴 </a:t>
-            </a:r>
-            <a:r>
-              <a:rPr lang="en-US" altLang="zh-CN" sz="1800" dirty="0" smtClean="0">
+              <a:t>记忆数轴 </a:t>
+            </a:r>
+            <a:r>
+              <a:rPr lang="en-US" altLang="zh-CN" sz="1800" dirty="0">
                 <a:latin typeface="+mn-ea"/>
               </a:rPr>
               <a:t>– </a:t>
             </a:r>
             <a:r>
-              <a:rPr lang="zh-CN" altLang="en-US" sz="1800" dirty="0" smtClean="0">
+              <a:rPr lang="zh-CN" altLang="en-US" sz="1800" dirty="0">
                 <a:latin typeface="+mn-ea"/>
               </a:rPr>
               <a:t>信念系统</a:t>
@@ -18769,19 +17266,19 @@
               <a:buChar char="l"/>
             </a:pPr>
             <a:r>
-              <a:rPr lang="zh-CN" altLang="en-US" sz="1800" dirty="0" smtClean="0">
+              <a:rPr lang="zh-CN" altLang="en-US" sz="1800" dirty="0">
                 <a:latin typeface="+mn-ea"/>
               </a:rPr>
               <a:t>安全岛 </a:t>
             </a:r>
             <a:r>
-              <a:rPr lang="en-US" altLang="zh-CN" sz="1800" dirty="0" smtClean="0">
+              <a:rPr lang="en-US" altLang="zh-CN" sz="1800" dirty="0">
                 <a:latin typeface="+mn-ea"/>
               </a:rPr>
               <a:t>– </a:t>
             </a:r>
             <a:r>
-              <a:rPr lang="zh-CN" altLang="en-US" sz="1800" dirty="0" smtClean="0">
+              <a:rPr lang="zh-CN" altLang="en-US" sz="1800" dirty="0">
                 <a:latin typeface="+mn-ea"/>
               </a:rPr>
               <a:t>冥想、正念</a:t>
@@ -18796,19 +17293,19 @@
               <a:buChar char="l"/>
             </a:pPr>
             <a:r>
-              <a:rPr lang="zh-CN" altLang="en-US" sz="1800" dirty="0" smtClean="0">
+              <a:rPr lang="zh-CN" altLang="en-US" sz="1800" dirty="0">
                 <a:latin typeface="+mn-ea"/>
               </a:rPr>
               <a:t>注意力 </a:t>
             </a:r>
             <a:r>
-              <a:rPr lang="en-US" altLang="zh-CN" sz="1800" dirty="0" smtClean="0">
+              <a:rPr lang="en-US" altLang="zh-CN" sz="1800" dirty="0">
                 <a:latin typeface="+mn-ea"/>
               </a:rPr>
               <a:t>– </a:t>
             </a:r>
             <a:r>
-              <a:rPr lang="zh-CN" altLang="en-US" sz="1800" dirty="0" smtClean="0">
+              <a:rPr lang="zh-CN" altLang="en-US" sz="1800" dirty="0">
                 <a:latin typeface="+mn-ea"/>
               </a:rPr>
               <a:t>迁移理论</a:t>
@@ -18826,22 +17323,16 @@
               <a:rPr lang="zh-CN" altLang="en-US" sz="1800" dirty="0">
                 <a:latin typeface="+mn-ea"/>
               </a:rPr>
-              <a:t>学习</a:t>
-            </a:r>
-            <a:r>
-              <a:rPr lang="zh-CN" altLang="en-US" sz="1800" dirty="0" smtClean="0">
-                <a:latin typeface="+mn-ea"/>
-              </a:rPr>
-              <a:t>力 </a:t>
-            </a:r>
-            <a:r>
-              <a:rPr lang="en-US" altLang="zh-CN" sz="1800" dirty="0" smtClean="0">
+              <a:t>学习力 </a:t>
+            </a:r>
+            <a:r>
+              <a:rPr lang="en-US" altLang="zh-CN" sz="1800" dirty="0">
                 <a:latin typeface="+mn-ea"/>
               </a:rPr>
               <a:t>– </a:t>
             </a:r>
             <a:r>
-              <a:rPr lang="zh-CN" altLang="en-US" sz="1800" dirty="0" smtClean="0">
+              <a:rPr lang="zh-CN" altLang="en-US" sz="1800" dirty="0">
                 <a:latin typeface="+mn-ea"/>
               </a:rPr>
               <a:t>知识提取</a:t>
@@ -18859,22 +17350,16 @@
               <a:rPr lang="zh-CN" altLang="en-US" sz="1800" dirty="0">
                 <a:latin typeface="+mn-ea"/>
               </a:rPr>
-              <a:t>呼吸</a:t>
-            </a:r>
-            <a:r>
-              <a:rPr lang="zh-CN" altLang="en-US" sz="1800" dirty="0" smtClean="0">
-                <a:latin typeface="+mn-ea"/>
-              </a:rPr>
-              <a:t>式 </a:t>
-            </a:r>
-            <a:r>
-              <a:rPr lang="en-US" altLang="zh-CN" sz="1800" dirty="0" smtClean="0">
+              <a:t>呼吸式 </a:t>
+            </a:r>
+            <a:r>
+              <a:rPr lang="en-US" altLang="zh-CN" sz="1800" dirty="0">
                 <a:latin typeface="+mn-ea"/>
               </a:rPr>
               <a:t>– </a:t>
             </a:r>
             <a:r>
-              <a:rPr lang="zh-CN" altLang="en-US" sz="1800" dirty="0" smtClean="0">
+              <a:rPr lang="zh-CN" altLang="en-US" sz="1800" dirty="0">
                 <a:latin typeface="+mn-ea"/>
               </a:rPr>
               <a:t>焦虑、愤怒</a:t>
@@ -18895,13 +17380,6 @@
   <p:clrMapOvr>
     <a:masterClrMapping/>
   </p:clrMapOvr>
-  <p:timing>
-    <p:tnLst>
-      <p:par>
-        <p:cTn id="1" dur="indefinite" restart="never" nodeType="tmRoot"/>
-      </p:par>
-    </p:tnLst>
-  </p:timing>
 </p:sld>
 </file>
 
@@ -18999,19 +17477,6 @@
               <a:buNone/>
             </a:pPr>
             <a:r>
-              <a:rPr lang="zh-CN" altLang="en-US" sz="2400" dirty="0" smtClean="0">
-                <a:effectLst>
-                  <a:outerShdw blurRad="50800" dist="38100" dir="2700000" algn="tl" rotWithShape="0">
-                    <a:prstClr val="black">
-                      <a:alpha val="40000"/>
-                    </a:prstClr>
-                  </a:outerShdw>
-                </a:effectLst>
-                <a:latin typeface="+mn-ea"/>
-              </a:rPr>
-              <a:t>特点</a:t>
-            </a:r>
-            <a:r>
               <a:rPr lang="zh-CN" altLang="en-US" sz="2400" dirty="0">
                 <a:effectLst>
                   <a:outerShdw blurRad="50800" dist="38100" dir="2700000" algn="tl" rotWithShape="0">
@@ -19022,7 +17487,7 @@
                 </a:effectLst>
                 <a:latin typeface="+mn-ea"/>
               </a:rPr>
-              <a:t>一</a:t>
+              <a:t>特点一</a:t>
             </a:r>
             <a:endParaRPr lang="en-US" altLang="zh-CN" sz="2400" dirty="0">
               <a:effectLst>
@@ -19043,13 +17508,7 @@
               <a:rPr lang="zh-CN" altLang="en-US" sz="1800" dirty="0">
                 <a:latin typeface="+mn-ea"/>
               </a:rPr>
-              <a:t>一是基于中医的经络理论根植于中国的传统文化，具有明显的中国特色，符合中国人的情感特点，在普通大众中推行更易于被接受</a:t>
-            </a:r>
-            <a:r>
-              <a:rPr lang="zh-CN" altLang="en-US" sz="1800" dirty="0" smtClean="0">
-                <a:latin typeface="+mn-ea"/>
-              </a:rPr>
-              <a:t>；</a:t>
+              <a:t>一是基于中医的经络理论根植于中国的传统文化，具有明显的中国特色，符合中国人的情感特点，在普通大众中推行更易于被接受；</a:t>
             </a:r>
             <a:endParaRPr lang="en-US" altLang="zh-CN" sz="1800" dirty="0">
               <a:latin typeface="+mn-ea"/>
@@ -19290,7 +17749,7 @@
               <a:buNone/>
             </a:pPr>
             <a:r>
-              <a:rPr lang="zh-CN" altLang="en-US" sz="2400" dirty="0" smtClean="0">
+              <a:rPr lang="zh-CN" altLang="en-US" sz="2400" dirty="0">
                 <a:effectLst>
                   <a:outerShdw blurRad="50800" dist="38100" dir="2700000" algn="tl" rotWithShape="0">
                     <a:prstClr val="black">
@@ -19302,7 +17761,7 @@
               </a:rPr>
               <a:t>特点二</a:t>
             </a:r>
-            <a:endParaRPr lang="en-US" altLang="zh-CN" sz="2400" dirty="0" smtClean="0">
+            <a:endParaRPr lang="en-US" altLang="zh-CN" sz="2400" dirty="0">
               <a:effectLst>
                 <a:outerShdw blurRad="50800" dist="38100" dir="2700000" algn="tl" rotWithShape="0">
                   <a:prstClr val="black">
@@ -19318,12 +17777,12 @@
               <a:buNone/>
             </a:pPr>
             <a:r>
-              <a:rPr lang="zh-CN" altLang="en-US" sz="1800" dirty="0" smtClean="0">
+              <a:rPr lang="zh-CN" altLang="en-US" sz="1800" dirty="0">
                 <a:latin typeface="+mn-ea"/>
               </a:rPr>
               <a:t>简单易学、便捷有效，普通人不需要学习太多深奥的心理学知识，操作流程一学就会，立即使用就能有较明显效果；</a:t>
             </a:r>
-            <a:endParaRPr lang="en-US" altLang="zh-CN" sz="1800" dirty="0" smtClean="0">
+            <a:endParaRPr lang="en-US" altLang="zh-CN" sz="1800" dirty="0">
               <a:latin typeface="+mn-ea"/>
             </a:endParaRPr>
           </a:p>
@@ -19523,7 +17982,7 @@
               <a:buNone/>
             </a:pPr>
             <a:r>
-              <a:rPr lang="zh-CN" altLang="en-US" sz="2400" dirty="0" smtClean="0">
+              <a:rPr lang="zh-CN" altLang="en-US" sz="2400" dirty="0">
                 <a:effectLst>
                   <a:outerShdw blurRad="50800" dist="38100" dir="2700000" algn="tl" rotWithShape="0">
                     <a:prstClr val="black">
@@ -19535,7 +17994,7 @@
               </a:rPr>
               <a:t>特点三</a:t>
             </a:r>
-            <a:endParaRPr lang="en-US" altLang="zh-CN" sz="2400" dirty="0" smtClean="0">
+            <a:endParaRPr lang="en-US" altLang="zh-CN" sz="2400" dirty="0">
               <a:effectLst>
                 <a:outerShdw blurRad="50800" dist="38100" dir="2700000" algn="tl" rotWithShape="0">
                   <a:prstClr val="black">
@@ -19551,12 +18010,12 @@
               <a:buNone/>
             </a:pPr>
             <a:r>
-              <a:rPr lang="zh-CN" altLang="en-US" sz="1800" dirty="0" smtClean="0">
+              <a:rPr lang="zh-CN" altLang="en-US" sz="1800" dirty="0">
                 <a:latin typeface="+mn-ea"/>
               </a:rPr>
               <a:t>操作流程规范统一、可推广性强，针对不同的情绪问题可使用同样的治疗流程和方法，学会之后可自行习练改善自身情绪问题，又能教会身边人进行习练，能较容易实现自助和助人。</a:t>
             </a:r>
-            <a:endParaRPr lang="en-US" altLang="zh-CN" sz="1800" dirty="0" smtClean="0">
+            <a:endParaRPr lang="en-US" altLang="zh-CN" sz="1800" dirty="0">
               <a:latin typeface="+mn-ea"/>
             </a:endParaRPr>
           </a:p>
@@ -19572,13 +18031,6 @@
   <p:clrMapOvr>
     <a:masterClrMapping/>
   </p:clrMapOvr>
-  <p:timing>
-    <p:tnLst>
-      <p:par>
-        <p:cTn id="1" dur="indefinite" restart="never" nodeType="tmRoot"/>
-      </p:par>
-    </p:tnLst>
-  </p:timing>
 </p:sld>
 </file>
 
@@ -19637,29 +18089,16 @@
             </a:r>
             <a:r>
               <a:rPr lang="zh-CN" altLang="en-US" sz="4400" dirty="0"/>
-              <a:t>心理自助</a:t>
-            </a:r>
-            <a:r>
-              <a:rPr lang="zh-CN" altLang="en-US" sz="4400" dirty="0" smtClean="0"/>
-              <a:t>操的音乐</a:t>
-            </a:r>
-            <a:r>
-              <a:rPr lang="zh-CN" altLang="en-US" sz="4400" dirty="0" smtClean="0"/>
-              <a:t>选择</a:t>
-            </a:r>
-            <a:r>
-              <a:rPr lang="zh-CN" altLang="en-US" sz="4400" dirty="0" smtClean="0"/>
-              <a:t>（</a:t>
-            </a:r>
-            <a:r>
-              <a:rPr lang="en-US" altLang="zh-CN" sz="4400" dirty="0" smtClean="0"/>
+              <a:t>心理自助操的音乐选择（</a:t>
+            </a:r>
+            <a:r>
+              <a:rPr lang="en-US" altLang="zh-CN" sz="4400" dirty="0"/>
               <a:t>2</a:t>
             </a:r>
             <a:r>
-              <a:rPr lang="zh-CN" altLang="en-US" sz="4400" dirty="0" smtClean="0"/>
+              <a:rPr lang="zh-CN" altLang="en-US" sz="4400" dirty="0"/>
               <a:t>）</a:t>
             </a:r>
-            <a:endParaRPr lang="zh-CN" altLang="en-US" sz="4400" dirty="0"/>
           </a:p>
         </p:txBody>
       </p:sp>
@@ -19711,7 +18150,7 @@
                     <a:p>
                       <a:pPr algn="ctr" fontAlgn="ctr"/>
                       <a:r>
-                        <a:rPr lang="en-US" sz="1200" b="1" u="none" strike="noStrike" dirty="0" smtClean="0">
+                        <a:rPr lang="en-US" sz="1200" b="1" u="none" strike="noStrike" dirty="0">
                           <a:effectLst/>
                           <a:latin typeface="+mn-ea"/>
                           <a:ea typeface="+mn-ea"/>
@@ -19719,7 +18158,7 @@
                         <a:t>EFT</a:t>
                       </a:r>
                       <a:r>
-                        <a:rPr lang="zh-CN" altLang="en-US" sz="1200" b="1" u="none" strike="noStrike" dirty="0" smtClean="0">
+                        <a:rPr lang="zh-CN" altLang="en-US" sz="1200" b="1" u="none" strike="noStrike" dirty="0">
                           <a:effectLst/>
                           <a:latin typeface="+mn-ea"/>
                           <a:ea typeface="+mn-ea"/>
@@ -19745,7 +18184,7 @@
                     <a:p>
                       <a:pPr algn="ctr" fontAlgn="ctr"/>
                       <a:r>
-                        <a:rPr lang="zh-CN" altLang="en-US" sz="1200" b="1" u="none" strike="noStrike" dirty="0" smtClean="0">
+                        <a:rPr lang="zh-CN" altLang="en-US" sz="1200" b="1" u="none" strike="noStrike" dirty="0">
                           <a:effectLst/>
                           <a:latin typeface="+mn-ea"/>
                           <a:ea typeface="+mn-ea"/>
@@ -19809,39 +18248,7 @@
                           <a:latin typeface="+mn-ea"/>
                           <a:ea typeface="+mn-ea"/>
                         </a:rPr>
-                        <a:t>手刀点常用于建立心理安全感，缓解初始焦虑与抑郁情绪</a:t>
-                      </a:r>
-                      <a:r>
-                        <a:rPr lang="zh-CN" altLang="en-US" sz="1200" u="none" strike="noStrike" dirty="0" smtClean="0">
-                          <a:effectLst/>
-                          <a:latin typeface="+mn-ea"/>
-                          <a:ea typeface="+mn-ea"/>
-                        </a:rPr>
-                        <a:t>。风格</a:t>
-                      </a:r>
-                      <a:r>
-                        <a:rPr lang="zh-CN" altLang="en-US" sz="1200" u="none" strike="noStrike" dirty="0">
-                          <a:effectLst/>
-                          <a:latin typeface="+mn-ea"/>
-                          <a:ea typeface="+mn-ea"/>
-                        </a:rPr>
-                        <a:t>舒缓无强烈波动，适合敲击起始阶段平复心绪；羽调式音乐对应肾脏，可缓解恐惧等负面情绪</a:t>
-                      </a:r>
-                      <a:r>
-                        <a:rPr lang="zh-CN" altLang="en-US" sz="1200" u="none" strike="noStrike" dirty="0" smtClean="0">
-                          <a:effectLst/>
-                          <a:latin typeface="+mn-ea"/>
-                          <a:ea typeface="+mn-ea"/>
-                        </a:rPr>
-                        <a:t>，能</a:t>
-                      </a:r>
-                      <a:r>
-                        <a:rPr lang="zh-CN" altLang="en-US" sz="1200" u="none" strike="noStrike" dirty="0">
-                          <a:effectLst/>
-                          <a:latin typeface="+mn-ea"/>
-                          <a:ea typeface="+mn-ea"/>
-                        </a:rPr>
-                        <a:t>辅助该穴位泄心火、疏抑郁的作用。</a:t>
+                        <a:t>手刀点常用于建立心理安全感，缓解初始焦虑与抑郁情绪。风格舒缓无强烈波动，适合敲击起始阶段平复心绪；羽调式音乐对应肾脏，可缓解恐惧等负面情绪，能辅助该穴位泄心火、疏抑郁的作用。</a:t>
                       </a:r>
                       <a:endParaRPr lang="zh-CN" altLang="en-US" sz="1200" b="0" i="0" u="none" strike="noStrike" dirty="0">
                         <a:solidFill>
@@ -19869,7 +18276,7 @@
                     <a:p>
                       <a:pPr algn="l" fontAlgn="ctr"/>
                       <a:r>
-                        <a:rPr lang="zh-CN" altLang="en-US" sz="1200" b="0" i="0" u="none" strike="noStrike" dirty="0" smtClean="0">
+                        <a:rPr lang="zh-CN" altLang="en-US" sz="1200" b="0" i="0" u="none" strike="noStrike" dirty="0">
                           <a:solidFill>
                             <a:srgbClr val="333333"/>
                           </a:solidFill>
@@ -19879,14 +18286,6 @@
                         </a:rPr>
                         <a:t>手腕内侧（内关穴）</a:t>
                       </a:r>
-                      <a:endParaRPr lang="zh-CN" altLang="en-US" sz="1200" b="0" i="0" u="none" strike="noStrike" dirty="0">
-                        <a:solidFill>
-                          <a:srgbClr val="333333"/>
-                        </a:solidFill>
-                        <a:effectLst/>
-                        <a:latin typeface="+mn-ea"/>
-                        <a:ea typeface="+mn-ea"/>
-                      </a:endParaRPr>
                     </a:p>
                   </a:txBody>
                   <a:tcPr marL="3839" marR="3839" marT="3839" marB="0" anchor="ctr"/>
@@ -19898,7 +18297,7 @@
                     <a:p>
                       <a:pPr algn="l" fontAlgn="ctr"/>
                       <a:r>
-                        <a:rPr lang="zh-CN" altLang="en-US" sz="1200" b="0" i="0" u="none" strike="noStrike" dirty="0" smtClean="0">
+                        <a:rPr lang="zh-CN" altLang="en-US" sz="1200" b="0" i="0" u="none" strike="noStrike" dirty="0">
                           <a:solidFill>
                             <a:srgbClr val="333333"/>
                           </a:solidFill>
@@ -19909,7 +18308,7 @@
                         <a:t>内关穴适配的情绪音乐需围绕养心安神、疏解心郁的核心目标。音调明亮而不躁、欢快而舒缓，与心包经 “通脉安神” 的功效共振。播放徵调式音乐，可强化 “疏通心包经气机</a:t>
                       </a:r>
                       <a:r>
-                        <a:rPr lang="en-US" altLang="zh-CN" sz="1200" b="0" i="0" u="none" strike="noStrike" dirty="0" smtClean="0">
+                        <a:rPr lang="en-US" altLang="zh-CN" sz="1200" b="0" i="0" u="none" strike="noStrike" dirty="0">
                           <a:solidFill>
                             <a:srgbClr val="333333"/>
                           </a:solidFill>
@@ -19920,7 +18319,7 @@
                         <a:t>+</a:t>
                       </a:r>
                       <a:r>
-                        <a:rPr lang="zh-CN" altLang="en-US" sz="1200" b="0" i="0" u="none" strike="noStrike" dirty="0" smtClean="0">
+                        <a:rPr lang="zh-CN" altLang="en-US" sz="1200" b="0" i="0" u="none" strike="noStrike" dirty="0">
                           <a:solidFill>
                             <a:srgbClr val="333333"/>
                           </a:solidFill>
@@ -19930,14 +18329,6 @@
                         </a:rPr>
                         <a:t>平复心神” 的双重效果。</a:t>
                       </a:r>
-                      <a:endParaRPr lang="zh-CN" altLang="en-US" sz="1200" b="0" i="0" u="none" strike="noStrike" dirty="0">
-                        <a:solidFill>
-                          <a:srgbClr val="333333"/>
-                        </a:solidFill>
-                        <a:effectLst/>
-                        <a:latin typeface="+mn-ea"/>
-                        <a:ea typeface="+mn-ea"/>
-                      </a:endParaRPr>
                     </a:p>
                   </a:txBody>
                   <a:tcPr marL="3839" marR="3839" marT="3839" marB="0" anchor="ctr"/>
@@ -19987,39 +18378,7 @@
                           <a:latin typeface="+mn-ea"/>
                           <a:ea typeface="+mn-ea"/>
                         </a:rPr>
-                        <a:t>此穴位核心缓解焦虑与烦躁情绪。中医中角调对应肝脏，可疏肝理气、缓解情绪紧绷</a:t>
-                      </a:r>
-                      <a:r>
-                        <a:rPr lang="zh-CN" altLang="en-US" sz="1200" u="none" strike="noStrike" dirty="0" smtClean="0">
-                          <a:effectLst/>
-                          <a:latin typeface="+mn-ea"/>
-                          <a:ea typeface="+mn-ea"/>
-                        </a:rPr>
-                        <a:t>，角</a:t>
-                      </a:r>
-                      <a:r>
-                        <a:rPr lang="zh-CN" altLang="en-US" sz="1200" u="none" strike="noStrike" dirty="0">
-                          <a:effectLst/>
-                          <a:latin typeface="+mn-ea"/>
-                          <a:ea typeface="+mn-ea"/>
-                        </a:rPr>
-                        <a:t>调式</a:t>
-                      </a:r>
-                      <a:r>
-                        <a:rPr lang="zh-CN" altLang="en-US" sz="1200" u="none" strike="noStrike" dirty="0" smtClean="0">
-                          <a:effectLst/>
-                          <a:latin typeface="+mn-ea"/>
-                          <a:ea typeface="+mn-ea"/>
-                        </a:rPr>
-                        <a:t>音乐能</a:t>
-                      </a:r>
-                      <a:r>
-                        <a:rPr lang="zh-CN" altLang="en-US" sz="1200" u="none" strike="noStrike" dirty="0">
-                          <a:effectLst/>
-                          <a:latin typeface="+mn-ea"/>
-                          <a:ea typeface="+mn-ea"/>
-                        </a:rPr>
-                        <a:t>契合该穴位舒缓焦虑、平复烦躁的需求。</a:t>
+                        <a:t>此穴位核心缓解焦虑与烦躁情绪。中医中角调对应肝脏，可疏肝理气、缓解情绪紧绷，角调式音乐能契合该穴位舒缓焦虑、平复烦躁的需求。</a:t>
                       </a:r>
                       <a:endParaRPr lang="zh-CN" altLang="en-US" sz="1200" b="0" i="0" u="none" strike="noStrike" dirty="0">
                         <a:solidFill>
@@ -20078,39 +18437,7 @@
                           <a:latin typeface="+mn-ea"/>
                           <a:ea typeface="+mn-ea"/>
                         </a:rPr>
-                        <a:t>该穴位主打缓解紧张情绪</a:t>
-                      </a:r>
-                      <a:r>
-                        <a:rPr lang="zh-CN" altLang="en-US" sz="1200" u="none" strike="noStrike" dirty="0" smtClean="0">
-                          <a:effectLst/>
-                          <a:latin typeface="+mn-ea"/>
-                          <a:ea typeface="+mn-ea"/>
-                        </a:rPr>
-                        <a:t>。主题</a:t>
-                      </a:r>
-                      <a:r>
-                        <a:rPr lang="zh-CN" altLang="en-US" sz="1200" u="none" strike="noStrike" dirty="0">
-                          <a:effectLst/>
-                          <a:latin typeface="+mn-ea"/>
-                          <a:ea typeface="+mn-ea"/>
-                        </a:rPr>
-                        <a:t>音乐多为轻柔器乐，能避免刺激眼部感官，适配眼尾穴位的敏感特性；商调式对应肺，节奏明快清越</a:t>
-                      </a:r>
-                      <a:r>
-                        <a:rPr lang="zh-CN" altLang="en-US" sz="1200" u="none" strike="noStrike" dirty="0" smtClean="0">
-                          <a:effectLst/>
-                          <a:latin typeface="+mn-ea"/>
-                          <a:ea typeface="+mn-ea"/>
-                        </a:rPr>
-                        <a:t>，可</a:t>
-                      </a:r>
-                      <a:r>
-                        <a:rPr lang="zh-CN" altLang="en-US" sz="1200" u="none" strike="noStrike" dirty="0">
-                          <a:effectLst/>
-                          <a:latin typeface="+mn-ea"/>
-                          <a:ea typeface="+mn-ea"/>
-                        </a:rPr>
-                        <a:t>辅助调节神经，配合敲击缓解紧张，同时弱化眼部周围的不适感。</a:t>
+                        <a:t>该穴位主打缓解紧张情绪。主题音乐多为轻柔器乐，能避免刺激眼部感官，适配眼尾穴位的敏感特性；商调式对应肺，节奏明快清越，可辅助调节神经，配合敲击缓解紧张，同时弱化眼部周围的不适感。</a:t>
                       </a:r>
                       <a:endParaRPr lang="zh-CN" altLang="en-US" sz="1200" b="0" i="0" u="none" strike="noStrike" dirty="0">
                         <a:solidFill>
@@ -20169,55 +18496,7 @@
                           <a:latin typeface="+mn-ea"/>
                           <a:ea typeface="+mn-ea"/>
                         </a:rPr>
-                        <a:t>该穴位常用来缓解悲伤与忧郁。徵音对应心脏，能养心安神</a:t>
-                      </a:r>
-                      <a:r>
-                        <a:rPr lang="zh-CN" altLang="en-US" sz="1200" u="none" strike="noStrike" dirty="0" smtClean="0">
-                          <a:effectLst/>
-                          <a:latin typeface="+mn-ea"/>
-                          <a:ea typeface="+mn-ea"/>
-                        </a:rPr>
-                        <a:t>，经典</a:t>
-                      </a:r>
-                      <a:r>
-                        <a:rPr lang="zh-CN" altLang="en-US" sz="1200" u="none" strike="noStrike" dirty="0">
-                          <a:effectLst/>
-                          <a:latin typeface="+mn-ea"/>
-                          <a:ea typeface="+mn-ea"/>
-                        </a:rPr>
-                        <a:t>徵调</a:t>
-                      </a:r>
-                      <a:r>
-                        <a:rPr lang="zh-CN" altLang="en-US" sz="1200" u="none" strike="noStrike" dirty="0" smtClean="0">
-                          <a:effectLst/>
-                          <a:latin typeface="+mn-ea"/>
-                          <a:ea typeface="+mn-ea"/>
-                        </a:rPr>
-                        <a:t>曲可</a:t>
-                      </a:r>
-                      <a:r>
-                        <a:rPr lang="zh-CN" altLang="en-US" sz="1200" u="none" strike="noStrike" dirty="0">
-                          <a:effectLst/>
-                          <a:latin typeface="+mn-ea"/>
-                          <a:ea typeface="+mn-ea"/>
-                        </a:rPr>
-                        <a:t>辅助疏导悲伤情绪，契合穴位的情绪功能</a:t>
-                      </a:r>
-                      <a:r>
-                        <a:rPr lang="zh-CN" altLang="en-US" sz="1200" u="none" strike="noStrike" dirty="0" smtClean="0">
-                          <a:effectLst/>
-                          <a:latin typeface="+mn-ea"/>
-                          <a:ea typeface="+mn-ea"/>
-                        </a:rPr>
-                        <a:t>；轻柔</a:t>
-                      </a:r>
-                      <a:r>
-                        <a:rPr lang="zh-CN" altLang="en-US" sz="1200" u="none" strike="noStrike" dirty="0">
-                          <a:effectLst/>
-                          <a:latin typeface="+mn-ea"/>
-                          <a:ea typeface="+mn-ea"/>
-                        </a:rPr>
-                        <a:t>钢琴曲无突兀旋律，既能安抚情绪，也能搭配该穴位缓解眼部疲劳的躯体作用。</a:t>
+                        <a:t>该穴位常用来缓解悲伤与忧郁。徵音对应心脏，能养心安神，经典徵调曲可辅助疏导悲伤情绪，契合穴位的情绪功能；轻柔钢琴曲无突兀旋律，既能安抚情绪，也能搭配该穴位缓解眼部疲劳的躯体作用。</a:t>
                       </a:r>
                       <a:endParaRPr lang="zh-CN" altLang="en-US" sz="1200" b="0" i="0" u="none" strike="noStrike" dirty="0">
                         <a:solidFill>
@@ -20276,55 +18555,7 @@
                           <a:latin typeface="+mn-ea"/>
                           <a:ea typeface="+mn-ea"/>
                         </a:rPr>
-                        <a:t>人中穴多用于情绪激动时醒脑、调节呼吸</a:t>
-                      </a:r>
-                      <a:r>
-                        <a:rPr lang="zh-CN" altLang="en-US" sz="1200" u="none" strike="noStrike" dirty="0" smtClean="0">
-                          <a:effectLst/>
-                          <a:latin typeface="+mn-ea"/>
-                          <a:ea typeface="+mn-ea"/>
-                        </a:rPr>
-                        <a:t>。羽</a:t>
-                      </a:r>
-                      <a:r>
-                        <a:rPr lang="zh-CN" altLang="en-US" sz="1200" u="none" strike="noStrike" dirty="0">
-                          <a:effectLst/>
-                          <a:latin typeface="+mn-ea"/>
-                          <a:ea typeface="+mn-ea"/>
-                        </a:rPr>
-                        <a:t>调式</a:t>
-                      </a:r>
-                      <a:r>
-                        <a:rPr lang="zh-CN" altLang="en-US" sz="1200" u="none" strike="noStrike" dirty="0" smtClean="0">
-                          <a:effectLst/>
-                          <a:latin typeface="+mn-ea"/>
-                          <a:ea typeface="+mn-ea"/>
-                        </a:rPr>
-                        <a:t>音乐音色</a:t>
-                      </a:r>
-                      <a:r>
-                        <a:rPr lang="zh-CN" altLang="en-US" sz="1200" u="none" strike="noStrike" dirty="0">
-                          <a:effectLst/>
-                          <a:latin typeface="+mn-ea"/>
-                          <a:ea typeface="+mn-ea"/>
-                        </a:rPr>
-                        <a:t>低沉柔和，可引导呼吸平稳，缓解急促呼吸带来的窒息感；箫曲的悠远</a:t>
-                      </a:r>
-                      <a:r>
-                        <a:rPr lang="zh-CN" altLang="en-US" sz="1200" u="none" strike="noStrike" dirty="0" smtClean="0">
-                          <a:effectLst/>
-                          <a:latin typeface="+mn-ea"/>
-                          <a:ea typeface="+mn-ea"/>
-                        </a:rPr>
-                        <a:t>意境，</a:t>
-                      </a:r>
-                      <a:r>
-                        <a:rPr lang="zh-CN" altLang="en-US" sz="1200" u="none" strike="noStrike" dirty="0">
-                          <a:effectLst/>
-                          <a:latin typeface="+mn-ea"/>
-                          <a:ea typeface="+mn-ea"/>
-                        </a:rPr>
-                        <a:t>能让呼吸节奏与旋律同步，配合敲击帮助平复激动情绪。</a:t>
+                        <a:t>人中穴多用于情绪激动时醒脑、调节呼吸。羽调式音乐音色低沉柔和，可引导呼吸平稳，缓解急促呼吸带来的窒息感；箫曲的悠远意境，能让呼吸节奏与旋律同步，配合敲击帮助平复激动情绪。</a:t>
                       </a:r>
                       <a:endParaRPr lang="zh-CN" altLang="en-US" sz="1200" b="0" i="0" u="none" strike="noStrike" dirty="0">
                         <a:solidFill>
@@ -20383,55 +18614,7 @@
                           <a:latin typeface="+mn-ea"/>
                           <a:ea typeface="+mn-ea"/>
                         </a:rPr>
-                        <a:t>该穴位可化解情绪紧绷，缓解颞下颌关节压力。宫调对应脾脏，旋律浑厚庄重，能缓解思虑过度</a:t>
-                      </a:r>
-                      <a:r>
-                        <a:rPr lang="zh-CN" altLang="en-US" sz="1200" u="none" strike="noStrike" dirty="0" smtClean="0">
-                          <a:effectLst/>
-                          <a:latin typeface="+mn-ea"/>
-                          <a:ea typeface="+mn-ea"/>
-                        </a:rPr>
-                        <a:t>，宫调曲可</a:t>
-                      </a:r>
-                      <a:r>
-                        <a:rPr lang="zh-CN" altLang="en-US" sz="1200" u="none" strike="noStrike" dirty="0">
-                          <a:effectLst/>
-                          <a:latin typeface="+mn-ea"/>
-                          <a:ea typeface="+mn-ea"/>
-                        </a:rPr>
-                        <a:t>辅助放松面部肌肉，配合敲击减轻因情绪紧绷导致的下颌不适；</a:t>
-                      </a:r>
-                      <a:r>
-                        <a:rPr lang="zh-CN" altLang="en-US" sz="1200" u="none" strike="noStrike" dirty="0" smtClean="0">
-                          <a:effectLst/>
-                          <a:latin typeface="+mn-ea"/>
-                          <a:ea typeface="+mn-ea"/>
-                        </a:rPr>
-                        <a:t>同时音乐</a:t>
-                      </a:r>
-                      <a:r>
-                        <a:rPr lang="zh-CN" altLang="en-US" sz="1200" u="none" strike="noStrike" dirty="0">
-                          <a:effectLst/>
-                          <a:latin typeface="+mn-ea"/>
-                          <a:ea typeface="+mn-ea"/>
-                        </a:rPr>
-                        <a:t>节奏平稳，</a:t>
-                      </a:r>
-                      <a:r>
-                        <a:rPr lang="zh-CN" altLang="en-US" sz="1200" u="none" strike="noStrike" dirty="0" smtClean="0">
-                          <a:effectLst/>
-                          <a:latin typeface="+mn-ea"/>
-                          <a:ea typeface="+mn-ea"/>
-                        </a:rPr>
-                        <a:t>契合“</a:t>
-                      </a:r>
-                      <a:r>
-                        <a:rPr lang="zh-CN" altLang="en-US" sz="1200" u="none" strike="noStrike" dirty="0">
-                          <a:effectLst/>
-                          <a:latin typeface="+mn-ea"/>
-                          <a:ea typeface="+mn-ea"/>
-                        </a:rPr>
-                        <a:t>弱化身体不适感” 的音乐选择原则。</a:t>
+                        <a:t>该穴位可化解情绪紧绷，缓解颞下颌关节压力。宫调对应脾脏，旋律浑厚庄重，能缓解思虑过度，宫调曲可辅助放松面部肌肉，配合敲击减轻因情绪紧绷导致的下颌不适；同时音乐节奏平稳，契合“弱化身体不适感” 的音乐选择原则。</a:t>
                       </a:r>
                       <a:endParaRPr lang="zh-CN" altLang="en-US" sz="1200" b="0" i="0" u="none" strike="noStrike" dirty="0">
                         <a:solidFill>
@@ -20490,55 +18673,7 @@
                           <a:latin typeface="+mn-ea"/>
                           <a:ea typeface="+mn-ea"/>
                         </a:rPr>
-                        <a:t>此穴位可缓解胸闷气短，释放胸腔积压的情绪</a:t>
-                      </a:r>
-                      <a:r>
-                        <a:rPr lang="zh-CN" altLang="en-US" sz="1200" u="none" strike="noStrike" dirty="0" smtClean="0">
-                          <a:effectLst/>
-                          <a:latin typeface="+mn-ea"/>
-                          <a:ea typeface="+mn-ea"/>
-                        </a:rPr>
-                        <a:t>。徵</a:t>
-                      </a:r>
-                      <a:r>
-                        <a:rPr lang="zh-CN" altLang="en-US" sz="1200" u="none" strike="noStrike" dirty="0">
-                          <a:effectLst/>
-                          <a:latin typeface="+mn-ea"/>
-                          <a:ea typeface="+mn-ea"/>
-                        </a:rPr>
-                        <a:t>调式代表曲，热烈明亮，能养心安神，促进胸腔气血循环，适配该穴位疏导胸腔情绪的功能</a:t>
-                      </a:r>
-                      <a:r>
-                        <a:rPr lang="zh-CN" altLang="en-US" sz="1200" u="none" strike="noStrike" dirty="0" smtClean="0">
-                          <a:effectLst/>
-                          <a:latin typeface="+mn-ea"/>
-                          <a:ea typeface="+mn-ea"/>
-                        </a:rPr>
-                        <a:t>；轻快</a:t>
-                      </a:r>
-                      <a:r>
-                        <a:rPr lang="zh-CN" altLang="en-US" sz="1200" u="none" strike="noStrike" dirty="0">
-                          <a:effectLst/>
-                          <a:latin typeface="+mn-ea"/>
-                          <a:ea typeface="+mn-ea"/>
-                        </a:rPr>
-                        <a:t>民乐，搭配锁骨下方穴位敲击，</a:t>
-                      </a:r>
-                      <a:r>
-                        <a:rPr lang="zh-CN" altLang="en-US" sz="1200" u="none" strike="noStrike" dirty="0" smtClean="0">
-                          <a:effectLst/>
-                          <a:latin typeface="+mn-ea"/>
-                          <a:ea typeface="+mn-ea"/>
-                        </a:rPr>
-                        <a:t>帮助缓解</a:t>
-                      </a:r>
-                      <a:r>
-                        <a:rPr lang="zh-CN" altLang="en-US" sz="1200" u="none" strike="noStrike" dirty="0">
-                          <a:effectLst/>
-                          <a:latin typeface="+mn-ea"/>
-                          <a:ea typeface="+mn-ea"/>
-                        </a:rPr>
-                        <a:t>职场压力带来的胸闷，提升情绪释放效率。</a:t>
+                        <a:t>此穴位可缓解胸闷气短，释放胸腔积压的情绪。徵调式代表曲，热烈明亮，能养心安神，促进胸腔气血循环，适配该穴位疏导胸腔情绪的功能；轻快民乐，搭配锁骨下方穴位敲击，帮助缓解职场压力带来的胸闷，提升情绪释放效率。</a:t>
                       </a:r>
                       <a:endParaRPr lang="zh-CN" altLang="en-US" sz="1200" b="0" i="0" u="none" strike="noStrike" dirty="0">
                         <a:solidFill>
@@ -20597,39 +18732,7 @@
                           <a:latin typeface="+mn-ea"/>
                           <a:ea typeface="+mn-ea"/>
                         </a:rPr>
-                        <a:t>腋下大包穴可疏肝健脾，释放胸腔负面情绪。商调</a:t>
-                      </a:r>
-                      <a:r>
-                        <a:rPr lang="zh-CN" altLang="en-US" sz="1200" u="none" strike="noStrike" dirty="0" smtClean="0">
-                          <a:effectLst/>
-                          <a:latin typeface="+mn-ea"/>
-                          <a:ea typeface="+mn-ea"/>
-                        </a:rPr>
-                        <a:t>式高亢</a:t>
-                      </a:r>
-                      <a:r>
-                        <a:rPr lang="zh-CN" altLang="en-US" sz="1200" u="none" strike="noStrike" dirty="0">
-                          <a:effectLst/>
-                          <a:latin typeface="+mn-ea"/>
-                          <a:ea typeface="+mn-ea"/>
-                        </a:rPr>
-                        <a:t>清越，能辅助疏肝理气，配合敲击释放压抑的复杂情绪，契合穴位调节脏腑与情绪的双重作用；这类合奏乐的治愈力</a:t>
-                      </a:r>
-                      <a:r>
-                        <a:rPr lang="zh-CN" altLang="en-US" sz="1200" u="none" strike="noStrike" dirty="0" smtClean="0">
-                          <a:effectLst/>
-                          <a:latin typeface="+mn-ea"/>
-                          <a:ea typeface="+mn-ea"/>
-                        </a:rPr>
-                        <a:t>与 </a:t>
-                      </a:r>
-                      <a:r>
-                        <a:rPr lang="zh-CN" altLang="en-US" sz="1200" u="none" strike="noStrike" dirty="0">
-                          <a:effectLst/>
-                          <a:latin typeface="+mn-ea"/>
-                          <a:ea typeface="+mn-ea"/>
-                        </a:rPr>
-                        <a:t>“音乐强化穴位情绪联动” 理念相符，可帮助卸掉猜忌等负面情绪。</a:t>
+                        <a:t>腋下大包穴可疏肝健脾，释放胸腔负面情绪。商调式高亢清越，能辅助疏肝理气，配合敲击释放压抑的复杂情绪，契合穴位调节脏腑与情绪的双重作用；这类合奏乐的治愈力与 “音乐强化穴位情绪联动” 理念相符，可帮助卸掉猜忌等负面情绪。</a:t>
                       </a:r>
                       <a:endParaRPr lang="zh-CN" altLang="en-US" sz="1200" b="0" i="0" u="none" strike="noStrike" dirty="0">
                         <a:solidFill>
@@ -20688,55 +18791,7 @@
                           <a:latin typeface="+mn-ea"/>
                           <a:ea typeface="+mn-ea"/>
                         </a:rPr>
-                        <a:t>百会穴负责平衡整体情绪，释放恐惧，调节大脑功能</a:t>
-                      </a:r>
-                      <a:r>
-                        <a:rPr lang="zh-CN" altLang="en-US" sz="1200" u="none" strike="noStrike" dirty="0" smtClean="0">
-                          <a:effectLst/>
-                          <a:latin typeface="+mn-ea"/>
-                          <a:ea typeface="+mn-ea"/>
-                        </a:rPr>
-                        <a:t>。选用</a:t>
-                      </a:r>
-                      <a:r>
-                        <a:rPr lang="zh-CN" altLang="en-US" sz="1200" u="none" strike="noStrike" dirty="0">
-                          <a:effectLst/>
-                          <a:latin typeface="+mn-ea"/>
-                          <a:ea typeface="+mn-ea"/>
-                        </a:rPr>
-                        <a:t>空灵意境的音乐搭配这类核心调节穴位，这类音乐能引导身心能量流通</a:t>
-                      </a:r>
-                      <a:r>
-                        <a:rPr lang="zh-CN" altLang="en-US" sz="1200" u="none" strike="noStrike" dirty="0" smtClean="0">
-                          <a:effectLst/>
-                          <a:latin typeface="+mn-ea"/>
-                          <a:ea typeface="+mn-ea"/>
-                        </a:rPr>
-                        <a:t>；羽</a:t>
-                      </a:r>
-                      <a:r>
-                        <a:rPr lang="zh-CN" altLang="en-US" sz="1200" u="none" strike="noStrike" dirty="0">
-                          <a:effectLst/>
-                          <a:latin typeface="+mn-ea"/>
-                          <a:ea typeface="+mn-ea"/>
-                        </a:rPr>
-                        <a:t>调</a:t>
-                      </a:r>
-                      <a:r>
-                        <a:rPr lang="zh-CN" altLang="en-US" sz="1200" u="none" strike="noStrike" dirty="0" smtClean="0">
-                          <a:effectLst/>
-                          <a:latin typeface="+mn-ea"/>
-                          <a:ea typeface="+mn-ea"/>
-                        </a:rPr>
-                        <a:t>曲可</a:t>
-                      </a:r>
-                      <a:r>
-                        <a:rPr lang="zh-CN" altLang="en-US" sz="1200" u="none" strike="noStrike" dirty="0">
-                          <a:effectLst/>
-                          <a:latin typeface="+mn-ea"/>
-                          <a:ea typeface="+mn-ea"/>
-                        </a:rPr>
-                        <a:t>补肾固精、缓解恐惧，与百会穴驱散强烈负面情绪、平衡身心的核心作用高度匹配。</a:t>
+                        <a:t>百会穴负责平衡整体情绪，释放恐惧，调节大脑功能。选用空灵意境的音乐搭配这类核心调节穴位，这类音乐能引导身心能量流通；羽调曲可补肾固精、缓解恐惧，与百会穴驱散强烈负面情绪、平衡身心的核心作用高度匹配。</a:t>
                       </a:r>
                       <a:endParaRPr lang="zh-CN" altLang="en-US" sz="1200" b="0" i="0" u="none" strike="noStrike" dirty="0">
                         <a:solidFill>
@@ -20770,13 +18825,6 @@
   <p:clrMapOvr>
     <a:masterClrMapping/>
   </p:clrMapOvr>
-  <p:timing>
-    <p:tnLst>
-      <p:par>
-        <p:cTn id="1" dur="indefinite" restart="never" nodeType="tmRoot"/>
-      </p:par>
-    </p:tnLst>
-  </p:timing>
 </p:sld>
 </file>
 
@@ -20835,29 +18883,16 @@
             </a:r>
             <a:r>
               <a:rPr lang="zh-CN" altLang="en-US" sz="4400" dirty="0"/>
-              <a:t>心理自助</a:t>
-            </a:r>
-            <a:r>
-              <a:rPr lang="zh-CN" altLang="en-US" sz="4400" dirty="0" smtClean="0"/>
-              <a:t>操的音乐</a:t>
-            </a:r>
-            <a:r>
-              <a:rPr lang="zh-CN" altLang="en-US" sz="4400" dirty="0" smtClean="0"/>
-              <a:t>选择</a:t>
-            </a:r>
-            <a:r>
-              <a:rPr lang="zh-CN" altLang="en-US" sz="4400" dirty="0" smtClean="0"/>
-              <a:t>（</a:t>
-            </a:r>
-            <a:r>
-              <a:rPr lang="en-US" altLang="zh-CN" sz="4400" dirty="0" smtClean="0"/>
+              <a:t>心理自助操的音乐选择（</a:t>
+            </a:r>
+            <a:r>
+              <a:rPr lang="en-US" altLang="zh-CN" sz="4400" dirty="0"/>
               <a:t>3</a:t>
             </a:r>
             <a:r>
-              <a:rPr lang="zh-CN" altLang="en-US" sz="4400" dirty="0" smtClean="0"/>
+              <a:rPr lang="zh-CN" altLang="en-US" sz="4400" dirty="0"/>
               <a:t>）</a:t>
             </a:r>
-            <a:endParaRPr lang="zh-CN" altLang="en-US" sz="4400" dirty="0"/>
           </a:p>
         </p:txBody>
       </p:sp>
@@ -21197,18 +19232,11 @@
                     <a:p>
                       <a:pPr algn="l" fontAlgn="ctr"/>
                       <a:r>
-                        <a:rPr lang="zh-CN" altLang="en-US" sz="1200" u="none" strike="noStrike" dirty="0" smtClean="0">
-                          <a:effectLst/>
-                          <a:latin typeface="+mn-lt"/>
-                        </a:rPr>
-                        <a:t>小</a:t>
-                      </a:r>
-                      <a:r>
                         <a:rPr lang="zh-CN" altLang="en-US" sz="1200" u="none" strike="noStrike" dirty="0">
                           <a:effectLst/>
                           <a:latin typeface="+mn-lt"/>
                         </a:rPr>
-                        <a:t>星星（编号 </a:t>
+                        <a:t>小星星（编号 </a:t>
                       </a:r>
                       <a:r>
                         <a:rPr lang="en-US" altLang="zh-CN" sz="1200" u="none" strike="noStrike" dirty="0">
@@ -21222,24 +19250,17 @@
                           <a:effectLst/>
                           <a:latin typeface="+mn-lt"/>
                         </a:rPr>
-                        <a:t>）</a:t>
+                        <a:t>）、竖琴梦幻节奏版（编号 </a:t>
                       </a:r>
                       <a:r>
-                        <a:rPr lang="zh-CN" altLang="en-US" sz="1200" u="none" strike="noStrike" dirty="0" smtClean="0">
-                          <a:effectLst/>
-                          <a:latin typeface="+mn-lt"/>
-                        </a:rPr>
-                        <a:t>、竖琴梦幻节奏版（编号 </a:t>
-                      </a:r>
-                      <a:r>
-                        <a:rPr lang="en-US" altLang="zh-CN" sz="1200" u="none" strike="noStrike" dirty="0" smtClean="0">
+                        <a:rPr lang="en-US" altLang="zh-CN" sz="1200" u="none" strike="noStrike" dirty="0">
                           <a:effectLst/>
                           <a:latin typeface="+mn-lt"/>
                         </a:rPr>
                         <a:t>03</a:t>
                       </a:r>
                       <a:r>
-                        <a:rPr lang="zh-CN" altLang="en-US" sz="1200" u="none" strike="noStrike" dirty="0" smtClean="0">
+                        <a:rPr lang="zh-CN" altLang="en-US" sz="1200" u="none" strike="noStrike" dirty="0">
                           <a:effectLst/>
                           <a:latin typeface="+mn-lt"/>
                         </a:rPr>
@@ -21895,13 +19916,6 @@
   <p:clrMapOvr>
     <a:masterClrMapping/>
   </p:clrMapOvr>
-  <p:timing>
-    <p:tnLst>
-      <p:par>
-        <p:cTn id="1" dur="indefinite" restart="never" nodeType="tmRoot"/>
-      </p:par>
-    </p:tnLst>
-  </p:timing>
 </p:sld>
 </file>
 
@@ -21960,29 +19974,16 @@
             </a:r>
             <a:r>
               <a:rPr lang="zh-CN" altLang="en-US" sz="4400" dirty="0"/>
-              <a:t>心理自助</a:t>
-            </a:r>
-            <a:r>
-              <a:rPr lang="zh-CN" altLang="en-US" sz="4400" dirty="0" smtClean="0"/>
-              <a:t>操的音乐</a:t>
-            </a:r>
-            <a:r>
-              <a:rPr lang="zh-CN" altLang="en-US" sz="4400" dirty="0" smtClean="0"/>
-              <a:t>选择</a:t>
-            </a:r>
-            <a:r>
-              <a:rPr lang="zh-CN" altLang="en-US" sz="4400" dirty="0" smtClean="0"/>
-              <a:t>（</a:t>
-            </a:r>
-            <a:r>
-              <a:rPr lang="en-US" altLang="zh-CN" sz="4400" dirty="0" smtClean="0"/>
+              <a:t>心理自助操的音乐选择（</a:t>
+            </a:r>
+            <a:r>
+              <a:rPr lang="en-US" altLang="zh-CN" sz="4400" dirty="0"/>
               <a:t>4</a:t>
             </a:r>
             <a:r>
-              <a:rPr lang="zh-CN" altLang="en-US" sz="4400" dirty="0" smtClean="0"/>
+              <a:rPr lang="zh-CN" altLang="en-US" sz="4400" dirty="0"/>
               <a:t>）</a:t>
             </a:r>
-            <a:endParaRPr lang="zh-CN" altLang="en-US" sz="4400" dirty="0"/>
           </a:p>
         </p:txBody>
       </p:sp>
@@ -23027,13 +21028,6 @@
   <p:clrMapOvr>
     <a:masterClrMapping/>
   </p:clrMapOvr>
-  <p:timing>
-    <p:tnLst>
-      <p:par>
-        <p:cTn id="1" dur="indefinite" restart="never" nodeType="tmRoot"/>
-      </p:par>
-    </p:tnLst>
-  </p:timing>
 </p:sld>
 </file>
 
@@ -23122,37 +21116,16 @@
             </a:r>
             <a:r>
               <a:rPr lang="zh-CN" altLang="en-US" sz="4400" dirty="0"/>
-              <a:t>心理自助</a:t>
-            </a:r>
-            <a:r>
-              <a:rPr lang="zh-CN" altLang="en-US" sz="4400" dirty="0" smtClean="0"/>
-              <a:t>操</a:t>
+              <a:t>心理自助操的关键技巧（</a:t>
+            </a:r>
+            <a:r>
+              <a:rPr lang="en-US" altLang="zh-CN" sz="4400" dirty="0"/>
+              <a:t>1</a:t>
             </a:r>
             <a:r>
               <a:rPr lang="zh-CN" altLang="en-US" sz="4400" dirty="0"/>
-              <a:t>的</a:t>
-            </a:r>
-            <a:r>
-              <a:rPr lang="zh-CN" altLang="en-US" sz="4400" dirty="0" smtClean="0"/>
-              <a:t>关键</a:t>
-            </a:r>
-            <a:r>
-              <a:rPr lang="zh-CN" altLang="en-US" sz="4400" dirty="0" smtClean="0"/>
-              <a:t>技巧</a:t>
-            </a:r>
-            <a:r>
-              <a:rPr lang="zh-CN" altLang="en-US" sz="4400" dirty="0" smtClean="0"/>
-              <a:t>（</a:t>
-            </a:r>
-            <a:r>
-              <a:rPr lang="en-US" altLang="zh-CN" sz="4400" dirty="0" smtClean="0"/>
-              <a:t>1</a:t>
-            </a:r>
-            <a:r>
-              <a:rPr lang="zh-CN" altLang="en-US" sz="4400" dirty="0" smtClean="0"/>
               <a:t>）</a:t>
             </a:r>
-            <a:endParaRPr lang="zh-CN" altLang="en-US" sz="4400" dirty="0"/>
           </a:p>
         </p:txBody>
       </p:sp>
@@ -23189,12 +21162,12 @@
               <a:buNone/>
             </a:pPr>
             <a:r>
-              <a:rPr lang="zh-CN" altLang="en-US" sz="1400" dirty="0" smtClean="0">
+              <a:rPr lang="zh-CN" altLang="en-US" sz="1400" dirty="0">
                 <a:latin typeface="+mn-ea"/>
               </a:rPr>
               <a:t>第一步，心理调节目标的确定</a:t>
             </a:r>
-            <a:endParaRPr lang="en-US" altLang="zh-CN" sz="1400" dirty="0" smtClean="0">
+            <a:endParaRPr lang="en-US" altLang="zh-CN" sz="1400" dirty="0">
               <a:latin typeface="+mn-ea"/>
             </a:endParaRPr>
           </a:p>
@@ -23206,12 +21179,12 @@
               <a:buNone/>
             </a:pPr>
             <a:r>
-              <a:rPr lang="zh-CN" altLang="en-US" sz="1400" dirty="0" smtClean="0">
+              <a:rPr lang="zh-CN" altLang="en-US" sz="1400" dirty="0">
                 <a:latin typeface="+mn-ea"/>
               </a:rPr>
               <a:t>首先要确定我们要调节什么样的负面心理，是一个痛苦的回忆，一个心结，还是抑郁症、焦虑、强迫等等。</a:t>
             </a:r>
-            <a:endParaRPr lang="en-US" altLang="zh-CN" sz="1400" dirty="0" smtClean="0">
+            <a:endParaRPr lang="en-US" altLang="zh-CN" sz="1400" dirty="0">
               <a:latin typeface="+mn-ea"/>
             </a:endParaRPr>
           </a:p>
@@ -23223,12 +21196,12 @@
               <a:buNone/>
             </a:pPr>
             <a:r>
-              <a:rPr lang="zh-CN" altLang="en-US" sz="1400" dirty="0" smtClean="0">
+              <a:rPr lang="zh-CN" altLang="en-US" sz="1400" dirty="0">
                 <a:latin typeface="+mn-ea"/>
               </a:rPr>
               <a:t>第二步，负面心理指数的确定</a:t>
             </a:r>
-            <a:endParaRPr lang="en-US" altLang="zh-CN" sz="1400" dirty="0" smtClean="0">
+            <a:endParaRPr lang="en-US" altLang="zh-CN" sz="1400" dirty="0">
               <a:latin typeface="+mn-ea"/>
             </a:endParaRPr>
           </a:p>
@@ -23240,12 +21213,12 @@
               <a:buNone/>
             </a:pPr>
             <a:r>
-              <a:rPr lang="zh-CN" altLang="en-US" sz="1400" dirty="0" smtClean="0">
+              <a:rPr lang="zh-CN" altLang="en-US" sz="1400" dirty="0">
                 <a:latin typeface="+mn-ea"/>
               </a:rPr>
               <a:t>这样可以在调节完成后对心理状态进行比较，看看效果如何。</a:t>
             </a:r>
-            <a:endParaRPr lang="en-US" altLang="zh-CN" sz="1400" dirty="0" smtClean="0">
+            <a:endParaRPr lang="en-US" altLang="zh-CN" sz="1400" dirty="0">
               <a:latin typeface="+mn-ea"/>
             </a:endParaRPr>
           </a:p>
@@ -23257,12 +21230,12 @@
               <a:buNone/>
             </a:pPr>
             <a:r>
-              <a:rPr lang="zh-CN" altLang="en-US" sz="1400" dirty="0" smtClean="0">
+              <a:rPr lang="zh-CN" altLang="en-US" sz="1400" dirty="0">
                 <a:latin typeface="+mn-ea"/>
               </a:rPr>
               <a:t>第三步，组织提示语</a:t>
             </a:r>
-            <a:endParaRPr lang="en-US" altLang="zh-CN" sz="1400" dirty="0" smtClean="0">
+            <a:endParaRPr lang="en-US" altLang="zh-CN" sz="1400" dirty="0">
               <a:latin typeface="+mn-ea"/>
             </a:endParaRPr>
           </a:p>
@@ -23274,12 +21247,12 @@
               <a:buNone/>
             </a:pPr>
             <a:r>
-              <a:rPr lang="zh-CN" altLang="en-US" sz="1400" dirty="0" smtClean="0">
+              <a:rPr lang="zh-CN" altLang="en-US" sz="1400" dirty="0">
                 <a:latin typeface="+mn-ea"/>
               </a:rPr>
               <a:t>第四步，一边弹一边大声说出提示语</a:t>
             </a:r>
-            <a:endParaRPr lang="en-US" altLang="zh-CN" sz="1400" dirty="0" smtClean="0">
+            <a:endParaRPr lang="en-US" altLang="zh-CN" sz="1400" dirty="0">
               <a:latin typeface="+mn-ea"/>
             </a:endParaRPr>
           </a:p>
@@ -23291,12 +21264,12 @@
               <a:buNone/>
             </a:pPr>
             <a:r>
-              <a:rPr lang="zh-CN" altLang="en-US" sz="1400" dirty="0" smtClean="0">
+              <a:rPr lang="zh-CN" altLang="en-US" sz="1400" dirty="0">
                 <a:latin typeface="+mn-ea"/>
               </a:rPr>
               <a:t>第五步，深呼吸两次，吐出浊气</a:t>
             </a:r>
-            <a:endParaRPr lang="en-US" altLang="zh-CN" sz="1400" dirty="0" smtClean="0">
+            <a:endParaRPr lang="en-US" altLang="zh-CN" sz="1400" dirty="0">
               <a:latin typeface="+mn-ea"/>
             </a:endParaRPr>
           </a:p>
@@ -23308,12 +21281,12 @@
               <a:buNone/>
             </a:pPr>
             <a:r>
-              <a:rPr lang="zh-CN" altLang="en-US" sz="1400" dirty="0" smtClean="0">
+              <a:rPr lang="zh-CN" altLang="en-US" sz="1400" dirty="0">
                 <a:latin typeface="+mn-ea"/>
               </a:rPr>
               <a:t>第六步，评估第一次心理调节的效果</a:t>
             </a:r>
-            <a:endParaRPr lang="en-US" altLang="zh-CN" sz="1400" dirty="0" smtClean="0">
+            <a:endParaRPr lang="en-US" altLang="zh-CN" sz="1400" dirty="0">
               <a:latin typeface="+mn-ea"/>
             </a:endParaRPr>
           </a:p>
@@ -23325,12 +21298,12 @@
               <a:buNone/>
             </a:pPr>
             <a:r>
-              <a:rPr lang="zh-CN" altLang="en-US" sz="1400" dirty="0" smtClean="0">
+              <a:rPr lang="zh-CN" altLang="en-US" sz="1400" dirty="0">
                 <a:latin typeface="+mn-ea"/>
               </a:rPr>
               <a:t>第七步，调整提示语，进行第二次心理疏导</a:t>
             </a:r>
-            <a:endParaRPr lang="en-US" altLang="zh-CN" sz="1400" dirty="0" smtClean="0">
+            <a:endParaRPr lang="en-US" altLang="zh-CN" sz="1400" dirty="0">
               <a:latin typeface="+mn-ea"/>
             </a:endParaRPr>
           </a:p>
@@ -23342,12 +21315,12 @@
               <a:buNone/>
             </a:pPr>
             <a:r>
-              <a:rPr lang="zh-CN" altLang="en-US" sz="1400" dirty="0" smtClean="0">
+              <a:rPr lang="zh-CN" altLang="en-US" sz="1400" dirty="0">
                 <a:latin typeface="+mn-ea"/>
               </a:rPr>
               <a:t>第八步，评估第二次心理疏导的效果</a:t>
             </a:r>
-            <a:endParaRPr lang="en-US" altLang="zh-CN" sz="1400" dirty="0" smtClean="0">
+            <a:endParaRPr lang="en-US" altLang="zh-CN" sz="1400" dirty="0">
               <a:latin typeface="+mn-ea"/>
             </a:endParaRPr>
           </a:p>
@@ -23359,28 +21332,10 @@
               <a:buNone/>
             </a:pPr>
             <a:r>
-              <a:rPr lang="zh-CN" altLang="en-US" sz="1400" dirty="0" smtClean="0">
-                <a:latin typeface="+mn-ea"/>
-              </a:rPr>
-              <a:t>第九步</a:t>
-            </a:r>
-            <a:r>
               <a:rPr lang="zh-CN" altLang="en-US" sz="1400" dirty="0">
                 <a:latin typeface="+mn-ea"/>
               </a:rPr>
-              <a:t>，调整提示语，进行</a:t>
-            </a:r>
-            <a:r>
-              <a:rPr lang="zh-CN" altLang="en-US" sz="1400" dirty="0" smtClean="0">
-                <a:latin typeface="+mn-ea"/>
-              </a:rPr>
-              <a:t>第三次</a:t>
-            </a:r>
-            <a:r>
-              <a:rPr lang="zh-CN" altLang="en-US" sz="1400" dirty="0">
-                <a:latin typeface="+mn-ea"/>
-              </a:rPr>
-              <a:t>心理疏导</a:t>
+              <a:t>第九步，调整提示语，进行第三次心理疏导</a:t>
             </a:r>
             <a:endParaRPr lang="en-US" altLang="zh-CN" sz="1400" dirty="0">
               <a:latin typeface="+mn-ea"/>
@@ -23594,24 +21549,24 @@
               <a:buNone/>
             </a:pPr>
             <a:r>
-              <a:rPr lang="zh-CN" altLang="en-US" sz="1400" b="1" dirty="0" smtClean="0">
+              <a:rPr lang="zh-CN" altLang="en-US" sz="1400" b="1" dirty="0">
                 <a:latin typeface="+mn-ea"/>
               </a:rPr>
               <a:t>负责心理指数测量方法：我们用</a:t>
             </a:r>
             <a:r>
-              <a:rPr lang="en-US" altLang="zh-CN" sz="1400" b="1" dirty="0" smtClean="0">
+              <a:rPr lang="en-US" altLang="zh-CN" sz="1400" b="1" dirty="0">
                 <a:latin typeface="+mn-ea"/>
               </a:rPr>
               <a:t>0~10</a:t>
             </a:r>
             <a:r>
-              <a:rPr lang="zh-CN" altLang="en-US" sz="1400" b="1" dirty="0" smtClean="0">
+              <a:rPr lang="zh-CN" altLang="en-US" sz="1400" b="1" dirty="0">
                 <a:latin typeface="+mn-ea"/>
               </a:rPr>
               <a:t>来表示负面心理指数。</a:t>
             </a:r>
-            <a:endParaRPr lang="en-US" altLang="zh-CN" sz="1400" b="1" dirty="0" smtClean="0">
+            <a:endParaRPr lang="en-US" altLang="zh-CN" sz="1400" b="1" dirty="0">
               <a:latin typeface="+mn-ea"/>
             </a:endParaRPr>
           </a:p>
@@ -23624,18 +21579,18 @@
               <a:buNone/>
             </a:pPr>
             <a:r>
-              <a:rPr lang="en-US" altLang="zh-CN" sz="1400" dirty="0" smtClean="0">
+              <a:rPr lang="en-US" altLang="zh-CN" sz="1400" dirty="0">
                 <a:latin typeface="+mn-ea"/>
               </a:rPr>
               <a:t>10 - </a:t>
             </a:r>
             <a:r>
-              <a:rPr lang="zh-CN" altLang="en-US" sz="1400" dirty="0" smtClean="0">
+              <a:rPr lang="zh-CN" altLang="en-US" sz="1400" dirty="0">
                 <a:latin typeface="+mn-ea"/>
               </a:rPr>
               <a:t>代表对事件的负面心理已经到了不可忍受的地步。</a:t>
             </a:r>
-            <a:endParaRPr lang="en-US" altLang="zh-CN" sz="1400" dirty="0" smtClean="0">
+            <a:endParaRPr lang="en-US" altLang="zh-CN" sz="1400" dirty="0">
               <a:latin typeface="+mn-ea"/>
             </a:endParaRPr>
           </a:p>
@@ -23650,21 +21605,15 @@
               <a:rPr lang="en-US" altLang="zh-CN" sz="1400" dirty="0">
                 <a:latin typeface="+mn-ea"/>
               </a:rPr>
-              <a:t>9 </a:t>
-            </a:r>
-            <a:r>
-              <a:rPr lang="en-US" altLang="zh-CN" sz="1400" dirty="0" smtClean="0">
-                <a:latin typeface="+mn-ea"/>
-              </a:rPr>
-              <a:t>- </a:t>
-            </a:r>
-            <a:r>
-              <a:rPr lang="zh-CN" altLang="en-US" sz="1400" dirty="0" smtClean="0">
+              <a:t>9 - </a:t>
+            </a:r>
+            <a:r>
+              <a:rPr lang="zh-CN" altLang="en-US" sz="1400" dirty="0">
                 <a:latin typeface="+mn-ea"/>
               </a:rPr>
               <a:t>负面情绪很高，感觉非常糟糕，情绪马上要失控。</a:t>
             </a:r>
-            <a:endParaRPr lang="en-US" altLang="zh-CN" sz="1400" dirty="0" smtClean="0">
+            <a:endParaRPr lang="en-US" altLang="zh-CN" sz="1400" dirty="0">
               <a:latin typeface="+mn-ea"/>
             </a:endParaRPr>
           </a:p>
@@ -23679,21 +21628,15 @@
               <a:rPr lang="en-US" altLang="zh-CN" sz="1400" dirty="0">
                 <a:latin typeface="+mn-ea"/>
               </a:rPr>
-              <a:t>8 </a:t>
-            </a:r>
-            <a:r>
-              <a:rPr lang="en-US" altLang="zh-CN" sz="1400" dirty="0" smtClean="0">
-                <a:latin typeface="+mn-ea"/>
-              </a:rPr>
-              <a:t>- </a:t>
-            </a:r>
-            <a:r>
-              <a:rPr lang="zh-CN" altLang="en-US" sz="1400" dirty="0" smtClean="0">
+              <a:t>8 - </a:t>
+            </a:r>
+            <a:r>
+              <a:rPr lang="zh-CN" altLang="en-US" sz="1400" dirty="0">
                 <a:latin typeface="+mn-ea"/>
               </a:rPr>
               <a:t>感到糟糕，虽然还可以控制一下情绪，但一不小心会失控。</a:t>
             </a:r>
-            <a:endParaRPr lang="en-US" altLang="zh-CN" sz="1400" dirty="0" smtClean="0">
+            <a:endParaRPr lang="en-US" altLang="zh-CN" sz="1400" dirty="0">
               <a:latin typeface="+mn-ea"/>
             </a:endParaRPr>
           </a:p>
@@ -23706,18 +21649,18 @@
               <a:buNone/>
             </a:pPr>
             <a:r>
-              <a:rPr lang="en-US" altLang="zh-CN" sz="1400" dirty="0" smtClean="0">
+              <a:rPr lang="en-US" altLang="zh-CN" sz="1400" dirty="0">
                 <a:latin typeface="+mn-ea"/>
               </a:rPr>
               <a:t>7 - </a:t>
             </a:r>
             <a:r>
-              <a:rPr lang="zh-CN" altLang="en-US" sz="1400" dirty="0" smtClean="0">
+              <a:rPr lang="zh-CN" altLang="en-US" sz="1400" dirty="0">
                 <a:latin typeface="+mn-ea"/>
               </a:rPr>
               <a:t>情绪开始要崩溃，在很糟糕的情绪边缘，但还可以努力控制。</a:t>
             </a:r>
-            <a:endParaRPr lang="en-US" altLang="zh-CN" sz="1400" dirty="0" smtClean="0">
+            <a:endParaRPr lang="en-US" altLang="zh-CN" sz="1400" dirty="0">
               <a:latin typeface="+mn-ea"/>
             </a:endParaRPr>
           </a:p>
@@ -23730,18 +21673,18 @@
               <a:buNone/>
             </a:pPr>
             <a:r>
-              <a:rPr lang="en-US" altLang="zh-CN" sz="1400" dirty="0" smtClean="0">
+              <a:rPr lang="en-US" altLang="zh-CN" sz="1400" dirty="0">
                 <a:latin typeface="+mn-ea"/>
               </a:rPr>
               <a:t>6 - </a:t>
             </a:r>
             <a:r>
-              <a:rPr lang="zh-CN" altLang="en-US" sz="1400" dirty="0" smtClean="0">
+              <a:rPr lang="zh-CN" altLang="en-US" sz="1400" dirty="0">
                 <a:latin typeface="+mn-ea"/>
               </a:rPr>
               <a:t>感到挺糟糕，意识到应该想办法去调节不良情绪。</a:t>
             </a:r>
-            <a:endParaRPr lang="en-US" altLang="zh-CN" sz="1400" dirty="0" smtClean="0">
+            <a:endParaRPr lang="en-US" altLang="zh-CN" sz="1400" dirty="0">
               <a:latin typeface="+mn-ea"/>
             </a:endParaRPr>
           </a:p>
@@ -23754,18 +21697,18 @@
               <a:buNone/>
             </a:pPr>
             <a:r>
-              <a:rPr lang="en-US" altLang="zh-CN" sz="1400" dirty="0" smtClean="0">
+              <a:rPr lang="en-US" altLang="zh-CN" sz="1400" dirty="0">
                 <a:latin typeface="+mn-ea"/>
               </a:rPr>
               <a:t>5 - </a:t>
             </a:r>
             <a:r>
-              <a:rPr lang="zh-CN" altLang="en-US" sz="1400" dirty="0" smtClean="0">
+              <a:rPr lang="zh-CN" altLang="en-US" sz="1400" dirty="0">
                 <a:latin typeface="+mn-ea"/>
               </a:rPr>
               <a:t>有一些心理不舒服，但努力一下是可以控制的</a:t>
             </a:r>
-            <a:endParaRPr lang="en-US" altLang="zh-CN" sz="1400" dirty="0" smtClean="0">
+            <a:endParaRPr lang="en-US" altLang="zh-CN" sz="1400" dirty="0">
               <a:latin typeface="+mn-ea"/>
             </a:endParaRPr>
           </a:p>
@@ -23778,18 +21721,18 @@
               <a:buNone/>
             </a:pPr>
             <a:r>
-              <a:rPr lang="en-US" altLang="zh-CN" sz="1400" dirty="0" smtClean="0">
+              <a:rPr lang="en-US" altLang="zh-CN" sz="1400" dirty="0">
                 <a:latin typeface="+mn-ea"/>
               </a:rPr>
               <a:t>4 - </a:t>
             </a:r>
             <a:r>
-              <a:rPr lang="zh-CN" altLang="en-US" sz="1400" dirty="0" smtClean="0">
+              <a:rPr lang="zh-CN" altLang="en-US" sz="1400" dirty="0">
                 <a:latin typeface="+mn-ea"/>
               </a:rPr>
               <a:t>有一些不痛快，无法回避感受，但能控制情绪。</a:t>
             </a:r>
-            <a:endParaRPr lang="en-US" altLang="zh-CN" sz="1400" dirty="0" smtClean="0">
+            <a:endParaRPr lang="en-US" altLang="zh-CN" sz="1400" dirty="0">
               <a:latin typeface="+mn-ea"/>
             </a:endParaRPr>
           </a:p>
@@ -23802,18 +21745,18 @@
               <a:buNone/>
             </a:pPr>
             <a:r>
-              <a:rPr lang="en-US" altLang="zh-CN" sz="1400" dirty="0" smtClean="0">
+              <a:rPr lang="en-US" altLang="zh-CN" sz="1400" dirty="0">
                 <a:latin typeface="+mn-ea"/>
               </a:rPr>
               <a:t>3 - </a:t>
             </a:r>
             <a:r>
-              <a:rPr lang="zh-CN" altLang="en-US" sz="1400" dirty="0" smtClean="0">
+              <a:rPr lang="zh-CN" altLang="en-US" sz="1400" dirty="0">
                 <a:latin typeface="+mn-ea"/>
               </a:rPr>
               <a:t>有点不舒服，并注意到了这样的感受。</a:t>
             </a:r>
-            <a:endParaRPr lang="en-US" altLang="zh-CN" sz="1400" dirty="0" smtClean="0">
+            <a:endParaRPr lang="en-US" altLang="zh-CN" sz="1400" dirty="0">
               <a:latin typeface="+mn-ea"/>
             </a:endParaRPr>
           </a:p>
@@ -23826,18 +21769,18 @@
               <a:buNone/>
             </a:pPr>
             <a:r>
-              <a:rPr lang="en-US" altLang="zh-CN" sz="1400" dirty="0" smtClean="0">
+              <a:rPr lang="en-US" altLang="zh-CN" sz="1400" dirty="0">
                 <a:latin typeface="+mn-ea"/>
               </a:rPr>
               <a:t>2 - </a:t>
             </a:r>
             <a:r>
-              <a:rPr lang="zh-CN" altLang="en-US" sz="1400" dirty="0" smtClean="0">
+              <a:rPr lang="zh-CN" altLang="en-US" sz="1400" dirty="0">
                 <a:latin typeface="+mn-ea"/>
               </a:rPr>
               <a:t>有点不舒服，平时不注意它不会打扰你，有时想到会有点困扰。</a:t>
             </a:r>
-            <a:endParaRPr lang="en-US" altLang="zh-CN" sz="1400" dirty="0" smtClean="0">
+            <a:endParaRPr lang="en-US" altLang="zh-CN" sz="1400" dirty="0">
               <a:latin typeface="+mn-ea"/>
             </a:endParaRPr>
           </a:p>
@@ -23850,18 +21793,18 @@
               <a:buNone/>
             </a:pPr>
             <a:r>
-              <a:rPr lang="en-US" altLang="zh-CN" sz="1400" dirty="0" smtClean="0">
+              <a:rPr lang="en-US" altLang="zh-CN" sz="1400" dirty="0">
                 <a:latin typeface="+mn-ea"/>
               </a:rPr>
               <a:t>1 - </a:t>
             </a:r>
             <a:r>
-              <a:rPr lang="zh-CN" altLang="en-US" sz="1400" dirty="0" smtClean="0">
+              <a:rPr lang="zh-CN" altLang="en-US" sz="1400" dirty="0">
                 <a:latin typeface="+mn-ea"/>
               </a:rPr>
               <a:t>基本上还好，如果很仔细想会有一丝不痛快。</a:t>
             </a:r>
-            <a:endParaRPr lang="en-US" altLang="zh-CN" sz="1400" dirty="0" smtClean="0">
+            <a:endParaRPr lang="en-US" altLang="zh-CN" sz="1400" dirty="0">
               <a:latin typeface="+mn-ea"/>
             </a:endParaRPr>
           </a:p>
@@ -23874,18 +21817,18 @@
               <a:buNone/>
             </a:pPr>
             <a:r>
-              <a:rPr lang="en-US" altLang="zh-CN" sz="1400" dirty="0" smtClean="0">
+              <a:rPr lang="en-US" altLang="zh-CN" sz="1400" dirty="0">
                 <a:latin typeface="+mn-ea"/>
               </a:rPr>
               <a:t>0 - </a:t>
             </a:r>
             <a:r>
-              <a:rPr lang="zh-CN" altLang="en-US" sz="1400" dirty="0" smtClean="0">
+              <a:rPr lang="zh-CN" altLang="en-US" sz="1400" dirty="0">
                 <a:latin typeface="+mn-ea"/>
               </a:rPr>
               <a:t>内心平静，完全解脱，没有不愉快的感觉。</a:t>
             </a:r>
-            <a:endParaRPr lang="en-US" altLang="zh-CN" sz="1400" dirty="0" smtClean="0">
+            <a:endParaRPr lang="en-US" altLang="zh-CN" sz="1400" dirty="0">
               <a:latin typeface="+mn-ea"/>
             </a:endParaRPr>
           </a:p>
@@ -23898,42 +21841,42 @@
               <a:buNone/>
             </a:pPr>
             <a:r>
-              <a:rPr lang="en-US" altLang="zh-CN" sz="1400" i="1" u="sng" dirty="0" smtClean="0">
+              <a:rPr lang="en-US" altLang="zh-CN" sz="1400" i="1" u="sng" dirty="0">
                 <a:latin typeface="+mn-ea"/>
               </a:rPr>
               <a:t>5~8</a:t>
             </a:r>
             <a:r>
-              <a:rPr lang="zh-CN" altLang="en-US" sz="1400" i="1" u="sng" dirty="0" smtClean="0">
+              <a:rPr lang="zh-CN" altLang="en-US" sz="1400" i="1" u="sng" dirty="0">
                 <a:latin typeface="+mn-ea"/>
               </a:rPr>
               <a:t>可以进行疏导，如果</a:t>
             </a:r>
             <a:r>
-              <a:rPr lang="en-US" altLang="zh-CN" sz="1400" i="1" u="sng" dirty="0" smtClean="0">
+              <a:rPr lang="en-US" altLang="zh-CN" sz="1400" i="1" u="sng" dirty="0">
                 <a:latin typeface="+mn-ea"/>
               </a:rPr>
               <a:t>5</a:t>
             </a:r>
             <a:r>
-              <a:rPr lang="zh-CN" altLang="en-US" sz="1400" i="1" u="sng" dirty="0" smtClean="0">
+              <a:rPr lang="zh-CN" altLang="en-US" sz="1400" i="1" u="sng" dirty="0">
                 <a:latin typeface="+mn-ea"/>
               </a:rPr>
               <a:t>以下甚至是</a:t>
             </a:r>
             <a:r>
-              <a:rPr lang="en-US" altLang="zh-CN" sz="1400" i="1" u="sng" dirty="0" smtClean="0">
+              <a:rPr lang="en-US" altLang="zh-CN" sz="1400" i="1" u="sng" dirty="0">
                 <a:latin typeface="+mn-ea"/>
               </a:rPr>
               <a:t>2~3</a:t>
             </a:r>
             <a:r>
-              <a:rPr lang="zh-CN" altLang="en-US" sz="1400" i="1" u="sng" dirty="0" smtClean="0">
+              <a:rPr lang="zh-CN" altLang="en-US" sz="1400" i="1" u="sng" dirty="0">
                 <a:latin typeface="+mn-ea"/>
               </a:rPr>
               <a:t>更低就没有必要疏导了。</a:t>
             </a:r>
-            <a:endParaRPr lang="en-US" altLang="zh-CN" sz="1400" i="1" u="sng" dirty="0" smtClean="0">
+            <a:endParaRPr lang="en-US" altLang="zh-CN" sz="1400" i="1" u="sng" dirty="0">
               <a:latin typeface="+mn-ea"/>
             </a:endParaRPr>
           </a:p>
@@ -23946,26 +21889,23 @@
               <a:buNone/>
             </a:pPr>
             <a:r>
-              <a:rPr lang="zh-CN" altLang="en-US" sz="1400" i="1" u="sng" dirty="0" smtClean="0">
+              <a:rPr lang="zh-CN" altLang="en-US" sz="1400" i="1" u="sng" dirty="0">
                 <a:latin typeface="+mn-ea"/>
               </a:rPr>
               <a:t>通过操作可以将指数降低到</a:t>
             </a:r>
             <a:r>
-              <a:rPr lang="en-US" altLang="zh-CN" sz="1400" i="1" u="sng" dirty="0" smtClean="0">
+              <a:rPr lang="en-US" altLang="zh-CN" sz="1400" i="1" u="sng" dirty="0">
                 <a:latin typeface="+mn-ea"/>
               </a:rPr>
               <a:t>0</a:t>
             </a:r>
             <a:r>
-              <a:rPr lang="zh-CN" altLang="en-US" sz="1400" i="1" u="sng" dirty="0" smtClean="0">
+              <a:rPr lang="zh-CN" altLang="en-US" sz="1400" i="1" u="sng" dirty="0">
                 <a:latin typeface="+mn-ea"/>
               </a:rPr>
               <a:t>。</a:t>
             </a:r>
-            <a:endParaRPr lang="zh-CN" altLang="en-US" sz="1400" i="1" u="sng" dirty="0">
-              <a:latin typeface="+mn-ea"/>
-            </a:endParaRPr>
           </a:p>
         </p:txBody>
       </p:sp>
@@ -24188,13 +22128,6 @@
   <p:clrMapOvr>
     <a:masterClrMapping/>
   </p:clrMapOvr>
-  <p:timing>
-    <p:tnLst>
-      <p:par>
-        <p:cTn id="1" dur="indefinite" restart="never" nodeType="tmRoot"/>
-      </p:par>
-    </p:tnLst>
-  </p:timing>
 </p:sld>
 </file>
 
@@ -24221,45 +22154,6 @@
           <a:chExt cx="0" cy="0"/>
         </a:xfrm>
       </p:grpSpPr>
-      <p:pic>
-        <p:nvPicPr>
-          <p:cNvPr id="8" name="图片 7">
-            <a:extLst>
-              <a:ext uri="{FF2B5EF4-FFF2-40B4-BE49-F238E27FC236}">
-                <a16:creationId xmlns:a16="http://schemas.microsoft.com/office/drawing/2014/main" id="{E3111418-7625-481B-A094-EB6CBFA2FE0E}"/>
-              </a:ext>
-            </a:extLst>
-          </p:cNvPr>
-          <p:cNvPicPr>
-            <a:picLocks noChangeAspect="1"/>
-          </p:cNvPicPr>
-          <p:nvPr/>
-        </p:nvPicPr>
-        <p:blipFill>
-          <a:blip r:embed="rId2" cstate="screen">
-            <a:extLst>
-              <a:ext uri="{28A0092B-C50C-407E-A947-70E740481C1C}">
-                <a14:useLocalDpi xmlns:a14="http://schemas.microsoft.com/office/drawing/2010/main"/>
-              </a:ext>
-            </a:extLst>
-          </a:blip>
-          <a:stretch>
-            <a:fillRect/>
-          </a:stretch>
-        </p:blipFill>
-        <p:spPr>
-          <a:xfrm>
-            <a:off x="8569979" y="5193013"/>
-            <a:ext cx="3411708" cy="1503426"/>
-          </a:xfrm>
-          <a:prstGeom prst="rect">
-            <a:avLst/>
-          </a:prstGeom>
-          <a:effectLst>
-            <a:softEdge rad="127000"/>
-          </a:effectLst>
-        </p:spPr>
-      </p:pic>
       <p:sp>
         <p:nvSpPr>
           <p:cNvPr id="2" name="标题 1">
@@ -24292,29 +22186,16 @@
             </a:r>
             <a:r>
               <a:rPr lang="zh-CN" altLang="en-US" sz="4400" dirty="0"/>
-              <a:t>心理自助</a:t>
-            </a:r>
-            <a:r>
-              <a:rPr lang="zh-CN" altLang="en-US" sz="4400" dirty="0" smtClean="0"/>
-              <a:t>操的关键</a:t>
+              <a:t>心理自助操的关键技巧（</a:t>
+            </a:r>
+            <a:r>
+              <a:rPr lang="en-US" altLang="zh-CN" sz="4400" dirty="0"/>
+              <a:t>2</a:t>
             </a:r>
             <a:r>
               <a:rPr lang="zh-CN" altLang="en-US" sz="4400" dirty="0"/>
-              <a:t>技巧</a:t>
-            </a:r>
-            <a:r>
-              <a:rPr lang="zh-CN" altLang="en-US" sz="4400" dirty="0" smtClean="0"/>
-              <a:t>（</a:t>
-            </a:r>
-            <a:r>
-              <a:rPr lang="en-US" altLang="zh-CN" sz="4400" dirty="0" smtClean="0"/>
-              <a:t>2</a:t>
-            </a:r>
-            <a:r>
-              <a:rPr lang="zh-CN" altLang="en-US" sz="4400" dirty="0" smtClean="0"/>
               <a:t>）</a:t>
             </a:r>
-            <a:endParaRPr lang="zh-CN" altLang="en-US" sz="4400" dirty="0"/>
           </a:p>
         </p:txBody>
       </p:sp>
@@ -24379,79 +22260,43 @@
               <a:rPr lang="zh-CN" altLang="en-US" sz="1400" dirty="0">
                 <a:latin typeface="+mn-ea"/>
               </a:rPr>
-              <a:t>比如 “眼侧穴”（瞳子髎附近），只要敲击在眼外侧眶骨</a:t>
-            </a:r>
-            <a:r>
-              <a:rPr lang="zh-CN" altLang="en-US" sz="1400" dirty="0" smtClean="0">
-                <a:latin typeface="+mn-ea"/>
-              </a:rPr>
-              <a:t>周围</a:t>
-            </a:r>
-            <a:r>
-              <a:rPr lang="en-US" altLang="zh-CN" sz="1400" dirty="0" smtClean="0">
+              <a:t>比如 “眼侧穴”（瞳子髎附近），只要敲击在眼外侧眶骨周围</a:t>
+            </a:r>
+            <a:r>
+              <a:rPr lang="en-US" altLang="zh-CN" sz="1400" dirty="0">
                 <a:latin typeface="+mn-ea"/>
               </a:rPr>
               <a:t>1</a:t>
             </a:r>
             <a:r>
-              <a:rPr lang="zh-CN" altLang="en-US" sz="1400" dirty="0" smtClean="0">
-                <a:latin typeface="+mn-ea"/>
-              </a:rPr>
-              <a:t>厘米</a:t>
-            </a:r>
-            <a:r>
               <a:rPr lang="zh-CN" altLang="en-US" sz="1400" dirty="0">
                 <a:latin typeface="+mn-ea"/>
               </a:rPr>
-              <a:t>范围内，就能触发对应的情绪能量疏导，无需严格卡在 “外</a:t>
-            </a:r>
-            <a:r>
-              <a:rPr lang="zh-CN" altLang="en-US" sz="1400" dirty="0" smtClean="0">
-                <a:latin typeface="+mn-ea"/>
-              </a:rPr>
-              <a:t>眼角</a:t>
-            </a:r>
-            <a:r>
-              <a:rPr lang="en-US" altLang="zh-CN" sz="1400" dirty="0" smtClean="0">
+              <a:t>厘米范围内，就能触发对应的情绪能量疏导，无需严格卡在 “外眼角</a:t>
+            </a:r>
+            <a:r>
+              <a:rPr lang="en-US" altLang="zh-CN" sz="1400" dirty="0">
                 <a:latin typeface="+mn-ea"/>
               </a:rPr>
               <a:t>0.5</a:t>
             </a:r>
             <a:r>
-              <a:rPr lang="zh-CN" altLang="en-US" sz="1400" dirty="0" smtClean="0">
-                <a:latin typeface="+mn-ea"/>
-              </a:rPr>
-              <a:t>厘米</a:t>
-            </a:r>
-            <a:r>
               <a:rPr lang="zh-CN" altLang="en-US" sz="1400" dirty="0">
                 <a:latin typeface="+mn-ea"/>
               </a:rPr>
-              <a:t>凹陷处”；再如 “锁骨下方穴”，只要敲击在锁骨与第一肋的交汇处附近（前后偏差不</a:t>
-            </a:r>
-            <a:r>
-              <a:rPr lang="zh-CN" altLang="en-US" sz="1400" dirty="0" smtClean="0">
-                <a:latin typeface="+mn-ea"/>
-              </a:rPr>
-              <a:t>超过</a:t>
-            </a:r>
-            <a:r>
-              <a:rPr lang="en-US" altLang="zh-CN" sz="1400" dirty="0" smtClean="0">
+              <a:t>厘米凹陷处”；再如 “锁骨下方穴”，只要敲击在锁骨与第一肋的交汇处附近（前后偏差不超过</a:t>
+            </a:r>
+            <a:r>
+              <a:rPr lang="en-US" altLang="zh-CN" sz="1400" dirty="0">
                 <a:latin typeface="+mn-ea"/>
               </a:rPr>
               <a:t>2</a:t>
             </a:r>
             <a:r>
-              <a:rPr lang="zh-CN" altLang="en-US" sz="1400" dirty="0" smtClean="0">
-                <a:latin typeface="+mn-ea"/>
-              </a:rPr>
-              <a:t>厘米</a:t>
-            </a:r>
-            <a:r>
               <a:rPr lang="zh-CN" altLang="en-US" sz="1400" dirty="0">
                 <a:latin typeface="+mn-ea"/>
               </a:rPr>
-              <a:t>），无论是否精准命中俞府穴，都能起到缓解胸闷的作用。</a:t>
+              <a:t>厘米），无论是否精准命中俞府穴，都能起到缓解胸闷的作用。</a:t>
             </a:r>
           </a:p>
           <a:p>
@@ -24468,61 +22313,37 @@
               <a:rPr lang="zh-CN" altLang="en-US" sz="1400" b="1" dirty="0">
                 <a:latin typeface="+mn-ea"/>
               </a:rPr>
-              <a:t>以 “感觉</a:t>
-            </a:r>
-            <a:r>
-              <a:rPr lang="zh-CN" altLang="en-US" sz="1400" b="1" dirty="0" smtClean="0">
-                <a:latin typeface="+mn-ea"/>
-              </a:rPr>
-              <a:t>舒适</a:t>
-            </a:r>
-            <a:r>
-              <a:rPr lang="en-US" altLang="zh-CN" sz="1400" b="1" dirty="0" smtClean="0">
+              <a:t>以 “感觉舒适</a:t>
+            </a:r>
+            <a:r>
+              <a:rPr lang="en-US" altLang="zh-CN" sz="1400" b="1" dirty="0">
                 <a:latin typeface="+mn-ea"/>
               </a:rPr>
               <a:t>+</a:t>
             </a:r>
             <a:r>
-              <a:rPr lang="zh-CN" altLang="en-US" sz="1400" b="1" dirty="0" smtClean="0">
-                <a:latin typeface="+mn-ea"/>
-              </a:rPr>
-              <a:t>有</a:t>
-            </a:r>
-            <a:r>
               <a:rPr lang="zh-CN" altLang="en-US" sz="1400" b="1" dirty="0">
                 <a:latin typeface="+mn-ea"/>
               </a:rPr>
-              <a:t>酸胀感” 为辅助判断：</a:t>
+              <a:t>有酸胀感” 为辅助判断：</a:t>
             </a:r>
             <a:r>
               <a:rPr lang="zh-CN" altLang="en-US" sz="1400" dirty="0">
                 <a:latin typeface="+mn-ea"/>
               </a:rPr>
-              <a:t>敲击时若能感受到轻微的酸胀、发麻，或单纯觉得 “这个位置敲击起来情绪更易流动”，即使位置略有偏差，也</a:t>
-            </a:r>
-            <a:r>
-              <a:rPr lang="zh-CN" altLang="en-US" sz="1400" dirty="0" smtClean="0">
-                <a:latin typeface="+mn-ea"/>
-              </a:rPr>
-              <a:t>符合</a:t>
-            </a:r>
-            <a:r>
-              <a:rPr lang="en-US" altLang="zh-CN" sz="1400" dirty="0" smtClean="0">
+              <a:t>敲击时若能感受到轻微的酸胀、发麻，或单纯觉得 “这个位置敲击起来情绪更易流动”，即使位置略有偏差，也符合</a:t>
+            </a:r>
+            <a:r>
+              <a:rPr lang="en-US" altLang="zh-CN" sz="1400" dirty="0">
                 <a:latin typeface="+mn-ea"/>
               </a:rPr>
               <a:t>EFT</a:t>
             </a:r>
             <a:r>
-              <a:rPr lang="zh-CN" altLang="en-US" sz="1400" dirty="0" smtClean="0">
-                <a:latin typeface="+mn-ea"/>
-              </a:rPr>
-              <a:t>的</a:t>
-            </a:r>
-            <a:r>
               <a:rPr lang="zh-CN" altLang="en-US" sz="1400" dirty="0">
                 <a:latin typeface="+mn-ea"/>
               </a:rPr>
-              <a:t>要求；反之，若敲击时感到疼痛、不适（如眼部周围用力过猛），则需调整位置，而非强行对准 “标准点”。</a:t>
+              <a:t>的要求；反之，若敲击时感到疼痛、不适（如眼部周围用力过猛），则需调整位置，而非强行对准 “标准点”。</a:t>
             </a:r>
           </a:p>
         </p:txBody>
@@ -24952,31 +22773,19 @@
               <a:rPr lang="zh-CN" altLang="en-US" sz="1400" dirty="0">
                 <a:latin typeface="+mn-ea"/>
               </a:rPr>
-              <a:t>比如 “眉头穴” 必须在眉头内侧区域（不能敲到额头中间），“腋下穴” 必须在腋窝</a:t>
-            </a:r>
-            <a:r>
-              <a:rPr lang="zh-CN" altLang="en-US" sz="1400" dirty="0" smtClean="0">
-                <a:latin typeface="+mn-ea"/>
-              </a:rPr>
-              <a:t>下方</a:t>
-            </a:r>
-            <a:r>
-              <a:rPr lang="en-US" altLang="zh-CN" sz="1400" dirty="0" smtClean="0">
+              <a:t>比如 “眉头穴” 必须在眉头内侧区域（不能敲到额头中间），“腋下穴” 必须在腋窝下方</a:t>
+            </a:r>
+            <a:r>
+              <a:rPr lang="en-US" altLang="zh-CN" sz="1400" dirty="0">
                 <a:latin typeface="+mn-ea"/>
               </a:rPr>
               <a:t>10</a:t>
             </a:r>
             <a:r>
-              <a:rPr lang="zh-CN" altLang="en-US" sz="1400" dirty="0" smtClean="0">
-                <a:latin typeface="+mn-ea"/>
-              </a:rPr>
-              <a:t>厘米</a:t>
-            </a:r>
-            <a:r>
               <a:rPr lang="zh-CN" altLang="en-US" sz="1400" dirty="0">
                 <a:latin typeface="+mn-ea"/>
               </a:rPr>
-              <a:t>左右（不能敲到上臂或胸口正中间）</a:t>
+              <a:t>厘米左右（不能敲到上臂或胸口正中间）</a:t>
             </a:r>
             <a:r>
               <a:rPr lang="en-US" altLang="zh-CN" sz="1400" dirty="0">
@@ -25009,31 +22818,19 @@
               <a:rPr lang="zh-CN" altLang="en-US" sz="1400" b="1" dirty="0">
                 <a:latin typeface="+mn-ea"/>
               </a:rPr>
-              <a:t>敏感部位需</a:t>
-            </a:r>
-            <a:r>
-              <a:rPr lang="zh-CN" altLang="en-US" sz="1400" b="1" dirty="0" smtClean="0">
-                <a:latin typeface="+mn-ea"/>
-              </a:rPr>
-              <a:t>轻柔</a:t>
-            </a:r>
-            <a:r>
-              <a:rPr lang="en-US" altLang="zh-CN" sz="1400" b="1" dirty="0" smtClean="0">
+              <a:t>敏感部位需轻柔</a:t>
+            </a:r>
+            <a:r>
+              <a:rPr lang="en-US" altLang="zh-CN" sz="1400" b="1" dirty="0">
                 <a:latin typeface="+mn-ea"/>
               </a:rPr>
               <a:t>+</a:t>
             </a:r>
             <a:r>
-              <a:rPr lang="zh-CN" altLang="en-US" sz="1400" b="1" dirty="0" smtClean="0">
-                <a:latin typeface="+mn-ea"/>
-              </a:rPr>
-              <a:t>避开</a:t>
-            </a:r>
-            <a:r>
               <a:rPr lang="zh-CN" altLang="en-US" sz="1400" b="1" dirty="0">
                 <a:latin typeface="+mn-ea"/>
               </a:rPr>
-              <a:t>创伤：</a:t>
+              <a:t>避开创伤：</a:t>
             </a:r>
             <a:r>
               <a:rPr lang="zh-CN" altLang="en-US" sz="1400" dirty="0">
@@ -25069,7 +22866,7 @@
               <a:t>基础 </a:t>
             </a:r>
             <a:r>
-              <a:rPr lang="en-US" altLang="zh-CN" sz="1400" dirty="0" smtClean="0">
+              <a:rPr lang="en-US" altLang="zh-CN" sz="1400" dirty="0">
                 <a:latin typeface="+mn-ea"/>
               </a:rPr>
               <a:t>9-13 </a:t>
@@ -25377,15 +23174,9 @@
               <a:rPr lang="zh-CN" altLang="en-US" sz="1400" dirty="0">
                 <a:latin typeface="+mn-ea"/>
               </a:rPr>
-              <a:t>① 不必纠结 “是否绝对精准”</a:t>
-            </a:r>
-            <a:r>
-              <a:rPr lang="zh-CN" altLang="en-US" sz="1400" dirty="0" smtClean="0">
-                <a:latin typeface="+mn-ea"/>
-              </a:rPr>
-              <a:t>，</a:t>
-            </a:r>
-            <a:endParaRPr lang="en-US" altLang="zh-CN" sz="1400" dirty="0" smtClean="0">
+              <a:t>① 不必纠结 “是否绝对精准”，</a:t>
+            </a:r>
+            <a:endParaRPr lang="en-US" altLang="zh-CN" sz="1400" dirty="0">
               <a:latin typeface="+mn-ea"/>
             </a:endParaRPr>
           </a:p>
@@ -25398,24 +23189,12 @@
               <a:buNone/>
             </a:pPr>
             <a:r>
-              <a:rPr lang="zh-CN" altLang="en-US" sz="1400" dirty="0" smtClean="0">
-                <a:latin typeface="+mn-ea"/>
-              </a:rPr>
-              <a:t>过度</a:t>
-            </a:r>
-            <a:r>
               <a:rPr lang="zh-CN" altLang="en-US" sz="1400" dirty="0">
                 <a:latin typeface="+mn-ea"/>
               </a:rPr>
-              <a:t>追求解剖学定位会忽视情绪感受，反而降低效果</a:t>
-            </a:r>
-            <a:r>
-              <a:rPr lang="zh-CN" altLang="en-US" sz="1400" dirty="0" smtClean="0">
-                <a:latin typeface="+mn-ea"/>
-              </a:rPr>
-              <a:t>；</a:t>
-            </a:r>
-            <a:endParaRPr lang="en-US" altLang="zh-CN" sz="1400" dirty="0" smtClean="0">
+              <a:t>过度追求解剖学定位会忽视情绪感受，反而降低效果；</a:t>
+            </a:r>
+            <a:endParaRPr lang="en-US" altLang="zh-CN" sz="1400" dirty="0">
               <a:latin typeface="+mn-ea"/>
             </a:endParaRPr>
           </a:p>
@@ -25428,24 +23207,12 @@
               <a:buNone/>
             </a:pPr>
             <a:r>
-              <a:rPr lang="zh-CN" altLang="en-US" sz="1400" dirty="0" smtClean="0">
-                <a:latin typeface="+mn-ea"/>
-              </a:rPr>
-              <a:t>② </a:t>
-            </a:r>
-            <a:r>
               <a:rPr lang="zh-CN" altLang="en-US" sz="1400" dirty="0">
                 <a:latin typeface="+mn-ea"/>
               </a:rPr>
-              <a:t>不可完全随意敲击（如把 “腋下穴” 敲到大腿上</a:t>
-            </a:r>
-            <a:r>
-              <a:rPr lang="zh-CN" altLang="en-US" sz="1400" dirty="0" smtClean="0">
-                <a:latin typeface="+mn-ea"/>
-              </a:rPr>
-              <a:t>），</a:t>
-            </a:r>
-            <a:endParaRPr lang="en-US" altLang="zh-CN" sz="1400" dirty="0" smtClean="0">
+              <a:t>② 不可完全随意敲击（如把 “腋下穴” 敲到大腿上），</a:t>
+            </a:r>
+            <a:endParaRPr lang="en-US" altLang="zh-CN" sz="1400" dirty="0">
               <a:latin typeface="+mn-ea"/>
             </a:endParaRPr>
           </a:p>
@@ -25458,16 +23225,10 @@
               <a:buNone/>
             </a:pPr>
             <a:r>
-              <a:rPr lang="zh-CN" altLang="en-US" sz="1400" dirty="0" smtClean="0">
-                <a:latin typeface="+mn-ea"/>
-              </a:rPr>
-              <a:t>核心</a:t>
-            </a:r>
-            <a:r>
               <a:rPr lang="zh-CN" altLang="en-US" sz="1400" dirty="0">
                 <a:latin typeface="+mn-ea"/>
               </a:rPr>
-              <a:t>区域偏离会导致情绪能量无法有效疏导，相当于 “无效敲击”。</a:t>
+              <a:t>核心区域偏离会导致情绪能量无法有效疏导，相当于 “无效敲击”。</a:t>
             </a:r>
           </a:p>
           <a:p>
@@ -25481,6 +23242,33 @@
           </a:p>
         </p:txBody>
       </p:sp>
+      <p:pic>
+        <p:nvPicPr>
+          <p:cNvPr id="9" name="图片 8"/>
+          <p:cNvPicPr>
+            <a:picLocks noChangeAspect="1"/>
+          </p:cNvPicPr>
+          <p:nvPr/>
+        </p:nvPicPr>
+        <p:blipFill>
+          <a:blip r:embed="rId2"/>
+          <a:stretch>
+            <a:fillRect/>
+          </a:stretch>
+        </p:blipFill>
+        <p:spPr>
+          <a:xfrm>
+            <a:off x="10077450" y="5250561"/>
+            <a:ext cx="1507998" cy="1507998"/>
+          </a:xfrm>
+          <a:prstGeom prst="rect">
+            <a:avLst/>
+          </a:prstGeom>
+          <a:effectLst>
+            <a:softEdge rad="127000"/>
+          </a:effectLst>
+        </p:spPr>
+      </p:pic>
     </p:spTree>
     <p:extLst>
       <p:ext uri="{BB962C8B-B14F-4D97-AF65-F5344CB8AC3E}">
@@ -25491,13 +23279,6 @@
   <p:clrMapOvr>
     <a:masterClrMapping/>
   </p:clrMapOvr>
-  <p:timing>
-    <p:tnLst>
-      <p:par>
-        <p:cTn id="1" dur="indefinite" restart="never" nodeType="tmRoot"/>
-      </p:par>
-    </p:tnLst>
-  </p:timing>
 </p:sld>
 </file>
 
@@ -25595,29 +23376,16 @@
             </a:r>
             <a:r>
               <a:rPr lang="zh-CN" altLang="en-US" sz="4400" dirty="0"/>
-              <a:t>心理自助</a:t>
-            </a:r>
-            <a:r>
-              <a:rPr lang="zh-CN" altLang="en-US" sz="4400" dirty="0" smtClean="0"/>
-              <a:t>操的关键</a:t>
+              <a:t>心理自助操的关键技巧（</a:t>
+            </a:r>
+            <a:r>
+              <a:rPr lang="en-US" altLang="zh-CN" sz="4400" dirty="0"/>
+              <a:t>3</a:t>
             </a:r>
             <a:r>
               <a:rPr lang="zh-CN" altLang="en-US" sz="4400" dirty="0"/>
-              <a:t>技巧</a:t>
-            </a:r>
-            <a:r>
-              <a:rPr lang="zh-CN" altLang="en-US" sz="4400" dirty="0" smtClean="0"/>
-              <a:t>（</a:t>
-            </a:r>
-            <a:r>
-              <a:rPr lang="en-US" altLang="zh-CN" sz="4400" dirty="0" smtClean="0"/>
-              <a:t>3</a:t>
-            </a:r>
-            <a:r>
-              <a:rPr lang="zh-CN" altLang="en-US" sz="4400" dirty="0" smtClean="0"/>
               <a:t>）</a:t>
             </a:r>
-            <a:endParaRPr lang="zh-CN" altLang="en-US" sz="4400" dirty="0"/>
           </a:p>
         </p:txBody>
       </p:sp>
@@ -25651,22 +23419,16 @@
               <a:buNone/>
             </a:pPr>
             <a:r>
-              <a:rPr lang="en-US" altLang="zh-CN" b="1" dirty="0" smtClean="0">
+              <a:rPr lang="en-US" altLang="zh-CN" b="1" dirty="0">
                 <a:latin typeface="+mn-ea"/>
               </a:rPr>
               <a:t>1</a:t>
             </a:r>
             <a:r>
-              <a:rPr lang="zh-CN" altLang="en-US" b="1" dirty="0" smtClean="0">
-                <a:latin typeface="+mn-ea"/>
-              </a:rPr>
-              <a:t>、情绪</a:t>
-            </a:r>
-            <a:r>
               <a:rPr lang="zh-CN" altLang="en-US" b="1" dirty="0">
                 <a:latin typeface="+mn-ea"/>
               </a:rPr>
-              <a:t>强度未下降？</a:t>
+              <a:t>、情绪强度未下降？</a:t>
             </a:r>
           </a:p>
           <a:p>
@@ -25712,31 +23474,19 @@
               <a:rPr lang="zh-CN" altLang="en-US" dirty="0">
                 <a:latin typeface="+mn-ea"/>
               </a:rPr>
-              <a:t>增加 “腋下” 和 “锁骨” 穴位的敲击次数（</a:t>
-            </a:r>
-            <a:r>
-              <a:rPr lang="zh-CN" altLang="en-US" dirty="0" smtClean="0">
-                <a:latin typeface="+mn-ea"/>
-              </a:rPr>
-              <a:t>各</a:t>
-            </a:r>
-            <a:r>
-              <a:rPr lang="en-US" altLang="zh-CN" dirty="0" smtClean="0">
+              <a:t>增加 “腋下” 和 “锁骨” 穴位的敲击次数（各</a:t>
+            </a:r>
+            <a:r>
+              <a:rPr lang="en-US" altLang="zh-CN" dirty="0">
                 <a:latin typeface="+mn-ea"/>
               </a:rPr>
               <a:t>10</a:t>
             </a:r>
             <a:r>
-              <a:rPr lang="zh-CN" altLang="en-US" dirty="0" smtClean="0">
-                <a:latin typeface="+mn-ea"/>
-              </a:rPr>
-              <a:t>次</a:t>
-            </a:r>
-            <a:r>
               <a:rPr lang="zh-CN" altLang="en-US" dirty="0">
                 <a:latin typeface="+mn-ea"/>
               </a:rPr>
-              <a:t>），这两个穴位更易疏导深层情绪。</a:t>
+              <a:t>次），这两个穴位更易疏导深层情绪。</a:t>
             </a:r>
           </a:p>
           <a:p>
@@ -25744,22 +23494,16 @@
               <a:buNone/>
             </a:pPr>
             <a:r>
-              <a:rPr lang="en-US" altLang="zh-CN" b="1" dirty="0" smtClean="0">
+              <a:rPr lang="en-US" altLang="zh-CN" b="1" dirty="0">
                 <a:latin typeface="+mn-ea"/>
               </a:rPr>
               <a:t>2</a:t>
             </a:r>
             <a:r>
-              <a:rPr lang="zh-CN" altLang="en-US" b="1" dirty="0" smtClean="0">
-                <a:latin typeface="+mn-ea"/>
-              </a:rPr>
-              <a:t>、伴随</a:t>
-            </a:r>
-            <a:r>
               <a:rPr lang="zh-CN" altLang="en-US" b="1" dirty="0">
                 <a:latin typeface="+mn-ea"/>
               </a:rPr>
-              <a:t>躯体不适（如胃痛、手抖）？</a:t>
+              <a:t>、伴随躯体不适（如胃痛、手抖）？</a:t>
             </a:r>
           </a:p>
           <a:p>
@@ -25790,22 +23534,16 @@
               <a:buNone/>
             </a:pPr>
             <a:r>
-              <a:rPr lang="en-US" altLang="zh-CN" b="1" dirty="0" smtClean="0">
+              <a:rPr lang="en-US" altLang="zh-CN" b="1" dirty="0">
                 <a:latin typeface="+mn-ea"/>
               </a:rPr>
               <a:t>3</a:t>
             </a:r>
             <a:r>
-              <a:rPr lang="zh-CN" altLang="en-US" b="1" dirty="0" smtClean="0">
-                <a:latin typeface="+mn-ea"/>
-              </a:rPr>
-              <a:t>、多次</a:t>
-            </a:r>
-            <a:r>
               <a:rPr lang="zh-CN" altLang="en-US" b="1" dirty="0">
                 <a:latin typeface="+mn-ea"/>
               </a:rPr>
-              <a:t>循环后仍无改善？</a:t>
+              <a:t>、多次循环后仍无改善？</a:t>
             </a:r>
           </a:p>
           <a:p>
@@ -26252,49 +23990,25 @@
               <a:rPr lang="en-US" altLang="zh-CN" i="1" dirty="0">
                 <a:latin typeface="+mn-ea"/>
               </a:rPr>
-              <a:t>- </a:t>
-            </a:r>
-            <a:r>
-              <a:rPr lang="en-US" altLang="zh-CN" i="1" dirty="0" smtClean="0">
-                <a:latin typeface="+mn-ea"/>
-              </a:rPr>
-              <a:t>EFT</a:t>
-            </a:r>
-            <a:r>
-              <a:rPr lang="zh-CN" altLang="en-US" i="1" dirty="0" smtClean="0">
+              <a:t>- EFT</a:t>
+            </a:r>
+            <a:r>
+              <a:rPr lang="zh-CN" altLang="en-US" i="1" dirty="0">
                 <a:latin typeface="+mn-ea"/>
               </a:rPr>
               <a:t>是</a:t>
             </a:r>
             <a:r>
-              <a:rPr lang="zh-CN" altLang="en-US" b="1" i="1" dirty="0" smtClean="0">
-                <a:latin typeface="+mn-ea"/>
-              </a:rPr>
-              <a:t>情绪</a:t>
-            </a:r>
-            <a:r>
               <a:rPr lang="zh-CN" altLang="en-US" b="1" i="1" dirty="0">
                 <a:latin typeface="+mn-ea"/>
               </a:rPr>
-              <a:t>缓解辅助</a:t>
-            </a:r>
-            <a:r>
-              <a:rPr lang="zh-CN" altLang="en-US" b="1" i="1" dirty="0" smtClean="0">
-                <a:latin typeface="+mn-ea"/>
-              </a:rPr>
-              <a:t>工具</a:t>
-            </a:r>
-            <a:r>
-              <a:rPr lang="zh-CN" altLang="en-US" i="1" dirty="0" smtClean="0">
-                <a:latin typeface="+mn-ea"/>
-              </a:rPr>
-              <a:t>，</a:t>
+              <a:t>情绪缓解辅助工具</a:t>
             </a:r>
             <a:r>
               <a:rPr lang="zh-CN" altLang="en-US" i="1" dirty="0">
                 <a:latin typeface="+mn-ea"/>
               </a:rPr>
-              <a:t>不能替代专业心理治疗，若情绪问题严重（如影响正常生活、有极端想法），请及时寻求心理咨询师或医生帮助。</a:t>
+              <a:t>，不能替代专业心理治疗，若情绪问题严重（如影响正常生活、有极端想法），请及时寻求心理咨询师或医生帮助。</a:t>
             </a:r>
           </a:p>
           <a:p>
@@ -26327,13 +24041,6 @@
   <p:clrMapOvr>
     <a:masterClrMapping/>
   </p:clrMapOvr>
-  <p:timing>
-    <p:tnLst>
-      <p:par>
-        <p:cTn id="1" dur="indefinite" restart="never" nodeType="tmRoot"/>
-      </p:par>
-    </p:tnLst>
-  </p:timing>
 </p:sld>
 </file>
 
@@ -26932,13 +24639,6 @@
   <p:clrMapOvr>
     <a:masterClrMapping/>
   </p:clrMapOvr>
-  <p:timing>
-    <p:tnLst>
-      <p:par>
-        <p:cTn id="1" dur="indefinite" restart="never" nodeType="tmRoot"/>
-      </p:par>
-    </p:tnLst>
-  </p:timing>
 </p:sld>
 </file>
 
@@ -26993,63 +24693,27 @@
           <a:p>
             <a:pPr algn="ctr"/>
             <a:r>
-              <a:rPr lang="zh-CN" altLang="en-US" sz="4400" dirty="0" smtClean="0"/>
+              <a:rPr lang="zh-CN" altLang="en-US" sz="4400" dirty="0"/>
               <a:t>音乐</a:t>
             </a:r>
             <a:r>
-              <a:rPr lang="en-US" altLang="zh-CN" sz="4400" dirty="0" smtClean="0"/>
+              <a:rPr lang="en-US" altLang="zh-CN" sz="4400" dirty="0"/>
               <a:t>EFT</a:t>
             </a:r>
             <a:r>
               <a:rPr lang="zh-CN" altLang="en-US" sz="4400" dirty="0"/>
-              <a:t>心理自助</a:t>
-            </a:r>
-            <a:r>
-              <a:rPr lang="zh-CN" altLang="en-US" sz="4400" dirty="0" smtClean="0"/>
-              <a:t>操</a:t>
-            </a:r>
-            <a:r>
-              <a:rPr lang="en-US" altLang="zh-CN" sz="4400" dirty="0" smtClean="0"/>
-              <a:t/>
+              <a:t>心理自助操</a:t>
             </a:r>
             <a:br>
-              <a:rPr lang="en-US" altLang="zh-CN" sz="4400" dirty="0" smtClean="0"/>
+              <a:rPr lang="en-US" altLang="zh-CN" sz="4400" dirty="0"/>
             </a:br>
             <a:r>
-              <a:rPr lang="zh-CN" altLang="en-US" sz="4400" dirty="0" smtClean="0"/>
+              <a:rPr lang="zh-CN" altLang="en-US" sz="4400" dirty="0"/>
               <a:t>感谢您的关注！</a:t>
             </a:r>
-            <a:endParaRPr lang="zh-CN" altLang="en-US" sz="4400" dirty="0"/>
           </a:p>
         </p:txBody>
       </p:sp>
-      <p:pic>
-        <p:nvPicPr>
-          <p:cNvPr id="9" name="图片 8"/>
-          <p:cNvPicPr>
-            <a:picLocks noChangeAspect="1"/>
-          </p:cNvPicPr>
-          <p:nvPr/>
-        </p:nvPicPr>
-        <p:blipFill>
-          <a:blip r:embed="rId2"/>
-          <a:stretch>
-            <a:fillRect/>
-          </a:stretch>
-        </p:blipFill>
-        <p:spPr>
-          <a:xfrm>
-            <a:off x="4651172" y="2386160"/>
-            <a:ext cx="2895749" cy="2895749"/>
-          </a:xfrm>
-          <a:prstGeom prst="rect">
-            <a:avLst/>
-          </a:prstGeom>
-          <a:effectLst>
-            <a:softEdge rad="127000"/>
-          </a:effectLst>
-        </p:spPr>
-      </p:pic>
       <p:sp>
         <p:nvSpPr>
           <p:cNvPr id="10" name="内容占位符 2">
@@ -27080,13 +24744,13 @@
               <a:buNone/>
             </a:pPr>
             <a:r>
-              <a:rPr lang="zh-CN" altLang="en-US" sz="1400" dirty="0" smtClean="0">
+              <a:rPr lang="zh-CN" altLang="en-US" sz="1400" dirty="0">
                 <a:latin typeface="+mn-ea"/>
               </a:rPr>
               <a:t>浥尘伙伴社团 </a:t>
             </a:r>
             <a:r>
-              <a:rPr lang="en-US" altLang="zh-CN" sz="1400" dirty="0" smtClean="0">
+              <a:rPr lang="en-US" altLang="zh-CN" sz="1400" dirty="0">
                 <a:latin typeface="+mn-ea"/>
               </a:rPr>
               <a:t>/ 2026.1</a:t>
@@ -27097,6 +24761,36 @@
           </a:p>
         </p:txBody>
       </p:sp>
+      <p:pic>
+        <p:nvPicPr>
+          <p:cNvPr id="4" name="图片 3">
+            <a:extLst>
+              <a:ext uri="{FF2B5EF4-FFF2-40B4-BE49-F238E27FC236}">
+                <a16:creationId xmlns:a16="http://schemas.microsoft.com/office/drawing/2014/main" id="{5D4A1A7E-F71D-77E4-DC09-0880DD9172C4}"/>
+              </a:ext>
+            </a:extLst>
+          </p:cNvPr>
+          <p:cNvPicPr>
+            <a:picLocks noChangeAspect="1"/>
+          </p:cNvPicPr>
+          <p:nvPr/>
+        </p:nvPicPr>
+        <p:blipFill>
+          <a:blip r:embed="rId2"/>
+          <a:stretch>
+            <a:fillRect/>
+          </a:stretch>
+        </p:blipFill>
+        <p:spPr>
+          <a:xfrm>
+            <a:off x="4867428" y="2544613"/>
+            <a:ext cx="2457143" cy="2457143"/>
+          </a:xfrm>
+          <a:prstGeom prst="rect">
+            <a:avLst/>
+          </a:prstGeom>
+        </p:spPr>
+      </p:pic>
     </p:spTree>
     <p:extLst>
       <p:ext uri="{BB962C8B-B14F-4D97-AF65-F5344CB8AC3E}">
@@ -27107,13 +24801,6 @@
   <p:clrMapOvr>
     <a:masterClrMapping/>
   </p:clrMapOvr>
-  <p:timing>
-    <p:tnLst>
-      <p:par>
-        <p:cTn id="1" dur="indefinite" restart="never" nodeType="tmRoot"/>
-      </p:par>
-    </p:tnLst>
-  </p:timing>
 </p:sld>
 </file>
 
@@ -27740,16 +25427,10 @@
               <a:t>EFT</a:t>
             </a:r>
             <a:r>
-              <a:rPr lang="zh-CN" altLang="en-US" sz="1800" b="1" dirty="0" smtClean="0">
-                <a:latin typeface="+mn-ea"/>
-              </a:rPr>
-              <a:t>中数个</a:t>
-            </a:r>
-            <a:r>
               <a:rPr lang="zh-CN" altLang="en-US" sz="1800" b="1" dirty="0">
                 <a:latin typeface="+mn-ea"/>
               </a:rPr>
-              <a:t>被敲击的穴位是精心选择的，对应着人体多条经络，当按照顺序敲击时，基本可以阻断常见的各种应激反应和激烈情绪，让人体快速地放松下来。</a:t>
+              <a:t>中数个被敲击的穴位是精心选择的，对应着人体多条经络，当按照顺序敲击时，基本可以阻断常见的各种应激反应和激烈情绪，让人体快速地放松下来。</a:t>
             </a:r>
           </a:p>
           <a:p>
@@ -27773,13 +25454,6 @@
   <p:clrMapOvr>
     <a:masterClrMapping/>
   </p:clrMapOvr>
-  <p:timing>
-    <p:tnLst>
-      <p:par>
-        <p:cTn id="1" dur="indefinite" restart="never" nodeType="tmRoot"/>
-      </p:par>
-    </p:tnLst>
-  </p:timing>
 </p:sld>
 </file>
 
@@ -27878,14 +25552,13 @@
               <a:t>情绪释放技术</a:t>
             </a:r>
             <a:r>
-              <a:rPr lang="en-US" altLang="zh-CN" sz="4400" dirty="0" smtClean="0"/>
+              <a:rPr lang="en-US" altLang="zh-CN" sz="4400" dirty="0"/>
               <a:t>EFT</a:t>
             </a:r>
             <a:r>
-              <a:rPr lang="zh-CN" altLang="en-US" sz="4400" dirty="0" smtClean="0"/>
+              <a:rPr lang="zh-CN" altLang="en-US" sz="4400" dirty="0"/>
               <a:t>的科学依据</a:t>
             </a:r>
-            <a:endParaRPr lang="zh-CN" altLang="en-US" sz="4400" dirty="0"/>
           </a:p>
         </p:txBody>
       </p:sp>
@@ -27919,25 +25592,13 @@
               <a:buNone/>
             </a:pPr>
             <a:r>
-              <a:rPr lang="zh-CN" altLang="en-US" sz="1800" b="1" dirty="0" smtClean="0">
-                <a:latin typeface="+mn-ea"/>
-              </a:rPr>
-              <a:t>人体</a:t>
-            </a:r>
-            <a:r>
               <a:rPr lang="zh-CN" altLang="en-US" sz="1800" b="1" dirty="0">
                 <a:latin typeface="+mn-ea"/>
               </a:rPr>
-              <a:t>的</a:t>
-            </a:r>
-            <a:r>
-              <a:rPr lang="zh-CN" altLang="en-US" sz="1800" b="1" dirty="0" smtClean="0">
-                <a:latin typeface="+mn-ea"/>
-              </a:rPr>
-              <a:t>“战时指挥中心”</a:t>
-            </a:r>
-            <a:r>
-              <a:rPr lang="en-US" altLang="zh-CN" sz="1800" b="1" dirty="0" smtClean="0">
+              <a:t>人体的“战时指挥中心”</a:t>
+            </a:r>
+            <a:r>
+              <a:rPr lang="en-US" altLang="zh-CN" sz="1800" b="1" dirty="0">
                 <a:latin typeface="+mn-ea"/>
               </a:rPr>
               <a:t>——</a:t>
@@ -27954,64 +25615,10 @@
               <a:buNone/>
             </a:pPr>
             <a:r>
-              <a:rPr lang="zh-CN" altLang="en-US" sz="1800" dirty="0" smtClean="0">
-                <a:latin typeface="+mn-ea"/>
-              </a:rPr>
-              <a:t>大脑杏仁核是</a:t>
-            </a:r>
-            <a:r>
               <a:rPr lang="zh-CN" altLang="en-US" sz="1800" dirty="0">
                 <a:latin typeface="+mn-ea"/>
               </a:rPr>
-              <a:t>恐惧记忆建立的神经中枢</a:t>
-            </a:r>
-            <a:r>
-              <a:rPr lang="zh-CN" altLang="en-US" sz="1800" dirty="0" smtClean="0">
-                <a:latin typeface="+mn-ea"/>
-              </a:rPr>
-              <a:t>。杏仁核</a:t>
-            </a:r>
-            <a:r>
-              <a:rPr lang="zh-CN" altLang="en-US" sz="1800" dirty="0">
-                <a:latin typeface="+mn-ea"/>
-              </a:rPr>
-              <a:t>在人的各种情绪反应（如愤怒、焦躁、惊恐等）中充当了指挥所的角色</a:t>
-            </a:r>
-            <a:r>
-              <a:rPr lang="zh-CN" altLang="en-US" sz="1800" dirty="0" smtClean="0">
-                <a:latin typeface="+mn-ea"/>
-              </a:rPr>
-              <a:t>。杏仁核</a:t>
-            </a:r>
-            <a:r>
-              <a:rPr lang="zh-CN" altLang="en-US" sz="1800" dirty="0">
-                <a:latin typeface="+mn-ea"/>
-              </a:rPr>
-              <a:t>相当于我们人体的报警器</a:t>
-            </a:r>
-            <a:r>
-              <a:rPr lang="zh-CN" altLang="en-US" sz="1800" dirty="0" smtClean="0">
-                <a:latin typeface="+mn-ea"/>
-              </a:rPr>
-              <a:t>。人体</a:t>
-            </a:r>
-            <a:r>
-              <a:rPr lang="zh-CN" altLang="en-US" sz="1800" dirty="0">
-                <a:latin typeface="+mn-ea"/>
-              </a:rPr>
-              <a:t>的指挥系统发生改变，杏仁核会变大并向身体发出战斗动员令</a:t>
-            </a:r>
-            <a:r>
-              <a:rPr lang="zh-CN" altLang="en-US" sz="1800" dirty="0" smtClean="0">
-                <a:latin typeface="+mn-ea"/>
-              </a:rPr>
-              <a:t>。人体</a:t>
-            </a:r>
-            <a:r>
-              <a:rPr lang="zh-CN" altLang="en-US" sz="1800" dirty="0">
-                <a:latin typeface="+mn-ea"/>
-              </a:rPr>
-              <a:t>立即会分泌出比平时更多的可的松</a:t>
+              <a:t>大脑杏仁核是恐惧记忆建立的神经中枢。杏仁核在人的各种情绪反应（如愤怒、焦躁、惊恐等）中充当了指挥所的角色。杏仁核相当于我们人体的报警器。人体的指挥系统发生改变，杏仁核会变大并向身体发出战斗动员令。人体立即会分泌出比平时更多的可的松</a:t>
             </a:r>
             <a:r>
               <a:rPr lang="en-US" altLang="zh-CN" sz="1800" dirty="0">
@@ -28222,118 +25829,66 @@
               <a:buNone/>
             </a:pPr>
             <a:r>
-              <a:rPr lang="zh-CN" altLang="en-US" sz="1800" b="1" dirty="0" smtClean="0">
-                <a:latin typeface="+mn-ea"/>
-              </a:rPr>
-              <a:t>人体</a:t>
-            </a:r>
-            <a:r>
               <a:rPr lang="zh-CN" altLang="en-US" sz="1800" b="1" dirty="0">
                 <a:latin typeface="+mn-ea"/>
               </a:rPr>
-              <a:t>的紧张</a:t>
-            </a:r>
-            <a:r>
-              <a:rPr lang="zh-CN" altLang="en-US" sz="1800" b="1" dirty="0" smtClean="0">
-                <a:latin typeface="+mn-ea"/>
-              </a:rPr>
-              <a:t>素</a:t>
-            </a:r>
-            <a:r>
-              <a:rPr lang="en-US" altLang="zh-CN" sz="1800" b="1" dirty="0" smtClean="0">
+              <a:t>人体的紧张素</a:t>
+            </a:r>
+            <a:r>
+              <a:rPr lang="en-US" altLang="zh-CN" sz="1800" b="1" dirty="0">
                 <a:latin typeface="+mn-ea"/>
               </a:rPr>
               <a:t>——</a:t>
             </a:r>
             <a:r>
-              <a:rPr lang="zh-CN" altLang="en-US" sz="1800" b="1" dirty="0" smtClean="0">
+              <a:rPr lang="zh-CN" altLang="en-US" sz="1800" b="1" dirty="0">
                 <a:latin typeface="+mn-ea"/>
               </a:rPr>
               <a:t>可的松</a:t>
             </a:r>
-            <a:endParaRPr lang="zh-CN" altLang="en-US" sz="1800" b="1" dirty="0">
+          </a:p>
+          <a:p>
+            <a:pPr marL="0" indent="0">
+              <a:buNone/>
+            </a:pPr>
+            <a:r>
+              <a:rPr lang="zh-CN" altLang="en-US" sz="1800" dirty="0">
+                <a:latin typeface="+mn-ea"/>
+              </a:rPr>
+              <a:t>人体的可的松是肾上腺分泌的一种激素。可的松是受杏仁核调遣的“部队”，负责把危险的信号传达给全身的各个器官，并负责重新按照战时状态分配人体的资源。可的松在人体一天当中的分泌量是不一样的。早上醒来以后可的松的水平就高起来，晚上睡觉就下降到很低。</a:t>
+            </a:r>
+          </a:p>
+          <a:p>
+            <a:pPr marL="0" indent="0">
+              <a:lnSpc>
+                <a:spcPts val="1800"/>
+              </a:lnSpc>
+              <a:buNone/>
+            </a:pPr>
+            <a:r>
+              <a:rPr lang="zh-CN" altLang="en-US" sz="1800" dirty="0">
+                <a:latin typeface="+mn-ea"/>
+              </a:rPr>
+              <a:t>人在放松的时候可的松的分泌量比较低，</a:t>
+            </a:r>
+            <a:endParaRPr lang="en-US" altLang="zh-CN" sz="1800" dirty="0">
               <a:latin typeface="+mn-ea"/>
             </a:endParaRPr>
           </a:p>
           <a:p>
             <a:pPr marL="0" indent="0">
-              <a:buNone/>
-            </a:pPr>
-            <a:r>
-              <a:rPr lang="zh-CN" altLang="en-US" sz="1800" dirty="0" smtClean="0">
-                <a:latin typeface="+mn-ea"/>
-              </a:rPr>
-              <a:t>人体</a:t>
-            </a:r>
+              <a:lnSpc>
+                <a:spcPts val="1800"/>
+              </a:lnSpc>
+              <a:buNone/>
+            </a:pPr>
             <a:r>
               <a:rPr lang="zh-CN" altLang="en-US" sz="1800" dirty="0">
                 <a:latin typeface="+mn-ea"/>
               </a:rPr>
-              <a:t>的可的松是肾上腺分泌的一种激素</a:t>
-            </a:r>
-            <a:r>
-              <a:rPr lang="zh-CN" altLang="en-US" sz="1800" dirty="0" smtClean="0">
-                <a:latin typeface="+mn-ea"/>
-              </a:rPr>
-              <a:t>。可的松</a:t>
-            </a:r>
-            <a:r>
-              <a:rPr lang="zh-CN" altLang="en-US" sz="1800" dirty="0">
-                <a:latin typeface="+mn-ea"/>
-              </a:rPr>
-              <a:t>是受杏仁核调遣的“部队”，负责把危险的信号传达给全身的各个器官，并负责重新按照战时状态分配人体的资源</a:t>
-            </a:r>
-            <a:r>
-              <a:rPr lang="zh-CN" altLang="en-US" sz="1800" dirty="0" smtClean="0">
-                <a:latin typeface="+mn-ea"/>
-              </a:rPr>
-              <a:t>。可的松</a:t>
-            </a:r>
-            <a:r>
-              <a:rPr lang="zh-CN" altLang="en-US" sz="1800" dirty="0">
-                <a:latin typeface="+mn-ea"/>
-              </a:rPr>
-              <a:t>在人体一天当中的分泌量是不一样的</a:t>
-            </a:r>
-            <a:r>
-              <a:rPr lang="zh-CN" altLang="en-US" sz="1800" dirty="0" smtClean="0">
-                <a:latin typeface="+mn-ea"/>
-              </a:rPr>
-              <a:t>。早上</a:t>
-            </a:r>
-            <a:r>
-              <a:rPr lang="zh-CN" altLang="en-US" sz="1800" dirty="0">
-                <a:latin typeface="+mn-ea"/>
-              </a:rPr>
-              <a:t>醒来以后可的松的水平就高起来，晚上睡觉就下降到很低。</a:t>
-            </a:r>
-          </a:p>
-          <a:p>
-            <a:pPr marL="0" indent="0">
-              <a:lnSpc>
-                <a:spcPts val="1800"/>
-              </a:lnSpc>
-              <a:buNone/>
-            </a:pPr>
-            <a:r>
-              <a:rPr lang="zh-CN" altLang="en-US" sz="1800" dirty="0" smtClean="0">
-                <a:latin typeface="+mn-ea"/>
-              </a:rPr>
-              <a:t>人</a:t>
-            </a:r>
-            <a:r>
-              <a:rPr lang="zh-CN" altLang="en-US" sz="1800" dirty="0">
-                <a:latin typeface="+mn-ea"/>
-              </a:rPr>
-              <a:t>在放松的时候可的松的分泌量比较低</a:t>
-            </a:r>
-            <a:r>
-              <a:rPr lang="zh-CN" altLang="en-US" sz="1800" dirty="0" smtClean="0">
-                <a:latin typeface="+mn-ea"/>
-              </a:rPr>
-              <a:t>，</a:t>
-            </a:r>
-            <a:endParaRPr lang="en-US" altLang="zh-CN" sz="1800" dirty="0" smtClean="0">
+              <a:t>而感到心理压力大的时候可的松的分泌量就高。</a:t>
+            </a:r>
+            <a:endParaRPr lang="en-US" altLang="zh-CN" sz="1800" dirty="0">
               <a:latin typeface="+mn-ea"/>
             </a:endParaRPr>
           </a:p>
@@ -28345,45 +25900,10 @@
               <a:buNone/>
             </a:pPr>
             <a:r>
-              <a:rPr lang="zh-CN" altLang="en-US" sz="1800" dirty="0" smtClean="0">
-                <a:latin typeface="+mn-ea"/>
-              </a:rPr>
-              <a:t>而</a:t>
-            </a:r>
-            <a:r>
               <a:rPr lang="zh-CN" altLang="en-US" sz="1800" dirty="0">
                 <a:latin typeface="+mn-ea"/>
               </a:rPr>
-              <a:t>感到心理压力大的时候可的松的分泌量就高</a:t>
-            </a:r>
-            <a:r>
-              <a:rPr lang="zh-CN" altLang="en-US" sz="1800" dirty="0" smtClean="0">
-                <a:latin typeface="+mn-ea"/>
-              </a:rPr>
-              <a:t>。</a:t>
-            </a:r>
-            <a:endParaRPr lang="en-US" altLang="zh-CN" sz="1800" dirty="0" smtClean="0">
-              <a:latin typeface="+mn-ea"/>
-            </a:endParaRPr>
-          </a:p>
-          <a:p>
-            <a:pPr marL="0" indent="0">
-              <a:lnSpc>
-                <a:spcPts val="1800"/>
-              </a:lnSpc>
-              <a:buNone/>
-            </a:pPr>
-            <a:r>
-              <a:rPr lang="zh-CN" altLang="en-US" sz="1800" dirty="0" smtClean="0">
-                <a:latin typeface="+mn-ea"/>
-              </a:rPr>
-              <a:t>当</a:t>
-            </a:r>
-            <a:r>
-              <a:rPr lang="zh-CN" altLang="en-US" sz="1800" dirty="0">
-                <a:latin typeface="+mn-ea"/>
-              </a:rPr>
-              <a:t>针刺或按压穴位后，核磁共振观察到脑杏仁核即刻就缩小了。</a:t>
+              <a:t>当针刺或按压穴位后，核磁共振观察到脑杏仁核即刻就缩小了。</a:t>
             </a:r>
           </a:p>
           <a:p>
@@ -28432,13 +25952,6 @@
   <p:clrMapOvr>
     <a:masterClrMapping/>
   </p:clrMapOvr>
-  <p:timing>
-    <p:tnLst>
-      <p:par>
-        <p:cTn id="1" dur="indefinite" restart="never" nodeType="tmRoot"/>
-      </p:par>
-    </p:tnLst>
-  </p:timing>
 </p:sld>
 </file>
 
@@ -28535,14 +26048,13 @@
               <a:t>情绪释放技术</a:t>
             </a:r>
             <a:r>
-              <a:rPr lang="en-US" altLang="zh-CN" sz="4400" dirty="0" smtClean="0"/>
+              <a:rPr lang="en-US" altLang="zh-CN" sz="4400" dirty="0"/>
               <a:t>EFT</a:t>
             </a:r>
             <a:r>
-              <a:rPr lang="zh-CN" altLang="en-US" sz="4400" dirty="0" smtClean="0"/>
+              <a:rPr lang="zh-CN" altLang="en-US" sz="4400" dirty="0"/>
               <a:t>的应用范围</a:t>
             </a:r>
-            <a:endParaRPr lang="zh-CN" altLang="en-US" sz="4400" dirty="0"/>
           </a:p>
         </p:txBody>
       </p:sp>
@@ -28613,32 +26125,17 @@
               <a:buNone/>
             </a:pPr>
             <a:r>
-              <a:rPr lang="en-US" altLang="zh-CN" sz="1800" i="1" dirty="0" smtClean="0">
+              <a:rPr lang="en-US" altLang="zh-CN" sz="1800" i="1" dirty="0">
                 <a:latin typeface="+mn-ea"/>
               </a:rPr>
               <a:t>&gt;&gt;&gt; </a:t>
             </a:r>
             <a:r>
-              <a:rPr lang="zh-CN" altLang="en-US" sz="1800" i="1" dirty="0" smtClean="0">
-                <a:latin typeface="+mn-ea"/>
-              </a:rPr>
-              <a:t>创伤</a:t>
-            </a:r>
-            <a:r>
               <a:rPr lang="zh-CN" altLang="en-US" sz="1800" i="1" dirty="0">
                 <a:latin typeface="+mn-ea"/>
               </a:rPr>
-              <a:t>后压力心理障碍、童年虐待、性侵</a:t>
-            </a:r>
-            <a:r>
-              <a:rPr lang="zh-CN" altLang="en-US" sz="1800" i="1" dirty="0" smtClean="0">
-                <a:latin typeface="+mn-ea"/>
-              </a:rPr>
-              <a:t>事件</a:t>
-            </a:r>
-            <a:endParaRPr lang="zh-CN" altLang="en-US" sz="1800" i="1" dirty="0">
-              <a:latin typeface="+mn-ea"/>
-            </a:endParaRPr>
+              <a:t>创伤后压力心理障碍、童年虐待、性侵事件</a:t>
+            </a:r>
           </a:p>
           <a:p>
             <a:pPr marL="0" indent="0">
@@ -28647,7 +26144,7 @@
               </a:lnSpc>
               <a:buNone/>
             </a:pPr>
-            <a:endParaRPr lang="en-US" altLang="zh-CN" sz="1800" dirty="0" smtClean="0">
+            <a:endParaRPr lang="en-US" altLang="zh-CN" sz="1800" dirty="0">
               <a:effectLst>
                 <a:outerShdw blurRad="50800" dist="38100" dir="2700000" algn="tl" rotWithShape="0">
                   <a:prstClr val="black">
@@ -28666,19 +26163,6 @@
               <a:buNone/>
             </a:pPr>
             <a:r>
-              <a:rPr lang="en-US" altLang="zh-CN" sz="1800" dirty="0" smtClean="0">
-                <a:effectLst>
-                  <a:outerShdw blurRad="50800" dist="38100" dir="2700000" algn="tl" rotWithShape="0">
-                    <a:prstClr val="black">
-                      <a:alpha val="40000"/>
-                    </a:prstClr>
-                  </a:outerShdw>
-                </a:effectLst>
-                <a:latin typeface="+mn-ea"/>
-              </a:rPr>
-              <a:t>2</a:t>
-            </a:r>
-            <a:r>
               <a:rPr lang="en-US" altLang="zh-CN" sz="1800" dirty="0">
                 <a:effectLst>
                   <a:outerShdw blurRad="50800" dist="38100" dir="2700000" algn="tl" rotWithShape="0">
@@ -28689,7 +26173,7 @@
                 </a:effectLst>
                 <a:latin typeface="+mn-ea"/>
               </a:rPr>
-              <a:t>. </a:t>
+              <a:t>2. </a:t>
             </a:r>
             <a:r>
               <a:rPr lang="zh-CN" altLang="en-US" sz="1800" dirty="0">
@@ -28713,30 +26197,18 @@
               <a:buNone/>
             </a:pPr>
             <a:r>
-              <a:rPr lang="en-US" altLang="zh-CN" sz="1800" i="1" dirty="0" smtClean="0">
+              <a:rPr lang="en-US" altLang="zh-CN" sz="1800" i="1" dirty="0">
                 <a:latin typeface="+mn-ea"/>
               </a:rPr>
               <a:t>&gt;&gt;&gt; </a:t>
             </a:r>
             <a:r>
-              <a:rPr lang="zh-CN" altLang="en-US" sz="1800" i="1" dirty="0" smtClean="0">
-                <a:latin typeface="+mn-ea"/>
-              </a:rPr>
-              <a:t>焦虑</a:t>
-            </a:r>
-            <a:r>
               <a:rPr lang="zh-CN" altLang="en-US" sz="1800" i="1" dirty="0">
                 <a:latin typeface="+mn-ea"/>
               </a:rPr>
-              <a:t>、紧张压力、愤怒、自卑、悲伤等负面</a:t>
-            </a:r>
-            <a:r>
-              <a:rPr lang="zh-CN" altLang="en-US" sz="1800" i="1" dirty="0" smtClean="0">
-                <a:latin typeface="+mn-ea"/>
-              </a:rPr>
-              <a:t>情绪</a:t>
-            </a:r>
-            <a:endParaRPr lang="en-US" altLang="zh-CN" sz="1800" i="1" dirty="0" smtClean="0">
+              <a:t>焦虑、紧张压力、愤怒、自卑、悲伤等负面情绪</a:t>
+            </a:r>
+            <a:endParaRPr lang="en-US" altLang="zh-CN" sz="1800" i="1" dirty="0">
               <a:latin typeface="+mn-ea"/>
             </a:endParaRPr>
           </a:p>
@@ -28793,30 +26265,18 @@
               <a:buNone/>
             </a:pPr>
             <a:r>
-              <a:rPr lang="en-US" altLang="zh-CN" sz="1800" i="1" dirty="0" smtClean="0">
+              <a:rPr lang="en-US" altLang="zh-CN" sz="1800" i="1" dirty="0">
                 <a:latin typeface="+mn-ea"/>
               </a:rPr>
               <a:t>&gt;&gt;&gt; </a:t>
             </a:r>
             <a:r>
-              <a:rPr lang="zh-CN" altLang="en-US" sz="1800" i="1" dirty="0" smtClean="0">
-                <a:latin typeface="+mn-ea"/>
-              </a:rPr>
-              <a:t>网</a:t>
-            </a:r>
-            <a:r>
               <a:rPr lang="zh-CN" altLang="en-US" sz="1800" i="1" dirty="0">
                 <a:latin typeface="+mn-ea"/>
               </a:rPr>
-              <a:t>瘾、酒瘾、</a:t>
-            </a:r>
-            <a:r>
-              <a:rPr lang="zh-CN" altLang="en-US" sz="1800" i="1" dirty="0" smtClean="0">
-                <a:latin typeface="+mn-ea"/>
-              </a:rPr>
-              <a:t>毒瘾</a:t>
-            </a:r>
-            <a:endParaRPr lang="en-US" altLang="zh-CN" sz="1800" i="1" dirty="0" smtClean="0">
+              <a:t>网瘾、酒瘾、毒瘾</a:t>
+            </a:r>
+            <a:endParaRPr lang="en-US" altLang="zh-CN" sz="1800" i="1" dirty="0">
               <a:latin typeface="+mn-ea"/>
             </a:endParaRPr>
           </a:p>
@@ -28873,32 +26333,17 @@
               <a:buNone/>
             </a:pPr>
             <a:r>
-              <a:rPr lang="en-US" altLang="zh-CN" sz="1800" i="1" dirty="0" smtClean="0">
+              <a:rPr lang="en-US" altLang="zh-CN" sz="1800" i="1" dirty="0">
                 <a:latin typeface="+mn-ea"/>
               </a:rPr>
               <a:t>&gt;&gt;&gt; </a:t>
             </a:r>
             <a:r>
-              <a:rPr lang="zh-CN" altLang="en-US" sz="1800" i="1" dirty="0" smtClean="0">
-                <a:latin typeface="+mn-ea"/>
-              </a:rPr>
-              <a:t>恐</a:t>
-            </a:r>
-            <a:r>
               <a:rPr lang="zh-CN" altLang="en-US" sz="1800" i="1" dirty="0">
                 <a:latin typeface="+mn-ea"/>
               </a:rPr>
-              <a:t>高症、恐水症、幽闭</a:t>
-            </a:r>
-            <a:r>
-              <a:rPr lang="zh-CN" altLang="en-US" sz="1800" i="1" dirty="0" smtClean="0">
-                <a:latin typeface="+mn-ea"/>
-              </a:rPr>
-              <a:t>恐惧症</a:t>
-            </a:r>
-            <a:endParaRPr lang="zh-CN" altLang="en-US" sz="1800" i="1" dirty="0">
-              <a:latin typeface="+mn-ea"/>
-            </a:endParaRPr>
+              <a:t>恐高症、恐水症、幽闭恐惧症</a:t>
+            </a:r>
           </a:p>
         </p:txBody>
       </p:sp>
@@ -29134,30 +26579,18 @@
               <a:buNone/>
             </a:pPr>
             <a:r>
-              <a:rPr lang="en-US" altLang="zh-CN" sz="1800" i="1" dirty="0" smtClean="0">
+              <a:rPr lang="en-US" altLang="zh-CN" sz="1800" i="1" dirty="0">
                 <a:latin typeface="+mn-ea"/>
               </a:rPr>
               <a:t>&gt;&gt;&gt; </a:t>
             </a:r>
             <a:r>
-              <a:rPr lang="zh-CN" altLang="en-US" sz="1800" i="1" dirty="0" smtClean="0">
-                <a:latin typeface="+mn-ea"/>
-              </a:rPr>
-              <a:t>抑郁症</a:t>
-            </a:r>
-            <a:r>
               <a:rPr lang="zh-CN" altLang="en-US" sz="1800" i="1" dirty="0">
                 <a:latin typeface="+mn-ea"/>
               </a:rPr>
-              <a:t>、躁郁症、强迫</a:t>
-            </a:r>
-            <a:r>
-              <a:rPr lang="zh-CN" altLang="en-US" sz="1800" i="1" dirty="0" smtClean="0">
-                <a:latin typeface="+mn-ea"/>
-              </a:rPr>
-              <a:t>症</a:t>
-            </a:r>
-            <a:endParaRPr lang="en-US" altLang="zh-CN" sz="1800" i="1" dirty="0" smtClean="0">
+              <a:t>抑郁症、躁郁症、强迫症</a:t>
+            </a:r>
+            <a:endParaRPr lang="en-US" altLang="zh-CN" sz="1800" i="1" dirty="0">
               <a:latin typeface="+mn-ea"/>
             </a:endParaRPr>
           </a:p>
@@ -29215,30 +26648,18 @@
               <a:buNone/>
             </a:pPr>
             <a:r>
-              <a:rPr lang="en-US" altLang="zh-CN" sz="1800" i="1" dirty="0" smtClean="0">
+              <a:rPr lang="en-US" altLang="zh-CN" sz="1800" i="1" dirty="0">
                 <a:latin typeface="+mn-ea"/>
               </a:rPr>
               <a:t>&gt;&gt;&gt; </a:t>
             </a:r>
             <a:r>
-              <a:rPr lang="zh-CN" altLang="en-US" sz="1800" i="1" dirty="0" smtClean="0">
-                <a:latin typeface="+mn-ea"/>
-              </a:rPr>
-              <a:t>偏头痛</a:t>
-            </a:r>
-            <a:r>
               <a:rPr lang="zh-CN" altLang="en-US" sz="1800" i="1" dirty="0">
                 <a:latin typeface="+mn-ea"/>
               </a:rPr>
-              <a:t>、内分泌失调、性功能障碍、失眠、胸闷、身体</a:t>
-            </a:r>
-            <a:r>
-              <a:rPr lang="zh-CN" altLang="en-US" sz="1800" i="1" dirty="0" smtClean="0">
-                <a:latin typeface="+mn-ea"/>
-              </a:rPr>
-              <a:t>疼痛</a:t>
-            </a:r>
-            <a:endParaRPr lang="en-US" altLang="zh-CN" sz="1800" i="1" dirty="0" smtClean="0">
+              <a:t>偏头痛、内分泌失调、性功能障碍、失眠、胸闷、身体疼痛</a:t>
+            </a:r>
+            <a:endParaRPr lang="en-US" altLang="zh-CN" sz="1800" i="1" dirty="0">
               <a:latin typeface="+mn-ea"/>
             </a:endParaRPr>
           </a:p>
@@ -29296,32 +26717,17 @@
               <a:buNone/>
             </a:pPr>
             <a:r>
-              <a:rPr lang="en-US" altLang="zh-CN" sz="1800" i="1" dirty="0" smtClean="0">
+              <a:rPr lang="en-US" altLang="zh-CN" sz="1800" i="1" dirty="0">
                 <a:latin typeface="+mn-ea"/>
               </a:rPr>
               <a:t>&gt;&gt;&gt; </a:t>
             </a:r>
             <a:r>
-              <a:rPr lang="zh-CN" altLang="en-US" sz="1800" i="1" dirty="0" smtClean="0">
-                <a:latin typeface="+mn-ea"/>
-              </a:rPr>
-              <a:t>提高</a:t>
-            </a:r>
-            <a:r>
               <a:rPr lang="zh-CN" altLang="en-US" sz="1800" i="1" dirty="0">
                 <a:latin typeface="+mn-ea"/>
               </a:rPr>
-              <a:t>效率、增强内在力量，提升运动</a:t>
-            </a:r>
-            <a:r>
-              <a:rPr lang="zh-CN" altLang="en-US" sz="1800" i="1" dirty="0" smtClean="0">
-                <a:latin typeface="+mn-ea"/>
-              </a:rPr>
-              <a:t>表现</a:t>
-            </a:r>
-            <a:endParaRPr lang="zh-CN" altLang="en-US" sz="1800" i="1" dirty="0">
-              <a:latin typeface="+mn-ea"/>
-            </a:endParaRPr>
+              <a:t>提高效率、增强内在力量，提升运动表现</a:t>
+            </a:r>
           </a:p>
         </p:txBody>
       </p:sp>
@@ -29335,13 +26741,6 @@
   <p:clrMapOvr>
     <a:masterClrMapping/>
   </p:clrMapOvr>
-  <p:timing>
-    <p:tnLst>
-      <p:par>
-        <p:cTn id="1" dur="indefinite" restart="never" nodeType="tmRoot"/>
-      </p:par>
-    </p:tnLst>
-  </p:timing>
 </p:sld>
 </file>
 
@@ -29399,14 +26798,13 @@
               <a:t>情绪释放技术</a:t>
             </a:r>
             <a:r>
-              <a:rPr lang="en-US" altLang="zh-CN" sz="4400" dirty="0" smtClean="0"/>
+              <a:rPr lang="en-US" altLang="zh-CN" sz="4400" dirty="0"/>
               <a:t>EFT</a:t>
             </a:r>
             <a:r>
-              <a:rPr lang="zh-CN" altLang="en-US" sz="4400" dirty="0" smtClean="0"/>
+              <a:rPr lang="zh-CN" altLang="en-US" sz="4400" dirty="0"/>
               <a:t>的真实案例</a:t>
             </a:r>
-            <a:endParaRPr lang="zh-CN" altLang="en-US" sz="4400" dirty="0"/>
           </a:p>
         </p:txBody>
       </p:sp>
@@ -29458,46 +26856,28 @@
               <a:buNone/>
             </a:pPr>
             <a:r>
-              <a:rPr lang="en-US" altLang="zh-CN" sz="1800" dirty="0" smtClean="0">
+              <a:rPr lang="en-US" altLang="zh-CN" sz="1800" dirty="0">
                 <a:latin typeface="+mn-ea"/>
               </a:rPr>
               <a:t>2010</a:t>
             </a:r>
             <a:r>
-              <a:rPr lang="zh-CN" altLang="en-US" sz="1800" dirty="0" smtClean="0">
-                <a:latin typeface="+mn-ea"/>
-              </a:rPr>
-              <a:t>年</a:t>
-            </a:r>
-            <a:r>
               <a:rPr lang="zh-CN" altLang="en-US" sz="1800" dirty="0">
                 <a:latin typeface="+mn-ea"/>
               </a:rPr>
-              <a:t>有研究报告</a:t>
-            </a:r>
-            <a:r>
-              <a:rPr lang="zh-CN" altLang="en-US" sz="1800" dirty="0" smtClean="0">
-                <a:latin typeface="+mn-ea"/>
-              </a:rPr>
-              <a:t>了</a:t>
-            </a:r>
-            <a:r>
-              <a:rPr lang="en-US" altLang="zh-CN" sz="1800" dirty="0" smtClean="0">
+              <a:t>年有研究报告了</a:t>
+            </a:r>
+            <a:r>
+              <a:rPr lang="en-US" altLang="zh-CN" sz="1800" dirty="0">
                 <a:latin typeface="+mn-ea"/>
               </a:rPr>
               <a:t>3</a:t>
             </a:r>
             <a:r>
-              <a:rPr lang="zh-CN" altLang="en-US" sz="1800" dirty="0" smtClean="0">
-                <a:latin typeface="+mn-ea"/>
-              </a:rPr>
-              <a:t>起</a:t>
-            </a:r>
-            <a:r>
               <a:rPr lang="zh-CN" altLang="en-US" sz="1800" dirty="0">
                 <a:latin typeface="+mn-ea"/>
               </a:rPr>
-              <a:t>通过 </a:t>
+              <a:t>起通过 </a:t>
             </a:r>
             <a:r>
               <a:rPr lang="en-US" altLang="zh-CN" sz="1800" dirty="0">
@@ -29509,79 +26889,43 @@
               <a:rPr lang="zh-CN" altLang="en-US" sz="1800" dirty="0">
                 <a:latin typeface="+mn-ea"/>
               </a:rPr>
-              <a:t>治疗车祸引发的创伤后应激障碍及急性应激症状的案例。</a:t>
-            </a:r>
-            <a:r>
-              <a:rPr lang="zh-CN" altLang="en-US" sz="1800" dirty="0" smtClean="0">
-                <a:latin typeface="+mn-ea"/>
-              </a:rPr>
-              <a:t>这</a:t>
-            </a:r>
-            <a:r>
-              <a:rPr lang="en-US" altLang="zh-CN" sz="1800" dirty="0" smtClean="0">
+              <a:t>治疗车祸引发的创伤后应激障碍及急性应激症状的案例。这</a:t>
+            </a:r>
+            <a:r>
+              <a:rPr lang="en-US" altLang="zh-CN" sz="1800" dirty="0">
                 <a:latin typeface="+mn-ea"/>
               </a:rPr>
               <a:t>3</a:t>
             </a:r>
             <a:r>
-              <a:rPr lang="zh-CN" altLang="en-US" sz="1800" dirty="0" smtClean="0">
-                <a:latin typeface="+mn-ea"/>
-              </a:rPr>
-              <a:t>个</a:t>
-            </a:r>
-            <a:r>
               <a:rPr lang="zh-CN" altLang="en-US" sz="1800" dirty="0">
                 <a:latin typeface="+mn-ea"/>
               </a:rPr>
-              <a:t>案例的治疗时间节点各不相同，分别在车祸发生后立即治疗、车祸后两周治疗以及车祸</a:t>
-            </a:r>
-            <a:r>
-              <a:rPr lang="zh-CN" altLang="en-US" sz="1800" dirty="0" smtClean="0">
-                <a:latin typeface="+mn-ea"/>
-              </a:rPr>
-              <a:t>后</a:t>
-            </a:r>
-            <a:r>
-              <a:rPr lang="en-US" altLang="zh-CN" sz="1800" dirty="0" smtClean="0">
+              <a:t>个案例的治疗时间节点各不相同，分别在车祸发生后立即治疗、车祸后两周治疗以及车祸后</a:t>
+            </a:r>
+            <a:r>
+              <a:rPr lang="en-US" altLang="zh-CN" sz="1800" dirty="0">
                 <a:latin typeface="+mn-ea"/>
               </a:rPr>
               <a:t>11</a:t>
             </a:r>
             <a:r>
-              <a:rPr lang="zh-CN" altLang="en-US" sz="1800" dirty="0" smtClean="0">
-                <a:latin typeface="+mn-ea"/>
-              </a:rPr>
-              <a:t>个</a:t>
-            </a:r>
-            <a:r>
               <a:rPr lang="zh-CN" altLang="en-US" sz="1800" dirty="0">
                 <a:latin typeface="+mn-ea"/>
               </a:rPr>
-              <a:t>月治疗。治疗中仅采用单</a:t>
-            </a:r>
-            <a:r>
-              <a:rPr lang="zh-CN" altLang="en-US" sz="1800" dirty="0" smtClean="0">
-                <a:latin typeface="+mn-ea"/>
-              </a:rPr>
-              <a:t>次</a:t>
-            </a:r>
-            <a:r>
-              <a:rPr lang="en-US" altLang="zh-CN" sz="1800" dirty="0" smtClean="0">
+              <a:t>个月治疗。治疗中仅采用单次</a:t>
+            </a:r>
+            <a:r>
+              <a:rPr lang="en-US" altLang="zh-CN" sz="1800" dirty="0">
                 <a:latin typeface="+mn-ea"/>
               </a:rPr>
               <a:t>EFT</a:t>
             </a:r>
             <a:r>
-              <a:rPr lang="zh-CN" altLang="en-US" sz="1800" dirty="0" smtClean="0">
-                <a:latin typeface="+mn-ea"/>
-              </a:rPr>
-              <a:t>干预</a:t>
-            </a:r>
-            <a:r>
               <a:rPr lang="zh-CN" altLang="en-US" sz="1800" dirty="0">
                 <a:latin typeface="+mn-ea"/>
               </a:rPr>
-              <a:t>，最终均有效缓解了患者的创伤后应激障碍及相关应激症状。该案例也体现出 </a:t>
+              <a:t>干预，最终均有效缓解了患者的创伤后应激障碍及相关应激症状。该案例也体现出 </a:t>
             </a:r>
             <a:r>
               <a:rPr lang="en-US" altLang="zh-CN" sz="1800" dirty="0">
@@ -29831,45 +27175,6 @@
               <a:buNone/>
             </a:pPr>
             <a:r>
-              <a:rPr lang="zh-CN" altLang="en-US" sz="1800" dirty="0" smtClean="0">
-                <a:effectLst>
-                  <a:outerShdw blurRad="50800" dist="38100" dir="2700000" algn="tl" rotWithShape="0">
-                    <a:prstClr val="black">
-                      <a:alpha val="40000"/>
-                    </a:prstClr>
-                  </a:outerShdw>
-                </a:effectLst>
-                <a:latin typeface="+mn-ea"/>
-              </a:rPr>
-              <a:t>英国特殊教育学校</a:t>
-            </a:r>
-            <a:r>
-              <a:rPr lang="en-US" altLang="zh-CN" sz="1800" dirty="0" smtClean="0">
-                <a:effectLst>
-                  <a:outerShdw blurRad="50800" dist="38100" dir="2700000" algn="tl" rotWithShape="0">
-                    <a:prstClr val="black">
-                      <a:alpha val="40000"/>
-                    </a:prstClr>
-                  </a:outerShdw>
-                </a:effectLst>
-                <a:latin typeface="+mn-ea"/>
-              </a:rPr>
-              <a:t>15</a:t>
-            </a:r>
-            <a:r>
-              <a:rPr lang="zh-CN" altLang="en-US" sz="1800" dirty="0" smtClean="0">
-                <a:effectLst>
-                  <a:outerShdw blurRad="50800" dist="38100" dir="2700000" algn="tl" rotWithShape="0">
-                    <a:prstClr val="black">
-                      <a:alpha val="40000"/>
-                    </a:prstClr>
-                  </a:outerShdw>
-                </a:effectLst>
-                <a:latin typeface="+mn-ea"/>
-              </a:rPr>
-              <a:t>岁</a:t>
-            </a:r>
-            <a:r>
               <a:rPr lang="zh-CN" altLang="en-US" sz="1800" dirty="0">
                 <a:effectLst>
                   <a:outerShdw blurRad="50800" dist="38100" dir="2700000" algn="tl" rotWithShape="0">
@@ -29880,7 +27185,33 @@
                 </a:effectLst>
                 <a:latin typeface="+mn-ea"/>
               </a:rPr>
-              <a:t>学生焦虑缓解案例</a:t>
+              <a:t>英国特殊教育学校</a:t>
+            </a:r>
+            <a:r>
+              <a:rPr lang="en-US" altLang="zh-CN" sz="1800" dirty="0">
+                <a:effectLst>
+                  <a:outerShdw blurRad="50800" dist="38100" dir="2700000" algn="tl" rotWithShape="0">
+                    <a:prstClr val="black">
+                      <a:alpha val="40000"/>
+                    </a:prstClr>
+                  </a:outerShdw>
+                </a:effectLst>
+                <a:latin typeface="+mn-ea"/>
+              </a:rPr>
+              <a:t>15</a:t>
+            </a:r>
+            <a:r>
+              <a:rPr lang="zh-CN" altLang="en-US" sz="1800" dirty="0">
+                <a:effectLst>
+                  <a:outerShdw blurRad="50800" dist="38100" dir="2700000" algn="tl" rotWithShape="0">
+                    <a:prstClr val="black">
+                      <a:alpha val="40000"/>
+                    </a:prstClr>
+                  </a:outerShdw>
+                </a:effectLst>
+                <a:latin typeface="+mn-ea"/>
+              </a:rPr>
+              <a:t>岁学生焦虑缓解案例</a:t>
             </a:r>
           </a:p>
           <a:p>
@@ -29891,109 +27222,67 @@
               <a:rPr lang="zh-CN" altLang="en-US" sz="1800" dirty="0">
                 <a:latin typeface="+mn-ea"/>
               </a:rPr>
-              <a:t>英国奥德赛之家特殊教育学校的一</a:t>
-            </a:r>
-            <a:r>
-              <a:rPr lang="zh-CN" altLang="en-US" sz="1800" dirty="0" smtClean="0">
-                <a:latin typeface="+mn-ea"/>
-              </a:rPr>
-              <a:t>名</a:t>
-            </a:r>
-            <a:r>
-              <a:rPr lang="en-US" altLang="zh-CN" sz="1800" dirty="0" smtClean="0">
+              <a:t>英国奥德赛之家特殊教育学校的一名</a:t>
+            </a:r>
+            <a:r>
+              <a:rPr lang="en-US" altLang="zh-CN" sz="1800" dirty="0">
                 <a:latin typeface="+mn-ea"/>
               </a:rPr>
               <a:t>15</a:t>
             </a:r>
             <a:r>
-              <a:rPr lang="zh-CN" altLang="en-US" sz="1800" dirty="0" smtClean="0">
-                <a:latin typeface="+mn-ea"/>
-              </a:rPr>
-              <a:t>岁</a:t>
-            </a:r>
-            <a:r>
               <a:rPr lang="zh-CN" altLang="en-US" sz="1800" dirty="0">
                 <a:latin typeface="+mn-ea"/>
               </a:rPr>
-              <a:t>学生曾突发严重焦虑。</a:t>
-            </a:r>
-            <a:r>
-              <a:rPr lang="en-US" altLang="zh-CN" sz="1800" dirty="0" smtClean="0">
+              <a:t>岁学生曾突发严重焦虑。</a:t>
+            </a:r>
+            <a:r>
+              <a:rPr lang="en-US" altLang="zh-CN" sz="1800" dirty="0">
                 <a:latin typeface="+mn-ea"/>
               </a:rPr>
               <a:t>EFT</a:t>
             </a:r>
             <a:r>
-              <a:rPr lang="zh-CN" altLang="en-US" sz="1800" dirty="0" smtClean="0">
-                <a:latin typeface="+mn-ea"/>
-              </a:rPr>
-              <a:t>治疗</a:t>
-            </a:r>
-            <a:r>
               <a:rPr lang="zh-CN" altLang="en-US" sz="1800" dirty="0">
                 <a:latin typeface="+mn-ea"/>
               </a:rPr>
-              <a:t>师伊芙先采用代理敲击的方式，很快就让该学生的情绪平复下来。几分钟后，学生开始自主进行无声敲击，</a:t>
-            </a:r>
-            <a:r>
-              <a:rPr lang="en-US" altLang="zh-CN" sz="1800" dirty="0" smtClean="0">
+              <a:t>治疗师伊芙先采用代理敲击的方式，很快就让该学生的情绪平复下来。几分钟后，学生开始自主进行无声敲击，</a:t>
+            </a:r>
+            <a:r>
+              <a:rPr lang="en-US" altLang="zh-CN" sz="1800" dirty="0">
                 <a:latin typeface="+mn-ea"/>
               </a:rPr>
               <a:t>20</a:t>
             </a:r>
             <a:r>
-              <a:rPr lang="zh-CN" altLang="en-US" sz="1800" dirty="0" smtClean="0">
-                <a:latin typeface="+mn-ea"/>
-              </a:rPr>
-              <a:t>分钟</a:t>
-            </a:r>
-            <a:r>
               <a:rPr lang="zh-CN" altLang="en-US" sz="1800" dirty="0">
                 <a:latin typeface="+mn-ea"/>
               </a:rPr>
-              <a:t>后便恢复平稳状态并重返课堂。后续治疗中，治疗师还运用乐高敲击等适配特殊学生</a:t>
-            </a:r>
-            <a:r>
-              <a:rPr lang="zh-CN" altLang="en-US" sz="1800" dirty="0" smtClean="0">
-                <a:latin typeface="+mn-ea"/>
-              </a:rPr>
-              <a:t>的</a:t>
-            </a:r>
-            <a:r>
-              <a:rPr lang="en-US" altLang="zh-CN" sz="1800" dirty="0" smtClean="0">
+              <a:t>分钟后便恢复平稳状态并重返课堂。后续治疗中，治疗师还运用乐高敲击等适配特殊学生的</a:t>
+            </a:r>
+            <a:r>
+              <a:rPr lang="en-US" altLang="zh-CN" sz="1800" dirty="0">
                 <a:latin typeface="+mn-ea"/>
               </a:rPr>
               <a:t>EFT</a:t>
             </a:r>
             <a:r>
-              <a:rPr lang="zh-CN" altLang="en-US" sz="1800" dirty="0" smtClean="0">
-                <a:latin typeface="+mn-ea"/>
-              </a:rPr>
-              <a:t>技巧</a:t>
-            </a:r>
-            <a:r>
               <a:rPr lang="zh-CN" altLang="en-US" sz="1800" dirty="0">
                 <a:latin typeface="+mn-ea"/>
               </a:rPr>
-              <a:t>开展持续辅导。最终该学生的情绪稳定性大幅提升，对学校学习和活动的参与度也显著提高。该校也反馈，</a:t>
-            </a:r>
-            <a:r>
-              <a:rPr lang="en-US" altLang="zh-CN" sz="1800" dirty="0" smtClean="0">
+              <a:t>技巧开展持续辅导。最终该学生的情绪稳定性大幅提升，对学校学习和活动的参与度也显著提高。该校也反馈，</a:t>
+            </a:r>
+            <a:r>
+              <a:rPr lang="en-US" altLang="zh-CN" sz="1800" dirty="0">
                 <a:latin typeface="+mn-ea"/>
               </a:rPr>
               <a:t>EFT</a:t>
             </a:r>
             <a:r>
-              <a:rPr lang="zh-CN" altLang="en-US" sz="1800" dirty="0" smtClean="0">
-                <a:latin typeface="+mn-ea"/>
-              </a:rPr>
-              <a:t>这</a:t>
-            </a:r>
-            <a:r>
               <a:rPr lang="zh-CN" altLang="en-US" sz="1800" dirty="0">
                 <a:latin typeface="+mn-ea"/>
               </a:rPr>
-              <a:t>类简单易操作的方式，对有情绪和感官障碍的特殊学生十分适用。</a:t>
+              <a:t>这类简单易操作的方式，对有情绪和感官障碍的特殊学生十分适用。</a:t>
             </a:r>
           </a:p>
         </p:txBody>
@@ -30008,13 +27297,6 @@
   <p:clrMapOvr>
     <a:masterClrMapping/>
   </p:clrMapOvr>
-  <p:timing>
-    <p:tnLst>
-      <p:par>
-        <p:cTn id="1" dur="indefinite" restart="never" nodeType="tmRoot"/>
-      </p:par>
-    </p:tnLst>
-  </p:timing>
 </p:sld>
 </file>
 
@@ -30102,14 +27384,13 @@
               <a:t>情绪释放技术</a:t>
             </a:r>
             <a:r>
-              <a:rPr lang="en-US" altLang="zh-CN" sz="4400" dirty="0" smtClean="0"/>
+              <a:rPr lang="en-US" altLang="zh-CN" sz="4400" dirty="0"/>
               <a:t>EFT</a:t>
             </a:r>
             <a:r>
-              <a:rPr lang="zh-CN" altLang="en-US" sz="4400" dirty="0" smtClean="0"/>
+              <a:rPr lang="zh-CN" altLang="en-US" sz="4400" dirty="0"/>
               <a:t>易学易用</a:t>
             </a:r>
-            <a:endParaRPr lang="zh-CN" altLang="en-US" sz="4400" dirty="0"/>
           </a:p>
         </p:txBody>
       </p:sp>
@@ -30143,89 +27424,47 @@
               <a:buNone/>
             </a:pPr>
             <a:r>
-              <a:rPr lang="zh-CN" altLang="en-US" sz="1800" dirty="0" smtClean="0">
+              <a:rPr lang="zh-CN" altLang="en-US" sz="1800" dirty="0">
                 <a:latin typeface="+mn-ea"/>
               </a:rPr>
               <a:t>情绪释放技术</a:t>
             </a:r>
             <a:r>
-              <a:rPr lang="en-US" altLang="zh-CN" sz="1800" dirty="0" smtClean="0">
+              <a:rPr lang="en-US" altLang="zh-CN" sz="1800" dirty="0">
                 <a:latin typeface="+mn-ea"/>
               </a:rPr>
               <a:t>EFT</a:t>
             </a:r>
             <a:r>
-              <a:rPr lang="zh-CN" altLang="en-US" sz="1800" dirty="0" smtClean="0">
+              <a:rPr lang="zh-CN" altLang="en-US" sz="1800" dirty="0">
                 <a:latin typeface="+mn-ea"/>
               </a:rPr>
               <a:t>，是一个固定程式，它包含</a:t>
             </a:r>
             <a:r>
-              <a:rPr lang="zh-CN" altLang="en-US" sz="1800" b="1" dirty="0" smtClean="0">
+              <a:rPr lang="zh-CN" altLang="en-US" sz="1800" b="1" dirty="0">
                 <a:latin typeface="+mn-ea"/>
               </a:rPr>
               <a:t>“一句提示语”</a:t>
             </a:r>
             <a:r>
-              <a:rPr lang="zh-CN" altLang="en-US" sz="1800" dirty="0" smtClean="0">
+              <a:rPr lang="zh-CN" altLang="en-US" sz="1800" dirty="0">
                 <a:latin typeface="+mn-ea"/>
               </a:rPr>
               <a:t>和</a:t>
             </a:r>
             <a:r>
-              <a:rPr lang="zh-CN" altLang="en-US" sz="1800" b="1" dirty="0" smtClean="0">
+              <a:rPr lang="zh-CN" altLang="en-US" sz="1800" b="1" dirty="0">
                 <a:latin typeface="+mn-ea"/>
               </a:rPr>
               <a:t>“弹十几个穴位”</a:t>
             </a:r>
             <a:r>
-              <a:rPr lang="zh-CN" altLang="en-US" sz="1800" dirty="0" smtClean="0">
+              <a:rPr lang="zh-CN" altLang="en-US" sz="1800" dirty="0">
                 <a:latin typeface="+mn-ea"/>
               </a:rPr>
               <a:t>。</a:t>
             </a:r>
-            <a:endParaRPr lang="en-US" altLang="zh-CN" sz="1800" dirty="0" smtClean="0">
-              <a:latin typeface="+mn-ea"/>
-            </a:endParaRPr>
-          </a:p>
-          <a:p>
-            <a:pPr marL="0" indent="0">
-              <a:buNone/>
-            </a:pPr>
-            <a:r>
-              <a:rPr lang="zh-CN" altLang="en-US" sz="1800" b="1" dirty="0" smtClean="0">
-                <a:latin typeface="+mn-ea"/>
-              </a:rPr>
-              <a:t>十分钟</a:t>
-            </a:r>
-            <a:r>
-              <a:rPr lang="zh-CN" altLang="en-US" sz="1800" dirty="0" smtClean="0">
-                <a:latin typeface="+mn-ea"/>
-              </a:rPr>
-              <a:t>用它去消除一种痛苦记忆，解开一个心结可能只需要不到一个小时。</a:t>
-            </a:r>
-            <a:endParaRPr lang="en-US" altLang="zh-CN" sz="1800" dirty="0" smtClean="0">
-              <a:latin typeface="+mn-ea"/>
-            </a:endParaRPr>
-          </a:p>
-          <a:p>
-            <a:pPr marL="0" indent="0">
-              <a:buNone/>
-            </a:pPr>
-            <a:r>
-              <a:rPr lang="zh-CN" altLang="en-US" sz="1800" dirty="0" smtClean="0">
-                <a:latin typeface="+mn-ea"/>
-              </a:rPr>
-              <a:t>无成本，无痛，无药物，无副作用的绿色疗法。</a:t>
-            </a:r>
-            <a:endParaRPr lang="en-US" altLang="zh-CN" sz="1800" dirty="0" smtClean="0">
-              <a:latin typeface="+mn-ea"/>
-            </a:endParaRPr>
-          </a:p>
-          <a:p>
-            <a:pPr marL="0" indent="0">
-              <a:buNone/>
-            </a:pPr>
             <a:endParaRPr lang="en-US" altLang="zh-CN" sz="1800" dirty="0">
               <a:latin typeface="+mn-ea"/>
             </a:endParaRPr>
@@ -30235,47 +27474,17 @@
               <a:buNone/>
             </a:pPr>
             <a:r>
-              <a:rPr lang="zh-CN" altLang="en-US" sz="1800" dirty="0" smtClean="0">
-                <a:latin typeface="+mn-ea"/>
-              </a:rPr>
-              <a:t>“接受和爱自己”的自我暗示。</a:t>
-            </a:r>
-            <a:endParaRPr lang="en-US" altLang="zh-CN" sz="1800" dirty="0" smtClean="0">
-              <a:latin typeface="+mn-ea"/>
-            </a:endParaRPr>
-          </a:p>
-          <a:p>
-            <a:pPr marL="0" indent="0">
-              <a:buNone/>
-            </a:pPr>
-            <a:r>
-              <a:rPr lang="zh-CN" altLang="en-US" sz="1800" dirty="0" smtClean="0">
-                <a:latin typeface="+mn-ea"/>
-              </a:rPr>
-              <a:t>“我无条件地，完完全全接受和认可自己，爱自己。”</a:t>
-            </a:r>
-            <a:endParaRPr lang="en-US" altLang="zh-CN" sz="1800" dirty="0" smtClean="0">
-              <a:latin typeface="+mn-ea"/>
-            </a:endParaRPr>
-          </a:p>
-          <a:p>
-            <a:pPr marL="0" indent="0">
-              <a:buNone/>
-            </a:pPr>
-            <a:r>
-              <a:rPr lang="zh-CN" altLang="en-US" sz="1800" dirty="0" smtClean="0">
-                <a:latin typeface="+mn-ea"/>
-              </a:rPr>
-              <a:t>注意：“接受和爱自己”不等于“认命”。</a:t>
-            </a:r>
-            <a:endParaRPr lang="en-US" altLang="zh-CN" sz="1800" dirty="0" smtClean="0">
-              <a:latin typeface="+mn-ea"/>
-            </a:endParaRPr>
-          </a:p>
-          <a:p>
-            <a:pPr marL="0" indent="0">
-              <a:buNone/>
-            </a:pPr>
+              <a:rPr lang="zh-CN" altLang="en-US" sz="1800" b="1" dirty="0">
+                <a:latin typeface="+mn-ea"/>
+              </a:rPr>
+              <a:t>十分钟</a:t>
+            </a:r>
+            <a:r>
+              <a:rPr lang="zh-CN" altLang="en-US" sz="1800" dirty="0">
+                <a:latin typeface="+mn-ea"/>
+              </a:rPr>
+              <a:t>用它去消除一种痛苦记忆，解开一个心结可能只需要不到一个小时。</a:t>
+            </a:r>
             <a:endParaRPr lang="en-US" altLang="zh-CN" sz="1800" dirty="0">
               <a:latin typeface="+mn-ea"/>
             </a:endParaRPr>
@@ -30285,19 +27494,91 @@
               <a:buNone/>
             </a:pPr>
             <a:r>
-              <a:rPr lang="zh-CN" altLang="en-US" sz="1800" dirty="0" smtClean="0">
+              <a:rPr lang="zh-CN" altLang="en-US" sz="1800" dirty="0">
+                <a:latin typeface="+mn-ea"/>
+              </a:rPr>
+              <a:t>无成本，无痛，无药物，无副作用的绿色疗法。</a:t>
+            </a:r>
+            <a:endParaRPr lang="en-US" altLang="zh-CN" sz="1800" dirty="0">
+              <a:latin typeface="+mn-ea"/>
+            </a:endParaRPr>
+          </a:p>
+          <a:p>
+            <a:pPr marL="0" indent="0">
+              <a:buNone/>
+            </a:pPr>
+            <a:endParaRPr lang="en-US" altLang="zh-CN" sz="1800" dirty="0">
+              <a:latin typeface="+mn-ea"/>
+            </a:endParaRPr>
+          </a:p>
+          <a:p>
+            <a:pPr marL="0" indent="0">
+              <a:buNone/>
+            </a:pPr>
+            <a:r>
+              <a:rPr lang="zh-CN" altLang="en-US" sz="1800" dirty="0">
+                <a:latin typeface="+mn-ea"/>
+              </a:rPr>
+              <a:t>“接受和爱自己”的自我暗示。</a:t>
+            </a:r>
+            <a:endParaRPr lang="en-US" altLang="zh-CN" sz="1800" dirty="0">
+              <a:latin typeface="+mn-ea"/>
+            </a:endParaRPr>
+          </a:p>
+          <a:p>
+            <a:pPr marL="0" indent="0">
+              <a:buNone/>
+            </a:pPr>
+            <a:r>
+              <a:rPr lang="zh-CN" altLang="en-US" sz="1800" dirty="0">
+                <a:latin typeface="+mn-ea"/>
+              </a:rPr>
+              <a:t>“我无条件地，完完全全接受和认可自己，爱自己。”</a:t>
+            </a:r>
+            <a:endParaRPr lang="en-US" altLang="zh-CN" sz="1800" dirty="0">
+              <a:latin typeface="+mn-ea"/>
+            </a:endParaRPr>
+          </a:p>
+          <a:p>
+            <a:pPr marL="0" indent="0">
+              <a:buNone/>
+            </a:pPr>
+            <a:r>
+              <a:rPr lang="zh-CN" altLang="en-US" sz="1800" dirty="0">
+                <a:latin typeface="+mn-ea"/>
+              </a:rPr>
+              <a:t>注意：“接受和爱自己”不等于“认命”。</a:t>
+            </a:r>
+            <a:endParaRPr lang="en-US" altLang="zh-CN" sz="1800" dirty="0">
+              <a:latin typeface="+mn-ea"/>
+            </a:endParaRPr>
+          </a:p>
+          <a:p>
+            <a:pPr marL="0" indent="0">
+              <a:buNone/>
+            </a:pPr>
+            <a:endParaRPr lang="en-US" altLang="zh-CN" sz="1800" dirty="0">
+              <a:latin typeface="+mn-ea"/>
+            </a:endParaRPr>
+          </a:p>
+          <a:p>
+            <a:pPr marL="0" indent="0">
+              <a:buNone/>
+            </a:pPr>
+            <a:r>
+              <a:rPr lang="zh-CN" altLang="en-US" sz="1800" dirty="0">
                 <a:latin typeface="+mn-ea"/>
               </a:rPr>
               <a:t>音乐</a:t>
             </a:r>
             <a:r>
-              <a:rPr lang="en-US" altLang="zh-CN" sz="1800" dirty="0" smtClean="0">
+              <a:rPr lang="en-US" altLang="zh-CN" sz="1800" dirty="0">
                 <a:latin typeface="+mn-ea"/>
               </a:rPr>
               <a:t>+EFT+</a:t>
             </a:r>
             <a:r>
-              <a:rPr lang="zh-CN" altLang="en-US" sz="1800" dirty="0" smtClean="0">
+              <a:rPr lang="zh-CN" altLang="en-US" sz="1800" dirty="0">
                 <a:latin typeface="+mn-ea"/>
               </a:rPr>
               <a:t>心理疗愈</a:t>
@@ -30306,22 +27587,16 @@
               <a:rPr lang="en-US" altLang="zh-CN" sz="1800" dirty="0">
                 <a:latin typeface="+mn-ea"/>
               </a:rPr>
-              <a:t> </a:t>
-            </a:r>
-            <a:r>
-              <a:rPr lang="en-US" altLang="zh-CN" sz="1800" dirty="0" smtClean="0">
-                <a:latin typeface="+mn-ea"/>
-              </a:rPr>
-              <a:t>&gt; </a:t>
-            </a:r>
-            <a:r>
-              <a:rPr lang="zh-CN" altLang="en-US" sz="1800" dirty="0" smtClean="0">
+              <a:t> &gt; </a:t>
+            </a:r>
+            <a:r>
+              <a:rPr lang="zh-CN" altLang="en-US" sz="1800" dirty="0">
                 <a:latin typeface="+mn-ea"/>
               </a:rPr>
               <a:t>一般</a:t>
             </a:r>
             <a:r>
-              <a:rPr lang="en-US" altLang="zh-CN" sz="1800" dirty="0" smtClean="0">
+              <a:rPr lang="en-US" altLang="zh-CN" sz="1800" dirty="0">
                 <a:latin typeface="+mn-ea"/>
               </a:rPr>
               <a:t>EFT</a:t>
@@ -30526,7 +27801,7 @@
               <a:buNone/>
             </a:pPr>
             <a:r>
-              <a:rPr lang="zh-CN" altLang="en-US" sz="3200" dirty="0" smtClean="0">
+              <a:rPr lang="zh-CN" altLang="en-US" sz="3200" dirty="0">
                 <a:effectLst>
                   <a:outerShdw blurRad="38100" dist="38100" dir="2700000" algn="tl">
                     <a:srgbClr val="000000">
@@ -30539,7 +27814,7 @@
               <a:t>音乐</a:t>
             </a:r>
             <a:r>
-              <a:rPr lang="en-US" altLang="zh-CN" sz="3200" dirty="0" smtClean="0">
+              <a:rPr lang="en-US" altLang="zh-CN" sz="3200" dirty="0">
                 <a:effectLst>
                   <a:outerShdw blurRad="38100" dist="38100" dir="2700000" algn="tl">
                     <a:srgbClr val="000000">
@@ -30552,7 +27827,7 @@
               <a:t>EFT</a:t>
             </a:r>
             <a:r>
-              <a:rPr lang="zh-CN" altLang="en-US" sz="3200" dirty="0" smtClean="0">
+              <a:rPr lang="zh-CN" altLang="en-US" sz="3200" dirty="0">
                 <a:effectLst>
                   <a:outerShdw blurRad="38100" dist="38100" dir="2700000" algn="tl">
                     <a:srgbClr val="000000">
@@ -30564,16 +27839,6 @@
               </a:rPr>
               <a:t>心理自助操</a:t>
             </a:r>
-            <a:endParaRPr lang="zh-CN" altLang="en-US" sz="3200" dirty="0">
-              <a:effectLst>
-                <a:outerShdw blurRad="38100" dist="38100" dir="2700000" algn="tl">
-                  <a:srgbClr val="000000">
-                    <a:alpha val="43137"/>
-                  </a:srgbClr>
-                </a:outerShdw>
-              </a:effectLst>
-              <a:latin typeface="+mn-ea"/>
-            </a:endParaRPr>
           </a:p>
         </p:txBody>
       </p:sp>
@@ -30620,13 +27885,6 @@
   <p:clrMapOvr>
     <a:masterClrMapping/>
   </p:clrMapOvr>
-  <p:timing>
-    <p:tnLst>
-      <p:par>
-        <p:cTn id="1" dur="indefinite" restart="never" nodeType="tmRoot"/>
-      </p:par>
-    </p:tnLst>
-  </p:timing>
 </p:sld>
 </file>
 
@@ -30795,19 +28053,7 @@
               <a:rPr lang="zh-CN" altLang="en-US" sz="1800" dirty="0">
                 <a:latin typeface="+mn-ea"/>
               </a:rPr>
-              <a:t>心理自助操前，需要</a:t>
-            </a:r>
-            <a:r>
-              <a:rPr lang="zh-CN" altLang="en-US" sz="1800" dirty="0" smtClean="0">
-                <a:latin typeface="+mn-ea"/>
-              </a:rPr>
-              <a:t>帮助人员</a:t>
-            </a:r>
-            <a:r>
-              <a:rPr lang="zh-CN" altLang="en-US" sz="1800" dirty="0">
-                <a:latin typeface="+mn-ea"/>
-              </a:rPr>
-              <a:t>聚焦情绪状态，将当前最大的情绪困扰或伤痛回忆起来，例如与亲人分离的场景、人际关系紧张的状态等，保持让自己不愉快的情绪状态。</a:t>
+              <a:t>心理自助操前，需要帮助人员聚焦情绪状态，将当前最大的情绪困扰或伤痛回忆起来，例如与亲人分离的场景、人际关系紧张的状态等，保持让自己不愉快的情绪状态。</a:t>
             </a:r>
           </a:p>
         </p:txBody>
@@ -31276,13 +28522,6 @@
   <p:clrMapOvr>
     <a:masterClrMapping/>
   </p:clrMapOvr>
-  <p:timing>
-    <p:tnLst>
-      <p:par>
-        <p:cTn id="1" dur="indefinite" restart="never" nodeType="tmRoot"/>
-      </p:par>
-    </p:tnLst>
-  </p:timing>
 </p:sld>
 </file>
 
